--- a/Chrysler_Brand_Design_Vision.pptx
+++ b/Chrysler_Brand_Design_Vision.pptx
@@ -6129,7 +6129,7 @@
                 </a:solidFill>
                 <a:latin typeface="Arial"/>
               </a:rPr>
-              <a:t>[ Minimal caption placeholder ]</a:t>
+              <a:t>Designed around people — flexible, calm, effortlessly useful.</a:t>
             </a:r>
           </a:p>
         </p:txBody>
@@ -6295,7 +6295,7 @@
                 </a:solidFill>
                 <a:latin typeface="Arial"/>
               </a:rPr>
-              <a:t>ARROW · PURPOSE</a:t>
+              <a:t>CLEVER ACCESSIBILITY</a:t>
             </a:r>
           </a:p>
         </p:txBody>
@@ -6369,7 +6369,7 @@
                 </a:solidFill>
                 <a:latin typeface="Arial"/>
               </a:rPr>
-              <a:t>[ Executive summary — one sentence on the role this vehicle plays in the vision. ]</a:t>
+              <a:t>Chrysler's accessible entry — clever, design-led, and attainable from around $24K.</a:t>
             </a:r>
           </a:p>
         </p:txBody>
@@ -6496,7 +6496,7 @@
                 </a:solidFill>
                 <a:latin typeface="Arial"/>
               </a:rPr>
-              <a:t>Accessible premium</a:t>
+              <a:t>Smart &amp; Simple</a:t>
             </a:r>
           </a:p>
           <a:p>
@@ -6508,7 +6508,7 @@
                 </a:solidFill>
                 <a:latin typeface="Arial"/>
               </a:rPr>
-              <a:t>[ supporting note placeholder ]</a:t>
+              <a:t>Approachable design for the city.</a:t>
             </a:r>
           </a:p>
         </p:txBody>
@@ -6635,7 +6635,7 @@
                 </a:solidFill>
                 <a:latin typeface="Arial"/>
               </a:rPr>
-              <a:t>Confident proportions</a:t>
+              <a:t>Attainable</a:t>
             </a:r>
           </a:p>
           <a:p>
@@ -6647,7 +6647,7 @@
                 </a:solidFill>
                 <a:latin typeface="Arial"/>
               </a:rPr>
-              <a:t>[ supporting note placeholder ]</a:t>
+              <a:t>Thoughtful style within reach.</a:t>
             </a:r>
           </a:p>
         </p:txBody>
@@ -6774,7 +6774,7 @@
                 </a:solidFill>
                 <a:latin typeface="Arial"/>
               </a:rPr>
-              <a:t>Everyday desirability</a:t>
+              <a:t>Youthful &amp; Modern</a:t>
             </a:r>
           </a:p>
           <a:p>
@@ -6786,7 +6786,7 @@
                 </a:solidFill>
                 <a:latin typeface="Arial"/>
               </a:rPr>
-              <a:t>[ supporting note placeholder ]</a:t>
+              <a:t>Efficient, urban, design-led.</a:t>
             </a:r>
           </a:p>
         </p:txBody>
@@ -8074,7 +8074,7 @@
                 </a:solidFill>
                 <a:latin typeface="Arial"/>
               </a:rPr>
-              <a:t>[ Minimal caption placeholder ]</a:t>
+              <a:t>Smart, simple, and useful — accessible design done thoughtfully.</a:t>
             </a:r>
           </a:p>
         </p:txBody>
@@ -8240,7 +8240,7 @@
                 </a:solidFill>
                 <a:latin typeface="Arial"/>
               </a:rPr>
-              <a:t>ARROW CROSS · PURPOSE</a:t>
+              <a:t>PURPOSEFUL VERSATILITY</a:t>
             </a:r>
           </a:p>
         </p:txBody>
@@ -8314,7 +8314,7 @@
                 </a:solidFill>
                 <a:latin typeface="Arial"/>
               </a:rPr>
-              <a:t>[ Executive summary — one sentence on the role this vehicle plays in the vision. ]</a:t>
+              <a:t>An accessible crossover with purposeful versatility — designed around everyday life.</a:t>
             </a:r>
           </a:p>
         </p:txBody>
@@ -8441,7 +8441,7 @@
                 </a:solidFill>
                 <a:latin typeface="Arial"/>
               </a:rPr>
-              <a:t>Versatile premium</a:t>
+              <a:t>Flexible &amp; Versatile</a:t>
             </a:r>
           </a:p>
           <a:p>
@@ -8453,7 +8453,7 @@
                 </a:solidFill>
                 <a:latin typeface="Arial"/>
               </a:rPr>
-              <a:t>[ supporting note placeholder ]</a:t>
+              <a:t>Thoughtful packaging for families.</a:t>
             </a:r>
           </a:p>
         </p:txBody>
@@ -8580,7 +8580,7 @@
                 </a:solidFill>
                 <a:latin typeface="Arial"/>
               </a:rPr>
-              <a:t>Active capability</a:t>
+              <a:t>Urban &amp; Useful</a:t>
             </a:r>
           </a:p>
           <a:p>
@@ -8592,7 +8592,7 @@
                 </a:solidFill>
                 <a:latin typeface="Arial"/>
               </a:rPr>
-              <a:t>[ supporting note placeholder ]</a:t>
+              <a:t>Confident, modern, accessible.</a:t>
             </a:r>
           </a:p>
         </p:txBody>
@@ -8719,7 +8719,7 @@
                 </a:solidFill>
                 <a:latin typeface="Arial"/>
               </a:rPr>
-              <a:t>Elevated presence</a:t>
+              <a:t>Everyday Ready</a:t>
             </a:r>
           </a:p>
           <a:p>
@@ -8731,7 +8731,7 @@
                 </a:solidFill>
                 <a:latin typeface="Arial"/>
               </a:rPr>
-              <a:t>[ supporting note placeholder ]</a:t>
+              <a:t>Simple design that adapts.</a:t>
             </a:r>
           </a:p>
         </p:txBody>
@@ -10019,7 +10019,7 @@
                 </a:solidFill>
                 <a:latin typeface="Arial"/>
               </a:rPr>
-              <a:t>[ Minimal caption placeholder ]</a:t>
+              <a:t>Versatile and family-friendly — space designed for real life.</a:t>
             </a:r>
           </a:p>
         </p:txBody>
@@ -10255,7 +10255,7 @@
                 </a:solidFill>
                 <a:latin typeface="Arial"/>
               </a:rPr>
-              <a:t>Differentiation, not overlap — Chrysler's distinct premium space.</a:t>
+              <a:t>Differentiation, not overlap — the distinct, human-centered space Chrysler owns.</a:t>
             </a:r>
           </a:p>
         </p:txBody>
@@ -10342,7 +10342,11 @@
             </a:r>
           </a:p>
           <a:p>
-            <a:pPr algn="ctr"/>
+            <a:pPr algn="ctr">
+              <a:lnSpc>
+                <a:spcPct val="110000"/>
+              </a:lnSpc>
+            </a:pPr>
             <a:r>
               <a:rPr sz="1100" b="0" i="0">
                 <a:solidFill>
@@ -10350,7 +10354,8 @@
                 </a:solidFill>
                 <a:latin typeface="Arial"/>
               </a:rPr>
-              <a:t>[ positioning statement ]</a:t>
+              <a:t>Innovative practicality
+for everyday life</a:t>
             </a:r>
           </a:p>
         </p:txBody>
@@ -10451,8 +10456,7 @@
                 </a:solidFill>
                 <a:latin typeface="Arial"/>
               </a:rPr>
-              <a:t>[ adjacent
-positioning ]</a:t>
+              <a:t>Distinct role</a:t>
             </a:r>
           </a:p>
         </p:txBody>
@@ -10553,8 +10557,7 @@
                 </a:solidFill>
                 <a:latin typeface="Arial"/>
               </a:rPr>
-              <a:t>[ adjacent
-positioning ]</a:t>
+              <a:t>Distinct role</a:t>
             </a:r>
           </a:p>
         </p:txBody>
@@ -10655,8 +10658,7 @@
                 </a:solidFill>
                 <a:latin typeface="Arial"/>
               </a:rPr>
-              <a:t>[ adjacent
-positioning ]</a:t>
+              <a:t>Distinct role</a:t>
             </a:r>
           </a:p>
         </p:txBody>
@@ -10757,8 +10759,7 @@
                 </a:solidFill>
                 <a:latin typeface="Arial"/>
               </a:rPr>
-              <a:t>[ adjacent
-positioning ]</a:t>
+              <a:t>Distinct role</a:t>
             </a:r>
           </a:p>
         </p:txBody>
@@ -11127,7 +11128,11 @@
             </a:r>
           </a:p>
           <a:p>
-            <a:pPr algn="l"/>
+            <a:pPr algn="l">
+              <a:lnSpc>
+                <a:spcPct val="115000"/>
+              </a:lnSpc>
+            </a:pPr>
             <a:r>
               <a:rPr sz="1000" b="0" i="0">
                 <a:solidFill>
@@ -11135,7 +11140,7 @@
                 </a:solidFill>
                 <a:latin typeface="Arial"/>
               </a:rPr>
-              <a:t>[ note ]</a:t>
+              <a:t>Seamless, connected, personal.</a:t>
             </a:r>
           </a:p>
         </p:txBody>
@@ -11303,7 +11308,11 @@
             </a:r>
           </a:p>
           <a:p>
-            <a:pPr algn="l"/>
+            <a:pPr algn="l">
+              <a:lnSpc>
+                <a:spcPct val="115000"/>
+              </a:lnSpc>
+            </a:pPr>
             <a:r>
               <a:rPr sz="1000" b="0" i="0">
                 <a:solidFill>
@@ -11311,7 +11320,7 @@
                 </a:solidFill>
                 <a:latin typeface="Arial"/>
               </a:rPr>
-              <a:t>[ note ]</a:t>
+              <a:t>Purposeful and invisible.</a:t>
             </a:r>
           </a:p>
         </p:txBody>
@@ -11479,7 +11488,11 @@
             </a:r>
           </a:p>
           <a:p>
-            <a:pPr algn="l"/>
+            <a:pPr algn="l">
+              <a:lnSpc>
+                <a:spcPct val="115000"/>
+              </a:lnSpc>
+            </a:pPr>
             <a:r>
               <a:rPr sz="1000" b="0" i="0">
                 <a:solidFill>
@@ -11487,7 +11500,7 @@
                 </a:solidFill>
                 <a:latin typeface="Arial"/>
               </a:rPr>
-              <a:t>[ note ]</a:t>
+              <a:t>Warm, recycled, responsible materials.</a:t>
             </a:r>
           </a:p>
         </p:txBody>
@@ -11655,7 +11668,11 @@
             </a:r>
           </a:p>
           <a:p>
-            <a:pPr algn="l"/>
+            <a:pPr algn="l">
+              <a:lnSpc>
+                <a:spcPct val="115000"/>
+              </a:lnSpc>
+            </a:pPr>
             <a:r>
               <a:rPr sz="1000" b="0" i="0">
                 <a:solidFill>
@@ -11663,7 +11680,7 @@
                 </a:solidFill>
                 <a:latin typeface="Arial"/>
               </a:rPr>
-              <a:t>[ note ]</a:t>
+              <a:t>Friction removed from daily life.</a:t>
             </a:r>
           </a:p>
         </p:txBody>
@@ -11831,7 +11848,11 @@
             </a:r>
           </a:p>
           <a:p>
-            <a:pPr algn="l"/>
+            <a:pPr algn="l">
+              <a:lnSpc>
+                <a:spcPct val="115000"/>
+              </a:lnSpc>
+            </a:pPr>
             <a:r>
               <a:rPr sz="1000" b="0" i="0">
                 <a:solidFill>
@@ -11839,7 +11860,7 @@
                 </a:solidFill>
                 <a:latin typeface="Arial"/>
               </a:rPr>
-              <a:t>[ note ]</a:t>
+              <a:t>Adaptive, predictive, human-centered.</a:t>
             </a:r>
           </a:p>
         </p:txBody>
@@ -12007,7 +12028,11 @@
             </a:r>
           </a:p>
           <a:p>
-            <a:pPr algn="l"/>
+            <a:pPr algn="l">
+              <a:lnSpc>
+                <a:spcPct val="115000"/>
+              </a:lnSpc>
+            </a:pPr>
             <a:r>
               <a:rPr sz="1000" b="0" i="0">
                 <a:solidFill>
@@ -12015,7 +12040,7 @@
                 </a:solidFill>
                 <a:latin typeface="Arial"/>
               </a:rPr>
-              <a:t>[ note ]</a:t>
+              <a:t>Effortless, door to destination.</a:t>
             </a:r>
           </a:p>
         </p:txBody>
@@ -14316,7 +14341,7 @@
                 </a:solidFill>
                 <a:latin typeface="Arial"/>
               </a:rPr>
-              <a:t>A design-led future</a:t>
+              <a:t>Designed Around People</a:t>
             </a:r>
           </a:p>
           <a:p>
@@ -14332,7 +14357,7 @@
                 </a:solidFill>
                 <a:latin typeface="Arial"/>
               </a:rPr>
-              <a:t>[ executive message placeholder ]</a:t>
+              <a:t>Luxury is the removal of everyday friction.</a:t>
             </a:r>
           </a:p>
         </p:txBody>
@@ -14441,7 +14466,7 @@
                 </a:solidFill>
                 <a:latin typeface="Arial"/>
               </a:rPr>
-              <a:t>Distinct within Stellantis</a:t>
+              <a:t>Distinct Within Stellantis</a:t>
             </a:r>
           </a:p>
           <a:p>
@@ -14457,7 +14482,7 @@
                 </a:solidFill>
                 <a:latin typeface="Arial"/>
               </a:rPr>
-              <a:t>[ executive message placeholder ]</a:t>
+              <a:t>Modern American design — human and confident.</a:t>
             </a:r>
           </a:p>
         </p:txBody>
@@ -14566,7 +14591,7 @@
                 </a:solidFill>
                 <a:latin typeface="Arial"/>
               </a:rPr>
-              <a:t>Ready to lead</a:t>
+              <a:t>Ready to Lead</a:t>
             </a:r>
           </a:p>
           <a:p>
@@ -14582,7 +14607,7 @@
                 </a:solidFill>
                 <a:latin typeface="Arial"/>
               </a:rPr>
-              <a:t>[ executive message placeholder ]</a:t>
+              <a:t>A clear, design-led vision for Chrysler's future.</a:t>
             </a:r>
           </a:p>
         </p:txBody>
@@ -14866,7 +14891,7 @@
                 </a:solidFill>
                 <a:latin typeface="Arial"/>
               </a:rPr>
-              <a:t>[ Executive summary statement — one confident sentence on Chrysler's reason to lead. ]</a:t>
+              <a:t>Chrysler makes everyday life effortless — design that removes friction and puts people first.</a:t>
             </a:r>
           </a:p>
         </p:txBody>
@@ -15044,7 +15069,7 @@
                 </a:solidFill>
                 <a:latin typeface="Arial"/>
               </a:rPr>
-              <a:t>Premium American Design</a:t>
+              <a:t>Modern American Design</a:t>
             </a:r>
           </a:p>
           <a:p>
@@ -15060,7 +15085,7 @@
                 </a:solidFill>
                 <a:latin typeface="Arial"/>
               </a:rPr>
-              <a:t>[ Supporting note placeholder ]</a:t>
+              <a:t>Optimistic, human, unmistakably Chrysler.</a:t>
             </a:r>
           </a:p>
         </p:txBody>
@@ -15238,7 +15263,7 @@
                 </a:solidFill>
                 <a:latin typeface="Arial"/>
               </a:rPr>
-              <a:t>Technology with Purpose</a:t>
+              <a:t>Technology With Purpose</a:t>
             </a:r>
           </a:p>
           <a:p>
@@ -15254,7 +15279,7 @@
                 </a:solidFill>
                 <a:latin typeface="Arial"/>
               </a:rPr>
-              <a:t>[ Supporting note placeholder ]</a:t>
+              <a:t>Intelligence that disappears into the experience.</a:t>
             </a:r>
           </a:p>
         </p:txBody>
@@ -15432,7 +15457,7 @@
                 </a:solidFill>
                 <a:latin typeface="Arial"/>
               </a:rPr>
-              <a:t>Emotional Simplicity</a:t>
+              <a:t>Beautiful Simplicity</a:t>
             </a:r>
           </a:p>
           <a:p>
@@ -15448,7 +15473,7 @@
                 </a:solidFill>
                 <a:latin typeface="Arial"/>
               </a:rPr>
-              <a:t>[ Supporting note placeholder ]</a:t>
+              <a:t>Luxury as the absence of friction.</a:t>
             </a:r>
           </a:p>
         </p:txBody>
@@ -15704,7 +15729,7 @@
                 </a:solidFill>
                 <a:latin typeface="Arial"/>
               </a:rPr>
-              <a:t>[ Large vision quote placeholder — a memorable, design-led statement of intent. ]</a:t>
+              <a:t>Luxury is no longer ornament. It is the removal of friction from everyday life.</a:t>
             </a:r>
           </a:p>
         </p:txBody>
@@ -15783,7 +15808,7 @@
                 </a:solidFill>
                 <a:latin typeface="Arial"/>
               </a:rPr>
-              <a:t>Pillar One  —  [ short descriptor placeholder ]</a:t>
+              <a:t>Innovative Practicality  —  design that solves real life</a:t>
             </a:r>
           </a:p>
         </p:txBody>
@@ -15862,7 +15887,7 @@
                 </a:solidFill>
                 <a:latin typeface="Arial"/>
               </a:rPr>
-              <a:t>Pillar Two  —  [ short descriptor placeholder ]</a:t>
+              <a:t>Human-Centered Technology  —  built around people, not features</a:t>
             </a:r>
           </a:p>
         </p:txBody>
@@ -15941,7 +15966,7 @@
                 </a:solidFill>
                 <a:latin typeface="Arial"/>
               </a:rPr>
-              <a:t>Pillar Three  —  [ short descriptor placeholder ]</a:t>
+              <a:t>Beautiful Simplicity  —  calm, considered, effortless</a:t>
             </a:r>
           </a:p>
         </p:txBody>
@@ -18706,7 +18731,7 @@
                 </a:solidFill>
                 <a:latin typeface="Arial"/>
               </a:rPr>
-              <a:t>[ 3–4 principle placeholders ]</a:t>
+              <a:t>Thoughtful · Logical · Precise · Purposeful</a:t>
             </a:r>
           </a:p>
         </p:txBody>
@@ -18851,7 +18876,7 @@
                 </a:solidFill>
                 <a:latin typeface="Arial"/>
               </a:rPr>
-              <a:t>[ 3–4 attribute placeholders ]</a:t>
+              <a:t>Confident · Approachable · Effortless · Calm</a:t>
             </a:r>
           </a:p>
         </p:txBody>
@@ -18996,7 +19021,7 @@
                 </a:solidFill>
                 <a:latin typeface="Arial"/>
               </a:rPr>
-              <a:t>[ form · proportion · surfacing ]</a:t>
+              <a:t>Calm architecture · Warm materials · Human scale</a:t>
             </a:r>
           </a:p>
         </p:txBody>
@@ -22168,7 +22193,7 @@
                 </a:solidFill>
                 <a:latin typeface="Arial"/>
               </a:rPr>
-              <a:t>300 CONCEPT</a:t>
+              <a:t>THE EMOTIONAL HALO</a:t>
             </a:r>
           </a:p>
         </p:txBody>
@@ -22242,7 +22267,7 @@
                 </a:solidFill>
                 <a:latin typeface="Arial"/>
               </a:rPr>
-              <a:t>[ Executive summary — one sentence on the role this vehicle plays in the vision. ]</a:t>
+              <a:t>The flagship expression of Chrysler design — composed, commanding, never excessive.</a:t>
             </a:r>
           </a:p>
         </p:txBody>
@@ -22369,7 +22394,7 @@
                 </a:solidFill>
                 <a:latin typeface="Arial"/>
               </a:rPr>
-              <a:t>Flagship presence</a:t>
+              <a:t>Commanding Presence</a:t>
             </a:r>
           </a:p>
           <a:p>
@@ -22381,7 +22406,7 @@
                 </a:solidFill>
                 <a:latin typeface="Arial"/>
               </a:rPr>
-              <a:t>[ supporting note placeholder ]</a:t>
+              <a:t>Architectural proportion, balanced and tailored.</a:t>
             </a:r>
           </a:p>
         </p:txBody>
@@ -22508,7 +22533,7 @@
                 </a:solidFill>
                 <a:latin typeface="Arial"/>
               </a:rPr>
-              <a:t>Premium restraint</a:t>
+              <a:t>Quiet Power</a:t>
             </a:r>
           </a:p>
           <a:p>
@@ -22520,7 +22545,7 @@
                 </a:solidFill>
                 <a:latin typeface="Arial"/>
               </a:rPr>
-              <a:t>[ supporting note placeholder ]</a:t>
+              <a:t>Confidence expressed through restraint.</a:t>
             </a:r>
           </a:p>
         </p:txBody>
@@ -22647,7 +22672,7 @@
                 </a:solidFill>
                 <a:latin typeface="Arial"/>
               </a:rPr>
-              <a:t>A statement of intent</a:t>
+              <a:t>Timeless Craftsmanship</a:t>
             </a:r>
           </a:p>
           <a:p>
@@ -22659,7 +22684,7 @@
                 </a:solidFill>
                 <a:latin typeface="Arial"/>
               </a:rPr>
-              <a:t>[ supporting note placeholder ]</a:t>
+              <a:t>Authentic American design, refined.</a:t>
             </a:r>
           </a:p>
         </p:txBody>
@@ -23947,7 +23972,7 @@
                 </a:solidFill>
                 <a:latin typeface="Arial"/>
               </a:rPr>
-              <a:t>[ Minimal caption placeholder ]</a:t>
+              <a:t>An interior sanctuary — crafted, composed, human in scale.</a:t>
             </a:r>
           </a:p>
         </p:txBody>
@@ -24113,7 +24138,7 @@
                 </a:solidFill>
                 <a:latin typeface="Arial"/>
               </a:rPr>
-              <a:t>AIRFLOW</a:t>
+              <a:t>THE PHILOSOPHY</a:t>
             </a:r>
           </a:p>
         </p:txBody>
@@ -24187,7 +24212,7 @@
                 </a:solidFill>
                 <a:latin typeface="Arial"/>
               </a:rPr>
-              <a:t>[ Executive summary — one sentence on the role this vehicle plays in the vision. ]</a:t>
+              <a:t>Airflow introduces Chrysler's philosophy: innovative practicality, designed around people.</a:t>
             </a:r>
           </a:p>
         </p:txBody>
@@ -24314,7 +24339,7 @@
                 </a:solidFill>
                 <a:latin typeface="Arial"/>
               </a:rPr>
-              <a:t>Electric-first design</a:t>
+              <a:t>Spacious &amp; Adaptive</a:t>
             </a:r>
           </a:p>
           <a:p>
@@ -24326,7 +24351,7 @@
                 </a:solidFill>
                 <a:latin typeface="Arial"/>
               </a:rPr>
-              <a:t>[ supporting note placeholder ]</a:t>
+              <a:t>Versatile space for everyday life.</a:t>
             </a:r>
           </a:p>
         </p:txBody>
@@ -24453,7 +24478,7 @@
                 </a:solidFill>
                 <a:latin typeface="Arial"/>
               </a:rPr>
-              <a:t>Intelligent experience</a:t>
+              <a:t>Technology With Purpose</a:t>
             </a:r>
           </a:p>
           <a:p>
@@ -24465,7 +24490,7 @@
                 </a:solidFill>
                 <a:latin typeface="Arial"/>
               </a:rPr>
-              <a:t>[ supporting note placeholder ]</a:t>
+              <a:t>Intelligence that serves, then disappears.</a:t>
             </a:r>
           </a:p>
         </p:txBody>
@@ -24592,7 +24617,7 @@
                 </a:solidFill>
                 <a:latin typeface="Arial"/>
               </a:rPr>
-              <a:t>Future-forward form</a:t>
+              <a:t>Confident Simplicity</a:t>
             </a:r>
           </a:p>
           <a:p>
@@ -24604,7 +24629,7 @@
                 </a:solidFill>
                 <a:latin typeface="Arial"/>
               </a:rPr>
-              <a:t>[ supporting note placeholder ]</a:t>
+              <a:t>Clean, logical, human-centered form.</a:t>
             </a:r>
           </a:p>
         </p:txBody>

--- a/Chrysler_Brand_Design_Vision.pptx
+++ b/Chrysler_Brand_Design_Vision.pptx
@@ -23,6 +23,8 @@
     <p:sldId id="271" r:id="rId23"/>
     <p:sldId id="272" r:id="rId24"/>
     <p:sldId id="273" r:id="rId25"/>
+    <p:sldId id="274" r:id="rId26"/>
+    <p:sldId id="275" r:id="rId27"/>
   </p:sldIdLst>
   <p:sldSz cx="12191695" cy="6858000" type="screen4x3"/>
   <p:notesSz cx="6858000" cy="9144000"/>
@@ -589,7 +591,7 @@
           <a:lstStyle/>
           <a:p>
             <a:r>
-              <a:t>SPEAKER NOTES (placeholder) — Airflow Interior: one immersive rendering, one short caption. Speak to the experience, not the features.</a:t>
+              <a:t>SPEAKER NOTES (placeholder) — 300 Interior: one immersive rendering, one short caption. Speak to the experience, not the features.</a:t>
             </a:r>
           </a:p>
         </p:txBody>
@@ -659,7 +661,7 @@
           <a:lstStyle/>
           <a:p>
             <a:r>
-              <a:t>SPEAKER NOTES (placeholder) — Arrow: lead with emotion, then the three strategic bullets. Let the exterior image dominate.</a:t>
+              <a:t>SPEAKER NOTES (placeholder) — Airflow: lead with emotion, then the three strategic bullets. Let the exterior image dominate.</a:t>
             </a:r>
           </a:p>
         </p:txBody>
@@ -729,7 +731,7 @@
           <a:lstStyle/>
           <a:p>
             <a:r>
-              <a:t>SPEAKER NOTES (placeholder) — Arrow Interior: one immersive rendering, one short caption. Speak to the experience, not the features.</a:t>
+              <a:t>SPEAKER NOTES (placeholder) — Airflow Interior: one immersive rendering, one short caption. Speak to the experience, not the features.</a:t>
             </a:r>
           </a:p>
         </p:txBody>
@@ -799,7 +801,7 @@
           <a:lstStyle/>
           <a:p>
             <a:r>
-              <a:t>SPEAKER NOTES (placeholder) — Arrow Cross: lead with emotion, then the three strategic bullets. Let the exterior image dominate.</a:t>
+              <a:t>SPEAKER NOTES (placeholder) — Arrow: lead with emotion, then the three strategic bullets. Let the exterior image dominate.</a:t>
             </a:r>
           </a:p>
         </p:txBody>
@@ -869,7 +871,7 @@
           <a:lstStyle/>
           <a:p>
             <a:r>
-              <a:t>SPEAKER NOTES (placeholder) — Arrow Cross Interior: one immersive rendering, one short caption. Speak to the experience, not the features.</a:t>
+              <a:t>SPEAKER NOTES (placeholder) — Arrow Interior: one immersive rendering, one short caption. Speak to the experience, not the features.</a:t>
             </a:r>
           </a:p>
         </p:txBody>
@@ -939,7 +941,7 @@
           <a:lstStyle/>
           <a:p>
             <a:r>
-              <a:t>SPEAKER NOTES (placeholder) — Show where Chrysler sits and how it stays distinct. Replace BRAND A–D with the relevant Stellantis siblings. Emphasize white space Chrysler owns.</a:t>
+              <a:t>SPEAKER NOTES (placeholder) — Arrow Cross: lead with emotion, then the three strategic bullets. Let the exterior image dominate.</a:t>
             </a:r>
           </a:p>
         </p:txBody>
@@ -1009,7 +1011,7 @@
           <a:lstStyle/>
           <a:p>
             <a:r>
-              <a:t>SPEAKER NOTES (placeholder) — Paint the experience Chrysler will deliver. Six themes — swap ICON boxes for final iconography. Keep words minimal.</a:t>
+              <a:t>SPEAKER NOTES (placeholder) — Arrow Cross Interior: one immersive rendering, one short caption. Speak to the experience, not the features.</a:t>
             </a:r>
           </a:p>
         </p:txBody>
@@ -1079,7 +1081,7 @@
           <a:lstStyle/>
           <a:p>
             <a:r>
-              <a:t>SPEAKER NOTES (placeholder) — Show breadth of design capability across six domains. The infographic ties them into one system. Replace nodes as needed.</a:t>
+              <a:t>SPEAKER NOTES (placeholder) — Show where Chrysler sits and how it stays distinct. Replace BRAND A–D with the relevant Stellantis siblings. Emphasize white space Chrysler owns.</a:t>
             </a:r>
           </a:p>
         </p:txBody>
@@ -1149,7 +1151,77 @@
           <a:lstStyle/>
           <a:p>
             <a:r>
-              <a:t>SPEAKER NOTES (placeholder) — Close on three memorable messages that map to the three pillars. End on the hero image and the ask.</a:t>
+              <a:t>SPEAKER NOTES (placeholder) — Paint the experience Chrysler will deliver. Six themes — swap ICON boxes for final iconography. Keep words minimal.</a:t>
+            </a:r>
+          </a:p>
+        </p:txBody>
+      </p:sp>
+      <p:sp>
+        <p:nvSpPr>
+          <p:cNvPr id="4" name="Slide Number Placeholder 3"/>
+          <p:cNvSpPr>
+            <a:spLocks noGrp="1"/>
+          </p:cNvSpPr>
+          <p:nvPr>
+            <p:ph type="sldNum" idx="5" sz="quarter"/>
+          </p:nvPr>
+        </p:nvSpPr>
+        <p:spPr/>
+      </p:sp>
+    </p:spTree>
+  </p:cSld>
+  <p:clrMapOvr>
+    <a:masterClrMapping/>
+  </p:clrMapOvr>
+</p:notes>
+</file>
+
+<file path=ppt/notesSlides/notesSlide19.xml><?xml version="1.0" encoding="utf-8"?>
+<p:notes xmlns:a="http://schemas.openxmlformats.org/drawingml/2006/main" xmlns:p="http://schemas.openxmlformats.org/presentationml/2006/main" xmlns:r="http://schemas.openxmlformats.org/officeDocument/2006/relationships">
+  <p:cSld>
+    <p:spTree>
+      <p:nvGrpSpPr>
+        <p:cNvPr id="1" name=""/>
+        <p:cNvGrpSpPr/>
+        <p:nvPr/>
+      </p:nvGrpSpPr>
+      <p:grpSpPr>
+        <a:xfrm>
+          <a:off x="0" y="0"/>
+          <a:ext cx="0" cy="0"/>
+          <a:chOff x="0" y="0"/>
+          <a:chExt cx="0" cy="0"/>
+        </a:xfrm>
+      </p:grpSpPr>
+      <p:sp>
+        <p:nvSpPr>
+          <p:cNvPr id="2" name="Slide Image Placeholder 1"/>
+          <p:cNvSpPr>
+            <a:spLocks noGrp="1"/>
+          </p:cNvSpPr>
+          <p:nvPr>
+            <p:ph type="sldImg" idx="2"/>
+          </p:nvPr>
+        </p:nvSpPr>
+        <p:spPr/>
+      </p:sp>
+      <p:sp>
+        <p:nvSpPr>
+          <p:cNvPr id="3" name="Notes Placeholder 2"/>
+          <p:cNvSpPr>
+            <a:spLocks noGrp="1"/>
+          </p:cNvSpPr>
+          <p:nvPr>
+            <p:ph type="body" idx="3" sz="quarter"/>
+          </p:nvPr>
+        </p:nvSpPr>
+        <p:spPr/>
+        <p:txBody>
+          <a:bodyPr/>
+          <a:lstStyle/>
+          <a:p>
+            <a:r>
+              <a:t>SPEAKER NOTES (placeholder) — Show breadth of design capability across six domains. The infographic ties them into one system. Replace nodes as needed.</a:t>
             </a:r>
           </a:p>
         </p:txBody>
@@ -1244,6 +1316,76 @@
 </p:notes>
 </file>
 
+<file path=ppt/notesSlides/notesSlide20.xml><?xml version="1.0" encoding="utf-8"?>
+<p:notes xmlns:a="http://schemas.openxmlformats.org/drawingml/2006/main" xmlns:p="http://schemas.openxmlformats.org/presentationml/2006/main" xmlns:r="http://schemas.openxmlformats.org/officeDocument/2006/relationships">
+  <p:cSld>
+    <p:spTree>
+      <p:nvGrpSpPr>
+        <p:cNvPr id="1" name=""/>
+        <p:cNvGrpSpPr/>
+        <p:nvPr/>
+      </p:nvGrpSpPr>
+      <p:grpSpPr>
+        <a:xfrm>
+          <a:off x="0" y="0"/>
+          <a:ext cx="0" cy="0"/>
+          <a:chOff x="0" y="0"/>
+          <a:chExt cx="0" cy="0"/>
+        </a:xfrm>
+      </p:grpSpPr>
+      <p:sp>
+        <p:nvSpPr>
+          <p:cNvPr id="2" name="Slide Image Placeholder 1"/>
+          <p:cNvSpPr>
+            <a:spLocks noGrp="1"/>
+          </p:cNvSpPr>
+          <p:nvPr>
+            <p:ph type="sldImg" idx="2"/>
+          </p:nvPr>
+        </p:nvSpPr>
+        <p:spPr/>
+      </p:sp>
+      <p:sp>
+        <p:nvSpPr>
+          <p:cNvPr id="3" name="Notes Placeholder 2"/>
+          <p:cNvSpPr>
+            <a:spLocks noGrp="1"/>
+          </p:cNvSpPr>
+          <p:nvPr>
+            <p:ph type="body" idx="3" sz="quarter"/>
+          </p:nvPr>
+        </p:nvSpPr>
+        <p:spPr/>
+        <p:txBody>
+          <a:bodyPr/>
+          <a:lstStyle/>
+          <a:p>
+            <a:r>
+              <a:t>SPEAKER NOTES (placeholder) — Close on three memorable messages that map to the three pillars. End on the hero image and the ask.</a:t>
+            </a:r>
+          </a:p>
+        </p:txBody>
+      </p:sp>
+      <p:sp>
+        <p:nvSpPr>
+          <p:cNvPr id="4" name="Slide Number Placeholder 3"/>
+          <p:cNvSpPr>
+            <a:spLocks noGrp="1"/>
+          </p:cNvSpPr>
+          <p:nvPr>
+            <p:ph type="sldNum" idx="5" sz="quarter"/>
+          </p:nvPr>
+        </p:nvSpPr>
+        <p:spPr/>
+      </p:sp>
+    </p:spTree>
+  </p:cSld>
+  <p:clrMapOvr>
+    <a:masterClrMapping/>
+  </p:clrMapOvr>
+</p:notes>
+</file>
+
 <file path=ppt/notesSlides/notesSlide3.xml><?xml version="1.0" encoding="utf-8"?>
 <p:notes xmlns:a="http://schemas.openxmlformats.org/drawingml/2006/main" xmlns:p="http://schemas.openxmlformats.org/presentationml/2006/main" xmlns:r="http://schemas.openxmlformats.org/officeDocument/2006/relationships">
   <p:cSld>
@@ -1569,7 +1711,7 @@
           <a:lstStyle/>
           <a:p>
             <a:r>
-              <a:t>SPEAKER NOTES (placeholder) — 300 Concept: lead with emotion, then the three strategic bullets. Let the exterior image dominate.</a:t>
+              <a:t>SPEAKER NOTES (placeholder) — Pacifica: lead with emotion, then the three strategic bullets. Let the exterior image dominate.</a:t>
             </a:r>
           </a:p>
         </p:txBody>
@@ -1639,7 +1781,7 @@
           <a:lstStyle/>
           <a:p>
             <a:r>
-              <a:t>SPEAKER NOTES (placeholder) — 300 Interior: one immersive rendering, one short caption. Speak to the experience, not the features.</a:t>
+              <a:t>SPEAKER NOTES (placeholder) — Pacifica Interior: one immersive rendering, one short caption. Speak to the experience, not the features.</a:t>
             </a:r>
           </a:p>
         </p:txBody>
@@ -1709,7 +1851,7 @@
           <a:lstStyle/>
           <a:p>
             <a:r>
-              <a:t>SPEAKER NOTES (placeholder) — Airflow: lead with emotion, then the three strategic bullets. Let the exterior image dominate.</a:t>
+              <a:t>SPEAKER NOTES (placeholder) — 300 Concept: lead with emotion, then the three strategic bullets. Let the exterior image dominate.</a:t>
             </a:r>
           </a:p>
         </p:txBody>
@@ -5533,7 +5675,7 @@
                 </a:solidFill>
                 <a:latin typeface="Arial"/>
               </a:rPr>
-              <a:t>AIRFLOW</a:t>
+              <a:t>300 CONCEPT</a:t>
             </a:r>
           </a:p>
         </p:txBody>
@@ -5568,7 +5710,7 @@
                 </a:solidFill>
                 <a:latin typeface="Arial"/>
               </a:rPr>
-              <a:t>Airflow Interior</a:t>
+              <a:t>300 Interior</a:t>
             </a:r>
           </a:p>
         </p:txBody>
@@ -6129,7 +6271,7 @@
                 </a:solidFill>
                 <a:latin typeface="Arial"/>
               </a:rPr>
-              <a:t>Designed around people — flexible, calm, effortlessly useful.</a:t>
+              <a:t>An interior sanctuary — crafted, composed, human in scale.</a:t>
             </a:r>
           </a:p>
         </p:txBody>
@@ -6295,7 +6437,7 @@
                 </a:solidFill>
                 <a:latin typeface="Arial"/>
               </a:rPr>
-              <a:t>CLEVER ACCESSIBILITY</a:t>
+              <a:t>THE PHILOSOPHY</a:t>
             </a:r>
           </a:p>
         </p:txBody>
@@ -6330,7 +6472,7 @@
                 </a:solidFill>
                 <a:latin typeface="Arial"/>
               </a:rPr>
-              <a:t>Arrow</a:t>
+              <a:t>Airflow</a:t>
             </a:r>
           </a:p>
         </p:txBody>
@@ -6369,7 +6511,7 @@
                 </a:solidFill>
                 <a:latin typeface="Arial"/>
               </a:rPr>
-              <a:t>Chrysler's accessible entry — clever, design-led, and attainable from around $24K.</a:t>
+              <a:t>Airflow introduces Chrysler's philosophy: innovative practicality, designed around people.</a:t>
             </a:r>
           </a:p>
         </p:txBody>
@@ -6496,7 +6638,7 @@
                 </a:solidFill>
                 <a:latin typeface="Arial"/>
               </a:rPr>
-              <a:t>Smart &amp; Simple</a:t>
+              <a:t>Spacious &amp; Adaptive</a:t>
             </a:r>
           </a:p>
           <a:p>
@@ -6508,7 +6650,7 @@
                 </a:solidFill>
                 <a:latin typeface="Arial"/>
               </a:rPr>
-              <a:t>Approachable design for the city.</a:t>
+              <a:t>Versatile space for everyday life.</a:t>
             </a:r>
           </a:p>
         </p:txBody>
@@ -6635,7 +6777,7 @@
                 </a:solidFill>
                 <a:latin typeface="Arial"/>
               </a:rPr>
-              <a:t>Attainable</a:t>
+              <a:t>Technology With Purpose</a:t>
             </a:r>
           </a:p>
           <a:p>
@@ -6647,7 +6789,7 @@
                 </a:solidFill>
                 <a:latin typeface="Arial"/>
               </a:rPr>
-              <a:t>Thoughtful style within reach.</a:t>
+              <a:t>Intelligence that serves, then disappears.</a:t>
             </a:r>
           </a:p>
         </p:txBody>
@@ -6774,7 +6916,7 @@
                 </a:solidFill>
                 <a:latin typeface="Arial"/>
               </a:rPr>
-              <a:t>Youthful &amp; Modern</a:t>
+              <a:t>Confident Simplicity</a:t>
             </a:r>
           </a:p>
           <a:p>
@@ -6786,7 +6928,7 @@
                 </a:solidFill>
                 <a:latin typeface="Arial"/>
               </a:rPr>
-              <a:t>Efficient, urban, design-led.</a:t>
+              <a:t>Clean, logical, human-centered form.</a:t>
             </a:r>
           </a:p>
         </p:txBody>
@@ -7478,7 +7620,7 @@
                 </a:solidFill>
                 <a:latin typeface="Arial"/>
               </a:rPr>
-              <a:t>ARROW</a:t>
+              <a:t>AIRFLOW</a:t>
             </a:r>
           </a:p>
         </p:txBody>
@@ -7513,7 +7655,7 @@
                 </a:solidFill>
                 <a:latin typeface="Arial"/>
               </a:rPr>
-              <a:t>Arrow Interior</a:t>
+              <a:t>Airflow Interior</a:t>
             </a:r>
           </a:p>
         </p:txBody>
@@ -8074,7 +8216,7 @@
                 </a:solidFill>
                 <a:latin typeface="Arial"/>
               </a:rPr>
-              <a:t>Smart, simple, and useful — accessible design done thoughtfully.</a:t>
+              <a:t>Designed around people — flexible, calm, effortlessly useful.</a:t>
             </a:r>
           </a:p>
         </p:txBody>
@@ -8240,7 +8382,7 @@
                 </a:solidFill>
                 <a:latin typeface="Arial"/>
               </a:rPr>
-              <a:t>PURPOSEFUL VERSATILITY</a:t>
+              <a:t>CLEVER ACCESSIBILITY</a:t>
             </a:r>
           </a:p>
         </p:txBody>
@@ -8275,7 +8417,7 @@
                 </a:solidFill>
                 <a:latin typeface="Arial"/>
               </a:rPr>
-              <a:t>Arrow Cross</a:t>
+              <a:t>Arrow</a:t>
             </a:r>
           </a:p>
         </p:txBody>
@@ -8314,7 +8456,7 @@
                 </a:solidFill>
                 <a:latin typeface="Arial"/>
               </a:rPr>
-              <a:t>An accessible crossover with purposeful versatility — designed around everyday life.</a:t>
+              <a:t>Chrysler's accessible entry — clever, design-led, and attainable from around $24K.</a:t>
             </a:r>
           </a:p>
         </p:txBody>
@@ -8441,7 +8583,7 @@
                 </a:solidFill>
                 <a:latin typeface="Arial"/>
               </a:rPr>
-              <a:t>Flexible &amp; Versatile</a:t>
+              <a:t>Smart &amp; Simple</a:t>
             </a:r>
           </a:p>
           <a:p>
@@ -8453,7 +8595,7 @@
                 </a:solidFill>
                 <a:latin typeface="Arial"/>
               </a:rPr>
-              <a:t>Thoughtful packaging for families.</a:t>
+              <a:t>Approachable design for the city.</a:t>
             </a:r>
           </a:p>
         </p:txBody>
@@ -8580,7 +8722,7 @@
                 </a:solidFill>
                 <a:latin typeface="Arial"/>
               </a:rPr>
-              <a:t>Urban &amp; Useful</a:t>
+              <a:t>Attainable</a:t>
             </a:r>
           </a:p>
           <a:p>
@@ -8592,7 +8734,7 @@
                 </a:solidFill>
                 <a:latin typeface="Arial"/>
               </a:rPr>
-              <a:t>Confident, modern, accessible.</a:t>
+              <a:t>Thoughtful style within reach.</a:t>
             </a:r>
           </a:p>
         </p:txBody>
@@ -8719,7 +8861,7 @@
                 </a:solidFill>
                 <a:latin typeface="Arial"/>
               </a:rPr>
-              <a:t>Everyday Ready</a:t>
+              <a:t>Youthful &amp; Modern</a:t>
             </a:r>
           </a:p>
           <a:p>
@@ -8731,7 +8873,7 @@
                 </a:solidFill>
                 <a:latin typeface="Arial"/>
               </a:rPr>
-              <a:t>Simple design that adapts.</a:t>
+              <a:t>Efficient, urban, design-led.</a:t>
             </a:r>
           </a:p>
         </p:txBody>
@@ -9423,7 +9565,7 @@
                 </a:solidFill>
                 <a:latin typeface="Arial"/>
               </a:rPr>
-              <a:t>ARROW CROSS</a:t>
+              <a:t>ARROW</a:t>
             </a:r>
           </a:p>
         </p:txBody>
@@ -9458,7 +9600,7 @@
                 </a:solidFill>
                 <a:latin typeface="Arial"/>
               </a:rPr>
-              <a:t>Arrow Cross Interior</a:t>
+              <a:t>Arrow Interior</a:t>
             </a:r>
           </a:p>
         </p:txBody>
@@ -10019,7 +10161,7 @@
                 </a:solidFill>
                 <a:latin typeface="Arial"/>
               </a:rPr>
-              <a:t>Versatile and family-friendly — space designed for real life.</a:t>
+              <a:t>Smart, simple, and useful — accessible design done thoughtfully.</a:t>
             </a:r>
           </a:p>
         </p:txBody>
@@ -10185,7 +10327,7 @@
                 </a:solidFill>
                 <a:latin typeface="Arial"/>
               </a:rPr>
-              <a:t>PORTFOLIO POSITIONING</a:t>
+              <a:t>PURPOSEFUL VERSATILITY</a:t>
             </a:r>
           </a:p>
         </p:txBody>
@@ -10199,7 +10341,7 @@
         <p:spPr>
           <a:xfrm>
             <a:off x="658368" y="960120"/>
-            <a:ext cx="10515600" cy="822960"/>
+            <a:ext cx="5486400" cy="822960"/>
           </a:xfrm>
           <a:prstGeom prst="rect">
             <a:avLst/>
@@ -10214,13 +10356,13 @@
           <a:p>
             <a:pPr algn="l"/>
             <a:r>
-              <a:rPr sz="2600" b="1" i="0">
+              <a:rPr sz="3000" b="1" i="0">
                 <a:solidFill>
                   <a:srgbClr val="1A1A1C"/>
                 </a:solidFill>
                 <a:latin typeface="Arial"/>
               </a:rPr>
-              <a:t>How Chrysler Fits Within Stellantis</a:t>
+              <a:t>Arrow Cross</a:t>
             </a:r>
           </a:p>
         </p:txBody>
@@ -10233,8 +10375,8 @@
         </p:nvSpPr>
         <p:spPr>
           <a:xfrm>
-            <a:off x="685800" y="1600200"/>
-            <a:ext cx="10515600" cy="365760"/>
+            <a:off x="685800" y="1828800"/>
+            <a:ext cx="5120640" cy="1097280"/>
           </a:xfrm>
           <a:prstGeom prst="rect">
             <a:avLst/>
@@ -10247,31 +10389,79 @@
           </a:bodyPr>
           <a:lstStyle/>
           <a:p>
-            <a:pPr algn="l"/>
-            <a:r>
-              <a:rPr sz="1300" b="0" i="0">
+            <a:pPr algn="l">
+              <a:lnSpc>
+                <a:spcPct val="130000"/>
+              </a:lnSpc>
+            </a:pPr>
+            <a:r>
+              <a:rPr sz="1500" b="0" i="1">
                 <a:solidFill>
                   <a:srgbClr val="4A4E57"/>
                 </a:solidFill>
                 <a:latin typeface="Arial"/>
               </a:rPr>
-              <a:t>Differentiation, not overlap — the distinct, human-centered space Chrysler owns.</a:t>
-            </a:r>
-          </a:p>
-        </p:txBody>
-      </p:sp>
-      <p:sp>
-        <p:nvSpPr>
-          <p:cNvPr id="5" name="Rectangle 4"/>
+              <a:t>An accessible crossover with purposeful versatility — designed around everyday life.</a:t>
+            </a:r>
+          </a:p>
+        </p:txBody>
+      </p:sp>
+      <p:sp>
+        <p:nvSpPr>
+          <p:cNvPr id="5" name="Oval 4"/>
           <p:cNvSpPr/>
           <p:nvPr/>
         </p:nvSpPr>
         <p:spPr>
           <a:xfrm>
-            <a:off x="4480560" y="2286000"/>
-            <a:ext cx="3200400" cy="1463040"/>
-          </a:xfrm>
-          <a:prstGeom prst="rect">
+            <a:off x="713232" y="3200400"/>
+            <a:ext cx="457200" cy="457200"/>
+          </a:xfrm>
+          <a:prstGeom prst="ellipse">
+            <a:avLst/>
+          </a:prstGeom>
+          <a:noFill/>
+          <a:ln w="15875">
+            <a:solidFill>
+              <a:srgbClr val="1B2A4A"/>
+            </a:solidFill>
+          </a:ln>
+          <a:effectLst/>
+        </p:spPr>
+        <p:style>
+          <a:lnRef idx="1">
+            <a:schemeClr val="accent1"/>
+          </a:lnRef>
+          <a:fillRef idx="3">
+            <a:schemeClr val="accent1"/>
+          </a:fillRef>
+          <a:effectRef idx="2">
+            <a:schemeClr val="accent1"/>
+          </a:effectRef>
+          <a:fontRef idx="minor">
+            <a:schemeClr val="lt1"/>
+          </a:fontRef>
+        </p:style>
+        <p:txBody>
+          <a:bodyPr rtlCol="0" anchor="ctr"/>
+          <a:lstStyle/>
+          <a:p>
+            <a:pPr algn="ctr"/>
+          </a:p>
+        </p:txBody>
+      </p:sp>
+      <p:sp>
+        <p:nvSpPr>
+          <p:cNvPr id="6" name="Oval 5"/>
+          <p:cNvSpPr/>
+          <p:nvPr/>
+        </p:nvSpPr>
+        <p:spPr>
+          <a:xfrm>
+            <a:off x="859536" y="3346704"/>
+            <a:ext cx="164592" cy="164592"/>
+          </a:xfrm>
+          <a:prstGeom prst="ellipse">
             <a:avLst/>
           </a:prstGeom>
           <a:solidFill>
@@ -10306,14 +10496,14 @@
       </p:sp>
       <p:sp>
         <p:nvSpPr>
-          <p:cNvPr id="6" name="TextBox 5"/>
+          <p:cNvPr id="7" name="TextBox 6"/>
           <p:cNvSpPr txBox="1"/>
           <p:nvPr/>
         </p:nvSpPr>
         <p:spPr>
           <a:xfrm>
-            <a:off x="4480560" y="2286000"/>
-            <a:ext cx="3200400" cy="1463040"/>
+            <a:off x="1371600" y="3182112"/>
+            <a:ext cx="4572000" cy="731520"/>
           </a:xfrm>
           <a:prstGeom prst="rect">
             <a:avLst/>
@@ -10321,452 +10511,847 @@
           <a:noFill/>
         </p:spPr>
         <p:txBody>
-          <a:bodyPr wrap="square" anchor="ctr" lIns="0" rIns="0" tIns="0" bIns="0">
+          <a:bodyPr wrap="square" anchor="t" lIns="0" rIns="0" tIns="0" bIns="0">
             <a:spAutoFit/>
           </a:bodyPr>
           <a:lstStyle/>
           <a:p>
-            <a:pPr algn="ctr">
+            <a:pPr algn="l">
               <a:spcAft>
-                <a:spcPts val="400"/>
+                <a:spcPts val="200"/>
               </a:spcAft>
             </a:pPr>
             <a:r>
-              <a:rPr sz="1800" b="1" i="0" spc="200">
+              <a:rPr sz="1400" b="1" i="0">
                 <a:solidFill>
-                  <a:srgbClr val="FFFFFF"/>
+                  <a:srgbClr val="1A1A1C"/>
                 </a:solidFill>
                 <a:latin typeface="Arial"/>
               </a:rPr>
-              <a:t>CHRYSLER</a:t>
-            </a:r>
-          </a:p>
-          <a:p>
-            <a:pPr algn="ctr">
-              <a:lnSpc>
-                <a:spcPct val="110000"/>
-              </a:lnSpc>
+              <a:t>Flexible &amp; Versatile</a:t>
+            </a:r>
+          </a:p>
+          <a:p>
+            <a:pPr algn="l"/>
+            <a:r>
+              <a:rPr sz="1100" b="0" i="0">
+                <a:solidFill>
+                  <a:srgbClr val="868B94"/>
+                </a:solidFill>
+                <a:latin typeface="Arial"/>
+              </a:rPr>
+              <a:t>Thoughtful packaging for families.</a:t>
+            </a:r>
+          </a:p>
+        </p:txBody>
+      </p:sp>
+      <p:sp>
+        <p:nvSpPr>
+          <p:cNvPr id="8" name="Oval 7"/>
+          <p:cNvSpPr/>
+          <p:nvPr/>
+        </p:nvSpPr>
+        <p:spPr>
+          <a:xfrm>
+            <a:off x="713232" y="4069080"/>
+            <a:ext cx="457200" cy="457200"/>
+          </a:xfrm>
+          <a:prstGeom prst="ellipse">
+            <a:avLst/>
+          </a:prstGeom>
+          <a:noFill/>
+          <a:ln w="15875">
+            <a:solidFill>
+              <a:srgbClr val="1B2A4A"/>
+            </a:solidFill>
+          </a:ln>
+          <a:effectLst/>
+        </p:spPr>
+        <p:style>
+          <a:lnRef idx="1">
+            <a:schemeClr val="accent1"/>
+          </a:lnRef>
+          <a:fillRef idx="3">
+            <a:schemeClr val="accent1"/>
+          </a:fillRef>
+          <a:effectRef idx="2">
+            <a:schemeClr val="accent1"/>
+          </a:effectRef>
+          <a:fontRef idx="minor">
+            <a:schemeClr val="lt1"/>
+          </a:fontRef>
+        </p:style>
+        <p:txBody>
+          <a:bodyPr rtlCol="0" anchor="ctr"/>
+          <a:lstStyle/>
+          <a:p>
+            <a:pPr algn="ctr"/>
+          </a:p>
+        </p:txBody>
+      </p:sp>
+      <p:sp>
+        <p:nvSpPr>
+          <p:cNvPr id="9" name="Oval 8"/>
+          <p:cNvSpPr/>
+          <p:nvPr/>
+        </p:nvSpPr>
+        <p:spPr>
+          <a:xfrm>
+            <a:off x="859536" y="4215384"/>
+            <a:ext cx="164592" cy="164592"/>
+          </a:xfrm>
+          <a:prstGeom prst="ellipse">
+            <a:avLst/>
+          </a:prstGeom>
+          <a:solidFill>
+            <a:srgbClr val="1B2A4A"/>
+          </a:solidFill>
+          <a:ln>
+            <a:noFill/>
+          </a:ln>
+          <a:effectLst/>
+        </p:spPr>
+        <p:style>
+          <a:lnRef idx="1">
+            <a:schemeClr val="accent1"/>
+          </a:lnRef>
+          <a:fillRef idx="3">
+            <a:schemeClr val="accent1"/>
+          </a:fillRef>
+          <a:effectRef idx="2">
+            <a:schemeClr val="accent1"/>
+          </a:effectRef>
+          <a:fontRef idx="minor">
+            <a:schemeClr val="lt1"/>
+          </a:fontRef>
+        </p:style>
+        <p:txBody>
+          <a:bodyPr rtlCol="0" anchor="ctr"/>
+          <a:lstStyle/>
+          <a:p>
+            <a:pPr algn="ctr"/>
+          </a:p>
+        </p:txBody>
+      </p:sp>
+      <p:sp>
+        <p:nvSpPr>
+          <p:cNvPr id="10" name="TextBox 9"/>
+          <p:cNvSpPr txBox="1"/>
+          <p:nvPr/>
+        </p:nvSpPr>
+        <p:spPr>
+          <a:xfrm>
+            <a:off x="1371600" y="4050792"/>
+            <a:ext cx="4572000" cy="731520"/>
+          </a:xfrm>
+          <a:prstGeom prst="rect">
+            <a:avLst/>
+          </a:prstGeom>
+          <a:noFill/>
+        </p:spPr>
+        <p:txBody>
+          <a:bodyPr wrap="square" anchor="t" lIns="0" rIns="0" tIns="0" bIns="0">
+            <a:spAutoFit/>
+          </a:bodyPr>
+          <a:lstStyle/>
+          <a:p>
+            <a:pPr algn="l">
+              <a:spcAft>
+                <a:spcPts val="200"/>
+              </a:spcAft>
             </a:pPr>
             <a:r>
+              <a:rPr sz="1400" b="1" i="0">
+                <a:solidFill>
+                  <a:srgbClr val="1A1A1C"/>
+                </a:solidFill>
+                <a:latin typeface="Arial"/>
+              </a:rPr>
+              <a:t>Urban &amp; Useful</a:t>
+            </a:r>
+          </a:p>
+          <a:p>
+            <a:pPr algn="l"/>
+            <a:r>
               <a:rPr sz="1100" b="0" i="0">
+                <a:solidFill>
+                  <a:srgbClr val="868B94"/>
+                </a:solidFill>
+                <a:latin typeface="Arial"/>
+              </a:rPr>
+              <a:t>Confident, modern, accessible.</a:t>
+            </a:r>
+          </a:p>
+        </p:txBody>
+      </p:sp>
+      <p:sp>
+        <p:nvSpPr>
+          <p:cNvPr id="11" name="Oval 10"/>
+          <p:cNvSpPr/>
+          <p:nvPr/>
+        </p:nvSpPr>
+        <p:spPr>
+          <a:xfrm>
+            <a:off x="713232" y="4937760"/>
+            <a:ext cx="457200" cy="457200"/>
+          </a:xfrm>
+          <a:prstGeom prst="ellipse">
+            <a:avLst/>
+          </a:prstGeom>
+          <a:noFill/>
+          <a:ln w="15875">
+            <a:solidFill>
+              <a:srgbClr val="1B2A4A"/>
+            </a:solidFill>
+          </a:ln>
+          <a:effectLst/>
+        </p:spPr>
+        <p:style>
+          <a:lnRef idx="1">
+            <a:schemeClr val="accent1"/>
+          </a:lnRef>
+          <a:fillRef idx="3">
+            <a:schemeClr val="accent1"/>
+          </a:fillRef>
+          <a:effectRef idx="2">
+            <a:schemeClr val="accent1"/>
+          </a:effectRef>
+          <a:fontRef idx="minor">
+            <a:schemeClr val="lt1"/>
+          </a:fontRef>
+        </p:style>
+        <p:txBody>
+          <a:bodyPr rtlCol="0" anchor="ctr"/>
+          <a:lstStyle/>
+          <a:p>
+            <a:pPr algn="ctr"/>
+          </a:p>
+        </p:txBody>
+      </p:sp>
+      <p:sp>
+        <p:nvSpPr>
+          <p:cNvPr id="12" name="Oval 11"/>
+          <p:cNvSpPr/>
+          <p:nvPr/>
+        </p:nvSpPr>
+        <p:spPr>
+          <a:xfrm>
+            <a:off x="859536" y="5084064"/>
+            <a:ext cx="164592" cy="164592"/>
+          </a:xfrm>
+          <a:prstGeom prst="ellipse">
+            <a:avLst/>
+          </a:prstGeom>
+          <a:solidFill>
+            <a:srgbClr val="1B2A4A"/>
+          </a:solidFill>
+          <a:ln>
+            <a:noFill/>
+          </a:ln>
+          <a:effectLst/>
+        </p:spPr>
+        <p:style>
+          <a:lnRef idx="1">
+            <a:schemeClr val="accent1"/>
+          </a:lnRef>
+          <a:fillRef idx="3">
+            <a:schemeClr val="accent1"/>
+          </a:fillRef>
+          <a:effectRef idx="2">
+            <a:schemeClr val="accent1"/>
+          </a:effectRef>
+          <a:fontRef idx="minor">
+            <a:schemeClr val="lt1"/>
+          </a:fontRef>
+        </p:style>
+        <p:txBody>
+          <a:bodyPr rtlCol="0" anchor="ctr"/>
+          <a:lstStyle/>
+          <a:p>
+            <a:pPr algn="ctr"/>
+          </a:p>
+        </p:txBody>
+      </p:sp>
+      <p:sp>
+        <p:nvSpPr>
+          <p:cNvPr id="13" name="TextBox 12"/>
+          <p:cNvSpPr txBox="1"/>
+          <p:nvPr/>
+        </p:nvSpPr>
+        <p:spPr>
+          <a:xfrm>
+            <a:off x="1371600" y="4919472"/>
+            <a:ext cx="4572000" cy="731520"/>
+          </a:xfrm>
+          <a:prstGeom prst="rect">
+            <a:avLst/>
+          </a:prstGeom>
+          <a:noFill/>
+        </p:spPr>
+        <p:txBody>
+          <a:bodyPr wrap="square" anchor="t" lIns="0" rIns="0" tIns="0" bIns="0">
+            <a:spAutoFit/>
+          </a:bodyPr>
+          <a:lstStyle/>
+          <a:p>
+            <a:pPr algn="l">
+              <a:spcAft>
+                <a:spcPts val="200"/>
+              </a:spcAft>
+            </a:pPr>
+            <a:r>
+              <a:rPr sz="1400" b="1" i="0">
+                <a:solidFill>
+                  <a:srgbClr val="1A1A1C"/>
+                </a:solidFill>
+                <a:latin typeface="Arial"/>
+              </a:rPr>
+              <a:t>Everyday Ready</a:t>
+            </a:r>
+          </a:p>
+          <a:p>
+            <a:pPr algn="l"/>
+            <a:r>
+              <a:rPr sz="1100" b="0" i="0">
+                <a:solidFill>
+                  <a:srgbClr val="868B94"/>
+                </a:solidFill>
+                <a:latin typeface="Arial"/>
+              </a:rPr>
+              <a:t>Simple design that adapts.</a:t>
+            </a:r>
+          </a:p>
+        </p:txBody>
+      </p:sp>
+      <p:sp>
+        <p:nvSpPr>
+          <p:cNvPr id="14" name="Rectangle 13"/>
+          <p:cNvSpPr/>
+          <p:nvPr/>
+        </p:nvSpPr>
+        <p:spPr>
+          <a:xfrm>
+            <a:off x="6492240" y="960120"/>
+            <a:ext cx="5010912" cy="4983480"/>
+          </a:xfrm>
+          <a:prstGeom prst="rect">
+            <a:avLst/>
+          </a:prstGeom>
+          <a:solidFill>
+            <a:srgbClr val="EFF1F3"/>
+          </a:solidFill>
+          <a:ln>
+            <a:noFill/>
+          </a:ln>
+          <a:effectLst/>
+        </p:spPr>
+        <p:style>
+          <a:lnRef idx="1">
+            <a:schemeClr val="accent1"/>
+          </a:lnRef>
+          <a:fillRef idx="3">
+            <a:schemeClr val="accent1"/>
+          </a:fillRef>
+          <a:effectRef idx="2">
+            <a:schemeClr val="accent1"/>
+          </a:effectRef>
+          <a:fontRef idx="minor">
+            <a:schemeClr val="lt1"/>
+          </a:fontRef>
+        </p:style>
+        <p:txBody>
+          <a:bodyPr rtlCol="0" anchor="ctr"/>
+          <a:lstStyle/>
+          <a:p>
+            <a:pPr algn="ctr"/>
+          </a:p>
+        </p:txBody>
+      </p:sp>
+      <p:cxnSp>
+        <p:nvCxnSpPr>
+          <p:cNvPr id="15" name="Connector 14"/>
+          <p:cNvCxnSpPr/>
+          <p:nvPr/>
+        </p:nvCxnSpPr>
+        <p:spPr>
+          <a:xfrm>
+            <a:off x="6492240" y="960120"/>
+            <a:ext cx="237744" cy="0"/>
+          </a:xfrm>
+          <a:prstGeom prst="bentConnector3">
+            <a:avLst/>
+          </a:prstGeom>
+          <a:ln w="15875">
+            <a:solidFill>
+              <a:srgbClr val="A9AEB5"/>
+            </a:solidFill>
+          </a:ln>
+        </p:spPr>
+        <p:style>
+          <a:lnRef idx="2">
+            <a:schemeClr val="accent1"/>
+          </a:lnRef>
+          <a:fillRef idx="0">
+            <a:schemeClr val="accent1"/>
+          </a:fillRef>
+          <a:effectRef idx="1">
+            <a:schemeClr val="accent1"/>
+          </a:effectRef>
+          <a:fontRef idx="minor">
+            <a:schemeClr val="tx1"/>
+          </a:fontRef>
+        </p:style>
+      </p:cxnSp>
+      <p:cxnSp>
+        <p:nvCxnSpPr>
+          <p:cNvPr id="16" name="Connector 15"/>
+          <p:cNvCxnSpPr/>
+          <p:nvPr/>
+        </p:nvCxnSpPr>
+        <p:spPr>
+          <a:xfrm>
+            <a:off x="6492240" y="960120"/>
+            <a:ext cx="0" cy="237744"/>
+          </a:xfrm>
+          <a:prstGeom prst="bentConnector3">
+            <a:avLst/>
+          </a:prstGeom>
+          <a:ln w="15875">
+            <a:solidFill>
+              <a:srgbClr val="A9AEB5"/>
+            </a:solidFill>
+          </a:ln>
+        </p:spPr>
+        <p:style>
+          <a:lnRef idx="2">
+            <a:schemeClr val="accent1"/>
+          </a:lnRef>
+          <a:fillRef idx="0">
+            <a:schemeClr val="accent1"/>
+          </a:fillRef>
+          <a:effectRef idx="1">
+            <a:schemeClr val="accent1"/>
+          </a:effectRef>
+          <a:fontRef idx="minor">
+            <a:schemeClr val="tx1"/>
+          </a:fontRef>
+        </p:style>
+      </p:cxnSp>
+      <p:cxnSp>
+        <p:nvCxnSpPr>
+          <p:cNvPr id="17" name="Connector 16"/>
+          <p:cNvCxnSpPr/>
+          <p:nvPr/>
+        </p:nvCxnSpPr>
+        <p:spPr>
+          <a:xfrm flipH="1">
+            <a:off x="11265408" y="960120"/>
+            <a:ext cx="237744" cy="0"/>
+          </a:xfrm>
+          <a:prstGeom prst="bentConnector3">
+            <a:avLst/>
+          </a:prstGeom>
+          <a:ln w="15875">
+            <a:solidFill>
+              <a:srgbClr val="A9AEB5"/>
+            </a:solidFill>
+          </a:ln>
+        </p:spPr>
+        <p:style>
+          <a:lnRef idx="2">
+            <a:schemeClr val="accent1"/>
+          </a:lnRef>
+          <a:fillRef idx="0">
+            <a:schemeClr val="accent1"/>
+          </a:fillRef>
+          <a:effectRef idx="1">
+            <a:schemeClr val="accent1"/>
+          </a:effectRef>
+          <a:fontRef idx="minor">
+            <a:schemeClr val="tx1"/>
+          </a:fontRef>
+        </p:style>
+      </p:cxnSp>
+      <p:cxnSp>
+        <p:nvCxnSpPr>
+          <p:cNvPr id="18" name="Connector 17"/>
+          <p:cNvCxnSpPr/>
+          <p:nvPr/>
+        </p:nvCxnSpPr>
+        <p:spPr>
+          <a:xfrm>
+            <a:off x="11503152" y="960120"/>
+            <a:ext cx="0" cy="237744"/>
+          </a:xfrm>
+          <a:prstGeom prst="bentConnector3">
+            <a:avLst/>
+          </a:prstGeom>
+          <a:ln w="15875">
+            <a:solidFill>
+              <a:srgbClr val="A9AEB5"/>
+            </a:solidFill>
+          </a:ln>
+        </p:spPr>
+        <p:style>
+          <a:lnRef idx="2">
+            <a:schemeClr val="accent1"/>
+          </a:lnRef>
+          <a:fillRef idx="0">
+            <a:schemeClr val="accent1"/>
+          </a:fillRef>
+          <a:effectRef idx="1">
+            <a:schemeClr val="accent1"/>
+          </a:effectRef>
+          <a:fontRef idx="minor">
+            <a:schemeClr val="tx1"/>
+          </a:fontRef>
+        </p:style>
+      </p:cxnSp>
+      <p:cxnSp>
+        <p:nvCxnSpPr>
+          <p:cNvPr id="19" name="Connector 18"/>
+          <p:cNvCxnSpPr/>
+          <p:nvPr/>
+        </p:nvCxnSpPr>
+        <p:spPr>
+          <a:xfrm>
+            <a:off x="6492240" y="5943600"/>
+            <a:ext cx="237744" cy="0"/>
+          </a:xfrm>
+          <a:prstGeom prst="bentConnector3">
+            <a:avLst/>
+          </a:prstGeom>
+          <a:ln w="15875">
+            <a:solidFill>
+              <a:srgbClr val="A9AEB5"/>
+            </a:solidFill>
+          </a:ln>
+        </p:spPr>
+        <p:style>
+          <a:lnRef idx="2">
+            <a:schemeClr val="accent1"/>
+          </a:lnRef>
+          <a:fillRef idx="0">
+            <a:schemeClr val="accent1"/>
+          </a:fillRef>
+          <a:effectRef idx="1">
+            <a:schemeClr val="accent1"/>
+          </a:effectRef>
+          <a:fontRef idx="minor">
+            <a:schemeClr val="tx1"/>
+          </a:fontRef>
+        </p:style>
+      </p:cxnSp>
+      <p:cxnSp>
+        <p:nvCxnSpPr>
+          <p:cNvPr id="20" name="Connector 19"/>
+          <p:cNvCxnSpPr/>
+          <p:nvPr/>
+        </p:nvCxnSpPr>
+        <p:spPr>
+          <a:xfrm flipV="1">
+            <a:off x="6492240" y="5705856"/>
+            <a:ext cx="0" cy="237744"/>
+          </a:xfrm>
+          <a:prstGeom prst="bentConnector3">
+            <a:avLst/>
+          </a:prstGeom>
+          <a:ln w="15875">
+            <a:solidFill>
+              <a:srgbClr val="A9AEB5"/>
+            </a:solidFill>
+          </a:ln>
+        </p:spPr>
+        <p:style>
+          <a:lnRef idx="2">
+            <a:schemeClr val="accent1"/>
+          </a:lnRef>
+          <a:fillRef idx="0">
+            <a:schemeClr val="accent1"/>
+          </a:fillRef>
+          <a:effectRef idx="1">
+            <a:schemeClr val="accent1"/>
+          </a:effectRef>
+          <a:fontRef idx="minor">
+            <a:schemeClr val="tx1"/>
+          </a:fontRef>
+        </p:style>
+      </p:cxnSp>
+      <p:cxnSp>
+        <p:nvCxnSpPr>
+          <p:cNvPr id="21" name="Connector 20"/>
+          <p:cNvCxnSpPr/>
+          <p:nvPr/>
+        </p:nvCxnSpPr>
+        <p:spPr>
+          <a:xfrm flipH="1">
+            <a:off x="11265408" y="5943600"/>
+            <a:ext cx="237744" cy="0"/>
+          </a:xfrm>
+          <a:prstGeom prst="bentConnector3">
+            <a:avLst/>
+          </a:prstGeom>
+          <a:ln w="15875">
+            <a:solidFill>
+              <a:srgbClr val="A9AEB5"/>
+            </a:solidFill>
+          </a:ln>
+        </p:spPr>
+        <p:style>
+          <a:lnRef idx="2">
+            <a:schemeClr val="accent1"/>
+          </a:lnRef>
+          <a:fillRef idx="0">
+            <a:schemeClr val="accent1"/>
+          </a:fillRef>
+          <a:effectRef idx="1">
+            <a:schemeClr val="accent1"/>
+          </a:effectRef>
+          <a:fontRef idx="minor">
+            <a:schemeClr val="tx1"/>
+          </a:fontRef>
+        </p:style>
+      </p:cxnSp>
+      <p:cxnSp>
+        <p:nvCxnSpPr>
+          <p:cNvPr id="22" name="Connector 21"/>
+          <p:cNvCxnSpPr/>
+          <p:nvPr/>
+        </p:nvCxnSpPr>
+        <p:spPr>
+          <a:xfrm flipV="1">
+            <a:off x="11503152" y="5705856"/>
+            <a:ext cx="0" cy="237744"/>
+          </a:xfrm>
+          <a:prstGeom prst="bentConnector3">
+            <a:avLst/>
+          </a:prstGeom>
+          <a:ln w="15875">
+            <a:solidFill>
+              <a:srgbClr val="A9AEB5"/>
+            </a:solidFill>
+          </a:ln>
+        </p:spPr>
+        <p:style>
+          <a:lnRef idx="2">
+            <a:schemeClr val="accent1"/>
+          </a:lnRef>
+          <a:fillRef idx="0">
+            <a:schemeClr val="accent1"/>
+          </a:fillRef>
+          <a:effectRef idx="1">
+            <a:schemeClr val="accent1"/>
+          </a:effectRef>
+          <a:fontRef idx="minor">
+            <a:schemeClr val="tx1"/>
+          </a:fontRef>
+        </p:style>
+      </p:cxnSp>
+      <p:sp>
+        <p:nvSpPr>
+          <p:cNvPr id="23" name="Rounded Rectangle 22"/>
+          <p:cNvSpPr/>
+          <p:nvPr/>
+        </p:nvSpPr>
+        <p:spPr>
+          <a:xfrm>
+            <a:off x="8741664" y="2976372"/>
+            <a:ext cx="512064" cy="512064"/>
+          </a:xfrm>
+          <a:prstGeom prst="roundRect">
+            <a:avLst/>
+          </a:prstGeom>
+          <a:noFill/>
+          <a:ln w="19050">
+            <a:solidFill>
+              <a:srgbClr val="A9AEB5"/>
+            </a:solidFill>
+          </a:ln>
+          <a:effectLst/>
+        </p:spPr>
+        <p:style>
+          <a:lnRef idx="1">
+            <a:schemeClr val="accent1"/>
+          </a:lnRef>
+          <a:fillRef idx="3">
+            <a:schemeClr val="accent1"/>
+          </a:fillRef>
+          <a:effectRef idx="2">
+            <a:schemeClr val="accent1"/>
+          </a:effectRef>
+          <a:fontRef idx="minor">
+            <a:schemeClr val="lt1"/>
+          </a:fontRef>
+        </p:style>
+        <p:txBody>
+          <a:bodyPr rtlCol="0" anchor="ctr"/>
+          <a:lstStyle/>
+          <a:p>
+            <a:pPr algn="ctr"/>
+          </a:p>
+        </p:txBody>
+      </p:sp>
+      <p:sp>
+        <p:nvSpPr>
+          <p:cNvPr id="24" name="Oval 23"/>
+          <p:cNvSpPr/>
+          <p:nvPr/>
+        </p:nvSpPr>
+        <p:spPr>
+          <a:xfrm>
+            <a:off x="8854318" y="3078784"/>
+            <a:ext cx="100584" cy="100584"/>
+          </a:xfrm>
+          <a:prstGeom prst="ellipse">
+            <a:avLst/>
+          </a:prstGeom>
+          <a:solidFill>
+            <a:srgbClr val="A9AEB5"/>
+          </a:solidFill>
+          <a:ln>
+            <a:noFill/>
+          </a:ln>
+          <a:effectLst/>
+        </p:spPr>
+        <p:style>
+          <a:lnRef idx="1">
+            <a:schemeClr val="accent1"/>
+          </a:lnRef>
+          <a:fillRef idx="3">
+            <a:schemeClr val="accent1"/>
+          </a:fillRef>
+          <a:effectRef idx="2">
+            <a:schemeClr val="accent1"/>
+          </a:effectRef>
+          <a:fontRef idx="minor">
+            <a:schemeClr val="lt1"/>
+          </a:fontRef>
+        </p:style>
+        <p:txBody>
+          <a:bodyPr rtlCol="0" anchor="ctr"/>
+          <a:lstStyle/>
+          <a:p>
+            <a:pPr algn="ctr"/>
+          </a:p>
+        </p:txBody>
+      </p:sp>
+      <p:sp>
+        <p:nvSpPr>
+          <p:cNvPr id="25" name="Isosceles Triangle 24"/>
+          <p:cNvSpPr/>
+          <p:nvPr/>
+        </p:nvSpPr>
+        <p:spPr>
+          <a:xfrm>
+            <a:off x="8895283" y="3201680"/>
+            <a:ext cx="274320" cy="164592"/>
+          </a:xfrm>
+          <a:prstGeom prst="triangle">
+            <a:avLst/>
+          </a:prstGeom>
+          <a:solidFill>
+            <a:srgbClr val="A9AEB5"/>
+          </a:solidFill>
+          <a:ln>
+            <a:noFill/>
+          </a:ln>
+          <a:effectLst/>
+        </p:spPr>
+        <p:style>
+          <a:lnRef idx="1">
+            <a:schemeClr val="accent1"/>
+          </a:lnRef>
+          <a:fillRef idx="3">
+            <a:schemeClr val="accent1"/>
+          </a:fillRef>
+          <a:effectRef idx="2">
+            <a:schemeClr val="accent1"/>
+          </a:effectRef>
+          <a:fontRef idx="minor">
+            <a:schemeClr val="lt1"/>
+          </a:fontRef>
+        </p:style>
+        <p:txBody>
+          <a:bodyPr rtlCol="0" anchor="ctr"/>
+          <a:lstStyle/>
+          <a:p>
+            <a:pPr algn="ctr"/>
+          </a:p>
+        </p:txBody>
+      </p:sp>
+      <p:sp>
+        <p:nvSpPr>
+          <p:cNvPr id="26" name="TextBox 25"/>
+          <p:cNvSpPr txBox="1"/>
+          <p:nvPr/>
+        </p:nvSpPr>
+        <p:spPr>
+          <a:xfrm>
+            <a:off x="6492240" y="3579876"/>
+            <a:ext cx="5010912" cy="365760"/>
+          </a:xfrm>
+          <a:prstGeom prst="rect">
+            <a:avLst/>
+          </a:prstGeom>
+          <a:noFill/>
+        </p:spPr>
+        <p:txBody>
+          <a:bodyPr wrap="square" anchor="t" lIns="0" rIns="0" tIns="0" bIns="0">
+            <a:spAutoFit/>
+          </a:bodyPr>
+          <a:lstStyle/>
+          <a:p>
+            <a:pPr algn="ctr"/>
+            <a:r>
+              <a:rPr sz="1050" b="1" i="0" spc="200">
+                <a:solidFill>
+                  <a:srgbClr val="868B94"/>
+                </a:solidFill>
+                <a:latin typeface="Arial"/>
+              </a:rPr>
+              <a:t>LARGE EXTERIOR IMAGE</a:t>
+            </a:r>
+          </a:p>
+        </p:txBody>
+      </p:sp>
+      <p:sp>
+        <p:nvSpPr>
+          <p:cNvPr id="27" name="TextBox 26"/>
+          <p:cNvSpPr txBox="1"/>
+          <p:nvPr/>
+        </p:nvSpPr>
+        <p:spPr>
+          <a:xfrm>
+            <a:off x="6492240" y="3854196"/>
+            <a:ext cx="5010912" cy="274320"/>
+          </a:xfrm>
+          <a:prstGeom prst="rect">
+            <a:avLst/>
+          </a:prstGeom>
+          <a:noFill/>
+        </p:spPr>
+        <p:txBody>
+          <a:bodyPr wrap="square" anchor="t" lIns="0" rIns="0" tIns="0" bIns="0">
+            <a:spAutoFit/>
+          </a:bodyPr>
+          <a:lstStyle/>
+          <a:p>
+            <a:pPr algn="ctr"/>
+            <a:r>
+              <a:rPr sz="800" b="0" i="0" spc="80">
                 <a:solidFill>
                   <a:srgbClr val="C8CCD2"/>
                 </a:solidFill>
                 <a:latin typeface="Arial"/>
               </a:rPr>
-              <a:t>Innovative practicality
-for everyday life</a:t>
-            </a:r>
-          </a:p>
-        </p:txBody>
-      </p:sp>
-      <p:sp>
-        <p:nvSpPr>
-          <p:cNvPr id="7" name="Rectangle 6"/>
-          <p:cNvSpPr/>
-          <p:nvPr/>
-        </p:nvSpPr>
-        <p:spPr>
-          <a:xfrm>
-            <a:off x="685800" y="4297680"/>
-            <a:ext cx="2430018" cy="1371600"/>
-          </a:xfrm>
-          <a:prstGeom prst="rect">
-            <a:avLst/>
-          </a:prstGeom>
-          <a:solidFill>
-            <a:srgbClr val="F7F8F9"/>
-          </a:solidFill>
-          <a:ln w="6350">
-            <a:solidFill>
-              <a:srgbClr val="C8CCD2"/>
-            </a:solidFill>
-          </a:ln>
-          <a:effectLst/>
-        </p:spPr>
-        <p:style>
-          <a:lnRef idx="1">
-            <a:schemeClr val="accent1"/>
-          </a:lnRef>
-          <a:fillRef idx="3">
-            <a:schemeClr val="accent1"/>
-          </a:fillRef>
-          <a:effectRef idx="2">
-            <a:schemeClr val="accent1"/>
-          </a:effectRef>
-          <a:fontRef idx="minor">
-            <a:schemeClr val="lt1"/>
-          </a:fontRef>
-        </p:style>
-        <p:txBody>
-          <a:bodyPr rtlCol="0" anchor="ctr"/>
-          <a:lstStyle/>
-          <a:p>
-            <a:pPr algn="ctr"/>
-          </a:p>
-        </p:txBody>
-      </p:sp>
-      <p:sp>
-        <p:nvSpPr>
-          <p:cNvPr id="8" name="TextBox 7"/>
-          <p:cNvSpPr txBox="1"/>
-          <p:nvPr/>
-        </p:nvSpPr>
-        <p:spPr>
-          <a:xfrm>
-            <a:off x="685800" y="4297680"/>
-            <a:ext cx="2430018" cy="1371600"/>
-          </a:xfrm>
-          <a:prstGeom prst="rect">
-            <a:avLst/>
-          </a:prstGeom>
-          <a:noFill/>
-        </p:spPr>
-        <p:txBody>
-          <a:bodyPr wrap="square" anchor="ctr" lIns="0" rIns="0" tIns="0" bIns="0">
-            <a:spAutoFit/>
-          </a:bodyPr>
-          <a:lstStyle/>
-          <a:p>
-            <a:pPr algn="ctr">
-              <a:spcAft>
-                <a:spcPts val="400"/>
-              </a:spcAft>
-            </a:pPr>
-            <a:r>
-              <a:rPr sz="1200" b="1" i="0" spc="150">
-                <a:solidFill>
-                  <a:srgbClr val="868B94"/>
-                </a:solidFill>
-                <a:latin typeface="Arial"/>
-              </a:rPr>
-              <a:t>BRAND A</a:t>
-            </a:r>
-          </a:p>
-          <a:p>
-            <a:pPr algn="ctr">
-              <a:lnSpc>
-                <a:spcPct val="110000"/>
-              </a:lnSpc>
-            </a:pPr>
-            <a:r>
-              <a:rPr sz="950" b="0" i="0">
-                <a:solidFill>
-                  <a:srgbClr val="C8CCD2"/>
-                </a:solidFill>
-                <a:latin typeface="Arial"/>
-              </a:rPr>
-              <a:t>Distinct role</a:t>
-            </a:r>
-          </a:p>
-        </p:txBody>
-      </p:sp>
-      <p:sp>
-        <p:nvSpPr>
-          <p:cNvPr id="9" name="Rectangle 8"/>
-          <p:cNvSpPr/>
-          <p:nvPr/>
-        </p:nvSpPr>
-        <p:spPr>
-          <a:xfrm>
-            <a:off x="3481578" y="4297680"/>
-            <a:ext cx="2430018" cy="1371600"/>
-          </a:xfrm>
-          <a:prstGeom prst="rect">
-            <a:avLst/>
-          </a:prstGeom>
-          <a:solidFill>
-            <a:srgbClr val="F7F8F9"/>
-          </a:solidFill>
-          <a:ln w="6350">
-            <a:solidFill>
-              <a:srgbClr val="C8CCD2"/>
-            </a:solidFill>
-          </a:ln>
-          <a:effectLst/>
-        </p:spPr>
-        <p:style>
-          <a:lnRef idx="1">
-            <a:schemeClr val="accent1"/>
-          </a:lnRef>
-          <a:fillRef idx="3">
-            <a:schemeClr val="accent1"/>
-          </a:fillRef>
-          <a:effectRef idx="2">
-            <a:schemeClr val="accent1"/>
-          </a:effectRef>
-          <a:fontRef idx="minor">
-            <a:schemeClr val="lt1"/>
-          </a:fontRef>
-        </p:style>
-        <p:txBody>
-          <a:bodyPr rtlCol="0" anchor="ctr"/>
-          <a:lstStyle/>
-          <a:p>
-            <a:pPr algn="ctr"/>
-          </a:p>
-        </p:txBody>
-      </p:sp>
-      <p:sp>
-        <p:nvSpPr>
-          <p:cNvPr id="10" name="TextBox 9"/>
-          <p:cNvSpPr txBox="1"/>
-          <p:nvPr/>
-        </p:nvSpPr>
-        <p:spPr>
-          <a:xfrm>
-            <a:off x="3481578" y="4297680"/>
-            <a:ext cx="2430018" cy="1371600"/>
-          </a:xfrm>
-          <a:prstGeom prst="rect">
-            <a:avLst/>
-          </a:prstGeom>
-          <a:noFill/>
-        </p:spPr>
-        <p:txBody>
-          <a:bodyPr wrap="square" anchor="ctr" lIns="0" rIns="0" tIns="0" bIns="0">
-            <a:spAutoFit/>
-          </a:bodyPr>
-          <a:lstStyle/>
-          <a:p>
-            <a:pPr algn="ctr">
-              <a:spcAft>
-                <a:spcPts val="400"/>
-              </a:spcAft>
-            </a:pPr>
-            <a:r>
-              <a:rPr sz="1200" b="1" i="0" spc="150">
-                <a:solidFill>
-                  <a:srgbClr val="868B94"/>
-                </a:solidFill>
-                <a:latin typeface="Arial"/>
-              </a:rPr>
-              <a:t>BRAND B</a:t>
-            </a:r>
-          </a:p>
-          <a:p>
-            <a:pPr algn="ctr">
-              <a:lnSpc>
-                <a:spcPct val="110000"/>
-              </a:lnSpc>
-            </a:pPr>
-            <a:r>
-              <a:rPr sz="950" b="0" i="0">
-                <a:solidFill>
-                  <a:srgbClr val="C8CCD2"/>
-                </a:solidFill>
-                <a:latin typeface="Arial"/>
-              </a:rPr>
-              <a:t>Distinct role</a:t>
-            </a:r>
-          </a:p>
-        </p:txBody>
-      </p:sp>
-      <p:sp>
-        <p:nvSpPr>
-          <p:cNvPr id="11" name="Rectangle 10"/>
-          <p:cNvSpPr/>
-          <p:nvPr/>
-        </p:nvSpPr>
-        <p:spPr>
-          <a:xfrm>
-            <a:off x="6277356" y="4297680"/>
-            <a:ext cx="2430018" cy="1371600"/>
-          </a:xfrm>
-          <a:prstGeom prst="rect">
-            <a:avLst/>
-          </a:prstGeom>
-          <a:solidFill>
-            <a:srgbClr val="F7F8F9"/>
-          </a:solidFill>
-          <a:ln w="6350">
-            <a:solidFill>
-              <a:srgbClr val="C8CCD2"/>
-            </a:solidFill>
-          </a:ln>
-          <a:effectLst/>
-        </p:spPr>
-        <p:style>
-          <a:lnRef idx="1">
-            <a:schemeClr val="accent1"/>
-          </a:lnRef>
-          <a:fillRef idx="3">
-            <a:schemeClr val="accent1"/>
-          </a:fillRef>
-          <a:effectRef idx="2">
-            <a:schemeClr val="accent1"/>
-          </a:effectRef>
-          <a:fontRef idx="minor">
-            <a:schemeClr val="lt1"/>
-          </a:fontRef>
-        </p:style>
-        <p:txBody>
-          <a:bodyPr rtlCol="0" anchor="ctr"/>
-          <a:lstStyle/>
-          <a:p>
-            <a:pPr algn="ctr"/>
-          </a:p>
-        </p:txBody>
-      </p:sp>
-      <p:sp>
-        <p:nvSpPr>
-          <p:cNvPr id="12" name="TextBox 11"/>
-          <p:cNvSpPr txBox="1"/>
-          <p:nvPr/>
-        </p:nvSpPr>
-        <p:spPr>
-          <a:xfrm>
-            <a:off x="6277356" y="4297680"/>
-            <a:ext cx="2430018" cy="1371600"/>
-          </a:xfrm>
-          <a:prstGeom prst="rect">
-            <a:avLst/>
-          </a:prstGeom>
-          <a:noFill/>
-        </p:spPr>
-        <p:txBody>
-          <a:bodyPr wrap="square" anchor="ctr" lIns="0" rIns="0" tIns="0" bIns="0">
-            <a:spAutoFit/>
-          </a:bodyPr>
-          <a:lstStyle/>
-          <a:p>
-            <a:pPr algn="ctr">
-              <a:spcAft>
-                <a:spcPts val="400"/>
-              </a:spcAft>
-            </a:pPr>
-            <a:r>
-              <a:rPr sz="1200" b="1" i="0" spc="150">
-                <a:solidFill>
-                  <a:srgbClr val="868B94"/>
-                </a:solidFill>
-                <a:latin typeface="Arial"/>
-              </a:rPr>
-              <a:t>BRAND C</a:t>
-            </a:r>
-          </a:p>
-          <a:p>
-            <a:pPr algn="ctr">
-              <a:lnSpc>
-                <a:spcPct val="110000"/>
-              </a:lnSpc>
-            </a:pPr>
-            <a:r>
-              <a:rPr sz="950" b="0" i="0">
-                <a:solidFill>
-                  <a:srgbClr val="C8CCD2"/>
-                </a:solidFill>
-                <a:latin typeface="Arial"/>
-              </a:rPr>
-              <a:t>Distinct role</a:t>
-            </a:r>
-          </a:p>
-        </p:txBody>
-      </p:sp>
-      <p:sp>
-        <p:nvSpPr>
-          <p:cNvPr id="13" name="Rectangle 12"/>
-          <p:cNvSpPr/>
-          <p:nvPr/>
-        </p:nvSpPr>
-        <p:spPr>
-          <a:xfrm>
-            <a:off x="9073134" y="4297680"/>
-            <a:ext cx="2430018" cy="1371600"/>
-          </a:xfrm>
-          <a:prstGeom prst="rect">
-            <a:avLst/>
-          </a:prstGeom>
-          <a:solidFill>
-            <a:srgbClr val="F7F8F9"/>
-          </a:solidFill>
-          <a:ln w="6350">
-            <a:solidFill>
-              <a:srgbClr val="C8CCD2"/>
-            </a:solidFill>
-          </a:ln>
-          <a:effectLst/>
-        </p:spPr>
-        <p:style>
-          <a:lnRef idx="1">
-            <a:schemeClr val="accent1"/>
-          </a:lnRef>
-          <a:fillRef idx="3">
-            <a:schemeClr val="accent1"/>
-          </a:fillRef>
-          <a:effectRef idx="2">
-            <a:schemeClr val="accent1"/>
-          </a:effectRef>
-          <a:fontRef idx="minor">
-            <a:schemeClr val="lt1"/>
-          </a:fontRef>
-        </p:style>
-        <p:txBody>
-          <a:bodyPr rtlCol="0" anchor="ctr"/>
-          <a:lstStyle/>
-          <a:p>
-            <a:pPr algn="ctr"/>
-          </a:p>
-        </p:txBody>
-      </p:sp>
-      <p:sp>
-        <p:nvSpPr>
-          <p:cNvPr id="14" name="TextBox 13"/>
-          <p:cNvSpPr txBox="1"/>
-          <p:nvPr/>
-        </p:nvSpPr>
-        <p:spPr>
-          <a:xfrm>
-            <a:off x="9073134" y="4297680"/>
-            <a:ext cx="2430018" cy="1371600"/>
-          </a:xfrm>
-          <a:prstGeom prst="rect">
-            <a:avLst/>
-          </a:prstGeom>
-          <a:noFill/>
-        </p:spPr>
-        <p:txBody>
-          <a:bodyPr wrap="square" anchor="ctr" lIns="0" rIns="0" tIns="0" bIns="0">
-            <a:spAutoFit/>
-          </a:bodyPr>
-          <a:lstStyle/>
-          <a:p>
-            <a:pPr algn="ctr">
-              <a:spcAft>
-                <a:spcPts val="400"/>
-              </a:spcAft>
-            </a:pPr>
-            <a:r>
-              <a:rPr sz="1200" b="1" i="0" spc="150">
-                <a:solidFill>
-                  <a:srgbClr val="868B94"/>
-                </a:solidFill>
-                <a:latin typeface="Arial"/>
-              </a:rPr>
-              <a:t>BRAND D</a:t>
-            </a:r>
-          </a:p>
-          <a:p>
-            <a:pPr algn="ctr">
-              <a:lnSpc>
-                <a:spcPct val="110000"/>
-              </a:lnSpc>
-            </a:pPr>
-            <a:r>
-              <a:rPr sz="950" b="0" i="0">
-                <a:solidFill>
-                  <a:srgbClr val="C8CCD2"/>
-                </a:solidFill>
-                <a:latin typeface="Arial"/>
-              </a:rPr>
-              <a:t>Distinct role</a:t>
-            </a:r>
-          </a:p>
-        </p:txBody>
-      </p:sp>
-      <p:sp>
-        <p:nvSpPr>
-          <p:cNvPr id="15" name="TextBox 14"/>
+              <a:t>Replace · 16:9 · 300dpi</a:t>
+            </a:r>
+          </a:p>
+        </p:txBody>
+      </p:sp>
+      <p:sp>
+        <p:nvSpPr>
+          <p:cNvPr id="28" name="TextBox 27"/>
           <p:cNvSpPr txBox="1"/>
           <p:nvPr/>
         </p:nvSpPr>
@@ -10801,7 +11386,7 @@
       </p:sp>
       <p:sp>
         <p:nvSpPr>
-          <p:cNvPr id="16" name="TextBox 15"/>
+          <p:cNvPr id="29" name="TextBox 28"/>
           <p:cNvSpPr txBox="1"/>
           <p:nvPr/>
         </p:nvSpPr>
@@ -10836,7 +11421,7 @@
       </p:sp>
       <p:sp>
         <p:nvSpPr>
-          <p:cNvPr id="17" name="TextBox 16"/>
+          <p:cNvPr id="30" name="TextBox 29"/>
           <p:cNvSpPr txBox="1"/>
           <p:nvPr/>
         </p:nvSpPr>
@@ -10903,7 +11488,7 @@
         </p:nvSpPr>
         <p:spPr>
           <a:xfrm>
-            <a:off x="685800" y="640080"/>
+            <a:off x="685800" y="548640"/>
             <a:ext cx="7315200" cy="274320"/>
           </a:xfrm>
           <a:prstGeom prst="rect">
@@ -10925,7 +11510,7 @@
                 </a:solidFill>
                 <a:latin typeface="Arial"/>
               </a:rPr>
-              <a:t>LOOKING FORWARD</a:t>
+              <a:t>ARROW CROSS</a:t>
             </a:r>
           </a:p>
         </p:txBody>
@@ -10938,8 +11523,8 @@
         </p:nvSpPr>
         <p:spPr>
           <a:xfrm>
-            <a:off x="658368" y="960120"/>
-            <a:ext cx="10515600" cy="822960"/>
+            <a:off x="658368" y="868680"/>
+            <a:ext cx="10058400" cy="640080"/>
           </a:xfrm>
           <a:prstGeom prst="rect">
             <a:avLst/>
@@ -10954,13 +11539,13 @@
           <a:p>
             <a:pPr algn="l"/>
             <a:r>
-              <a:rPr sz="2800" b="1" i="0">
+              <a:rPr sz="2600" b="1" i="0">
                 <a:solidFill>
                   <a:srgbClr val="1A1A1C"/>
                 </a:solidFill>
                 <a:latin typeface="Arial"/>
               </a:rPr>
-              <a:t>Future Customer Experience</a:t>
+              <a:t>Arrow Cross Interior</a:t>
             </a:r>
           </a:p>
         </p:txBody>
@@ -10973,19 +11558,17 @@
         </p:nvSpPr>
         <p:spPr>
           <a:xfrm>
-            <a:off x="685800" y="2057400"/>
-            <a:ext cx="3361944" cy="1828800"/>
+            <a:off x="685800" y="1645920"/>
+            <a:ext cx="10817352" cy="4251960"/>
           </a:xfrm>
           <a:prstGeom prst="rect">
             <a:avLst/>
           </a:prstGeom>
           <a:solidFill>
-            <a:srgbClr val="F7F8F9"/>
+            <a:srgbClr val="EFF1F3"/>
           </a:solidFill>
-          <a:ln w="6350">
-            <a:solidFill>
-              <a:srgbClr val="C8CCD2"/>
-            </a:solidFill>
+          <a:ln>
+            <a:noFill/>
           </a:ln>
           <a:effectLst/>
         </p:spPr>
@@ -11011,26 +11594,306 @@
           </a:p>
         </p:txBody>
       </p:sp>
-      <p:sp>
-        <p:nvSpPr>
-          <p:cNvPr id="5" name="Rounded Rectangle 4"/>
-          <p:cNvSpPr/>
-          <p:nvPr/>
-        </p:nvSpPr>
-        <p:spPr>
-          <a:xfrm>
-            <a:off x="1005840" y="2377440"/>
-            <a:ext cx="640080" cy="640080"/>
-          </a:xfrm>
-          <a:prstGeom prst="roundRect">
-            <a:avLst/>
-          </a:prstGeom>
-          <a:noFill/>
+      <p:cxnSp>
+        <p:nvCxnSpPr>
+          <p:cNvPr id="5" name="Connector 4"/>
+          <p:cNvCxnSpPr/>
+          <p:nvPr/>
+        </p:nvCxnSpPr>
+        <p:spPr>
+          <a:xfrm>
+            <a:off x="685800" y="1645920"/>
+            <a:ext cx="237744" cy="0"/>
+          </a:xfrm>
+          <a:prstGeom prst="bentConnector3">
+            <a:avLst/>
+          </a:prstGeom>
           <a:ln w="15875">
             <a:solidFill>
-              <a:srgbClr val="1B2A4A"/>
+              <a:srgbClr val="A9AEB5"/>
             </a:solidFill>
           </a:ln>
+        </p:spPr>
+        <p:style>
+          <a:lnRef idx="2">
+            <a:schemeClr val="accent1"/>
+          </a:lnRef>
+          <a:fillRef idx="0">
+            <a:schemeClr val="accent1"/>
+          </a:fillRef>
+          <a:effectRef idx="1">
+            <a:schemeClr val="accent1"/>
+          </a:effectRef>
+          <a:fontRef idx="minor">
+            <a:schemeClr val="tx1"/>
+          </a:fontRef>
+        </p:style>
+      </p:cxnSp>
+      <p:cxnSp>
+        <p:nvCxnSpPr>
+          <p:cNvPr id="6" name="Connector 5"/>
+          <p:cNvCxnSpPr/>
+          <p:nvPr/>
+        </p:nvCxnSpPr>
+        <p:spPr>
+          <a:xfrm>
+            <a:off x="685800" y="1645920"/>
+            <a:ext cx="0" cy="237744"/>
+          </a:xfrm>
+          <a:prstGeom prst="bentConnector3">
+            <a:avLst/>
+          </a:prstGeom>
+          <a:ln w="15875">
+            <a:solidFill>
+              <a:srgbClr val="A9AEB5"/>
+            </a:solidFill>
+          </a:ln>
+        </p:spPr>
+        <p:style>
+          <a:lnRef idx="2">
+            <a:schemeClr val="accent1"/>
+          </a:lnRef>
+          <a:fillRef idx="0">
+            <a:schemeClr val="accent1"/>
+          </a:fillRef>
+          <a:effectRef idx="1">
+            <a:schemeClr val="accent1"/>
+          </a:effectRef>
+          <a:fontRef idx="minor">
+            <a:schemeClr val="tx1"/>
+          </a:fontRef>
+        </p:style>
+      </p:cxnSp>
+      <p:cxnSp>
+        <p:nvCxnSpPr>
+          <p:cNvPr id="7" name="Connector 6"/>
+          <p:cNvCxnSpPr/>
+          <p:nvPr/>
+        </p:nvCxnSpPr>
+        <p:spPr>
+          <a:xfrm flipH="1">
+            <a:off x="11265408" y="1645920"/>
+            <a:ext cx="237744" cy="0"/>
+          </a:xfrm>
+          <a:prstGeom prst="bentConnector3">
+            <a:avLst/>
+          </a:prstGeom>
+          <a:ln w="15875">
+            <a:solidFill>
+              <a:srgbClr val="A9AEB5"/>
+            </a:solidFill>
+          </a:ln>
+        </p:spPr>
+        <p:style>
+          <a:lnRef idx="2">
+            <a:schemeClr val="accent1"/>
+          </a:lnRef>
+          <a:fillRef idx="0">
+            <a:schemeClr val="accent1"/>
+          </a:fillRef>
+          <a:effectRef idx="1">
+            <a:schemeClr val="accent1"/>
+          </a:effectRef>
+          <a:fontRef idx="minor">
+            <a:schemeClr val="tx1"/>
+          </a:fontRef>
+        </p:style>
+      </p:cxnSp>
+      <p:cxnSp>
+        <p:nvCxnSpPr>
+          <p:cNvPr id="8" name="Connector 7"/>
+          <p:cNvCxnSpPr/>
+          <p:nvPr/>
+        </p:nvCxnSpPr>
+        <p:spPr>
+          <a:xfrm>
+            <a:off x="11503152" y="1645920"/>
+            <a:ext cx="0" cy="237744"/>
+          </a:xfrm>
+          <a:prstGeom prst="bentConnector3">
+            <a:avLst/>
+          </a:prstGeom>
+          <a:ln w="15875">
+            <a:solidFill>
+              <a:srgbClr val="A9AEB5"/>
+            </a:solidFill>
+          </a:ln>
+        </p:spPr>
+        <p:style>
+          <a:lnRef idx="2">
+            <a:schemeClr val="accent1"/>
+          </a:lnRef>
+          <a:fillRef idx="0">
+            <a:schemeClr val="accent1"/>
+          </a:fillRef>
+          <a:effectRef idx="1">
+            <a:schemeClr val="accent1"/>
+          </a:effectRef>
+          <a:fontRef idx="minor">
+            <a:schemeClr val="tx1"/>
+          </a:fontRef>
+        </p:style>
+      </p:cxnSp>
+      <p:cxnSp>
+        <p:nvCxnSpPr>
+          <p:cNvPr id="9" name="Connector 8"/>
+          <p:cNvCxnSpPr/>
+          <p:nvPr/>
+        </p:nvCxnSpPr>
+        <p:spPr>
+          <a:xfrm>
+            <a:off x="685800" y="5897880"/>
+            <a:ext cx="237744" cy="0"/>
+          </a:xfrm>
+          <a:prstGeom prst="bentConnector3">
+            <a:avLst/>
+          </a:prstGeom>
+          <a:ln w="15875">
+            <a:solidFill>
+              <a:srgbClr val="A9AEB5"/>
+            </a:solidFill>
+          </a:ln>
+        </p:spPr>
+        <p:style>
+          <a:lnRef idx="2">
+            <a:schemeClr val="accent1"/>
+          </a:lnRef>
+          <a:fillRef idx="0">
+            <a:schemeClr val="accent1"/>
+          </a:fillRef>
+          <a:effectRef idx="1">
+            <a:schemeClr val="accent1"/>
+          </a:effectRef>
+          <a:fontRef idx="minor">
+            <a:schemeClr val="tx1"/>
+          </a:fontRef>
+        </p:style>
+      </p:cxnSp>
+      <p:cxnSp>
+        <p:nvCxnSpPr>
+          <p:cNvPr id="10" name="Connector 9"/>
+          <p:cNvCxnSpPr/>
+          <p:nvPr/>
+        </p:nvCxnSpPr>
+        <p:spPr>
+          <a:xfrm flipV="1">
+            <a:off x="685800" y="5660136"/>
+            <a:ext cx="0" cy="237744"/>
+          </a:xfrm>
+          <a:prstGeom prst="bentConnector3">
+            <a:avLst/>
+          </a:prstGeom>
+          <a:ln w="15875">
+            <a:solidFill>
+              <a:srgbClr val="A9AEB5"/>
+            </a:solidFill>
+          </a:ln>
+        </p:spPr>
+        <p:style>
+          <a:lnRef idx="2">
+            <a:schemeClr val="accent1"/>
+          </a:lnRef>
+          <a:fillRef idx="0">
+            <a:schemeClr val="accent1"/>
+          </a:fillRef>
+          <a:effectRef idx="1">
+            <a:schemeClr val="accent1"/>
+          </a:effectRef>
+          <a:fontRef idx="minor">
+            <a:schemeClr val="tx1"/>
+          </a:fontRef>
+        </p:style>
+      </p:cxnSp>
+      <p:cxnSp>
+        <p:nvCxnSpPr>
+          <p:cNvPr id="11" name="Connector 10"/>
+          <p:cNvCxnSpPr/>
+          <p:nvPr/>
+        </p:nvCxnSpPr>
+        <p:spPr>
+          <a:xfrm flipH="1">
+            <a:off x="11265408" y="5897880"/>
+            <a:ext cx="237744" cy="0"/>
+          </a:xfrm>
+          <a:prstGeom prst="bentConnector3">
+            <a:avLst/>
+          </a:prstGeom>
+          <a:ln w="15875">
+            <a:solidFill>
+              <a:srgbClr val="A9AEB5"/>
+            </a:solidFill>
+          </a:ln>
+        </p:spPr>
+        <p:style>
+          <a:lnRef idx="2">
+            <a:schemeClr val="accent1"/>
+          </a:lnRef>
+          <a:fillRef idx="0">
+            <a:schemeClr val="accent1"/>
+          </a:fillRef>
+          <a:effectRef idx="1">
+            <a:schemeClr val="accent1"/>
+          </a:effectRef>
+          <a:fontRef idx="minor">
+            <a:schemeClr val="tx1"/>
+          </a:fontRef>
+        </p:style>
+      </p:cxnSp>
+      <p:cxnSp>
+        <p:nvCxnSpPr>
+          <p:cNvPr id="12" name="Connector 11"/>
+          <p:cNvCxnSpPr/>
+          <p:nvPr/>
+        </p:nvCxnSpPr>
+        <p:spPr>
+          <a:xfrm flipV="1">
+            <a:off x="11503152" y="5660136"/>
+            <a:ext cx="0" cy="237744"/>
+          </a:xfrm>
+          <a:prstGeom prst="bentConnector3">
+            <a:avLst/>
+          </a:prstGeom>
+          <a:ln w="15875">
+            <a:solidFill>
+              <a:srgbClr val="A9AEB5"/>
+            </a:solidFill>
+          </a:ln>
+        </p:spPr>
+        <p:style>
+          <a:lnRef idx="2">
+            <a:schemeClr val="accent1"/>
+          </a:lnRef>
+          <a:fillRef idx="0">
+            <a:schemeClr val="accent1"/>
+          </a:fillRef>
+          <a:effectRef idx="1">
+            <a:schemeClr val="accent1"/>
+          </a:effectRef>
+          <a:fontRef idx="minor">
+            <a:schemeClr val="tx1"/>
+          </a:fontRef>
+        </p:style>
+      </p:cxnSp>
+      <p:sp>
+        <p:nvSpPr>
+          <p:cNvPr id="13" name="Rounded Rectangle 12"/>
+          <p:cNvSpPr/>
+          <p:nvPr/>
+        </p:nvSpPr>
+        <p:spPr>
+          <a:xfrm>
+            <a:off x="5838444" y="3296412"/>
+            <a:ext cx="512064" cy="512064"/>
+          </a:xfrm>
+          <a:prstGeom prst="roundRect">
+            <a:avLst/>
+          </a:prstGeom>
+          <a:noFill/>
+          <a:ln w="19050">
+            <a:solidFill>
+              <a:srgbClr val="A9AEB5"/>
+            </a:solidFill>
+          </a:ln>
           <a:effectLst/>
         </p:spPr>
         <p:style>
@@ -11057,49 +11920,102 @@
       </p:sp>
       <p:sp>
         <p:nvSpPr>
-          <p:cNvPr id="6" name="TextBox 5"/>
+          <p:cNvPr id="14" name="Oval 13"/>
+          <p:cNvSpPr/>
+          <p:nvPr/>
+        </p:nvSpPr>
+        <p:spPr>
+          <a:xfrm>
+            <a:off x="5951098" y="3398824"/>
+            <a:ext cx="100584" cy="100584"/>
+          </a:xfrm>
+          <a:prstGeom prst="ellipse">
+            <a:avLst/>
+          </a:prstGeom>
+          <a:solidFill>
+            <a:srgbClr val="A9AEB5"/>
+          </a:solidFill>
+          <a:ln>
+            <a:noFill/>
+          </a:ln>
+          <a:effectLst/>
+        </p:spPr>
+        <p:style>
+          <a:lnRef idx="1">
+            <a:schemeClr val="accent1"/>
+          </a:lnRef>
+          <a:fillRef idx="3">
+            <a:schemeClr val="accent1"/>
+          </a:fillRef>
+          <a:effectRef idx="2">
+            <a:schemeClr val="accent1"/>
+          </a:effectRef>
+          <a:fontRef idx="minor">
+            <a:schemeClr val="lt1"/>
+          </a:fontRef>
+        </p:style>
+        <p:txBody>
+          <a:bodyPr rtlCol="0" anchor="ctr"/>
+          <a:lstStyle/>
+          <a:p>
+            <a:pPr algn="ctr"/>
+          </a:p>
+        </p:txBody>
+      </p:sp>
+      <p:sp>
+        <p:nvSpPr>
+          <p:cNvPr id="15" name="Isosceles Triangle 14"/>
+          <p:cNvSpPr/>
+          <p:nvPr/>
+        </p:nvSpPr>
+        <p:spPr>
+          <a:xfrm>
+            <a:off x="5992063" y="3521720"/>
+            <a:ext cx="274320" cy="164592"/>
+          </a:xfrm>
+          <a:prstGeom prst="triangle">
+            <a:avLst/>
+          </a:prstGeom>
+          <a:solidFill>
+            <a:srgbClr val="A9AEB5"/>
+          </a:solidFill>
+          <a:ln>
+            <a:noFill/>
+          </a:ln>
+          <a:effectLst/>
+        </p:spPr>
+        <p:style>
+          <a:lnRef idx="1">
+            <a:schemeClr val="accent1"/>
+          </a:lnRef>
+          <a:fillRef idx="3">
+            <a:schemeClr val="accent1"/>
+          </a:fillRef>
+          <a:effectRef idx="2">
+            <a:schemeClr val="accent1"/>
+          </a:effectRef>
+          <a:fontRef idx="minor">
+            <a:schemeClr val="lt1"/>
+          </a:fontRef>
+        </p:style>
+        <p:txBody>
+          <a:bodyPr rtlCol="0" anchor="ctr"/>
+          <a:lstStyle/>
+          <a:p>
+            <a:pPr algn="ctr"/>
+          </a:p>
+        </p:txBody>
+      </p:sp>
+      <p:sp>
+        <p:nvSpPr>
+          <p:cNvPr id="16" name="TextBox 15"/>
           <p:cNvSpPr txBox="1"/>
           <p:nvPr/>
         </p:nvSpPr>
         <p:spPr>
           <a:xfrm>
-            <a:off x="1005840" y="2441448"/>
-            <a:ext cx="640080" cy="640080"/>
-          </a:xfrm>
-          <a:prstGeom prst="rect">
-            <a:avLst/>
-          </a:prstGeom>
-          <a:noFill/>
-        </p:spPr>
-        <p:txBody>
-          <a:bodyPr wrap="square" anchor="ctr" lIns="0" rIns="0" tIns="0" bIns="0">
-            <a:spAutoFit/>
-          </a:bodyPr>
-          <a:lstStyle/>
-          <a:p>
-            <a:pPr algn="ctr"/>
-            <a:r>
-              <a:rPr sz="750" b="0" i="0" spc="100">
-                <a:solidFill>
-                  <a:srgbClr val="A9AEB5"/>
-                </a:solidFill>
-                <a:latin typeface="Arial"/>
-              </a:rPr>
-              <a:t>ICON</a:t>
-            </a:r>
-          </a:p>
-        </p:txBody>
-      </p:sp>
-      <p:sp>
-        <p:nvSpPr>
-          <p:cNvPr id="7" name="TextBox 6"/>
-          <p:cNvSpPr txBox="1"/>
-          <p:nvPr/>
-        </p:nvSpPr>
-        <p:spPr>
-          <a:xfrm>
-            <a:off x="1005840" y="3200400"/>
-            <a:ext cx="2721864" cy="548640"/>
+            <a:off x="685800" y="3899916"/>
+            <a:ext cx="10817352" cy="365760"/>
           </a:xfrm>
           <a:prstGeom prst="rect">
             <a:avLst/>
@@ -11112,174 +12028,64 @@
           </a:bodyPr>
           <a:lstStyle/>
           <a:p>
-            <a:pPr algn="l">
-              <a:spcAft>
-                <a:spcPts val="300"/>
-              </a:spcAft>
-            </a:pPr>
-            <a:r>
-              <a:rPr sz="1400" b="1" i="0">
-                <a:solidFill>
-                  <a:srgbClr val="1A1A1C"/>
-                </a:solidFill>
-                <a:latin typeface="Arial"/>
-              </a:rPr>
-              <a:t>Digital Ecosystem</a:t>
-            </a:r>
-          </a:p>
-          <a:p>
-            <a:pPr algn="l">
-              <a:lnSpc>
-                <a:spcPct val="115000"/>
-              </a:lnSpc>
-            </a:pPr>
-            <a:r>
-              <a:rPr sz="1000" b="0" i="0">
+            <a:pPr algn="ctr"/>
+            <a:r>
+              <a:rPr sz="1050" b="1" i="0" spc="200">
                 <a:solidFill>
                   <a:srgbClr val="868B94"/>
                 </a:solidFill>
                 <a:latin typeface="Arial"/>
               </a:rPr>
-              <a:t>Seamless, connected, personal.</a:t>
-            </a:r>
-          </a:p>
-        </p:txBody>
-      </p:sp>
-      <p:sp>
-        <p:nvSpPr>
-          <p:cNvPr id="8" name="Rectangle 7"/>
-          <p:cNvSpPr/>
-          <p:nvPr/>
-        </p:nvSpPr>
-        <p:spPr>
-          <a:xfrm>
-            <a:off x="4413504" y="2057400"/>
-            <a:ext cx="3361944" cy="1828800"/>
+              <a:t>LARGE INTERIOR RENDERING</a:t>
+            </a:r>
+          </a:p>
+        </p:txBody>
+      </p:sp>
+      <p:sp>
+        <p:nvSpPr>
+          <p:cNvPr id="17" name="TextBox 16"/>
+          <p:cNvSpPr txBox="1"/>
+          <p:nvPr/>
+        </p:nvSpPr>
+        <p:spPr>
+          <a:xfrm>
+            <a:off x="685800" y="4174236"/>
+            <a:ext cx="10817352" cy="274320"/>
           </a:xfrm>
           <a:prstGeom prst="rect">
             <a:avLst/>
           </a:prstGeom>
-          <a:solidFill>
-            <a:srgbClr val="F7F8F9"/>
-          </a:solidFill>
-          <a:ln w="6350">
-            <a:solidFill>
-              <a:srgbClr val="C8CCD2"/>
-            </a:solidFill>
-          </a:ln>
-          <a:effectLst/>
-        </p:spPr>
-        <p:style>
-          <a:lnRef idx="1">
-            <a:schemeClr val="accent1"/>
-          </a:lnRef>
-          <a:fillRef idx="3">
-            <a:schemeClr val="accent1"/>
-          </a:fillRef>
-          <a:effectRef idx="2">
-            <a:schemeClr val="accent1"/>
-          </a:effectRef>
-          <a:fontRef idx="minor">
-            <a:schemeClr val="lt1"/>
-          </a:fontRef>
-        </p:style>
-        <p:txBody>
-          <a:bodyPr rtlCol="0" anchor="ctr"/>
-          <a:lstStyle/>
-          <a:p>
-            <a:pPr algn="ctr"/>
-          </a:p>
-        </p:txBody>
-      </p:sp>
-      <p:sp>
-        <p:nvSpPr>
-          <p:cNvPr id="9" name="Rounded Rectangle 8"/>
-          <p:cNvSpPr/>
-          <p:nvPr/>
-        </p:nvSpPr>
-        <p:spPr>
-          <a:xfrm>
-            <a:off x="4733544" y="2377440"/>
-            <a:ext cx="640080" cy="640080"/>
-          </a:xfrm>
-          <a:prstGeom prst="roundRect">
-            <a:avLst/>
-          </a:prstGeom>
           <a:noFill/>
-          <a:ln w="15875">
-            <a:solidFill>
-              <a:srgbClr val="1B2A4A"/>
-            </a:solidFill>
-          </a:ln>
-          <a:effectLst/>
-        </p:spPr>
-        <p:style>
-          <a:lnRef idx="1">
-            <a:schemeClr val="accent1"/>
-          </a:lnRef>
-          <a:fillRef idx="3">
-            <a:schemeClr val="accent1"/>
-          </a:fillRef>
-          <a:effectRef idx="2">
-            <a:schemeClr val="accent1"/>
-          </a:effectRef>
-          <a:fontRef idx="minor">
-            <a:schemeClr val="lt1"/>
-          </a:fontRef>
-        </p:style>
-        <p:txBody>
-          <a:bodyPr rtlCol="0" anchor="ctr"/>
-          <a:lstStyle/>
-          <a:p>
-            <a:pPr algn="ctr"/>
-          </a:p>
-        </p:txBody>
-      </p:sp>
-      <p:sp>
-        <p:nvSpPr>
-          <p:cNvPr id="10" name="TextBox 9"/>
-          <p:cNvSpPr txBox="1"/>
-          <p:nvPr/>
-        </p:nvSpPr>
-        <p:spPr>
-          <a:xfrm>
-            <a:off x="4733544" y="2441448"/>
-            <a:ext cx="640080" cy="640080"/>
-          </a:xfrm>
-          <a:prstGeom prst="rect">
-            <a:avLst/>
-          </a:prstGeom>
-          <a:noFill/>
-        </p:spPr>
-        <p:txBody>
-          <a:bodyPr wrap="square" anchor="ctr" lIns="0" rIns="0" tIns="0" bIns="0">
+        </p:spPr>
+        <p:txBody>
+          <a:bodyPr wrap="square" anchor="t" lIns="0" rIns="0" tIns="0" bIns="0">
             <a:spAutoFit/>
           </a:bodyPr>
           <a:lstStyle/>
           <a:p>
             <a:pPr algn="ctr"/>
             <a:r>
-              <a:rPr sz="750" b="0" i="0" spc="100">
+              <a:rPr sz="800" b="0" i="0" spc="80">
                 <a:solidFill>
-                  <a:srgbClr val="A9AEB5"/>
+                  <a:srgbClr val="C8CCD2"/>
                 </a:solidFill>
                 <a:latin typeface="Arial"/>
               </a:rPr>
-              <a:t>ICON</a:t>
-            </a:r>
-          </a:p>
-        </p:txBody>
-      </p:sp>
-      <p:sp>
-        <p:nvSpPr>
-          <p:cNvPr id="11" name="TextBox 10"/>
+              <a:t>Replace · 16:9 · 300dpi</a:t>
+            </a:r>
+          </a:p>
+        </p:txBody>
+      </p:sp>
+      <p:sp>
+        <p:nvSpPr>
+          <p:cNvPr id="18" name="TextBox 17"/>
           <p:cNvSpPr txBox="1"/>
           <p:nvPr/>
         </p:nvSpPr>
         <p:spPr>
           <a:xfrm>
-            <a:off x="4733544" y="3200400"/>
-            <a:ext cx="2721864" cy="548640"/>
+            <a:off x="685800" y="5989320"/>
+            <a:ext cx="10058400" cy="365760"/>
           </a:xfrm>
           <a:prstGeom prst="rect">
             <a:avLst/>
@@ -11292,340 +12098,15 @@
           </a:bodyPr>
           <a:lstStyle/>
           <a:p>
-            <a:pPr algn="l">
-              <a:spcAft>
-                <a:spcPts val="300"/>
-              </a:spcAft>
-            </a:pPr>
-            <a:r>
-              <a:rPr sz="1400" b="1" i="0">
-                <a:solidFill>
-                  <a:srgbClr val="1A1A1C"/>
-                </a:solidFill>
-                <a:latin typeface="Arial"/>
-              </a:rPr>
-              <a:t>Technology</a:t>
-            </a:r>
-          </a:p>
-          <a:p>
-            <a:pPr algn="l">
-              <a:lnSpc>
-                <a:spcPct val="115000"/>
-              </a:lnSpc>
-            </a:pPr>
-            <a:r>
-              <a:rPr sz="1000" b="0" i="0">
+            <a:pPr algn="l"/>
+            <a:r>
+              <a:rPr sz="1200" b="0" i="0" spc="50">
                 <a:solidFill>
                   <a:srgbClr val="868B94"/>
                 </a:solidFill>
                 <a:latin typeface="Arial"/>
               </a:rPr>
-              <a:t>Purposeful and invisible.</a:t>
-            </a:r>
-          </a:p>
-        </p:txBody>
-      </p:sp>
-      <p:sp>
-        <p:nvSpPr>
-          <p:cNvPr id="12" name="Rectangle 11"/>
-          <p:cNvSpPr/>
-          <p:nvPr/>
-        </p:nvSpPr>
-        <p:spPr>
-          <a:xfrm>
-            <a:off x="8141208" y="2057400"/>
-            <a:ext cx="3361944" cy="1828800"/>
-          </a:xfrm>
-          <a:prstGeom prst="rect">
-            <a:avLst/>
-          </a:prstGeom>
-          <a:solidFill>
-            <a:srgbClr val="F7F8F9"/>
-          </a:solidFill>
-          <a:ln w="6350">
-            <a:solidFill>
-              <a:srgbClr val="C8CCD2"/>
-            </a:solidFill>
-          </a:ln>
-          <a:effectLst/>
-        </p:spPr>
-        <p:style>
-          <a:lnRef idx="1">
-            <a:schemeClr val="accent1"/>
-          </a:lnRef>
-          <a:fillRef idx="3">
-            <a:schemeClr val="accent1"/>
-          </a:fillRef>
-          <a:effectRef idx="2">
-            <a:schemeClr val="accent1"/>
-          </a:effectRef>
-          <a:fontRef idx="minor">
-            <a:schemeClr val="lt1"/>
-          </a:fontRef>
-        </p:style>
-        <p:txBody>
-          <a:bodyPr rtlCol="0" anchor="ctr"/>
-          <a:lstStyle/>
-          <a:p>
-            <a:pPr algn="ctr"/>
-          </a:p>
-        </p:txBody>
-      </p:sp>
-      <p:sp>
-        <p:nvSpPr>
-          <p:cNvPr id="13" name="Rounded Rectangle 12"/>
-          <p:cNvSpPr/>
-          <p:nvPr/>
-        </p:nvSpPr>
-        <p:spPr>
-          <a:xfrm>
-            <a:off x="8461248" y="2377440"/>
-            <a:ext cx="640080" cy="640080"/>
-          </a:xfrm>
-          <a:prstGeom prst="roundRect">
-            <a:avLst/>
-          </a:prstGeom>
-          <a:noFill/>
-          <a:ln w="15875">
-            <a:solidFill>
-              <a:srgbClr val="1B2A4A"/>
-            </a:solidFill>
-          </a:ln>
-          <a:effectLst/>
-        </p:spPr>
-        <p:style>
-          <a:lnRef idx="1">
-            <a:schemeClr val="accent1"/>
-          </a:lnRef>
-          <a:fillRef idx="3">
-            <a:schemeClr val="accent1"/>
-          </a:fillRef>
-          <a:effectRef idx="2">
-            <a:schemeClr val="accent1"/>
-          </a:effectRef>
-          <a:fontRef idx="minor">
-            <a:schemeClr val="lt1"/>
-          </a:fontRef>
-        </p:style>
-        <p:txBody>
-          <a:bodyPr rtlCol="0" anchor="ctr"/>
-          <a:lstStyle/>
-          <a:p>
-            <a:pPr algn="ctr"/>
-          </a:p>
-        </p:txBody>
-      </p:sp>
-      <p:sp>
-        <p:nvSpPr>
-          <p:cNvPr id="14" name="TextBox 13"/>
-          <p:cNvSpPr txBox="1"/>
-          <p:nvPr/>
-        </p:nvSpPr>
-        <p:spPr>
-          <a:xfrm>
-            <a:off x="8461248" y="2441448"/>
-            <a:ext cx="640080" cy="640080"/>
-          </a:xfrm>
-          <a:prstGeom prst="rect">
-            <a:avLst/>
-          </a:prstGeom>
-          <a:noFill/>
-        </p:spPr>
-        <p:txBody>
-          <a:bodyPr wrap="square" anchor="ctr" lIns="0" rIns="0" tIns="0" bIns="0">
-            <a:spAutoFit/>
-          </a:bodyPr>
-          <a:lstStyle/>
-          <a:p>
-            <a:pPr algn="ctr"/>
-            <a:r>
-              <a:rPr sz="750" b="0" i="0" spc="100">
-                <a:solidFill>
-                  <a:srgbClr val="A9AEB5"/>
-                </a:solidFill>
-                <a:latin typeface="Arial"/>
-              </a:rPr>
-              <a:t>ICON</a:t>
-            </a:r>
-          </a:p>
-        </p:txBody>
-      </p:sp>
-      <p:sp>
-        <p:nvSpPr>
-          <p:cNvPr id="15" name="TextBox 14"/>
-          <p:cNvSpPr txBox="1"/>
-          <p:nvPr/>
-        </p:nvSpPr>
-        <p:spPr>
-          <a:xfrm>
-            <a:off x="8461248" y="3200400"/>
-            <a:ext cx="2721864" cy="548640"/>
-          </a:xfrm>
-          <a:prstGeom prst="rect">
-            <a:avLst/>
-          </a:prstGeom>
-          <a:noFill/>
-        </p:spPr>
-        <p:txBody>
-          <a:bodyPr wrap="square" anchor="t" lIns="0" rIns="0" tIns="0" bIns="0">
-            <a:spAutoFit/>
-          </a:bodyPr>
-          <a:lstStyle/>
-          <a:p>
-            <a:pPr algn="l">
-              <a:spcAft>
-                <a:spcPts val="300"/>
-              </a:spcAft>
-            </a:pPr>
-            <a:r>
-              <a:rPr sz="1400" b="1" i="0">
-                <a:solidFill>
-                  <a:srgbClr val="1A1A1C"/>
-                </a:solidFill>
-                <a:latin typeface="Arial"/>
-              </a:rPr>
-              <a:t>Sustainability</a:t>
-            </a:r>
-          </a:p>
-          <a:p>
-            <a:pPr algn="l">
-              <a:lnSpc>
-                <a:spcPct val="115000"/>
-              </a:lnSpc>
-            </a:pPr>
-            <a:r>
-              <a:rPr sz="1000" b="0" i="0">
-                <a:solidFill>
-                  <a:srgbClr val="868B94"/>
-                </a:solidFill>
-                <a:latin typeface="Arial"/>
-              </a:rPr>
-              <a:t>Warm, recycled, responsible materials.</a:t>
-            </a:r>
-          </a:p>
-        </p:txBody>
-      </p:sp>
-      <p:sp>
-        <p:nvSpPr>
-          <p:cNvPr id="16" name="Rectangle 15"/>
-          <p:cNvSpPr/>
-          <p:nvPr/>
-        </p:nvSpPr>
-        <p:spPr>
-          <a:xfrm>
-            <a:off x="685800" y="4206240"/>
-            <a:ext cx="3361944" cy="1828800"/>
-          </a:xfrm>
-          <a:prstGeom prst="rect">
-            <a:avLst/>
-          </a:prstGeom>
-          <a:solidFill>
-            <a:srgbClr val="F7F8F9"/>
-          </a:solidFill>
-          <a:ln w="6350">
-            <a:solidFill>
-              <a:srgbClr val="C8CCD2"/>
-            </a:solidFill>
-          </a:ln>
-          <a:effectLst/>
-        </p:spPr>
-        <p:style>
-          <a:lnRef idx="1">
-            <a:schemeClr val="accent1"/>
-          </a:lnRef>
-          <a:fillRef idx="3">
-            <a:schemeClr val="accent1"/>
-          </a:fillRef>
-          <a:effectRef idx="2">
-            <a:schemeClr val="accent1"/>
-          </a:effectRef>
-          <a:fontRef idx="minor">
-            <a:schemeClr val="lt1"/>
-          </a:fontRef>
-        </p:style>
-        <p:txBody>
-          <a:bodyPr rtlCol="0" anchor="ctr"/>
-          <a:lstStyle/>
-          <a:p>
-            <a:pPr algn="ctr"/>
-          </a:p>
-        </p:txBody>
-      </p:sp>
-      <p:sp>
-        <p:nvSpPr>
-          <p:cNvPr id="17" name="Rounded Rectangle 16"/>
-          <p:cNvSpPr/>
-          <p:nvPr/>
-        </p:nvSpPr>
-        <p:spPr>
-          <a:xfrm>
-            <a:off x="1005840" y="4526280"/>
-            <a:ext cx="640080" cy="640080"/>
-          </a:xfrm>
-          <a:prstGeom prst="roundRect">
-            <a:avLst/>
-          </a:prstGeom>
-          <a:noFill/>
-          <a:ln w="15875">
-            <a:solidFill>
-              <a:srgbClr val="1B2A4A"/>
-            </a:solidFill>
-          </a:ln>
-          <a:effectLst/>
-        </p:spPr>
-        <p:style>
-          <a:lnRef idx="1">
-            <a:schemeClr val="accent1"/>
-          </a:lnRef>
-          <a:fillRef idx="3">
-            <a:schemeClr val="accent1"/>
-          </a:fillRef>
-          <a:effectRef idx="2">
-            <a:schemeClr val="accent1"/>
-          </a:effectRef>
-          <a:fontRef idx="minor">
-            <a:schemeClr val="lt1"/>
-          </a:fontRef>
-        </p:style>
-        <p:txBody>
-          <a:bodyPr rtlCol="0" anchor="ctr"/>
-          <a:lstStyle/>
-          <a:p>
-            <a:pPr algn="ctr"/>
-          </a:p>
-        </p:txBody>
-      </p:sp>
-      <p:sp>
-        <p:nvSpPr>
-          <p:cNvPr id="18" name="TextBox 17"/>
-          <p:cNvSpPr txBox="1"/>
-          <p:nvPr/>
-        </p:nvSpPr>
-        <p:spPr>
-          <a:xfrm>
-            <a:off x="1005840" y="4590288"/>
-            <a:ext cx="640080" cy="640080"/>
-          </a:xfrm>
-          <a:prstGeom prst="rect">
-            <a:avLst/>
-          </a:prstGeom>
-          <a:noFill/>
-        </p:spPr>
-        <p:txBody>
-          <a:bodyPr wrap="square" anchor="ctr" lIns="0" rIns="0" tIns="0" bIns="0">
-            <a:spAutoFit/>
-          </a:bodyPr>
-          <a:lstStyle/>
-          <a:p>
-            <a:pPr algn="ctr"/>
-            <a:r>
-              <a:rPr sz="750" b="0" i="0" spc="100">
-                <a:solidFill>
-                  <a:srgbClr val="A9AEB5"/>
-                </a:solidFill>
-                <a:latin typeface="Arial"/>
-              </a:rPr>
-              <a:t>ICON</a:t>
+              <a:t>Versatile and family-friendly — space designed for real life.</a:t>
             </a:r>
           </a:p>
         </p:txBody>
@@ -11633,421 +12114,6 @@
       <p:sp>
         <p:nvSpPr>
           <p:cNvPr id="19" name="TextBox 18"/>
-          <p:cNvSpPr txBox="1"/>
-          <p:nvPr/>
-        </p:nvSpPr>
-        <p:spPr>
-          <a:xfrm>
-            <a:off x="1005840" y="5349240"/>
-            <a:ext cx="2721864" cy="548640"/>
-          </a:xfrm>
-          <a:prstGeom prst="rect">
-            <a:avLst/>
-          </a:prstGeom>
-          <a:noFill/>
-        </p:spPr>
-        <p:txBody>
-          <a:bodyPr wrap="square" anchor="t" lIns="0" rIns="0" tIns="0" bIns="0">
-            <a:spAutoFit/>
-          </a:bodyPr>
-          <a:lstStyle/>
-          <a:p>
-            <a:pPr algn="l">
-              <a:spcAft>
-                <a:spcPts val="300"/>
-              </a:spcAft>
-            </a:pPr>
-            <a:r>
-              <a:rPr sz="1400" b="1" i="0">
-                <a:solidFill>
-                  <a:srgbClr val="1A1A1C"/>
-                </a:solidFill>
-                <a:latin typeface="Arial"/>
-              </a:rPr>
-              <a:t>Luxury</a:t>
-            </a:r>
-          </a:p>
-          <a:p>
-            <a:pPr algn="l">
-              <a:lnSpc>
-                <a:spcPct val="115000"/>
-              </a:lnSpc>
-            </a:pPr>
-            <a:r>
-              <a:rPr sz="1000" b="0" i="0">
-                <a:solidFill>
-                  <a:srgbClr val="868B94"/>
-                </a:solidFill>
-                <a:latin typeface="Arial"/>
-              </a:rPr>
-              <a:t>Friction removed from daily life.</a:t>
-            </a:r>
-          </a:p>
-        </p:txBody>
-      </p:sp>
-      <p:sp>
-        <p:nvSpPr>
-          <p:cNvPr id="20" name="Rectangle 19"/>
-          <p:cNvSpPr/>
-          <p:nvPr/>
-        </p:nvSpPr>
-        <p:spPr>
-          <a:xfrm>
-            <a:off x="4413504" y="4206240"/>
-            <a:ext cx="3361944" cy="1828800"/>
-          </a:xfrm>
-          <a:prstGeom prst="rect">
-            <a:avLst/>
-          </a:prstGeom>
-          <a:solidFill>
-            <a:srgbClr val="F7F8F9"/>
-          </a:solidFill>
-          <a:ln w="6350">
-            <a:solidFill>
-              <a:srgbClr val="C8CCD2"/>
-            </a:solidFill>
-          </a:ln>
-          <a:effectLst/>
-        </p:spPr>
-        <p:style>
-          <a:lnRef idx="1">
-            <a:schemeClr val="accent1"/>
-          </a:lnRef>
-          <a:fillRef idx="3">
-            <a:schemeClr val="accent1"/>
-          </a:fillRef>
-          <a:effectRef idx="2">
-            <a:schemeClr val="accent1"/>
-          </a:effectRef>
-          <a:fontRef idx="minor">
-            <a:schemeClr val="lt1"/>
-          </a:fontRef>
-        </p:style>
-        <p:txBody>
-          <a:bodyPr rtlCol="0" anchor="ctr"/>
-          <a:lstStyle/>
-          <a:p>
-            <a:pPr algn="ctr"/>
-          </a:p>
-        </p:txBody>
-      </p:sp>
-      <p:sp>
-        <p:nvSpPr>
-          <p:cNvPr id="21" name="Rounded Rectangle 20"/>
-          <p:cNvSpPr/>
-          <p:nvPr/>
-        </p:nvSpPr>
-        <p:spPr>
-          <a:xfrm>
-            <a:off x="4733544" y="4526280"/>
-            <a:ext cx="640080" cy="640080"/>
-          </a:xfrm>
-          <a:prstGeom prst="roundRect">
-            <a:avLst/>
-          </a:prstGeom>
-          <a:noFill/>
-          <a:ln w="15875">
-            <a:solidFill>
-              <a:srgbClr val="1B2A4A"/>
-            </a:solidFill>
-          </a:ln>
-          <a:effectLst/>
-        </p:spPr>
-        <p:style>
-          <a:lnRef idx="1">
-            <a:schemeClr val="accent1"/>
-          </a:lnRef>
-          <a:fillRef idx="3">
-            <a:schemeClr val="accent1"/>
-          </a:fillRef>
-          <a:effectRef idx="2">
-            <a:schemeClr val="accent1"/>
-          </a:effectRef>
-          <a:fontRef idx="minor">
-            <a:schemeClr val="lt1"/>
-          </a:fontRef>
-        </p:style>
-        <p:txBody>
-          <a:bodyPr rtlCol="0" anchor="ctr"/>
-          <a:lstStyle/>
-          <a:p>
-            <a:pPr algn="ctr"/>
-          </a:p>
-        </p:txBody>
-      </p:sp>
-      <p:sp>
-        <p:nvSpPr>
-          <p:cNvPr id="22" name="TextBox 21"/>
-          <p:cNvSpPr txBox="1"/>
-          <p:nvPr/>
-        </p:nvSpPr>
-        <p:spPr>
-          <a:xfrm>
-            <a:off x="4733544" y="4590288"/>
-            <a:ext cx="640080" cy="640080"/>
-          </a:xfrm>
-          <a:prstGeom prst="rect">
-            <a:avLst/>
-          </a:prstGeom>
-          <a:noFill/>
-        </p:spPr>
-        <p:txBody>
-          <a:bodyPr wrap="square" anchor="ctr" lIns="0" rIns="0" tIns="0" bIns="0">
-            <a:spAutoFit/>
-          </a:bodyPr>
-          <a:lstStyle/>
-          <a:p>
-            <a:pPr algn="ctr"/>
-            <a:r>
-              <a:rPr sz="750" b="0" i="0" spc="100">
-                <a:solidFill>
-                  <a:srgbClr val="A9AEB5"/>
-                </a:solidFill>
-                <a:latin typeface="Arial"/>
-              </a:rPr>
-              <a:t>ICON</a:t>
-            </a:r>
-          </a:p>
-        </p:txBody>
-      </p:sp>
-      <p:sp>
-        <p:nvSpPr>
-          <p:cNvPr id="23" name="TextBox 22"/>
-          <p:cNvSpPr txBox="1"/>
-          <p:nvPr/>
-        </p:nvSpPr>
-        <p:spPr>
-          <a:xfrm>
-            <a:off x="4733544" y="5349240"/>
-            <a:ext cx="2721864" cy="548640"/>
-          </a:xfrm>
-          <a:prstGeom prst="rect">
-            <a:avLst/>
-          </a:prstGeom>
-          <a:noFill/>
-        </p:spPr>
-        <p:txBody>
-          <a:bodyPr wrap="square" anchor="t" lIns="0" rIns="0" tIns="0" bIns="0">
-            <a:spAutoFit/>
-          </a:bodyPr>
-          <a:lstStyle/>
-          <a:p>
-            <a:pPr algn="l">
-              <a:spcAft>
-                <a:spcPts val="300"/>
-              </a:spcAft>
-            </a:pPr>
-            <a:r>
-              <a:rPr sz="1400" b="1" i="0">
-                <a:solidFill>
-                  <a:srgbClr val="1A1A1C"/>
-                </a:solidFill>
-                <a:latin typeface="Arial"/>
-              </a:rPr>
-              <a:t>AI</a:t>
-            </a:r>
-          </a:p>
-          <a:p>
-            <a:pPr algn="l">
-              <a:lnSpc>
-                <a:spcPct val="115000"/>
-              </a:lnSpc>
-            </a:pPr>
-            <a:r>
-              <a:rPr sz="1000" b="0" i="0">
-                <a:solidFill>
-                  <a:srgbClr val="868B94"/>
-                </a:solidFill>
-                <a:latin typeface="Arial"/>
-              </a:rPr>
-              <a:t>Adaptive, predictive, human-centered.</a:t>
-            </a:r>
-          </a:p>
-        </p:txBody>
-      </p:sp>
-      <p:sp>
-        <p:nvSpPr>
-          <p:cNvPr id="24" name="Rectangle 23"/>
-          <p:cNvSpPr/>
-          <p:nvPr/>
-        </p:nvSpPr>
-        <p:spPr>
-          <a:xfrm>
-            <a:off x="8141208" y="4206240"/>
-            <a:ext cx="3361944" cy="1828800"/>
-          </a:xfrm>
-          <a:prstGeom prst="rect">
-            <a:avLst/>
-          </a:prstGeom>
-          <a:solidFill>
-            <a:srgbClr val="F7F8F9"/>
-          </a:solidFill>
-          <a:ln w="6350">
-            <a:solidFill>
-              <a:srgbClr val="C8CCD2"/>
-            </a:solidFill>
-          </a:ln>
-          <a:effectLst/>
-        </p:spPr>
-        <p:style>
-          <a:lnRef idx="1">
-            <a:schemeClr val="accent1"/>
-          </a:lnRef>
-          <a:fillRef idx="3">
-            <a:schemeClr val="accent1"/>
-          </a:fillRef>
-          <a:effectRef idx="2">
-            <a:schemeClr val="accent1"/>
-          </a:effectRef>
-          <a:fontRef idx="minor">
-            <a:schemeClr val="lt1"/>
-          </a:fontRef>
-        </p:style>
-        <p:txBody>
-          <a:bodyPr rtlCol="0" anchor="ctr"/>
-          <a:lstStyle/>
-          <a:p>
-            <a:pPr algn="ctr"/>
-          </a:p>
-        </p:txBody>
-      </p:sp>
-      <p:sp>
-        <p:nvSpPr>
-          <p:cNvPr id="25" name="Rounded Rectangle 24"/>
-          <p:cNvSpPr/>
-          <p:nvPr/>
-        </p:nvSpPr>
-        <p:spPr>
-          <a:xfrm>
-            <a:off x="8461248" y="4526280"/>
-            <a:ext cx="640080" cy="640080"/>
-          </a:xfrm>
-          <a:prstGeom prst="roundRect">
-            <a:avLst/>
-          </a:prstGeom>
-          <a:noFill/>
-          <a:ln w="15875">
-            <a:solidFill>
-              <a:srgbClr val="1B2A4A"/>
-            </a:solidFill>
-          </a:ln>
-          <a:effectLst/>
-        </p:spPr>
-        <p:style>
-          <a:lnRef idx="1">
-            <a:schemeClr val="accent1"/>
-          </a:lnRef>
-          <a:fillRef idx="3">
-            <a:schemeClr val="accent1"/>
-          </a:fillRef>
-          <a:effectRef idx="2">
-            <a:schemeClr val="accent1"/>
-          </a:effectRef>
-          <a:fontRef idx="minor">
-            <a:schemeClr val="lt1"/>
-          </a:fontRef>
-        </p:style>
-        <p:txBody>
-          <a:bodyPr rtlCol="0" anchor="ctr"/>
-          <a:lstStyle/>
-          <a:p>
-            <a:pPr algn="ctr"/>
-          </a:p>
-        </p:txBody>
-      </p:sp>
-      <p:sp>
-        <p:nvSpPr>
-          <p:cNvPr id="26" name="TextBox 25"/>
-          <p:cNvSpPr txBox="1"/>
-          <p:nvPr/>
-        </p:nvSpPr>
-        <p:spPr>
-          <a:xfrm>
-            <a:off x="8461248" y="4590288"/>
-            <a:ext cx="640080" cy="640080"/>
-          </a:xfrm>
-          <a:prstGeom prst="rect">
-            <a:avLst/>
-          </a:prstGeom>
-          <a:noFill/>
-        </p:spPr>
-        <p:txBody>
-          <a:bodyPr wrap="square" anchor="ctr" lIns="0" rIns="0" tIns="0" bIns="0">
-            <a:spAutoFit/>
-          </a:bodyPr>
-          <a:lstStyle/>
-          <a:p>
-            <a:pPr algn="ctr"/>
-            <a:r>
-              <a:rPr sz="750" b="0" i="0" spc="100">
-                <a:solidFill>
-                  <a:srgbClr val="A9AEB5"/>
-                </a:solidFill>
-                <a:latin typeface="Arial"/>
-              </a:rPr>
-              <a:t>ICON</a:t>
-            </a:r>
-          </a:p>
-        </p:txBody>
-      </p:sp>
-      <p:sp>
-        <p:nvSpPr>
-          <p:cNvPr id="27" name="TextBox 26"/>
-          <p:cNvSpPr txBox="1"/>
-          <p:nvPr/>
-        </p:nvSpPr>
-        <p:spPr>
-          <a:xfrm>
-            <a:off x="8461248" y="5349240"/>
-            <a:ext cx="2721864" cy="548640"/>
-          </a:xfrm>
-          <a:prstGeom prst="rect">
-            <a:avLst/>
-          </a:prstGeom>
-          <a:noFill/>
-        </p:spPr>
-        <p:txBody>
-          <a:bodyPr wrap="square" anchor="t" lIns="0" rIns="0" tIns="0" bIns="0">
-            <a:spAutoFit/>
-          </a:bodyPr>
-          <a:lstStyle/>
-          <a:p>
-            <a:pPr algn="l">
-              <a:spcAft>
-                <a:spcPts val="300"/>
-              </a:spcAft>
-            </a:pPr>
-            <a:r>
-              <a:rPr sz="1400" b="1" i="0">
-                <a:solidFill>
-                  <a:srgbClr val="1A1A1C"/>
-                </a:solidFill>
-                <a:latin typeface="Arial"/>
-              </a:rPr>
-              <a:t>Connected Mobility</a:t>
-            </a:r>
-          </a:p>
-          <a:p>
-            <a:pPr algn="l">
-              <a:lnSpc>
-                <a:spcPct val="115000"/>
-              </a:lnSpc>
-            </a:pPr>
-            <a:r>
-              <a:rPr sz="1000" b="0" i="0">
-                <a:solidFill>
-                  <a:srgbClr val="868B94"/>
-                </a:solidFill>
-                <a:latin typeface="Arial"/>
-              </a:rPr>
-              <a:t>Effortless, door to destination.</a:t>
-            </a:r>
-          </a:p>
-        </p:txBody>
-      </p:sp>
-      <p:sp>
-        <p:nvSpPr>
-          <p:cNvPr id="28" name="TextBox 27"/>
           <p:cNvSpPr txBox="1"/>
           <p:nvPr/>
         </p:nvSpPr>
@@ -12082,7 +12148,7 @@
       </p:sp>
       <p:sp>
         <p:nvSpPr>
-          <p:cNvPr id="29" name="TextBox 28"/>
+          <p:cNvPr id="20" name="TextBox 19"/>
           <p:cNvSpPr txBox="1"/>
           <p:nvPr/>
         </p:nvSpPr>
@@ -12117,7 +12183,7 @@
       </p:sp>
       <p:sp>
         <p:nvSpPr>
-          <p:cNvPr id="30" name="TextBox 29"/>
+          <p:cNvPr id="21" name="TextBox 20"/>
           <p:cNvSpPr txBox="1"/>
           <p:nvPr/>
         </p:nvSpPr>
@@ -12206,7 +12272,7 @@
                 </a:solidFill>
                 <a:latin typeface="Arial"/>
               </a:rPr>
-              <a:t>CAPABILITY</a:t>
+              <a:t>PORTFOLIO POSITIONING</a:t>
             </a:r>
           </a:p>
         </p:txBody>
@@ -12235,33 +12301,68 @@
           <a:p>
             <a:pPr algn="l"/>
             <a:r>
-              <a:rPr sz="2800" b="1" i="0">
+              <a:rPr sz="2600" b="1" i="0">
                 <a:solidFill>
                   <a:srgbClr val="1A1A1C"/>
                 </a:solidFill>
                 <a:latin typeface="Arial"/>
               </a:rPr>
-              <a:t>Design Innovation</a:t>
-            </a:r>
-          </a:p>
-        </p:txBody>
-      </p:sp>
-      <p:sp>
-        <p:nvSpPr>
-          <p:cNvPr id="4" name="Rectangle 3"/>
+              <a:t>How Chrysler Fits Within Stellantis</a:t>
+            </a:r>
+          </a:p>
+        </p:txBody>
+      </p:sp>
+      <p:sp>
+        <p:nvSpPr>
+          <p:cNvPr id="4" name="TextBox 3"/>
+          <p:cNvSpPr txBox="1"/>
+          <p:nvPr/>
+        </p:nvSpPr>
+        <p:spPr>
+          <a:xfrm>
+            <a:off x="685800" y="1600200"/>
+            <a:ext cx="10515600" cy="365760"/>
+          </a:xfrm>
+          <a:prstGeom prst="rect">
+            <a:avLst/>
+          </a:prstGeom>
+          <a:noFill/>
+        </p:spPr>
+        <p:txBody>
+          <a:bodyPr wrap="square" anchor="t" lIns="0" rIns="0" tIns="0" bIns="0">
+            <a:spAutoFit/>
+          </a:bodyPr>
+          <a:lstStyle/>
+          <a:p>
+            <a:pPr algn="l"/>
+            <a:r>
+              <a:rPr sz="1300" b="0" i="0">
+                <a:solidFill>
+                  <a:srgbClr val="4A4E57"/>
+                </a:solidFill>
+                <a:latin typeface="Arial"/>
+              </a:rPr>
+              <a:t>Differentiation, not overlap — the distinct, human-centered space Chrysler owns.</a:t>
+            </a:r>
+          </a:p>
+        </p:txBody>
+      </p:sp>
+      <p:sp>
+        <p:nvSpPr>
+          <p:cNvPr id="5" name="Rectangle 4"/>
           <p:cNvSpPr/>
           <p:nvPr/>
         </p:nvSpPr>
         <p:spPr>
           <a:xfrm>
-            <a:off x="685800" y="1828800"/>
-            <a:ext cx="10817352" cy="2468880"/>
+            <a:off x="4480560" y="2286000"/>
+            <a:ext cx="3200400" cy="1463040"/>
           </a:xfrm>
           <a:prstGeom prst="rect">
             <a:avLst/>
           </a:prstGeom>
           <a:solidFill>
-            <a:srgbClr val="EFF1F3"/>
+            <a:srgbClr val="1B2A4A"/>
           </a:solidFill>
           <a:ln>
             <a:noFill/>
@@ -12290,498 +12391,72 @@
           </a:p>
         </p:txBody>
       </p:sp>
-      <p:cxnSp>
-        <p:nvCxnSpPr>
-          <p:cNvPr id="5" name="Connector 4"/>
-          <p:cNvCxnSpPr/>
-          <p:nvPr/>
-        </p:nvCxnSpPr>
-        <p:spPr>
-          <a:xfrm>
-            <a:off x="685800" y="1828800"/>
-            <a:ext cx="237744" cy="0"/>
-          </a:xfrm>
-          <a:prstGeom prst="bentConnector3">
-            <a:avLst/>
-          </a:prstGeom>
-          <a:ln w="15875">
-            <a:solidFill>
-              <a:srgbClr val="A9AEB5"/>
-            </a:solidFill>
-          </a:ln>
-        </p:spPr>
-        <p:style>
-          <a:lnRef idx="2">
-            <a:schemeClr val="accent1"/>
-          </a:lnRef>
-          <a:fillRef idx="0">
-            <a:schemeClr val="accent1"/>
-          </a:fillRef>
-          <a:effectRef idx="1">
-            <a:schemeClr val="accent1"/>
-          </a:effectRef>
-          <a:fontRef idx="minor">
-            <a:schemeClr val="tx1"/>
-          </a:fontRef>
-        </p:style>
-      </p:cxnSp>
-      <p:cxnSp>
-        <p:nvCxnSpPr>
-          <p:cNvPr id="6" name="Connector 5"/>
-          <p:cNvCxnSpPr/>
-          <p:nvPr/>
-        </p:nvCxnSpPr>
-        <p:spPr>
-          <a:xfrm>
-            <a:off x="685800" y="1828800"/>
-            <a:ext cx="0" cy="237744"/>
-          </a:xfrm>
-          <a:prstGeom prst="bentConnector3">
-            <a:avLst/>
-          </a:prstGeom>
-          <a:ln w="15875">
-            <a:solidFill>
-              <a:srgbClr val="A9AEB5"/>
-            </a:solidFill>
-          </a:ln>
-        </p:spPr>
-        <p:style>
-          <a:lnRef idx="2">
-            <a:schemeClr val="accent1"/>
-          </a:lnRef>
-          <a:fillRef idx="0">
-            <a:schemeClr val="accent1"/>
-          </a:fillRef>
-          <a:effectRef idx="1">
-            <a:schemeClr val="accent1"/>
-          </a:effectRef>
-          <a:fontRef idx="minor">
-            <a:schemeClr val="tx1"/>
-          </a:fontRef>
-        </p:style>
-      </p:cxnSp>
-      <p:cxnSp>
-        <p:nvCxnSpPr>
-          <p:cNvPr id="7" name="Connector 6"/>
-          <p:cNvCxnSpPr/>
-          <p:nvPr/>
-        </p:nvCxnSpPr>
-        <p:spPr>
-          <a:xfrm flipH="1">
-            <a:off x="11265408" y="1828800"/>
-            <a:ext cx="237744" cy="0"/>
-          </a:xfrm>
-          <a:prstGeom prst="bentConnector3">
-            <a:avLst/>
-          </a:prstGeom>
-          <a:ln w="15875">
-            <a:solidFill>
-              <a:srgbClr val="A9AEB5"/>
-            </a:solidFill>
-          </a:ln>
-        </p:spPr>
-        <p:style>
-          <a:lnRef idx="2">
-            <a:schemeClr val="accent1"/>
-          </a:lnRef>
-          <a:fillRef idx="0">
-            <a:schemeClr val="accent1"/>
-          </a:fillRef>
-          <a:effectRef idx="1">
-            <a:schemeClr val="accent1"/>
-          </a:effectRef>
-          <a:fontRef idx="minor">
-            <a:schemeClr val="tx1"/>
-          </a:fontRef>
-        </p:style>
-      </p:cxnSp>
-      <p:cxnSp>
-        <p:nvCxnSpPr>
-          <p:cNvPr id="8" name="Connector 7"/>
-          <p:cNvCxnSpPr/>
-          <p:nvPr/>
-        </p:nvCxnSpPr>
-        <p:spPr>
-          <a:xfrm>
-            <a:off x="11503152" y="1828800"/>
-            <a:ext cx="0" cy="237744"/>
-          </a:xfrm>
-          <a:prstGeom prst="bentConnector3">
-            <a:avLst/>
-          </a:prstGeom>
-          <a:ln w="15875">
-            <a:solidFill>
-              <a:srgbClr val="A9AEB5"/>
-            </a:solidFill>
-          </a:ln>
-        </p:spPr>
-        <p:style>
-          <a:lnRef idx="2">
-            <a:schemeClr val="accent1"/>
-          </a:lnRef>
-          <a:fillRef idx="0">
-            <a:schemeClr val="accent1"/>
-          </a:fillRef>
-          <a:effectRef idx="1">
-            <a:schemeClr val="accent1"/>
-          </a:effectRef>
-          <a:fontRef idx="minor">
-            <a:schemeClr val="tx1"/>
-          </a:fontRef>
-        </p:style>
-      </p:cxnSp>
-      <p:cxnSp>
-        <p:nvCxnSpPr>
-          <p:cNvPr id="9" name="Connector 8"/>
-          <p:cNvCxnSpPr/>
-          <p:nvPr/>
-        </p:nvCxnSpPr>
-        <p:spPr>
-          <a:xfrm>
-            <a:off x="685800" y="4297680"/>
-            <a:ext cx="237744" cy="0"/>
-          </a:xfrm>
-          <a:prstGeom prst="bentConnector3">
-            <a:avLst/>
-          </a:prstGeom>
-          <a:ln w="15875">
-            <a:solidFill>
-              <a:srgbClr val="A9AEB5"/>
-            </a:solidFill>
-          </a:ln>
-        </p:spPr>
-        <p:style>
-          <a:lnRef idx="2">
-            <a:schemeClr val="accent1"/>
-          </a:lnRef>
-          <a:fillRef idx="0">
-            <a:schemeClr val="accent1"/>
-          </a:fillRef>
-          <a:effectRef idx="1">
-            <a:schemeClr val="accent1"/>
-          </a:effectRef>
-          <a:fontRef idx="minor">
-            <a:schemeClr val="tx1"/>
-          </a:fontRef>
-        </p:style>
-      </p:cxnSp>
-      <p:cxnSp>
-        <p:nvCxnSpPr>
-          <p:cNvPr id="10" name="Connector 9"/>
-          <p:cNvCxnSpPr/>
-          <p:nvPr/>
-        </p:nvCxnSpPr>
-        <p:spPr>
-          <a:xfrm flipV="1">
-            <a:off x="685800" y="4059936"/>
-            <a:ext cx="0" cy="237744"/>
-          </a:xfrm>
-          <a:prstGeom prst="bentConnector3">
-            <a:avLst/>
-          </a:prstGeom>
-          <a:ln w="15875">
-            <a:solidFill>
-              <a:srgbClr val="A9AEB5"/>
-            </a:solidFill>
-          </a:ln>
-        </p:spPr>
-        <p:style>
-          <a:lnRef idx="2">
-            <a:schemeClr val="accent1"/>
-          </a:lnRef>
-          <a:fillRef idx="0">
-            <a:schemeClr val="accent1"/>
-          </a:fillRef>
-          <a:effectRef idx="1">
-            <a:schemeClr val="accent1"/>
-          </a:effectRef>
-          <a:fontRef idx="minor">
-            <a:schemeClr val="tx1"/>
-          </a:fontRef>
-        </p:style>
-      </p:cxnSp>
-      <p:cxnSp>
-        <p:nvCxnSpPr>
-          <p:cNvPr id="11" name="Connector 10"/>
-          <p:cNvCxnSpPr/>
-          <p:nvPr/>
-        </p:nvCxnSpPr>
-        <p:spPr>
-          <a:xfrm flipH="1">
-            <a:off x="11265408" y="4297680"/>
-            <a:ext cx="237744" cy="0"/>
-          </a:xfrm>
-          <a:prstGeom prst="bentConnector3">
-            <a:avLst/>
-          </a:prstGeom>
-          <a:ln w="15875">
-            <a:solidFill>
-              <a:srgbClr val="A9AEB5"/>
-            </a:solidFill>
-          </a:ln>
-        </p:spPr>
-        <p:style>
-          <a:lnRef idx="2">
-            <a:schemeClr val="accent1"/>
-          </a:lnRef>
-          <a:fillRef idx="0">
-            <a:schemeClr val="accent1"/>
-          </a:fillRef>
-          <a:effectRef idx="1">
-            <a:schemeClr val="accent1"/>
-          </a:effectRef>
-          <a:fontRef idx="minor">
-            <a:schemeClr val="tx1"/>
-          </a:fontRef>
-        </p:style>
-      </p:cxnSp>
-      <p:cxnSp>
-        <p:nvCxnSpPr>
-          <p:cNvPr id="12" name="Connector 11"/>
-          <p:cNvCxnSpPr/>
-          <p:nvPr/>
-        </p:nvCxnSpPr>
-        <p:spPr>
-          <a:xfrm flipV="1">
-            <a:off x="11503152" y="4059936"/>
-            <a:ext cx="0" cy="237744"/>
-          </a:xfrm>
-          <a:prstGeom prst="bentConnector3">
-            <a:avLst/>
-          </a:prstGeom>
-          <a:ln w="15875">
-            <a:solidFill>
-              <a:srgbClr val="A9AEB5"/>
-            </a:solidFill>
-          </a:ln>
-        </p:spPr>
-        <p:style>
-          <a:lnRef idx="2">
-            <a:schemeClr val="accent1"/>
-          </a:lnRef>
-          <a:fillRef idx="0">
-            <a:schemeClr val="accent1"/>
-          </a:fillRef>
-          <a:effectRef idx="1">
-            <a:schemeClr val="accent1"/>
-          </a:effectRef>
-          <a:fontRef idx="minor">
-            <a:schemeClr val="tx1"/>
-          </a:fontRef>
-        </p:style>
-      </p:cxnSp>
-      <p:sp>
-        <p:nvSpPr>
-          <p:cNvPr id="13" name="Rounded Rectangle 12"/>
-          <p:cNvSpPr/>
-          <p:nvPr/>
-        </p:nvSpPr>
-        <p:spPr>
-          <a:xfrm>
-            <a:off x="5838444" y="2587752"/>
-            <a:ext cx="512064" cy="512064"/>
-          </a:xfrm>
-          <a:prstGeom prst="roundRect">
+      <p:sp>
+        <p:nvSpPr>
+          <p:cNvPr id="6" name="TextBox 5"/>
+          <p:cNvSpPr txBox="1"/>
+          <p:nvPr/>
+        </p:nvSpPr>
+        <p:spPr>
+          <a:xfrm>
+            <a:off x="4480560" y="2286000"/>
+            <a:ext cx="3200400" cy="1463040"/>
+          </a:xfrm>
+          <a:prstGeom prst="rect">
             <a:avLst/>
           </a:prstGeom>
           <a:noFill/>
-          <a:ln w="19050">
-            <a:solidFill>
-              <a:srgbClr val="A9AEB5"/>
-            </a:solidFill>
-          </a:ln>
-          <a:effectLst/>
-        </p:spPr>
-        <p:style>
-          <a:lnRef idx="1">
-            <a:schemeClr val="accent1"/>
-          </a:lnRef>
-          <a:fillRef idx="3">
-            <a:schemeClr val="accent1"/>
-          </a:fillRef>
-          <a:effectRef idx="2">
-            <a:schemeClr val="accent1"/>
-          </a:effectRef>
-          <a:fontRef idx="minor">
-            <a:schemeClr val="lt1"/>
-          </a:fontRef>
-        </p:style>
-        <p:txBody>
-          <a:bodyPr rtlCol="0" anchor="ctr"/>
-          <a:lstStyle/>
-          <a:p>
-            <a:pPr algn="ctr"/>
-          </a:p>
-        </p:txBody>
-      </p:sp>
-      <p:sp>
-        <p:nvSpPr>
-          <p:cNvPr id="14" name="Oval 13"/>
-          <p:cNvSpPr/>
-          <p:nvPr/>
-        </p:nvSpPr>
-        <p:spPr>
-          <a:xfrm>
-            <a:off x="5951098" y="2690164"/>
-            <a:ext cx="100584" cy="100584"/>
-          </a:xfrm>
-          <a:prstGeom prst="ellipse">
-            <a:avLst/>
-          </a:prstGeom>
-          <a:solidFill>
-            <a:srgbClr val="A9AEB5"/>
-          </a:solidFill>
-          <a:ln>
-            <a:noFill/>
-          </a:ln>
-          <a:effectLst/>
-        </p:spPr>
-        <p:style>
-          <a:lnRef idx="1">
-            <a:schemeClr val="accent1"/>
-          </a:lnRef>
-          <a:fillRef idx="3">
-            <a:schemeClr val="accent1"/>
-          </a:fillRef>
-          <a:effectRef idx="2">
-            <a:schemeClr val="accent1"/>
-          </a:effectRef>
-          <a:fontRef idx="minor">
-            <a:schemeClr val="lt1"/>
-          </a:fontRef>
-        </p:style>
-        <p:txBody>
-          <a:bodyPr rtlCol="0" anchor="ctr"/>
-          <a:lstStyle/>
-          <a:p>
-            <a:pPr algn="ctr"/>
-          </a:p>
-        </p:txBody>
-      </p:sp>
-      <p:sp>
-        <p:nvSpPr>
-          <p:cNvPr id="15" name="Isosceles Triangle 14"/>
-          <p:cNvSpPr/>
-          <p:nvPr/>
-        </p:nvSpPr>
-        <p:spPr>
-          <a:xfrm>
-            <a:off x="5992063" y="2813060"/>
-            <a:ext cx="274320" cy="164592"/>
-          </a:xfrm>
-          <a:prstGeom prst="triangle">
-            <a:avLst/>
-          </a:prstGeom>
-          <a:solidFill>
-            <a:srgbClr val="A9AEB5"/>
-          </a:solidFill>
-          <a:ln>
-            <a:noFill/>
-          </a:ln>
-          <a:effectLst/>
-        </p:spPr>
-        <p:style>
-          <a:lnRef idx="1">
-            <a:schemeClr val="accent1"/>
-          </a:lnRef>
-          <a:fillRef idx="3">
-            <a:schemeClr val="accent1"/>
-          </a:fillRef>
-          <a:effectRef idx="2">
-            <a:schemeClr val="accent1"/>
-          </a:effectRef>
-          <a:fontRef idx="minor">
-            <a:schemeClr val="lt1"/>
-          </a:fontRef>
-        </p:style>
-        <p:txBody>
-          <a:bodyPr rtlCol="0" anchor="ctr"/>
-          <a:lstStyle/>
-          <a:p>
-            <a:pPr algn="ctr"/>
-          </a:p>
-        </p:txBody>
-      </p:sp>
-      <p:sp>
-        <p:nvSpPr>
-          <p:cNvPr id="16" name="TextBox 15"/>
-          <p:cNvSpPr txBox="1"/>
-          <p:nvPr/>
-        </p:nvSpPr>
-        <p:spPr>
-          <a:xfrm>
-            <a:off x="685800" y="3191256"/>
-            <a:ext cx="10817352" cy="365760"/>
-          </a:xfrm>
-          <a:prstGeom prst="rect">
-            <a:avLst/>
-          </a:prstGeom>
-          <a:noFill/>
-        </p:spPr>
-        <p:txBody>
-          <a:bodyPr wrap="square" anchor="t" lIns="0" rIns="0" tIns="0" bIns="0">
+        </p:spPr>
+        <p:txBody>
+          <a:bodyPr wrap="square" anchor="ctr" lIns="0" rIns="0" tIns="0" bIns="0">
             <a:spAutoFit/>
           </a:bodyPr>
           <a:lstStyle/>
           <a:p>
-            <a:pPr algn="ctr"/>
-            <a:r>
-              <a:rPr sz="1050" b="1" i="0" spc="200">
+            <a:pPr algn="ctr">
+              <a:spcAft>
+                <a:spcPts val="400"/>
+              </a:spcAft>
+            </a:pPr>
+            <a:r>
+              <a:rPr sz="1800" b="1" i="0" spc="200">
                 <a:solidFill>
-                  <a:srgbClr val="868B94"/>
+                  <a:srgbClr val="FFFFFF"/>
                 </a:solidFill>
                 <a:latin typeface="Arial"/>
               </a:rPr>
-              <a:t>LARGE INFOGRAPHIC PLACEHOLDER</a:t>
-            </a:r>
-          </a:p>
-        </p:txBody>
-      </p:sp>
-      <p:sp>
-        <p:nvSpPr>
-          <p:cNvPr id="17" name="TextBox 16"/>
-          <p:cNvSpPr txBox="1"/>
-          <p:nvPr/>
-        </p:nvSpPr>
-        <p:spPr>
-          <a:xfrm>
-            <a:off x="685800" y="3465576"/>
-            <a:ext cx="10817352" cy="274320"/>
-          </a:xfrm>
-          <a:prstGeom prst="rect">
-            <a:avLst/>
-          </a:prstGeom>
-          <a:noFill/>
-        </p:spPr>
-        <p:txBody>
-          <a:bodyPr wrap="square" anchor="t" lIns="0" rIns="0" tIns="0" bIns="0">
-            <a:spAutoFit/>
-          </a:bodyPr>
-          <a:lstStyle/>
-          <a:p>
-            <a:pPr algn="ctr"/>
-            <a:r>
-              <a:rPr sz="800" b="0" i="0" spc="80">
+              <a:t>CHRYSLER</a:t>
+            </a:r>
+          </a:p>
+          <a:p>
+            <a:pPr algn="ctr">
+              <a:lnSpc>
+                <a:spcPct val="110000"/>
+              </a:lnSpc>
+            </a:pPr>
+            <a:r>
+              <a:rPr sz="1100" b="0" i="0">
                 <a:solidFill>
                   <a:srgbClr val="C8CCD2"/>
                 </a:solidFill>
                 <a:latin typeface="Arial"/>
               </a:rPr>
-              <a:t>Replace · innovation framework graphic</a:t>
-            </a:r>
-          </a:p>
-        </p:txBody>
-      </p:sp>
-      <p:sp>
-        <p:nvSpPr>
-          <p:cNvPr id="18" name="Rectangle 17"/>
+              <a:t>Innovative practicality
+for everyday life</a:t>
+            </a:r>
+          </a:p>
+        </p:txBody>
+      </p:sp>
+      <p:sp>
+        <p:nvSpPr>
+          <p:cNvPr id="7" name="Rectangle 6"/>
           <p:cNvSpPr/>
           <p:nvPr/>
         </p:nvSpPr>
         <p:spPr>
           <a:xfrm>
-            <a:off x="685800" y="4526280"/>
-            <a:ext cx="1612392" cy="1280160"/>
+            <a:off x="685800" y="4297680"/>
+            <a:ext cx="2430018" cy="1371600"/>
           </a:xfrm>
           <a:prstGeom prst="rect">
             <a:avLst/>
@@ -12820,113 +12495,69 @@
       </p:sp>
       <p:sp>
         <p:nvSpPr>
-          <p:cNvPr id="19" name="Rectangle 18"/>
-          <p:cNvSpPr/>
-          <p:nvPr/>
-        </p:nvSpPr>
-        <p:spPr>
-          <a:xfrm>
-            <a:off x="685800" y="4526280"/>
-            <a:ext cx="1612392" cy="64008"/>
+          <p:cNvPr id="8" name="TextBox 7"/>
+          <p:cNvSpPr txBox="1"/>
+          <p:nvPr/>
+        </p:nvSpPr>
+        <p:spPr>
+          <a:xfrm>
+            <a:off x="685800" y="4297680"/>
+            <a:ext cx="2430018" cy="1371600"/>
           </a:xfrm>
           <a:prstGeom prst="rect">
             <a:avLst/>
           </a:prstGeom>
-          <a:solidFill>
-            <a:srgbClr val="1B2A4A"/>
-          </a:solidFill>
-          <a:ln>
-            <a:noFill/>
-          </a:ln>
-          <a:effectLst/>
-        </p:spPr>
-        <p:style>
-          <a:lnRef idx="1">
-            <a:schemeClr val="accent1"/>
-          </a:lnRef>
-          <a:fillRef idx="3">
-            <a:schemeClr val="accent1"/>
-          </a:fillRef>
-          <a:effectRef idx="2">
-            <a:schemeClr val="accent1"/>
-          </a:effectRef>
-          <a:fontRef idx="minor">
-            <a:schemeClr val="lt1"/>
-          </a:fontRef>
-        </p:style>
-        <p:txBody>
-          <a:bodyPr rtlCol="0" anchor="ctr"/>
-          <a:lstStyle/>
-          <a:p>
-            <a:pPr algn="ctr"/>
-          </a:p>
-        </p:txBody>
-      </p:sp>
-      <p:sp>
-        <p:nvSpPr>
-          <p:cNvPr id="20" name="TextBox 19"/>
-          <p:cNvSpPr txBox="1"/>
-          <p:nvPr/>
-        </p:nvSpPr>
-        <p:spPr>
-          <a:xfrm>
-            <a:off x="850392" y="4754880"/>
-            <a:ext cx="1283208" cy="1005840"/>
-          </a:xfrm>
-          <a:prstGeom prst="rect">
-            <a:avLst/>
-          </a:prstGeom>
           <a:noFill/>
         </p:spPr>
         <p:txBody>
-          <a:bodyPr wrap="square" anchor="t" lIns="0" rIns="0" tIns="0" bIns="0">
+          <a:bodyPr wrap="square" anchor="ctr" lIns="0" rIns="0" tIns="0" bIns="0">
             <a:spAutoFit/>
           </a:bodyPr>
           <a:lstStyle/>
           <a:p>
-            <a:pPr algn="l">
+            <a:pPr algn="ctr">
               <a:spcAft>
                 <a:spcPts val="400"/>
               </a:spcAft>
             </a:pPr>
             <a:r>
-              <a:rPr sz="1100" b="1" i="0">
+              <a:rPr sz="1200" b="1" i="0" spc="150">
                 <a:solidFill>
-                  <a:srgbClr val="A9AEB5"/>
+                  <a:srgbClr val="868B94"/>
                 </a:solidFill>
                 <a:latin typeface="Arial"/>
               </a:rPr>
-              <a:t>01</a:t>
-            </a:r>
-          </a:p>
-          <a:p>
-            <a:pPr algn="l">
+              <a:t>BRAND A</a:t>
+            </a:r>
+          </a:p>
+          <a:p>
+            <a:pPr algn="ctr">
               <a:lnSpc>
                 <a:spcPct val="110000"/>
               </a:lnSpc>
             </a:pPr>
             <a:r>
-              <a:rPr sz="1150" b="1" i="0">
+              <a:rPr sz="950" b="0" i="0">
                 <a:solidFill>
-                  <a:srgbClr val="1A1A1C"/>
+                  <a:srgbClr val="C8CCD2"/>
                 </a:solidFill>
                 <a:latin typeface="Arial"/>
               </a:rPr>
-              <a:t>Exterior Design</a:t>
-            </a:r>
-          </a:p>
-        </p:txBody>
-      </p:sp>
-      <p:sp>
-        <p:nvSpPr>
-          <p:cNvPr id="21" name="Rectangle 20"/>
+              <a:t>Distinct role</a:t>
+            </a:r>
+          </a:p>
+        </p:txBody>
+      </p:sp>
+      <p:sp>
+        <p:nvSpPr>
+          <p:cNvPr id="9" name="Rectangle 8"/>
           <p:cNvSpPr/>
           <p:nvPr/>
         </p:nvSpPr>
         <p:spPr>
           <a:xfrm>
-            <a:off x="2526792" y="4526280"/>
-            <a:ext cx="1612392" cy="1280160"/>
+            <a:off x="3481578" y="4297680"/>
+            <a:ext cx="2430018" cy="1371600"/>
           </a:xfrm>
           <a:prstGeom prst="rect">
             <a:avLst/>
@@ -12965,113 +12596,69 @@
       </p:sp>
       <p:sp>
         <p:nvSpPr>
-          <p:cNvPr id="22" name="Rectangle 21"/>
-          <p:cNvSpPr/>
-          <p:nvPr/>
-        </p:nvSpPr>
-        <p:spPr>
-          <a:xfrm>
-            <a:off x="2526792" y="4526280"/>
-            <a:ext cx="1612392" cy="64008"/>
+          <p:cNvPr id="10" name="TextBox 9"/>
+          <p:cNvSpPr txBox="1"/>
+          <p:nvPr/>
+        </p:nvSpPr>
+        <p:spPr>
+          <a:xfrm>
+            <a:off x="3481578" y="4297680"/>
+            <a:ext cx="2430018" cy="1371600"/>
           </a:xfrm>
           <a:prstGeom prst="rect">
             <a:avLst/>
           </a:prstGeom>
-          <a:solidFill>
-            <a:srgbClr val="1B2A4A"/>
-          </a:solidFill>
-          <a:ln>
-            <a:noFill/>
-          </a:ln>
-          <a:effectLst/>
-        </p:spPr>
-        <p:style>
-          <a:lnRef idx="1">
-            <a:schemeClr val="accent1"/>
-          </a:lnRef>
-          <a:fillRef idx="3">
-            <a:schemeClr val="accent1"/>
-          </a:fillRef>
-          <a:effectRef idx="2">
-            <a:schemeClr val="accent1"/>
-          </a:effectRef>
-          <a:fontRef idx="minor">
-            <a:schemeClr val="lt1"/>
-          </a:fontRef>
-        </p:style>
-        <p:txBody>
-          <a:bodyPr rtlCol="0" anchor="ctr"/>
-          <a:lstStyle/>
-          <a:p>
-            <a:pPr algn="ctr"/>
-          </a:p>
-        </p:txBody>
-      </p:sp>
-      <p:sp>
-        <p:nvSpPr>
-          <p:cNvPr id="23" name="TextBox 22"/>
-          <p:cNvSpPr txBox="1"/>
-          <p:nvPr/>
-        </p:nvSpPr>
-        <p:spPr>
-          <a:xfrm>
-            <a:off x="2691384" y="4754880"/>
-            <a:ext cx="1283208" cy="1005840"/>
-          </a:xfrm>
-          <a:prstGeom prst="rect">
-            <a:avLst/>
-          </a:prstGeom>
           <a:noFill/>
         </p:spPr>
         <p:txBody>
-          <a:bodyPr wrap="square" anchor="t" lIns="0" rIns="0" tIns="0" bIns="0">
+          <a:bodyPr wrap="square" anchor="ctr" lIns="0" rIns="0" tIns="0" bIns="0">
             <a:spAutoFit/>
           </a:bodyPr>
           <a:lstStyle/>
           <a:p>
-            <a:pPr algn="l">
+            <a:pPr algn="ctr">
               <a:spcAft>
                 <a:spcPts val="400"/>
               </a:spcAft>
             </a:pPr>
             <a:r>
-              <a:rPr sz="1100" b="1" i="0">
+              <a:rPr sz="1200" b="1" i="0" spc="150">
                 <a:solidFill>
-                  <a:srgbClr val="A9AEB5"/>
+                  <a:srgbClr val="868B94"/>
                 </a:solidFill>
                 <a:latin typeface="Arial"/>
               </a:rPr>
-              <a:t>02</a:t>
-            </a:r>
-          </a:p>
-          <a:p>
-            <a:pPr algn="l">
+              <a:t>BRAND B</a:t>
+            </a:r>
+          </a:p>
+          <a:p>
+            <a:pPr algn="ctr">
               <a:lnSpc>
                 <a:spcPct val="110000"/>
               </a:lnSpc>
             </a:pPr>
             <a:r>
-              <a:rPr sz="1150" b="1" i="0">
+              <a:rPr sz="950" b="0" i="0">
                 <a:solidFill>
-                  <a:srgbClr val="1A1A1C"/>
+                  <a:srgbClr val="C8CCD2"/>
                 </a:solidFill>
                 <a:latin typeface="Arial"/>
               </a:rPr>
-              <a:t>Interior Design</a:t>
-            </a:r>
-          </a:p>
-        </p:txBody>
-      </p:sp>
-      <p:sp>
-        <p:nvSpPr>
-          <p:cNvPr id="24" name="Rectangle 23"/>
+              <a:t>Distinct role</a:t>
+            </a:r>
+          </a:p>
+        </p:txBody>
+      </p:sp>
+      <p:sp>
+        <p:nvSpPr>
+          <p:cNvPr id="11" name="Rectangle 10"/>
           <p:cNvSpPr/>
           <p:nvPr/>
         </p:nvSpPr>
         <p:spPr>
           <a:xfrm>
-            <a:off x="4367784" y="4526280"/>
-            <a:ext cx="1612392" cy="1280160"/>
+            <a:off x="6277356" y="4297680"/>
+            <a:ext cx="2430018" cy="1371600"/>
           </a:xfrm>
           <a:prstGeom prst="rect">
             <a:avLst/>
@@ -13110,113 +12697,69 @@
       </p:sp>
       <p:sp>
         <p:nvSpPr>
-          <p:cNvPr id="25" name="Rectangle 24"/>
-          <p:cNvSpPr/>
-          <p:nvPr/>
-        </p:nvSpPr>
-        <p:spPr>
-          <a:xfrm>
-            <a:off x="4367784" y="4526280"/>
-            <a:ext cx="1612392" cy="64008"/>
+          <p:cNvPr id="12" name="TextBox 11"/>
+          <p:cNvSpPr txBox="1"/>
+          <p:nvPr/>
+        </p:nvSpPr>
+        <p:spPr>
+          <a:xfrm>
+            <a:off x="6277356" y="4297680"/>
+            <a:ext cx="2430018" cy="1371600"/>
           </a:xfrm>
           <a:prstGeom prst="rect">
             <a:avLst/>
           </a:prstGeom>
-          <a:solidFill>
-            <a:srgbClr val="1B2A4A"/>
-          </a:solidFill>
-          <a:ln>
-            <a:noFill/>
-          </a:ln>
-          <a:effectLst/>
-        </p:spPr>
-        <p:style>
-          <a:lnRef idx="1">
-            <a:schemeClr val="accent1"/>
-          </a:lnRef>
-          <a:fillRef idx="3">
-            <a:schemeClr val="accent1"/>
-          </a:fillRef>
-          <a:effectRef idx="2">
-            <a:schemeClr val="accent1"/>
-          </a:effectRef>
-          <a:fontRef idx="minor">
-            <a:schemeClr val="lt1"/>
-          </a:fontRef>
-        </p:style>
-        <p:txBody>
-          <a:bodyPr rtlCol="0" anchor="ctr"/>
-          <a:lstStyle/>
-          <a:p>
-            <a:pPr algn="ctr"/>
-          </a:p>
-        </p:txBody>
-      </p:sp>
-      <p:sp>
-        <p:nvSpPr>
-          <p:cNvPr id="26" name="TextBox 25"/>
-          <p:cNvSpPr txBox="1"/>
-          <p:nvPr/>
-        </p:nvSpPr>
-        <p:spPr>
-          <a:xfrm>
-            <a:off x="4532376" y="4754880"/>
-            <a:ext cx="1283208" cy="1005840"/>
-          </a:xfrm>
-          <a:prstGeom prst="rect">
-            <a:avLst/>
-          </a:prstGeom>
           <a:noFill/>
         </p:spPr>
         <p:txBody>
-          <a:bodyPr wrap="square" anchor="t" lIns="0" rIns="0" tIns="0" bIns="0">
+          <a:bodyPr wrap="square" anchor="ctr" lIns="0" rIns="0" tIns="0" bIns="0">
             <a:spAutoFit/>
           </a:bodyPr>
           <a:lstStyle/>
           <a:p>
-            <a:pPr algn="l">
+            <a:pPr algn="ctr">
               <a:spcAft>
                 <a:spcPts val="400"/>
               </a:spcAft>
             </a:pPr>
             <a:r>
-              <a:rPr sz="1100" b="1" i="0">
+              <a:rPr sz="1200" b="1" i="0" spc="150">
                 <a:solidFill>
-                  <a:srgbClr val="A9AEB5"/>
+                  <a:srgbClr val="868B94"/>
                 </a:solidFill>
                 <a:latin typeface="Arial"/>
               </a:rPr>
-              <a:t>03</a:t>
-            </a:r>
-          </a:p>
-          <a:p>
-            <a:pPr algn="l">
+              <a:t>BRAND C</a:t>
+            </a:r>
+          </a:p>
+          <a:p>
+            <a:pPr algn="ctr">
               <a:lnSpc>
                 <a:spcPct val="110000"/>
               </a:lnSpc>
             </a:pPr>
             <a:r>
-              <a:rPr sz="1150" b="1" i="0">
+              <a:rPr sz="950" b="0" i="0">
                 <a:solidFill>
-                  <a:srgbClr val="1A1A1C"/>
+                  <a:srgbClr val="C8CCD2"/>
                 </a:solidFill>
                 <a:latin typeface="Arial"/>
               </a:rPr>
-              <a:t>CMF</a:t>
-            </a:r>
-          </a:p>
-        </p:txBody>
-      </p:sp>
-      <p:sp>
-        <p:nvSpPr>
-          <p:cNvPr id="27" name="Rectangle 26"/>
+              <a:t>Distinct role</a:t>
+            </a:r>
+          </a:p>
+        </p:txBody>
+      </p:sp>
+      <p:sp>
+        <p:nvSpPr>
+          <p:cNvPr id="13" name="Rectangle 12"/>
           <p:cNvSpPr/>
           <p:nvPr/>
         </p:nvSpPr>
         <p:spPr>
           <a:xfrm>
-            <a:off x="6208776" y="4526280"/>
-            <a:ext cx="1612392" cy="1280160"/>
+            <a:off x="9073134" y="4297680"/>
+            <a:ext cx="2430018" cy="1371600"/>
           </a:xfrm>
           <a:prstGeom prst="rect">
             <a:avLst/>
@@ -13255,396 +12798,62 @@
       </p:sp>
       <p:sp>
         <p:nvSpPr>
-          <p:cNvPr id="28" name="Rectangle 27"/>
-          <p:cNvSpPr/>
-          <p:nvPr/>
-        </p:nvSpPr>
-        <p:spPr>
-          <a:xfrm>
-            <a:off x="6208776" y="4526280"/>
-            <a:ext cx="1612392" cy="64008"/>
+          <p:cNvPr id="14" name="TextBox 13"/>
+          <p:cNvSpPr txBox="1"/>
+          <p:nvPr/>
+        </p:nvSpPr>
+        <p:spPr>
+          <a:xfrm>
+            <a:off x="9073134" y="4297680"/>
+            <a:ext cx="2430018" cy="1371600"/>
           </a:xfrm>
           <a:prstGeom prst="rect">
             <a:avLst/>
           </a:prstGeom>
-          <a:solidFill>
-            <a:srgbClr val="1B2A4A"/>
-          </a:solidFill>
-          <a:ln>
-            <a:noFill/>
-          </a:ln>
-          <a:effectLst/>
-        </p:spPr>
-        <p:style>
-          <a:lnRef idx="1">
-            <a:schemeClr val="accent1"/>
-          </a:lnRef>
-          <a:fillRef idx="3">
-            <a:schemeClr val="accent1"/>
-          </a:fillRef>
-          <a:effectRef idx="2">
-            <a:schemeClr val="accent1"/>
-          </a:effectRef>
-          <a:fontRef idx="minor">
-            <a:schemeClr val="lt1"/>
-          </a:fontRef>
-        </p:style>
-        <p:txBody>
-          <a:bodyPr rtlCol="0" anchor="ctr"/>
-          <a:lstStyle/>
-          <a:p>
-            <a:pPr algn="ctr"/>
-          </a:p>
-        </p:txBody>
-      </p:sp>
-      <p:sp>
-        <p:nvSpPr>
-          <p:cNvPr id="29" name="TextBox 28"/>
-          <p:cNvSpPr txBox="1"/>
-          <p:nvPr/>
-        </p:nvSpPr>
-        <p:spPr>
-          <a:xfrm>
-            <a:off x="6373368" y="4754880"/>
-            <a:ext cx="1283208" cy="1005840"/>
-          </a:xfrm>
-          <a:prstGeom prst="rect">
-            <a:avLst/>
-          </a:prstGeom>
           <a:noFill/>
         </p:spPr>
         <p:txBody>
-          <a:bodyPr wrap="square" anchor="t" lIns="0" rIns="0" tIns="0" bIns="0">
+          <a:bodyPr wrap="square" anchor="ctr" lIns="0" rIns="0" tIns="0" bIns="0">
             <a:spAutoFit/>
           </a:bodyPr>
           <a:lstStyle/>
           <a:p>
-            <a:pPr algn="l">
+            <a:pPr algn="ctr">
               <a:spcAft>
                 <a:spcPts val="400"/>
               </a:spcAft>
             </a:pPr>
             <a:r>
-              <a:rPr sz="1100" b="1" i="0">
+              <a:rPr sz="1200" b="1" i="0" spc="150">
                 <a:solidFill>
-                  <a:srgbClr val="A9AEB5"/>
+                  <a:srgbClr val="868B94"/>
                 </a:solidFill>
                 <a:latin typeface="Arial"/>
               </a:rPr>
-              <a:t>04</a:t>
-            </a:r>
-          </a:p>
-          <a:p>
-            <a:pPr algn="l">
+              <a:t>BRAND D</a:t>
+            </a:r>
+          </a:p>
+          <a:p>
+            <a:pPr algn="ctr">
               <a:lnSpc>
                 <a:spcPct val="110000"/>
               </a:lnSpc>
             </a:pPr>
             <a:r>
-              <a:rPr sz="1150" b="1" i="0">
+              <a:rPr sz="950" b="0" i="0">
                 <a:solidFill>
-                  <a:srgbClr val="1A1A1C"/>
+                  <a:srgbClr val="C8CCD2"/>
                 </a:solidFill>
                 <a:latin typeface="Arial"/>
               </a:rPr>
-              <a:t>Lighting</a:t>
-            </a:r>
-          </a:p>
-        </p:txBody>
-      </p:sp>
-      <p:sp>
-        <p:nvSpPr>
-          <p:cNvPr id="30" name="Rectangle 29"/>
-          <p:cNvSpPr/>
-          <p:nvPr/>
-        </p:nvSpPr>
-        <p:spPr>
-          <a:xfrm>
-            <a:off x="8049768" y="4526280"/>
-            <a:ext cx="1612392" cy="1280160"/>
-          </a:xfrm>
-          <a:prstGeom prst="rect">
-            <a:avLst/>
-          </a:prstGeom>
-          <a:solidFill>
-            <a:srgbClr val="F7F8F9"/>
-          </a:solidFill>
-          <a:ln w="6350">
-            <a:solidFill>
-              <a:srgbClr val="C8CCD2"/>
-            </a:solidFill>
-          </a:ln>
-          <a:effectLst/>
-        </p:spPr>
-        <p:style>
-          <a:lnRef idx="1">
-            <a:schemeClr val="accent1"/>
-          </a:lnRef>
-          <a:fillRef idx="3">
-            <a:schemeClr val="accent1"/>
-          </a:fillRef>
-          <a:effectRef idx="2">
-            <a:schemeClr val="accent1"/>
-          </a:effectRef>
-          <a:fontRef idx="minor">
-            <a:schemeClr val="lt1"/>
-          </a:fontRef>
-        </p:style>
-        <p:txBody>
-          <a:bodyPr rtlCol="0" anchor="ctr"/>
-          <a:lstStyle/>
-          <a:p>
-            <a:pPr algn="ctr"/>
-          </a:p>
-        </p:txBody>
-      </p:sp>
-      <p:sp>
-        <p:nvSpPr>
-          <p:cNvPr id="31" name="Rectangle 30"/>
-          <p:cNvSpPr/>
-          <p:nvPr/>
-        </p:nvSpPr>
-        <p:spPr>
-          <a:xfrm>
-            <a:off x="8049768" y="4526280"/>
-            <a:ext cx="1612392" cy="64008"/>
-          </a:xfrm>
-          <a:prstGeom prst="rect">
-            <a:avLst/>
-          </a:prstGeom>
-          <a:solidFill>
-            <a:srgbClr val="1B2A4A"/>
-          </a:solidFill>
-          <a:ln>
-            <a:noFill/>
-          </a:ln>
-          <a:effectLst/>
-        </p:spPr>
-        <p:style>
-          <a:lnRef idx="1">
-            <a:schemeClr val="accent1"/>
-          </a:lnRef>
-          <a:fillRef idx="3">
-            <a:schemeClr val="accent1"/>
-          </a:fillRef>
-          <a:effectRef idx="2">
-            <a:schemeClr val="accent1"/>
-          </a:effectRef>
-          <a:fontRef idx="minor">
-            <a:schemeClr val="lt1"/>
-          </a:fontRef>
-        </p:style>
-        <p:txBody>
-          <a:bodyPr rtlCol="0" anchor="ctr"/>
-          <a:lstStyle/>
-          <a:p>
-            <a:pPr algn="ctr"/>
-          </a:p>
-        </p:txBody>
-      </p:sp>
-      <p:sp>
-        <p:nvSpPr>
-          <p:cNvPr id="32" name="TextBox 31"/>
-          <p:cNvSpPr txBox="1"/>
-          <p:nvPr/>
-        </p:nvSpPr>
-        <p:spPr>
-          <a:xfrm>
-            <a:off x="8214360" y="4754880"/>
-            <a:ext cx="1283208" cy="1005840"/>
-          </a:xfrm>
-          <a:prstGeom prst="rect">
-            <a:avLst/>
-          </a:prstGeom>
-          <a:noFill/>
-        </p:spPr>
-        <p:txBody>
-          <a:bodyPr wrap="square" anchor="t" lIns="0" rIns="0" tIns="0" bIns="0">
-            <a:spAutoFit/>
-          </a:bodyPr>
-          <a:lstStyle/>
-          <a:p>
-            <a:pPr algn="l">
-              <a:spcAft>
-                <a:spcPts val="400"/>
-              </a:spcAft>
-            </a:pPr>
-            <a:r>
-              <a:rPr sz="1100" b="1" i="0">
-                <a:solidFill>
-                  <a:srgbClr val="A9AEB5"/>
-                </a:solidFill>
-                <a:latin typeface="Arial"/>
-              </a:rPr>
-              <a:t>05</a:t>
-            </a:r>
-          </a:p>
-          <a:p>
-            <a:pPr algn="l">
-              <a:lnSpc>
-                <a:spcPct val="110000"/>
-              </a:lnSpc>
-            </a:pPr>
-            <a:r>
-              <a:rPr sz="1150" b="1" i="0">
-                <a:solidFill>
-                  <a:srgbClr val="1A1A1C"/>
-                </a:solidFill>
-                <a:latin typeface="Arial"/>
-              </a:rPr>
-              <a:t>Digital Experience</a:t>
-            </a:r>
-          </a:p>
-        </p:txBody>
-      </p:sp>
-      <p:sp>
-        <p:nvSpPr>
-          <p:cNvPr id="33" name="Rectangle 32"/>
-          <p:cNvSpPr/>
-          <p:nvPr/>
-        </p:nvSpPr>
-        <p:spPr>
-          <a:xfrm>
-            <a:off x="9890760" y="4526280"/>
-            <a:ext cx="1612392" cy="1280160"/>
-          </a:xfrm>
-          <a:prstGeom prst="rect">
-            <a:avLst/>
-          </a:prstGeom>
-          <a:solidFill>
-            <a:srgbClr val="F7F8F9"/>
-          </a:solidFill>
-          <a:ln w="6350">
-            <a:solidFill>
-              <a:srgbClr val="C8CCD2"/>
-            </a:solidFill>
-          </a:ln>
-          <a:effectLst/>
-        </p:spPr>
-        <p:style>
-          <a:lnRef idx="1">
-            <a:schemeClr val="accent1"/>
-          </a:lnRef>
-          <a:fillRef idx="3">
-            <a:schemeClr val="accent1"/>
-          </a:fillRef>
-          <a:effectRef idx="2">
-            <a:schemeClr val="accent1"/>
-          </a:effectRef>
-          <a:fontRef idx="minor">
-            <a:schemeClr val="lt1"/>
-          </a:fontRef>
-        </p:style>
-        <p:txBody>
-          <a:bodyPr rtlCol="0" anchor="ctr"/>
-          <a:lstStyle/>
-          <a:p>
-            <a:pPr algn="ctr"/>
-          </a:p>
-        </p:txBody>
-      </p:sp>
-      <p:sp>
-        <p:nvSpPr>
-          <p:cNvPr id="34" name="Rectangle 33"/>
-          <p:cNvSpPr/>
-          <p:nvPr/>
-        </p:nvSpPr>
-        <p:spPr>
-          <a:xfrm>
-            <a:off x="9890760" y="4526280"/>
-            <a:ext cx="1612392" cy="64008"/>
-          </a:xfrm>
-          <a:prstGeom prst="rect">
-            <a:avLst/>
-          </a:prstGeom>
-          <a:solidFill>
-            <a:srgbClr val="1B2A4A"/>
-          </a:solidFill>
-          <a:ln>
-            <a:noFill/>
-          </a:ln>
-          <a:effectLst/>
-        </p:spPr>
-        <p:style>
-          <a:lnRef idx="1">
-            <a:schemeClr val="accent1"/>
-          </a:lnRef>
-          <a:fillRef idx="3">
-            <a:schemeClr val="accent1"/>
-          </a:fillRef>
-          <a:effectRef idx="2">
-            <a:schemeClr val="accent1"/>
-          </a:effectRef>
-          <a:fontRef idx="minor">
-            <a:schemeClr val="lt1"/>
-          </a:fontRef>
-        </p:style>
-        <p:txBody>
-          <a:bodyPr rtlCol="0" anchor="ctr"/>
-          <a:lstStyle/>
-          <a:p>
-            <a:pPr algn="ctr"/>
-          </a:p>
-        </p:txBody>
-      </p:sp>
-      <p:sp>
-        <p:nvSpPr>
-          <p:cNvPr id="35" name="TextBox 34"/>
-          <p:cNvSpPr txBox="1"/>
-          <p:nvPr/>
-        </p:nvSpPr>
-        <p:spPr>
-          <a:xfrm>
-            <a:off x="10055352" y="4754880"/>
-            <a:ext cx="1283208" cy="1005840"/>
-          </a:xfrm>
-          <a:prstGeom prst="rect">
-            <a:avLst/>
-          </a:prstGeom>
-          <a:noFill/>
-        </p:spPr>
-        <p:txBody>
-          <a:bodyPr wrap="square" anchor="t" lIns="0" rIns="0" tIns="0" bIns="0">
-            <a:spAutoFit/>
-          </a:bodyPr>
-          <a:lstStyle/>
-          <a:p>
-            <a:pPr algn="l">
-              <a:spcAft>
-                <a:spcPts val="400"/>
-              </a:spcAft>
-            </a:pPr>
-            <a:r>
-              <a:rPr sz="1100" b="1" i="0">
-                <a:solidFill>
-                  <a:srgbClr val="A9AEB5"/>
-                </a:solidFill>
-                <a:latin typeface="Arial"/>
-              </a:rPr>
-              <a:t>06</a:t>
-            </a:r>
-          </a:p>
-          <a:p>
-            <a:pPr algn="l">
-              <a:lnSpc>
-                <a:spcPct val="110000"/>
-              </a:lnSpc>
-            </a:pPr>
-            <a:r>
-              <a:rPr sz="1150" b="1" i="0">
-                <a:solidFill>
-                  <a:srgbClr val="1A1A1C"/>
-                </a:solidFill>
-                <a:latin typeface="Arial"/>
-              </a:rPr>
-              <a:t>AI-enabled Design</a:t>
-            </a:r>
-          </a:p>
-        </p:txBody>
-      </p:sp>
-      <p:sp>
-        <p:nvSpPr>
-          <p:cNvPr id="36" name="TextBox 35"/>
+              <a:t>Distinct role</a:t>
+            </a:r>
+          </a:p>
+        </p:txBody>
+      </p:sp>
+      <p:sp>
+        <p:nvSpPr>
+          <p:cNvPr id="15" name="TextBox 14"/>
           <p:cNvSpPr txBox="1"/>
           <p:nvPr/>
         </p:nvSpPr>
@@ -13679,7 +12888,7 @@
       </p:sp>
       <p:sp>
         <p:nvSpPr>
-          <p:cNvPr id="37" name="TextBox 36"/>
+          <p:cNvPr id="16" name="TextBox 15"/>
           <p:cNvSpPr txBox="1"/>
           <p:nvPr/>
         </p:nvSpPr>
@@ -13714,7 +12923,7 @@
       </p:sp>
       <p:sp>
         <p:nvSpPr>
-          <p:cNvPr id="38" name="TextBox 37"/>
+          <p:cNvPr id="17" name="TextBox 16"/>
           <p:cNvSpPr txBox="1"/>
           <p:nvPr/>
         </p:nvSpPr>
@@ -13775,407 +12984,13 @@
       <p:grpSpPr/>
       <p:sp>
         <p:nvSpPr>
-          <p:cNvPr id="2" name="Rectangle 1"/>
-          <p:cNvSpPr/>
-          <p:nvPr/>
-        </p:nvSpPr>
-        <p:spPr>
-          <a:xfrm>
-            <a:off x="0" y="0"/>
-            <a:ext cx="12191695" cy="3017520"/>
-          </a:xfrm>
-          <a:prstGeom prst="rect">
-            <a:avLst/>
-          </a:prstGeom>
-          <a:solidFill>
-            <a:srgbClr val="F7F8F9"/>
-          </a:solidFill>
-          <a:ln>
-            <a:noFill/>
-          </a:ln>
-          <a:effectLst/>
-        </p:spPr>
-        <p:style>
-          <a:lnRef idx="1">
-            <a:schemeClr val="accent1"/>
-          </a:lnRef>
-          <a:fillRef idx="3">
-            <a:schemeClr val="accent1"/>
-          </a:fillRef>
-          <a:effectRef idx="2">
-            <a:schemeClr val="accent1"/>
-          </a:effectRef>
-          <a:fontRef idx="minor">
-            <a:schemeClr val="lt1"/>
-          </a:fontRef>
-        </p:style>
-        <p:txBody>
-          <a:bodyPr rtlCol="0" anchor="ctr"/>
-          <a:lstStyle/>
-          <a:p>
-            <a:pPr algn="ctr"/>
-          </a:p>
-        </p:txBody>
-      </p:sp>
-      <p:cxnSp>
-        <p:nvCxnSpPr>
-          <p:cNvPr id="3" name="Connector 2"/>
-          <p:cNvCxnSpPr/>
-          <p:nvPr/>
-        </p:nvCxnSpPr>
-        <p:spPr>
-          <a:xfrm>
-            <a:off x="0" y="0"/>
-            <a:ext cx="237744" cy="0"/>
-          </a:xfrm>
-          <a:prstGeom prst="bentConnector3">
-            <a:avLst/>
-          </a:prstGeom>
-          <a:ln w="15875">
-            <a:solidFill>
-              <a:srgbClr val="A9AEB5"/>
-            </a:solidFill>
-          </a:ln>
-        </p:spPr>
-        <p:style>
-          <a:lnRef idx="2">
-            <a:schemeClr val="accent1"/>
-          </a:lnRef>
-          <a:fillRef idx="0">
-            <a:schemeClr val="accent1"/>
-          </a:fillRef>
-          <a:effectRef idx="1">
-            <a:schemeClr val="accent1"/>
-          </a:effectRef>
-          <a:fontRef idx="minor">
-            <a:schemeClr val="tx1"/>
-          </a:fontRef>
-        </p:style>
-      </p:cxnSp>
-      <p:cxnSp>
-        <p:nvCxnSpPr>
-          <p:cNvPr id="4" name="Connector 3"/>
-          <p:cNvCxnSpPr/>
-          <p:nvPr/>
-        </p:nvCxnSpPr>
-        <p:spPr>
-          <a:xfrm>
-            <a:off x="0" y="0"/>
-            <a:ext cx="0" cy="237744"/>
-          </a:xfrm>
-          <a:prstGeom prst="bentConnector3">
-            <a:avLst/>
-          </a:prstGeom>
-          <a:ln w="15875">
-            <a:solidFill>
-              <a:srgbClr val="A9AEB5"/>
-            </a:solidFill>
-          </a:ln>
-        </p:spPr>
-        <p:style>
-          <a:lnRef idx="2">
-            <a:schemeClr val="accent1"/>
-          </a:lnRef>
-          <a:fillRef idx="0">
-            <a:schemeClr val="accent1"/>
-          </a:fillRef>
-          <a:effectRef idx="1">
-            <a:schemeClr val="accent1"/>
-          </a:effectRef>
-          <a:fontRef idx="minor">
-            <a:schemeClr val="tx1"/>
-          </a:fontRef>
-        </p:style>
-      </p:cxnSp>
-      <p:cxnSp>
-        <p:nvCxnSpPr>
-          <p:cNvPr id="5" name="Connector 4"/>
-          <p:cNvCxnSpPr/>
-          <p:nvPr/>
-        </p:nvCxnSpPr>
-        <p:spPr>
-          <a:xfrm flipH="1">
-            <a:off x="11953951" y="0"/>
-            <a:ext cx="237744" cy="0"/>
-          </a:xfrm>
-          <a:prstGeom prst="bentConnector3">
-            <a:avLst/>
-          </a:prstGeom>
-          <a:ln w="15875">
-            <a:solidFill>
-              <a:srgbClr val="A9AEB5"/>
-            </a:solidFill>
-          </a:ln>
-        </p:spPr>
-        <p:style>
-          <a:lnRef idx="2">
-            <a:schemeClr val="accent1"/>
-          </a:lnRef>
-          <a:fillRef idx="0">
-            <a:schemeClr val="accent1"/>
-          </a:fillRef>
-          <a:effectRef idx="1">
-            <a:schemeClr val="accent1"/>
-          </a:effectRef>
-          <a:fontRef idx="minor">
-            <a:schemeClr val="tx1"/>
-          </a:fontRef>
-        </p:style>
-      </p:cxnSp>
-      <p:cxnSp>
-        <p:nvCxnSpPr>
-          <p:cNvPr id="6" name="Connector 5"/>
-          <p:cNvCxnSpPr/>
-          <p:nvPr/>
-        </p:nvCxnSpPr>
-        <p:spPr>
-          <a:xfrm>
-            <a:off x="12191695" y="0"/>
-            <a:ext cx="0" cy="237744"/>
-          </a:xfrm>
-          <a:prstGeom prst="bentConnector3">
-            <a:avLst/>
-          </a:prstGeom>
-          <a:ln w="15875">
-            <a:solidFill>
-              <a:srgbClr val="A9AEB5"/>
-            </a:solidFill>
-          </a:ln>
-        </p:spPr>
-        <p:style>
-          <a:lnRef idx="2">
-            <a:schemeClr val="accent1"/>
-          </a:lnRef>
-          <a:fillRef idx="0">
-            <a:schemeClr val="accent1"/>
-          </a:fillRef>
-          <a:effectRef idx="1">
-            <a:schemeClr val="accent1"/>
-          </a:effectRef>
-          <a:fontRef idx="minor">
-            <a:schemeClr val="tx1"/>
-          </a:fontRef>
-        </p:style>
-      </p:cxnSp>
-      <p:cxnSp>
-        <p:nvCxnSpPr>
-          <p:cNvPr id="7" name="Connector 6"/>
-          <p:cNvCxnSpPr/>
-          <p:nvPr/>
-        </p:nvCxnSpPr>
-        <p:spPr>
-          <a:xfrm>
-            <a:off x="0" y="3017520"/>
-            <a:ext cx="237744" cy="0"/>
-          </a:xfrm>
-          <a:prstGeom prst="bentConnector3">
-            <a:avLst/>
-          </a:prstGeom>
-          <a:ln w="15875">
-            <a:solidFill>
-              <a:srgbClr val="A9AEB5"/>
-            </a:solidFill>
-          </a:ln>
-        </p:spPr>
-        <p:style>
-          <a:lnRef idx="2">
-            <a:schemeClr val="accent1"/>
-          </a:lnRef>
-          <a:fillRef idx="0">
-            <a:schemeClr val="accent1"/>
-          </a:fillRef>
-          <a:effectRef idx="1">
-            <a:schemeClr val="accent1"/>
-          </a:effectRef>
-          <a:fontRef idx="minor">
-            <a:schemeClr val="tx1"/>
-          </a:fontRef>
-        </p:style>
-      </p:cxnSp>
-      <p:cxnSp>
-        <p:nvCxnSpPr>
-          <p:cNvPr id="8" name="Connector 7"/>
-          <p:cNvCxnSpPr/>
-          <p:nvPr/>
-        </p:nvCxnSpPr>
-        <p:spPr>
-          <a:xfrm flipV="1">
-            <a:off x="0" y="2779776"/>
-            <a:ext cx="0" cy="237744"/>
-          </a:xfrm>
-          <a:prstGeom prst="bentConnector3">
-            <a:avLst/>
-          </a:prstGeom>
-          <a:ln w="15875">
-            <a:solidFill>
-              <a:srgbClr val="A9AEB5"/>
-            </a:solidFill>
-          </a:ln>
-        </p:spPr>
-        <p:style>
-          <a:lnRef idx="2">
-            <a:schemeClr val="accent1"/>
-          </a:lnRef>
-          <a:fillRef idx="0">
-            <a:schemeClr val="accent1"/>
-          </a:fillRef>
-          <a:effectRef idx="1">
-            <a:schemeClr val="accent1"/>
-          </a:effectRef>
-          <a:fontRef idx="minor">
-            <a:schemeClr val="tx1"/>
-          </a:fontRef>
-        </p:style>
-      </p:cxnSp>
-      <p:cxnSp>
-        <p:nvCxnSpPr>
-          <p:cNvPr id="9" name="Connector 8"/>
-          <p:cNvCxnSpPr/>
-          <p:nvPr/>
-        </p:nvCxnSpPr>
-        <p:spPr>
-          <a:xfrm flipH="1">
-            <a:off x="11953951" y="3017520"/>
-            <a:ext cx="237744" cy="0"/>
-          </a:xfrm>
-          <a:prstGeom prst="bentConnector3">
-            <a:avLst/>
-          </a:prstGeom>
-          <a:ln w="15875">
-            <a:solidFill>
-              <a:srgbClr val="A9AEB5"/>
-            </a:solidFill>
-          </a:ln>
-        </p:spPr>
-        <p:style>
-          <a:lnRef idx="2">
-            <a:schemeClr val="accent1"/>
-          </a:lnRef>
-          <a:fillRef idx="0">
-            <a:schemeClr val="accent1"/>
-          </a:fillRef>
-          <a:effectRef idx="1">
-            <a:schemeClr val="accent1"/>
-          </a:effectRef>
-          <a:fontRef idx="minor">
-            <a:schemeClr val="tx1"/>
-          </a:fontRef>
-        </p:style>
-      </p:cxnSp>
-      <p:cxnSp>
-        <p:nvCxnSpPr>
-          <p:cNvPr id="10" name="Connector 9"/>
-          <p:cNvCxnSpPr/>
-          <p:nvPr/>
-        </p:nvCxnSpPr>
-        <p:spPr>
-          <a:xfrm flipV="1">
-            <a:off x="12191695" y="2779776"/>
-            <a:ext cx="0" cy="237744"/>
-          </a:xfrm>
-          <a:prstGeom prst="bentConnector3">
-            <a:avLst/>
-          </a:prstGeom>
-          <a:ln w="15875">
-            <a:solidFill>
-              <a:srgbClr val="A9AEB5"/>
-            </a:solidFill>
-          </a:ln>
-        </p:spPr>
-        <p:style>
-          <a:lnRef idx="2">
-            <a:schemeClr val="accent1"/>
-          </a:lnRef>
-          <a:fillRef idx="0">
-            <a:schemeClr val="accent1"/>
-          </a:fillRef>
-          <a:effectRef idx="1">
-            <a:schemeClr val="accent1"/>
-          </a:effectRef>
-          <a:fontRef idx="minor">
-            <a:schemeClr val="tx1"/>
-          </a:fontRef>
-        </p:style>
-      </p:cxnSp>
-      <p:sp>
-        <p:nvSpPr>
-          <p:cNvPr id="11" name="TextBox 10"/>
+          <p:cNvPr id="2" name="TextBox 1"/>
           <p:cNvSpPr txBox="1"/>
           <p:nvPr/>
         </p:nvSpPr>
         <p:spPr>
           <a:xfrm>
-            <a:off x="0" y="1307592"/>
-            <a:ext cx="12191695" cy="365760"/>
-          </a:xfrm>
-          <a:prstGeom prst="rect">
-            <a:avLst/>
-          </a:prstGeom>
-          <a:noFill/>
-        </p:spPr>
-        <p:txBody>
-          <a:bodyPr wrap="square" anchor="t" lIns="0" rIns="0" tIns="0" bIns="0">
-            <a:spAutoFit/>
-          </a:bodyPr>
-          <a:lstStyle/>
-          <a:p>
-            <a:pPr algn="ctr"/>
-            <a:r>
-              <a:rPr sz="1050" b="1" i="0" spc="200">
-                <a:solidFill>
-                  <a:srgbClr val="868B94"/>
-                </a:solidFill>
-                <a:latin typeface="Arial"/>
-              </a:rPr>
-              <a:t>CLOSING HERO IMAGE</a:t>
-            </a:r>
-          </a:p>
-        </p:txBody>
-      </p:sp>
-      <p:sp>
-        <p:nvSpPr>
-          <p:cNvPr id="12" name="TextBox 11"/>
-          <p:cNvSpPr txBox="1"/>
-          <p:nvPr/>
-        </p:nvSpPr>
-        <p:spPr>
-          <a:xfrm>
-            <a:off x="0" y="1581912"/>
-            <a:ext cx="12191695" cy="274320"/>
-          </a:xfrm>
-          <a:prstGeom prst="rect">
-            <a:avLst/>
-          </a:prstGeom>
-          <a:noFill/>
-        </p:spPr>
-        <p:txBody>
-          <a:bodyPr wrap="square" anchor="t" lIns="0" rIns="0" tIns="0" bIns="0">
-            <a:spAutoFit/>
-          </a:bodyPr>
-          <a:lstStyle/>
-          <a:p>
-            <a:pPr algn="ctr"/>
-            <a:r>
-              <a:rPr sz="800" b="0" i="0" spc="80">
-                <a:solidFill>
-                  <a:srgbClr val="C8CCD2"/>
-                </a:solidFill>
-                <a:latin typeface="Arial"/>
-              </a:rPr>
-              <a:t>Replace · aspirational closing visual</a:t>
-            </a:r>
-          </a:p>
-        </p:txBody>
-      </p:sp>
-      <p:sp>
-        <p:nvSpPr>
-          <p:cNvPr id="13" name="TextBox 12"/>
-          <p:cNvSpPr txBox="1"/>
-          <p:nvPr/>
-        </p:nvSpPr>
-        <p:spPr>
-          <a:xfrm>
-            <a:off x="685800" y="3291840"/>
+            <a:off x="685800" y="640080"/>
             <a:ext cx="7315200" cy="274320"/>
           </a:xfrm>
           <a:prstGeom prst="rect">
@@ -14197,21 +13012,21 @@
                 </a:solidFill>
                 <a:latin typeface="Arial"/>
               </a:rPr>
-              <a:t>IN SUMMARY</a:t>
-            </a:r>
-          </a:p>
-        </p:txBody>
-      </p:sp>
-      <p:sp>
-        <p:nvSpPr>
-          <p:cNvPr id="14" name="TextBox 13"/>
+              <a:t>LOOKING FORWARD</a:t>
+            </a:r>
+          </a:p>
+        </p:txBody>
+      </p:sp>
+      <p:sp>
+        <p:nvSpPr>
+          <p:cNvPr id="3" name="TextBox 2"/>
           <p:cNvSpPr txBox="1"/>
           <p:nvPr/>
         </p:nvSpPr>
         <p:spPr>
           <a:xfrm>
-            <a:off x="658368" y="3611880"/>
-            <a:ext cx="10058400" cy="731520"/>
+            <a:off x="658368" y="960120"/>
+            <a:ext cx="10515600" cy="822960"/>
           </a:xfrm>
           <a:prstGeom prst="rect">
             <a:avLst/>
@@ -14226,27 +13041,117 @@
           <a:p>
             <a:pPr algn="l"/>
             <a:r>
-              <a:rPr sz="3000" b="1" i="0">
+              <a:rPr sz="2800" b="1" i="0">
                 <a:solidFill>
                   <a:srgbClr val="1A1A1C"/>
                 </a:solidFill>
                 <a:latin typeface="Arial"/>
               </a:rPr>
-              <a:t>Executive Takeaways</a:t>
-            </a:r>
-          </a:p>
-        </p:txBody>
-      </p:sp>
-      <p:sp>
-        <p:nvSpPr>
-          <p:cNvPr id="15" name="TextBox 14"/>
+              <a:t>Future Customer Experience</a:t>
+            </a:r>
+          </a:p>
+        </p:txBody>
+      </p:sp>
+      <p:sp>
+        <p:nvSpPr>
+          <p:cNvPr id="4" name="Rectangle 3"/>
+          <p:cNvSpPr/>
+          <p:nvPr/>
+        </p:nvSpPr>
+        <p:spPr>
+          <a:xfrm>
+            <a:off x="685800" y="2057400"/>
+            <a:ext cx="3361944" cy="1828800"/>
+          </a:xfrm>
+          <a:prstGeom prst="rect">
+            <a:avLst/>
+          </a:prstGeom>
+          <a:solidFill>
+            <a:srgbClr val="F7F8F9"/>
+          </a:solidFill>
+          <a:ln w="6350">
+            <a:solidFill>
+              <a:srgbClr val="C8CCD2"/>
+            </a:solidFill>
+          </a:ln>
+          <a:effectLst/>
+        </p:spPr>
+        <p:style>
+          <a:lnRef idx="1">
+            <a:schemeClr val="accent1"/>
+          </a:lnRef>
+          <a:fillRef idx="3">
+            <a:schemeClr val="accent1"/>
+          </a:fillRef>
+          <a:effectRef idx="2">
+            <a:schemeClr val="accent1"/>
+          </a:effectRef>
+          <a:fontRef idx="minor">
+            <a:schemeClr val="lt1"/>
+          </a:fontRef>
+        </p:style>
+        <p:txBody>
+          <a:bodyPr rtlCol="0" anchor="ctr"/>
+          <a:lstStyle/>
+          <a:p>
+            <a:pPr algn="ctr"/>
+          </a:p>
+        </p:txBody>
+      </p:sp>
+      <p:sp>
+        <p:nvSpPr>
+          <p:cNvPr id="5" name="Rounded Rectangle 4"/>
+          <p:cNvSpPr/>
+          <p:nvPr/>
+        </p:nvSpPr>
+        <p:spPr>
+          <a:xfrm>
+            <a:off x="1005840" y="2377440"/>
+            <a:ext cx="640080" cy="640080"/>
+          </a:xfrm>
+          <a:prstGeom prst="roundRect">
+            <a:avLst/>
+          </a:prstGeom>
+          <a:noFill/>
+          <a:ln w="15875">
+            <a:solidFill>
+              <a:srgbClr val="1B2A4A"/>
+            </a:solidFill>
+          </a:ln>
+          <a:effectLst/>
+        </p:spPr>
+        <p:style>
+          <a:lnRef idx="1">
+            <a:schemeClr val="accent1"/>
+          </a:lnRef>
+          <a:fillRef idx="3">
+            <a:schemeClr val="accent1"/>
+          </a:fillRef>
+          <a:effectRef idx="2">
+            <a:schemeClr val="accent1"/>
+          </a:effectRef>
+          <a:fontRef idx="minor">
+            <a:schemeClr val="lt1"/>
+          </a:fontRef>
+        </p:style>
+        <p:txBody>
+          <a:bodyPr rtlCol="0" anchor="ctr"/>
+          <a:lstStyle/>
+          <a:p>
+            <a:pPr algn="ctr"/>
+          </a:p>
+        </p:txBody>
+      </p:sp>
+      <p:sp>
+        <p:nvSpPr>
+          <p:cNvPr id="6" name="TextBox 5"/>
           <p:cNvSpPr txBox="1"/>
           <p:nvPr/>
         </p:nvSpPr>
         <p:spPr>
           <a:xfrm>
-            <a:off x="685800" y="4572000"/>
-            <a:ext cx="3361944" cy="640080"/>
+            <a:off x="1005840" y="2441448"/>
+            <a:ext cx="640080" cy="640080"/>
           </a:xfrm>
           <a:prstGeom prst="rect">
             <a:avLst/>
@@ -14254,69 +13159,34 @@
           <a:noFill/>
         </p:spPr>
         <p:txBody>
-          <a:bodyPr wrap="square" anchor="t" lIns="0" rIns="0" tIns="0" bIns="0">
+          <a:bodyPr wrap="square" anchor="ctr" lIns="0" rIns="0" tIns="0" bIns="0">
             <a:spAutoFit/>
           </a:bodyPr>
           <a:lstStyle/>
           <a:p>
-            <a:pPr algn="l"/>
-            <a:r>
-              <a:rPr sz="3000" b="1" i="0">
+            <a:pPr algn="ctr"/>
+            <a:r>
+              <a:rPr sz="750" b="0" i="0" spc="100">
                 <a:solidFill>
                   <a:srgbClr val="A9AEB5"/>
                 </a:solidFill>
                 <a:latin typeface="Arial"/>
               </a:rPr>
-              <a:t>01</a:t>
-            </a:r>
-          </a:p>
-        </p:txBody>
-      </p:sp>
-      <p:cxnSp>
-        <p:nvCxnSpPr>
-          <p:cNvPr id="16" name="Connector 15"/>
-          <p:cNvCxnSpPr/>
-          <p:nvPr/>
-        </p:nvCxnSpPr>
-        <p:spPr>
-          <a:xfrm>
-            <a:off x="685800" y="5212080"/>
-            <a:ext cx="3361944" cy="0"/>
-          </a:xfrm>
-          <a:prstGeom prst="bentConnector3">
-            <a:avLst/>
-          </a:prstGeom>
-          <a:ln w="12700">
-            <a:solidFill>
-              <a:srgbClr val="C8CCD2"/>
-            </a:solidFill>
-          </a:ln>
-        </p:spPr>
-        <p:style>
-          <a:lnRef idx="2">
-            <a:schemeClr val="accent1"/>
-          </a:lnRef>
-          <a:fillRef idx="0">
-            <a:schemeClr val="accent1"/>
-          </a:fillRef>
-          <a:effectRef idx="1">
-            <a:schemeClr val="accent1"/>
-          </a:effectRef>
-          <a:fontRef idx="minor">
-            <a:schemeClr val="tx1"/>
-          </a:fontRef>
-        </p:style>
-      </p:cxnSp>
-      <p:sp>
-        <p:nvSpPr>
-          <p:cNvPr id="17" name="TextBox 16"/>
+              <a:t>ICON</a:t>
+            </a:r>
+          </a:p>
+        </p:txBody>
+      </p:sp>
+      <p:sp>
+        <p:nvSpPr>
+          <p:cNvPr id="7" name="TextBox 6"/>
           <p:cNvSpPr txBox="1"/>
           <p:nvPr/>
         </p:nvSpPr>
         <p:spPr>
           <a:xfrm>
-            <a:off x="685800" y="5349240"/>
-            <a:ext cx="3361944" cy="1097280"/>
+            <a:off x="1005840" y="3200400"/>
+            <a:ext cx="2721864" cy="548640"/>
           </a:xfrm>
           <a:prstGeom prst="rect">
             <a:avLst/>
@@ -14331,47 +13201,137 @@
           <a:p>
             <a:pPr algn="l">
               <a:spcAft>
-                <a:spcPts val="500"/>
+                <a:spcPts val="300"/>
               </a:spcAft>
             </a:pPr>
             <a:r>
-              <a:rPr sz="1600" b="1" i="0">
+              <a:rPr sz="1400" b="1" i="0">
                 <a:solidFill>
                   <a:srgbClr val="1A1A1C"/>
                 </a:solidFill>
                 <a:latin typeface="Arial"/>
               </a:rPr>
-              <a:t>Designed Around People</a:t>
+              <a:t>Digital Ecosystem</a:t>
             </a:r>
           </a:p>
           <a:p>
             <a:pPr algn="l">
               <a:lnSpc>
-                <a:spcPct val="125000"/>
+                <a:spcPct val="115000"/>
               </a:lnSpc>
             </a:pPr>
             <a:r>
-              <a:rPr sz="1150" b="0" i="0">
+              <a:rPr sz="1000" b="0" i="0">
                 <a:solidFill>
-                  <a:srgbClr val="4A4E57"/>
+                  <a:srgbClr val="868B94"/>
                 </a:solidFill>
                 <a:latin typeface="Arial"/>
               </a:rPr>
-              <a:t>Luxury is the removal of everyday friction.</a:t>
-            </a:r>
-          </a:p>
-        </p:txBody>
-      </p:sp>
-      <p:sp>
-        <p:nvSpPr>
-          <p:cNvPr id="18" name="TextBox 17"/>
+              <a:t>Seamless, connected, personal.</a:t>
+            </a:r>
+          </a:p>
+        </p:txBody>
+      </p:sp>
+      <p:sp>
+        <p:nvSpPr>
+          <p:cNvPr id="8" name="Rectangle 7"/>
+          <p:cNvSpPr/>
+          <p:nvPr/>
+        </p:nvSpPr>
+        <p:spPr>
+          <a:xfrm>
+            <a:off x="4413504" y="2057400"/>
+            <a:ext cx="3361944" cy="1828800"/>
+          </a:xfrm>
+          <a:prstGeom prst="rect">
+            <a:avLst/>
+          </a:prstGeom>
+          <a:solidFill>
+            <a:srgbClr val="F7F8F9"/>
+          </a:solidFill>
+          <a:ln w="6350">
+            <a:solidFill>
+              <a:srgbClr val="C8CCD2"/>
+            </a:solidFill>
+          </a:ln>
+          <a:effectLst/>
+        </p:spPr>
+        <p:style>
+          <a:lnRef idx="1">
+            <a:schemeClr val="accent1"/>
+          </a:lnRef>
+          <a:fillRef idx="3">
+            <a:schemeClr val="accent1"/>
+          </a:fillRef>
+          <a:effectRef idx="2">
+            <a:schemeClr val="accent1"/>
+          </a:effectRef>
+          <a:fontRef idx="minor">
+            <a:schemeClr val="lt1"/>
+          </a:fontRef>
+        </p:style>
+        <p:txBody>
+          <a:bodyPr rtlCol="0" anchor="ctr"/>
+          <a:lstStyle/>
+          <a:p>
+            <a:pPr algn="ctr"/>
+          </a:p>
+        </p:txBody>
+      </p:sp>
+      <p:sp>
+        <p:nvSpPr>
+          <p:cNvPr id="9" name="Rounded Rectangle 8"/>
+          <p:cNvSpPr/>
+          <p:nvPr/>
+        </p:nvSpPr>
+        <p:spPr>
+          <a:xfrm>
+            <a:off x="4733544" y="2377440"/>
+            <a:ext cx="640080" cy="640080"/>
+          </a:xfrm>
+          <a:prstGeom prst="roundRect">
+            <a:avLst/>
+          </a:prstGeom>
+          <a:noFill/>
+          <a:ln w="15875">
+            <a:solidFill>
+              <a:srgbClr val="1B2A4A"/>
+            </a:solidFill>
+          </a:ln>
+          <a:effectLst/>
+        </p:spPr>
+        <p:style>
+          <a:lnRef idx="1">
+            <a:schemeClr val="accent1"/>
+          </a:lnRef>
+          <a:fillRef idx="3">
+            <a:schemeClr val="accent1"/>
+          </a:fillRef>
+          <a:effectRef idx="2">
+            <a:schemeClr val="accent1"/>
+          </a:effectRef>
+          <a:fontRef idx="minor">
+            <a:schemeClr val="lt1"/>
+          </a:fontRef>
+        </p:style>
+        <p:txBody>
+          <a:bodyPr rtlCol="0" anchor="ctr"/>
+          <a:lstStyle/>
+          <a:p>
+            <a:pPr algn="ctr"/>
+          </a:p>
+        </p:txBody>
+      </p:sp>
+      <p:sp>
+        <p:nvSpPr>
+          <p:cNvPr id="10" name="TextBox 9"/>
           <p:cNvSpPr txBox="1"/>
           <p:nvPr/>
         </p:nvSpPr>
         <p:spPr>
           <a:xfrm>
-            <a:off x="4413504" y="4572000"/>
-            <a:ext cx="3361944" cy="640080"/>
+            <a:off x="4733544" y="2441448"/>
+            <a:ext cx="640080" cy="640080"/>
           </a:xfrm>
           <a:prstGeom prst="rect">
             <a:avLst/>
@@ -14379,69 +13339,34 @@
           <a:noFill/>
         </p:spPr>
         <p:txBody>
-          <a:bodyPr wrap="square" anchor="t" lIns="0" rIns="0" tIns="0" bIns="0">
+          <a:bodyPr wrap="square" anchor="ctr" lIns="0" rIns="0" tIns="0" bIns="0">
             <a:spAutoFit/>
           </a:bodyPr>
           <a:lstStyle/>
           <a:p>
-            <a:pPr algn="l"/>
-            <a:r>
-              <a:rPr sz="3000" b="1" i="0">
+            <a:pPr algn="ctr"/>
+            <a:r>
+              <a:rPr sz="750" b="0" i="0" spc="100">
                 <a:solidFill>
                   <a:srgbClr val="A9AEB5"/>
                 </a:solidFill>
                 <a:latin typeface="Arial"/>
               </a:rPr>
-              <a:t>02</a:t>
-            </a:r>
-          </a:p>
-        </p:txBody>
-      </p:sp>
-      <p:cxnSp>
-        <p:nvCxnSpPr>
-          <p:cNvPr id="19" name="Connector 18"/>
-          <p:cNvCxnSpPr/>
-          <p:nvPr/>
-        </p:nvCxnSpPr>
-        <p:spPr>
-          <a:xfrm>
-            <a:off x="4413504" y="5212080"/>
-            <a:ext cx="3361944" cy="0"/>
-          </a:xfrm>
-          <a:prstGeom prst="bentConnector3">
-            <a:avLst/>
-          </a:prstGeom>
-          <a:ln w="12700">
-            <a:solidFill>
-              <a:srgbClr val="C8CCD2"/>
-            </a:solidFill>
-          </a:ln>
-        </p:spPr>
-        <p:style>
-          <a:lnRef idx="2">
-            <a:schemeClr val="accent1"/>
-          </a:lnRef>
-          <a:fillRef idx="0">
-            <a:schemeClr val="accent1"/>
-          </a:fillRef>
-          <a:effectRef idx="1">
-            <a:schemeClr val="accent1"/>
-          </a:effectRef>
-          <a:fontRef idx="minor">
-            <a:schemeClr val="tx1"/>
-          </a:fontRef>
-        </p:style>
-      </p:cxnSp>
-      <p:sp>
-        <p:nvSpPr>
-          <p:cNvPr id="20" name="TextBox 19"/>
+              <a:t>ICON</a:t>
+            </a:r>
+          </a:p>
+        </p:txBody>
+      </p:sp>
+      <p:sp>
+        <p:nvSpPr>
+          <p:cNvPr id="11" name="TextBox 10"/>
           <p:cNvSpPr txBox="1"/>
           <p:nvPr/>
         </p:nvSpPr>
         <p:spPr>
           <a:xfrm>
-            <a:off x="4413504" y="5349240"/>
-            <a:ext cx="3361944" cy="1097280"/>
+            <a:off x="4733544" y="3200400"/>
+            <a:ext cx="2721864" cy="548640"/>
           </a:xfrm>
           <a:prstGeom prst="rect">
             <a:avLst/>
@@ -14456,47 +13381,137 @@
           <a:p>
             <a:pPr algn="l">
               <a:spcAft>
-                <a:spcPts val="500"/>
+                <a:spcPts val="300"/>
               </a:spcAft>
             </a:pPr>
             <a:r>
-              <a:rPr sz="1600" b="1" i="0">
+              <a:rPr sz="1400" b="1" i="0">
                 <a:solidFill>
                   <a:srgbClr val="1A1A1C"/>
                 </a:solidFill>
                 <a:latin typeface="Arial"/>
               </a:rPr>
-              <a:t>Distinct Within Stellantis</a:t>
+              <a:t>Technology</a:t>
             </a:r>
           </a:p>
           <a:p>
             <a:pPr algn="l">
               <a:lnSpc>
-                <a:spcPct val="125000"/>
+                <a:spcPct val="115000"/>
               </a:lnSpc>
             </a:pPr>
             <a:r>
-              <a:rPr sz="1150" b="0" i="0">
+              <a:rPr sz="1000" b="0" i="0">
                 <a:solidFill>
-                  <a:srgbClr val="4A4E57"/>
+                  <a:srgbClr val="868B94"/>
                 </a:solidFill>
                 <a:latin typeface="Arial"/>
               </a:rPr>
-              <a:t>Modern American design — human and confident.</a:t>
-            </a:r>
-          </a:p>
-        </p:txBody>
-      </p:sp>
-      <p:sp>
-        <p:nvSpPr>
-          <p:cNvPr id="21" name="TextBox 20"/>
+              <a:t>Purposeful and invisible.</a:t>
+            </a:r>
+          </a:p>
+        </p:txBody>
+      </p:sp>
+      <p:sp>
+        <p:nvSpPr>
+          <p:cNvPr id="12" name="Rectangle 11"/>
+          <p:cNvSpPr/>
+          <p:nvPr/>
+        </p:nvSpPr>
+        <p:spPr>
+          <a:xfrm>
+            <a:off x="8141208" y="2057400"/>
+            <a:ext cx="3361944" cy="1828800"/>
+          </a:xfrm>
+          <a:prstGeom prst="rect">
+            <a:avLst/>
+          </a:prstGeom>
+          <a:solidFill>
+            <a:srgbClr val="F7F8F9"/>
+          </a:solidFill>
+          <a:ln w="6350">
+            <a:solidFill>
+              <a:srgbClr val="C8CCD2"/>
+            </a:solidFill>
+          </a:ln>
+          <a:effectLst/>
+        </p:spPr>
+        <p:style>
+          <a:lnRef idx="1">
+            <a:schemeClr val="accent1"/>
+          </a:lnRef>
+          <a:fillRef idx="3">
+            <a:schemeClr val="accent1"/>
+          </a:fillRef>
+          <a:effectRef idx="2">
+            <a:schemeClr val="accent1"/>
+          </a:effectRef>
+          <a:fontRef idx="minor">
+            <a:schemeClr val="lt1"/>
+          </a:fontRef>
+        </p:style>
+        <p:txBody>
+          <a:bodyPr rtlCol="0" anchor="ctr"/>
+          <a:lstStyle/>
+          <a:p>
+            <a:pPr algn="ctr"/>
+          </a:p>
+        </p:txBody>
+      </p:sp>
+      <p:sp>
+        <p:nvSpPr>
+          <p:cNvPr id="13" name="Rounded Rectangle 12"/>
+          <p:cNvSpPr/>
+          <p:nvPr/>
+        </p:nvSpPr>
+        <p:spPr>
+          <a:xfrm>
+            <a:off x="8461248" y="2377440"/>
+            <a:ext cx="640080" cy="640080"/>
+          </a:xfrm>
+          <a:prstGeom prst="roundRect">
+            <a:avLst/>
+          </a:prstGeom>
+          <a:noFill/>
+          <a:ln w="15875">
+            <a:solidFill>
+              <a:srgbClr val="1B2A4A"/>
+            </a:solidFill>
+          </a:ln>
+          <a:effectLst/>
+        </p:spPr>
+        <p:style>
+          <a:lnRef idx="1">
+            <a:schemeClr val="accent1"/>
+          </a:lnRef>
+          <a:fillRef idx="3">
+            <a:schemeClr val="accent1"/>
+          </a:fillRef>
+          <a:effectRef idx="2">
+            <a:schemeClr val="accent1"/>
+          </a:effectRef>
+          <a:fontRef idx="minor">
+            <a:schemeClr val="lt1"/>
+          </a:fontRef>
+        </p:style>
+        <p:txBody>
+          <a:bodyPr rtlCol="0" anchor="ctr"/>
+          <a:lstStyle/>
+          <a:p>
+            <a:pPr algn="ctr"/>
+          </a:p>
+        </p:txBody>
+      </p:sp>
+      <p:sp>
+        <p:nvSpPr>
+          <p:cNvPr id="14" name="TextBox 13"/>
           <p:cNvSpPr txBox="1"/>
           <p:nvPr/>
         </p:nvSpPr>
         <p:spPr>
           <a:xfrm>
-            <a:off x="8141208" y="4572000"/>
-            <a:ext cx="3361944" cy="640080"/>
+            <a:off x="8461248" y="2441448"/>
+            <a:ext cx="640080" cy="640080"/>
           </a:xfrm>
           <a:prstGeom prst="rect">
             <a:avLst/>
@@ -14504,69 +13519,34 @@
           <a:noFill/>
         </p:spPr>
         <p:txBody>
-          <a:bodyPr wrap="square" anchor="t" lIns="0" rIns="0" tIns="0" bIns="0">
+          <a:bodyPr wrap="square" anchor="ctr" lIns="0" rIns="0" tIns="0" bIns="0">
             <a:spAutoFit/>
           </a:bodyPr>
           <a:lstStyle/>
           <a:p>
-            <a:pPr algn="l"/>
-            <a:r>
-              <a:rPr sz="3000" b="1" i="0">
+            <a:pPr algn="ctr"/>
+            <a:r>
+              <a:rPr sz="750" b="0" i="0" spc="100">
                 <a:solidFill>
                   <a:srgbClr val="A9AEB5"/>
                 </a:solidFill>
                 <a:latin typeface="Arial"/>
               </a:rPr>
-              <a:t>03</a:t>
-            </a:r>
-          </a:p>
-        </p:txBody>
-      </p:sp>
-      <p:cxnSp>
-        <p:nvCxnSpPr>
-          <p:cNvPr id="22" name="Connector 21"/>
-          <p:cNvCxnSpPr/>
-          <p:nvPr/>
-        </p:nvCxnSpPr>
-        <p:spPr>
-          <a:xfrm>
-            <a:off x="8141208" y="5212080"/>
-            <a:ext cx="3361944" cy="0"/>
-          </a:xfrm>
-          <a:prstGeom prst="bentConnector3">
-            <a:avLst/>
-          </a:prstGeom>
-          <a:ln w="12700">
-            <a:solidFill>
-              <a:srgbClr val="C8CCD2"/>
-            </a:solidFill>
-          </a:ln>
-        </p:spPr>
-        <p:style>
-          <a:lnRef idx="2">
-            <a:schemeClr val="accent1"/>
-          </a:lnRef>
-          <a:fillRef idx="0">
-            <a:schemeClr val="accent1"/>
-          </a:fillRef>
-          <a:effectRef idx="1">
-            <a:schemeClr val="accent1"/>
-          </a:effectRef>
-          <a:fontRef idx="minor">
-            <a:schemeClr val="tx1"/>
-          </a:fontRef>
-        </p:style>
-      </p:cxnSp>
-      <p:sp>
-        <p:nvSpPr>
-          <p:cNvPr id="23" name="TextBox 22"/>
+              <a:t>ICON</a:t>
+            </a:r>
+          </a:p>
+        </p:txBody>
+      </p:sp>
+      <p:sp>
+        <p:nvSpPr>
+          <p:cNvPr id="15" name="TextBox 14"/>
           <p:cNvSpPr txBox="1"/>
           <p:nvPr/>
         </p:nvSpPr>
         <p:spPr>
           <a:xfrm>
-            <a:off x="8141208" y="5349240"/>
-            <a:ext cx="3361944" cy="1097280"/>
+            <a:off x="8461248" y="3200400"/>
+            <a:ext cx="2721864" cy="548640"/>
           </a:xfrm>
           <a:prstGeom prst="rect">
             <a:avLst/>
@@ -14581,40 +13561,580 @@
           <a:p>
             <a:pPr algn="l">
               <a:spcAft>
-                <a:spcPts val="500"/>
+                <a:spcPts val="300"/>
               </a:spcAft>
             </a:pPr>
             <a:r>
-              <a:rPr sz="1600" b="1" i="0">
+              <a:rPr sz="1400" b="1" i="0">
                 <a:solidFill>
                   <a:srgbClr val="1A1A1C"/>
                 </a:solidFill>
                 <a:latin typeface="Arial"/>
               </a:rPr>
-              <a:t>Ready to Lead</a:t>
+              <a:t>Sustainability</a:t>
             </a:r>
           </a:p>
           <a:p>
             <a:pPr algn="l">
               <a:lnSpc>
-                <a:spcPct val="125000"/>
+                <a:spcPct val="115000"/>
               </a:lnSpc>
             </a:pPr>
             <a:r>
-              <a:rPr sz="1150" b="0" i="0">
+              <a:rPr sz="1000" b="0" i="0">
                 <a:solidFill>
-                  <a:srgbClr val="4A4E57"/>
+                  <a:srgbClr val="868B94"/>
                 </a:solidFill>
                 <a:latin typeface="Arial"/>
               </a:rPr>
-              <a:t>A clear, design-led vision for Chrysler's future.</a:t>
-            </a:r>
-          </a:p>
-        </p:txBody>
-      </p:sp>
-      <p:sp>
-        <p:nvSpPr>
-          <p:cNvPr id="24" name="TextBox 23"/>
+              <a:t>Warm, recycled, responsible materials.</a:t>
+            </a:r>
+          </a:p>
+        </p:txBody>
+      </p:sp>
+      <p:sp>
+        <p:nvSpPr>
+          <p:cNvPr id="16" name="Rectangle 15"/>
+          <p:cNvSpPr/>
+          <p:nvPr/>
+        </p:nvSpPr>
+        <p:spPr>
+          <a:xfrm>
+            <a:off x="685800" y="4206240"/>
+            <a:ext cx="3361944" cy="1828800"/>
+          </a:xfrm>
+          <a:prstGeom prst="rect">
+            <a:avLst/>
+          </a:prstGeom>
+          <a:solidFill>
+            <a:srgbClr val="F7F8F9"/>
+          </a:solidFill>
+          <a:ln w="6350">
+            <a:solidFill>
+              <a:srgbClr val="C8CCD2"/>
+            </a:solidFill>
+          </a:ln>
+          <a:effectLst/>
+        </p:spPr>
+        <p:style>
+          <a:lnRef idx="1">
+            <a:schemeClr val="accent1"/>
+          </a:lnRef>
+          <a:fillRef idx="3">
+            <a:schemeClr val="accent1"/>
+          </a:fillRef>
+          <a:effectRef idx="2">
+            <a:schemeClr val="accent1"/>
+          </a:effectRef>
+          <a:fontRef idx="minor">
+            <a:schemeClr val="lt1"/>
+          </a:fontRef>
+        </p:style>
+        <p:txBody>
+          <a:bodyPr rtlCol="0" anchor="ctr"/>
+          <a:lstStyle/>
+          <a:p>
+            <a:pPr algn="ctr"/>
+          </a:p>
+        </p:txBody>
+      </p:sp>
+      <p:sp>
+        <p:nvSpPr>
+          <p:cNvPr id="17" name="Rounded Rectangle 16"/>
+          <p:cNvSpPr/>
+          <p:nvPr/>
+        </p:nvSpPr>
+        <p:spPr>
+          <a:xfrm>
+            <a:off x="1005840" y="4526280"/>
+            <a:ext cx="640080" cy="640080"/>
+          </a:xfrm>
+          <a:prstGeom prst="roundRect">
+            <a:avLst/>
+          </a:prstGeom>
+          <a:noFill/>
+          <a:ln w="15875">
+            <a:solidFill>
+              <a:srgbClr val="1B2A4A"/>
+            </a:solidFill>
+          </a:ln>
+          <a:effectLst/>
+        </p:spPr>
+        <p:style>
+          <a:lnRef idx="1">
+            <a:schemeClr val="accent1"/>
+          </a:lnRef>
+          <a:fillRef idx="3">
+            <a:schemeClr val="accent1"/>
+          </a:fillRef>
+          <a:effectRef idx="2">
+            <a:schemeClr val="accent1"/>
+          </a:effectRef>
+          <a:fontRef idx="minor">
+            <a:schemeClr val="lt1"/>
+          </a:fontRef>
+        </p:style>
+        <p:txBody>
+          <a:bodyPr rtlCol="0" anchor="ctr"/>
+          <a:lstStyle/>
+          <a:p>
+            <a:pPr algn="ctr"/>
+          </a:p>
+        </p:txBody>
+      </p:sp>
+      <p:sp>
+        <p:nvSpPr>
+          <p:cNvPr id="18" name="TextBox 17"/>
+          <p:cNvSpPr txBox="1"/>
+          <p:nvPr/>
+        </p:nvSpPr>
+        <p:spPr>
+          <a:xfrm>
+            <a:off x="1005840" y="4590288"/>
+            <a:ext cx="640080" cy="640080"/>
+          </a:xfrm>
+          <a:prstGeom prst="rect">
+            <a:avLst/>
+          </a:prstGeom>
+          <a:noFill/>
+        </p:spPr>
+        <p:txBody>
+          <a:bodyPr wrap="square" anchor="ctr" lIns="0" rIns="0" tIns="0" bIns="0">
+            <a:spAutoFit/>
+          </a:bodyPr>
+          <a:lstStyle/>
+          <a:p>
+            <a:pPr algn="ctr"/>
+            <a:r>
+              <a:rPr sz="750" b="0" i="0" spc="100">
+                <a:solidFill>
+                  <a:srgbClr val="A9AEB5"/>
+                </a:solidFill>
+                <a:latin typeface="Arial"/>
+              </a:rPr>
+              <a:t>ICON</a:t>
+            </a:r>
+          </a:p>
+        </p:txBody>
+      </p:sp>
+      <p:sp>
+        <p:nvSpPr>
+          <p:cNvPr id="19" name="TextBox 18"/>
+          <p:cNvSpPr txBox="1"/>
+          <p:nvPr/>
+        </p:nvSpPr>
+        <p:spPr>
+          <a:xfrm>
+            <a:off x="1005840" y="5349240"/>
+            <a:ext cx="2721864" cy="548640"/>
+          </a:xfrm>
+          <a:prstGeom prst="rect">
+            <a:avLst/>
+          </a:prstGeom>
+          <a:noFill/>
+        </p:spPr>
+        <p:txBody>
+          <a:bodyPr wrap="square" anchor="t" lIns="0" rIns="0" tIns="0" bIns="0">
+            <a:spAutoFit/>
+          </a:bodyPr>
+          <a:lstStyle/>
+          <a:p>
+            <a:pPr algn="l">
+              <a:spcAft>
+                <a:spcPts val="300"/>
+              </a:spcAft>
+            </a:pPr>
+            <a:r>
+              <a:rPr sz="1400" b="1" i="0">
+                <a:solidFill>
+                  <a:srgbClr val="1A1A1C"/>
+                </a:solidFill>
+                <a:latin typeface="Arial"/>
+              </a:rPr>
+              <a:t>Luxury</a:t>
+            </a:r>
+          </a:p>
+          <a:p>
+            <a:pPr algn="l">
+              <a:lnSpc>
+                <a:spcPct val="115000"/>
+              </a:lnSpc>
+            </a:pPr>
+            <a:r>
+              <a:rPr sz="1000" b="0" i="0">
+                <a:solidFill>
+                  <a:srgbClr val="868B94"/>
+                </a:solidFill>
+                <a:latin typeface="Arial"/>
+              </a:rPr>
+              <a:t>Friction removed from daily life.</a:t>
+            </a:r>
+          </a:p>
+        </p:txBody>
+      </p:sp>
+      <p:sp>
+        <p:nvSpPr>
+          <p:cNvPr id="20" name="Rectangle 19"/>
+          <p:cNvSpPr/>
+          <p:nvPr/>
+        </p:nvSpPr>
+        <p:spPr>
+          <a:xfrm>
+            <a:off x="4413504" y="4206240"/>
+            <a:ext cx="3361944" cy="1828800"/>
+          </a:xfrm>
+          <a:prstGeom prst="rect">
+            <a:avLst/>
+          </a:prstGeom>
+          <a:solidFill>
+            <a:srgbClr val="F7F8F9"/>
+          </a:solidFill>
+          <a:ln w="6350">
+            <a:solidFill>
+              <a:srgbClr val="C8CCD2"/>
+            </a:solidFill>
+          </a:ln>
+          <a:effectLst/>
+        </p:spPr>
+        <p:style>
+          <a:lnRef idx="1">
+            <a:schemeClr val="accent1"/>
+          </a:lnRef>
+          <a:fillRef idx="3">
+            <a:schemeClr val="accent1"/>
+          </a:fillRef>
+          <a:effectRef idx="2">
+            <a:schemeClr val="accent1"/>
+          </a:effectRef>
+          <a:fontRef idx="minor">
+            <a:schemeClr val="lt1"/>
+          </a:fontRef>
+        </p:style>
+        <p:txBody>
+          <a:bodyPr rtlCol="0" anchor="ctr"/>
+          <a:lstStyle/>
+          <a:p>
+            <a:pPr algn="ctr"/>
+          </a:p>
+        </p:txBody>
+      </p:sp>
+      <p:sp>
+        <p:nvSpPr>
+          <p:cNvPr id="21" name="Rounded Rectangle 20"/>
+          <p:cNvSpPr/>
+          <p:nvPr/>
+        </p:nvSpPr>
+        <p:spPr>
+          <a:xfrm>
+            <a:off x="4733544" y="4526280"/>
+            <a:ext cx="640080" cy="640080"/>
+          </a:xfrm>
+          <a:prstGeom prst="roundRect">
+            <a:avLst/>
+          </a:prstGeom>
+          <a:noFill/>
+          <a:ln w="15875">
+            <a:solidFill>
+              <a:srgbClr val="1B2A4A"/>
+            </a:solidFill>
+          </a:ln>
+          <a:effectLst/>
+        </p:spPr>
+        <p:style>
+          <a:lnRef idx="1">
+            <a:schemeClr val="accent1"/>
+          </a:lnRef>
+          <a:fillRef idx="3">
+            <a:schemeClr val="accent1"/>
+          </a:fillRef>
+          <a:effectRef idx="2">
+            <a:schemeClr val="accent1"/>
+          </a:effectRef>
+          <a:fontRef idx="minor">
+            <a:schemeClr val="lt1"/>
+          </a:fontRef>
+        </p:style>
+        <p:txBody>
+          <a:bodyPr rtlCol="0" anchor="ctr"/>
+          <a:lstStyle/>
+          <a:p>
+            <a:pPr algn="ctr"/>
+          </a:p>
+        </p:txBody>
+      </p:sp>
+      <p:sp>
+        <p:nvSpPr>
+          <p:cNvPr id="22" name="TextBox 21"/>
+          <p:cNvSpPr txBox="1"/>
+          <p:nvPr/>
+        </p:nvSpPr>
+        <p:spPr>
+          <a:xfrm>
+            <a:off x="4733544" y="4590288"/>
+            <a:ext cx="640080" cy="640080"/>
+          </a:xfrm>
+          <a:prstGeom prst="rect">
+            <a:avLst/>
+          </a:prstGeom>
+          <a:noFill/>
+        </p:spPr>
+        <p:txBody>
+          <a:bodyPr wrap="square" anchor="ctr" lIns="0" rIns="0" tIns="0" bIns="0">
+            <a:spAutoFit/>
+          </a:bodyPr>
+          <a:lstStyle/>
+          <a:p>
+            <a:pPr algn="ctr"/>
+            <a:r>
+              <a:rPr sz="750" b="0" i="0" spc="100">
+                <a:solidFill>
+                  <a:srgbClr val="A9AEB5"/>
+                </a:solidFill>
+                <a:latin typeface="Arial"/>
+              </a:rPr>
+              <a:t>ICON</a:t>
+            </a:r>
+          </a:p>
+        </p:txBody>
+      </p:sp>
+      <p:sp>
+        <p:nvSpPr>
+          <p:cNvPr id="23" name="TextBox 22"/>
+          <p:cNvSpPr txBox="1"/>
+          <p:nvPr/>
+        </p:nvSpPr>
+        <p:spPr>
+          <a:xfrm>
+            <a:off x="4733544" y="5349240"/>
+            <a:ext cx="2721864" cy="548640"/>
+          </a:xfrm>
+          <a:prstGeom prst="rect">
+            <a:avLst/>
+          </a:prstGeom>
+          <a:noFill/>
+        </p:spPr>
+        <p:txBody>
+          <a:bodyPr wrap="square" anchor="t" lIns="0" rIns="0" tIns="0" bIns="0">
+            <a:spAutoFit/>
+          </a:bodyPr>
+          <a:lstStyle/>
+          <a:p>
+            <a:pPr algn="l">
+              <a:spcAft>
+                <a:spcPts val="300"/>
+              </a:spcAft>
+            </a:pPr>
+            <a:r>
+              <a:rPr sz="1400" b="1" i="0">
+                <a:solidFill>
+                  <a:srgbClr val="1A1A1C"/>
+                </a:solidFill>
+                <a:latin typeface="Arial"/>
+              </a:rPr>
+              <a:t>AI</a:t>
+            </a:r>
+          </a:p>
+          <a:p>
+            <a:pPr algn="l">
+              <a:lnSpc>
+                <a:spcPct val="115000"/>
+              </a:lnSpc>
+            </a:pPr>
+            <a:r>
+              <a:rPr sz="1000" b="0" i="0">
+                <a:solidFill>
+                  <a:srgbClr val="868B94"/>
+                </a:solidFill>
+                <a:latin typeface="Arial"/>
+              </a:rPr>
+              <a:t>Adaptive, predictive, human-centered.</a:t>
+            </a:r>
+          </a:p>
+        </p:txBody>
+      </p:sp>
+      <p:sp>
+        <p:nvSpPr>
+          <p:cNvPr id="24" name="Rectangle 23"/>
+          <p:cNvSpPr/>
+          <p:nvPr/>
+        </p:nvSpPr>
+        <p:spPr>
+          <a:xfrm>
+            <a:off x="8141208" y="4206240"/>
+            <a:ext cx="3361944" cy="1828800"/>
+          </a:xfrm>
+          <a:prstGeom prst="rect">
+            <a:avLst/>
+          </a:prstGeom>
+          <a:solidFill>
+            <a:srgbClr val="F7F8F9"/>
+          </a:solidFill>
+          <a:ln w="6350">
+            <a:solidFill>
+              <a:srgbClr val="C8CCD2"/>
+            </a:solidFill>
+          </a:ln>
+          <a:effectLst/>
+        </p:spPr>
+        <p:style>
+          <a:lnRef idx="1">
+            <a:schemeClr val="accent1"/>
+          </a:lnRef>
+          <a:fillRef idx="3">
+            <a:schemeClr val="accent1"/>
+          </a:fillRef>
+          <a:effectRef idx="2">
+            <a:schemeClr val="accent1"/>
+          </a:effectRef>
+          <a:fontRef idx="minor">
+            <a:schemeClr val="lt1"/>
+          </a:fontRef>
+        </p:style>
+        <p:txBody>
+          <a:bodyPr rtlCol="0" anchor="ctr"/>
+          <a:lstStyle/>
+          <a:p>
+            <a:pPr algn="ctr"/>
+          </a:p>
+        </p:txBody>
+      </p:sp>
+      <p:sp>
+        <p:nvSpPr>
+          <p:cNvPr id="25" name="Rounded Rectangle 24"/>
+          <p:cNvSpPr/>
+          <p:nvPr/>
+        </p:nvSpPr>
+        <p:spPr>
+          <a:xfrm>
+            <a:off x="8461248" y="4526280"/>
+            <a:ext cx="640080" cy="640080"/>
+          </a:xfrm>
+          <a:prstGeom prst="roundRect">
+            <a:avLst/>
+          </a:prstGeom>
+          <a:noFill/>
+          <a:ln w="15875">
+            <a:solidFill>
+              <a:srgbClr val="1B2A4A"/>
+            </a:solidFill>
+          </a:ln>
+          <a:effectLst/>
+        </p:spPr>
+        <p:style>
+          <a:lnRef idx="1">
+            <a:schemeClr val="accent1"/>
+          </a:lnRef>
+          <a:fillRef idx="3">
+            <a:schemeClr val="accent1"/>
+          </a:fillRef>
+          <a:effectRef idx="2">
+            <a:schemeClr val="accent1"/>
+          </a:effectRef>
+          <a:fontRef idx="minor">
+            <a:schemeClr val="lt1"/>
+          </a:fontRef>
+        </p:style>
+        <p:txBody>
+          <a:bodyPr rtlCol="0" anchor="ctr"/>
+          <a:lstStyle/>
+          <a:p>
+            <a:pPr algn="ctr"/>
+          </a:p>
+        </p:txBody>
+      </p:sp>
+      <p:sp>
+        <p:nvSpPr>
+          <p:cNvPr id="26" name="TextBox 25"/>
+          <p:cNvSpPr txBox="1"/>
+          <p:nvPr/>
+        </p:nvSpPr>
+        <p:spPr>
+          <a:xfrm>
+            <a:off x="8461248" y="4590288"/>
+            <a:ext cx="640080" cy="640080"/>
+          </a:xfrm>
+          <a:prstGeom prst="rect">
+            <a:avLst/>
+          </a:prstGeom>
+          <a:noFill/>
+        </p:spPr>
+        <p:txBody>
+          <a:bodyPr wrap="square" anchor="ctr" lIns="0" rIns="0" tIns="0" bIns="0">
+            <a:spAutoFit/>
+          </a:bodyPr>
+          <a:lstStyle/>
+          <a:p>
+            <a:pPr algn="ctr"/>
+            <a:r>
+              <a:rPr sz="750" b="0" i="0" spc="100">
+                <a:solidFill>
+                  <a:srgbClr val="A9AEB5"/>
+                </a:solidFill>
+                <a:latin typeface="Arial"/>
+              </a:rPr>
+              <a:t>ICON</a:t>
+            </a:r>
+          </a:p>
+        </p:txBody>
+      </p:sp>
+      <p:sp>
+        <p:nvSpPr>
+          <p:cNvPr id="27" name="TextBox 26"/>
+          <p:cNvSpPr txBox="1"/>
+          <p:nvPr/>
+        </p:nvSpPr>
+        <p:spPr>
+          <a:xfrm>
+            <a:off x="8461248" y="5349240"/>
+            <a:ext cx="2721864" cy="548640"/>
+          </a:xfrm>
+          <a:prstGeom prst="rect">
+            <a:avLst/>
+          </a:prstGeom>
+          <a:noFill/>
+        </p:spPr>
+        <p:txBody>
+          <a:bodyPr wrap="square" anchor="t" lIns="0" rIns="0" tIns="0" bIns="0">
+            <a:spAutoFit/>
+          </a:bodyPr>
+          <a:lstStyle/>
+          <a:p>
+            <a:pPr algn="l">
+              <a:spcAft>
+                <a:spcPts val="300"/>
+              </a:spcAft>
+            </a:pPr>
+            <a:r>
+              <a:rPr sz="1400" b="1" i="0">
+                <a:solidFill>
+                  <a:srgbClr val="1A1A1C"/>
+                </a:solidFill>
+                <a:latin typeface="Arial"/>
+              </a:rPr>
+              <a:t>Connected Mobility</a:t>
+            </a:r>
+          </a:p>
+          <a:p>
+            <a:pPr algn="l">
+              <a:lnSpc>
+                <a:spcPct val="115000"/>
+              </a:lnSpc>
+            </a:pPr>
+            <a:r>
+              <a:rPr sz="1000" b="0" i="0">
+                <a:solidFill>
+                  <a:srgbClr val="868B94"/>
+                </a:solidFill>
+                <a:latin typeface="Arial"/>
+              </a:rPr>
+              <a:t>Effortless, door to destination.</a:t>
+            </a:r>
+          </a:p>
+        </p:txBody>
+      </p:sp>
+      <p:sp>
+        <p:nvSpPr>
+          <p:cNvPr id="28" name="TextBox 27"/>
           <p:cNvSpPr txBox="1"/>
           <p:nvPr/>
         </p:nvSpPr>
@@ -14649,7 +14169,7 @@
       </p:sp>
       <p:sp>
         <p:nvSpPr>
-          <p:cNvPr id="25" name="TextBox 24"/>
+          <p:cNvPr id="29" name="TextBox 28"/>
           <p:cNvSpPr txBox="1"/>
           <p:nvPr/>
         </p:nvSpPr>
@@ -14684,7 +14204,1604 @@
       </p:sp>
       <p:sp>
         <p:nvSpPr>
+          <p:cNvPr id="30" name="TextBox 29"/>
+          <p:cNvSpPr txBox="1"/>
+          <p:nvPr/>
+        </p:nvSpPr>
+        <p:spPr>
+          <a:xfrm>
+            <a:off x="10424160" y="310896"/>
+            <a:ext cx="1097280" cy="274320"/>
+          </a:xfrm>
+          <a:prstGeom prst="rect">
+            <a:avLst/>
+          </a:prstGeom>
+          <a:noFill/>
+        </p:spPr>
+        <p:txBody>
+          <a:bodyPr wrap="square" anchor="t" lIns="0" rIns="0" tIns="0" bIns="0">
+            <a:spAutoFit/>
+          </a:bodyPr>
+          <a:lstStyle/>
+          <a:p>
+            <a:pPr algn="r"/>
+            <a:r>
+              <a:rPr sz="750" b="0" i="0" spc="200">
+                <a:solidFill>
+                  <a:srgbClr val="C8CCD2"/>
+                </a:solidFill>
+                <a:latin typeface="Arial"/>
+              </a:rPr>
+              <a:t>CONFIDENTIAL</a:t>
+            </a:r>
+          </a:p>
+        </p:txBody>
+      </p:sp>
+    </p:spTree>
+  </p:cSld>
+  <p:clrMapOvr>
+    <a:masterClrMapping/>
+  </p:clrMapOvr>
+</p:sld>
+</file>
+
+<file path=ppt/slides/slide19.xml><?xml version="1.0" encoding="utf-8"?>
+<p:sld xmlns:a="http://schemas.openxmlformats.org/drawingml/2006/main" xmlns:p="http://schemas.openxmlformats.org/presentationml/2006/main" xmlns:r="http://schemas.openxmlformats.org/officeDocument/2006/relationships">
+  <p:cSld>
+    <p:bg>
+      <p:bgPr>
+        <a:solidFill>
+          <a:srgbClr val="FFFFFF"/>
+        </a:solidFill>
+        <a:effectLst/>
+      </p:bgPr>
+    </p:bg>
+    <p:spTree>
+      <p:nvGrpSpPr>
+        <p:cNvPr id="1" name=""/>
+        <p:cNvGrpSpPr/>
+        <p:nvPr/>
+      </p:nvGrpSpPr>
+      <p:grpSpPr/>
+      <p:sp>
+        <p:nvSpPr>
+          <p:cNvPr id="2" name="TextBox 1"/>
+          <p:cNvSpPr txBox="1"/>
+          <p:nvPr/>
+        </p:nvSpPr>
+        <p:spPr>
+          <a:xfrm>
+            <a:off x="685800" y="640080"/>
+            <a:ext cx="7315200" cy="274320"/>
+          </a:xfrm>
+          <a:prstGeom prst="rect">
+            <a:avLst/>
+          </a:prstGeom>
+          <a:noFill/>
+        </p:spPr>
+        <p:txBody>
+          <a:bodyPr wrap="square" anchor="t" lIns="0" rIns="0" tIns="0" bIns="0">
+            <a:spAutoFit/>
+          </a:bodyPr>
+          <a:lstStyle/>
+          <a:p>
+            <a:pPr algn="l"/>
+            <a:r>
+              <a:rPr sz="1100" b="1" i="0" spc="300">
+                <a:solidFill>
+                  <a:srgbClr val="1B2A4A"/>
+                </a:solidFill>
+                <a:latin typeface="Arial"/>
+              </a:rPr>
+              <a:t>CAPABILITY</a:t>
+            </a:r>
+          </a:p>
+        </p:txBody>
+      </p:sp>
+      <p:sp>
+        <p:nvSpPr>
+          <p:cNvPr id="3" name="TextBox 2"/>
+          <p:cNvSpPr txBox="1"/>
+          <p:nvPr/>
+        </p:nvSpPr>
+        <p:spPr>
+          <a:xfrm>
+            <a:off x="658368" y="960120"/>
+            <a:ext cx="10515600" cy="822960"/>
+          </a:xfrm>
+          <a:prstGeom prst="rect">
+            <a:avLst/>
+          </a:prstGeom>
+          <a:noFill/>
+        </p:spPr>
+        <p:txBody>
+          <a:bodyPr wrap="square" anchor="t" lIns="0" rIns="0" tIns="0" bIns="0">
+            <a:spAutoFit/>
+          </a:bodyPr>
+          <a:lstStyle/>
+          <a:p>
+            <a:pPr algn="l"/>
+            <a:r>
+              <a:rPr sz="2800" b="1" i="0">
+                <a:solidFill>
+                  <a:srgbClr val="1A1A1C"/>
+                </a:solidFill>
+                <a:latin typeface="Arial"/>
+              </a:rPr>
+              <a:t>Design Innovation</a:t>
+            </a:r>
+          </a:p>
+        </p:txBody>
+      </p:sp>
+      <p:sp>
+        <p:nvSpPr>
+          <p:cNvPr id="4" name="Rectangle 3"/>
+          <p:cNvSpPr/>
+          <p:nvPr/>
+        </p:nvSpPr>
+        <p:spPr>
+          <a:xfrm>
+            <a:off x="685800" y="1828800"/>
+            <a:ext cx="10817352" cy="2468880"/>
+          </a:xfrm>
+          <a:prstGeom prst="rect">
+            <a:avLst/>
+          </a:prstGeom>
+          <a:solidFill>
+            <a:srgbClr val="EFF1F3"/>
+          </a:solidFill>
+          <a:ln>
+            <a:noFill/>
+          </a:ln>
+          <a:effectLst/>
+        </p:spPr>
+        <p:style>
+          <a:lnRef idx="1">
+            <a:schemeClr val="accent1"/>
+          </a:lnRef>
+          <a:fillRef idx="3">
+            <a:schemeClr val="accent1"/>
+          </a:fillRef>
+          <a:effectRef idx="2">
+            <a:schemeClr val="accent1"/>
+          </a:effectRef>
+          <a:fontRef idx="minor">
+            <a:schemeClr val="lt1"/>
+          </a:fontRef>
+        </p:style>
+        <p:txBody>
+          <a:bodyPr rtlCol="0" anchor="ctr"/>
+          <a:lstStyle/>
+          <a:p>
+            <a:pPr algn="ctr"/>
+          </a:p>
+        </p:txBody>
+      </p:sp>
+      <p:cxnSp>
+        <p:nvCxnSpPr>
+          <p:cNvPr id="5" name="Connector 4"/>
+          <p:cNvCxnSpPr/>
+          <p:nvPr/>
+        </p:nvCxnSpPr>
+        <p:spPr>
+          <a:xfrm>
+            <a:off x="685800" y="1828800"/>
+            <a:ext cx="237744" cy="0"/>
+          </a:xfrm>
+          <a:prstGeom prst="bentConnector3">
+            <a:avLst/>
+          </a:prstGeom>
+          <a:ln w="15875">
+            <a:solidFill>
+              <a:srgbClr val="A9AEB5"/>
+            </a:solidFill>
+          </a:ln>
+        </p:spPr>
+        <p:style>
+          <a:lnRef idx="2">
+            <a:schemeClr val="accent1"/>
+          </a:lnRef>
+          <a:fillRef idx="0">
+            <a:schemeClr val="accent1"/>
+          </a:fillRef>
+          <a:effectRef idx="1">
+            <a:schemeClr val="accent1"/>
+          </a:effectRef>
+          <a:fontRef idx="minor">
+            <a:schemeClr val="tx1"/>
+          </a:fontRef>
+        </p:style>
+      </p:cxnSp>
+      <p:cxnSp>
+        <p:nvCxnSpPr>
+          <p:cNvPr id="6" name="Connector 5"/>
+          <p:cNvCxnSpPr/>
+          <p:nvPr/>
+        </p:nvCxnSpPr>
+        <p:spPr>
+          <a:xfrm>
+            <a:off x="685800" y="1828800"/>
+            <a:ext cx="0" cy="237744"/>
+          </a:xfrm>
+          <a:prstGeom prst="bentConnector3">
+            <a:avLst/>
+          </a:prstGeom>
+          <a:ln w="15875">
+            <a:solidFill>
+              <a:srgbClr val="A9AEB5"/>
+            </a:solidFill>
+          </a:ln>
+        </p:spPr>
+        <p:style>
+          <a:lnRef idx="2">
+            <a:schemeClr val="accent1"/>
+          </a:lnRef>
+          <a:fillRef idx="0">
+            <a:schemeClr val="accent1"/>
+          </a:fillRef>
+          <a:effectRef idx="1">
+            <a:schemeClr val="accent1"/>
+          </a:effectRef>
+          <a:fontRef idx="minor">
+            <a:schemeClr val="tx1"/>
+          </a:fontRef>
+        </p:style>
+      </p:cxnSp>
+      <p:cxnSp>
+        <p:nvCxnSpPr>
+          <p:cNvPr id="7" name="Connector 6"/>
+          <p:cNvCxnSpPr/>
+          <p:nvPr/>
+        </p:nvCxnSpPr>
+        <p:spPr>
+          <a:xfrm flipH="1">
+            <a:off x="11265408" y="1828800"/>
+            <a:ext cx="237744" cy="0"/>
+          </a:xfrm>
+          <a:prstGeom prst="bentConnector3">
+            <a:avLst/>
+          </a:prstGeom>
+          <a:ln w="15875">
+            <a:solidFill>
+              <a:srgbClr val="A9AEB5"/>
+            </a:solidFill>
+          </a:ln>
+        </p:spPr>
+        <p:style>
+          <a:lnRef idx="2">
+            <a:schemeClr val="accent1"/>
+          </a:lnRef>
+          <a:fillRef idx="0">
+            <a:schemeClr val="accent1"/>
+          </a:fillRef>
+          <a:effectRef idx="1">
+            <a:schemeClr val="accent1"/>
+          </a:effectRef>
+          <a:fontRef idx="minor">
+            <a:schemeClr val="tx1"/>
+          </a:fontRef>
+        </p:style>
+      </p:cxnSp>
+      <p:cxnSp>
+        <p:nvCxnSpPr>
+          <p:cNvPr id="8" name="Connector 7"/>
+          <p:cNvCxnSpPr/>
+          <p:nvPr/>
+        </p:nvCxnSpPr>
+        <p:spPr>
+          <a:xfrm>
+            <a:off x="11503152" y="1828800"/>
+            <a:ext cx="0" cy="237744"/>
+          </a:xfrm>
+          <a:prstGeom prst="bentConnector3">
+            <a:avLst/>
+          </a:prstGeom>
+          <a:ln w="15875">
+            <a:solidFill>
+              <a:srgbClr val="A9AEB5"/>
+            </a:solidFill>
+          </a:ln>
+        </p:spPr>
+        <p:style>
+          <a:lnRef idx="2">
+            <a:schemeClr val="accent1"/>
+          </a:lnRef>
+          <a:fillRef idx="0">
+            <a:schemeClr val="accent1"/>
+          </a:fillRef>
+          <a:effectRef idx="1">
+            <a:schemeClr val="accent1"/>
+          </a:effectRef>
+          <a:fontRef idx="minor">
+            <a:schemeClr val="tx1"/>
+          </a:fontRef>
+        </p:style>
+      </p:cxnSp>
+      <p:cxnSp>
+        <p:nvCxnSpPr>
+          <p:cNvPr id="9" name="Connector 8"/>
+          <p:cNvCxnSpPr/>
+          <p:nvPr/>
+        </p:nvCxnSpPr>
+        <p:spPr>
+          <a:xfrm>
+            <a:off x="685800" y="4297680"/>
+            <a:ext cx="237744" cy="0"/>
+          </a:xfrm>
+          <a:prstGeom prst="bentConnector3">
+            <a:avLst/>
+          </a:prstGeom>
+          <a:ln w="15875">
+            <a:solidFill>
+              <a:srgbClr val="A9AEB5"/>
+            </a:solidFill>
+          </a:ln>
+        </p:spPr>
+        <p:style>
+          <a:lnRef idx="2">
+            <a:schemeClr val="accent1"/>
+          </a:lnRef>
+          <a:fillRef idx="0">
+            <a:schemeClr val="accent1"/>
+          </a:fillRef>
+          <a:effectRef idx="1">
+            <a:schemeClr val="accent1"/>
+          </a:effectRef>
+          <a:fontRef idx="minor">
+            <a:schemeClr val="tx1"/>
+          </a:fontRef>
+        </p:style>
+      </p:cxnSp>
+      <p:cxnSp>
+        <p:nvCxnSpPr>
+          <p:cNvPr id="10" name="Connector 9"/>
+          <p:cNvCxnSpPr/>
+          <p:nvPr/>
+        </p:nvCxnSpPr>
+        <p:spPr>
+          <a:xfrm flipV="1">
+            <a:off x="685800" y="4059936"/>
+            <a:ext cx="0" cy="237744"/>
+          </a:xfrm>
+          <a:prstGeom prst="bentConnector3">
+            <a:avLst/>
+          </a:prstGeom>
+          <a:ln w="15875">
+            <a:solidFill>
+              <a:srgbClr val="A9AEB5"/>
+            </a:solidFill>
+          </a:ln>
+        </p:spPr>
+        <p:style>
+          <a:lnRef idx="2">
+            <a:schemeClr val="accent1"/>
+          </a:lnRef>
+          <a:fillRef idx="0">
+            <a:schemeClr val="accent1"/>
+          </a:fillRef>
+          <a:effectRef idx="1">
+            <a:schemeClr val="accent1"/>
+          </a:effectRef>
+          <a:fontRef idx="minor">
+            <a:schemeClr val="tx1"/>
+          </a:fontRef>
+        </p:style>
+      </p:cxnSp>
+      <p:cxnSp>
+        <p:nvCxnSpPr>
+          <p:cNvPr id="11" name="Connector 10"/>
+          <p:cNvCxnSpPr/>
+          <p:nvPr/>
+        </p:nvCxnSpPr>
+        <p:spPr>
+          <a:xfrm flipH="1">
+            <a:off x="11265408" y="4297680"/>
+            <a:ext cx="237744" cy="0"/>
+          </a:xfrm>
+          <a:prstGeom prst="bentConnector3">
+            <a:avLst/>
+          </a:prstGeom>
+          <a:ln w="15875">
+            <a:solidFill>
+              <a:srgbClr val="A9AEB5"/>
+            </a:solidFill>
+          </a:ln>
+        </p:spPr>
+        <p:style>
+          <a:lnRef idx="2">
+            <a:schemeClr val="accent1"/>
+          </a:lnRef>
+          <a:fillRef idx="0">
+            <a:schemeClr val="accent1"/>
+          </a:fillRef>
+          <a:effectRef idx="1">
+            <a:schemeClr val="accent1"/>
+          </a:effectRef>
+          <a:fontRef idx="minor">
+            <a:schemeClr val="tx1"/>
+          </a:fontRef>
+        </p:style>
+      </p:cxnSp>
+      <p:cxnSp>
+        <p:nvCxnSpPr>
+          <p:cNvPr id="12" name="Connector 11"/>
+          <p:cNvCxnSpPr/>
+          <p:nvPr/>
+        </p:nvCxnSpPr>
+        <p:spPr>
+          <a:xfrm flipV="1">
+            <a:off x="11503152" y="4059936"/>
+            <a:ext cx="0" cy="237744"/>
+          </a:xfrm>
+          <a:prstGeom prst="bentConnector3">
+            <a:avLst/>
+          </a:prstGeom>
+          <a:ln w="15875">
+            <a:solidFill>
+              <a:srgbClr val="A9AEB5"/>
+            </a:solidFill>
+          </a:ln>
+        </p:spPr>
+        <p:style>
+          <a:lnRef idx="2">
+            <a:schemeClr val="accent1"/>
+          </a:lnRef>
+          <a:fillRef idx="0">
+            <a:schemeClr val="accent1"/>
+          </a:fillRef>
+          <a:effectRef idx="1">
+            <a:schemeClr val="accent1"/>
+          </a:effectRef>
+          <a:fontRef idx="minor">
+            <a:schemeClr val="tx1"/>
+          </a:fontRef>
+        </p:style>
+      </p:cxnSp>
+      <p:sp>
+        <p:nvSpPr>
+          <p:cNvPr id="13" name="Rounded Rectangle 12"/>
+          <p:cNvSpPr/>
+          <p:nvPr/>
+        </p:nvSpPr>
+        <p:spPr>
+          <a:xfrm>
+            <a:off x="5838444" y="2587752"/>
+            <a:ext cx="512064" cy="512064"/>
+          </a:xfrm>
+          <a:prstGeom prst="roundRect">
+            <a:avLst/>
+          </a:prstGeom>
+          <a:noFill/>
+          <a:ln w="19050">
+            <a:solidFill>
+              <a:srgbClr val="A9AEB5"/>
+            </a:solidFill>
+          </a:ln>
+          <a:effectLst/>
+        </p:spPr>
+        <p:style>
+          <a:lnRef idx="1">
+            <a:schemeClr val="accent1"/>
+          </a:lnRef>
+          <a:fillRef idx="3">
+            <a:schemeClr val="accent1"/>
+          </a:fillRef>
+          <a:effectRef idx="2">
+            <a:schemeClr val="accent1"/>
+          </a:effectRef>
+          <a:fontRef idx="minor">
+            <a:schemeClr val="lt1"/>
+          </a:fontRef>
+        </p:style>
+        <p:txBody>
+          <a:bodyPr rtlCol="0" anchor="ctr"/>
+          <a:lstStyle/>
+          <a:p>
+            <a:pPr algn="ctr"/>
+          </a:p>
+        </p:txBody>
+      </p:sp>
+      <p:sp>
+        <p:nvSpPr>
+          <p:cNvPr id="14" name="Oval 13"/>
+          <p:cNvSpPr/>
+          <p:nvPr/>
+        </p:nvSpPr>
+        <p:spPr>
+          <a:xfrm>
+            <a:off x="5951098" y="2690164"/>
+            <a:ext cx="100584" cy="100584"/>
+          </a:xfrm>
+          <a:prstGeom prst="ellipse">
+            <a:avLst/>
+          </a:prstGeom>
+          <a:solidFill>
+            <a:srgbClr val="A9AEB5"/>
+          </a:solidFill>
+          <a:ln>
+            <a:noFill/>
+          </a:ln>
+          <a:effectLst/>
+        </p:spPr>
+        <p:style>
+          <a:lnRef idx="1">
+            <a:schemeClr val="accent1"/>
+          </a:lnRef>
+          <a:fillRef idx="3">
+            <a:schemeClr val="accent1"/>
+          </a:fillRef>
+          <a:effectRef idx="2">
+            <a:schemeClr val="accent1"/>
+          </a:effectRef>
+          <a:fontRef idx="minor">
+            <a:schemeClr val="lt1"/>
+          </a:fontRef>
+        </p:style>
+        <p:txBody>
+          <a:bodyPr rtlCol="0" anchor="ctr"/>
+          <a:lstStyle/>
+          <a:p>
+            <a:pPr algn="ctr"/>
+          </a:p>
+        </p:txBody>
+      </p:sp>
+      <p:sp>
+        <p:nvSpPr>
+          <p:cNvPr id="15" name="Isosceles Triangle 14"/>
+          <p:cNvSpPr/>
+          <p:nvPr/>
+        </p:nvSpPr>
+        <p:spPr>
+          <a:xfrm>
+            <a:off x="5992063" y="2813060"/>
+            <a:ext cx="274320" cy="164592"/>
+          </a:xfrm>
+          <a:prstGeom prst="triangle">
+            <a:avLst/>
+          </a:prstGeom>
+          <a:solidFill>
+            <a:srgbClr val="A9AEB5"/>
+          </a:solidFill>
+          <a:ln>
+            <a:noFill/>
+          </a:ln>
+          <a:effectLst/>
+        </p:spPr>
+        <p:style>
+          <a:lnRef idx="1">
+            <a:schemeClr val="accent1"/>
+          </a:lnRef>
+          <a:fillRef idx="3">
+            <a:schemeClr val="accent1"/>
+          </a:fillRef>
+          <a:effectRef idx="2">
+            <a:schemeClr val="accent1"/>
+          </a:effectRef>
+          <a:fontRef idx="minor">
+            <a:schemeClr val="lt1"/>
+          </a:fontRef>
+        </p:style>
+        <p:txBody>
+          <a:bodyPr rtlCol="0" anchor="ctr"/>
+          <a:lstStyle/>
+          <a:p>
+            <a:pPr algn="ctr"/>
+          </a:p>
+        </p:txBody>
+      </p:sp>
+      <p:sp>
+        <p:nvSpPr>
+          <p:cNvPr id="16" name="TextBox 15"/>
+          <p:cNvSpPr txBox="1"/>
+          <p:nvPr/>
+        </p:nvSpPr>
+        <p:spPr>
+          <a:xfrm>
+            <a:off x="685800" y="3191256"/>
+            <a:ext cx="10817352" cy="365760"/>
+          </a:xfrm>
+          <a:prstGeom prst="rect">
+            <a:avLst/>
+          </a:prstGeom>
+          <a:noFill/>
+        </p:spPr>
+        <p:txBody>
+          <a:bodyPr wrap="square" anchor="t" lIns="0" rIns="0" tIns="0" bIns="0">
+            <a:spAutoFit/>
+          </a:bodyPr>
+          <a:lstStyle/>
+          <a:p>
+            <a:pPr algn="ctr"/>
+            <a:r>
+              <a:rPr sz="1050" b="1" i="0" spc="200">
+                <a:solidFill>
+                  <a:srgbClr val="868B94"/>
+                </a:solidFill>
+                <a:latin typeface="Arial"/>
+              </a:rPr>
+              <a:t>LARGE INFOGRAPHIC PLACEHOLDER</a:t>
+            </a:r>
+          </a:p>
+        </p:txBody>
+      </p:sp>
+      <p:sp>
+        <p:nvSpPr>
+          <p:cNvPr id="17" name="TextBox 16"/>
+          <p:cNvSpPr txBox="1"/>
+          <p:nvPr/>
+        </p:nvSpPr>
+        <p:spPr>
+          <a:xfrm>
+            <a:off x="685800" y="3465576"/>
+            <a:ext cx="10817352" cy="274320"/>
+          </a:xfrm>
+          <a:prstGeom prst="rect">
+            <a:avLst/>
+          </a:prstGeom>
+          <a:noFill/>
+        </p:spPr>
+        <p:txBody>
+          <a:bodyPr wrap="square" anchor="t" lIns="0" rIns="0" tIns="0" bIns="0">
+            <a:spAutoFit/>
+          </a:bodyPr>
+          <a:lstStyle/>
+          <a:p>
+            <a:pPr algn="ctr"/>
+            <a:r>
+              <a:rPr sz="800" b="0" i="0" spc="80">
+                <a:solidFill>
+                  <a:srgbClr val="C8CCD2"/>
+                </a:solidFill>
+                <a:latin typeface="Arial"/>
+              </a:rPr>
+              <a:t>Replace · innovation framework graphic</a:t>
+            </a:r>
+          </a:p>
+        </p:txBody>
+      </p:sp>
+      <p:sp>
+        <p:nvSpPr>
+          <p:cNvPr id="18" name="Rectangle 17"/>
+          <p:cNvSpPr/>
+          <p:nvPr/>
+        </p:nvSpPr>
+        <p:spPr>
+          <a:xfrm>
+            <a:off x="685800" y="4526280"/>
+            <a:ext cx="1612392" cy="1280160"/>
+          </a:xfrm>
+          <a:prstGeom prst="rect">
+            <a:avLst/>
+          </a:prstGeom>
+          <a:solidFill>
+            <a:srgbClr val="F7F8F9"/>
+          </a:solidFill>
+          <a:ln w="6350">
+            <a:solidFill>
+              <a:srgbClr val="C8CCD2"/>
+            </a:solidFill>
+          </a:ln>
+          <a:effectLst/>
+        </p:spPr>
+        <p:style>
+          <a:lnRef idx="1">
+            <a:schemeClr val="accent1"/>
+          </a:lnRef>
+          <a:fillRef idx="3">
+            <a:schemeClr val="accent1"/>
+          </a:fillRef>
+          <a:effectRef idx="2">
+            <a:schemeClr val="accent1"/>
+          </a:effectRef>
+          <a:fontRef idx="minor">
+            <a:schemeClr val="lt1"/>
+          </a:fontRef>
+        </p:style>
+        <p:txBody>
+          <a:bodyPr rtlCol="0" anchor="ctr"/>
+          <a:lstStyle/>
+          <a:p>
+            <a:pPr algn="ctr"/>
+          </a:p>
+        </p:txBody>
+      </p:sp>
+      <p:sp>
+        <p:nvSpPr>
+          <p:cNvPr id="19" name="Rectangle 18"/>
+          <p:cNvSpPr/>
+          <p:nvPr/>
+        </p:nvSpPr>
+        <p:spPr>
+          <a:xfrm>
+            <a:off x="685800" y="4526280"/>
+            <a:ext cx="1612392" cy="64008"/>
+          </a:xfrm>
+          <a:prstGeom prst="rect">
+            <a:avLst/>
+          </a:prstGeom>
+          <a:solidFill>
+            <a:srgbClr val="1B2A4A"/>
+          </a:solidFill>
+          <a:ln>
+            <a:noFill/>
+          </a:ln>
+          <a:effectLst/>
+        </p:spPr>
+        <p:style>
+          <a:lnRef idx="1">
+            <a:schemeClr val="accent1"/>
+          </a:lnRef>
+          <a:fillRef idx="3">
+            <a:schemeClr val="accent1"/>
+          </a:fillRef>
+          <a:effectRef idx="2">
+            <a:schemeClr val="accent1"/>
+          </a:effectRef>
+          <a:fontRef idx="minor">
+            <a:schemeClr val="lt1"/>
+          </a:fontRef>
+        </p:style>
+        <p:txBody>
+          <a:bodyPr rtlCol="0" anchor="ctr"/>
+          <a:lstStyle/>
+          <a:p>
+            <a:pPr algn="ctr"/>
+          </a:p>
+        </p:txBody>
+      </p:sp>
+      <p:sp>
+        <p:nvSpPr>
+          <p:cNvPr id="20" name="TextBox 19"/>
+          <p:cNvSpPr txBox="1"/>
+          <p:nvPr/>
+        </p:nvSpPr>
+        <p:spPr>
+          <a:xfrm>
+            <a:off x="850392" y="4754880"/>
+            <a:ext cx="1283208" cy="1005840"/>
+          </a:xfrm>
+          <a:prstGeom prst="rect">
+            <a:avLst/>
+          </a:prstGeom>
+          <a:noFill/>
+        </p:spPr>
+        <p:txBody>
+          <a:bodyPr wrap="square" anchor="t" lIns="0" rIns="0" tIns="0" bIns="0">
+            <a:spAutoFit/>
+          </a:bodyPr>
+          <a:lstStyle/>
+          <a:p>
+            <a:pPr algn="l">
+              <a:spcAft>
+                <a:spcPts val="400"/>
+              </a:spcAft>
+            </a:pPr>
+            <a:r>
+              <a:rPr sz="1100" b="1" i="0">
+                <a:solidFill>
+                  <a:srgbClr val="A9AEB5"/>
+                </a:solidFill>
+                <a:latin typeface="Arial"/>
+              </a:rPr>
+              <a:t>01</a:t>
+            </a:r>
+          </a:p>
+          <a:p>
+            <a:pPr algn="l">
+              <a:lnSpc>
+                <a:spcPct val="110000"/>
+              </a:lnSpc>
+            </a:pPr>
+            <a:r>
+              <a:rPr sz="1150" b="1" i="0">
+                <a:solidFill>
+                  <a:srgbClr val="1A1A1C"/>
+                </a:solidFill>
+                <a:latin typeface="Arial"/>
+              </a:rPr>
+              <a:t>Exterior Design</a:t>
+            </a:r>
+          </a:p>
+        </p:txBody>
+      </p:sp>
+      <p:sp>
+        <p:nvSpPr>
+          <p:cNvPr id="21" name="Rectangle 20"/>
+          <p:cNvSpPr/>
+          <p:nvPr/>
+        </p:nvSpPr>
+        <p:spPr>
+          <a:xfrm>
+            <a:off x="2526792" y="4526280"/>
+            <a:ext cx="1612392" cy="1280160"/>
+          </a:xfrm>
+          <a:prstGeom prst="rect">
+            <a:avLst/>
+          </a:prstGeom>
+          <a:solidFill>
+            <a:srgbClr val="F7F8F9"/>
+          </a:solidFill>
+          <a:ln w="6350">
+            <a:solidFill>
+              <a:srgbClr val="C8CCD2"/>
+            </a:solidFill>
+          </a:ln>
+          <a:effectLst/>
+        </p:spPr>
+        <p:style>
+          <a:lnRef idx="1">
+            <a:schemeClr val="accent1"/>
+          </a:lnRef>
+          <a:fillRef idx="3">
+            <a:schemeClr val="accent1"/>
+          </a:fillRef>
+          <a:effectRef idx="2">
+            <a:schemeClr val="accent1"/>
+          </a:effectRef>
+          <a:fontRef idx="minor">
+            <a:schemeClr val="lt1"/>
+          </a:fontRef>
+        </p:style>
+        <p:txBody>
+          <a:bodyPr rtlCol="0" anchor="ctr"/>
+          <a:lstStyle/>
+          <a:p>
+            <a:pPr algn="ctr"/>
+          </a:p>
+        </p:txBody>
+      </p:sp>
+      <p:sp>
+        <p:nvSpPr>
+          <p:cNvPr id="22" name="Rectangle 21"/>
+          <p:cNvSpPr/>
+          <p:nvPr/>
+        </p:nvSpPr>
+        <p:spPr>
+          <a:xfrm>
+            <a:off x="2526792" y="4526280"/>
+            <a:ext cx="1612392" cy="64008"/>
+          </a:xfrm>
+          <a:prstGeom prst="rect">
+            <a:avLst/>
+          </a:prstGeom>
+          <a:solidFill>
+            <a:srgbClr val="1B2A4A"/>
+          </a:solidFill>
+          <a:ln>
+            <a:noFill/>
+          </a:ln>
+          <a:effectLst/>
+        </p:spPr>
+        <p:style>
+          <a:lnRef idx="1">
+            <a:schemeClr val="accent1"/>
+          </a:lnRef>
+          <a:fillRef idx="3">
+            <a:schemeClr val="accent1"/>
+          </a:fillRef>
+          <a:effectRef idx="2">
+            <a:schemeClr val="accent1"/>
+          </a:effectRef>
+          <a:fontRef idx="minor">
+            <a:schemeClr val="lt1"/>
+          </a:fontRef>
+        </p:style>
+        <p:txBody>
+          <a:bodyPr rtlCol="0" anchor="ctr"/>
+          <a:lstStyle/>
+          <a:p>
+            <a:pPr algn="ctr"/>
+          </a:p>
+        </p:txBody>
+      </p:sp>
+      <p:sp>
+        <p:nvSpPr>
+          <p:cNvPr id="23" name="TextBox 22"/>
+          <p:cNvSpPr txBox="1"/>
+          <p:nvPr/>
+        </p:nvSpPr>
+        <p:spPr>
+          <a:xfrm>
+            <a:off x="2691384" y="4754880"/>
+            <a:ext cx="1283208" cy="1005840"/>
+          </a:xfrm>
+          <a:prstGeom prst="rect">
+            <a:avLst/>
+          </a:prstGeom>
+          <a:noFill/>
+        </p:spPr>
+        <p:txBody>
+          <a:bodyPr wrap="square" anchor="t" lIns="0" rIns="0" tIns="0" bIns="0">
+            <a:spAutoFit/>
+          </a:bodyPr>
+          <a:lstStyle/>
+          <a:p>
+            <a:pPr algn="l">
+              <a:spcAft>
+                <a:spcPts val="400"/>
+              </a:spcAft>
+            </a:pPr>
+            <a:r>
+              <a:rPr sz="1100" b="1" i="0">
+                <a:solidFill>
+                  <a:srgbClr val="A9AEB5"/>
+                </a:solidFill>
+                <a:latin typeface="Arial"/>
+              </a:rPr>
+              <a:t>02</a:t>
+            </a:r>
+          </a:p>
+          <a:p>
+            <a:pPr algn="l">
+              <a:lnSpc>
+                <a:spcPct val="110000"/>
+              </a:lnSpc>
+            </a:pPr>
+            <a:r>
+              <a:rPr sz="1150" b="1" i="0">
+                <a:solidFill>
+                  <a:srgbClr val="1A1A1C"/>
+                </a:solidFill>
+                <a:latin typeface="Arial"/>
+              </a:rPr>
+              <a:t>Interior Design</a:t>
+            </a:r>
+          </a:p>
+        </p:txBody>
+      </p:sp>
+      <p:sp>
+        <p:nvSpPr>
+          <p:cNvPr id="24" name="Rectangle 23"/>
+          <p:cNvSpPr/>
+          <p:nvPr/>
+        </p:nvSpPr>
+        <p:spPr>
+          <a:xfrm>
+            <a:off x="4367784" y="4526280"/>
+            <a:ext cx="1612392" cy="1280160"/>
+          </a:xfrm>
+          <a:prstGeom prst="rect">
+            <a:avLst/>
+          </a:prstGeom>
+          <a:solidFill>
+            <a:srgbClr val="F7F8F9"/>
+          </a:solidFill>
+          <a:ln w="6350">
+            <a:solidFill>
+              <a:srgbClr val="C8CCD2"/>
+            </a:solidFill>
+          </a:ln>
+          <a:effectLst/>
+        </p:spPr>
+        <p:style>
+          <a:lnRef idx="1">
+            <a:schemeClr val="accent1"/>
+          </a:lnRef>
+          <a:fillRef idx="3">
+            <a:schemeClr val="accent1"/>
+          </a:fillRef>
+          <a:effectRef idx="2">
+            <a:schemeClr val="accent1"/>
+          </a:effectRef>
+          <a:fontRef idx="minor">
+            <a:schemeClr val="lt1"/>
+          </a:fontRef>
+        </p:style>
+        <p:txBody>
+          <a:bodyPr rtlCol="0" anchor="ctr"/>
+          <a:lstStyle/>
+          <a:p>
+            <a:pPr algn="ctr"/>
+          </a:p>
+        </p:txBody>
+      </p:sp>
+      <p:sp>
+        <p:nvSpPr>
+          <p:cNvPr id="25" name="Rectangle 24"/>
+          <p:cNvSpPr/>
+          <p:nvPr/>
+        </p:nvSpPr>
+        <p:spPr>
+          <a:xfrm>
+            <a:off x="4367784" y="4526280"/>
+            <a:ext cx="1612392" cy="64008"/>
+          </a:xfrm>
+          <a:prstGeom prst="rect">
+            <a:avLst/>
+          </a:prstGeom>
+          <a:solidFill>
+            <a:srgbClr val="1B2A4A"/>
+          </a:solidFill>
+          <a:ln>
+            <a:noFill/>
+          </a:ln>
+          <a:effectLst/>
+        </p:spPr>
+        <p:style>
+          <a:lnRef idx="1">
+            <a:schemeClr val="accent1"/>
+          </a:lnRef>
+          <a:fillRef idx="3">
+            <a:schemeClr val="accent1"/>
+          </a:fillRef>
+          <a:effectRef idx="2">
+            <a:schemeClr val="accent1"/>
+          </a:effectRef>
+          <a:fontRef idx="minor">
+            <a:schemeClr val="lt1"/>
+          </a:fontRef>
+        </p:style>
+        <p:txBody>
+          <a:bodyPr rtlCol="0" anchor="ctr"/>
+          <a:lstStyle/>
+          <a:p>
+            <a:pPr algn="ctr"/>
+          </a:p>
+        </p:txBody>
+      </p:sp>
+      <p:sp>
+        <p:nvSpPr>
           <p:cNvPr id="26" name="TextBox 25"/>
+          <p:cNvSpPr txBox="1"/>
+          <p:nvPr/>
+        </p:nvSpPr>
+        <p:spPr>
+          <a:xfrm>
+            <a:off x="4532376" y="4754880"/>
+            <a:ext cx="1283208" cy="1005840"/>
+          </a:xfrm>
+          <a:prstGeom prst="rect">
+            <a:avLst/>
+          </a:prstGeom>
+          <a:noFill/>
+        </p:spPr>
+        <p:txBody>
+          <a:bodyPr wrap="square" anchor="t" lIns="0" rIns="0" tIns="0" bIns="0">
+            <a:spAutoFit/>
+          </a:bodyPr>
+          <a:lstStyle/>
+          <a:p>
+            <a:pPr algn="l">
+              <a:spcAft>
+                <a:spcPts val="400"/>
+              </a:spcAft>
+            </a:pPr>
+            <a:r>
+              <a:rPr sz="1100" b="1" i="0">
+                <a:solidFill>
+                  <a:srgbClr val="A9AEB5"/>
+                </a:solidFill>
+                <a:latin typeface="Arial"/>
+              </a:rPr>
+              <a:t>03</a:t>
+            </a:r>
+          </a:p>
+          <a:p>
+            <a:pPr algn="l">
+              <a:lnSpc>
+                <a:spcPct val="110000"/>
+              </a:lnSpc>
+            </a:pPr>
+            <a:r>
+              <a:rPr sz="1150" b="1" i="0">
+                <a:solidFill>
+                  <a:srgbClr val="1A1A1C"/>
+                </a:solidFill>
+                <a:latin typeface="Arial"/>
+              </a:rPr>
+              <a:t>CMF</a:t>
+            </a:r>
+          </a:p>
+        </p:txBody>
+      </p:sp>
+      <p:sp>
+        <p:nvSpPr>
+          <p:cNvPr id="27" name="Rectangle 26"/>
+          <p:cNvSpPr/>
+          <p:nvPr/>
+        </p:nvSpPr>
+        <p:spPr>
+          <a:xfrm>
+            <a:off x="6208776" y="4526280"/>
+            <a:ext cx="1612392" cy="1280160"/>
+          </a:xfrm>
+          <a:prstGeom prst="rect">
+            <a:avLst/>
+          </a:prstGeom>
+          <a:solidFill>
+            <a:srgbClr val="F7F8F9"/>
+          </a:solidFill>
+          <a:ln w="6350">
+            <a:solidFill>
+              <a:srgbClr val="C8CCD2"/>
+            </a:solidFill>
+          </a:ln>
+          <a:effectLst/>
+        </p:spPr>
+        <p:style>
+          <a:lnRef idx="1">
+            <a:schemeClr val="accent1"/>
+          </a:lnRef>
+          <a:fillRef idx="3">
+            <a:schemeClr val="accent1"/>
+          </a:fillRef>
+          <a:effectRef idx="2">
+            <a:schemeClr val="accent1"/>
+          </a:effectRef>
+          <a:fontRef idx="minor">
+            <a:schemeClr val="lt1"/>
+          </a:fontRef>
+        </p:style>
+        <p:txBody>
+          <a:bodyPr rtlCol="0" anchor="ctr"/>
+          <a:lstStyle/>
+          <a:p>
+            <a:pPr algn="ctr"/>
+          </a:p>
+        </p:txBody>
+      </p:sp>
+      <p:sp>
+        <p:nvSpPr>
+          <p:cNvPr id="28" name="Rectangle 27"/>
+          <p:cNvSpPr/>
+          <p:nvPr/>
+        </p:nvSpPr>
+        <p:spPr>
+          <a:xfrm>
+            <a:off x="6208776" y="4526280"/>
+            <a:ext cx="1612392" cy="64008"/>
+          </a:xfrm>
+          <a:prstGeom prst="rect">
+            <a:avLst/>
+          </a:prstGeom>
+          <a:solidFill>
+            <a:srgbClr val="1B2A4A"/>
+          </a:solidFill>
+          <a:ln>
+            <a:noFill/>
+          </a:ln>
+          <a:effectLst/>
+        </p:spPr>
+        <p:style>
+          <a:lnRef idx="1">
+            <a:schemeClr val="accent1"/>
+          </a:lnRef>
+          <a:fillRef idx="3">
+            <a:schemeClr val="accent1"/>
+          </a:fillRef>
+          <a:effectRef idx="2">
+            <a:schemeClr val="accent1"/>
+          </a:effectRef>
+          <a:fontRef idx="minor">
+            <a:schemeClr val="lt1"/>
+          </a:fontRef>
+        </p:style>
+        <p:txBody>
+          <a:bodyPr rtlCol="0" anchor="ctr"/>
+          <a:lstStyle/>
+          <a:p>
+            <a:pPr algn="ctr"/>
+          </a:p>
+        </p:txBody>
+      </p:sp>
+      <p:sp>
+        <p:nvSpPr>
+          <p:cNvPr id="29" name="TextBox 28"/>
+          <p:cNvSpPr txBox="1"/>
+          <p:nvPr/>
+        </p:nvSpPr>
+        <p:spPr>
+          <a:xfrm>
+            <a:off x="6373368" y="4754880"/>
+            <a:ext cx="1283208" cy="1005840"/>
+          </a:xfrm>
+          <a:prstGeom prst="rect">
+            <a:avLst/>
+          </a:prstGeom>
+          <a:noFill/>
+        </p:spPr>
+        <p:txBody>
+          <a:bodyPr wrap="square" anchor="t" lIns="0" rIns="0" tIns="0" bIns="0">
+            <a:spAutoFit/>
+          </a:bodyPr>
+          <a:lstStyle/>
+          <a:p>
+            <a:pPr algn="l">
+              <a:spcAft>
+                <a:spcPts val="400"/>
+              </a:spcAft>
+            </a:pPr>
+            <a:r>
+              <a:rPr sz="1100" b="1" i="0">
+                <a:solidFill>
+                  <a:srgbClr val="A9AEB5"/>
+                </a:solidFill>
+                <a:latin typeface="Arial"/>
+              </a:rPr>
+              <a:t>04</a:t>
+            </a:r>
+          </a:p>
+          <a:p>
+            <a:pPr algn="l">
+              <a:lnSpc>
+                <a:spcPct val="110000"/>
+              </a:lnSpc>
+            </a:pPr>
+            <a:r>
+              <a:rPr sz="1150" b="1" i="0">
+                <a:solidFill>
+                  <a:srgbClr val="1A1A1C"/>
+                </a:solidFill>
+                <a:latin typeface="Arial"/>
+              </a:rPr>
+              <a:t>Lighting</a:t>
+            </a:r>
+          </a:p>
+        </p:txBody>
+      </p:sp>
+      <p:sp>
+        <p:nvSpPr>
+          <p:cNvPr id="30" name="Rectangle 29"/>
+          <p:cNvSpPr/>
+          <p:nvPr/>
+        </p:nvSpPr>
+        <p:spPr>
+          <a:xfrm>
+            <a:off x="8049768" y="4526280"/>
+            <a:ext cx="1612392" cy="1280160"/>
+          </a:xfrm>
+          <a:prstGeom prst="rect">
+            <a:avLst/>
+          </a:prstGeom>
+          <a:solidFill>
+            <a:srgbClr val="F7F8F9"/>
+          </a:solidFill>
+          <a:ln w="6350">
+            <a:solidFill>
+              <a:srgbClr val="C8CCD2"/>
+            </a:solidFill>
+          </a:ln>
+          <a:effectLst/>
+        </p:spPr>
+        <p:style>
+          <a:lnRef idx="1">
+            <a:schemeClr val="accent1"/>
+          </a:lnRef>
+          <a:fillRef idx="3">
+            <a:schemeClr val="accent1"/>
+          </a:fillRef>
+          <a:effectRef idx="2">
+            <a:schemeClr val="accent1"/>
+          </a:effectRef>
+          <a:fontRef idx="minor">
+            <a:schemeClr val="lt1"/>
+          </a:fontRef>
+        </p:style>
+        <p:txBody>
+          <a:bodyPr rtlCol="0" anchor="ctr"/>
+          <a:lstStyle/>
+          <a:p>
+            <a:pPr algn="ctr"/>
+          </a:p>
+        </p:txBody>
+      </p:sp>
+      <p:sp>
+        <p:nvSpPr>
+          <p:cNvPr id="31" name="Rectangle 30"/>
+          <p:cNvSpPr/>
+          <p:nvPr/>
+        </p:nvSpPr>
+        <p:spPr>
+          <a:xfrm>
+            <a:off x="8049768" y="4526280"/>
+            <a:ext cx="1612392" cy="64008"/>
+          </a:xfrm>
+          <a:prstGeom prst="rect">
+            <a:avLst/>
+          </a:prstGeom>
+          <a:solidFill>
+            <a:srgbClr val="1B2A4A"/>
+          </a:solidFill>
+          <a:ln>
+            <a:noFill/>
+          </a:ln>
+          <a:effectLst/>
+        </p:spPr>
+        <p:style>
+          <a:lnRef idx="1">
+            <a:schemeClr val="accent1"/>
+          </a:lnRef>
+          <a:fillRef idx="3">
+            <a:schemeClr val="accent1"/>
+          </a:fillRef>
+          <a:effectRef idx="2">
+            <a:schemeClr val="accent1"/>
+          </a:effectRef>
+          <a:fontRef idx="minor">
+            <a:schemeClr val="lt1"/>
+          </a:fontRef>
+        </p:style>
+        <p:txBody>
+          <a:bodyPr rtlCol="0" anchor="ctr"/>
+          <a:lstStyle/>
+          <a:p>
+            <a:pPr algn="ctr"/>
+          </a:p>
+        </p:txBody>
+      </p:sp>
+      <p:sp>
+        <p:nvSpPr>
+          <p:cNvPr id="32" name="TextBox 31"/>
+          <p:cNvSpPr txBox="1"/>
+          <p:nvPr/>
+        </p:nvSpPr>
+        <p:spPr>
+          <a:xfrm>
+            <a:off x="8214360" y="4754880"/>
+            <a:ext cx="1283208" cy="1005840"/>
+          </a:xfrm>
+          <a:prstGeom prst="rect">
+            <a:avLst/>
+          </a:prstGeom>
+          <a:noFill/>
+        </p:spPr>
+        <p:txBody>
+          <a:bodyPr wrap="square" anchor="t" lIns="0" rIns="0" tIns="0" bIns="0">
+            <a:spAutoFit/>
+          </a:bodyPr>
+          <a:lstStyle/>
+          <a:p>
+            <a:pPr algn="l">
+              <a:spcAft>
+                <a:spcPts val="400"/>
+              </a:spcAft>
+            </a:pPr>
+            <a:r>
+              <a:rPr sz="1100" b="1" i="0">
+                <a:solidFill>
+                  <a:srgbClr val="A9AEB5"/>
+                </a:solidFill>
+                <a:latin typeface="Arial"/>
+              </a:rPr>
+              <a:t>05</a:t>
+            </a:r>
+          </a:p>
+          <a:p>
+            <a:pPr algn="l">
+              <a:lnSpc>
+                <a:spcPct val="110000"/>
+              </a:lnSpc>
+            </a:pPr>
+            <a:r>
+              <a:rPr sz="1150" b="1" i="0">
+                <a:solidFill>
+                  <a:srgbClr val="1A1A1C"/>
+                </a:solidFill>
+                <a:latin typeface="Arial"/>
+              </a:rPr>
+              <a:t>Digital Experience</a:t>
+            </a:r>
+          </a:p>
+        </p:txBody>
+      </p:sp>
+      <p:sp>
+        <p:nvSpPr>
+          <p:cNvPr id="33" name="Rectangle 32"/>
+          <p:cNvSpPr/>
+          <p:nvPr/>
+        </p:nvSpPr>
+        <p:spPr>
+          <a:xfrm>
+            <a:off x="9890760" y="4526280"/>
+            <a:ext cx="1612392" cy="1280160"/>
+          </a:xfrm>
+          <a:prstGeom prst="rect">
+            <a:avLst/>
+          </a:prstGeom>
+          <a:solidFill>
+            <a:srgbClr val="F7F8F9"/>
+          </a:solidFill>
+          <a:ln w="6350">
+            <a:solidFill>
+              <a:srgbClr val="C8CCD2"/>
+            </a:solidFill>
+          </a:ln>
+          <a:effectLst/>
+        </p:spPr>
+        <p:style>
+          <a:lnRef idx="1">
+            <a:schemeClr val="accent1"/>
+          </a:lnRef>
+          <a:fillRef idx="3">
+            <a:schemeClr val="accent1"/>
+          </a:fillRef>
+          <a:effectRef idx="2">
+            <a:schemeClr val="accent1"/>
+          </a:effectRef>
+          <a:fontRef idx="minor">
+            <a:schemeClr val="lt1"/>
+          </a:fontRef>
+        </p:style>
+        <p:txBody>
+          <a:bodyPr rtlCol="0" anchor="ctr"/>
+          <a:lstStyle/>
+          <a:p>
+            <a:pPr algn="ctr"/>
+          </a:p>
+        </p:txBody>
+      </p:sp>
+      <p:sp>
+        <p:nvSpPr>
+          <p:cNvPr id="34" name="Rectangle 33"/>
+          <p:cNvSpPr/>
+          <p:nvPr/>
+        </p:nvSpPr>
+        <p:spPr>
+          <a:xfrm>
+            <a:off x="9890760" y="4526280"/>
+            <a:ext cx="1612392" cy="64008"/>
+          </a:xfrm>
+          <a:prstGeom prst="rect">
+            <a:avLst/>
+          </a:prstGeom>
+          <a:solidFill>
+            <a:srgbClr val="1B2A4A"/>
+          </a:solidFill>
+          <a:ln>
+            <a:noFill/>
+          </a:ln>
+          <a:effectLst/>
+        </p:spPr>
+        <p:style>
+          <a:lnRef idx="1">
+            <a:schemeClr val="accent1"/>
+          </a:lnRef>
+          <a:fillRef idx="3">
+            <a:schemeClr val="accent1"/>
+          </a:fillRef>
+          <a:effectRef idx="2">
+            <a:schemeClr val="accent1"/>
+          </a:effectRef>
+          <a:fontRef idx="minor">
+            <a:schemeClr val="lt1"/>
+          </a:fontRef>
+        </p:style>
+        <p:txBody>
+          <a:bodyPr rtlCol="0" anchor="ctr"/>
+          <a:lstStyle/>
+          <a:p>
+            <a:pPr algn="ctr"/>
+          </a:p>
+        </p:txBody>
+      </p:sp>
+      <p:sp>
+        <p:nvSpPr>
+          <p:cNvPr id="35" name="TextBox 34"/>
+          <p:cNvSpPr txBox="1"/>
+          <p:nvPr/>
+        </p:nvSpPr>
+        <p:spPr>
+          <a:xfrm>
+            <a:off x="10055352" y="4754880"/>
+            <a:ext cx="1283208" cy="1005840"/>
+          </a:xfrm>
+          <a:prstGeom prst="rect">
+            <a:avLst/>
+          </a:prstGeom>
+          <a:noFill/>
+        </p:spPr>
+        <p:txBody>
+          <a:bodyPr wrap="square" anchor="t" lIns="0" rIns="0" tIns="0" bIns="0">
+            <a:spAutoFit/>
+          </a:bodyPr>
+          <a:lstStyle/>
+          <a:p>
+            <a:pPr algn="l">
+              <a:spcAft>
+                <a:spcPts val="400"/>
+              </a:spcAft>
+            </a:pPr>
+            <a:r>
+              <a:rPr sz="1100" b="1" i="0">
+                <a:solidFill>
+                  <a:srgbClr val="A9AEB5"/>
+                </a:solidFill>
+                <a:latin typeface="Arial"/>
+              </a:rPr>
+              <a:t>06</a:t>
+            </a:r>
+          </a:p>
+          <a:p>
+            <a:pPr algn="l">
+              <a:lnSpc>
+                <a:spcPct val="110000"/>
+              </a:lnSpc>
+            </a:pPr>
+            <a:r>
+              <a:rPr sz="1150" b="1" i="0">
+                <a:solidFill>
+                  <a:srgbClr val="1A1A1C"/>
+                </a:solidFill>
+                <a:latin typeface="Arial"/>
+              </a:rPr>
+              <a:t>AI-enabled Design</a:t>
+            </a:r>
+          </a:p>
+        </p:txBody>
+      </p:sp>
+      <p:sp>
+        <p:nvSpPr>
+          <p:cNvPr id="36" name="TextBox 35"/>
+          <p:cNvSpPr txBox="1"/>
+          <p:nvPr/>
+        </p:nvSpPr>
+        <p:spPr>
+          <a:xfrm>
+            <a:off x="640080" y="6437376"/>
+            <a:ext cx="7315200" cy="274320"/>
+          </a:xfrm>
+          <a:prstGeom prst="rect">
+            <a:avLst/>
+          </a:prstGeom>
+          <a:noFill/>
+        </p:spPr>
+        <p:txBody>
+          <a:bodyPr wrap="square" anchor="t" lIns="0" rIns="0" tIns="0" bIns="0">
+            <a:spAutoFit/>
+          </a:bodyPr>
+          <a:lstStyle/>
+          <a:p>
+            <a:pPr algn="l"/>
+            <a:r>
+              <a:rPr sz="800" b="0" i="0" spc="150">
+                <a:solidFill>
+                  <a:srgbClr val="868B94"/>
+                </a:solidFill>
+                <a:latin typeface="Arial"/>
+              </a:rPr>
+              <a:t>CHRYSLER  ·  BRAND DESIGN VISION</a:t>
+            </a:r>
+          </a:p>
+        </p:txBody>
+      </p:sp>
+      <p:sp>
+        <p:nvSpPr>
+          <p:cNvPr id="37" name="TextBox 36"/>
+          <p:cNvSpPr txBox="1"/>
+          <p:nvPr/>
+        </p:nvSpPr>
+        <p:spPr>
+          <a:xfrm>
+            <a:off x="10607040" y="6437376"/>
+            <a:ext cx="914400" cy="274320"/>
+          </a:xfrm>
+          <a:prstGeom prst="rect">
+            <a:avLst/>
+          </a:prstGeom>
+          <a:noFill/>
+        </p:spPr>
+        <p:txBody>
+          <a:bodyPr wrap="square" anchor="t" lIns="0" rIns="0" tIns="0" bIns="0">
+            <a:spAutoFit/>
+          </a:bodyPr>
+          <a:lstStyle/>
+          <a:p>
+            <a:pPr algn="r"/>
+            <a:r>
+              <a:rPr sz="800" b="0" i="0" spc="150">
+                <a:solidFill>
+                  <a:srgbClr val="868B94"/>
+                </a:solidFill>
+                <a:latin typeface="Arial"/>
+              </a:rPr>
+              <a:t>19</a:t>
+            </a:r>
+          </a:p>
+        </p:txBody>
+      </p:sp>
+      <p:sp>
+        <p:nvSpPr>
+          <p:cNvPr id="38" name="TextBox 37"/>
           <p:cNvSpPr txBox="1"/>
           <p:nvPr/>
         </p:nvSpPr>
@@ -15591,6 +16708,976 @@
 </p:sld>
 </file>
 
+<file path=ppt/slides/slide20.xml><?xml version="1.0" encoding="utf-8"?>
+<p:sld xmlns:a="http://schemas.openxmlformats.org/drawingml/2006/main" xmlns:p="http://schemas.openxmlformats.org/presentationml/2006/main" xmlns:r="http://schemas.openxmlformats.org/officeDocument/2006/relationships">
+  <p:cSld>
+    <p:bg>
+      <p:bgPr>
+        <a:solidFill>
+          <a:srgbClr val="FFFFFF"/>
+        </a:solidFill>
+        <a:effectLst/>
+      </p:bgPr>
+    </p:bg>
+    <p:spTree>
+      <p:nvGrpSpPr>
+        <p:cNvPr id="1" name=""/>
+        <p:cNvGrpSpPr/>
+        <p:nvPr/>
+      </p:nvGrpSpPr>
+      <p:grpSpPr/>
+      <p:sp>
+        <p:nvSpPr>
+          <p:cNvPr id="2" name="Rectangle 1"/>
+          <p:cNvSpPr/>
+          <p:nvPr/>
+        </p:nvSpPr>
+        <p:spPr>
+          <a:xfrm>
+            <a:off x="0" y="0"/>
+            <a:ext cx="12191695" cy="3017520"/>
+          </a:xfrm>
+          <a:prstGeom prst="rect">
+            <a:avLst/>
+          </a:prstGeom>
+          <a:solidFill>
+            <a:srgbClr val="F7F8F9"/>
+          </a:solidFill>
+          <a:ln>
+            <a:noFill/>
+          </a:ln>
+          <a:effectLst/>
+        </p:spPr>
+        <p:style>
+          <a:lnRef idx="1">
+            <a:schemeClr val="accent1"/>
+          </a:lnRef>
+          <a:fillRef idx="3">
+            <a:schemeClr val="accent1"/>
+          </a:fillRef>
+          <a:effectRef idx="2">
+            <a:schemeClr val="accent1"/>
+          </a:effectRef>
+          <a:fontRef idx="minor">
+            <a:schemeClr val="lt1"/>
+          </a:fontRef>
+        </p:style>
+        <p:txBody>
+          <a:bodyPr rtlCol="0" anchor="ctr"/>
+          <a:lstStyle/>
+          <a:p>
+            <a:pPr algn="ctr"/>
+          </a:p>
+        </p:txBody>
+      </p:sp>
+      <p:cxnSp>
+        <p:nvCxnSpPr>
+          <p:cNvPr id="3" name="Connector 2"/>
+          <p:cNvCxnSpPr/>
+          <p:nvPr/>
+        </p:nvCxnSpPr>
+        <p:spPr>
+          <a:xfrm>
+            <a:off x="0" y="0"/>
+            <a:ext cx="237744" cy="0"/>
+          </a:xfrm>
+          <a:prstGeom prst="bentConnector3">
+            <a:avLst/>
+          </a:prstGeom>
+          <a:ln w="15875">
+            <a:solidFill>
+              <a:srgbClr val="A9AEB5"/>
+            </a:solidFill>
+          </a:ln>
+        </p:spPr>
+        <p:style>
+          <a:lnRef idx="2">
+            <a:schemeClr val="accent1"/>
+          </a:lnRef>
+          <a:fillRef idx="0">
+            <a:schemeClr val="accent1"/>
+          </a:fillRef>
+          <a:effectRef idx="1">
+            <a:schemeClr val="accent1"/>
+          </a:effectRef>
+          <a:fontRef idx="minor">
+            <a:schemeClr val="tx1"/>
+          </a:fontRef>
+        </p:style>
+      </p:cxnSp>
+      <p:cxnSp>
+        <p:nvCxnSpPr>
+          <p:cNvPr id="4" name="Connector 3"/>
+          <p:cNvCxnSpPr/>
+          <p:nvPr/>
+        </p:nvCxnSpPr>
+        <p:spPr>
+          <a:xfrm>
+            <a:off x="0" y="0"/>
+            <a:ext cx="0" cy="237744"/>
+          </a:xfrm>
+          <a:prstGeom prst="bentConnector3">
+            <a:avLst/>
+          </a:prstGeom>
+          <a:ln w="15875">
+            <a:solidFill>
+              <a:srgbClr val="A9AEB5"/>
+            </a:solidFill>
+          </a:ln>
+        </p:spPr>
+        <p:style>
+          <a:lnRef idx="2">
+            <a:schemeClr val="accent1"/>
+          </a:lnRef>
+          <a:fillRef idx="0">
+            <a:schemeClr val="accent1"/>
+          </a:fillRef>
+          <a:effectRef idx="1">
+            <a:schemeClr val="accent1"/>
+          </a:effectRef>
+          <a:fontRef idx="minor">
+            <a:schemeClr val="tx1"/>
+          </a:fontRef>
+        </p:style>
+      </p:cxnSp>
+      <p:cxnSp>
+        <p:nvCxnSpPr>
+          <p:cNvPr id="5" name="Connector 4"/>
+          <p:cNvCxnSpPr/>
+          <p:nvPr/>
+        </p:nvCxnSpPr>
+        <p:spPr>
+          <a:xfrm flipH="1">
+            <a:off x="11953951" y="0"/>
+            <a:ext cx="237744" cy="0"/>
+          </a:xfrm>
+          <a:prstGeom prst="bentConnector3">
+            <a:avLst/>
+          </a:prstGeom>
+          <a:ln w="15875">
+            <a:solidFill>
+              <a:srgbClr val="A9AEB5"/>
+            </a:solidFill>
+          </a:ln>
+        </p:spPr>
+        <p:style>
+          <a:lnRef idx="2">
+            <a:schemeClr val="accent1"/>
+          </a:lnRef>
+          <a:fillRef idx="0">
+            <a:schemeClr val="accent1"/>
+          </a:fillRef>
+          <a:effectRef idx="1">
+            <a:schemeClr val="accent1"/>
+          </a:effectRef>
+          <a:fontRef idx="minor">
+            <a:schemeClr val="tx1"/>
+          </a:fontRef>
+        </p:style>
+      </p:cxnSp>
+      <p:cxnSp>
+        <p:nvCxnSpPr>
+          <p:cNvPr id="6" name="Connector 5"/>
+          <p:cNvCxnSpPr/>
+          <p:nvPr/>
+        </p:nvCxnSpPr>
+        <p:spPr>
+          <a:xfrm>
+            <a:off x="12191695" y="0"/>
+            <a:ext cx="0" cy="237744"/>
+          </a:xfrm>
+          <a:prstGeom prst="bentConnector3">
+            <a:avLst/>
+          </a:prstGeom>
+          <a:ln w="15875">
+            <a:solidFill>
+              <a:srgbClr val="A9AEB5"/>
+            </a:solidFill>
+          </a:ln>
+        </p:spPr>
+        <p:style>
+          <a:lnRef idx="2">
+            <a:schemeClr val="accent1"/>
+          </a:lnRef>
+          <a:fillRef idx="0">
+            <a:schemeClr val="accent1"/>
+          </a:fillRef>
+          <a:effectRef idx="1">
+            <a:schemeClr val="accent1"/>
+          </a:effectRef>
+          <a:fontRef idx="minor">
+            <a:schemeClr val="tx1"/>
+          </a:fontRef>
+        </p:style>
+      </p:cxnSp>
+      <p:cxnSp>
+        <p:nvCxnSpPr>
+          <p:cNvPr id="7" name="Connector 6"/>
+          <p:cNvCxnSpPr/>
+          <p:nvPr/>
+        </p:nvCxnSpPr>
+        <p:spPr>
+          <a:xfrm>
+            <a:off x="0" y="3017520"/>
+            <a:ext cx="237744" cy="0"/>
+          </a:xfrm>
+          <a:prstGeom prst="bentConnector3">
+            <a:avLst/>
+          </a:prstGeom>
+          <a:ln w="15875">
+            <a:solidFill>
+              <a:srgbClr val="A9AEB5"/>
+            </a:solidFill>
+          </a:ln>
+        </p:spPr>
+        <p:style>
+          <a:lnRef idx="2">
+            <a:schemeClr val="accent1"/>
+          </a:lnRef>
+          <a:fillRef idx="0">
+            <a:schemeClr val="accent1"/>
+          </a:fillRef>
+          <a:effectRef idx="1">
+            <a:schemeClr val="accent1"/>
+          </a:effectRef>
+          <a:fontRef idx="minor">
+            <a:schemeClr val="tx1"/>
+          </a:fontRef>
+        </p:style>
+      </p:cxnSp>
+      <p:cxnSp>
+        <p:nvCxnSpPr>
+          <p:cNvPr id="8" name="Connector 7"/>
+          <p:cNvCxnSpPr/>
+          <p:nvPr/>
+        </p:nvCxnSpPr>
+        <p:spPr>
+          <a:xfrm flipV="1">
+            <a:off x="0" y="2779776"/>
+            <a:ext cx="0" cy="237744"/>
+          </a:xfrm>
+          <a:prstGeom prst="bentConnector3">
+            <a:avLst/>
+          </a:prstGeom>
+          <a:ln w="15875">
+            <a:solidFill>
+              <a:srgbClr val="A9AEB5"/>
+            </a:solidFill>
+          </a:ln>
+        </p:spPr>
+        <p:style>
+          <a:lnRef idx="2">
+            <a:schemeClr val="accent1"/>
+          </a:lnRef>
+          <a:fillRef idx="0">
+            <a:schemeClr val="accent1"/>
+          </a:fillRef>
+          <a:effectRef idx="1">
+            <a:schemeClr val="accent1"/>
+          </a:effectRef>
+          <a:fontRef idx="minor">
+            <a:schemeClr val="tx1"/>
+          </a:fontRef>
+        </p:style>
+      </p:cxnSp>
+      <p:cxnSp>
+        <p:nvCxnSpPr>
+          <p:cNvPr id="9" name="Connector 8"/>
+          <p:cNvCxnSpPr/>
+          <p:nvPr/>
+        </p:nvCxnSpPr>
+        <p:spPr>
+          <a:xfrm flipH="1">
+            <a:off x="11953951" y="3017520"/>
+            <a:ext cx="237744" cy="0"/>
+          </a:xfrm>
+          <a:prstGeom prst="bentConnector3">
+            <a:avLst/>
+          </a:prstGeom>
+          <a:ln w="15875">
+            <a:solidFill>
+              <a:srgbClr val="A9AEB5"/>
+            </a:solidFill>
+          </a:ln>
+        </p:spPr>
+        <p:style>
+          <a:lnRef idx="2">
+            <a:schemeClr val="accent1"/>
+          </a:lnRef>
+          <a:fillRef idx="0">
+            <a:schemeClr val="accent1"/>
+          </a:fillRef>
+          <a:effectRef idx="1">
+            <a:schemeClr val="accent1"/>
+          </a:effectRef>
+          <a:fontRef idx="minor">
+            <a:schemeClr val="tx1"/>
+          </a:fontRef>
+        </p:style>
+      </p:cxnSp>
+      <p:cxnSp>
+        <p:nvCxnSpPr>
+          <p:cNvPr id="10" name="Connector 9"/>
+          <p:cNvCxnSpPr/>
+          <p:nvPr/>
+        </p:nvCxnSpPr>
+        <p:spPr>
+          <a:xfrm flipV="1">
+            <a:off x="12191695" y="2779776"/>
+            <a:ext cx="0" cy="237744"/>
+          </a:xfrm>
+          <a:prstGeom prst="bentConnector3">
+            <a:avLst/>
+          </a:prstGeom>
+          <a:ln w="15875">
+            <a:solidFill>
+              <a:srgbClr val="A9AEB5"/>
+            </a:solidFill>
+          </a:ln>
+        </p:spPr>
+        <p:style>
+          <a:lnRef idx="2">
+            <a:schemeClr val="accent1"/>
+          </a:lnRef>
+          <a:fillRef idx="0">
+            <a:schemeClr val="accent1"/>
+          </a:fillRef>
+          <a:effectRef idx="1">
+            <a:schemeClr val="accent1"/>
+          </a:effectRef>
+          <a:fontRef idx="minor">
+            <a:schemeClr val="tx1"/>
+          </a:fontRef>
+        </p:style>
+      </p:cxnSp>
+      <p:sp>
+        <p:nvSpPr>
+          <p:cNvPr id="11" name="TextBox 10"/>
+          <p:cNvSpPr txBox="1"/>
+          <p:nvPr/>
+        </p:nvSpPr>
+        <p:spPr>
+          <a:xfrm>
+            <a:off x="0" y="1307592"/>
+            <a:ext cx="12191695" cy="365760"/>
+          </a:xfrm>
+          <a:prstGeom prst="rect">
+            <a:avLst/>
+          </a:prstGeom>
+          <a:noFill/>
+        </p:spPr>
+        <p:txBody>
+          <a:bodyPr wrap="square" anchor="t" lIns="0" rIns="0" tIns="0" bIns="0">
+            <a:spAutoFit/>
+          </a:bodyPr>
+          <a:lstStyle/>
+          <a:p>
+            <a:pPr algn="ctr"/>
+            <a:r>
+              <a:rPr sz="1050" b="1" i="0" spc="200">
+                <a:solidFill>
+                  <a:srgbClr val="868B94"/>
+                </a:solidFill>
+                <a:latin typeface="Arial"/>
+              </a:rPr>
+              <a:t>CLOSING HERO IMAGE</a:t>
+            </a:r>
+          </a:p>
+        </p:txBody>
+      </p:sp>
+      <p:sp>
+        <p:nvSpPr>
+          <p:cNvPr id="12" name="TextBox 11"/>
+          <p:cNvSpPr txBox="1"/>
+          <p:nvPr/>
+        </p:nvSpPr>
+        <p:spPr>
+          <a:xfrm>
+            <a:off x="0" y="1581912"/>
+            <a:ext cx="12191695" cy="274320"/>
+          </a:xfrm>
+          <a:prstGeom prst="rect">
+            <a:avLst/>
+          </a:prstGeom>
+          <a:noFill/>
+        </p:spPr>
+        <p:txBody>
+          <a:bodyPr wrap="square" anchor="t" lIns="0" rIns="0" tIns="0" bIns="0">
+            <a:spAutoFit/>
+          </a:bodyPr>
+          <a:lstStyle/>
+          <a:p>
+            <a:pPr algn="ctr"/>
+            <a:r>
+              <a:rPr sz="800" b="0" i="0" spc="80">
+                <a:solidFill>
+                  <a:srgbClr val="C8CCD2"/>
+                </a:solidFill>
+                <a:latin typeface="Arial"/>
+              </a:rPr>
+              <a:t>Replace · aspirational closing visual</a:t>
+            </a:r>
+          </a:p>
+        </p:txBody>
+      </p:sp>
+      <p:sp>
+        <p:nvSpPr>
+          <p:cNvPr id="13" name="TextBox 12"/>
+          <p:cNvSpPr txBox="1"/>
+          <p:nvPr/>
+        </p:nvSpPr>
+        <p:spPr>
+          <a:xfrm>
+            <a:off x="685800" y="3291840"/>
+            <a:ext cx="7315200" cy="274320"/>
+          </a:xfrm>
+          <a:prstGeom prst="rect">
+            <a:avLst/>
+          </a:prstGeom>
+          <a:noFill/>
+        </p:spPr>
+        <p:txBody>
+          <a:bodyPr wrap="square" anchor="t" lIns="0" rIns="0" tIns="0" bIns="0">
+            <a:spAutoFit/>
+          </a:bodyPr>
+          <a:lstStyle/>
+          <a:p>
+            <a:pPr algn="l"/>
+            <a:r>
+              <a:rPr sz="1100" b="1" i="0" spc="300">
+                <a:solidFill>
+                  <a:srgbClr val="1B2A4A"/>
+                </a:solidFill>
+                <a:latin typeface="Arial"/>
+              </a:rPr>
+              <a:t>IN SUMMARY</a:t>
+            </a:r>
+          </a:p>
+        </p:txBody>
+      </p:sp>
+      <p:sp>
+        <p:nvSpPr>
+          <p:cNvPr id="14" name="TextBox 13"/>
+          <p:cNvSpPr txBox="1"/>
+          <p:nvPr/>
+        </p:nvSpPr>
+        <p:spPr>
+          <a:xfrm>
+            <a:off x="658368" y="3611880"/>
+            <a:ext cx="10058400" cy="731520"/>
+          </a:xfrm>
+          <a:prstGeom prst="rect">
+            <a:avLst/>
+          </a:prstGeom>
+          <a:noFill/>
+        </p:spPr>
+        <p:txBody>
+          <a:bodyPr wrap="square" anchor="t" lIns="0" rIns="0" tIns="0" bIns="0">
+            <a:spAutoFit/>
+          </a:bodyPr>
+          <a:lstStyle/>
+          <a:p>
+            <a:pPr algn="l"/>
+            <a:r>
+              <a:rPr sz="3000" b="1" i="0">
+                <a:solidFill>
+                  <a:srgbClr val="1A1A1C"/>
+                </a:solidFill>
+                <a:latin typeface="Arial"/>
+              </a:rPr>
+              <a:t>Executive Takeaways</a:t>
+            </a:r>
+          </a:p>
+        </p:txBody>
+      </p:sp>
+      <p:sp>
+        <p:nvSpPr>
+          <p:cNvPr id="15" name="TextBox 14"/>
+          <p:cNvSpPr txBox="1"/>
+          <p:nvPr/>
+        </p:nvSpPr>
+        <p:spPr>
+          <a:xfrm>
+            <a:off x="685800" y="4572000"/>
+            <a:ext cx="3361944" cy="640080"/>
+          </a:xfrm>
+          <a:prstGeom prst="rect">
+            <a:avLst/>
+          </a:prstGeom>
+          <a:noFill/>
+        </p:spPr>
+        <p:txBody>
+          <a:bodyPr wrap="square" anchor="t" lIns="0" rIns="0" tIns="0" bIns="0">
+            <a:spAutoFit/>
+          </a:bodyPr>
+          <a:lstStyle/>
+          <a:p>
+            <a:pPr algn="l"/>
+            <a:r>
+              <a:rPr sz="3000" b="1" i="0">
+                <a:solidFill>
+                  <a:srgbClr val="A9AEB5"/>
+                </a:solidFill>
+                <a:latin typeface="Arial"/>
+              </a:rPr>
+              <a:t>01</a:t>
+            </a:r>
+          </a:p>
+        </p:txBody>
+      </p:sp>
+      <p:cxnSp>
+        <p:nvCxnSpPr>
+          <p:cNvPr id="16" name="Connector 15"/>
+          <p:cNvCxnSpPr/>
+          <p:nvPr/>
+        </p:nvCxnSpPr>
+        <p:spPr>
+          <a:xfrm>
+            <a:off x="685800" y="5212080"/>
+            <a:ext cx="3361944" cy="0"/>
+          </a:xfrm>
+          <a:prstGeom prst="bentConnector3">
+            <a:avLst/>
+          </a:prstGeom>
+          <a:ln w="12700">
+            <a:solidFill>
+              <a:srgbClr val="C8CCD2"/>
+            </a:solidFill>
+          </a:ln>
+        </p:spPr>
+        <p:style>
+          <a:lnRef idx="2">
+            <a:schemeClr val="accent1"/>
+          </a:lnRef>
+          <a:fillRef idx="0">
+            <a:schemeClr val="accent1"/>
+          </a:fillRef>
+          <a:effectRef idx="1">
+            <a:schemeClr val="accent1"/>
+          </a:effectRef>
+          <a:fontRef idx="minor">
+            <a:schemeClr val="tx1"/>
+          </a:fontRef>
+        </p:style>
+      </p:cxnSp>
+      <p:sp>
+        <p:nvSpPr>
+          <p:cNvPr id="17" name="TextBox 16"/>
+          <p:cNvSpPr txBox="1"/>
+          <p:nvPr/>
+        </p:nvSpPr>
+        <p:spPr>
+          <a:xfrm>
+            <a:off x="685800" y="5349240"/>
+            <a:ext cx="3361944" cy="1097280"/>
+          </a:xfrm>
+          <a:prstGeom prst="rect">
+            <a:avLst/>
+          </a:prstGeom>
+          <a:noFill/>
+        </p:spPr>
+        <p:txBody>
+          <a:bodyPr wrap="square" anchor="t" lIns="0" rIns="0" tIns="0" bIns="0">
+            <a:spAutoFit/>
+          </a:bodyPr>
+          <a:lstStyle/>
+          <a:p>
+            <a:pPr algn="l">
+              <a:spcAft>
+                <a:spcPts val="500"/>
+              </a:spcAft>
+            </a:pPr>
+            <a:r>
+              <a:rPr sz="1600" b="1" i="0">
+                <a:solidFill>
+                  <a:srgbClr val="1A1A1C"/>
+                </a:solidFill>
+                <a:latin typeface="Arial"/>
+              </a:rPr>
+              <a:t>Designed Around People</a:t>
+            </a:r>
+          </a:p>
+          <a:p>
+            <a:pPr algn="l">
+              <a:lnSpc>
+                <a:spcPct val="125000"/>
+              </a:lnSpc>
+            </a:pPr>
+            <a:r>
+              <a:rPr sz="1150" b="0" i="0">
+                <a:solidFill>
+                  <a:srgbClr val="4A4E57"/>
+                </a:solidFill>
+                <a:latin typeface="Arial"/>
+              </a:rPr>
+              <a:t>Luxury is the removal of everyday friction.</a:t>
+            </a:r>
+          </a:p>
+        </p:txBody>
+      </p:sp>
+      <p:sp>
+        <p:nvSpPr>
+          <p:cNvPr id="18" name="TextBox 17"/>
+          <p:cNvSpPr txBox="1"/>
+          <p:nvPr/>
+        </p:nvSpPr>
+        <p:spPr>
+          <a:xfrm>
+            <a:off x="4413504" y="4572000"/>
+            <a:ext cx="3361944" cy="640080"/>
+          </a:xfrm>
+          <a:prstGeom prst="rect">
+            <a:avLst/>
+          </a:prstGeom>
+          <a:noFill/>
+        </p:spPr>
+        <p:txBody>
+          <a:bodyPr wrap="square" anchor="t" lIns="0" rIns="0" tIns="0" bIns="0">
+            <a:spAutoFit/>
+          </a:bodyPr>
+          <a:lstStyle/>
+          <a:p>
+            <a:pPr algn="l"/>
+            <a:r>
+              <a:rPr sz="3000" b="1" i="0">
+                <a:solidFill>
+                  <a:srgbClr val="A9AEB5"/>
+                </a:solidFill>
+                <a:latin typeface="Arial"/>
+              </a:rPr>
+              <a:t>02</a:t>
+            </a:r>
+          </a:p>
+        </p:txBody>
+      </p:sp>
+      <p:cxnSp>
+        <p:nvCxnSpPr>
+          <p:cNvPr id="19" name="Connector 18"/>
+          <p:cNvCxnSpPr/>
+          <p:nvPr/>
+        </p:nvCxnSpPr>
+        <p:spPr>
+          <a:xfrm>
+            <a:off x="4413504" y="5212080"/>
+            <a:ext cx="3361944" cy="0"/>
+          </a:xfrm>
+          <a:prstGeom prst="bentConnector3">
+            <a:avLst/>
+          </a:prstGeom>
+          <a:ln w="12700">
+            <a:solidFill>
+              <a:srgbClr val="C8CCD2"/>
+            </a:solidFill>
+          </a:ln>
+        </p:spPr>
+        <p:style>
+          <a:lnRef idx="2">
+            <a:schemeClr val="accent1"/>
+          </a:lnRef>
+          <a:fillRef idx="0">
+            <a:schemeClr val="accent1"/>
+          </a:fillRef>
+          <a:effectRef idx="1">
+            <a:schemeClr val="accent1"/>
+          </a:effectRef>
+          <a:fontRef idx="minor">
+            <a:schemeClr val="tx1"/>
+          </a:fontRef>
+        </p:style>
+      </p:cxnSp>
+      <p:sp>
+        <p:nvSpPr>
+          <p:cNvPr id="20" name="TextBox 19"/>
+          <p:cNvSpPr txBox="1"/>
+          <p:nvPr/>
+        </p:nvSpPr>
+        <p:spPr>
+          <a:xfrm>
+            <a:off x="4413504" y="5349240"/>
+            <a:ext cx="3361944" cy="1097280"/>
+          </a:xfrm>
+          <a:prstGeom prst="rect">
+            <a:avLst/>
+          </a:prstGeom>
+          <a:noFill/>
+        </p:spPr>
+        <p:txBody>
+          <a:bodyPr wrap="square" anchor="t" lIns="0" rIns="0" tIns="0" bIns="0">
+            <a:spAutoFit/>
+          </a:bodyPr>
+          <a:lstStyle/>
+          <a:p>
+            <a:pPr algn="l">
+              <a:spcAft>
+                <a:spcPts val="500"/>
+              </a:spcAft>
+            </a:pPr>
+            <a:r>
+              <a:rPr sz="1600" b="1" i="0">
+                <a:solidFill>
+                  <a:srgbClr val="1A1A1C"/>
+                </a:solidFill>
+                <a:latin typeface="Arial"/>
+              </a:rPr>
+              <a:t>Distinct Within Stellantis</a:t>
+            </a:r>
+          </a:p>
+          <a:p>
+            <a:pPr algn="l">
+              <a:lnSpc>
+                <a:spcPct val="125000"/>
+              </a:lnSpc>
+            </a:pPr>
+            <a:r>
+              <a:rPr sz="1150" b="0" i="0">
+                <a:solidFill>
+                  <a:srgbClr val="4A4E57"/>
+                </a:solidFill>
+                <a:latin typeface="Arial"/>
+              </a:rPr>
+              <a:t>Modern American design — human and confident.</a:t>
+            </a:r>
+          </a:p>
+        </p:txBody>
+      </p:sp>
+      <p:sp>
+        <p:nvSpPr>
+          <p:cNvPr id="21" name="TextBox 20"/>
+          <p:cNvSpPr txBox="1"/>
+          <p:nvPr/>
+        </p:nvSpPr>
+        <p:spPr>
+          <a:xfrm>
+            <a:off x="8141208" y="4572000"/>
+            <a:ext cx="3361944" cy="640080"/>
+          </a:xfrm>
+          <a:prstGeom prst="rect">
+            <a:avLst/>
+          </a:prstGeom>
+          <a:noFill/>
+        </p:spPr>
+        <p:txBody>
+          <a:bodyPr wrap="square" anchor="t" lIns="0" rIns="0" tIns="0" bIns="0">
+            <a:spAutoFit/>
+          </a:bodyPr>
+          <a:lstStyle/>
+          <a:p>
+            <a:pPr algn="l"/>
+            <a:r>
+              <a:rPr sz="3000" b="1" i="0">
+                <a:solidFill>
+                  <a:srgbClr val="A9AEB5"/>
+                </a:solidFill>
+                <a:latin typeface="Arial"/>
+              </a:rPr>
+              <a:t>03</a:t>
+            </a:r>
+          </a:p>
+        </p:txBody>
+      </p:sp>
+      <p:cxnSp>
+        <p:nvCxnSpPr>
+          <p:cNvPr id="22" name="Connector 21"/>
+          <p:cNvCxnSpPr/>
+          <p:nvPr/>
+        </p:nvCxnSpPr>
+        <p:spPr>
+          <a:xfrm>
+            <a:off x="8141208" y="5212080"/>
+            <a:ext cx="3361944" cy="0"/>
+          </a:xfrm>
+          <a:prstGeom prst="bentConnector3">
+            <a:avLst/>
+          </a:prstGeom>
+          <a:ln w="12700">
+            <a:solidFill>
+              <a:srgbClr val="C8CCD2"/>
+            </a:solidFill>
+          </a:ln>
+        </p:spPr>
+        <p:style>
+          <a:lnRef idx="2">
+            <a:schemeClr val="accent1"/>
+          </a:lnRef>
+          <a:fillRef idx="0">
+            <a:schemeClr val="accent1"/>
+          </a:fillRef>
+          <a:effectRef idx="1">
+            <a:schemeClr val="accent1"/>
+          </a:effectRef>
+          <a:fontRef idx="minor">
+            <a:schemeClr val="tx1"/>
+          </a:fontRef>
+        </p:style>
+      </p:cxnSp>
+      <p:sp>
+        <p:nvSpPr>
+          <p:cNvPr id="23" name="TextBox 22"/>
+          <p:cNvSpPr txBox="1"/>
+          <p:nvPr/>
+        </p:nvSpPr>
+        <p:spPr>
+          <a:xfrm>
+            <a:off x="8141208" y="5349240"/>
+            <a:ext cx="3361944" cy="1097280"/>
+          </a:xfrm>
+          <a:prstGeom prst="rect">
+            <a:avLst/>
+          </a:prstGeom>
+          <a:noFill/>
+        </p:spPr>
+        <p:txBody>
+          <a:bodyPr wrap="square" anchor="t" lIns="0" rIns="0" tIns="0" bIns="0">
+            <a:spAutoFit/>
+          </a:bodyPr>
+          <a:lstStyle/>
+          <a:p>
+            <a:pPr algn="l">
+              <a:spcAft>
+                <a:spcPts val="500"/>
+              </a:spcAft>
+            </a:pPr>
+            <a:r>
+              <a:rPr sz="1600" b="1" i="0">
+                <a:solidFill>
+                  <a:srgbClr val="1A1A1C"/>
+                </a:solidFill>
+                <a:latin typeface="Arial"/>
+              </a:rPr>
+              <a:t>Ready to Lead</a:t>
+            </a:r>
+          </a:p>
+          <a:p>
+            <a:pPr algn="l">
+              <a:lnSpc>
+                <a:spcPct val="125000"/>
+              </a:lnSpc>
+            </a:pPr>
+            <a:r>
+              <a:rPr sz="1150" b="0" i="0">
+                <a:solidFill>
+                  <a:srgbClr val="4A4E57"/>
+                </a:solidFill>
+                <a:latin typeface="Arial"/>
+              </a:rPr>
+              <a:t>A clear, design-led vision for Chrysler's future.</a:t>
+            </a:r>
+          </a:p>
+        </p:txBody>
+      </p:sp>
+      <p:sp>
+        <p:nvSpPr>
+          <p:cNvPr id="24" name="TextBox 23"/>
+          <p:cNvSpPr txBox="1"/>
+          <p:nvPr/>
+        </p:nvSpPr>
+        <p:spPr>
+          <a:xfrm>
+            <a:off x="640080" y="6437376"/>
+            <a:ext cx="7315200" cy="274320"/>
+          </a:xfrm>
+          <a:prstGeom prst="rect">
+            <a:avLst/>
+          </a:prstGeom>
+          <a:noFill/>
+        </p:spPr>
+        <p:txBody>
+          <a:bodyPr wrap="square" anchor="t" lIns="0" rIns="0" tIns="0" bIns="0">
+            <a:spAutoFit/>
+          </a:bodyPr>
+          <a:lstStyle/>
+          <a:p>
+            <a:pPr algn="l"/>
+            <a:r>
+              <a:rPr sz="800" b="0" i="0" spc="150">
+                <a:solidFill>
+                  <a:srgbClr val="868B94"/>
+                </a:solidFill>
+                <a:latin typeface="Arial"/>
+              </a:rPr>
+              <a:t>CHRYSLER  ·  BRAND DESIGN VISION</a:t>
+            </a:r>
+          </a:p>
+        </p:txBody>
+      </p:sp>
+      <p:sp>
+        <p:nvSpPr>
+          <p:cNvPr id="25" name="TextBox 24"/>
+          <p:cNvSpPr txBox="1"/>
+          <p:nvPr/>
+        </p:nvSpPr>
+        <p:spPr>
+          <a:xfrm>
+            <a:off x="10607040" y="6437376"/>
+            <a:ext cx="914400" cy="274320"/>
+          </a:xfrm>
+          <a:prstGeom prst="rect">
+            <a:avLst/>
+          </a:prstGeom>
+          <a:noFill/>
+        </p:spPr>
+        <p:txBody>
+          <a:bodyPr wrap="square" anchor="t" lIns="0" rIns="0" tIns="0" bIns="0">
+            <a:spAutoFit/>
+          </a:bodyPr>
+          <a:lstStyle/>
+          <a:p>
+            <a:pPr algn="r"/>
+            <a:r>
+              <a:rPr sz="800" b="0" i="0" spc="150">
+                <a:solidFill>
+                  <a:srgbClr val="868B94"/>
+                </a:solidFill>
+                <a:latin typeface="Arial"/>
+              </a:rPr>
+              <a:t>20</a:t>
+            </a:r>
+          </a:p>
+        </p:txBody>
+      </p:sp>
+      <p:sp>
+        <p:nvSpPr>
+          <p:cNvPr id="26" name="TextBox 25"/>
+          <p:cNvSpPr txBox="1"/>
+          <p:nvPr/>
+        </p:nvSpPr>
+        <p:spPr>
+          <a:xfrm>
+            <a:off x="10424160" y="310896"/>
+            <a:ext cx="1097280" cy="274320"/>
+          </a:xfrm>
+          <a:prstGeom prst="rect">
+            <a:avLst/>
+          </a:prstGeom>
+          <a:noFill/>
+        </p:spPr>
+        <p:txBody>
+          <a:bodyPr wrap="square" anchor="t" lIns="0" rIns="0" tIns="0" bIns="0">
+            <a:spAutoFit/>
+          </a:bodyPr>
+          <a:lstStyle/>
+          <a:p>
+            <a:pPr algn="r"/>
+            <a:r>
+              <a:rPr sz="750" b="0" i="0" spc="200">
+                <a:solidFill>
+                  <a:srgbClr val="C8CCD2"/>
+                </a:solidFill>
+                <a:latin typeface="Arial"/>
+              </a:rPr>
+              <a:t>CONFIDENTIAL</a:t>
+            </a:r>
+          </a:p>
+        </p:txBody>
+      </p:sp>
+    </p:spTree>
+  </p:cSld>
+  <p:clrMapOvr>
+    <a:masterClrMapping/>
+  </p:clrMapOvr>
+</p:sld>
+</file>
+
 <file path=ppt/slides/slide3.xml><?xml version="1.0" encoding="utf-8"?>
 <p:sld xmlns:a="http://schemas.openxmlformats.org/drawingml/2006/main" xmlns:p="http://schemas.openxmlformats.org/presentationml/2006/main" xmlns:r="http://schemas.openxmlformats.org/officeDocument/2006/relationships">
   <p:cSld>
@@ -22193,7 +24280,7 @@
                 </a:solidFill>
                 <a:latin typeface="Arial"/>
               </a:rPr>
-              <a:t>THE EMOTIONAL HALO</a:t>
+              <a:t>THE MODERN FAMILY VEHICLE</a:t>
             </a:r>
           </a:p>
         </p:txBody>
@@ -22228,7 +24315,7 @@
                 </a:solidFill>
                 <a:latin typeface="Arial"/>
               </a:rPr>
-              <a:t>300 Concept</a:t>
+              <a:t>Pacifica</a:t>
             </a:r>
           </a:p>
         </p:txBody>
@@ -22267,7 +24354,7 @@
                 </a:solidFill>
                 <a:latin typeface="Arial"/>
               </a:rPr>
-              <a:t>The flagship expression of Chrysler design — composed, commanding, never excessive.</a:t>
+              <a:t>The evolution of the modern family vehicle — flexible, sophisticated, and designed around people.</a:t>
             </a:r>
           </a:p>
         </p:txBody>
@@ -22394,7 +24481,7 @@
                 </a:solidFill>
                 <a:latin typeface="Arial"/>
               </a:rPr>
-              <a:t>Commanding Presence</a:t>
+              <a:t>Flexible by Design</a:t>
             </a:r>
           </a:p>
           <a:p>
@@ -22406,7 +24493,7 @@
                 </a:solidFill>
                 <a:latin typeface="Arial"/>
               </a:rPr>
-              <a:t>Architectural proportion, balanced and tailored.</a:t>
+              <a:t>Space that adapts to every journey.</a:t>
             </a:r>
           </a:p>
         </p:txBody>
@@ -22533,7 +24620,7 @@
                 </a:solidFill>
                 <a:latin typeface="Arial"/>
               </a:rPr>
-              <a:t>Quiet Power</a:t>
+              <a:t>Sophisticated Comfort</a:t>
             </a:r>
           </a:p>
           <a:p>
@@ -22545,7 +24632,7 @@
                 </a:solidFill>
                 <a:latin typeface="Arial"/>
               </a:rPr>
-              <a:t>Confidence expressed through restraint.</a:t>
+              <a:t>Refined, calm, effortlessly livable.</a:t>
             </a:r>
           </a:p>
         </p:txBody>
@@ -22672,7 +24759,7 @@
                 </a:solidFill>
                 <a:latin typeface="Arial"/>
               </a:rPr>
-              <a:t>Timeless Craftsmanship</a:t>
+              <a:t>Technology Around People</a:t>
             </a:r>
           </a:p>
           <a:p>
@@ -22684,7 +24771,7 @@
                 </a:solidFill>
                 <a:latin typeface="Arial"/>
               </a:rPr>
-              <a:t>Authentic American design, refined.</a:t>
+              <a:t>Intelligence that serves the family.</a:t>
             </a:r>
           </a:p>
         </p:txBody>
@@ -23376,7 +25463,7 @@
                 </a:solidFill>
                 <a:latin typeface="Arial"/>
               </a:rPr>
-              <a:t>300 CONCEPT</a:t>
+              <a:t>PACIFICA</a:t>
             </a:r>
           </a:p>
         </p:txBody>
@@ -23411,7 +25498,7 @@
                 </a:solidFill>
                 <a:latin typeface="Arial"/>
               </a:rPr>
-              <a:t>300 Interior</a:t>
+              <a:t>Pacifica Interior</a:t>
             </a:r>
           </a:p>
         </p:txBody>
@@ -23972,7 +26059,7 @@
                 </a:solidFill>
                 <a:latin typeface="Arial"/>
               </a:rPr>
-              <a:t>An interior sanctuary — crafted, composed, human in scale.</a:t>
+              <a:t>A family sanctuary — flexible, comfortable, designed around people.</a:t>
             </a:r>
           </a:p>
         </p:txBody>
@@ -24138,7 +26225,7 @@
                 </a:solidFill>
                 <a:latin typeface="Arial"/>
               </a:rPr>
-              <a:t>THE PHILOSOPHY</a:t>
+              <a:t>THE EMOTIONAL HALO</a:t>
             </a:r>
           </a:p>
         </p:txBody>
@@ -24173,7 +26260,7 @@
                 </a:solidFill>
                 <a:latin typeface="Arial"/>
               </a:rPr>
-              <a:t>Airflow</a:t>
+              <a:t>300 Concept</a:t>
             </a:r>
           </a:p>
         </p:txBody>
@@ -24212,7 +26299,7 @@
                 </a:solidFill>
                 <a:latin typeface="Arial"/>
               </a:rPr>
-              <a:t>Airflow introduces Chrysler's philosophy: innovative practicality, designed around people.</a:t>
+              <a:t>The flagship expression of Chrysler design — composed, commanding, never excessive.</a:t>
             </a:r>
           </a:p>
         </p:txBody>
@@ -24339,7 +26426,7 @@
                 </a:solidFill>
                 <a:latin typeface="Arial"/>
               </a:rPr>
-              <a:t>Spacious &amp; Adaptive</a:t>
+              <a:t>Commanding Presence</a:t>
             </a:r>
           </a:p>
           <a:p>
@@ -24351,7 +26438,7 @@
                 </a:solidFill>
                 <a:latin typeface="Arial"/>
               </a:rPr>
-              <a:t>Versatile space for everyday life.</a:t>
+              <a:t>Architectural proportion, balanced and tailored.</a:t>
             </a:r>
           </a:p>
         </p:txBody>
@@ -24478,7 +26565,7 @@
                 </a:solidFill>
                 <a:latin typeface="Arial"/>
               </a:rPr>
-              <a:t>Technology With Purpose</a:t>
+              <a:t>Quiet Power</a:t>
             </a:r>
           </a:p>
           <a:p>
@@ -24490,7 +26577,7 @@
                 </a:solidFill>
                 <a:latin typeface="Arial"/>
               </a:rPr>
-              <a:t>Intelligence that serves, then disappears.</a:t>
+              <a:t>Confidence expressed through restraint.</a:t>
             </a:r>
           </a:p>
         </p:txBody>
@@ -24617,7 +26704,7 @@
                 </a:solidFill>
                 <a:latin typeface="Arial"/>
               </a:rPr>
-              <a:t>Confident Simplicity</a:t>
+              <a:t>Timeless Craftsmanship</a:t>
             </a:r>
           </a:p>
           <a:p>
@@ -24629,7 +26716,7 @@
                 </a:solidFill>
                 <a:latin typeface="Arial"/>
               </a:rPr>
-              <a:t>Clean, logical, human-centered form.</a:t>
+              <a:t>Authentic American design, refined.</a:t>
             </a:r>
           </a:p>
         </p:txBody>

--- a/Chrysler_Brand_Design_Vision.pptx
+++ b/Chrysler_Brand_Design_Vision.pptx
@@ -661,7 +661,7 @@
           <a:lstStyle/>
           <a:p>
             <a:r>
-              <a:t>SPEAKER NOTES (placeholder) — Airflow: lead with emotion, then the three strategic bullets. Let the exterior image dominate.</a:t>
+              <a:t>SPEAKER NOTES (placeholder) — Airflow: let the full-width exterior image dominate, supported by one summary line and three strategic bullets.</a:t>
             </a:r>
           </a:p>
         </p:txBody>
@@ -801,7 +801,7 @@
           <a:lstStyle/>
           <a:p>
             <a:r>
-              <a:t>SPEAKER NOTES (placeholder) — Arrow: lead with emotion, then the three strategic bullets. Let the exterior image dominate.</a:t>
+              <a:t>SPEAKER NOTES (placeholder) — Arrow: let the full-width exterior image dominate, supported by one summary line and three strategic bullets.</a:t>
             </a:r>
           </a:p>
         </p:txBody>
@@ -941,7 +941,7 @@
           <a:lstStyle/>
           <a:p>
             <a:r>
-              <a:t>SPEAKER NOTES (placeholder) — Arrow Cross: lead with emotion, then the three strategic bullets. Let the exterior image dominate.</a:t>
+              <a:t>SPEAKER NOTES (placeholder) — Arrow Cross: let the full-width exterior image dominate, supported by one summary line and three strategic bullets.</a:t>
             </a:r>
           </a:p>
         </p:txBody>
@@ -1711,7 +1711,7 @@
           <a:lstStyle/>
           <a:p>
             <a:r>
-              <a:t>SPEAKER NOTES (placeholder) — Pacifica: lead with emotion, then the three strategic bullets. Let the exterior image dominate.</a:t>
+              <a:t>SPEAKER NOTES (placeholder) — Pacifica: let the full-width exterior image dominate, supported by one summary line and three strategic bullets.</a:t>
             </a:r>
           </a:p>
         </p:txBody>
@@ -1851,7 +1851,7 @@
           <a:lstStyle/>
           <a:p>
             <a:r>
-              <a:t>SPEAKER NOTES (placeholder) — 300 Concept: lead with emotion, then the three strategic bullets. Let the exterior image dominate.</a:t>
+              <a:t>SPEAKER NOTES (placeholder) — 300 Concept: let the full-width exterior image dominate, supported by one summary line and three strategic bullets.</a:t>
             </a:r>
           </a:p>
         </p:txBody>
@@ -6415,7 +6415,7 @@
         </p:nvSpPr>
         <p:spPr>
           <a:xfrm>
-            <a:off x="685800" y="640080"/>
+            <a:off x="685800" y="548640"/>
             <a:ext cx="7315200" cy="274320"/>
           </a:xfrm>
           <a:prstGeom prst="rect">
@@ -6450,8 +6450,8 @@
         </p:nvSpPr>
         <p:spPr>
           <a:xfrm>
-            <a:off x="658368" y="960120"/>
-            <a:ext cx="5486400" cy="822960"/>
+            <a:off x="658368" y="868680"/>
+            <a:ext cx="10058400" cy="640080"/>
           </a:xfrm>
           <a:prstGeom prst="rect">
             <a:avLst/>
@@ -6466,7 +6466,7 @@
           <a:p>
             <a:pPr algn="l"/>
             <a:r>
-              <a:rPr sz="3000" b="1" i="0">
+              <a:rPr sz="2600" b="1" i="0">
                 <a:solidFill>
                   <a:srgbClr val="1A1A1C"/>
                 </a:solidFill>
@@ -6485,8 +6485,8 @@
         </p:nvSpPr>
         <p:spPr>
           <a:xfrm>
-            <a:off x="685800" y="1828800"/>
-            <a:ext cx="5120640" cy="1097280"/>
+            <a:off x="685800" y="1481328"/>
+            <a:ext cx="10817352" cy="411480"/>
           </a:xfrm>
           <a:prstGeom prst="rect">
             <a:avLst/>
@@ -6501,11 +6501,11 @@
           <a:p>
             <a:pPr algn="l">
               <a:lnSpc>
-                <a:spcPct val="130000"/>
+                <a:spcPct val="120000"/>
               </a:lnSpc>
             </a:pPr>
             <a:r>
-              <a:rPr sz="1500" b="0" i="1">
+              <a:rPr sz="1300" b="0" i="1">
                 <a:solidFill>
                   <a:srgbClr val="4A4E57"/>
                 </a:solidFill>
@@ -6518,431 +6518,14 @@
       </p:sp>
       <p:sp>
         <p:nvSpPr>
-          <p:cNvPr id="5" name="Oval 4"/>
+          <p:cNvPr id="5" name="Rectangle 4"/>
           <p:cNvSpPr/>
           <p:nvPr/>
         </p:nvSpPr>
         <p:spPr>
           <a:xfrm>
-            <a:off x="713232" y="3200400"/>
-            <a:ext cx="457200" cy="457200"/>
-          </a:xfrm>
-          <a:prstGeom prst="ellipse">
-            <a:avLst/>
-          </a:prstGeom>
-          <a:noFill/>
-          <a:ln w="15875">
-            <a:solidFill>
-              <a:srgbClr val="1B2A4A"/>
-            </a:solidFill>
-          </a:ln>
-          <a:effectLst/>
-        </p:spPr>
-        <p:style>
-          <a:lnRef idx="1">
-            <a:schemeClr val="accent1"/>
-          </a:lnRef>
-          <a:fillRef idx="3">
-            <a:schemeClr val="accent1"/>
-          </a:fillRef>
-          <a:effectRef idx="2">
-            <a:schemeClr val="accent1"/>
-          </a:effectRef>
-          <a:fontRef idx="minor">
-            <a:schemeClr val="lt1"/>
-          </a:fontRef>
-        </p:style>
-        <p:txBody>
-          <a:bodyPr rtlCol="0" anchor="ctr"/>
-          <a:lstStyle/>
-          <a:p>
-            <a:pPr algn="ctr"/>
-          </a:p>
-        </p:txBody>
-      </p:sp>
-      <p:sp>
-        <p:nvSpPr>
-          <p:cNvPr id="6" name="Oval 5"/>
-          <p:cNvSpPr/>
-          <p:nvPr/>
-        </p:nvSpPr>
-        <p:spPr>
-          <a:xfrm>
-            <a:off x="859536" y="3346704"/>
-            <a:ext cx="164592" cy="164592"/>
-          </a:xfrm>
-          <a:prstGeom prst="ellipse">
-            <a:avLst/>
-          </a:prstGeom>
-          <a:solidFill>
-            <a:srgbClr val="1B2A4A"/>
-          </a:solidFill>
-          <a:ln>
-            <a:noFill/>
-          </a:ln>
-          <a:effectLst/>
-        </p:spPr>
-        <p:style>
-          <a:lnRef idx="1">
-            <a:schemeClr val="accent1"/>
-          </a:lnRef>
-          <a:fillRef idx="3">
-            <a:schemeClr val="accent1"/>
-          </a:fillRef>
-          <a:effectRef idx="2">
-            <a:schemeClr val="accent1"/>
-          </a:effectRef>
-          <a:fontRef idx="minor">
-            <a:schemeClr val="lt1"/>
-          </a:fontRef>
-        </p:style>
-        <p:txBody>
-          <a:bodyPr rtlCol="0" anchor="ctr"/>
-          <a:lstStyle/>
-          <a:p>
-            <a:pPr algn="ctr"/>
-          </a:p>
-        </p:txBody>
-      </p:sp>
-      <p:sp>
-        <p:nvSpPr>
-          <p:cNvPr id="7" name="TextBox 6"/>
-          <p:cNvSpPr txBox="1"/>
-          <p:nvPr/>
-        </p:nvSpPr>
-        <p:spPr>
-          <a:xfrm>
-            <a:off x="1371600" y="3182112"/>
-            <a:ext cx="4572000" cy="731520"/>
-          </a:xfrm>
-          <a:prstGeom prst="rect">
-            <a:avLst/>
-          </a:prstGeom>
-          <a:noFill/>
-        </p:spPr>
-        <p:txBody>
-          <a:bodyPr wrap="square" anchor="t" lIns="0" rIns="0" tIns="0" bIns="0">
-            <a:spAutoFit/>
-          </a:bodyPr>
-          <a:lstStyle/>
-          <a:p>
-            <a:pPr algn="l">
-              <a:spcAft>
-                <a:spcPts val="200"/>
-              </a:spcAft>
-            </a:pPr>
-            <a:r>
-              <a:rPr sz="1400" b="1" i="0">
-                <a:solidFill>
-                  <a:srgbClr val="1A1A1C"/>
-                </a:solidFill>
-                <a:latin typeface="Arial"/>
-              </a:rPr>
-              <a:t>Spacious &amp; Adaptive</a:t>
-            </a:r>
-          </a:p>
-          <a:p>
-            <a:pPr algn="l"/>
-            <a:r>
-              <a:rPr sz="1100" b="0" i="0">
-                <a:solidFill>
-                  <a:srgbClr val="868B94"/>
-                </a:solidFill>
-                <a:latin typeface="Arial"/>
-              </a:rPr>
-              <a:t>Versatile space for everyday life.</a:t>
-            </a:r>
-          </a:p>
-        </p:txBody>
-      </p:sp>
-      <p:sp>
-        <p:nvSpPr>
-          <p:cNvPr id="8" name="Oval 7"/>
-          <p:cNvSpPr/>
-          <p:nvPr/>
-        </p:nvSpPr>
-        <p:spPr>
-          <a:xfrm>
-            <a:off x="713232" y="4069080"/>
-            <a:ext cx="457200" cy="457200"/>
-          </a:xfrm>
-          <a:prstGeom prst="ellipse">
-            <a:avLst/>
-          </a:prstGeom>
-          <a:noFill/>
-          <a:ln w="15875">
-            <a:solidFill>
-              <a:srgbClr val="1B2A4A"/>
-            </a:solidFill>
-          </a:ln>
-          <a:effectLst/>
-        </p:spPr>
-        <p:style>
-          <a:lnRef idx="1">
-            <a:schemeClr val="accent1"/>
-          </a:lnRef>
-          <a:fillRef idx="3">
-            <a:schemeClr val="accent1"/>
-          </a:fillRef>
-          <a:effectRef idx="2">
-            <a:schemeClr val="accent1"/>
-          </a:effectRef>
-          <a:fontRef idx="minor">
-            <a:schemeClr val="lt1"/>
-          </a:fontRef>
-        </p:style>
-        <p:txBody>
-          <a:bodyPr rtlCol="0" anchor="ctr"/>
-          <a:lstStyle/>
-          <a:p>
-            <a:pPr algn="ctr"/>
-          </a:p>
-        </p:txBody>
-      </p:sp>
-      <p:sp>
-        <p:nvSpPr>
-          <p:cNvPr id="9" name="Oval 8"/>
-          <p:cNvSpPr/>
-          <p:nvPr/>
-        </p:nvSpPr>
-        <p:spPr>
-          <a:xfrm>
-            <a:off x="859536" y="4215384"/>
-            <a:ext cx="164592" cy="164592"/>
-          </a:xfrm>
-          <a:prstGeom prst="ellipse">
-            <a:avLst/>
-          </a:prstGeom>
-          <a:solidFill>
-            <a:srgbClr val="1B2A4A"/>
-          </a:solidFill>
-          <a:ln>
-            <a:noFill/>
-          </a:ln>
-          <a:effectLst/>
-        </p:spPr>
-        <p:style>
-          <a:lnRef idx="1">
-            <a:schemeClr val="accent1"/>
-          </a:lnRef>
-          <a:fillRef idx="3">
-            <a:schemeClr val="accent1"/>
-          </a:fillRef>
-          <a:effectRef idx="2">
-            <a:schemeClr val="accent1"/>
-          </a:effectRef>
-          <a:fontRef idx="minor">
-            <a:schemeClr val="lt1"/>
-          </a:fontRef>
-        </p:style>
-        <p:txBody>
-          <a:bodyPr rtlCol="0" anchor="ctr"/>
-          <a:lstStyle/>
-          <a:p>
-            <a:pPr algn="ctr"/>
-          </a:p>
-        </p:txBody>
-      </p:sp>
-      <p:sp>
-        <p:nvSpPr>
-          <p:cNvPr id="10" name="TextBox 9"/>
-          <p:cNvSpPr txBox="1"/>
-          <p:nvPr/>
-        </p:nvSpPr>
-        <p:spPr>
-          <a:xfrm>
-            <a:off x="1371600" y="4050792"/>
-            <a:ext cx="4572000" cy="731520"/>
-          </a:xfrm>
-          <a:prstGeom prst="rect">
-            <a:avLst/>
-          </a:prstGeom>
-          <a:noFill/>
-        </p:spPr>
-        <p:txBody>
-          <a:bodyPr wrap="square" anchor="t" lIns="0" rIns="0" tIns="0" bIns="0">
-            <a:spAutoFit/>
-          </a:bodyPr>
-          <a:lstStyle/>
-          <a:p>
-            <a:pPr algn="l">
-              <a:spcAft>
-                <a:spcPts val="200"/>
-              </a:spcAft>
-            </a:pPr>
-            <a:r>
-              <a:rPr sz="1400" b="1" i="0">
-                <a:solidFill>
-                  <a:srgbClr val="1A1A1C"/>
-                </a:solidFill>
-                <a:latin typeface="Arial"/>
-              </a:rPr>
-              <a:t>Technology With Purpose</a:t>
-            </a:r>
-          </a:p>
-          <a:p>
-            <a:pPr algn="l"/>
-            <a:r>
-              <a:rPr sz="1100" b="0" i="0">
-                <a:solidFill>
-                  <a:srgbClr val="868B94"/>
-                </a:solidFill>
-                <a:latin typeface="Arial"/>
-              </a:rPr>
-              <a:t>Intelligence that serves, then disappears.</a:t>
-            </a:r>
-          </a:p>
-        </p:txBody>
-      </p:sp>
-      <p:sp>
-        <p:nvSpPr>
-          <p:cNvPr id="11" name="Oval 10"/>
-          <p:cNvSpPr/>
-          <p:nvPr/>
-        </p:nvSpPr>
-        <p:spPr>
-          <a:xfrm>
-            <a:off x="713232" y="4937760"/>
-            <a:ext cx="457200" cy="457200"/>
-          </a:xfrm>
-          <a:prstGeom prst="ellipse">
-            <a:avLst/>
-          </a:prstGeom>
-          <a:noFill/>
-          <a:ln w="15875">
-            <a:solidFill>
-              <a:srgbClr val="1B2A4A"/>
-            </a:solidFill>
-          </a:ln>
-          <a:effectLst/>
-        </p:spPr>
-        <p:style>
-          <a:lnRef idx="1">
-            <a:schemeClr val="accent1"/>
-          </a:lnRef>
-          <a:fillRef idx="3">
-            <a:schemeClr val="accent1"/>
-          </a:fillRef>
-          <a:effectRef idx="2">
-            <a:schemeClr val="accent1"/>
-          </a:effectRef>
-          <a:fontRef idx="minor">
-            <a:schemeClr val="lt1"/>
-          </a:fontRef>
-        </p:style>
-        <p:txBody>
-          <a:bodyPr rtlCol="0" anchor="ctr"/>
-          <a:lstStyle/>
-          <a:p>
-            <a:pPr algn="ctr"/>
-          </a:p>
-        </p:txBody>
-      </p:sp>
-      <p:sp>
-        <p:nvSpPr>
-          <p:cNvPr id="12" name="Oval 11"/>
-          <p:cNvSpPr/>
-          <p:nvPr/>
-        </p:nvSpPr>
-        <p:spPr>
-          <a:xfrm>
-            <a:off x="859536" y="5084064"/>
-            <a:ext cx="164592" cy="164592"/>
-          </a:xfrm>
-          <a:prstGeom prst="ellipse">
-            <a:avLst/>
-          </a:prstGeom>
-          <a:solidFill>
-            <a:srgbClr val="1B2A4A"/>
-          </a:solidFill>
-          <a:ln>
-            <a:noFill/>
-          </a:ln>
-          <a:effectLst/>
-        </p:spPr>
-        <p:style>
-          <a:lnRef idx="1">
-            <a:schemeClr val="accent1"/>
-          </a:lnRef>
-          <a:fillRef idx="3">
-            <a:schemeClr val="accent1"/>
-          </a:fillRef>
-          <a:effectRef idx="2">
-            <a:schemeClr val="accent1"/>
-          </a:effectRef>
-          <a:fontRef idx="minor">
-            <a:schemeClr val="lt1"/>
-          </a:fontRef>
-        </p:style>
-        <p:txBody>
-          <a:bodyPr rtlCol="0" anchor="ctr"/>
-          <a:lstStyle/>
-          <a:p>
-            <a:pPr algn="ctr"/>
-          </a:p>
-        </p:txBody>
-      </p:sp>
-      <p:sp>
-        <p:nvSpPr>
-          <p:cNvPr id="13" name="TextBox 12"/>
-          <p:cNvSpPr txBox="1"/>
-          <p:nvPr/>
-        </p:nvSpPr>
-        <p:spPr>
-          <a:xfrm>
-            <a:off x="1371600" y="4919472"/>
-            <a:ext cx="4572000" cy="731520"/>
-          </a:xfrm>
-          <a:prstGeom prst="rect">
-            <a:avLst/>
-          </a:prstGeom>
-          <a:noFill/>
-        </p:spPr>
-        <p:txBody>
-          <a:bodyPr wrap="square" anchor="t" lIns="0" rIns="0" tIns="0" bIns="0">
-            <a:spAutoFit/>
-          </a:bodyPr>
-          <a:lstStyle/>
-          <a:p>
-            <a:pPr algn="l">
-              <a:spcAft>
-                <a:spcPts val="200"/>
-              </a:spcAft>
-            </a:pPr>
-            <a:r>
-              <a:rPr sz="1400" b="1" i="0">
-                <a:solidFill>
-                  <a:srgbClr val="1A1A1C"/>
-                </a:solidFill>
-                <a:latin typeface="Arial"/>
-              </a:rPr>
-              <a:t>Confident Simplicity</a:t>
-            </a:r>
-          </a:p>
-          <a:p>
-            <a:pPr algn="l"/>
-            <a:r>
-              <a:rPr sz="1100" b="0" i="0">
-                <a:solidFill>
-                  <a:srgbClr val="868B94"/>
-                </a:solidFill>
-                <a:latin typeface="Arial"/>
-              </a:rPr>
-              <a:t>Clean, logical, human-centered form.</a:t>
-            </a:r>
-          </a:p>
-        </p:txBody>
-      </p:sp>
-      <p:sp>
-        <p:nvSpPr>
-          <p:cNvPr id="14" name="Rectangle 13"/>
-          <p:cNvSpPr/>
-          <p:nvPr/>
-        </p:nvSpPr>
-        <p:spPr>
-          <a:xfrm>
-            <a:off x="6492240" y="960120"/>
-            <a:ext cx="5010912" cy="4983480"/>
+            <a:off x="685800" y="2011680"/>
+            <a:ext cx="10817352" cy="3383280"/>
           </a:xfrm>
           <a:prstGeom prst="rect">
             <a:avLst/>
@@ -6979,13 +6562,13 @@
       </p:sp>
       <p:cxnSp>
         <p:nvCxnSpPr>
-          <p:cNvPr id="15" name="Connector 14"/>
+          <p:cNvPr id="6" name="Connector 5"/>
           <p:cNvCxnSpPr/>
           <p:nvPr/>
         </p:nvCxnSpPr>
         <p:spPr>
           <a:xfrm>
-            <a:off x="6492240" y="960120"/>
+            <a:off x="685800" y="2011680"/>
             <a:ext cx="237744" cy="0"/>
           </a:xfrm>
           <a:prstGeom prst="bentConnector3">
@@ -7014,13 +6597,13 @@
       </p:cxnSp>
       <p:cxnSp>
         <p:nvCxnSpPr>
-          <p:cNvPr id="16" name="Connector 15"/>
+          <p:cNvPr id="7" name="Connector 6"/>
           <p:cNvCxnSpPr/>
           <p:nvPr/>
         </p:nvCxnSpPr>
         <p:spPr>
           <a:xfrm>
-            <a:off x="6492240" y="960120"/>
+            <a:off x="685800" y="2011680"/>
             <a:ext cx="0" cy="237744"/>
           </a:xfrm>
           <a:prstGeom prst="bentConnector3">
@@ -7049,13 +6632,13 @@
       </p:cxnSp>
       <p:cxnSp>
         <p:nvCxnSpPr>
-          <p:cNvPr id="17" name="Connector 16"/>
+          <p:cNvPr id="8" name="Connector 7"/>
           <p:cNvCxnSpPr/>
           <p:nvPr/>
         </p:nvCxnSpPr>
         <p:spPr>
           <a:xfrm flipH="1">
-            <a:off x="11265408" y="960120"/>
+            <a:off x="11265408" y="2011680"/>
             <a:ext cx="237744" cy="0"/>
           </a:xfrm>
           <a:prstGeom prst="bentConnector3">
@@ -7084,13 +6667,13 @@
       </p:cxnSp>
       <p:cxnSp>
         <p:nvCxnSpPr>
-          <p:cNvPr id="18" name="Connector 17"/>
+          <p:cNvPr id="9" name="Connector 8"/>
           <p:cNvCxnSpPr/>
           <p:nvPr/>
         </p:nvCxnSpPr>
         <p:spPr>
           <a:xfrm>
-            <a:off x="11503152" y="960120"/>
+            <a:off x="11503152" y="2011680"/>
             <a:ext cx="0" cy="237744"/>
           </a:xfrm>
           <a:prstGeom prst="bentConnector3">
@@ -7119,13 +6702,13 @@
       </p:cxnSp>
       <p:cxnSp>
         <p:nvCxnSpPr>
-          <p:cNvPr id="19" name="Connector 18"/>
+          <p:cNvPr id="10" name="Connector 9"/>
           <p:cNvCxnSpPr/>
           <p:nvPr/>
         </p:nvCxnSpPr>
         <p:spPr>
           <a:xfrm>
-            <a:off x="6492240" y="5943600"/>
+            <a:off x="685800" y="5394960"/>
             <a:ext cx="237744" cy="0"/>
           </a:xfrm>
           <a:prstGeom prst="bentConnector3">
@@ -7154,13 +6737,13 @@
       </p:cxnSp>
       <p:cxnSp>
         <p:nvCxnSpPr>
-          <p:cNvPr id="20" name="Connector 19"/>
+          <p:cNvPr id="11" name="Connector 10"/>
           <p:cNvCxnSpPr/>
           <p:nvPr/>
         </p:nvCxnSpPr>
         <p:spPr>
           <a:xfrm flipV="1">
-            <a:off x="6492240" y="5705856"/>
+            <a:off x="685800" y="5157216"/>
             <a:ext cx="0" cy="237744"/>
           </a:xfrm>
           <a:prstGeom prst="bentConnector3">
@@ -7189,13 +6772,13 @@
       </p:cxnSp>
       <p:cxnSp>
         <p:nvCxnSpPr>
-          <p:cNvPr id="21" name="Connector 20"/>
+          <p:cNvPr id="12" name="Connector 11"/>
           <p:cNvCxnSpPr/>
           <p:nvPr/>
         </p:nvCxnSpPr>
         <p:spPr>
           <a:xfrm flipH="1">
-            <a:off x="11265408" y="5943600"/>
+            <a:off x="11265408" y="5394960"/>
             <a:ext cx="237744" cy="0"/>
           </a:xfrm>
           <a:prstGeom prst="bentConnector3">
@@ -7224,13 +6807,13 @@
       </p:cxnSp>
       <p:cxnSp>
         <p:nvCxnSpPr>
-          <p:cNvPr id="22" name="Connector 21"/>
+          <p:cNvPr id="13" name="Connector 12"/>
           <p:cNvCxnSpPr/>
           <p:nvPr/>
         </p:nvCxnSpPr>
         <p:spPr>
           <a:xfrm flipV="1">
-            <a:off x="11503152" y="5705856"/>
+            <a:off x="11503152" y="5157216"/>
             <a:ext cx="0" cy="237744"/>
           </a:xfrm>
           <a:prstGeom prst="bentConnector3">
@@ -7259,13 +6842,13 @@
       </p:cxnSp>
       <p:sp>
         <p:nvSpPr>
-          <p:cNvPr id="23" name="Rounded Rectangle 22"/>
+          <p:cNvPr id="14" name="Rounded Rectangle 13"/>
           <p:cNvSpPr/>
           <p:nvPr/>
         </p:nvSpPr>
         <p:spPr>
           <a:xfrm>
-            <a:off x="8741664" y="2976372"/>
+            <a:off x="5838444" y="3227832"/>
             <a:ext cx="512064" cy="512064"/>
           </a:xfrm>
           <a:prstGeom prst="roundRect">
@@ -7303,13 +6886,13 @@
       </p:sp>
       <p:sp>
         <p:nvSpPr>
-          <p:cNvPr id="24" name="Oval 23"/>
+          <p:cNvPr id="15" name="Oval 14"/>
           <p:cNvSpPr/>
           <p:nvPr/>
         </p:nvSpPr>
         <p:spPr>
           <a:xfrm>
-            <a:off x="8854318" y="3078784"/>
+            <a:off x="5951098" y="3330244"/>
             <a:ext cx="100584" cy="100584"/>
           </a:xfrm>
           <a:prstGeom prst="ellipse">
@@ -7347,13 +6930,13 @@
       </p:sp>
       <p:sp>
         <p:nvSpPr>
-          <p:cNvPr id="25" name="Isosceles Triangle 24"/>
+          <p:cNvPr id="16" name="Isosceles Triangle 15"/>
           <p:cNvSpPr/>
           <p:nvPr/>
         </p:nvSpPr>
         <p:spPr>
           <a:xfrm>
-            <a:off x="8895283" y="3201680"/>
+            <a:off x="5992063" y="3453140"/>
             <a:ext cx="274320" cy="164592"/>
           </a:xfrm>
           <a:prstGeom prst="triangle">
@@ -7391,14 +6974,14 @@
       </p:sp>
       <p:sp>
         <p:nvSpPr>
-          <p:cNvPr id="26" name="TextBox 25"/>
+          <p:cNvPr id="17" name="TextBox 16"/>
           <p:cNvSpPr txBox="1"/>
           <p:nvPr/>
         </p:nvSpPr>
         <p:spPr>
           <a:xfrm>
-            <a:off x="6492240" y="3579876"/>
-            <a:ext cx="5010912" cy="365760"/>
+            <a:off x="685800" y="3831336"/>
+            <a:ext cx="10817352" cy="365760"/>
           </a:xfrm>
           <a:prstGeom prst="rect">
             <a:avLst/>
@@ -7426,14 +7009,14 @@
       </p:sp>
       <p:sp>
         <p:nvSpPr>
-          <p:cNvPr id="27" name="TextBox 26"/>
+          <p:cNvPr id="18" name="TextBox 17"/>
           <p:cNvSpPr txBox="1"/>
           <p:nvPr/>
         </p:nvSpPr>
         <p:spPr>
           <a:xfrm>
-            <a:off x="6492240" y="3854196"/>
-            <a:ext cx="5010912" cy="274320"/>
+            <a:off x="685800" y="4105656"/>
+            <a:ext cx="10817352" cy="274320"/>
           </a:xfrm>
           <a:prstGeom prst="rect">
             <a:avLst/>
@@ -7455,6 +7038,435 @@
                 <a:latin typeface="Arial"/>
               </a:rPr>
               <a:t>Replace · 16:9 · 300dpi</a:t>
+            </a:r>
+          </a:p>
+        </p:txBody>
+      </p:sp>
+      <p:sp>
+        <p:nvSpPr>
+          <p:cNvPr id="19" name="Oval 18"/>
+          <p:cNvSpPr/>
+          <p:nvPr/>
+        </p:nvSpPr>
+        <p:spPr>
+          <a:xfrm>
+            <a:off x="685800" y="5532120"/>
+            <a:ext cx="384048" cy="384048"/>
+          </a:xfrm>
+          <a:prstGeom prst="ellipse">
+            <a:avLst/>
+          </a:prstGeom>
+          <a:noFill/>
+          <a:ln w="15875">
+            <a:solidFill>
+              <a:srgbClr val="1B2A4A"/>
+            </a:solidFill>
+          </a:ln>
+          <a:effectLst/>
+        </p:spPr>
+        <p:style>
+          <a:lnRef idx="1">
+            <a:schemeClr val="accent1"/>
+          </a:lnRef>
+          <a:fillRef idx="3">
+            <a:schemeClr val="accent1"/>
+          </a:fillRef>
+          <a:effectRef idx="2">
+            <a:schemeClr val="accent1"/>
+          </a:effectRef>
+          <a:fontRef idx="minor">
+            <a:schemeClr val="lt1"/>
+          </a:fontRef>
+        </p:style>
+        <p:txBody>
+          <a:bodyPr rtlCol="0" anchor="ctr"/>
+          <a:lstStyle/>
+          <a:p>
+            <a:pPr algn="ctr"/>
+          </a:p>
+        </p:txBody>
+      </p:sp>
+      <p:sp>
+        <p:nvSpPr>
+          <p:cNvPr id="20" name="Oval 19"/>
+          <p:cNvSpPr/>
+          <p:nvPr/>
+        </p:nvSpPr>
+        <p:spPr>
+          <a:xfrm>
+            <a:off x="795528" y="5641848"/>
+            <a:ext cx="164592" cy="164592"/>
+          </a:xfrm>
+          <a:prstGeom prst="ellipse">
+            <a:avLst/>
+          </a:prstGeom>
+          <a:solidFill>
+            <a:srgbClr val="1B2A4A"/>
+          </a:solidFill>
+          <a:ln>
+            <a:noFill/>
+          </a:ln>
+          <a:effectLst/>
+        </p:spPr>
+        <p:style>
+          <a:lnRef idx="1">
+            <a:schemeClr val="accent1"/>
+          </a:lnRef>
+          <a:fillRef idx="3">
+            <a:schemeClr val="accent1"/>
+          </a:fillRef>
+          <a:effectRef idx="2">
+            <a:schemeClr val="accent1"/>
+          </a:effectRef>
+          <a:fontRef idx="minor">
+            <a:schemeClr val="lt1"/>
+          </a:fontRef>
+        </p:style>
+        <p:txBody>
+          <a:bodyPr rtlCol="0" anchor="ctr"/>
+          <a:lstStyle/>
+          <a:p>
+            <a:pPr algn="ctr"/>
+          </a:p>
+        </p:txBody>
+      </p:sp>
+      <p:sp>
+        <p:nvSpPr>
+          <p:cNvPr id="21" name="TextBox 20"/>
+          <p:cNvSpPr txBox="1"/>
+          <p:nvPr/>
+        </p:nvSpPr>
+        <p:spPr>
+          <a:xfrm>
+            <a:off x="1234440" y="5486400"/>
+            <a:ext cx="2813304" cy="777240"/>
+          </a:xfrm>
+          <a:prstGeom prst="rect">
+            <a:avLst/>
+          </a:prstGeom>
+          <a:noFill/>
+        </p:spPr>
+        <p:txBody>
+          <a:bodyPr wrap="square" anchor="t" lIns="0" rIns="0" tIns="0" bIns="0">
+            <a:spAutoFit/>
+          </a:bodyPr>
+          <a:lstStyle/>
+          <a:p>
+            <a:pPr algn="l">
+              <a:spcAft>
+                <a:spcPts val="100"/>
+              </a:spcAft>
+            </a:pPr>
+            <a:r>
+              <a:rPr sz="1250" b="1" i="0">
+                <a:solidFill>
+                  <a:srgbClr val="1A1A1C"/>
+                </a:solidFill>
+                <a:latin typeface="Arial"/>
+              </a:rPr>
+              <a:t>Spacious &amp; Adaptive</a:t>
+            </a:r>
+          </a:p>
+          <a:p>
+            <a:pPr algn="l">
+              <a:lnSpc>
+                <a:spcPct val="110000"/>
+              </a:lnSpc>
+            </a:pPr>
+            <a:r>
+              <a:rPr sz="1000" b="0" i="0">
+                <a:solidFill>
+                  <a:srgbClr val="868B94"/>
+                </a:solidFill>
+                <a:latin typeface="Arial"/>
+              </a:rPr>
+              <a:t>Versatile space for everyday life.</a:t>
+            </a:r>
+          </a:p>
+        </p:txBody>
+      </p:sp>
+      <p:sp>
+        <p:nvSpPr>
+          <p:cNvPr id="22" name="Oval 21"/>
+          <p:cNvSpPr/>
+          <p:nvPr/>
+        </p:nvSpPr>
+        <p:spPr>
+          <a:xfrm>
+            <a:off x="4413504" y="5532120"/>
+            <a:ext cx="384048" cy="384048"/>
+          </a:xfrm>
+          <a:prstGeom prst="ellipse">
+            <a:avLst/>
+          </a:prstGeom>
+          <a:noFill/>
+          <a:ln w="15875">
+            <a:solidFill>
+              <a:srgbClr val="1B2A4A"/>
+            </a:solidFill>
+          </a:ln>
+          <a:effectLst/>
+        </p:spPr>
+        <p:style>
+          <a:lnRef idx="1">
+            <a:schemeClr val="accent1"/>
+          </a:lnRef>
+          <a:fillRef idx="3">
+            <a:schemeClr val="accent1"/>
+          </a:fillRef>
+          <a:effectRef idx="2">
+            <a:schemeClr val="accent1"/>
+          </a:effectRef>
+          <a:fontRef idx="minor">
+            <a:schemeClr val="lt1"/>
+          </a:fontRef>
+        </p:style>
+        <p:txBody>
+          <a:bodyPr rtlCol="0" anchor="ctr"/>
+          <a:lstStyle/>
+          <a:p>
+            <a:pPr algn="ctr"/>
+          </a:p>
+        </p:txBody>
+      </p:sp>
+      <p:sp>
+        <p:nvSpPr>
+          <p:cNvPr id="23" name="Oval 22"/>
+          <p:cNvSpPr/>
+          <p:nvPr/>
+        </p:nvSpPr>
+        <p:spPr>
+          <a:xfrm>
+            <a:off x="4523232" y="5641848"/>
+            <a:ext cx="164592" cy="164592"/>
+          </a:xfrm>
+          <a:prstGeom prst="ellipse">
+            <a:avLst/>
+          </a:prstGeom>
+          <a:solidFill>
+            <a:srgbClr val="1B2A4A"/>
+          </a:solidFill>
+          <a:ln>
+            <a:noFill/>
+          </a:ln>
+          <a:effectLst/>
+        </p:spPr>
+        <p:style>
+          <a:lnRef idx="1">
+            <a:schemeClr val="accent1"/>
+          </a:lnRef>
+          <a:fillRef idx="3">
+            <a:schemeClr val="accent1"/>
+          </a:fillRef>
+          <a:effectRef idx="2">
+            <a:schemeClr val="accent1"/>
+          </a:effectRef>
+          <a:fontRef idx="minor">
+            <a:schemeClr val="lt1"/>
+          </a:fontRef>
+        </p:style>
+        <p:txBody>
+          <a:bodyPr rtlCol="0" anchor="ctr"/>
+          <a:lstStyle/>
+          <a:p>
+            <a:pPr algn="ctr"/>
+          </a:p>
+        </p:txBody>
+      </p:sp>
+      <p:sp>
+        <p:nvSpPr>
+          <p:cNvPr id="24" name="TextBox 23"/>
+          <p:cNvSpPr txBox="1"/>
+          <p:nvPr/>
+        </p:nvSpPr>
+        <p:spPr>
+          <a:xfrm>
+            <a:off x="4962144" y="5486400"/>
+            <a:ext cx="2813304" cy="777240"/>
+          </a:xfrm>
+          <a:prstGeom prst="rect">
+            <a:avLst/>
+          </a:prstGeom>
+          <a:noFill/>
+        </p:spPr>
+        <p:txBody>
+          <a:bodyPr wrap="square" anchor="t" lIns="0" rIns="0" tIns="0" bIns="0">
+            <a:spAutoFit/>
+          </a:bodyPr>
+          <a:lstStyle/>
+          <a:p>
+            <a:pPr algn="l">
+              <a:spcAft>
+                <a:spcPts val="100"/>
+              </a:spcAft>
+            </a:pPr>
+            <a:r>
+              <a:rPr sz="1250" b="1" i="0">
+                <a:solidFill>
+                  <a:srgbClr val="1A1A1C"/>
+                </a:solidFill>
+                <a:latin typeface="Arial"/>
+              </a:rPr>
+              <a:t>Technology With Purpose</a:t>
+            </a:r>
+          </a:p>
+          <a:p>
+            <a:pPr algn="l">
+              <a:lnSpc>
+                <a:spcPct val="110000"/>
+              </a:lnSpc>
+            </a:pPr>
+            <a:r>
+              <a:rPr sz="1000" b="0" i="0">
+                <a:solidFill>
+                  <a:srgbClr val="868B94"/>
+                </a:solidFill>
+                <a:latin typeface="Arial"/>
+              </a:rPr>
+              <a:t>Intelligence that serves, then disappears.</a:t>
+            </a:r>
+          </a:p>
+        </p:txBody>
+      </p:sp>
+      <p:sp>
+        <p:nvSpPr>
+          <p:cNvPr id="25" name="Oval 24"/>
+          <p:cNvSpPr/>
+          <p:nvPr/>
+        </p:nvSpPr>
+        <p:spPr>
+          <a:xfrm>
+            <a:off x="8141208" y="5532120"/>
+            <a:ext cx="384048" cy="384048"/>
+          </a:xfrm>
+          <a:prstGeom prst="ellipse">
+            <a:avLst/>
+          </a:prstGeom>
+          <a:noFill/>
+          <a:ln w="15875">
+            <a:solidFill>
+              <a:srgbClr val="1B2A4A"/>
+            </a:solidFill>
+          </a:ln>
+          <a:effectLst/>
+        </p:spPr>
+        <p:style>
+          <a:lnRef idx="1">
+            <a:schemeClr val="accent1"/>
+          </a:lnRef>
+          <a:fillRef idx="3">
+            <a:schemeClr val="accent1"/>
+          </a:fillRef>
+          <a:effectRef idx="2">
+            <a:schemeClr val="accent1"/>
+          </a:effectRef>
+          <a:fontRef idx="minor">
+            <a:schemeClr val="lt1"/>
+          </a:fontRef>
+        </p:style>
+        <p:txBody>
+          <a:bodyPr rtlCol="0" anchor="ctr"/>
+          <a:lstStyle/>
+          <a:p>
+            <a:pPr algn="ctr"/>
+          </a:p>
+        </p:txBody>
+      </p:sp>
+      <p:sp>
+        <p:nvSpPr>
+          <p:cNvPr id="26" name="Oval 25"/>
+          <p:cNvSpPr/>
+          <p:nvPr/>
+        </p:nvSpPr>
+        <p:spPr>
+          <a:xfrm>
+            <a:off x="8250936" y="5641848"/>
+            <a:ext cx="164592" cy="164592"/>
+          </a:xfrm>
+          <a:prstGeom prst="ellipse">
+            <a:avLst/>
+          </a:prstGeom>
+          <a:solidFill>
+            <a:srgbClr val="1B2A4A"/>
+          </a:solidFill>
+          <a:ln>
+            <a:noFill/>
+          </a:ln>
+          <a:effectLst/>
+        </p:spPr>
+        <p:style>
+          <a:lnRef idx="1">
+            <a:schemeClr val="accent1"/>
+          </a:lnRef>
+          <a:fillRef idx="3">
+            <a:schemeClr val="accent1"/>
+          </a:fillRef>
+          <a:effectRef idx="2">
+            <a:schemeClr val="accent1"/>
+          </a:effectRef>
+          <a:fontRef idx="minor">
+            <a:schemeClr val="lt1"/>
+          </a:fontRef>
+        </p:style>
+        <p:txBody>
+          <a:bodyPr rtlCol="0" anchor="ctr"/>
+          <a:lstStyle/>
+          <a:p>
+            <a:pPr algn="ctr"/>
+          </a:p>
+        </p:txBody>
+      </p:sp>
+      <p:sp>
+        <p:nvSpPr>
+          <p:cNvPr id="27" name="TextBox 26"/>
+          <p:cNvSpPr txBox="1"/>
+          <p:nvPr/>
+        </p:nvSpPr>
+        <p:spPr>
+          <a:xfrm>
+            <a:off x="8689848" y="5486400"/>
+            <a:ext cx="2813304" cy="777240"/>
+          </a:xfrm>
+          <a:prstGeom prst="rect">
+            <a:avLst/>
+          </a:prstGeom>
+          <a:noFill/>
+        </p:spPr>
+        <p:txBody>
+          <a:bodyPr wrap="square" anchor="t" lIns="0" rIns="0" tIns="0" bIns="0">
+            <a:spAutoFit/>
+          </a:bodyPr>
+          <a:lstStyle/>
+          <a:p>
+            <a:pPr algn="l">
+              <a:spcAft>
+                <a:spcPts val="100"/>
+              </a:spcAft>
+            </a:pPr>
+            <a:r>
+              <a:rPr sz="1250" b="1" i="0">
+                <a:solidFill>
+                  <a:srgbClr val="1A1A1C"/>
+                </a:solidFill>
+                <a:latin typeface="Arial"/>
+              </a:rPr>
+              <a:t>Confident Simplicity</a:t>
+            </a:r>
+          </a:p>
+          <a:p>
+            <a:pPr algn="l">
+              <a:lnSpc>
+                <a:spcPct val="110000"/>
+              </a:lnSpc>
+            </a:pPr>
+            <a:r>
+              <a:rPr sz="1000" b="0" i="0">
+                <a:solidFill>
+                  <a:srgbClr val="868B94"/>
+                </a:solidFill>
+                <a:latin typeface="Arial"/>
+              </a:rPr>
+              <a:t>Clean, logical, human-centered form.</a:t>
             </a:r>
           </a:p>
         </p:txBody>
@@ -8360,7 +8372,7 @@
         </p:nvSpPr>
         <p:spPr>
           <a:xfrm>
-            <a:off x="685800" y="640080"/>
+            <a:off x="685800" y="548640"/>
             <a:ext cx="7315200" cy="274320"/>
           </a:xfrm>
           <a:prstGeom prst="rect">
@@ -8395,8 +8407,8 @@
         </p:nvSpPr>
         <p:spPr>
           <a:xfrm>
-            <a:off x="658368" y="960120"/>
-            <a:ext cx="5486400" cy="822960"/>
+            <a:off x="658368" y="868680"/>
+            <a:ext cx="10058400" cy="640080"/>
           </a:xfrm>
           <a:prstGeom prst="rect">
             <a:avLst/>
@@ -8411,7 +8423,7 @@
           <a:p>
             <a:pPr algn="l"/>
             <a:r>
-              <a:rPr sz="3000" b="1" i="0">
+              <a:rPr sz="2600" b="1" i="0">
                 <a:solidFill>
                   <a:srgbClr val="1A1A1C"/>
                 </a:solidFill>
@@ -8430,8 +8442,8 @@
         </p:nvSpPr>
         <p:spPr>
           <a:xfrm>
-            <a:off x="685800" y="1828800"/>
-            <a:ext cx="5120640" cy="1097280"/>
+            <a:off x="685800" y="1481328"/>
+            <a:ext cx="10817352" cy="411480"/>
           </a:xfrm>
           <a:prstGeom prst="rect">
             <a:avLst/>
@@ -8446,11 +8458,11 @@
           <a:p>
             <a:pPr algn="l">
               <a:lnSpc>
-                <a:spcPct val="130000"/>
+                <a:spcPct val="120000"/>
               </a:lnSpc>
             </a:pPr>
             <a:r>
-              <a:rPr sz="1500" b="0" i="1">
+              <a:rPr sz="1300" b="0" i="1">
                 <a:solidFill>
                   <a:srgbClr val="4A4E57"/>
                 </a:solidFill>
@@ -8463,431 +8475,14 @@
       </p:sp>
       <p:sp>
         <p:nvSpPr>
-          <p:cNvPr id="5" name="Oval 4"/>
+          <p:cNvPr id="5" name="Rectangle 4"/>
           <p:cNvSpPr/>
           <p:nvPr/>
         </p:nvSpPr>
         <p:spPr>
           <a:xfrm>
-            <a:off x="713232" y="3200400"/>
-            <a:ext cx="457200" cy="457200"/>
-          </a:xfrm>
-          <a:prstGeom prst="ellipse">
-            <a:avLst/>
-          </a:prstGeom>
-          <a:noFill/>
-          <a:ln w="15875">
-            <a:solidFill>
-              <a:srgbClr val="1B2A4A"/>
-            </a:solidFill>
-          </a:ln>
-          <a:effectLst/>
-        </p:spPr>
-        <p:style>
-          <a:lnRef idx="1">
-            <a:schemeClr val="accent1"/>
-          </a:lnRef>
-          <a:fillRef idx="3">
-            <a:schemeClr val="accent1"/>
-          </a:fillRef>
-          <a:effectRef idx="2">
-            <a:schemeClr val="accent1"/>
-          </a:effectRef>
-          <a:fontRef idx="minor">
-            <a:schemeClr val="lt1"/>
-          </a:fontRef>
-        </p:style>
-        <p:txBody>
-          <a:bodyPr rtlCol="0" anchor="ctr"/>
-          <a:lstStyle/>
-          <a:p>
-            <a:pPr algn="ctr"/>
-          </a:p>
-        </p:txBody>
-      </p:sp>
-      <p:sp>
-        <p:nvSpPr>
-          <p:cNvPr id="6" name="Oval 5"/>
-          <p:cNvSpPr/>
-          <p:nvPr/>
-        </p:nvSpPr>
-        <p:spPr>
-          <a:xfrm>
-            <a:off x="859536" y="3346704"/>
-            <a:ext cx="164592" cy="164592"/>
-          </a:xfrm>
-          <a:prstGeom prst="ellipse">
-            <a:avLst/>
-          </a:prstGeom>
-          <a:solidFill>
-            <a:srgbClr val="1B2A4A"/>
-          </a:solidFill>
-          <a:ln>
-            <a:noFill/>
-          </a:ln>
-          <a:effectLst/>
-        </p:spPr>
-        <p:style>
-          <a:lnRef idx="1">
-            <a:schemeClr val="accent1"/>
-          </a:lnRef>
-          <a:fillRef idx="3">
-            <a:schemeClr val="accent1"/>
-          </a:fillRef>
-          <a:effectRef idx="2">
-            <a:schemeClr val="accent1"/>
-          </a:effectRef>
-          <a:fontRef idx="minor">
-            <a:schemeClr val="lt1"/>
-          </a:fontRef>
-        </p:style>
-        <p:txBody>
-          <a:bodyPr rtlCol="0" anchor="ctr"/>
-          <a:lstStyle/>
-          <a:p>
-            <a:pPr algn="ctr"/>
-          </a:p>
-        </p:txBody>
-      </p:sp>
-      <p:sp>
-        <p:nvSpPr>
-          <p:cNvPr id="7" name="TextBox 6"/>
-          <p:cNvSpPr txBox="1"/>
-          <p:nvPr/>
-        </p:nvSpPr>
-        <p:spPr>
-          <a:xfrm>
-            <a:off x="1371600" y="3182112"/>
-            <a:ext cx="4572000" cy="731520"/>
-          </a:xfrm>
-          <a:prstGeom prst="rect">
-            <a:avLst/>
-          </a:prstGeom>
-          <a:noFill/>
-        </p:spPr>
-        <p:txBody>
-          <a:bodyPr wrap="square" anchor="t" lIns="0" rIns="0" tIns="0" bIns="0">
-            <a:spAutoFit/>
-          </a:bodyPr>
-          <a:lstStyle/>
-          <a:p>
-            <a:pPr algn="l">
-              <a:spcAft>
-                <a:spcPts val="200"/>
-              </a:spcAft>
-            </a:pPr>
-            <a:r>
-              <a:rPr sz="1400" b="1" i="0">
-                <a:solidFill>
-                  <a:srgbClr val="1A1A1C"/>
-                </a:solidFill>
-                <a:latin typeface="Arial"/>
-              </a:rPr>
-              <a:t>Smart &amp; Simple</a:t>
-            </a:r>
-          </a:p>
-          <a:p>
-            <a:pPr algn="l"/>
-            <a:r>
-              <a:rPr sz="1100" b="0" i="0">
-                <a:solidFill>
-                  <a:srgbClr val="868B94"/>
-                </a:solidFill>
-                <a:latin typeface="Arial"/>
-              </a:rPr>
-              <a:t>Approachable design for the city.</a:t>
-            </a:r>
-          </a:p>
-        </p:txBody>
-      </p:sp>
-      <p:sp>
-        <p:nvSpPr>
-          <p:cNvPr id="8" name="Oval 7"/>
-          <p:cNvSpPr/>
-          <p:nvPr/>
-        </p:nvSpPr>
-        <p:spPr>
-          <a:xfrm>
-            <a:off x="713232" y="4069080"/>
-            <a:ext cx="457200" cy="457200"/>
-          </a:xfrm>
-          <a:prstGeom prst="ellipse">
-            <a:avLst/>
-          </a:prstGeom>
-          <a:noFill/>
-          <a:ln w="15875">
-            <a:solidFill>
-              <a:srgbClr val="1B2A4A"/>
-            </a:solidFill>
-          </a:ln>
-          <a:effectLst/>
-        </p:spPr>
-        <p:style>
-          <a:lnRef idx="1">
-            <a:schemeClr val="accent1"/>
-          </a:lnRef>
-          <a:fillRef idx="3">
-            <a:schemeClr val="accent1"/>
-          </a:fillRef>
-          <a:effectRef idx="2">
-            <a:schemeClr val="accent1"/>
-          </a:effectRef>
-          <a:fontRef idx="minor">
-            <a:schemeClr val="lt1"/>
-          </a:fontRef>
-        </p:style>
-        <p:txBody>
-          <a:bodyPr rtlCol="0" anchor="ctr"/>
-          <a:lstStyle/>
-          <a:p>
-            <a:pPr algn="ctr"/>
-          </a:p>
-        </p:txBody>
-      </p:sp>
-      <p:sp>
-        <p:nvSpPr>
-          <p:cNvPr id="9" name="Oval 8"/>
-          <p:cNvSpPr/>
-          <p:nvPr/>
-        </p:nvSpPr>
-        <p:spPr>
-          <a:xfrm>
-            <a:off x="859536" y="4215384"/>
-            <a:ext cx="164592" cy="164592"/>
-          </a:xfrm>
-          <a:prstGeom prst="ellipse">
-            <a:avLst/>
-          </a:prstGeom>
-          <a:solidFill>
-            <a:srgbClr val="1B2A4A"/>
-          </a:solidFill>
-          <a:ln>
-            <a:noFill/>
-          </a:ln>
-          <a:effectLst/>
-        </p:spPr>
-        <p:style>
-          <a:lnRef idx="1">
-            <a:schemeClr val="accent1"/>
-          </a:lnRef>
-          <a:fillRef idx="3">
-            <a:schemeClr val="accent1"/>
-          </a:fillRef>
-          <a:effectRef idx="2">
-            <a:schemeClr val="accent1"/>
-          </a:effectRef>
-          <a:fontRef idx="minor">
-            <a:schemeClr val="lt1"/>
-          </a:fontRef>
-        </p:style>
-        <p:txBody>
-          <a:bodyPr rtlCol="0" anchor="ctr"/>
-          <a:lstStyle/>
-          <a:p>
-            <a:pPr algn="ctr"/>
-          </a:p>
-        </p:txBody>
-      </p:sp>
-      <p:sp>
-        <p:nvSpPr>
-          <p:cNvPr id="10" name="TextBox 9"/>
-          <p:cNvSpPr txBox="1"/>
-          <p:nvPr/>
-        </p:nvSpPr>
-        <p:spPr>
-          <a:xfrm>
-            <a:off x="1371600" y="4050792"/>
-            <a:ext cx="4572000" cy="731520"/>
-          </a:xfrm>
-          <a:prstGeom prst="rect">
-            <a:avLst/>
-          </a:prstGeom>
-          <a:noFill/>
-        </p:spPr>
-        <p:txBody>
-          <a:bodyPr wrap="square" anchor="t" lIns="0" rIns="0" tIns="0" bIns="0">
-            <a:spAutoFit/>
-          </a:bodyPr>
-          <a:lstStyle/>
-          <a:p>
-            <a:pPr algn="l">
-              <a:spcAft>
-                <a:spcPts val="200"/>
-              </a:spcAft>
-            </a:pPr>
-            <a:r>
-              <a:rPr sz="1400" b="1" i="0">
-                <a:solidFill>
-                  <a:srgbClr val="1A1A1C"/>
-                </a:solidFill>
-                <a:latin typeface="Arial"/>
-              </a:rPr>
-              <a:t>Attainable</a:t>
-            </a:r>
-          </a:p>
-          <a:p>
-            <a:pPr algn="l"/>
-            <a:r>
-              <a:rPr sz="1100" b="0" i="0">
-                <a:solidFill>
-                  <a:srgbClr val="868B94"/>
-                </a:solidFill>
-                <a:latin typeface="Arial"/>
-              </a:rPr>
-              <a:t>Thoughtful style within reach.</a:t>
-            </a:r>
-          </a:p>
-        </p:txBody>
-      </p:sp>
-      <p:sp>
-        <p:nvSpPr>
-          <p:cNvPr id="11" name="Oval 10"/>
-          <p:cNvSpPr/>
-          <p:nvPr/>
-        </p:nvSpPr>
-        <p:spPr>
-          <a:xfrm>
-            <a:off x="713232" y="4937760"/>
-            <a:ext cx="457200" cy="457200"/>
-          </a:xfrm>
-          <a:prstGeom prst="ellipse">
-            <a:avLst/>
-          </a:prstGeom>
-          <a:noFill/>
-          <a:ln w="15875">
-            <a:solidFill>
-              <a:srgbClr val="1B2A4A"/>
-            </a:solidFill>
-          </a:ln>
-          <a:effectLst/>
-        </p:spPr>
-        <p:style>
-          <a:lnRef idx="1">
-            <a:schemeClr val="accent1"/>
-          </a:lnRef>
-          <a:fillRef idx="3">
-            <a:schemeClr val="accent1"/>
-          </a:fillRef>
-          <a:effectRef idx="2">
-            <a:schemeClr val="accent1"/>
-          </a:effectRef>
-          <a:fontRef idx="minor">
-            <a:schemeClr val="lt1"/>
-          </a:fontRef>
-        </p:style>
-        <p:txBody>
-          <a:bodyPr rtlCol="0" anchor="ctr"/>
-          <a:lstStyle/>
-          <a:p>
-            <a:pPr algn="ctr"/>
-          </a:p>
-        </p:txBody>
-      </p:sp>
-      <p:sp>
-        <p:nvSpPr>
-          <p:cNvPr id="12" name="Oval 11"/>
-          <p:cNvSpPr/>
-          <p:nvPr/>
-        </p:nvSpPr>
-        <p:spPr>
-          <a:xfrm>
-            <a:off x="859536" y="5084064"/>
-            <a:ext cx="164592" cy="164592"/>
-          </a:xfrm>
-          <a:prstGeom prst="ellipse">
-            <a:avLst/>
-          </a:prstGeom>
-          <a:solidFill>
-            <a:srgbClr val="1B2A4A"/>
-          </a:solidFill>
-          <a:ln>
-            <a:noFill/>
-          </a:ln>
-          <a:effectLst/>
-        </p:spPr>
-        <p:style>
-          <a:lnRef idx="1">
-            <a:schemeClr val="accent1"/>
-          </a:lnRef>
-          <a:fillRef idx="3">
-            <a:schemeClr val="accent1"/>
-          </a:fillRef>
-          <a:effectRef idx="2">
-            <a:schemeClr val="accent1"/>
-          </a:effectRef>
-          <a:fontRef idx="minor">
-            <a:schemeClr val="lt1"/>
-          </a:fontRef>
-        </p:style>
-        <p:txBody>
-          <a:bodyPr rtlCol="0" anchor="ctr"/>
-          <a:lstStyle/>
-          <a:p>
-            <a:pPr algn="ctr"/>
-          </a:p>
-        </p:txBody>
-      </p:sp>
-      <p:sp>
-        <p:nvSpPr>
-          <p:cNvPr id="13" name="TextBox 12"/>
-          <p:cNvSpPr txBox="1"/>
-          <p:nvPr/>
-        </p:nvSpPr>
-        <p:spPr>
-          <a:xfrm>
-            <a:off x="1371600" y="4919472"/>
-            <a:ext cx="4572000" cy="731520"/>
-          </a:xfrm>
-          <a:prstGeom prst="rect">
-            <a:avLst/>
-          </a:prstGeom>
-          <a:noFill/>
-        </p:spPr>
-        <p:txBody>
-          <a:bodyPr wrap="square" anchor="t" lIns="0" rIns="0" tIns="0" bIns="0">
-            <a:spAutoFit/>
-          </a:bodyPr>
-          <a:lstStyle/>
-          <a:p>
-            <a:pPr algn="l">
-              <a:spcAft>
-                <a:spcPts val="200"/>
-              </a:spcAft>
-            </a:pPr>
-            <a:r>
-              <a:rPr sz="1400" b="1" i="0">
-                <a:solidFill>
-                  <a:srgbClr val="1A1A1C"/>
-                </a:solidFill>
-                <a:latin typeface="Arial"/>
-              </a:rPr>
-              <a:t>Youthful &amp; Modern</a:t>
-            </a:r>
-          </a:p>
-          <a:p>
-            <a:pPr algn="l"/>
-            <a:r>
-              <a:rPr sz="1100" b="0" i="0">
-                <a:solidFill>
-                  <a:srgbClr val="868B94"/>
-                </a:solidFill>
-                <a:latin typeface="Arial"/>
-              </a:rPr>
-              <a:t>Efficient, urban, design-led.</a:t>
-            </a:r>
-          </a:p>
-        </p:txBody>
-      </p:sp>
-      <p:sp>
-        <p:nvSpPr>
-          <p:cNvPr id="14" name="Rectangle 13"/>
-          <p:cNvSpPr/>
-          <p:nvPr/>
-        </p:nvSpPr>
-        <p:spPr>
-          <a:xfrm>
-            <a:off x="6492240" y="960120"/>
-            <a:ext cx="5010912" cy="4983480"/>
+            <a:off x="685800" y="2011680"/>
+            <a:ext cx="10817352" cy="3383280"/>
           </a:xfrm>
           <a:prstGeom prst="rect">
             <a:avLst/>
@@ -8924,13 +8519,13 @@
       </p:sp>
       <p:cxnSp>
         <p:nvCxnSpPr>
-          <p:cNvPr id="15" name="Connector 14"/>
+          <p:cNvPr id="6" name="Connector 5"/>
           <p:cNvCxnSpPr/>
           <p:nvPr/>
         </p:nvCxnSpPr>
         <p:spPr>
           <a:xfrm>
-            <a:off x="6492240" y="960120"/>
+            <a:off x="685800" y="2011680"/>
             <a:ext cx="237744" cy="0"/>
           </a:xfrm>
           <a:prstGeom prst="bentConnector3">
@@ -8959,13 +8554,13 @@
       </p:cxnSp>
       <p:cxnSp>
         <p:nvCxnSpPr>
-          <p:cNvPr id="16" name="Connector 15"/>
+          <p:cNvPr id="7" name="Connector 6"/>
           <p:cNvCxnSpPr/>
           <p:nvPr/>
         </p:nvCxnSpPr>
         <p:spPr>
           <a:xfrm>
-            <a:off x="6492240" y="960120"/>
+            <a:off x="685800" y="2011680"/>
             <a:ext cx="0" cy="237744"/>
           </a:xfrm>
           <a:prstGeom prst="bentConnector3">
@@ -8994,13 +8589,13 @@
       </p:cxnSp>
       <p:cxnSp>
         <p:nvCxnSpPr>
-          <p:cNvPr id="17" name="Connector 16"/>
+          <p:cNvPr id="8" name="Connector 7"/>
           <p:cNvCxnSpPr/>
           <p:nvPr/>
         </p:nvCxnSpPr>
         <p:spPr>
           <a:xfrm flipH="1">
-            <a:off x="11265408" y="960120"/>
+            <a:off x="11265408" y="2011680"/>
             <a:ext cx="237744" cy="0"/>
           </a:xfrm>
           <a:prstGeom prst="bentConnector3">
@@ -9029,13 +8624,13 @@
       </p:cxnSp>
       <p:cxnSp>
         <p:nvCxnSpPr>
-          <p:cNvPr id="18" name="Connector 17"/>
+          <p:cNvPr id="9" name="Connector 8"/>
           <p:cNvCxnSpPr/>
           <p:nvPr/>
         </p:nvCxnSpPr>
         <p:spPr>
           <a:xfrm>
-            <a:off x="11503152" y="960120"/>
+            <a:off x="11503152" y="2011680"/>
             <a:ext cx="0" cy="237744"/>
           </a:xfrm>
           <a:prstGeom prst="bentConnector3">
@@ -9064,13 +8659,13 @@
       </p:cxnSp>
       <p:cxnSp>
         <p:nvCxnSpPr>
-          <p:cNvPr id="19" name="Connector 18"/>
+          <p:cNvPr id="10" name="Connector 9"/>
           <p:cNvCxnSpPr/>
           <p:nvPr/>
         </p:nvCxnSpPr>
         <p:spPr>
           <a:xfrm>
-            <a:off x="6492240" y="5943600"/>
+            <a:off x="685800" y="5394960"/>
             <a:ext cx="237744" cy="0"/>
           </a:xfrm>
           <a:prstGeom prst="bentConnector3">
@@ -9099,13 +8694,13 @@
       </p:cxnSp>
       <p:cxnSp>
         <p:nvCxnSpPr>
-          <p:cNvPr id="20" name="Connector 19"/>
+          <p:cNvPr id="11" name="Connector 10"/>
           <p:cNvCxnSpPr/>
           <p:nvPr/>
         </p:nvCxnSpPr>
         <p:spPr>
           <a:xfrm flipV="1">
-            <a:off x="6492240" y="5705856"/>
+            <a:off x="685800" y="5157216"/>
             <a:ext cx="0" cy="237744"/>
           </a:xfrm>
           <a:prstGeom prst="bentConnector3">
@@ -9134,13 +8729,13 @@
       </p:cxnSp>
       <p:cxnSp>
         <p:nvCxnSpPr>
-          <p:cNvPr id="21" name="Connector 20"/>
+          <p:cNvPr id="12" name="Connector 11"/>
           <p:cNvCxnSpPr/>
           <p:nvPr/>
         </p:nvCxnSpPr>
         <p:spPr>
           <a:xfrm flipH="1">
-            <a:off x="11265408" y="5943600"/>
+            <a:off x="11265408" y="5394960"/>
             <a:ext cx="237744" cy="0"/>
           </a:xfrm>
           <a:prstGeom prst="bentConnector3">
@@ -9169,13 +8764,13 @@
       </p:cxnSp>
       <p:cxnSp>
         <p:nvCxnSpPr>
-          <p:cNvPr id="22" name="Connector 21"/>
+          <p:cNvPr id="13" name="Connector 12"/>
           <p:cNvCxnSpPr/>
           <p:nvPr/>
         </p:nvCxnSpPr>
         <p:spPr>
           <a:xfrm flipV="1">
-            <a:off x="11503152" y="5705856"/>
+            <a:off x="11503152" y="5157216"/>
             <a:ext cx="0" cy="237744"/>
           </a:xfrm>
           <a:prstGeom prst="bentConnector3">
@@ -9204,13 +8799,13 @@
       </p:cxnSp>
       <p:sp>
         <p:nvSpPr>
-          <p:cNvPr id="23" name="Rounded Rectangle 22"/>
+          <p:cNvPr id="14" name="Rounded Rectangle 13"/>
           <p:cNvSpPr/>
           <p:nvPr/>
         </p:nvSpPr>
         <p:spPr>
           <a:xfrm>
-            <a:off x="8741664" y="2976372"/>
+            <a:off x="5838444" y="3227832"/>
             <a:ext cx="512064" cy="512064"/>
           </a:xfrm>
           <a:prstGeom prst="roundRect">
@@ -9248,13 +8843,13 @@
       </p:sp>
       <p:sp>
         <p:nvSpPr>
-          <p:cNvPr id="24" name="Oval 23"/>
+          <p:cNvPr id="15" name="Oval 14"/>
           <p:cNvSpPr/>
           <p:nvPr/>
         </p:nvSpPr>
         <p:spPr>
           <a:xfrm>
-            <a:off x="8854318" y="3078784"/>
+            <a:off x="5951098" y="3330244"/>
             <a:ext cx="100584" cy="100584"/>
           </a:xfrm>
           <a:prstGeom prst="ellipse">
@@ -9292,13 +8887,13 @@
       </p:sp>
       <p:sp>
         <p:nvSpPr>
-          <p:cNvPr id="25" name="Isosceles Triangle 24"/>
+          <p:cNvPr id="16" name="Isosceles Triangle 15"/>
           <p:cNvSpPr/>
           <p:nvPr/>
         </p:nvSpPr>
         <p:spPr>
           <a:xfrm>
-            <a:off x="8895283" y="3201680"/>
+            <a:off x="5992063" y="3453140"/>
             <a:ext cx="274320" cy="164592"/>
           </a:xfrm>
           <a:prstGeom prst="triangle">
@@ -9336,14 +8931,14 @@
       </p:sp>
       <p:sp>
         <p:nvSpPr>
-          <p:cNvPr id="26" name="TextBox 25"/>
+          <p:cNvPr id="17" name="TextBox 16"/>
           <p:cNvSpPr txBox="1"/>
           <p:nvPr/>
         </p:nvSpPr>
         <p:spPr>
           <a:xfrm>
-            <a:off x="6492240" y="3579876"/>
-            <a:ext cx="5010912" cy="365760"/>
+            <a:off x="685800" y="3831336"/>
+            <a:ext cx="10817352" cy="365760"/>
           </a:xfrm>
           <a:prstGeom prst="rect">
             <a:avLst/>
@@ -9371,14 +8966,14 @@
       </p:sp>
       <p:sp>
         <p:nvSpPr>
-          <p:cNvPr id="27" name="TextBox 26"/>
+          <p:cNvPr id="18" name="TextBox 17"/>
           <p:cNvSpPr txBox="1"/>
           <p:nvPr/>
         </p:nvSpPr>
         <p:spPr>
           <a:xfrm>
-            <a:off x="6492240" y="3854196"/>
-            <a:ext cx="5010912" cy="274320"/>
+            <a:off x="685800" y="4105656"/>
+            <a:ext cx="10817352" cy="274320"/>
           </a:xfrm>
           <a:prstGeom prst="rect">
             <a:avLst/>
@@ -9400,6 +8995,435 @@
                 <a:latin typeface="Arial"/>
               </a:rPr>
               <a:t>Replace · 16:9 · 300dpi</a:t>
+            </a:r>
+          </a:p>
+        </p:txBody>
+      </p:sp>
+      <p:sp>
+        <p:nvSpPr>
+          <p:cNvPr id="19" name="Oval 18"/>
+          <p:cNvSpPr/>
+          <p:nvPr/>
+        </p:nvSpPr>
+        <p:spPr>
+          <a:xfrm>
+            <a:off x="685800" y="5532120"/>
+            <a:ext cx="384048" cy="384048"/>
+          </a:xfrm>
+          <a:prstGeom prst="ellipse">
+            <a:avLst/>
+          </a:prstGeom>
+          <a:noFill/>
+          <a:ln w="15875">
+            <a:solidFill>
+              <a:srgbClr val="1B2A4A"/>
+            </a:solidFill>
+          </a:ln>
+          <a:effectLst/>
+        </p:spPr>
+        <p:style>
+          <a:lnRef idx="1">
+            <a:schemeClr val="accent1"/>
+          </a:lnRef>
+          <a:fillRef idx="3">
+            <a:schemeClr val="accent1"/>
+          </a:fillRef>
+          <a:effectRef idx="2">
+            <a:schemeClr val="accent1"/>
+          </a:effectRef>
+          <a:fontRef idx="minor">
+            <a:schemeClr val="lt1"/>
+          </a:fontRef>
+        </p:style>
+        <p:txBody>
+          <a:bodyPr rtlCol="0" anchor="ctr"/>
+          <a:lstStyle/>
+          <a:p>
+            <a:pPr algn="ctr"/>
+          </a:p>
+        </p:txBody>
+      </p:sp>
+      <p:sp>
+        <p:nvSpPr>
+          <p:cNvPr id="20" name="Oval 19"/>
+          <p:cNvSpPr/>
+          <p:nvPr/>
+        </p:nvSpPr>
+        <p:spPr>
+          <a:xfrm>
+            <a:off x="795528" y="5641848"/>
+            <a:ext cx="164592" cy="164592"/>
+          </a:xfrm>
+          <a:prstGeom prst="ellipse">
+            <a:avLst/>
+          </a:prstGeom>
+          <a:solidFill>
+            <a:srgbClr val="1B2A4A"/>
+          </a:solidFill>
+          <a:ln>
+            <a:noFill/>
+          </a:ln>
+          <a:effectLst/>
+        </p:spPr>
+        <p:style>
+          <a:lnRef idx="1">
+            <a:schemeClr val="accent1"/>
+          </a:lnRef>
+          <a:fillRef idx="3">
+            <a:schemeClr val="accent1"/>
+          </a:fillRef>
+          <a:effectRef idx="2">
+            <a:schemeClr val="accent1"/>
+          </a:effectRef>
+          <a:fontRef idx="minor">
+            <a:schemeClr val="lt1"/>
+          </a:fontRef>
+        </p:style>
+        <p:txBody>
+          <a:bodyPr rtlCol="0" anchor="ctr"/>
+          <a:lstStyle/>
+          <a:p>
+            <a:pPr algn="ctr"/>
+          </a:p>
+        </p:txBody>
+      </p:sp>
+      <p:sp>
+        <p:nvSpPr>
+          <p:cNvPr id="21" name="TextBox 20"/>
+          <p:cNvSpPr txBox="1"/>
+          <p:nvPr/>
+        </p:nvSpPr>
+        <p:spPr>
+          <a:xfrm>
+            <a:off x="1234440" y="5486400"/>
+            <a:ext cx="2813304" cy="777240"/>
+          </a:xfrm>
+          <a:prstGeom prst="rect">
+            <a:avLst/>
+          </a:prstGeom>
+          <a:noFill/>
+        </p:spPr>
+        <p:txBody>
+          <a:bodyPr wrap="square" anchor="t" lIns="0" rIns="0" tIns="0" bIns="0">
+            <a:spAutoFit/>
+          </a:bodyPr>
+          <a:lstStyle/>
+          <a:p>
+            <a:pPr algn="l">
+              <a:spcAft>
+                <a:spcPts val="100"/>
+              </a:spcAft>
+            </a:pPr>
+            <a:r>
+              <a:rPr sz="1250" b="1" i="0">
+                <a:solidFill>
+                  <a:srgbClr val="1A1A1C"/>
+                </a:solidFill>
+                <a:latin typeface="Arial"/>
+              </a:rPr>
+              <a:t>Smart &amp; Simple</a:t>
+            </a:r>
+          </a:p>
+          <a:p>
+            <a:pPr algn="l">
+              <a:lnSpc>
+                <a:spcPct val="110000"/>
+              </a:lnSpc>
+            </a:pPr>
+            <a:r>
+              <a:rPr sz="1000" b="0" i="0">
+                <a:solidFill>
+                  <a:srgbClr val="868B94"/>
+                </a:solidFill>
+                <a:latin typeface="Arial"/>
+              </a:rPr>
+              <a:t>Approachable design for the city.</a:t>
+            </a:r>
+          </a:p>
+        </p:txBody>
+      </p:sp>
+      <p:sp>
+        <p:nvSpPr>
+          <p:cNvPr id="22" name="Oval 21"/>
+          <p:cNvSpPr/>
+          <p:nvPr/>
+        </p:nvSpPr>
+        <p:spPr>
+          <a:xfrm>
+            <a:off x="4413504" y="5532120"/>
+            <a:ext cx="384048" cy="384048"/>
+          </a:xfrm>
+          <a:prstGeom prst="ellipse">
+            <a:avLst/>
+          </a:prstGeom>
+          <a:noFill/>
+          <a:ln w="15875">
+            <a:solidFill>
+              <a:srgbClr val="1B2A4A"/>
+            </a:solidFill>
+          </a:ln>
+          <a:effectLst/>
+        </p:spPr>
+        <p:style>
+          <a:lnRef idx="1">
+            <a:schemeClr val="accent1"/>
+          </a:lnRef>
+          <a:fillRef idx="3">
+            <a:schemeClr val="accent1"/>
+          </a:fillRef>
+          <a:effectRef idx="2">
+            <a:schemeClr val="accent1"/>
+          </a:effectRef>
+          <a:fontRef idx="minor">
+            <a:schemeClr val="lt1"/>
+          </a:fontRef>
+        </p:style>
+        <p:txBody>
+          <a:bodyPr rtlCol="0" anchor="ctr"/>
+          <a:lstStyle/>
+          <a:p>
+            <a:pPr algn="ctr"/>
+          </a:p>
+        </p:txBody>
+      </p:sp>
+      <p:sp>
+        <p:nvSpPr>
+          <p:cNvPr id="23" name="Oval 22"/>
+          <p:cNvSpPr/>
+          <p:nvPr/>
+        </p:nvSpPr>
+        <p:spPr>
+          <a:xfrm>
+            <a:off x="4523232" y="5641848"/>
+            <a:ext cx="164592" cy="164592"/>
+          </a:xfrm>
+          <a:prstGeom prst="ellipse">
+            <a:avLst/>
+          </a:prstGeom>
+          <a:solidFill>
+            <a:srgbClr val="1B2A4A"/>
+          </a:solidFill>
+          <a:ln>
+            <a:noFill/>
+          </a:ln>
+          <a:effectLst/>
+        </p:spPr>
+        <p:style>
+          <a:lnRef idx="1">
+            <a:schemeClr val="accent1"/>
+          </a:lnRef>
+          <a:fillRef idx="3">
+            <a:schemeClr val="accent1"/>
+          </a:fillRef>
+          <a:effectRef idx="2">
+            <a:schemeClr val="accent1"/>
+          </a:effectRef>
+          <a:fontRef idx="minor">
+            <a:schemeClr val="lt1"/>
+          </a:fontRef>
+        </p:style>
+        <p:txBody>
+          <a:bodyPr rtlCol="0" anchor="ctr"/>
+          <a:lstStyle/>
+          <a:p>
+            <a:pPr algn="ctr"/>
+          </a:p>
+        </p:txBody>
+      </p:sp>
+      <p:sp>
+        <p:nvSpPr>
+          <p:cNvPr id="24" name="TextBox 23"/>
+          <p:cNvSpPr txBox="1"/>
+          <p:nvPr/>
+        </p:nvSpPr>
+        <p:spPr>
+          <a:xfrm>
+            <a:off x="4962144" y="5486400"/>
+            <a:ext cx="2813304" cy="777240"/>
+          </a:xfrm>
+          <a:prstGeom prst="rect">
+            <a:avLst/>
+          </a:prstGeom>
+          <a:noFill/>
+        </p:spPr>
+        <p:txBody>
+          <a:bodyPr wrap="square" anchor="t" lIns="0" rIns="0" tIns="0" bIns="0">
+            <a:spAutoFit/>
+          </a:bodyPr>
+          <a:lstStyle/>
+          <a:p>
+            <a:pPr algn="l">
+              <a:spcAft>
+                <a:spcPts val="100"/>
+              </a:spcAft>
+            </a:pPr>
+            <a:r>
+              <a:rPr sz="1250" b="1" i="0">
+                <a:solidFill>
+                  <a:srgbClr val="1A1A1C"/>
+                </a:solidFill>
+                <a:latin typeface="Arial"/>
+              </a:rPr>
+              <a:t>Attainable</a:t>
+            </a:r>
+          </a:p>
+          <a:p>
+            <a:pPr algn="l">
+              <a:lnSpc>
+                <a:spcPct val="110000"/>
+              </a:lnSpc>
+            </a:pPr>
+            <a:r>
+              <a:rPr sz="1000" b="0" i="0">
+                <a:solidFill>
+                  <a:srgbClr val="868B94"/>
+                </a:solidFill>
+                <a:latin typeface="Arial"/>
+              </a:rPr>
+              <a:t>Thoughtful style within reach.</a:t>
+            </a:r>
+          </a:p>
+        </p:txBody>
+      </p:sp>
+      <p:sp>
+        <p:nvSpPr>
+          <p:cNvPr id="25" name="Oval 24"/>
+          <p:cNvSpPr/>
+          <p:nvPr/>
+        </p:nvSpPr>
+        <p:spPr>
+          <a:xfrm>
+            <a:off x="8141208" y="5532120"/>
+            <a:ext cx="384048" cy="384048"/>
+          </a:xfrm>
+          <a:prstGeom prst="ellipse">
+            <a:avLst/>
+          </a:prstGeom>
+          <a:noFill/>
+          <a:ln w="15875">
+            <a:solidFill>
+              <a:srgbClr val="1B2A4A"/>
+            </a:solidFill>
+          </a:ln>
+          <a:effectLst/>
+        </p:spPr>
+        <p:style>
+          <a:lnRef idx="1">
+            <a:schemeClr val="accent1"/>
+          </a:lnRef>
+          <a:fillRef idx="3">
+            <a:schemeClr val="accent1"/>
+          </a:fillRef>
+          <a:effectRef idx="2">
+            <a:schemeClr val="accent1"/>
+          </a:effectRef>
+          <a:fontRef idx="minor">
+            <a:schemeClr val="lt1"/>
+          </a:fontRef>
+        </p:style>
+        <p:txBody>
+          <a:bodyPr rtlCol="0" anchor="ctr"/>
+          <a:lstStyle/>
+          <a:p>
+            <a:pPr algn="ctr"/>
+          </a:p>
+        </p:txBody>
+      </p:sp>
+      <p:sp>
+        <p:nvSpPr>
+          <p:cNvPr id="26" name="Oval 25"/>
+          <p:cNvSpPr/>
+          <p:nvPr/>
+        </p:nvSpPr>
+        <p:spPr>
+          <a:xfrm>
+            <a:off x="8250936" y="5641848"/>
+            <a:ext cx="164592" cy="164592"/>
+          </a:xfrm>
+          <a:prstGeom prst="ellipse">
+            <a:avLst/>
+          </a:prstGeom>
+          <a:solidFill>
+            <a:srgbClr val="1B2A4A"/>
+          </a:solidFill>
+          <a:ln>
+            <a:noFill/>
+          </a:ln>
+          <a:effectLst/>
+        </p:spPr>
+        <p:style>
+          <a:lnRef idx="1">
+            <a:schemeClr val="accent1"/>
+          </a:lnRef>
+          <a:fillRef idx="3">
+            <a:schemeClr val="accent1"/>
+          </a:fillRef>
+          <a:effectRef idx="2">
+            <a:schemeClr val="accent1"/>
+          </a:effectRef>
+          <a:fontRef idx="minor">
+            <a:schemeClr val="lt1"/>
+          </a:fontRef>
+        </p:style>
+        <p:txBody>
+          <a:bodyPr rtlCol="0" anchor="ctr"/>
+          <a:lstStyle/>
+          <a:p>
+            <a:pPr algn="ctr"/>
+          </a:p>
+        </p:txBody>
+      </p:sp>
+      <p:sp>
+        <p:nvSpPr>
+          <p:cNvPr id="27" name="TextBox 26"/>
+          <p:cNvSpPr txBox="1"/>
+          <p:nvPr/>
+        </p:nvSpPr>
+        <p:spPr>
+          <a:xfrm>
+            <a:off x="8689848" y="5486400"/>
+            <a:ext cx="2813304" cy="777240"/>
+          </a:xfrm>
+          <a:prstGeom prst="rect">
+            <a:avLst/>
+          </a:prstGeom>
+          <a:noFill/>
+        </p:spPr>
+        <p:txBody>
+          <a:bodyPr wrap="square" anchor="t" lIns="0" rIns="0" tIns="0" bIns="0">
+            <a:spAutoFit/>
+          </a:bodyPr>
+          <a:lstStyle/>
+          <a:p>
+            <a:pPr algn="l">
+              <a:spcAft>
+                <a:spcPts val="100"/>
+              </a:spcAft>
+            </a:pPr>
+            <a:r>
+              <a:rPr sz="1250" b="1" i="0">
+                <a:solidFill>
+                  <a:srgbClr val="1A1A1C"/>
+                </a:solidFill>
+                <a:latin typeface="Arial"/>
+              </a:rPr>
+              <a:t>Youthful &amp; Modern</a:t>
+            </a:r>
+          </a:p>
+          <a:p>
+            <a:pPr algn="l">
+              <a:lnSpc>
+                <a:spcPct val="110000"/>
+              </a:lnSpc>
+            </a:pPr>
+            <a:r>
+              <a:rPr sz="1000" b="0" i="0">
+                <a:solidFill>
+                  <a:srgbClr val="868B94"/>
+                </a:solidFill>
+                <a:latin typeface="Arial"/>
+              </a:rPr>
+              <a:t>Efficient, urban, design-led.</a:t>
             </a:r>
           </a:p>
         </p:txBody>
@@ -10305,7 +10329,7 @@
         </p:nvSpPr>
         <p:spPr>
           <a:xfrm>
-            <a:off x="685800" y="640080"/>
+            <a:off x="685800" y="548640"/>
             <a:ext cx="7315200" cy="274320"/>
           </a:xfrm>
           <a:prstGeom prst="rect">
@@ -10340,8 +10364,8 @@
         </p:nvSpPr>
         <p:spPr>
           <a:xfrm>
-            <a:off x="658368" y="960120"/>
-            <a:ext cx="5486400" cy="822960"/>
+            <a:off x="658368" y="868680"/>
+            <a:ext cx="10058400" cy="640080"/>
           </a:xfrm>
           <a:prstGeom prst="rect">
             <a:avLst/>
@@ -10356,7 +10380,7 @@
           <a:p>
             <a:pPr algn="l"/>
             <a:r>
-              <a:rPr sz="3000" b="1" i="0">
+              <a:rPr sz="2600" b="1" i="0">
                 <a:solidFill>
                   <a:srgbClr val="1A1A1C"/>
                 </a:solidFill>
@@ -10375,8 +10399,8 @@
         </p:nvSpPr>
         <p:spPr>
           <a:xfrm>
-            <a:off x="685800" y="1828800"/>
-            <a:ext cx="5120640" cy="1097280"/>
+            <a:off x="685800" y="1481328"/>
+            <a:ext cx="10817352" cy="411480"/>
           </a:xfrm>
           <a:prstGeom prst="rect">
             <a:avLst/>
@@ -10391,11 +10415,11 @@
           <a:p>
             <a:pPr algn="l">
               <a:lnSpc>
-                <a:spcPct val="130000"/>
+                <a:spcPct val="120000"/>
               </a:lnSpc>
             </a:pPr>
             <a:r>
-              <a:rPr sz="1500" b="0" i="1">
+              <a:rPr sz="1300" b="0" i="1">
                 <a:solidFill>
                   <a:srgbClr val="4A4E57"/>
                 </a:solidFill>
@@ -10408,431 +10432,14 @@
       </p:sp>
       <p:sp>
         <p:nvSpPr>
-          <p:cNvPr id="5" name="Oval 4"/>
+          <p:cNvPr id="5" name="Rectangle 4"/>
           <p:cNvSpPr/>
           <p:nvPr/>
         </p:nvSpPr>
         <p:spPr>
           <a:xfrm>
-            <a:off x="713232" y="3200400"/>
-            <a:ext cx="457200" cy="457200"/>
-          </a:xfrm>
-          <a:prstGeom prst="ellipse">
-            <a:avLst/>
-          </a:prstGeom>
-          <a:noFill/>
-          <a:ln w="15875">
-            <a:solidFill>
-              <a:srgbClr val="1B2A4A"/>
-            </a:solidFill>
-          </a:ln>
-          <a:effectLst/>
-        </p:spPr>
-        <p:style>
-          <a:lnRef idx="1">
-            <a:schemeClr val="accent1"/>
-          </a:lnRef>
-          <a:fillRef idx="3">
-            <a:schemeClr val="accent1"/>
-          </a:fillRef>
-          <a:effectRef idx="2">
-            <a:schemeClr val="accent1"/>
-          </a:effectRef>
-          <a:fontRef idx="minor">
-            <a:schemeClr val="lt1"/>
-          </a:fontRef>
-        </p:style>
-        <p:txBody>
-          <a:bodyPr rtlCol="0" anchor="ctr"/>
-          <a:lstStyle/>
-          <a:p>
-            <a:pPr algn="ctr"/>
-          </a:p>
-        </p:txBody>
-      </p:sp>
-      <p:sp>
-        <p:nvSpPr>
-          <p:cNvPr id="6" name="Oval 5"/>
-          <p:cNvSpPr/>
-          <p:nvPr/>
-        </p:nvSpPr>
-        <p:spPr>
-          <a:xfrm>
-            <a:off x="859536" y="3346704"/>
-            <a:ext cx="164592" cy="164592"/>
-          </a:xfrm>
-          <a:prstGeom prst="ellipse">
-            <a:avLst/>
-          </a:prstGeom>
-          <a:solidFill>
-            <a:srgbClr val="1B2A4A"/>
-          </a:solidFill>
-          <a:ln>
-            <a:noFill/>
-          </a:ln>
-          <a:effectLst/>
-        </p:spPr>
-        <p:style>
-          <a:lnRef idx="1">
-            <a:schemeClr val="accent1"/>
-          </a:lnRef>
-          <a:fillRef idx="3">
-            <a:schemeClr val="accent1"/>
-          </a:fillRef>
-          <a:effectRef idx="2">
-            <a:schemeClr val="accent1"/>
-          </a:effectRef>
-          <a:fontRef idx="minor">
-            <a:schemeClr val="lt1"/>
-          </a:fontRef>
-        </p:style>
-        <p:txBody>
-          <a:bodyPr rtlCol="0" anchor="ctr"/>
-          <a:lstStyle/>
-          <a:p>
-            <a:pPr algn="ctr"/>
-          </a:p>
-        </p:txBody>
-      </p:sp>
-      <p:sp>
-        <p:nvSpPr>
-          <p:cNvPr id="7" name="TextBox 6"/>
-          <p:cNvSpPr txBox="1"/>
-          <p:nvPr/>
-        </p:nvSpPr>
-        <p:spPr>
-          <a:xfrm>
-            <a:off x="1371600" y="3182112"/>
-            <a:ext cx="4572000" cy="731520"/>
-          </a:xfrm>
-          <a:prstGeom prst="rect">
-            <a:avLst/>
-          </a:prstGeom>
-          <a:noFill/>
-        </p:spPr>
-        <p:txBody>
-          <a:bodyPr wrap="square" anchor="t" lIns="0" rIns="0" tIns="0" bIns="0">
-            <a:spAutoFit/>
-          </a:bodyPr>
-          <a:lstStyle/>
-          <a:p>
-            <a:pPr algn="l">
-              <a:spcAft>
-                <a:spcPts val="200"/>
-              </a:spcAft>
-            </a:pPr>
-            <a:r>
-              <a:rPr sz="1400" b="1" i="0">
-                <a:solidFill>
-                  <a:srgbClr val="1A1A1C"/>
-                </a:solidFill>
-                <a:latin typeface="Arial"/>
-              </a:rPr>
-              <a:t>Flexible &amp; Versatile</a:t>
-            </a:r>
-          </a:p>
-          <a:p>
-            <a:pPr algn="l"/>
-            <a:r>
-              <a:rPr sz="1100" b="0" i="0">
-                <a:solidFill>
-                  <a:srgbClr val="868B94"/>
-                </a:solidFill>
-                <a:latin typeface="Arial"/>
-              </a:rPr>
-              <a:t>Thoughtful packaging for families.</a:t>
-            </a:r>
-          </a:p>
-        </p:txBody>
-      </p:sp>
-      <p:sp>
-        <p:nvSpPr>
-          <p:cNvPr id="8" name="Oval 7"/>
-          <p:cNvSpPr/>
-          <p:nvPr/>
-        </p:nvSpPr>
-        <p:spPr>
-          <a:xfrm>
-            <a:off x="713232" y="4069080"/>
-            <a:ext cx="457200" cy="457200"/>
-          </a:xfrm>
-          <a:prstGeom prst="ellipse">
-            <a:avLst/>
-          </a:prstGeom>
-          <a:noFill/>
-          <a:ln w="15875">
-            <a:solidFill>
-              <a:srgbClr val="1B2A4A"/>
-            </a:solidFill>
-          </a:ln>
-          <a:effectLst/>
-        </p:spPr>
-        <p:style>
-          <a:lnRef idx="1">
-            <a:schemeClr val="accent1"/>
-          </a:lnRef>
-          <a:fillRef idx="3">
-            <a:schemeClr val="accent1"/>
-          </a:fillRef>
-          <a:effectRef idx="2">
-            <a:schemeClr val="accent1"/>
-          </a:effectRef>
-          <a:fontRef idx="minor">
-            <a:schemeClr val="lt1"/>
-          </a:fontRef>
-        </p:style>
-        <p:txBody>
-          <a:bodyPr rtlCol="0" anchor="ctr"/>
-          <a:lstStyle/>
-          <a:p>
-            <a:pPr algn="ctr"/>
-          </a:p>
-        </p:txBody>
-      </p:sp>
-      <p:sp>
-        <p:nvSpPr>
-          <p:cNvPr id="9" name="Oval 8"/>
-          <p:cNvSpPr/>
-          <p:nvPr/>
-        </p:nvSpPr>
-        <p:spPr>
-          <a:xfrm>
-            <a:off x="859536" y="4215384"/>
-            <a:ext cx="164592" cy="164592"/>
-          </a:xfrm>
-          <a:prstGeom prst="ellipse">
-            <a:avLst/>
-          </a:prstGeom>
-          <a:solidFill>
-            <a:srgbClr val="1B2A4A"/>
-          </a:solidFill>
-          <a:ln>
-            <a:noFill/>
-          </a:ln>
-          <a:effectLst/>
-        </p:spPr>
-        <p:style>
-          <a:lnRef idx="1">
-            <a:schemeClr val="accent1"/>
-          </a:lnRef>
-          <a:fillRef idx="3">
-            <a:schemeClr val="accent1"/>
-          </a:fillRef>
-          <a:effectRef idx="2">
-            <a:schemeClr val="accent1"/>
-          </a:effectRef>
-          <a:fontRef idx="minor">
-            <a:schemeClr val="lt1"/>
-          </a:fontRef>
-        </p:style>
-        <p:txBody>
-          <a:bodyPr rtlCol="0" anchor="ctr"/>
-          <a:lstStyle/>
-          <a:p>
-            <a:pPr algn="ctr"/>
-          </a:p>
-        </p:txBody>
-      </p:sp>
-      <p:sp>
-        <p:nvSpPr>
-          <p:cNvPr id="10" name="TextBox 9"/>
-          <p:cNvSpPr txBox="1"/>
-          <p:nvPr/>
-        </p:nvSpPr>
-        <p:spPr>
-          <a:xfrm>
-            <a:off x="1371600" y="4050792"/>
-            <a:ext cx="4572000" cy="731520"/>
-          </a:xfrm>
-          <a:prstGeom prst="rect">
-            <a:avLst/>
-          </a:prstGeom>
-          <a:noFill/>
-        </p:spPr>
-        <p:txBody>
-          <a:bodyPr wrap="square" anchor="t" lIns="0" rIns="0" tIns="0" bIns="0">
-            <a:spAutoFit/>
-          </a:bodyPr>
-          <a:lstStyle/>
-          <a:p>
-            <a:pPr algn="l">
-              <a:spcAft>
-                <a:spcPts val="200"/>
-              </a:spcAft>
-            </a:pPr>
-            <a:r>
-              <a:rPr sz="1400" b="1" i="0">
-                <a:solidFill>
-                  <a:srgbClr val="1A1A1C"/>
-                </a:solidFill>
-                <a:latin typeface="Arial"/>
-              </a:rPr>
-              <a:t>Urban &amp; Useful</a:t>
-            </a:r>
-          </a:p>
-          <a:p>
-            <a:pPr algn="l"/>
-            <a:r>
-              <a:rPr sz="1100" b="0" i="0">
-                <a:solidFill>
-                  <a:srgbClr val="868B94"/>
-                </a:solidFill>
-                <a:latin typeface="Arial"/>
-              </a:rPr>
-              <a:t>Confident, modern, accessible.</a:t>
-            </a:r>
-          </a:p>
-        </p:txBody>
-      </p:sp>
-      <p:sp>
-        <p:nvSpPr>
-          <p:cNvPr id="11" name="Oval 10"/>
-          <p:cNvSpPr/>
-          <p:nvPr/>
-        </p:nvSpPr>
-        <p:spPr>
-          <a:xfrm>
-            <a:off x="713232" y="4937760"/>
-            <a:ext cx="457200" cy="457200"/>
-          </a:xfrm>
-          <a:prstGeom prst="ellipse">
-            <a:avLst/>
-          </a:prstGeom>
-          <a:noFill/>
-          <a:ln w="15875">
-            <a:solidFill>
-              <a:srgbClr val="1B2A4A"/>
-            </a:solidFill>
-          </a:ln>
-          <a:effectLst/>
-        </p:spPr>
-        <p:style>
-          <a:lnRef idx="1">
-            <a:schemeClr val="accent1"/>
-          </a:lnRef>
-          <a:fillRef idx="3">
-            <a:schemeClr val="accent1"/>
-          </a:fillRef>
-          <a:effectRef idx="2">
-            <a:schemeClr val="accent1"/>
-          </a:effectRef>
-          <a:fontRef idx="minor">
-            <a:schemeClr val="lt1"/>
-          </a:fontRef>
-        </p:style>
-        <p:txBody>
-          <a:bodyPr rtlCol="0" anchor="ctr"/>
-          <a:lstStyle/>
-          <a:p>
-            <a:pPr algn="ctr"/>
-          </a:p>
-        </p:txBody>
-      </p:sp>
-      <p:sp>
-        <p:nvSpPr>
-          <p:cNvPr id="12" name="Oval 11"/>
-          <p:cNvSpPr/>
-          <p:nvPr/>
-        </p:nvSpPr>
-        <p:spPr>
-          <a:xfrm>
-            <a:off x="859536" y="5084064"/>
-            <a:ext cx="164592" cy="164592"/>
-          </a:xfrm>
-          <a:prstGeom prst="ellipse">
-            <a:avLst/>
-          </a:prstGeom>
-          <a:solidFill>
-            <a:srgbClr val="1B2A4A"/>
-          </a:solidFill>
-          <a:ln>
-            <a:noFill/>
-          </a:ln>
-          <a:effectLst/>
-        </p:spPr>
-        <p:style>
-          <a:lnRef idx="1">
-            <a:schemeClr val="accent1"/>
-          </a:lnRef>
-          <a:fillRef idx="3">
-            <a:schemeClr val="accent1"/>
-          </a:fillRef>
-          <a:effectRef idx="2">
-            <a:schemeClr val="accent1"/>
-          </a:effectRef>
-          <a:fontRef idx="minor">
-            <a:schemeClr val="lt1"/>
-          </a:fontRef>
-        </p:style>
-        <p:txBody>
-          <a:bodyPr rtlCol="0" anchor="ctr"/>
-          <a:lstStyle/>
-          <a:p>
-            <a:pPr algn="ctr"/>
-          </a:p>
-        </p:txBody>
-      </p:sp>
-      <p:sp>
-        <p:nvSpPr>
-          <p:cNvPr id="13" name="TextBox 12"/>
-          <p:cNvSpPr txBox="1"/>
-          <p:nvPr/>
-        </p:nvSpPr>
-        <p:spPr>
-          <a:xfrm>
-            <a:off x="1371600" y="4919472"/>
-            <a:ext cx="4572000" cy="731520"/>
-          </a:xfrm>
-          <a:prstGeom prst="rect">
-            <a:avLst/>
-          </a:prstGeom>
-          <a:noFill/>
-        </p:spPr>
-        <p:txBody>
-          <a:bodyPr wrap="square" anchor="t" lIns="0" rIns="0" tIns="0" bIns="0">
-            <a:spAutoFit/>
-          </a:bodyPr>
-          <a:lstStyle/>
-          <a:p>
-            <a:pPr algn="l">
-              <a:spcAft>
-                <a:spcPts val="200"/>
-              </a:spcAft>
-            </a:pPr>
-            <a:r>
-              <a:rPr sz="1400" b="1" i="0">
-                <a:solidFill>
-                  <a:srgbClr val="1A1A1C"/>
-                </a:solidFill>
-                <a:latin typeface="Arial"/>
-              </a:rPr>
-              <a:t>Everyday Ready</a:t>
-            </a:r>
-          </a:p>
-          <a:p>
-            <a:pPr algn="l"/>
-            <a:r>
-              <a:rPr sz="1100" b="0" i="0">
-                <a:solidFill>
-                  <a:srgbClr val="868B94"/>
-                </a:solidFill>
-                <a:latin typeface="Arial"/>
-              </a:rPr>
-              <a:t>Simple design that adapts.</a:t>
-            </a:r>
-          </a:p>
-        </p:txBody>
-      </p:sp>
-      <p:sp>
-        <p:nvSpPr>
-          <p:cNvPr id="14" name="Rectangle 13"/>
-          <p:cNvSpPr/>
-          <p:nvPr/>
-        </p:nvSpPr>
-        <p:spPr>
-          <a:xfrm>
-            <a:off x="6492240" y="960120"/>
-            <a:ext cx="5010912" cy="4983480"/>
+            <a:off x="685800" y="2011680"/>
+            <a:ext cx="10817352" cy="3383280"/>
           </a:xfrm>
           <a:prstGeom prst="rect">
             <a:avLst/>
@@ -10869,13 +10476,13 @@
       </p:sp>
       <p:cxnSp>
         <p:nvCxnSpPr>
-          <p:cNvPr id="15" name="Connector 14"/>
+          <p:cNvPr id="6" name="Connector 5"/>
           <p:cNvCxnSpPr/>
           <p:nvPr/>
         </p:nvCxnSpPr>
         <p:spPr>
           <a:xfrm>
-            <a:off x="6492240" y="960120"/>
+            <a:off x="685800" y="2011680"/>
             <a:ext cx="237744" cy="0"/>
           </a:xfrm>
           <a:prstGeom prst="bentConnector3">
@@ -10904,13 +10511,13 @@
       </p:cxnSp>
       <p:cxnSp>
         <p:nvCxnSpPr>
-          <p:cNvPr id="16" name="Connector 15"/>
+          <p:cNvPr id="7" name="Connector 6"/>
           <p:cNvCxnSpPr/>
           <p:nvPr/>
         </p:nvCxnSpPr>
         <p:spPr>
           <a:xfrm>
-            <a:off x="6492240" y="960120"/>
+            <a:off x="685800" y="2011680"/>
             <a:ext cx="0" cy="237744"/>
           </a:xfrm>
           <a:prstGeom prst="bentConnector3">
@@ -10939,13 +10546,13 @@
       </p:cxnSp>
       <p:cxnSp>
         <p:nvCxnSpPr>
-          <p:cNvPr id="17" name="Connector 16"/>
+          <p:cNvPr id="8" name="Connector 7"/>
           <p:cNvCxnSpPr/>
           <p:nvPr/>
         </p:nvCxnSpPr>
         <p:spPr>
           <a:xfrm flipH="1">
-            <a:off x="11265408" y="960120"/>
+            <a:off x="11265408" y="2011680"/>
             <a:ext cx="237744" cy="0"/>
           </a:xfrm>
           <a:prstGeom prst="bentConnector3">
@@ -10974,13 +10581,13 @@
       </p:cxnSp>
       <p:cxnSp>
         <p:nvCxnSpPr>
-          <p:cNvPr id="18" name="Connector 17"/>
+          <p:cNvPr id="9" name="Connector 8"/>
           <p:cNvCxnSpPr/>
           <p:nvPr/>
         </p:nvCxnSpPr>
         <p:spPr>
           <a:xfrm>
-            <a:off x="11503152" y="960120"/>
+            <a:off x="11503152" y="2011680"/>
             <a:ext cx="0" cy="237744"/>
           </a:xfrm>
           <a:prstGeom prst="bentConnector3">
@@ -11009,13 +10616,13 @@
       </p:cxnSp>
       <p:cxnSp>
         <p:nvCxnSpPr>
-          <p:cNvPr id="19" name="Connector 18"/>
+          <p:cNvPr id="10" name="Connector 9"/>
           <p:cNvCxnSpPr/>
           <p:nvPr/>
         </p:nvCxnSpPr>
         <p:spPr>
           <a:xfrm>
-            <a:off x="6492240" y="5943600"/>
+            <a:off x="685800" y="5394960"/>
             <a:ext cx="237744" cy="0"/>
           </a:xfrm>
           <a:prstGeom prst="bentConnector3">
@@ -11044,13 +10651,13 @@
       </p:cxnSp>
       <p:cxnSp>
         <p:nvCxnSpPr>
-          <p:cNvPr id="20" name="Connector 19"/>
+          <p:cNvPr id="11" name="Connector 10"/>
           <p:cNvCxnSpPr/>
           <p:nvPr/>
         </p:nvCxnSpPr>
         <p:spPr>
           <a:xfrm flipV="1">
-            <a:off x="6492240" y="5705856"/>
+            <a:off x="685800" y="5157216"/>
             <a:ext cx="0" cy="237744"/>
           </a:xfrm>
           <a:prstGeom prst="bentConnector3">
@@ -11079,13 +10686,13 @@
       </p:cxnSp>
       <p:cxnSp>
         <p:nvCxnSpPr>
-          <p:cNvPr id="21" name="Connector 20"/>
+          <p:cNvPr id="12" name="Connector 11"/>
           <p:cNvCxnSpPr/>
           <p:nvPr/>
         </p:nvCxnSpPr>
         <p:spPr>
           <a:xfrm flipH="1">
-            <a:off x="11265408" y="5943600"/>
+            <a:off x="11265408" y="5394960"/>
             <a:ext cx="237744" cy="0"/>
           </a:xfrm>
           <a:prstGeom prst="bentConnector3">
@@ -11114,13 +10721,13 @@
       </p:cxnSp>
       <p:cxnSp>
         <p:nvCxnSpPr>
-          <p:cNvPr id="22" name="Connector 21"/>
+          <p:cNvPr id="13" name="Connector 12"/>
           <p:cNvCxnSpPr/>
           <p:nvPr/>
         </p:nvCxnSpPr>
         <p:spPr>
           <a:xfrm flipV="1">
-            <a:off x="11503152" y="5705856"/>
+            <a:off x="11503152" y="5157216"/>
             <a:ext cx="0" cy="237744"/>
           </a:xfrm>
           <a:prstGeom prst="bentConnector3">
@@ -11149,13 +10756,13 @@
       </p:cxnSp>
       <p:sp>
         <p:nvSpPr>
-          <p:cNvPr id="23" name="Rounded Rectangle 22"/>
+          <p:cNvPr id="14" name="Rounded Rectangle 13"/>
           <p:cNvSpPr/>
           <p:nvPr/>
         </p:nvSpPr>
         <p:spPr>
           <a:xfrm>
-            <a:off x="8741664" y="2976372"/>
+            <a:off x="5838444" y="3227832"/>
             <a:ext cx="512064" cy="512064"/>
           </a:xfrm>
           <a:prstGeom prst="roundRect">
@@ -11193,13 +10800,13 @@
       </p:sp>
       <p:sp>
         <p:nvSpPr>
-          <p:cNvPr id="24" name="Oval 23"/>
+          <p:cNvPr id="15" name="Oval 14"/>
           <p:cNvSpPr/>
           <p:nvPr/>
         </p:nvSpPr>
         <p:spPr>
           <a:xfrm>
-            <a:off x="8854318" y="3078784"/>
+            <a:off x="5951098" y="3330244"/>
             <a:ext cx="100584" cy="100584"/>
           </a:xfrm>
           <a:prstGeom prst="ellipse">
@@ -11237,13 +10844,13 @@
       </p:sp>
       <p:sp>
         <p:nvSpPr>
-          <p:cNvPr id="25" name="Isosceles Triangle 24"/>
+          <p:cNvPr id="16" name="Isosceles Triangle 15"/>
           <p:cNvSpPr/>
           <p:nvPr/>
         </p:nvSpPr>
         <p:spPr>
           <a:xfrm>
-            <a:off x="8895283" y="3201680"/>
+            <a:off x="5992063" y="3453140"/>
             <a:ext cx="274320" cy="164592"/>
           </a:xfrm>
           <a:prstGeom prst="triangle">
@@ -11281,14 +10888,14 @@
       </p:sp>
       <p:sp>
         <p:nvSpPr>
-          <p:cNvPr id="26" name="TextBox 25"/>
+          <p:cNvPr id="17" name="TextBox 16"/>
           <p:cNvSpPr txBox="1"/>
           <p:nvPr/>
         </p:nvSpPr>
         <p:spPr>
           <a:xfrm>
-            <a:off x="6492240" y="3579876"/>
-            <a:ext cx="5010912" cy="365760"/>
+            <a:off x="685800" y="3831336"/>
+            <a:ext cx="10817352" cy="365760"/>
           </a:xfrm>
           <a:prstGeom prst="rect">
             <a:avLst/>
@@ -11316,14 +10923,14 @@
       </p:sp>
       <p:sp>
         <p:nvSpPr>
-          <p:cNvPr id="27" name="TextBox 26"/>
+          <p:cNvPr id="18" name="TextBox 17"/>
           <p:cNvSpPr txBox="1"/>
           <p:nvPr/>
         </p:nvSpPr>
         <p:spPr>
           <a:xfrm>
-            <a:off x="6492240" y="3854196"/>
-            <a:ext cx="5010912" cy="274320"/>
+            <a:off x="685800" y="4105656"/>
+            <a:ext cx="10817352" cy="274320"/>
           </a:xfrm>
           <a:prstGeom prst="rect">
             <a:avLst/>
@@ -11345,6 +10952,435 @@
                 <a:latin typeface="Arial"/>
               </a:rPr>
               <a:t>Replace · 16:9 · 300dpi</a:t>
+            </a:r>
+          </a:p>
+        </p:txBody>
+      </p:sp>
+      <p:sp>
+        <p:nvSpPr>
+          <p:cNvPr id="19" name="Oval 18"/>
+          <p:cNvSpPr/>
+          <p:nvPr/>
+        </p:nvSpPr>
+        <p:spPr>
+          <a:xfrm>
+            <a:off x="685800" y="5532120"/>
+            <a:ext cx="384048" cy="384048"/>
+          </a:xfrm>
+          <a:prstGeom prst="ellipse">
+            <a:avLst/>
+          </a:prstGeom>
+          <a:noFill/>
+          <a:ln w="15875">
+            <a:solidFill>
+              <a:srgbClr val="1B2A4A"/>
+            </a:solidFill>
+          </a:ln>
+          <a:effectLst/>
+        </p:spPr>
+        <p:style>
+          <a:lnRef idx="1">
+            <a:schemeClr val="accent1"/>
+          </a:lnRef>
+          <a:fillRef idx="3">
+            <a:schemeClr val="accent1"/>
+          </a:fillRef>
+          <a:effectRef idx="2">
+            <a:schemeClr val="accent1"/>
+          </a:effectRef>
+          <a:fontRef idx="minor">
+            <a:schemeClr val="lt1"/>
+          </a:fontRef>
+        </p:style>
+        <p:txBody>
+          <a:bodyPr rtlCol="0" anchor="ctr"/>
+          <a:lstStyle/>
+          <a:p>
+            <a:pPr algn="ctr"/>
+          </a:p>
+        </p:txBody>
+      </p:sp>
+      <p:sp>
+        <p:nvSpPr>
+          <p:cNvPr id="20" name="Oval 19"/>
+          <p:cNvSpPr/>
+          <p:nvPr/>
+        </p:nvSpPr>
+        <p:spPr>
+          <a:xfrm>
+            <a:off x="795528" y="5641848"/>
+            <a:ext cx="164592" cy="164592"/>
+          </a:xfrm>
+          <a:prstGeom prst="ellipse">
+            <a:avLst/>
+          </a:prstGeom>
+          <a:solidFill>
+            <a:srgbClr val="1B2A4A"/>
+          </a:solidFill>
+          <a:ln>
+            <a:noFill/>
+          </a:ln>
+          <a:effectLst/>
+        </p:spPr>
+        <p:style>
+          <a:lnRef idx="1">
+            <a:schemeClr val="accent1"/>
+          </a:lnRef>
+          <a:fillRef idx="3">
+            <a:schemeClr val="accent1"/>
+          </a:fillRef>
+          <a:effectRef idx="2">
+            <a:schemeClr val="accent1"/>
+          </a:effectRef>
+          <a:fontRef idx="minor">
+            <a:schemeClr val="lt1"/>
+          </a:fontRef>
+        </p:style>
+        <p:txBody>
+          <a:bodyPr rtlCol="0" anchor="ctr"/>
+          <a:lstStyle/>
+          <a:p>
+            <a:pPr algn="ctr"/>
+          </a:p>
+        </p:txBody>
+      </p:sp>
+      <p:sp>
+        <p:nvSpPr>
+          <p:cNvPr id="21" name="TextBox 20"/>
+          <p:cNvSpPr txBox="1"/>
+          <p:nvPr/>
+        </p:nvSpPr>
+        <p:spPr>
+          <a:xfrm>
+            <a:off x="1234440" y="5486400"/>
+            <a:ext cx="2813304" cy="777240"/>
+          </a:xfrm>
+          <a:prstGeom prst="rect">
+            <a:avLst/>
+          </a:prstGeom>
+          <a:noFill/>
+        </p:spPr>
+        <p:txBody>
+          <a:bodyPr wrap="square" anchor="t" lIns="0" rIns="0" tIns="0" bIns="0">
+            <a:spAutoFit/>
+          </a:bodyPr>
+          <a:lstStyle/>
+          <a:p>
+            <a:pPr algn="l">
+              <a:spcAft>
+                <a:spcPts val="100"/>
+              </a:spcAft>
+            </a:pPr>
+            <a:r>
+              <a:rPr sz="1250" b="1" i="0">
+                <a:solidFill>
+                  <a:srgbClr val="1A1A1C"/>
+                </a:solidFill>
+                <a:latin typeface="Arial"/>
+              </a:rPr>
+              <a:t>Flexible &amp; Versatile</a:t>
+            </a:r>
+          </a:p>
+          <a:p>
+            <a:pPr algn="l">
+              <a:lnSpc>
+                <a:spcPct val="110000"/>
+              </a:lnSpc>
+            </a:pPr>
+            <a:r>
+              <a:rPr sz="1000" b="0" i="0">
+                <a:solidFill>
+                  <a:srgbClr val="868B94"/>
+                </a:solidFill>
+                <a:latin typeface="Arial"/>
+              </a:rPr>
+              <a:t>Thoughtful packaging for families.</a:t>
+            </a:r>
+          </a:p>
+        </p:txBody>
+      </p:sp>
+      <p:sp>
+        <p:nvSpPr>
+          <p:cNvPr id="22" name="Oval 21"/>
+          <p:cNvSpPr/>
+          <p:nvPr/>
+        </p:nvSpPr>
+        <p:spPr>
+          <a:xfrm>
+            <a:off x="4413504" y="5532120"/>
+            <a:ext cx="384048" cy="384048"/>
+          </a:xfrm>
+          <a:prstGeom prst="ellipse">
+            <a:avLst/>
+          </a:prstGeom>
+          <a:noFill/>
+          <a:ln w="15875">
+            <a:solidFill>
+              <a:srgbClr val="1B2A4A"/>
+            </a:solidFill>
+          </a:ln>
+          <a:effectLst/>
+        </p:spPr>
+        <p:style>
+          <a:lnRef idx="1">
+            <a:schemeClr val="accent1"/>
+          </a:lnRef>
+          <a:fillRef idx="3">
+            <a:schemeClr val="accent1"/>
+          </a:fillRef>
+          <a:effectRef idx="2">
+            <a:schemeClr val="accent1"/>
+          </a:effectRef>
+          <a:fontRef idx="minor">
+            <a:schemeClr val="lt1"/>
+          </a:fontRef>
+        </p:style>
+        <p:txBody>
+          <a:bodyPr rtlCol="0" anchor="ctr"/>
+          <a:lstStyle/>
+          <a:p>
+            <a:pPr algn="ctr"/>
+          </a:p>
+        </p:txBody>
+      </p:sp>
+      <p:sp>
+        <p:nvSpPr>
+          <p:cNvPr id="23" name="Oval 22"/>
+          <p:cNvSpPr/>
+          <p:nvPr/>
+        </p:nvSpPr>
+        <p:spPr>
+          <a:xfrm>
+            <a:off x="4523232" y="5641848"/>
+            <a:ext cx="164592" cy="164592"/>
+          </a:xfrm>
+          <a:prstGeom prst="ellipse">
+            <a:avLst/>
+          </a:prstGeom>
+          <a:solidFill>
+            <a:srgbClr val="1B2A4A"/>
+          </a:solidFill>
+          <a:ln>
+            <a:noFill/>
+          </a:ln>
+          <a:effectLst/>
+        </p:spPr>
+        <p:style>
+          <a:lnRef idx="1">
+            <a:schemeClr val="accent1"/>
+          </a:lnRef>
+          <a:fillRef idx="3">
+            <a:schemeClr val="accent1"/>
+          </a:fillRef>
+          <a:effectRef idx="2">
+            <a:schemeClr val="accent1"/>
+          </a:effectRef>
+          <a:fontRef idx="minor">
+            <a:schemeClr val="lt1"/>
+          </a:fontRef>
+        </p:style>
+        <p:txBody>
+          <a:bodyPr rtlCol="0" anchor="ctr"/>
+          <a:lstStyle/>
+          <a:p>
+            <a:pPr algn="ctr"/>
+          </a:p>
+        </p:txBody>
+      </p:sp>
+      <p:sp>
+        <p:nvSpPr>
+          <p:cNvPr id="24" name="TextBox 23"/>
+          <p:cNvSpPr txBox="1"/>
+          <p:nvPr/>
+        </p:nvSpPr>
+        <p:spPr>
+          <a:xfrm>
+            <a:off x="4962144" y="5486400"/>
+            <a:ext cx="2813304" cy="777240"/>
+          </a:xfrm>
+          <a:prstGeom prst="rect">
+            <a:avLst/>
+          </a:prstGeom>
+          <a:noFill/>
+        </p:spPr>
+        <p:txBody>
+          <a:bodyPr wrap="square" anchor="t" lIns="0" rIns="0" tIns="0" bIns="0">
+            <a:spAutoFit/>
+          </a:bodyPr>
+          <a:lstStyle/>
+          <a:p>
+            <a:pPr algn="l">
+              <a:spcAft>
+                <a:spcPts val="100"/>
+              </a:spcAft>
+            </a:pPr>
+            <a:r>
+              <a:rPr sz="1250" b="1" i="0">
+                <a:solidFill>
+                  <a:srgbClr val="1A1A1C"/>
+                </a:solidFill>
+                <a:latin typeface="Arial"/>
+              </a:rPr>
+              <a:t>Urban &amp; Useful</a:t>
+            </a:r>
+          </a:p>
+          <a:p>
+            <a:pPr algn="l">
+              <a:lnSpc>
+                <a:spcPct val="110000"/>
+              </a:lnSpc>
+            </a:pPr>
+            <a:r>
+              <a:rPr sz="1000" b="0" i="0">
+                <a:solidFill>
+                  <a:srgbClr val="868B94"/>
+                </a:solidFill>
+                <a:latin typeface="Arial"/>
+              </a:rPr>
+              <a:t>Confident, modern, accessible.</a:t>
+            </a:r>
+          </a:p>
+        </p:txBody>
+      </p:sp>
+      <p:sp>
+        <p:nvSpPr>
+          <p:cNvPr id="25" name="Oval 24"/>
+          <p:cNvSpPr/>
+          <p:nvPr/>
+        </p:nvSpPr>
+        <p:spPr>
+          <a:xfrm>
+            <a:off x="8141208" y="5532120"/>
+            <a:ext cx="384048" cy="384048"/>
+          </a:xfrm>
+          <a:prstGeom prst="ellipse">
+            <a:avLst/>
+          </a:prstGeom>
+          <a:noFill/>
+          <a:ln w="15875">
+            <a:solidFill>
+              <a:srgbClr val="1B2A4A"/>
+            </a:solidFill>
+          </a:ln>
+          <a:effectLst/>
+        </p:spPr>
+        <p:style>
+          <a:lnRef idx="1">
+            <a:schemeClr val="accent1"/>
+          </a:lnRef>
+          <a:fillRef idx="3">
+            <a:schemeClr val="accent1"/>
+          </a:fillRef>
+          <a:effectRef idx="2">
+            <a:schemeClr val="accent1"/>
+          </a:effectRef>
+          <a:fontRef idx="minor">
+            <a:schemeClr val="lt1"/>
+          </a:fontRef>
+        </p:style>
+        <p:txBody>
+          <a:bodyPr rtlCol="0" anchor="ctr"/>
+          <a:lstStyle/>
+          <a:p>
+            <a:pPr algn="ctr"/>
+          </a:p>
+        </p:txBody>
+      </p:sp>
+      <p:sp>
+        <p:nvSpPr>
+          <p:cNvPr id="26" name="Oval 25"/>
+          <p:cNvSpPr/>
+          <p:nvPr/>
+        </p:nvSpPr>
+        <p:spPr>
+          <a:xfrm>
+            <a:off x="8250936" y="5641848"/>
+            <a:ext cx="164592" cy="164592"/>
+          </a:xfrm>
+          <a:prstGeom prst="ellipse">
+            <a:avLst/>
+          </a:prstGeom>
+          <a:solidFill>
+            <a:srgbClr val="1B2A4A"/>
+          </a:solidFill>
+          <a:ln>
+            <a:noFill/>
+          </a:ln>
+          <a:effectLst/>
+        </p:spPr>
+        <p:style>
+          <a:lnRef idx="1">
+            <a:schemeClr val="accent1"/>
+          </a:lnRef>
+          <a:fillRef idx="3">
+            <a:schemeClr val="accent1"/>
+          </a:fillRef>
+          <a:effectRef idx="2">
+            <a:schemeClr val="accent1"/>
+          </a:effectRef>
+          <a:fontRef idx="minor">
+            <a:schemeClr val="lt1"/>
+          </a:fontRef>
+        </p:style>
+        <p:txBody>
+          <a:bodyPr rtlCol="0" anchor="ctr"/>
+          <a:lstStyle/>
+          <a:p>
+            <a:pPr algn="ctr"/>
+          </a:p>
+        </p:txBody>
+      </p:sp>
+      <p:sp>
+        <p:nvSpPr>
+          <p:cNvPr id="27" name="TextBox 26"/>
+          <p:cNvSpPr txBox="1"/>
+          <p:nvPr/>
+        </p:nvSpPr>
+        <p:spPr>
+          <a:xfrm>
+            <a:off x="8689848" y="5486400"/>
+            <a:ext cx="2813304" cy="777240"/>
+          </a:xfrm>
+          <a:prstGeom prst="rect">
+            <a:avLst/>
+          </a:prstGeom>
+          <a:noFill/>
+        </p:spPr>
+        <p:txBody>
+          <a:bodyPr wrap="square" anchor="t" lIns="0" rIns="0" tIns="0" bIns="0">
+            <a:spAutoFit/>
+          </a:bodyPr>
+          <a:lstStyle/>
+          <a:p>
+            <a:pPr algn="l">
+              <a:spcAft>
+                <a:spcPts val="100"/>
+              </a:spcAft>
+            </a:pPr>
+            <a:r>
+              <a:rPr sz="1250" b="1" i="0">
+                <a:solidFill>
+                  <a:srgbClr val="1A1A1C"/>
+                </a:solidFill>
+                <a:latin typeface="Arial"/>
+              </a:rPr>
+              <a:t>Everyday Ready</a:t>
+            </a:r>
+          </a:p>
+          <a:p>
+            <a:pPr algn="l">
+              <a:lnSpc>
+                <a:spcPct val="110000"/>
+              </a:lnSpc>
+            </a:pPr>
+            <a:r>
+              <a:rPr sz="1000" b="0" i="0">
+                <a:solidFill>
+                  <a:srgbClr val="868B94"/>
+                </a:solidFill>
+                <a:latin typeface="Arial"/>
+              </a:rPr>
+              <a:t>Simple design that adapts.</a:t>
             </a:r>
           </a:p>
         </p:txBody>
@@ -24258,7 +24294,7 @@
         </p:nvSpPr>
         <p:spPr>
           <a:xfrm>
-            <a:off x="685800" y="640080"/>
+            <a:off x="685800" y="548640"/>
             <a:ext cx="7315200" cy="274320"/>
           </a:xfrm>
           <a:prstGeom prst="rect">
@@ -24293,8 +24329,8 @@
         </p:nvSpPr>
         <p:spPr>
           <a:xfrm>
-            <a:off x="658368" y="960120"/>
-            <a:ext cx="5486400" cy="822960"/>
+            <a:off x="658368" y="868680"/>
+            <a:ext cx="10058400" cy="640080"/>
           </a:xfrm>
           <a:prstGeom prst="rect">
             <a:avLst/>
@@ -24309,7 +24345,7 @@
           <a:p>
             <a:pPr algn="l"/>
             <a:r>
-              <a:rPr sz="3000" b="1" i="0">
+              <a:rPr sz="2600" b="1" i="0">
                 <a:solidFill>
                   <a:srgbClr val="1A1A1C"/>
                 </a:solidFill>
@@ -24328,8 +24364,8 @@
         </p:nvSpPr>
         <p:spPr>
           <a:xfrm>
-            <a:off x="685800" y="1828800"/>
-            <a:ext cx="5120640" cy="1097280"/>
+            <a:off x="685800" y="1481328"/>
+            <a:ext cx="10817352" cy="411480"/>
           </a:xfrm>
           <a:prstGeom prst="rect">
             <a:avLst/>
@@ -24344,11 +24380,11 @@
           <a:p>
             <a:pPr algn="l">
               <a:lnSpc>
-                <a:spcPct val="130000"/>
+                <a:spcPct val="120000"/>
               </a:lnSpc>
             </a:pPr>
             <a:r>
-              <a:rPr sz="1500" b="0" i="1">
+              <a:rPr sz="1300" b="0" i="1">
                 <a:solidFill>
                   <a:srgbClr val="4A4E57"/>
                 </a:solidFill>
@@ -24361,431 +24397,14 @@
       </p:sp>
       <p:sp>
         <p:nvSpPr>
-          <p:cNvPr id="5" name="Oval 4"/>
+          <p:cNvPr id="5" name="Rectangle 4"/>
           <p:cNvSpPr/>
           <p:nvPr/>
         </p:nvSpPr>
         <p:spPr>
           <a:xfrm>
-            <a:off x="713232" y="3200400"/>
-            <a:ext cx="457200" cy="457200"/>
-          </a:xfrm>
-          <a:prstGeom prst="ellipse">
-            <a:avLst/>
-          </a:prstGeom>
-          <a:noFill/>
-          <a:ln w="15875">
-            <a:solidFill>
-              <a:srgbClr val="1B2A4A"/>
-            </a:solidFill>
-          </a:ln>
-          <a:effectLst/>
-        </p:spPr>
-        <p:style>
-          <a:lnRef idx="1">
-            <a:schemeClr val="accent1"/>
-          </a:lnRef>
-          <a:fillRef idx="3">
-            <a:schemeClr val="accent1"/>
-          </a:fillRef>
-          <a:effectRef idx="2">
-            <a:schemeClr val="accent1"/>
-          </a:effectRef>
-          <a:fontRef idx="minor">
-            <a:schemeClr val="lt1"/>
-          </a:fontRef>
-        </p:style>
-        <p:txBody>
-          <a:bodyPr rtlCol="0" anchor="ctr"/>
-          <a:lstStyle/>
-          <a:p>
-            <a:pPr algn="ctr"/>
-          </a:p>
-        </p:txBody>
-      </p:sp>
-      <p:sp>
-        <p:nvSpPr>
-          <p:cNvPr id="6" name="Oval 5"/>
-          <p:cNvSpPr/>
-          <p:nvPr/>
-        </p:nvSpPr>
-        <p:spPr>
-          <a:xfrm>
-            <a:off x="859536" y="3346704"/>
-            <a:ext cx="164592" cy="164592"/>
-          </a:xfrm>
-          <a:prstGeom prst="ellipse">
-            <a:avLst/>
-          </a:prstGeom>
-          <a:solidFill>
-            <a:srgbClr val="1B2A4A"/>
-          </a:solidFill>
-          <a:ln>
-            <a:noFill/>
-          </a:ln>
-          <a:effectLst/>
-        </p:spPr>
-        <p:style>
-          <a:lnRef idx="1">
-            <a:schemeClr val="accent1"/>
-          </a:lnRef>
-          <a:fillRef idx="3">
-            <a:schemeClr val="accent1"/>
-          </a:fillRef>
-          <a:effectRef idx="2">
-            <a:schemeClr val="accent1"/>
-          </a:effectRef>
-          <a:fontRef idx="minor">
-            <a:schemeClr val="lt1"/>
-          </a:fontRef>
-        </p:style>
-        <p:txBody>
-          <a:bodyPr rtlCol="0" anchor="ctr"/>
-          <a:lstStyle/>
-          <a:p>
-            <a:pPr algn="ctr"/>
-          </a:p>
-        </p:txBody>
-      </p:sp>
-      <p:sp>
-        <p:nvSpPr>
-          <p:cNvPr id="7" name="TextBox 6"/>
-          <p:cNvSpPr txBox="1"/>
-          <p:nvPr/>
-        </p:nvSpPr>
-        <p:spPr>
-          <a:xfrm>
-            <a:off x="1371600" y="3182112"/>
-            <a:ext cx="4572000" cy="731520"/>
-          </a:xfrm>
-          <a:prstGeom prst="rect">
-            <a:avLst/>
-          </a:prstGeom>
-          <a:noFill/>
-        </p:spPr>
-        <p:txBody>
-          <a:bodyPr wrap="square" anchor="t" lIns="0" rIns="0" tIns="0" bIns="0">
-            <a:spAutoFit/>
-          </a:bodyPr>
-          <a:lstStyle/>
-          <a:p>
-            <a:pPr algn="l">
-              <a:spcAft>
-                <a:spcPts val="200"/>
-              </a:spcAft>
-            </a:pPr>
-            <a:r>
-              <a:rPr sz="1400" b="1" i="0">
-                <a:solidFill>
-                  <a:srgbClr val="1A1A1C"/>
-                </a:solidFill>
-                <a:latin typeface="Arial"/>
-              </a:rPr>
-              <a:t>Flexible by Design</a:t>
-            </a:r>
-          </a:p>
-          <a:p>
-            <a:pPr algn="l"/>
-            <a:r>
-              <a:rPr sz="1100" b="0" i="0">
-                <a:solidFill>
-                  <a:srgbClr val="868B94"/>
-                </a:solidFill>
-                <a:latin typeface="Arial"/>
-              </a:rPr>
-              <a:t>Space that adapts to every journey.</a:t>
-            </a:r>
-          </a:p>
-        </p:txBody>
-      </p:sp>
-      <p:sp>
-        <p:nvSpPr>
-          <p:cNvPr id="8" name="Oval 7"/>
-          <p:cNvSpPr/>
-          <p:nvPr/>
-        </p:nvSpPr>
-        <p:spPr>
-          <a:xfrm>
-            <a:off x="713232" y="4069080"/>
-            <a:ext cx="457200" cy="457200"/>
-          </a:xfrm>
-          <a:prstGeom prst="ellipse">
-            <a:avLst/>
-          </a:prstGeom>
-          <a:noFill/>
-          <a:ln w="15875">
-            <a:solidFill>
-              <a:srgbClr val="1B2A4A"/>
-            </a:solidFill>
-          </a:ln>
-          <a:effectLst/>
-        </p:spPr>
-        <p:style>
-          <a:lnRef idx="1">
-            <a:schemeClr val="accent1"/>
-          </a:lnRef>
-          <a:fillRef idx="3">
-            <a:schemeClr val="accent1"/>
-          </a:fillRef>
-          <a:effectRef idx="2">
-            <a:schemeClr val="accent1"/>
-          </a:effectRef>
-          <a:fontRef idx="minor">
-            <a:schemeClr val="lt1"/>
-          </a:fontRef>
-        </p:style>
-        <p:txBody>
-          <a:bodyPr rtlCol="0" anchor="ctr"/>
-          <a:lstStyle/>
-          <a:p>
-            <a:pPr algn="ctr"/>
-          </a:p>
-        </p:txBody>
-      </p:sp>
-      <p:sp>
-        <p:nvSpPr>
-          <p:cNvPr id="9" name="Oval 8"/>
-          <p:cNvSpPr/>
-          <p:nvPr/>
-        </p:nvSpPr>
-        <p:spPr>
-          <a:xfrm>
-            <a:off x="859536" y="4215384"/>
-            <a:ext cx="164592" cy="164592"/>
-          </a:xfrm>
-          <a:prstGeom prst="ellipse">
-            <a:avLst/>
-          </a:prstGeom>
-          <a:solidFill>
-            <a:srgbClr val="1B2A4A"/>
-          </a:solidFill>
-          <a:ln>
-            <a:noFill/>
-          </a:ln>
-          <a:effectLst/>
-        </p:spPr>
-        <p:style>
-          <a:lnRef idx="1">
-            <a:schemeClr val="accent1"/>
-          </a:lnRef>
-          <a:fillRef idx="3">
-            <a:schemeClr val="accent1"/>
-          </a:fillRef>
-          <a:effectRef idx="2">
-            <a:schemeClr val="accent1"/>
-          </a:effectRef>
-          <a:fontRef idx="minor">
-            <a:schemeClr val="lt1"/>
-          </a:fontRef>
-        </p:style>
-        <p:txBody>
-          <a:bodyPr rtlCol="0" anchor="ctr"/>
-          <a:lstStyle/>
-          <a:p>
-            <a:pPr algn="ctr"/>
-          </a:p>
-        </p:txBody>
-      </p:sp>
-      <p:sp>
-        <p:nvSpPr>
-          <p:cNvPr id="10" name="TextBox 9"/>
-          <p:cNvSpPr txBox="1"/>
-          <p:nvPr/>
-        </p:nvSpPr>
-        <p:spPr>
-          <a:xfrm>
-            <a:off x="1371600" y="4050792"/>
-            <a:ext cx="4572000" cy="731520"/>
-          </a:xfrm>
-          <a:prstGeom prst="rect">
-            <a:avLst/>
-          </a:prstGeom>
-          <a:noFill/>
-        </p:spPr>
-        <p:txBody>
-          <a:bodyPr wrap="square" anchor="t" lIns="0" rIns="0" tIns="0" bIns="0">
-            <a:spAutoFit/>
-          </a:bodyPr>
-          <a:lstStyle/>
-          <a:p>
-            <a:pPr algn="l">
-              <a:spcAft>
-                <a:spcPts val="200"/>
-              </a:spcAft>
-            </a:pPr>
-            <a:r>
-              <a:rPr sz="1400" b="1" i="0">
-                <a:solidFill>
-                  <a:srgbClr val="1A1A1C"/>
-                </a:solidFill>
-                <a:latin typeface="Arial"/>
-              </a:rPr>
-              <a:t>Sophisticated Comfort</a:t>
-            </a:r>
-          </a:p>
-          <a:p>
-            <a:pPr algn="l"/>
-            <a:r>
-              <a:rPr sz="1100" b="0" i="0">
-                <a:solidFill>
-                  <a:srgbClr val="868B94"/>
-                </a:solidFill>
-                <a:latin typeface="Arial"/>
-              </a:rPr>
-              <a:t>Refined, calm, effortlessly livable.</a:t>
-            </a:r>
-          </a:p>
-        </p:txBody>
-      </p:sp>
-      <p:sp>
-        <p:nvSpPr>
-          <p:cNvPr id="11" name="Oval 10"/>
-          <p:cNvSpPr/>
-          <p:nvPr/>
-        </p:nvSpPr>
-        <p:spPr>
-          <a:xfrm>
-            <a:off x="713232" y="4937760"/>
-            <a:ext cx="457200" cy="457200"/>
-          </a:xfrm>
-          <a:prstGeom prst="ellipse">
-            <a:avLst/>
-          </a:prstGeom>
-          <a:noFill/>
-          <a:ln w="15875">
-            <a:solidFill>
-              <a:srgbClr val="1B2A4A"/>
-            </a:solidFill>
-          </a:ln>
-          <a:effectLst/>
-        </p:spPr>
-        <p:style>
-          <a:lnRef idx="1">
-            <a:schemeClr val="accent1"/>
-          </a:lnRef>
-          <a:fillRef idx="3">
-            <a:schemeClr val="accent1"/>
-          </a:fillRef>
-          <a:effectRef idx="2">
-            <a:schemeClr val="accent1"/>
-          </a:effectRef>
-          <a:fontRef idx="minor">
-            <a:schemeClr val="lt1"/>
-          </a:fontRef>
-        </p:style>
-        <p:txBody>
-          <a:bodyPr rtlCol="0" anchor="ctr"/>
-          <a:lstStyle/>
-          <a:p>
-            <a:pPr algn="ctr"/>
-          </a:p>
-        </p:txBody>
-      </p:sp>
-      <p:sp>
-        <p:nvSpPr>
-          <p:cNvPr id="12" name="Oval 11"/>
-          <p:cNvSpPr/>
-          <p:nvPr/>
-        </p:nvSpPr>
-        <p:spPr>
-          <a:xfrm>
-            <a:off x="859536" y="5084064"/>
-            <a:ext cx="164592" cy="164592"/>
-          </a:xfrm>
-          <a:prstGeom prst="ellipse">
-            <a:avLst/>
-          </a:prstGeom>
-          <a:solidFill>
-            <a:srgbClr val="1B2A4A"/>
-          </a:solidFill>
-          <a:ln>
-            <a:noFill/>
-          </a:ln>
-          <a:effectLst/>
-        </p:spPr>
-        <p:style>
-          <a:lnRef idx="1">
-            <a:schemeClr val="accent1"/>
-          </a:lnRef>
-          <a:fillRef idx="3">
-            <a:schemeClr val="accent1"/>
-          </a:fillRef>
-          <a:effectRef idx="2">
-            <a:schemeClr val="accent1"/>
-          </a:effectRef>
-          <a:fontRef idx="minor">
-            <a:schemeClr val="lt1"/>
-          </a:fontRef>
-        </p:style>
-        <p:txBody>
-          <a:bodyPr rtlCol="0" anchor="ctr"/>
-          <a:lstStyle/>
-          <a:p>
-            <a:pPr algn="ctr"/>
-          </a:p>
-        </p:txBody>
-      </p:sp>
-      <p:sp>
-        <p:nvSpPr>
-          <p:cNvPr id="13" name="TextBox 12"/>
-          <p:cNvSpPr txBox="1"/>
-          <p:nvPr/>
-        </p:nvSpPr>
-        <p:spPr>
-          <a:xfrm>
-            <a:off x="1371600" y="4919472"/>
-            <a:ext cx="4572000" cy="731520"/>
-          </a:xfrm>
-          <a:prstGeom prst="rect">
-            <a:avLst/>
-          </a:prstGeom>
-          <a:noFill/>
-        </p:spPr>
-        <p:txBody>
-          <a:bodyPr wrap="square" anchor="t" lIns="0" rIns="0" tIns="0" bIns="0">
-            <a:spAutoFit/>
-          </a:bodyPr>
-          <a:lstStyle/>
-          <a:p>
-            <a:pPr algn="l">
-              <a:spcAft>
-                <a:spcPts val="200"/>
-              </a:spcAft>
-            </a:pPr>
-            <a:r>
-              <a:rPr sz="1400" b="1" i="0">
-                <a:solidFill>
-                  <a:srgbClr val="1A1A1C"/>
-                </a:solidFill>
-                <a:latin typeface="Arial"/>
-              </a:rPr>
-              <a:t>Technology Around People</a:t>
-            </a:r>
-          </a:p>
-          <a:p>
-            <a:pPr algn="l"/>
-            <a:r>
-              <a:rPr sz="1100" b="0" i="0">
-                <a:solidFill>
-                  <a:srgbClr val="868B94"/>
-                </a:solidFill>
-                <a:latin typeface="Arial"/>
-              </a:rPr>
-              <a:t>Intelligence that serves the family.</a:t>
-            </a:r>
-          </a:p>
-        </p:txBody>
-      </p:sp>
-      <p:sp>
-        <p:nvSpPr>
-          <p:cNvPr id="14" name="Rectangle 13"/>
-          <p:cNvSpPr/>
-          <p:nvPr/>
-        </p:nvSpPr>
-        <p:spPr>
-          <a:xfrm>
-            <a:off x="6492240" y="960120"/>
-            <a:ext cx="5010912" cy="4983480"/>
+            <a:off x="685800" y="2011680"/>
+            <a:ext cx="10817352" cy="3383280"/>
           </a:xfrm>
           <a:prstGeom prst="rect">
             <a:avLst/>
@@ -24822,13 +24441,13 @@
       </p:sp>
       <p:cxnSp>
         <p:nvCxnSpPr>
-          <p:cNvPr id="15" name="Connector 14"/>
+          <p:cNvPr id="6" name="Connector 5"/>
           <p:cNvCxnSpPr/>
           <p:nvPr/>
         </p:nvCxnSpPr>
         <p:spPr>
           <a:xfrm>
-            <a:off x="6492240" y="960120"/>
+            <a:off x="685800" y="2011680"/>
             <a:ext cx="237744" cy="0"/>
           </a:xfrm>
           <a:prstGeom prst="bentConnector3">
@@ -24857,13 +24476,13 @@
       </p:cxnSp>
       <p:cxnSp>
         <p:nvCxnSpPr>
-          <p:cNvPr id="16" name="Connector 15"/>
+          <p:cNvPr id="7" name="Connector 6"/>
           <p:cNvCxnSpPr/>
           <p:nvPr/>
         </p:nvCxnSpPr>
         <p:spPr>
           <a:xfrm>
-            <a:off x="6492240" y="960120"/>
+            <a:off x="685800" y="2011680"/>
             <a:ext cx="0" cy="237744"/>
           </a:xfrm>
           <a:prstGeom prst="bentConnector3">
@@ -24892,13 +24511,13 @@
       </p:cxnSp>
       <p:cxnSp>
         <p:nvCxnSpPr>
-          <p:cNvPr id="17" name="Connector 16"/>
+          <p:cNvPr id="8" name="Connector 7"/>
           <p:cNvCxnSpPr/>
           <p:nvPr/>
         </p:nvCxnSpPr>
         <p:spPr>
           <a:xfrm flipH="1">
-            <a:off x="11265408" y="960120"/>
+            <a:off x="11265408" y="2011680"/>
             <a:ext cx="237744" cy="0"/>
           </a:xfrm>
           <a:prstGeom prst="bentConnector3">
@@ -24927,13 +24546,13 @@
       </p:cxnSp>
       <p:cxnSp>
         <p:nvCxnSpPr>
-          <p:cNvPr id="18" name="Connector 17"/>
+          <p:cNvPr id="9" name="Connector 8"/>
           <p:cNvCxnSpPr/>
           <p:nvPr/>
         </p:nvCxnSpPr>
         <p:spPr>
           <a:xfrm>
-            <a:off x="11503152" y="960120"/>
+            <a:off x="11503152" y="2011680"/>
             <a:ext cx="0" cy="237744"/>
           </a:xfrm>
           <a:prstGeom prst="bentConnector3">
@@ -24962,13 +24581,13 @@
       </p:cxnSp>
       <p:cxnSp>
         <p:nvCxnSpPr>
-          <p:cNvPr id="19" name="Connector 18"/>
+          <p:cNvPr id="10" name="Connector 9"/>
           <p:cNvCxnSpPr/>
           <p:nvPr/>
         </p:nvCxnSpPr>
         <p:spPr>
           <a:xfrm>
-            <a:off x="6492240" y="5943600"/>
+            <a:off x="685800" y="5394960"/>
             <a:ext cx="237744" cy="0"/>
           </a:xfrm>
           <a:prstGeom prst="bentConnector3">
@@ -24997,13 +24616,13 @@
       </p:cxnSp>
       <p:cxnSp>
         <p:nvCxnSpPr>
-          <p:cNvPr id="20" name="Connector 19"/>
+          <p:cNvPr id="11" name="Connector 10"/>
           <p:cNvCxnSpPr/>
           <p:nvPr/>
         </p:nvCxnSpPr>
         <p:spPr>
           <a:xfrm flipV="1">
-            <a:off x="6492240" y="5705856"/>
+            <a:off x="685800" y="5157216"/>
             <a:ext cx="0" cy="237744"/>
           </a:xfrm>
           <a:prstGeom prst="bentConnector3">
@@ -25032,13 +24651,13 @@
       </p:cxnSp>
       <p:cxnSp>
         <p:nvCxnSpPr>
-          <p:cNvPr id="21" name="Connector 20"/>
+          <p:cNvPr id="12" name="Connector 11"/>
           <p:cNvCxnSpPr/>
           <p:nvPr/>
         </p:nvCxnSpPr>
         <p:spPr>
           <a:xfrm flipH="1">
-            <a:off x="11265408" y="5943600"/>
+            <a:off x="11265408" y="5394960"/>
             <a:ext cx="237744" cy="0"/>
           </a:xfrm>
           <a:prstGeom prst="bentConnector3">
@@ -25067,13 +24686,13 @@
       </p:cxnSp>
       <p:cxnSp>
         <p:nvCxnSpPr>
-          <p:cNvPr id="22" name="Connector 21"/>
+          <p:cNvPr id="13" name="Connector 12"/>
           <p:cNvCxnSpPr/>
           <p:nvPr/>
         </p:nvCxnSpPr>
         <p:spPr>
           <a:xfrm flipV="1">
-            <a:off x="11503152" y="5705856"/>
+            <a:off x="11503152" y="5157216"/>
             <a:ext cx="0" cy="237744"/>
           </a:xfrm>
           <a:prstGeom prst="bentConnector3">
@@ -25102,13 +24721,13 @@
       </p:cxnSp>
       <p:sp>
         <p:nvSpPr>
-          <p:cNvPr id="23" name="Rounded Rectangle 22"/>
+          <p:cNvPr id="14" name="Rounded Rectangle 13"/>
           <p:cNvSpPr/>
           <p:nvPr/>
         </p:nvSpPr>
         <p:spPr>
           <a:xfrm>
-            <a:off x="8741664" y="2976372"/>
+            <a:off x="5838444" y="3227832"/>
             <a:ext cx="512064" cy="512064"/>
           </a:xfrm>
           <a:prstGeom prst="roundRect">
@@ -25146,13 +24765,13 @@
       </p:sp>
       <p:sp>
         <p:nvSpPr>
-          <p:cNvPr id="24" name="Oval 23"/>
+          <p:cNvPr id="15" name="Oval 14"/>
           <p:cNvSpPr/>
           <p:nvPr/>
         </p:nvSpPr>
         <p:spPr>
           <a:xfrm>
-            <a:off x="8854318" y="3078784"/>
+            <a:off x="5951098" y="3330244"/>
             <a:ext cx="100584" cy="100584"/>
           </a:xfrm>
           <a:prstGeom prst="ellipse">
@@ -25190,13 +24809,13 @@
       </p:sp>
       <p:sp>
         <p:nvSpPr>
-          <p:cNvPr id="25" name="Isosceles Triangle 24"/>
+          <p:cNvPr id="16" name="Isosceles Triangle 15"/>
           <p:cNvSpPr/>
           <p:nvPr/>
         </p:nvSpPr>
         <p:spPr>
           <a:xfrm>
-            <a:off x="8895283" y="3201680"/>
+            <a:off x="5992063" y="3453140"/>
             <a:ext cx="274320" cy="164592"/>
           </a:xfrm>
           <a:prstGeom prst="triangle">
@@ -25234,14 +24853,14 @@
       </p:sp>
       <p:sp>
         <p:nvSpPr>
-          <p:cNvPr id="26" name="TextBox 25"/>
+          <p:cNvPr id="17" name="TextBox 16"/>
           <p:cNvSpPr txBox="1"/>
           <p:nvPr/>
         </p:nvSpPr>
         <p:spPr>
           <a:xfrm>
-            <a:off x="6492240" y="3579876"/>
-            <a:ext cx="5010912" cy="365760"/>
+            <a:off x="685800" y="3831336"/>
+            <a:ext cx="10817352" cy="365760"/>
           </a:xfrm>
           <a:prstGeom prst="rect">
             <a:avLst/>
@@ -25269,14 +24888,14 @@
       </p:sp>
       <p:sp>
         <p:nvSpPr>
-          <p:cNvPr id="27" name="TextBox 26"/>
+          <p:cNvPr id="18" name="TextBox 17"/>
           <p:cNvSpPr txBox="1"/>
           <p:nvPr/>
         </p:nvSpPr>
         <p:spPr>
           <a:xfrm>
-            <a:off x="6492240" y="3854196"/>
-            <a:ext cx="5010912" cy="274320"/>
+            <a:off x="685800" y="4105656"/>
+            <a:ext cx="10817352" cy="274320"/>
           </a:xfrm>
           <a:prstGeom prst="rect">
             <a:avLst/>
@@ -25298,6 +24917,435 @@
                 <a:latin typeface="Arial"/>
               </a:rPr>
               <a:t>Replace · 16:9 · 300dpi</a:t>
+            </a:r>
+          </a:p>
+        </p:txBody>
+      </p:sp>
+      <p:sp>
+        <p:nvSpPr>
+          <p:cNvPr id="19" name="Oval 18"/>
+          <p:cNvSpPr/>
+          <p:nvPr/>
+        </p:nvSpPr>
+        <p:spPr>
+          <a:xfrm>
+            <a:off x="685800" y="5532120"/>
+            <a:ext cx="384048" cy="384048"/>
+          </a:xfrm>
+          <a:prstGeom prst="ellipse">
+            <a:avLst/>
+          </a:prstGeom>
+          <a:noFill/>
+          <a:ln w="15875">
+            <a:solidFill>
+              <a:srgbClr val="1B2A4A"/>
+            </a:solidFill>
+          </a:ln>
+          <a:effectLst/>
+        </p:spPr>
+        <p:style>
+          <a:lnRef idx="1">
+            <a:schemeClr val="accent1"/>
+          </a:lnRef>
+          <a:fillRef idx="3">
+            <a:schemeClr val="accent1"/>
+          </a:fillRef>
+          <a:effectRef idx="2">
+            <a:schemeClr val="accent1"/>
+          </a:effectRef>
+          <a:fontRef idx="minor">
+            <a:schemeClr val="lt1"/>
+          </a:fontRef>
+        </p:style>
+        <p:txBody>
+          <a:bodyPr rtlCol="0" anchor="ctr"/>
+          <a:lstStyle/>
+          <a:p>
+            <a:pPr algn="ctr"/>
+          </a:p>
+        </p:txBody>
+      </p:sp>
+      <p:sp>
+        <p:nvSpPr>
+          <p:cNvPr id="20" name="Oval 19"/>
+          <p:cNvSpPr/>
+          <p:nvPr/>
+        </p:nvSpPr>
+        <p:spPr>
+          <a:xfrm>
+            <a:off x="795528" y="5641848"/>
+            <a:ext cx="164592" cy="164592"/>
+          </a:xfrm>
+          <a:prstGeom prst="ellipse">
+            <a:avLst/>
+          </a:prstGeom>
+          <a:solidFill>
+            <a:srgbClr val="1B2A4A"/>
+          </a:solidFill>
+          <a:ln>
+            <a:noFill/>
+          </a:ln>
+          <a:effectLst/>
+        </p:spPr>
+        <p:style>
+          <a:lnRef idx="1">
+            <a:schemeClr val="accent1"/>
+          </a:lnRef>
+          <a:fillRef idx="3">
+            <a:schemeClr val="accent1"/>
+          </a:fillRef>
+          <a:effectRef idx="2">
+            <a:schemeClr val="accent1"/>
+          </a:effectRef>
+          <a:fontRef idx="minor">
+            <a:schemeClr val="lt1"/>
+          </a:fontRef>
+        </p:style>
+        <p:txBody>
+          <a:bodyPr rtlCol="0" anchor="ctr"/>
+          <a:lstStyle/>
+          <a:p>
+            <a:pPr algn="ctr"/>
+          </a:p>
+        </p:txBody>
+      </p:sp>
+      <p:sp>
+        <p:nvSpPr>
+          <p:cNvPr id="21" name="TextBox 20"/>
+          <p:cNvSpPr txBox="1"/>
+          <p:nvPr/>
+        </p:nvSpPr>
+        <p:spPr>
+          <a:xfrm>
+            <a:off x="1234440" y="5486400"/>
+            <a:ext cx="2813304" cy="777240"/>
+          </a:xfrm>
+          <a:prstGeom prst="rect">
+            <a:avLst/>
+          </a:prstGeom>
+          <a:noFill/>
+        </p:spPr>
+        <p:txBody>
+          <a:bodyPr wrap="square" anchor="t" lIns="0" rIns="0" tIns="0" bIns="0">
+            <a:spAutoFit/>
+          </a:bodyPr>
+          <a:lstStyle/>
+          <a:p>
+            <a:pPr algn="l">
+              <a:spcAft>
+                <a:spcPts val="100"/>
+              </a:spcAft>
+            </a:pPr>
+            <a:r>
+              <a:rPr sz="1250" b="1" i="0">
+                <a:solidFill>
+                  <a:srgbClr val="1A1A1C"/>
+                </a:solidFill>
+                <a:latin typeface="Arial"/>
+              </a:rPr>
+              <a:t>Flexible by Design</a:t>
+            </a:r>
+          </a:p>
+          <a:p>
+            <a:pPr algn="l">
+              <a:lnSpc>
+                <a:spcPct val="110000"/>
+              </a:lnSpc>
+            </a:pPr>
+            <a:r>
+              <a:rPr sz="1000" b="0" i="0">
+                <a:solidFill>
+                  <a:srgbClr val="868B94"/>
+                </a:solidFill>
+                <a:latin typeface="Arial"/>
+              </a:rPr>
+              <a:t>Space that adapts to every journey.</a:t>
+            </a:r>
+          </a:p>
+        </p:txBody>
+      </p:sp>
+      <p:sp>
+        <p:nvSpPr>
+          <p:cNvPr id="22" name="Oval 21"/>
+          <p:cNvSpPr/>
+          <p:nvPr/>
+        </p:nvSpPr>
+        <p:spPr>
+          <a:xfrm>
+            <a:off x="4413504" y="5532120"/>
+            <a:ext cx="384048" cy="384048"/>
+          </a:xfrm>
+          <a:prstGeom prst="ellipse">
+            <a:avLst/>
+          </a:prstGeom>
+          <a:noFill/>
+          <a:ln w="15875">
+            <a:solidFill>
+              <a:srgbClr val="1B2A4A"/>
+            </a:solidFill>
+          </a:ln>
+          <a:effectLst/>
+        </p:spPr>
+        <p:style>
+          <a:lnRef idx="1">
+            <a:schemeClr val="accent1"/>
+          </a:lnRef>
+          <a:fillRef idx="3">
+            <a:schemeClr val="accent1"/>
+          </a:fillRef>
+          <a:effectRef idx="2">
+            <a:schemeClr val="accent1"/>
+          </a:effectRef>
+          <a:fontRef idx="minor">
+            <a:schemeClr val="lt1"/>
+          </a:fontRef>
+        </p:style>
+        <p:txBody>
+          <a:bodyPr rtlCol="0" anchor="ctr"/>
+          <a:lstStyle/>
+          <a:p>
+            <a:pPr algn="ctr"/>
+          </a:p>
+        </p:txBody>
+      </p:sp>
+      <p:sp>
+        <p:nvSpPr>
+          <p:cNvPr id="23" name="Oval 22"/>
+          <p:cNvSpPr/>
+          <p:nvPr/>
+        </p:nvSpPr>
+        <p:spPr>
+          <a:xfrm>
+            <a:off x="4523232" y="5641848"/>
+            <a:ext cx="164592" cy="164592"/>
+          </a:xfrm>
+          <a:prstGeom prst="ellipse">
+            <a:avLst/>
+          </a:prstGeom>
+          <a:solidFill>
+            <a:srgbClr val="1B2A4A"/>
+          </a:solidFill>
+          <a:ln>
+            <a:noFill/>
+          </a:ln>
+          <a:effectLst/>
+        </p:spPr>
+        <p:style>
+          <a:lnRef idx="1">
+            <a:schemeClr val="accent1"/>
+          </a:lnRef>
+          <a:fillRef idx="3">
+            <a:schemeClr val="accent1"/>
+          </a:fillRef>
+          <a:effectRef idx="2">
+            <a:schemeClr val="accent1"/>
+          </a:effectRef>
+          <a:fontRef idx="minor">
+            <a:schemeClr val="lt1"/>
+          </a:fontRef>
+        </p:style>
+        <p:txBody>
+          <a:bodyPr rtlCol="0" anchor="ctr"/>
+          <a:lstStyle/>
+          <a:p>
+            <a:pPr algn="ctr"/>
+          </a:p>
+        </p:txBody>
+      </p:sp>
+      <p:sp>
+        <p:nvSpPr>
+          <p:cNvPr id="24" name="TextBox 23"/>
+          <p:cNvSpPr txBox="1"/>
+          <p:nvPr/>
+        </p:nvSpPr>
+        <p:spPr>
+          <a:xfrm>
+            <a:off x="4962144" y="5486400"/>
+            <a:ext cx="2813304" cy="777240"/>
+          </a:xfrm>
+          <a:prstGeom prst="rect">
+            <a:avLst/>
+          </a:prstGeom>
+          <a:noFill/>
+        </p:spPr>
+        <p:txBody>
+          <a:bodyPr wrap="square" anchor="t" lIns="0" rIns="0" tIns="0" bIns="0">
+            <a:spAutoFit/>
+          </a:bodyPr>
+          <a:lstStyle/>
+          <a:p>
+            <a:pPr algn="l">
+              <a:spcAft>
+                <a:spcPts val="100"/>
+              </a:spcAft>
+            </a:pPr>
+            <a:r>
+              <a:rPr sz="1250" b="1" i="0">
+                <a:solidFill>
+                  <a:srgbClr val="1A1A1C"/>
+                </a:solidFill>
+                <a:latin typeface="Arial"/>
+              </a:rPr>
+              <a:t>Sophisticated Comfort</a:t>
+            </a:r>
+          </a:p>
+          <a:p>
+            <a:pPr algn="l">
+              <a:lnSpc>
+                <a:spcPct val="110000"/>
+              </a:lnSpc>
+            </a:pPr>
+            <a:r>
+              <a:rPr sz="1000" b="0" i="0">
+                <a:solidFill>
+                  <a:srgbClr val="868B94"/>
+                </a:solidFill>
+                <a:latin typeface="Arial"/>
+              </a:rPr>
+              <a:t>Refined, calm, effortlessly livable.</a:t>
+            </a:r>
+          </a:p>
+        </p:txBody>
+      </p:sp>
+      <p:sp>
+        <p:nvSpPr>
+          <p:cNvPr id="25" name="Oval 24"/>
+          <p:cNvSpPr/>
+          <p:nvPr/>
+        </p:nvSpPr>
+        <p:spPr>
+          <a:xfrm>
+            <a:off x="8141208" y="5532120"/>
+            <a:ext cx="384048" cy="384048"/>
+          </a:xfrm>
+          <a:prstGeom prst="ellipse">
+            <a:avLst/>
+          </a:prstGeom>
+          <a:noFill/>
+          <a:ln w="15875">
+            <a:solidFill>
+              <a:srgbClr val="1B2A4A"/>
+            </a:solidFill>
+          </a:ln>
+          <a:effectLst/>
+        </p:spPr>
+        <p:style>
+          <a:lnRef idx="1">
+            <a:schemeClr val="accent1"/>
+          </a:lnRef>
+          <a:fillRef idx="3">
+            <a:schemeClr val="accent1"/>
+          </a:fillRef>
+          <a:effectRef idx="2">
+            <a:schemeClr val="accent1"/>
+          </a:effectRef>
+          <a:fontRef idx="minor">
+            <a:schemeClr val="lt1"/>
+          </a:fontRef>
+        </p:style>
+        <p:txBody>
+          <a:bodyPr rtlCol="0" anchor="ctr"/>
+          <a:lstStyle/>
+          <a:p>
+            <a:pPr algn="ctr"/>
+          </a:p>
+        </p:txBody>
+      </p:sp>
+      <p:sp>
+        <p:nvSpPr>
+          <p:cNvPr id="26" name="Oval 25"/>
+          <p:cNvSpPr/>
+          <p:nvPr/>
+        </p:nvSpPr>
+        <p:spPr>
+          <a:xfrm>
+            <a:off x="8250936" y="5641848"/>
+            <a:ext cx="164592" cy="164592"/>
+          </a:xfrm>
+          <a:prstGeom prst="ellipse">
+            <a:avLst/>
+          </a:prstGeom>
+          <a:solidFill>
+            <a:srgbClr val="1B2A4A"/>
+          </a:solidFill>
+          <a:ln>
+            <a:noFill/>
+          </a:ln>
+          <a:effectLst/>
+        </p:spPr>
+        <p:style>
+          <a:lnRef idx="1">
+            <a:schemeClr val="accent1"/>
+          </a:lnRef>
+          <a:fillRef idx="3">
+            <a:schemeClr val="accent1"/>
+          </a:fillRef>
+          <a:effectRef idx="2">
+            <a:schemeClr val="accent1"/>
+          </a:effectRef>
+          <a:fontRef idx="minor">
+            <a:schemeClr val="lt1"/>
+          </a:fontRef>
+        </p:style>
+        <p:txBody>
+          <a:bodyPr rtlCol="0" anchor="ctr"/>
+          <a:lstStyle/>
+          <a:p>
+            <a:pPr algn="ctr"/>
+          </a:p>
+        </p:txBody>
+      </p:sp>
+      <p:sp>
+        <p:nvSpPr>
+          <p:cNvPr id="27" name="TextBox 26"/>
+          <p:cNvSpPr txBox="1"/>
+          <p:nvPr/>
+        </p:nvSpPr>
+        <p:spPr>
+          <a:xfrm>
+            <a:off x="8689848" y="5486400"/>
+            <a:ext cx="2813304" cy="777240"/>
+          </a:xfrm>
+          <a:prstGeom prst="rect">
+            <a:avLst/>
+          </a:prstGeom>
+          <a:noFill/>
+        </p:spPr>
+        <p:txBody>
+          <a:bodyPr wrap="square" anchor="t" lIns="0" rIns="0" tIns="0" bIns="0">
+            <a:spAutoFit/>
+          </a:bodyPr>
+          <a:lstStyle/>
+          <a:p>
+            <a:pPr algn="l">
+              <a:spcAft>
+                <a:spcPts val="100"/>
+              </a:spcAft>
+            </a:pPr>
+            <a:r>
+              <a:rPr sz="1250" b="1" i="0">
+                <a:solidFill>
+                  <a:srgbClr val="1A1A1C"/>
+                </a:solidFill>
+                <a:latin typeface="Arial"/>
+              </a:rPr>
+              <a:t>Technology Around People</a:t>
+            </a:r>
+          </a:p>
+          <a:p>
+            <a:pPr algn="l">
+              <a:lnSpc>
+                <a:spcPct val="110000"/>
+              </a:lnSpc>
+            </a:pPr>
+            <a:r>
+              <a:rPr sz="1000" b="0" i="0">
+                <a:solidFill>
+                  <a:srgbClr val="868B94"/>
+                </a:solidFill>
+                <a:latin typeface="Arial"/>
+              </a:rPr>
+              <a:t>Intelligence that serves the family.</a:t>
             </a:r>
           </a:p>
         </p:txBody>
@@ -26203,7 +26251,7 @@
         </p:nvSpPr>
         <p:spPr>
           <a:xfrm>
-            <a:off x="685800" y="640080"/>
+            <a:off x="685800" y="548640"/>
             <a:ext cx="7315200" cy="274320"/>
           </a:xfrm>
           <a:prstGeom prst="rect">
@@ -26238,8 +26286,8 @@
         </p:nvSpPr>
         <p:spPr>
           <a:xfrm>
-            <a:off x="658368" y="960120"/>
-            <a:ext cx="5486400" cy="822960"/>
+            <a:off x="658368" y="868680"/>
+            <a:ext cx="10058400" cy="640080"/>
           </a:xfrm>
           <a:prstGeom prst="rect">
             <a:avLst/>
@@ -26254,7 +26302,7 @@
           <a:p>
             <a:pPr algn="l"/>
             <a:r>
-              <a:rPr sz="3000" b="1" i="0">
+              <a:rPr sz="2600" b="1" i="0">
                 <a:solidFill>
                   <a:srgbClr val="1A1A1C"/>
                 </a:solidFill>
@@ -26273,8 +26321,8 @@
         </p:nvSpPr>
         <p:spPr>
           <a:xfrm>
-            <a:off x="685800" y="1828800"/>
-            <a:ext cx="5120640" cy="1097280"/>
+            <a:off x="685800" y="1481328"/>
+            <a:ext cx="10817352" cy="411480"/>
           </a:xfrm>
           <a:prstGeom prst="rect">
             <a:avLst/>
@@ -26289,11 +26337,11 @@
           <a:p>
             <a:pPr algn="l">
               <a:lnSpc>
-                <a:spcPct val="130000"/>
+                <a:spcPct val="120000"/>
               </a:lnSpc>
             </a:pPr>
             <a:r>
-              <a:rPr sz="1500" b="0" i="1">
+              <a:rPr sz="1300" b="0" i="1">
                 <a:solidFill>
                   <a:srgbClr val="4A4E57"/>
                 </a:solidFill>
@@ -26306,431 +26354,14 @@
       </p:sp>
       <p:sp>
         <p:nvSpPr>
-          <p:cNvPr id="5" name="Oval 4"/>
+          <p:cNvPr id="5" name="Rectangle 4"/>
           <p:cNvSpPr/>
           <p:nvPr/>
         </p:nvSpPr>
         <p:spPr>
           <a:xfrm>
-            <a:off x="713232" y="3200400"/>
-            <a:ext cx="457200" cy="457200"/>
-          </a:xfrm>
-          <a:prstGeom prst="ellipse">
-            <a:avLst/>
-          </a:prstGeom>
-          <a:noFill/>
-          <a:ln w="15875">
-            <a:solidFill>
-              <a:srgbClr val="1B2A4A"/>
-            </a:solidFill>
-          </a:ln>
-          <a:effectLst/>
-        </p:spPr>
-        <p:style>
-          <a:lnRef idx="1">
-            <a:schemeClr val="accent1"/>
-          </a:lnRef>
-          <a:fillRef idx="3">
-            <a:schemeClr val="accent1"/>
-          </a:fillRef>
-          <a:effectRef idx="2">
-            <a:schemeClr val="accent1"/>
-          </a:effectRef>
-          <a:fontRef idx="minor">
-            <a:schemeClr val="lt1"/>
-          </a:fontRef>
-        </p:style>
-        <p:txBody>
-          <a:bodyPr rtlCol="0" anchor="ctr"/>
-          <a:lstStyle/>
-          <a:p>
-            <a:pPr algn="ctr"/>
-          </a:p>
-        </p:txBody>
-      </p:sp>
-      <p:sp>
-        <p:nvSpPr>
-          <p:cNvPr id="6" name="Oval 5"/>
-          <p:cNvSpPr/>
-          <p:nvPr/>
-        </p:nvSpPr>
-        <p:spPr>
-          <a:xfrm>
-            <a:off x="859536" y="3346704"/>
-            <a:ext cx="164592" cy="164592"/>
-          </a:xfrm>
-          <a:prstGeom prst="ellipse">
-            <a:avLst/>
-          </a:prstGeom>
-          <a:solidFill>
-            <a:srgbClr val="1B2A4A"/>
-          </a:solidFill>
-          <a:ln>
-            <a:noFill/>
-          </a:ln>
-          <a:effectLst/>
-        </p:spPr>
-        <p:style>
-          <a:lnRef idx="1">
-            <a:schemeClr val="accent1"/>
-          </a:lnRef>
-          <a:fillRef idx="3">
-            <a:schemeClr val="accent1"/>
-          </a:fillRef>
-          <a:effectRef idx="2">
-            <a:schemeClr val="accent1"/>
-          </a:effectRef>
-          <a:fontRef idx="minor">
-            <a:schemeClr val="lt1"/>
-          </a:fontRef>
-        </p:style>
-        <p:txBody>
-          <a:bodyPr rtlCol="0" anchor="ctr"/>
-          <a:lstStyle/>
-          <a:p>
-            <a:pPr algn="ctr"/>
-          </a:p>
-        </p:txBody>
-      </p:sp>
-      <p:sp>
-        <p:nvSpPr>
-          <p:cNvPr id="7" name="TextBox 6"/>
-          <p:cNvSpPr txBox="1"/>
-          <p:nvPr/>
-        </p:nvSpPr>
-        <p:spPr>
-          <a:xfrm>
-            <a:off x="1371600" y="3182112"/>
-            <a:ext cx="4572000" cy="731520"/>
-          </a:xfrm>
-          <a:prstGeom prst="rect">
-            <a:avLst/>
-          </a:prstGeom>
-          <a:noFill/>
-        </p:spPr>
-        <p:txBody>
-          <a:bodyPr wrap="square" anchor="t" lIns="0" rIns="0" tIns="0" bIns="0">
-            <a:spAutoFit/>
-          </a:bodyPr>
-          <a:lstStyle/>
-          <a:p>
-            <a:pPr algn="l">
-              <a:spcAft>
-                <a:spcPts val="200"/>
-              </a:spcAft>
-            </a:pPr>
-            <a:r>
-              <a:rPr sz="1400" b="1" i="0">
-                <a:solidFill>
-                  <a:srgbClr val="1A1A1C"/>
-                </a:solidFill>
-                <a:latin typeface="Arial"/>
-              </a:rPr>
-              <a:t>Commanding Presence</a:t>
-            </a:r>
-          </a:p>
-          <a:p>
-            <a:pPr algn="l"/>
-            <a:r>
-              <a:rPr sz="1100" b="0" i="0">
-                <a:solidFill>
-                  <a:srgbClr val="868B94"/>
-                </a:solidFill>
-                <a:latin typeface="Arial"/>
-              </a:rPr>
-              <a:t>Architectural proportion, balanced and tailored.</a:t>
-            </a:r>
-          </a:p>
-        </p:txBody>
-      </p:sp>
-      <p:sp>
-        <p:nvSpPr>
-          <p:cNvPr id="8" name="Oval 7"/>
-          <p:cNvSpPr/>
-          <p:nvPr/>
-        </p:nvSpPr>
-        <p:spPr>
-          <a:xfrm>
-            <a:off x="713232" y="4069080"/>
-            <a:ext cx="457200" cy="457200"/>
-          </a:xfrm>
-          <a:prstGeom prst="ellipse">
-            <a:avLst/>
-          </a:prstGeom>
-          <a:noFill/>
-          <a:ln w="15875">
-            <a:solidFill>
-              <a:srgbClr val="1B2A4A"/>
-            </a:solidFill>
-          </a:ln>
-          <a:effectLst/>
-        </p:spPr>
-        <p:style>
-          <a:lnRef idx="1">
-            <a:schemeClr val="accent1"/>
-          </a:lnRef>
-          <a:fillRef idx="3">
-            <a:schemeClr val="accent1"/>
-          </a:fillRef>
-          <a:effectRef idx="2">
-            <a:schemeClr val="accent1"/>
-          </a:effectRef>
-          <a:fontRef idx="minor">
-            <a:schemeClr val="lt1"/>
-          </a:fontRef>
-        </p:style>
-        <p:txBody>
-          <a:bodyPr rtlCol="0" anchor="ctr"/>
-          <a:lstStyle/>
-          <a:p>
-            <a:pPr algn="ctr"/>
-          </a:p>
-        </p:txBody>
-      </p:sp>
-      <p:sp>
-        <p:nvSpPr>
-          <p:cNvPr id="9" name="Oval 8"/>
-          <p:cNvSpPr/>
-          <p:nvPr/>
-        </p:nvSpPr>
-        <p:spPr>
-          <a:xfrm>
-            <a:off x="859536" y="4215384"/>
-            <a:ext cx="164592" cy="164592"/>
-          </a:xfrm>
-          <a:prstGeom prst="ellipse">
-            <a:avLst/>
-          </a:prstGeom>
-          <a:solidFill>
-            <a:srgbClr val="1B2A4A"/>
-          </a:solidFill>
-          <a:ln>
-            <a:noFill/>
-          </a:ln>
-          <a:effectLst/>
-        </p:spPr>
-        <p:style>
-          <a:lnRef idx="1">
-            <a:schemeClr val="accent1"/>
-          </a:lnRef>
-          <a:fillRef idx="3">
-            <a:schemeClr val="accent1"/>
-          </a:fillRef>
-          <a:effectRef idx="2">
-            <a:schemeClr val="accent1"/>
-          </a:effectRef>
-          <a:fontRef idx="minor">
-            <a:schemeClr val="lt1"/>
-          </a:fontRef>
-        </p:style>
-        <p:txBody>
-          <a:bodyPr rtlCol="0" anchor="ctr"/>
-          <a:lstStyle/>
-          <a:p>
-            <a:pPr algn="ctr"/>
-          </a:p>
-        </p:txBody>
-      </p:sp>
-      <p:sp>
-        <p:nvSpPr>
-          <p:cNvPr id="10" name="TextBox 9"/>
-          <p:cNvSpPr txBox="1"/>
-          <p:nvPr/>
-        </p:nvSpPr>
-        <p:spPr>
-          <a:xfrm>
-            <a:off x="1371600" y="4050792"/>
-            <a:ext cx="4572000" cy="731520"/>
-          </a:xfrm>
-          <a:prstGeom prst="rect">
-            <a:avLst/>
-          </a:prstGeom>
-          <a:noFill/>
-        </p:spPr>
-        <p:txBody>
-          <a:bodyPr wrap="square" anchor="t" lIns="0" rIns="0" tIns="0" bIns="0">
-            <a:spAutoFit/>
-          </a:bodyPr>
-          <a:lstStyle/>
-          <a:p>
-            <a:pPr algn="l">
-              <a:spcAft>
-                <a:spcPts val="200"/>
-              </a:spcAft>
-            </a:pPr>
-            <a:r>
-              <a:rPr sz="1400" b="1" i="0">
-                <a:solidFill>
-                  <a:srgbClr val="1A1A1C"/>
-                </a:solidFill>
-                <a:latin typeface="Arial"/>
-              </a:rPr>
-              <a:t>Quiet Power</a:t>
-            </a:r>
-          </a:p>
-          <a:p>
-            <a:pPr algn="l"/>
-            <a:r>
-              <a:rPr sz="1100" b="0" i="0">
-                <a:solidFill>
-                  <a:srgbClr val="868B94"/>
-                </a:solidFill>
-                <a:latin typeface="Arial"/>
-              </a:rPr>
-              <a:t>Confidence expressed through restraint.</a:t>
-            </a:r>
-          </a:p>
-        </p:txBody>
-      </p:sp>
-      <p:sp>
-        <p:nvSpPr>
-          <p:cNvPr id="11" name="Oval 10"/>
-          <p:cNvSpPr/>
-          <p:nvPr/>
-        </p:nvSpPr>
-        <p:spPr>
-          <a:xfrm>
-            <a:off x="713232" y="4937760"/>
-            <a:ext cx="457200" cy="457200"/>
-          </a:xfrm>
-          <a:prstGeom prst="ellipse">
-            <a:avLst/>
-          </a:prstGeom>
-          <a:noFill/>
-          <a:ln w="15875">
-            <a:solidFill>
-              <a:srgbClr val="1B2A4A"/>
-            </a:solidFill>
-          </a:ln>
-          <a:effectLst/>
-        </p:spPr>
-        <p:style>
-          <a:lnRef idx="1">
-            <a:schemeClr val="accent1"/>
-          </a:lnRef>
-          <a:fillRef idx="3">
-            <a:schemeClr val="accent1"/>
-          </a:fillRef>
-          <a:effectRef idx="2">
-            <a:schemeClr val="accent1"/>
-          </a:effectRef>
-          <a:fontRef idx="minor">
-            <a:schemeClr val="lt1"/>
-          </a:fontRef>
-        </p:style>
-        <p:txBody>
-          <a:bodyPr rtlCol="0" anchor="ctr"/>
-          <a:lstStyle/>
-          <a:p>
-            <a:pPr algn="ctr"/>
-          </a:p>
-        </p:txBody>
-      </p:sp>
-      <p:sp>
-        <p:nvSpPr>
-          <p:cNvPr id="12" name="Oval 11"/>
-          <p:cNvSpPr/>
-          <p:nvPr/>
-        </p:nvSpPr>
-        <p:spPr>
-          <a:xfrm>
-            <a:off x="859536" y="5084064"/>
-            <a:ext cx="164592" cy="164592"/>
-          </a:xfrm>
-          <a:prstGeom prst="ellipse">
-            <a:avLst/>
-          </a:prstGeom>
-          <a:solidFill>
-            <a:srgbClr val="1B2A4A"/>
-          </a:solidFill>
-          <a:ln>
-            <a:noFill/>
-          </a:ln>
-          <a:effectLst/>
-        </p:spPr>
-        <p:style>
-          <a:lnRef idx="1">
-            <a:schemeClr val="accent1"/>
-          </a:lnRef>
-          <a:fillRef idx="3">
-            <a:schemeClr val="accent1"/>
-          </a:fillRef>
-          <a:effectRef idx="2">
-            <a:schemeClr val="accent1"/>
-          </a:effectRef>
-          <a:fontRef idx="minor">
-            <a:schemeClr val="lt1"/>
-          </a:fontRef>
-        </p:style>
-        <p:txBody>
-          <a:bodyPr rtlCol="0" anchor="ctr"/>
-          <a:lstStyle/>
-          <a:p>
-            <a:pPr algn="ctr"/>
-          </a:p>
-        </p:txBody>
-      </p:sp>
-      <p:sp>
-        <p:nvSpPr>
-          <p:cNvPr id="13" name="TextBox 12"/>
-          <p:cNvSpPr txBox="1"/>
-          <p:nvPr/>
-        </p:nvSpPr>
-        <p:spPr>
-          <a:xfrm>
-            <a:off x="1371600" y="4919472"/>
-            <a:ext cx="4572000" cy="731520"/>
-          </a:xfrm>
-          <a:prstGeom prst="rect">
-            <a:avLst/>
-          </a:prstGeom>
-          <a:noFill/>
-        </p:spPr>
-        <p:txBody>
-          <a:bodyPr wrap="square" anchor="t" lIns="0" rIns="0" tIns="0" bIns="0">
-            <a:spAutoFit/>
-          </a:bodyPr>
-          <a:lstStyle/>
-          <a:p>
-            <a:pPr algn="l">
-              <a:spcAft>
-                <a:spcPts val="200"/>
-              </a:spcAft>
-            </a:pPr>
-            <a:r>
-              <a:rPr sz="1400" b="1" i="0">
-                <a:solidFill>
-                  <a:srgbClr val="1A1A1C"/>
-                </a:solidFill>
-                <a:latin typeface="Arial"/>
-              </a:rPr>
-              <a:t>Timeless Craftsmanship</a:t>
-            </a:r>
-          </a:p>
-          <a:p>
-            <a:pPr algn="l"/>
-            <a:r>
-              <a:rPr sz="1100" b="0" i="0">
-                <a:solidFill>
-                  <a:srgbClr val="868B94"/>
-                </a:solidFill>
-                <a:latin typeface="Arial"/>
-              </a:rPr>
-              <a:t>Authentic American design, refined.</a:t>
-            </a:r>
-          </a:p>
-        </p:txBody>
-      </p:sp>
-      <p:sp>
-        <p:nvSpPr>
-          <p:cNvPr id="14" name="Rectangle 13"/>
-          <p:cNvSpPr/>
-          <p:nvPr/>
-        </p:nvSpPr>
-        <p:spPr>
-          <a:xfrm>
-            <a:off x="6492240" y="960120"/>
-            <a:ext cx="5010912" cy="4983480"/>
+            <a:off x="685800" y="2011680"/>
+            <a:ext cx="10817352" cy="3383280"/>
           </a:xfrm>
           <a:prstGeom prst="rect">
             <a:avLst/>
@@ -26767,13 +26398,13 @@
       </p:sp>
       <p:cxnSp>
         <p:nvCxnSpPr>
-          <p:cNvPr id="15" name="Connector 14"/>
+          <p:cNvPr id="6" name="Connector 5"/>
           <p:cNvCxnSpPr/>
           <p:nvPr/>
         </p:nvCxnSpPr>
         <p:spPr>
           <a:xfrm>
-            <a:off x="6492240" y="960120"/>
+            <a:off x="685800" y="2011680"/>
             <a:ext cx="237744" cy="0"/>
           </a:xfrm>
           <a:prstGeom prst="bentConnector3">
@@ -26802,13 +26433,13 @@
       </p:cxnSp>
       <p:cxnSp>
         <p:nvCxnSpPr>
-          <p:cNvPr id="16" name="Connector 15"/>
+          <p:cNvPr id="7" name="Connector 6"/>
           <p:cNvCxnSpPr/>
           <p:nvPr/>
         </p:nvCxnSpPr>
         <p:spPr>
           <a:xfrm>
-            <a:off x="6492240" y="960120"/>
+            <a:off x="685800" y="2011680"/>
             <a:ext cx="0" cy="237744"/>
           </a:xfrm>
           <a:prstGeom prst="bentConnector3">
@@ -26837,13 +26468,13 @@
       </p:cxnSp>
       <p:cxnSp>
         <p:nvCxnSpPr>
-          <p:cNvPr id="17" name="Connector 16"/>
+          <p:cNvPr id="8" name="Connector 7"/>
           <p:cNvCxnSpPr/>
           <p:nvPr/>
         </p:nvCxnSpPr>
         <p:spPr>
           <a:xfrm flipH="1">
-            <a:off x="11265408" y="960120"/>
+            <a:off x="11265408" y="2011680"/>
             <a:ext cx="237744" cy="0"/>
           </a:xfrm>
           <a:prstGeom prst="bentConnector3">
@@ -26872,13 +26503,13 @@
       </p:cxnSp>
       <p:cxnSp>
         <p:nvCxnSpPr>
-          <p:cNvPr id="18" name="Connector 17"/>
+          <p:cNvPr id="9" name="Connector 8"/>
           <p:cNvCxnSpPr/>
           <p:nvPr/>
         </p:nvCxnSpPr>
         <p:spPr>
           <a:xfrm>
-            <a:off x="11503152" y="960120"/>
+            <a:off x="11503152" y="2011680"/>
             <a:ext cx="0" cy="237744"/>
           </a:xfrm>
           <a:prstGeom prst="bentConnector3">
@@ -26907,13 +26538,13 @@
       </p:cxnSp>
       <p:cxnSp>
         <p:nvCxnSpPr>
-          <p:cNvPr id="19" name="Connector 18"/>
+          <p:cNvPr id="10" name="Connector 9"/>
           <p:cNvCxnSpPr/>
           <p:nvPr/>
         </p:nvCxnSpPr>
         <p:spPr>
           <a:xfrm>
-            <a:off x="6492240" y="5943600"/>
+            <a:off x="685800" y="5394960"/>
             <a:ext cx="237744" cy="0"/>
           </a:xfrm>
           <a:prstGeom prst="bentConnector3">
@@ -26942,13 +26573,13 @@
       </p:cxnSp>
       <p:cxnSp>
         <p:nvCxnSpPr>
-          <p:cNvPr id="20" name="Connector 19"/>
+          <p:cNvPr id="11" name="Connector 10"/>
           <p:cNvCxnSpPr/>
           <p:nvPr/>
         </p:nvCxnSpPr>
         <p:spPr>
           <a:xfrm flipV="1">
-            <a:off x="6492240" y="5705856"/>
+            <a:off x="685800" y="5157216"/>
             <a:ext cx="0" cy="237744"/>
           </a:xfrm>
           <a:prstGeom prst="bentConnector3">
@@ -26977,13 +26608,13 @@
       </p:cxnSp>
       <p:cxnSp>
         <p:nvCxnSpPr>
-          <p:cNvPr id="21" name="Connector 20"/>
+          <p:cNvPr id="12" name="Connector 11"/>
           <p:cNvCxnSpPr/>
           <p:nvPr/>
         </p:nvCxnSpPr>
         <p:spPr>
           <a:xfrm flipH="1">
-            <a:off x="11265408" y="5943600"/>
+            <a:off x="11265408" y="5394960"/>
             <a:ext cx="237744" cy="0"/>
           </a:xfrm>
           <a:prstGeom prst="bentConnector3">
@@ -27012,13 +26643,13 @@
       </p:cxnSp>
       <p:cxnSp>
         <p:nvCxnSpPr>
-          <p:cNvPr id="22" name="Connector 21"/>
+          <p:cNvPr id="13" name="Connector 12"/>
           <p:cNvCxnSpPr/>
           <p:nvPr/>
         </p:nvCxnSpPr>
         <p:spPr>
           <a:xfrm flipV="1">
-            <a:off x="11503152" y="5705856"/>
+            <a:off x="11503152" y="5157216"/>
             <a:ext cx="0" cy="237744"/>
           </a:xfrm>
           <a:prstGeom prst="bentConnector3">
@@ -27047,13 +26678,13 @@
       </p:cxnSp>
       <p:sp>
         <p:nvSpPr>
-          <p:cNvPr id="23" name="Rounded Rectangle 22"/>
+          <p:cNvPr id="14" name="Rounded Rectangle 13"/>
           <p:cNvSpPr/>
           <p:nvPr/>
         </p:nvSpPr>
         <p:spPr>
           <a:xfrm>
-            <a:off x="8741664" y="2976372"/>
+            <a:off x="5838444" y="3227832"/>
             <a:ext cx="512064" cy="512064"/>
           </a:xfrm>
           <a:prstGeom prst="roundRect">
@@ -27091,13 +26722,13 @@
       </p:sp>
       <p:sp>
         <p:nvSpPr>
-          <p:cNvPr id="24" name="Oval 23"/>
+          <p:cNvPr id="15" name="Oval 14"/>
           <p:cNvSpPr/>
           <p:nvPr/>
         </p:nvSpPr>
         <p:spPr>
           <a:xfrm>
-            <a:off x="8854318" y="3078784"/>
+            <a:off x="5951098" y="3330244"/>
             <a:ext cx="100584" cy="100584"/>
           </a:xfrm>
           <a:prstGeom prst="ellipse">
@@ -27135,13 +26766,13 @@
       </p:sp>
       <p:sp>
         <p:nvSpPr>
-          <p:cNvPr id="25" name="Isosceles Triangle 24"/>
+          <p:cNvPr id="16" name="Isosceles Triangle 15"/>
           <p:cNvSpPr/>
           <p:nvPr/>
         </p:nvSpPr>
         <p:spPr>
           <a:xfrm>
-            <a:off x="8895283" y="3201680"/>
+            <a:off x="5992063" y="3453140"/>
             <a:ext cx="274320" cy="164592"/>
           </a:xfrm>
           <a:prstGeom prst="triangle">
@@ -27179,14 +26810,14 @@
       </p:sp>
       <p:sp>
         <p:nvSpPr>
-          <p:cNvPr id="26" name="TextBox 25"/>
+          <p:cNvPr id="17" name="TextBox 16"/>
           <p:cNvSpPr txBox="1"/>
           <p:nvPr/>
         </p:nvSpPr>
         <p:spPr>
           <a:xfrm>
-            <a:off x="6492240" y="3579876"/>
-            <a:ext cx="5010912" cy="365760"/>
+            <a:off x="685800" y="3831336"/>
+            <a:ext cx="10817352" cy="365760"/>
           </a:xfrm>
           <a:prstGeom prst="rect">
             <a:avLst/>
@@ -27214,14 +26845,14 @@
       </p:sp>
       <p:sp>
         <p:nvSpPr>
-          <p:cNvPr id="27" name="TextBox 26"/>
+          <p:cNvPr id="18" name="TextBox 17"/>
           <p:cNvSpPr txBox="1"/>
           <p:nvPr/>
         </p:nvSpPr>
         <p:spPr>
           <a:xfrm>
-            <a:off x="6492240" y="3854196"/>
-            <a:ext cx="5010912" cy="274320"/>
+            <a:off x="685800" y="4105656"/>
+            <a:ext cx="10817352" cy="274320"/>
           </a:xfrm>
           <a:prstGeom prst="rect">
             <a:avLst/>
@@ -27243,6 +26874,435 @@
                 <a:latin typeface="Arial"/>
               </a:rPr>
               <a:t>Replace · 16:9 · 300dpi</a:t>
+            </a:r>
+          </a:p>
+        </p:txBody>
+      </p:sp>
+      <p:sp>
+        <p:nvSpPr>
+          <p:cNvPr id="19" name="Oval 18"/>
+          <p:cNvSpPr/>
+          <p:nvPr/>
+        </p:nvSpPr>
+        <p:spPr>
+          <a:xfrm>
+            <a:off x="685800" y="5532120"/>
+            <a:ext cx="384048" cy="384048"/>
+          </a:xfrm>
+          <a:prstGeom prst="ellipse">
+            <a:avLst/>
+          </a:prstGeom>
+          <a:noFill/>
+          <a:ln w="15875">
+            <a:solidFill>
+              <a:srgbClr val="1B2A4A"/>
+            </a:solidFill>
+          </a:ln>
+          <a:effectLst/>
+        </p:spPr>
+        <p:style>
+          <a:lnRef idx="1">
+            <a:schemeClr val="accent1"/>
+          </a:lnRef>
+          <a:fillRef idx="3">
+            <a:schemeClr val="accent1"/>
+          </a:fillRef>
+          <a:effectRef idx="2">
+            <a:schemeClr val="accent1"/>
+          </a:effectRef>
+          <a:fontRef idx="minor">
+            <a:schemeClr val="lt1"/>
+          </a:fontRef>
+        </p:style>
+        <p:txBody>
+          <a:bodyPr rtlCol="0" anchor="ctr"/>
+          <a:lstStyle/>
+          <a:p>
+            <a:pPr algn="ctr"/>
+          </a:p>
+        </p:txBody>
+      </p:sp>
+      <p:sp>
+        <p:nvSpPr>
+          <p:cNvPr id="20" name="Oval 19"/>
+          <p:cNvSpPr/>
+          <p:nvPr/>
+        </p:nvSpPr>
+        <p:spPr>
+          <a:xfrm>
+            <a:off x="795528" y="5641848"/>
+            <a:ext cx="164592" cy="164592"/>
+          </a:xfrm>
+          <a:prstGeom prst="ellipse">
+            <a:avLst/>
+          </a:prstGeom>
+          <a:solidFill>
+            <a:srgbClr val="1B2A4A"/>
+          </a:solidFill>
+          <a:ln>
+            <a:noFill/>
+          </a:ln>
+          <a:effectLst/>
+        </p:spPr>
+        <p:style>
+          <a:lnRef idx="1">
+            <a:schemeClr val="accent1"/>
+          </a:lnRef>
+          <a:fillRef idx="3">
+            <a:schemeClr val="accent1"/>
+          </a:fillRef>
+          <a:effectRef idx="2">
+            <a:schemeClr val="accent1"/>
+          </a:effectRef>
+          <a:fontRef idx="minor">
+            <a:schemeClr val="lt1"/>
+          </a:fontRef>
+        </p:style>
+        <p:txBody>
+          <a:bodyPr rtlCol="0" anchor="ctr"/>
+          <a:lstStyle/>
+          <a:p>
+            <a:pPr algn="ctr"/>
+          </a:p>
+        </p:txBody>
+      </p:sp>
+      <p:sp>
+        <p:nvSpPr>
+          <p:cNvPr id="21" name="TextBox 20"/>
+          <p:cNvSpPr txBox="1"/>
+          <p:nvPr/>
+        </p:nvSpPr>
+        <p:spPr>
+          <a:xfrm>
+            <a:off x="1234440" y="5486400"/>
+            <a:ext cx="2813304" cy="777240"/>
+          </a:xfrm>
+          <a:prstGeom prst="rect">
+            <a:avLst/>
+          </a:prstGeom>
+          <a:noFill/>
+        </p:spPr>
+        <p:txBody>
+          <a:bodyPr wrap="square" anchor="t" lIns="0" rIns="0" tIns="0" bIns="0">
+            <a:spAutoFit/>
+          </a:bodyPr>
+          <a:lstStyle/>
+          <a:p>
+            <a:pPr algn="l">
+              <a:spcAft>
+                <a:spcPts val="100"/>
+              </a:spcAft>
+            </a:pPr>
+            <a:r>
+              <a:rPr sz="1250" b="1" i="0">
+                <a:solidFill>
+                  <a:srgbClr val="1A1A1C"/>
+                </a:solidFill>
+                <a:latin typeface="Arial"/>
+              </a:rPr>
+              <a:t>Commanding Presence</a:t>
+            </a:r>
+          </a:p>
+          <a:p>
+            <a:pPr algn="l">
+              <a:lnSpc>
+                <a:spcPct val="110000"/>
+              </a:lnSpc>
+            </a:pPr>
+            <a:r>
+              <a:rPr sz="1000" b="0" i="0">
+                <a:solidFill>
+                  <a:srgbClr val="868B94"/>
+                </a:solidFill>
+                <a:latin typeface="Arial"/>
+              </a:rPr>
+              <a:t>Architectural proportion, balanced and tailored.</a:t>
+            </a:r>
+          </a:p>
+        </p:txBody>
+      </p:sp>
+      <p:sp>
+        <p:nvSpPr>
+          <p:cNvPr id="22" name="Oval 21"/>
+          <p:cNvSpPr/>
+          <p:nvPr/>
+        </p:nvSpPr>
+        <p:spPr>
+          <a:xfrm>
+            <a:off x="4413504" y="5532120"/>
+            <a:ext cx="384048" cy="384048"/>
+          </a:xfrm>
+          <a:prstGeom prst="ellipse">
+            <a:avLst/>
+          </a:prstGeom>
+          <a:noFill/>
+          <a:ln w="15875">
+            <a:solidFill>
+              <a:srgbClr val="1B2A4A"/>
+            </a:solidFill>
+          </a:ln>
+          <a:effectLst/>
+        </p:spPr>
+        <p:style>
+          <a:lnRef idx="1">
+            <a:schemeClr val="accent1"/>
+          </a:lnRef>
+          <a:fillRef idx="3">
+            <a:schemeClr val="accent1"/>
+          </a:fillRef>
+          <a:effectRef idx="2">
+            <a:schemeClr val="accent1"/>
+          </a:effectRef>
+          <a:fontRef idx="minor">
+            <a:schemeClr val="lt1"/>
+          </a:fontRef>
+        </p:style>
+        <p:txBody>
+          <a:bodyPr rtlCol="0" anchor="ctr"/>
+          <a:lstStyle/>
+          <a:p>
+            <a:pPr algn="ctr"/>
+          </a:p>
+        </p:txBody>
+      </p:sp>
+      <p:sp>
+        <p:nvSpPr>
+          <p:cNvPr id="23" name="Oval 22"/>
+          <p:cNvSpPr/>
+          <p:nvPr/>
+        </p:nvSpPr>
+        <p:spPr>
+          <a:xfrm>
+            <a:off x="4523232" y="5641848"/>
+            <a:ext cx="164592" cy="164592"/>
+          </a:xfrm>
+          <a:prstGeom prst="ellipse">
+            <a:avLst/>
+          </a:prstGeom>
+          <a:solidFill>
+            <a:srgbClr val="1B2A4A"/>
+          </a:solidFill>
+          <a:ln>
+            <a:noFill/>
+          </a:ln>
+          <a:effectLst/>
+        </p:spPr>
+        <p:style>
+          <a:lnRef idx="1">
+            <a:schemeClr val="accent1"/>
+          </a:lnRef>
+          <a:fillRef idx="3">
+            <a:schemeClr val="accent1"/>
+          </a:fillRef>
+          <a:effectRef idx="2">
+            <a:schemeClr val="accent1"/>
+          </a:effectRef>
+          <a:fontRef idx="minor">
+            <a:schemeClr val="lt1"/>
+          </a:fontRef>
+        </p:style>
+        <p:txBody>
+          <a:bodyPr rtlCol="0" anchor="ctr"/>
+          <a:lstStyle/>
+          <a:p>
+            <a:pPr algn="ctr"/>
+          </a:p>
+        </p:txBody>
+      </p:sp>
+      <p:sp>
+        <p:nvSpPr>
+          <p:cNvPr id="24" name="TextBox 23"/>
+          <p:cNvSpPr txBox="1"/>
+          <p:nvPr/>
+        </p:nvSpPr>
+        <p:spPr>
+          <a:xfrm>
+            <a:off x="4962144" y="5486400"/>
+            <a:ext cx="2813304" cy="777240"/>
+          </a:xfrm>
+          <a:prstGeom prst="rect">
+            <a:avLst/>
+          </a:prstGeom>
+          <a:noFill/>
+        </p:spPr>
+        <p:txBody>
+          <a:bodyPr wrap="square" anchor="t" lIns="0" rIns="0" tIns="0" bIns="0">
+            <a:spAutoFit/>
+          </a:bodyPr>
+          <a:lstStyle/>
+          <a:p>
+            <a:pPr algn="l">
+              <a:spcAft>
+                <a:spcPts val="100"/>
+              </a:spcAft>
+            </a:pPr>
+            <a:r>
+              <a:rPr sz="1250" b="1" i="0">
+                <a:solidFill>
+                  <a:srgbClr val="1A1A1C"/>
+                </a:solidFill>
+                <a:latin typeface="Arial"/>
+              </a:rPr>
+              <a:t>Quiet Power</a:t>
+            </a:r>
+          </a:p>
+          <a:p>
+            <a:pPr algn="l">
+              <a:lnSpc>
+                <a:spcPct val="110000"/>
+              </a:lnSpc>
+            </a:pPr>
+            <a:r>
+              <a:rPr sz="1000" b="0" i="0">
+                <a:solidFill>
+                  <a:srgbClr val="868B94"/>
+                </a:solidFill>
+                <a:latin typeface="Arial"/>
+              </a:rPr>
+              <a:t>Confidence expressed through restraint.</a:t>
+            </a:r>
+          </a:p>
+        </p:txBody>
+      </p:sp>
+      <p:sp>
+        <p:nvSpPr>
+          <p:cNvPr id="25" name="Oval 24"/>
+          <p:cNvSpPr/>
+          <p:nvPr/>
+        </p:nvSpPr>
+        <p:spPr>
+          <a:xfrm>
+            <a:off x="8141208" y="5532120"/>
+            <a:ext cx="384048" cy="384048"/>
+          </a:xfrm>
+          <a:prstGeom prst="ellipse">
+            <a:avLst/>
+          </a:prstGeom>
+          <a:noFill/>
+          <a:ln w="15875">
+            <a:solidFill>
+              <a:srgbClr val="1B2A4A"/>
+            </a:solidFill>
+          </a:ln>
+          <a:effectLst/>
+        </p:spPr>
+        <p:style>
+          <a:lnRef idx="1">
+            <a:schemeClr val="accent1"/>
+          </a:lnRef>
+          <a:fillRef idx="3">
+            <a:schemeClr val="accent1"/>
+          </a:fillRef>
+          <a:effectRef idx="2">
+            <a:schemeClr val="accent1"/>
+          </a:effectRef>
+          <a:fontRef idx="minor">
+            <a:schemeClr val="lt1"/>
+          </a:fontRef>
+        </p:style>
+        <p:txBody>
+          <a:bodyPr rtlCol="0" anchor="ctr"/>
+          <a:lstStyle/>
+          <a:p>
+            <a:pPr algn="ctr"/>
+          </a:p>
+        </p:txBody>
+      </p:sp>
+      <p:sp>
+        <p:nvSpPr>
+          <p:cNvPr id="26" name="Oval 25"/>
+          <p:cNvSpPr/>
+          <p:nvPr/>
+        </p:nvSpPr>
+        <p:spPr>
+          <a:xfrm>
+            <a:off x="8250936" y="5641848"/>
+            <a:ext cx="164592" cy="164592"/>
+          </a:xfrm>
+          <a:prstGeom prst="ellipse">
+            <a:avLst/>
+          </a:prstGeom>
+          <a:solidFill>
+            <a:srgbClr val="1B2A4A"/>
+          </a:solidFill>
+          <a:ln>
+            <a:noFill/>
+          </a:ln>
+          <a:effectLst/>
+        </p:spPr>
+        <p:style>
+          <a:lnRef idx="1">
+            <a:schemeClr val="accent1"/>
+          </a:lnRef>
+          <a:fillRef idx="3">
+            <a:schemeClr val="accent1"/>
+          </a:fillRef>
+          <a:effectRef idx="2">
+            <a:schemeClr val="accent1"/>
+          </a:effectRef>
+          <a:fontRef idx="minor">
+            <a:schemeClr val="lt1"/>
+          </a:fontRef>
+        </p:style>
+        <p:txBody>
+          <a:bodyPr rtlCol="0" anchor="ctr"/>
+          <a:lstStyle/>
+          <a:p>
+            <a:pPr algn="ctr"/>
+          </a:p>
+        </p:txBody>
+      </p:sp>
+      <p:sp>
+        <p:nvSpPr>
+          <p:cNvPr id="27" name="TextBox 26"/>
+          <p:cNvSpPr txBox="1"/>
+          <p:nvPr/>
+        </p:nvSpPr>
+        <p:spPr>
+          <a:xfrm>
+            <a:off x="8689848" y="5486400"/>
+            <a:ext cx="2813304" cy="777240"/>
+          </a:xfrm>
+          <a:prstGeom prst="rect">
+            <a:avLst/>
+          </a:prstGeom>
+          <a:noFill/>
+        </p:spPr>
+        <p:txBody>
+          <a:bodyPr wrap="square" anchor="t" lIns="0" rIns="0" tIns="0" bIns="0">
+            <a:spAutoFit/>
+          </a:bodyPr>
+          <a:lstStyle/>
+          <a:p>
+            <a:pPr algn="l">
+              <a:spcAft>
+                <a:spcPts val="100"/>
+              </a:spcAft>
+            </a:pPr>
+            <a:r>
+              <a:rPr sz="1250" b="1" i="0">
+                <a:solidFill>
+                  <a:srgbClr val="1A1A1C"/>
+                </a:solidFill>
+                <a:latin typeface="Arial"/>
+              </a:rPr>
+              <a:t>Timeless Craftsmanship</a:t>
+            </a:r>
+          </a:p>
+          <a:p>
+            <a:pPr algn="l">
+              <a:lnSpc>
+                <a:spcPct val="110000"/>
+              </a:lnSpc>
+            </a:pPr>
+            <a:r>
+              <a:rPr sz="1000" b="0" i="0">
+                <a:solidFill>
+                  <a:srgbClr val="868B94"/>
+                </a:solidFill>
+                <a:latin typeface="Arial"/>
+              </a:rPr>
+              <a:t>Authentic American design, refined.</a:t>
             </a:r>
           </a:p>
         </p:txBody>

--- a/Chrysler_Brand_Design_Vision.pptx
+++ b/Chrysler_Brand_Design_Vision.pptx
@@ -521,7 +521,7 @@
           <a:lstStyle/>
           <a:p>
             <a:r>
-              <a:t>SPEAKER NOTES (placeholder) — Open with the brand ambition. One sentence on why this vision matters now. Set the tone — design-led, premium, confident.</a:t>
+              <a:t>SPEAKER NOTES (placeholder) — Open with the through-line of the whole deck: Chrysler removes friction from everyday life through thoughtful, people-first design. Set a calm, confident, design-led tone — and signal the audience will never lose sight of that idea.</a:t>
             </a:r>
           </a:p>
         </p:txBody>
@@ -591,7 +591,7 @@
           <a:lstStyle/>
           <a:p>
             <a:r>
-              <a:t>SPEAKER NOTES (placeholder) — 300 Interior: one immersive rendering, one short caption. Speak to the experience, not the features.</a:t>
+              <a:t>SPEAKER NOTES (placeholder) — 300 Interior — primary principle: Modern American Design. One immersive rendering, one short caption. Speak to the lived experience and the calm of everyday use, not the features.</a:t>
             </a:r>
           </a:p>
         </p:txBody>
@@ -661,7 +661,7 @@
           <a:lstStyle/>
           <a:p>
             <a:r>
-              <a:t>SPEAKER NOTES (placeholder) — Airflow: let the full-width exterior image dominate, supported by one summary line and three strategic bullets.</a:t>
+              <a:t>SPEAKER NOTES (placeholder) — Airflow — primary principle: Everyday Ingenuity. Let the image carry the emotion; the summary states the role this vehicle plays in the philosophy, and the bullets reinforce that one principle while quietly supporting the others. Tie every point back to removing friction for the people who use it.</a:t>
             </a:r>
           </a:p>
         </p:txBody>
@@ -731,7 +731,7 @@
           <a:lstStyle/>
           <a:p>
             <a:r>
-              <a:t>SPEAKER NOTES (placeholder) — Airflow Interior: one immersive rendering, one short caption. Speak to the experience, not the features.</a:t>
+              <a:t>SPEAKER NOTES (placeholder) — Airflow Interior — primary principle: Everyday Ingenuity. One immersive rendering, one short caption. Speak to the lived experience and the calm of everyday use, not the features.</a:t>
             </a:r>
           </a:p>
         </p:txBody>
@@ -801,7 +801,7 @@
           <a:lstStyle/>
           <a:p>
             <a:r>
-              <a:t>SPEAKER NOTES (placeholder) — Arrow: let the full-width exterior image dominate, supported by one summary line and three strategic bullets.</a:t>
+              <a:t>SPEAKER NOTES (placeholder) — Arrow — primary principle: Accessible Design. Let the image carry the emotion; the summary states the role this vehicle plays in the philosophy, and the bullets reinforce that one principle while quietly supporting the others. Tie every point back to removing friction for the people who use it.</a:t>
             </a:r>
           </a:p>
         </p:txBody>
@@ -871,7 +871,7 @@
           <a:lstStyle/>
           <a:p>
             <a:r>
-              <a:t>SPEAKER NOTES (placeholder) — Arrow Interior: one immersive rendering, one short caption. Speak to the experience, not the features.</a:t>
+              <a:t>SPEAKER NOTES (placeholder) — Arrow Interior — primary principle: Accessible Design. One immersive rendering, one short caption. Speak to the lived experience and the calm of everyday use, not the features.</a:t>
             </a:r>
           </a:p>
         </p:txBody>
@@ -941,7 +941,7 @@
           <a:lstStyle/>
           <a:p>
             <a:r>
-              <a:t>SPEAKER NOTES (placeholder) — Arrow Cross: let the full-width exterior image dominate, supported by one summary line and three strategic bullets.</a:t>
+              <a:t>SPEAKER NOTES (placeholder) — Arrow Cross — primary principle: Purposeful Versatility. Let the image carry the emotion; the summary states the role this vehicle plays in the philosophy, and the bullets reinforce that one principle while quietly supporting the others. Tie every point back to removing friction for the people who use it.</a:t>
             </a:r>
           </a:p>
         </p:txBody>
@@ -1011,7 +1011,7 @@
           <a:lstStyle/>
           <a:p>
             <a:r>
-              <a:t>SPEAKER NOTES (placeholder) — Arrow Cross Interior: one immersive rendering, one short caption. Speak to the experience, not the features.</a:t>
+              <a:t>SPEAKER NOTES (placeholder) — Arrow Cross Interior — primary principle: Purposeful Versatility. One immersive rendering, one short caption. Speak to the lived experience and the calm of everyday use, not the features.</a:t>
             </a:r>
           </a:p>
         </p:txBody>
@@ -1081,7 +1081,7 @@
           <a:lstStyle/>
           <a:p>
             <a:r>
-              <a:t>SPEAKER NOTES (placeholder) — Show where Chrysler sits and how it stays distinct. Replace BRAND A–D with the relevant Stellantis siblings. Emphasize white space Chrysler owns.</a:t>
+              <a:t>SPEAKER NOTES (placeholder) — Why this philosophy creates a unique position: within Stellantis, only Chrysler owns human-centered, friction-free design. Differentiation, not overlap. Replace BRAND A–D with the relevant siblings. Transition: 'Together, these vehicles are more than a portfolio — they define Chrysler's future.'</a:t>
             </a:r>
           </a:p>
         </p:txBody>
@@ -1151,7 +1151,7 @@
           <a:lstStyle/>
           <a:p>
             <a:r>
-              <a:t>SPEAKER NOTES (placeholder) — Paint the experience Chrysler will deliver. Six themes — swap ICON boxes for final iconography. Keep words minimal.</a:t>
+              <a:t>SPEAKER NOTES (placeholder) — Human-Centered Intelligence in practice: technology that quietly supports and removes friction. AI is an enabler, never the brand. Six themes — swap ICON boxes for final iconography. Keep words minimal.</a:t>
             </a:r>
           </a:p>
         </p:txBody>
@@ -1221,7 +1221,7 @@
           <a:lstStyle/>
           <a:p>
             <a:r>
-              <a:t>SPEAKER NOTES (placeholder) — Show breadth of design capability across six domains. The infographic ties them into one system. Replace nodes as needed.</a:t>
+              <a:t>SPEAKER NOTES (placeholder) — Breadth of design capability across six domains, unified by one philosophy. Replace nodes as needed. Transition into the close: 'When every decision begins with people, this is what design becomes.'</a:t>
             </a:r>
           </a:p>
         </p:txBody>
@@ -1291,7 +1291,7 @@
           <a:lstStyle/>
           <a:p>
             <a:r>
-              <a:t>SPEAKER NOTES (placeholder) — Three pillars frame the whole story. Keep to one line each. These recur as the spine of the narrative.</a:t>
+              <a:t>SPEAKER NOTES (placeholder) — Open the story: this is why Chrysler exists. State the central philosophy plainly, then the three ideas it rests on — we return to exactly these three at the close. Transition: 'This belief is not abstract. It begins with how we think.'</a:t>
             </a:r>
           </a:p>
         </p:txBody>
@@ -1361,7 +1361,7 @@
           <a:lstStyle/>
           <a:p>
             <a:r>
-              <a:t>SPEAKER NOTES (placeholder) — Close on three memorable messages that map to the three pillars. End on the hero image and the ask.</a:t>
+              <a:t>SPEAKER NOTES (placeholder) — Come full circle: these are the same three ideas opened on slide 2 — Designed Around People, Removing Everyday Friction, Modern American Design. Deliver the closing statement as the final word; it should feel like a vision, not a summary.</a:t>
             </a:r>
           </a:p>
         </p:txBody>
@@ -1431,7 +1431,7 @@
           <a:lstStyle/>
           <a:p>
             <a:r>
-              <a:t>SPEAKER NOTES (placeholder) — Land the vision in one quote. The three pillars echo slide 2. Let the supporting visual carry the emotion.</a:t>
+              <a:t>SPEAKER NOTES (placeholder) — How Chrysler thinks differently. The quote reframes luxury as the removal of friction. Introduce the four pillars that guide every design decision — People First, Everyday Ingenuity, Human-Centered Intelligence, Modern American Design. Transition: 'These principles are not abstract. They become tangible in every vehicle.'</a:t>
             </a:r>
           </a:p>
         </p:txBody>
@@ -1501,7 +1501,7 @@
           <a:lstStyle/>
           <a:p>
             <a:r>
-              <a:t>SPEAKER NOTES (placeholder) — Position the dual nature of the brand — rational engineering credibility meeting emotional design. Walk the board left to right.</a:t>
+              <a:t>SPEAKER NOTES (placeholder) — Chrysler thinks differently: rational rigor and human emotion are not opposites — together they remove friction. Transition: 'This way of thinking resolves into a clear design DNA.'</a:t>
             </a:r>
           </a:p>
         </p:txBody>
@@ -1571,7 +1571,7 @@
           <a:lstStyle/>
           <a:p>
             <a:r>
-              <a:t>SPEAKER NOTES (placeholder) — Define the DNA that every Chrysler shares. Keep principles tight and ownable. The graphic should make the language tangible.</a:t>
+              <a:t>SPEAKER NOTES (placeholder) — The shared DNA every Chrysler carries — the four pillars made tangible. Transition: 'These principles are not abstract ideas. They come to life in every vehicle.'</a:t>
             </a:r>
           </a:p>
         </p:txBody>
@@ -1641,7 +1641,7 @@
           <a:lstStyle/>
           <a:p>
             <a:r>
-              <a:t>SPEAKER NOTES (placeholder) — Reveal the full family at once — the scale of the vision. Image placeholders only; no specs.</a:t>
+              <a:t>SPEAKER NOTES (placeholder) — Reveal the full family at once. Frame it as evidence: 'Together, the portfolio shows how one philosophy serves different lifestyles while remaining unmistakably Chrysler.' Each vehicle that follows expresses one primary pillar. Image placeholders only; no specs.</a:t>
             </a:r>
           </a:p>
         </p:txBody>
@@ -1711,7 +1711,7 @@
           <a:lstStyle/>
           <a:p>
             <a:r>
-              <a:t>SPEAKER NOTES (placeholder) — Pacifica: let the full-width exterior image dominate, supported by one summary line and three strategic bullets.</a:t>
+              <a:t>SPEAKER NOTES (placeholder) — Pacifica — primary principle: People First. Let the image carry the emotion; the summary states the role this vehicle plays in the philosophy, and the bullets reinforce that one principle while quietly supporting the others. Tie every point back to removing friction for the people who use it.</a:t>
             </a:r>
           </a:p>
         </p:txBody>
@@ -1781,7 +1781,7 @@
           <a:lstStyle/>
           <a:p>
             <a:r>
-              <a:t>SPEAKER NOTES (placeholder) — Pacifica Interior: one immersive rendering, one short caption. Speak to the experience, not the features.</a:t>
+              <a:t>SPEAKER NOTES (placeholder) — Pacifica Interior — primary principle: People First. One immersive rendering, one short caption. Speak to the lived experience and the calm of everyday use, not the features.</a:t>
             </a:r>
           </a:p>
         </p:txBody>
@@ -1851,7 +1851,7 @@
           <a:lstStyle/>
           <a:p>
             <a:r>
-              <a:t>SPEAKER NOTES (placeholder) — 300 Concept: let the full-width exterior image dominate, supported by one summary line and three strategic bullets.</a:t>
+              <a:t>SPEAKER NOTES (placeholder) — 300 Concept — primary principle: Modern American Design. Let the image carry the emotion; the summary states the role this vehicle plays in the philosophy, and the bullets reinforce that one principle while quietly supporting the others. Tie every point back to removing friction for the people who use it.</a:t>
             </a:r>
           </a:p>
         </p:txBody>
@@ -5675,7 +5675,7 @@
                 </a:solidFill>
                 <a:latin typeface="Arial"/>
               </a:rPr>
-              <a:t>300 CONCEPT</a:t>
+              <a:t>MODERN AMERICAN DESIGN</a:t>
             </a:r>
           </a:p>
         </p:txBody>
@@ -6271,7 +6271,7 @@
                 </a:solidFill>
                 <a:latin typeface="Arial"/>
               </a:rPr>
-              <a:t>An interior sanctuary — crafted, composed, human in scale.</a:t>
+              <a:t>Crafted, composed, human in scale — presence without excess.</a:t>
             </a:r>
           </a:p>
         </p:txBody>
@@ -6437,7 +6437,7 @@
                 </a:solidFill>
                 <a:latin typeface="Arial"/>
               </a:rPr>
-              <a:t>THE PHILOSOPHY</a:t>
+              <a:t>EVERYDAY INGENUITY</a:t>
             </a:r>
           </a:p>
         </p:txBody>
@@ -6511,7 +6511,7 @@
                 </a:solidFill>
                 <a:latin typeface="Arial"/>
               </a:rPr>
-              <a:t>Airflow introduces Chrysler's philosophy: innovative practicality, designed around people.</a:t>
+              <a:t>Chrysler's design manifesto — intelligent design that simplifies everyday life rather than complicating it.</a:t>
             </a:r>
           </a:p>
         </p:txBody>
@@ -7164,7 +7164,7 @@
                 </a:solidFill>
                 <a:latin typeface="Arial"/>
               </a:rPr>
-              <a:t>Spacious &amp; Adaptive</a:t>
+              <a:t>Everyday Ingenuity</a:t>
             </a:r>
           </a:p>
           <a:p>
@@ -7180,7 +7180,7 @@
                 </a:solidFill>
                 <a:latin typeface="Arial"/>
               </a:rPr>
-              <a:t>Versatile space for everyday life.</a:t>
+              <a:t>Thoughtful solutions for daily life.</a:t>
             </a:r>
           </a:p>
         </p:txBody>
@@ -7307,7 +7307,7 @@
                 </a:solidFill>
                 <a:latin typeface="Arial"/>
               </a:rPr>
-              <a:t>Technology With Purpose</a:t>
+              <a:t>Intelligence That Recedes</a:t>
             </a:r>
           </a:p>
           <a:p>
@@ -7323,7 +7323,7 @@
                 </a:solidFill>
                 <a:latin typeface="Arial"/>
               </a:rPr>
-              <a:t>Intelligence that serves, then disappears.</a:t>
+              <a:t>Technology that quietly supports.</a:t>
             </a:r>
           </a:p>
         </p:txBody>
@@ -7466,7 +7466,7 @@
                 </a:solidFill>
                 <a:latin typeface="Arial"/>
               </a:rPr>
-              <a:t>Clean, logical, human-centered form.</a:t>
+              <a:t>Clean, modern, human-centered form.</a:t>
             </a:r>
           </a:p>
         </p:txBody>
@@ -7632,7 +7632,7 @@
                 </a:solidFill>
                 <a:latin typeface="Arial"/>
               </a:rPr>
-              <a:t>AIRFLOW</a:t>
+              <a:t>EVERYDAY INGENUITY</a:t>
             </a:r>
           </a:p>
         </p:txBody>
@@ -8228,7 +8228,7 @@
                 </a:solidFill>
                 <a:latin typeface="Arial"/>
               </a:rPr>
-              <a:t>Designed around people — flexible, calm, effortlessly useful.</a:t>
+              <a:t>Designed around people — calm, intelligent, effortlessly useful.</a:t>
             </a:r>
           </a:p>
         </p:txBody>
@@ -8394,7 +8394,7 @@
                 </a:solidFill>
                 <a:latin typeface="Arial"/>
               </a:rPr>
-              <a:t>CLEVER ACCESSIBILITY</a:t>
+              <a:t>ACCESSIBLE DESIGN</a:t>
             </a:r>
           </a:p>
         </p:txBody>
@@ -8468,7 +8468,7 @@
                 </a:solidFill>
                 <a:latin typeface="Arial"/>
               </a:rPr>
-              <a:t>Chrysler's accessible entry — clever, design-led, and attainable from around $24K.</a:t>
+              <a:t>Thoughtful Chrysler design, made attainable — approachable, smart, and easy to live with.</a:t>
             </a:r>
           </a:p>
         </p:txBody>
@@ -9121,7 +9121,7 @@
                 </a:solidFill>
                 <a:latin typeface="Arial"/>
               </a:rPr>
-              <a:t>Smart &amp; Simple</a:t>
+              <a:t>Approachable Design</a:t>
             </a:r>
           </a:p>
           <a:p>
@@ -9137,7 +9137,7 @@
                 </a:solidFill>
                 <a:latin typeface="Arial"/>
               </a:rPr>
-              <a:t>Approachable design for the city.</a:t>
+              <a:t>An inviting introduction to Chrysler.</a:t>
             </a:r>
           </a:p>
         </p:txBody>
@@ -9264,7 +9264,7 @@
                 </a:solidFill>
                 <a:latin typeface="Arial"/>
               </a:rPr>
-              <a:t>Attainable</a:t>
+              <a:t>Smart Packaging</a:t>
             </a:r>
           </a:p>
           <a:p>
@@ -9280,7 +9280,7 @@
                 </a:solidFill>
                 <a:latin typeface="Arial"/>
               </a:rPr>
-              <a:t>Thoughtful style within reach.</a:t>
+              <a:t>Everyday usability, thoughtfully resolved.</a:t>
             </a:r>
           </a:p>
         </p:txBody>
@@ -9407,7 +9407,7 @@
                 </a:solidFill>
                 <a:latin typeface="Arial"/>
               </a:rPr>
-              <a:t>Youthful &amp; Modern</a:t>
+              <a:t>Attainable by Design</a:t>
             </a:r>
           </a:p>
           <a:p>
@@ -9423,7 +9423,7 @@
                 </a:solidFill>
                 <a:latin typeface="Arial"/>
               </a:rPr>
-              <a:t>Efficient, urban, design-led.</a:t>
+              <a:t>Accessible without compromise.</a:t>
             </a:r>
           </a:p>
         </p:txBody>
@@ -9589,7 +9589,7 @@
                 </a:solidFill>
                 <a:latin typeface="Arial"/>
               </a:rPr>
-              <a:t>ARROW</a:t>
+              <a:t>ACCESSIBLE DESIGN</a:t>
             </a:r>
           </a:p>
         </p:txBody>
@@ -10185,7 +10185,7 @@
                 </a:solidFill>
                 <a:latin typeface="Arial"/>
               </a:rPr>
-              <a:t>Smart, simple, and useful — accessible design done thoughtfully.</a:t>
+              <a:t>Approachable and intuitive — thoughtful design, made attainable.</a:t>
             </a:r>
           </a:p>
         </p:txBody>
@@ -10425,7 +10425,7 @@
                 </a:solidFill>
                 <a:latin typeface="Arial"/>
               </a:rPr>
-              <a:t>An accessible crossover with purposeful versatility — designed around everyday life.</a:t>
+              <a:t>Thoughtful design that adapts to modern family life — flexible, confident, and quietly intelligent.</a:t>
             </a:r>
           </a:p>
         </p:txBody>
@@ -11078,7 +11078,7 @@
                 </a:solidFill>
                 <a:latin typeface="Arial"/>
               </a:rPr>
-              <a:t>Flexible &amp; Versatile</a:t>
+              <a:t>Purposeful Versatility</a:t>
             </a:r>
           </a:p>
           <a:p>
@@ -11094,7 +11094,7 @@
                 </a:solidFill>
                 <a:latin typeface="Arial"/>
               </a:rPr>
-              <a:t>Thoughtful packaging for families.</a:t>
+              <a:t>Flexibility for how families really live.</a:t>
             </a:r>
           </a:p>
         </p:txBody>
@@ -11221,7 +11221,7 @@
                 </a:solidFill>
                 <a:latin typeface="Arial"/>
               </a:rPr>
-              <a:t>Urban &amp; Useful</a:t>
+              <a:t>Practical Intelligence</a:t>
             </a:r>
           </a:p>
           <a:p>
@@ -11237,7 +11237,7 @@
                 </a:solidFill>
                 <a:latin typeface="Arial"/>
               </a:rPr>
-              <a:t>Confident, modern, accessible.</a:t>
+              <a:t>Smart packaging, calmly resolved.</a:t>
             </a:r>
           </a:p>
         </p:txBody>
@@ -11364,7 +11364,7 @@
                 </a:solidFill>
                 <a:latin typeface="Arial"/>
               </a:rPr>
-              <a:t>Everyday Ready</a:t>
+              <a:t>Confident &amp; Capable</a:t>
             </a:r>
           </a:p>
           <a:p>
@@ -11380,7 +11380,7 @@
                 </a:solidFill>
                 <a:latin typeface="Arial"/>
               </a:rPr>
-              <a:t>Simple design that adapts.</a:t>
+              <a:t>Modern, accessible, ready for the everyday.</a:t>
             </a:r>
           </a:p>
         </p:txBody>
@@ -11546,7 +11546,7 @@
                 </a:solidFill>
                 <a:latin typeface="Arial"/>
               </a:rPr>
-              <a:t>ARROW CROSS</a:t>
+              <a:t>PURPOSEFUL VERSATILITY</a:t>
             </a:r>
           </a:p>
         </p:txBody>
@@ -12142,7 +12142,7 @@
                 </a:solidFill>
                 <a:latin typeface="Arial"/>
               </a:rPr>
-              <a:t>Versatile and family-friendly — space designed for real life.</a:t>
+              <a:t>Flexible and family-ready — design that adapts to everyday life.</a:t>
             </a:r>
           </a:p>
         </p:txBody>
@@ -12378,7 +12378,7 @@
                 </a:solidFill>
                 <a:latin typeface="Arial"/>
               </a:rPr>
-              <a:t>Differentiation, not overlap — the distinct, human-centered space Chrysler owns.</a:t>
+              <a:t>Differentiation, not overlap — the human-centered space only Chrysler occupies.</a:t>
             </a:r>
           </a:p>
         </p:txBody>
@@ -12477,8 +12477,8 @@
                 </a:solidFill>
                 <a:latin typeface="Arial"/>
               </a:rPr>
-              <a:t>Innovative practicality
-for everyday life</a:t>
+              <a:t>Designed around people.
+Friction removed.</a:t>
             </a:r>
           </a:p>
         </p:txBody>
@@ -16044,7 +16044,7 @@
                 </a:solidFill>
                 <a:latin typeface="Arial"/>
               </a:rPr>
-              <a:t>Chrysler makes everyday life effortless — design that removes friction and puts people first.</a:t>
+              <a:t>Chrysler removes friction from everyday life through thoughtful, people-first design.</a:t>
             </a:r>
           </a:p>
         </p:txBody>
@@ -16222,7 +16222,7 @@
                 </a:solidFill>
                 <a:latin typeface="Arial"/>
               </a:rPr>
-              <a:t>Modern American Design</a:t>
+              <a:t>Designed Around People</a:t>
             </a:r>
           </a:p>
           <a:p>
@@ -16238,7 +16238,7 @@
                 </a:solidFill>
                 <a:latin typeface="Arial"/>
               </a:rPr>
-              <a:t>Optimistic, human, unmistakably Chrysler.</a:t>
+              <a:t>Every decision begins with the people who use it.</a:t>
             </a:r>
           </a:p>
         </p:txBody>
@@ -16416,7 +16416,7 @@
                 </a:solidFill>
                 <a:latin typeface="Arial"/>
               </a:rPr>
-              <a:t>Technology With Purpose</a:t>
+              <a:t>Removing Everyday Friction</a:t>
             </a:r>
           </a:p>
           <a:p>
@@ -16432,7 +16432,7 @@
                 </a:solidFill>
                 <a:latin typeface="Arial"/>
               </a:rPr>
-              <a:t>Intelligence that disappears into the experience.</a:t>
+              <a:t>Thoughtful design that makes daily life easier.</a:t>
             </a:r>
           </a:p>
         </p:txBody>
@@ -16610,7 +16610,7 @@
                 </a:solidFill>
                 <a:latin typeface="Arial"/>
               </a:rPr>
-              <a:t>Beautiful Simplicity</a:t>
+              <a:t>Modern American Design</a:t>
             </a:r>
           </a:p>
           <a:p>
@@ -16626,7 +16626,7 @@
                 </a:solidFill>
                 <a:latin typeface="Arial"/>
               </a:rPr>
-              <a:t>Luxury as the absence of friction.</a:t>
+              <a:t>Confident, optimistic, unmistakably Chrysler.</a:t>
             </a:r>
           </a:p>
         </p:txBody>
@@ -17186,7 +17186,7 @@
                 </a:solidFill>
                 <a:latin typeface="Arial"/>
               </a:rPr>
-              <a:t>IN SUMMARY</a:t>
+              <a:t>IN CLOSING</a:t>
             </a:r>
           </a:p>
         </p:txBody>
@@ -17200,7 +17200,7 @@
         <p:spPr>
           <a:xfrm>
             <a:off x="658368" y="3611880"/>
-            <a:ext cx="10058400" cy="731520"/>
+            <a:ext cx="10058400" cy="548640"/>
           </a:xfrm>
           <a:prstGeom prst="rect">
             <a:avLst/>
@@ -17221,7 +17221,7 @@
                 </a:solidFill>
                 <a:latin typeface="Arial"/>
               </a:rPr>
-              <a:t>Executive Takeaways</a:t>
+              <a:t>The Future of Chrysler</a:t>
             </a:r>
           </a:p>
         </p:txBody>
@@ -17229,6 +17229,45 @@
       <p:sp>
         <p:nvSpPr>
           <p:cNvPr id="15" name="TextBox 14"/>
+          <p:cNvSpPr txBox="1"/>
+          <p:nvPr/>
+        </p:nvSpPr>
+        <p:spPr>
+          <a:xfrm>
+            <a:off x="685800" y="4114800"/>
+            <a:ext cx="10817352" cy="457200"/>
+          </a:xfrm>
+          <a:prstGeom prst="rect">
+            <a:avLst/>
+          </a:prstGeom>
+          <a:noFill/>
+        </p:spPr>
+        <p:txBody>
+          <a:bodyPr wrap="square" anchor="t" lIns="0" rIns="0" tIns="0" bIns="0">
+            <a:spAutoFit/>
+          </a:bodyPr>
+          <a:lstStyle/>
+          <a:p>
+            <a:pPr algn="l">
+              <a:lnSpc>
+                <a:spcPct val="120000"/>
+              </a:lnSpc>
+            </a:pPr>
+            <a:r>
+              <a:rPr sz="1300" b="0" i="1">
+                <a:solidFill>
+                  <a:srgbClr val="4A4E57"/>
+                </a:solidFill>
+                <a:latin typeface="Arial"/>
+              </a:rPr>
+              <a:t>When every decision begins with people, thoughtful design becomes effortless living — that is the future of Chrysler.</a:t>
+            </a:r>
+          </a:p>
+        </p:txBody>
+      </p:sp>
+      <p:sp>
+        <p:nvSpPr>
+          <p:cNvPr id="16" name="TextBox 15"/>
           <p:cNvSpPr txBox="1"/>
           <p:nvPr/>
         </p:nvSpPr>
@@ -17263,7 +17302,7 @@
       </p:sp>
       <p:cxnSp>
         <p:nvCxnSpPr>
-          <p:cNvPr id="16" name="Connector 15"/>
+          <p:cNvPr id="17" name="Connector 16"/>
           <p:cNvCxnSpPr/>
           <p:nvPr/>
         </p:nvCxnSpPr>
@@ -17298,7 +17337,7 @@
       </p:cxnSp>
       <p:sp>
         <p:nvSpPr>
-          <p:cNvPr id="17" name="TextBox 16"/>
+          <p:cNvPr id="18" name="TextBox 17"/>
           <p:cNvSpPr txBox="1"/>
           <p:nvPr/>
         </p:nvSpPr>
@@ -17346,14 +17385,14 @@
                 </a:solidFill>
                 <a:latin typeface="Arial"/>
               </a:rPr>
-              <a:t>Luxury is the removal of everyday friction.</a:t>
-            </a:r>
-          </a:p>
-        </p:txBody>
-      </p:sp>
-      <p:sp>
-        <p:nvSpPr>
-          <p:cNvPr id="18" name="TextBox 17"/>
+              <a:t>Every decision begins with the people who use it.</a:t>
+            </a:r>
+          </a:p>
+        </p:txBody>
+      </p:sp>
+      <p:sp>
+        <p:nvSpPr>
+          <p:cNvPr id="19" name="TextBox 18"/>
           <p:cNvSpPr txBox="1"/>
           <p:nvPr/>
         </p:nvSpPr>
@@ -17388,7 +17427,7 @@
       </p:sp>
       <p:cxnSp>
         <p:nvCxnSpPr>
-          <p:cNvPr id="19" name="Connector 18"/>
+          <p:cNvPr id="20" name="Connector 19"/>
           <p:cNvCxnSpPr/>
           <p:nvPr/>
         </p:nvCxnSpPr>
@@ -17423,7 +17462,7 @@
       </p:cxnSp>
       <p:sp>
         <p:nvSpPr>
-          <p:cNvPr id="20" name="TextBox 19"/>
+          <p:cNvPr id="21" name="TextBox 20"/>
           <p:cNvSpPr txBox="1"/>
           <p:nvPr/>
         </p:nvSpPr>
@@ -17455,7 +17494,7 @@
                 </a:solidFill>
                 <a:latin typeface="Arial"/>
               </a:rPr>
-              <a:t>Distinct Within Stellantis</a:t>
+              <a:t>Removing Everyday Friction</a:t>
             </a:r>
           </a:p>
           <a:p>
@@ -17471,14 +17510,14 @@
                 </a:solidFill>
                 <a:latin typeface="Arial"/>
               </a:rPr>
-              <a:t>Modern American design — human and confident.</a:t>
-            </a:r>
-          </a:p>
-        </p:txBody>
-      </p:sp>
-      <p:sp>
-        <p:nvSpPr>
-          <p:cNvPr id="21" name="TextBox 20"/>
+              <a:t>Thoughtful design that makes life effortless.</a:t>
+            </a:r>
+          </a:p>
+        </p:txBody>
+      </p:sp>
+      <p:sp>
+        <p:nvSpPr>
+          <p:cNvPr id="22" name="TextBox 21"/>
           <p:cNvSpPr txBox="1"/>
           <p:nvPr/>
         </p:nvSpPr>
@@ -17513,7 +17552,7 @@
       </p:sp>
       <p:cxnSp>
         <p:nvCxnSpPr>
-          <p:cNvPr id="22" name="Connector 21"/>
+          <p:cNvPr id="23" name="Connector 22"/>
           <p:cNvCxnSpPr/>
           <p:nvPr/>
         </p:nvCxnSpPr>
@@ -17548,7 +17587,7 @@
       </p:cxnSp>
       <p:sp>
         <p:nvSpPr>
-          <p:cNvPr id="23" name="TextBox 22"/>
+          <p:cNvPr id="24" name="TextBox 23"/>
           <p:cNvSpPr txBox="1"/>
           <p:nvPr/>
         </p:nvSpPr>
@@ -17580,7 +17619,7 @@
                 </a:solidFill>
                 <a:latin typeface="Arial"/>
               </a:rPr>
-              <a:t>Ready to Lead</a:t>
+              <a:t>Modern American Design</a:t>
             </a:r>
           </a:p>
           <a:p>
@@ -17596,14 +17635,14 @@
                 </a:solidFill>
                 <a:latin typeface="Arial"/>
               </a:rPr>
-              <a:t>A clear, design-led vision for Chrysler's future.</a:t>
-            </a:r>
-          </a:p>
-        </p:txBody>
-      </p:sp>
-      <p:sp>
-        <p:nvSpPr>
-          <p:cNvPr id="24" name="TextBox 23"/>
+              <a:t>Confident, optimistic, unmistakably Chrysler.</a:t>
+            </a:r>
+          </a:p>
+        </p:txBody>
+      </p:sp>
+      <p:sp>
+        <p:nvSpPr>
+          <p:cNvPr id="25" name="TextBox 24"/>
           <p:cNvSpPr txBox="1"/>
           <p:nvPr/>
         </p:nvSpPr>
@@ -17638,7 +17677,7 @@
       </p:sp>
       <p:sp>
         <p:nvSpPr>
-          <p:cNvPr id="25" name="TextBox 24"/>
+          <p:cNvPr id="26" name="TextBox 25"/>
           <p:cNvSpPr txBox="1"/>
           <p:nvPr/>
         </p:nvSpPr>
@@ -17673,7 +17712,7 @@
       </p:sp>
       <p:sp>
         <p:nvSpPr>
-          <p:cNvPr id="26" name="TextBox 25"/>
+          <p:cNvPr id="27" name="TextBox 26"/>
           <p:cNvSpPr txBox="1"/>
           <p:nvPr/>
         </p:nvSpPr>
@@ -17865,7 +17904,7 @@
         </p:nvSpPr>
         <p:spPr>
           <a:xfrm>
-            <a:off x="713232" y="4654296"/>
+            <a:off x="713232" y="4562856"/>
             <a:ext cx="146304" cy="146304"/>
           </a:xfrm>
           <a:prstGeom prst="diamond">
@@ -17909,8 +17948,8 @@
         </p:nvSpPr>
         <p:spPr>
           <a:xfrm>
-            <a:off x="1051560" y="4617720"/>
-            <a:ext cx="5303520" cy="457200"/>
+            <a:off x="1051560" y="4526280"/>
+            <a:ext cx="5577840" cy="457200"/>
           </a:xfrm>
           <a:prstGeom prst="rect">
             <a:avLst/>
@@ -17931,7 +17970,7 @@
                 </a:solidFill>
                 <a:latin typeface="Arial"/>
               </a:rPr>
-              <a:t>Innovative Practicality  —  design that solves real life</a:t>
+              <a:t>People First  —  every decision begins with people</a:t>
             </a:r>
           </a:p>
         </p:txBody>
@@ -17944,7 +17983,7 @@
         </p:nvSpPr>
         <p:spPr>
           <a:xfrm>
-            <a:off x="713232" y="5202936"/>
+            <a:off x="713232" y="5020056"/>
             <a:ext cx="146304" cy="146304"/>
           </a:xfrm>
           <a:prstGeom prst="diamond">
@@ -17988,8 +18027,8 @@
         </p:nvSpPr>
         <p:spPr>
           <a:xfrm>
-            <a:off x="1051560" y="5166360"/>
-            <a:ext cx="5303520" cy="457200"/>
+            <a:off x="1051560" y="4983480"/>
+            <a:ext cx="5577840" cy="457200"/>
           </a:xfrm>
           <a:prstGeom prst="rect">
             <a:avLst/>
@@ -18010,7 +18049,7 @@
                 </a:solidFill>
                 <a:latin typeface="Arial"/>
               </a:rPr>
-              <a:t>Human-Centered Technology  —  built around people, not features</a:t>
+              <a:t>Everyday Ingenuity  —  solutions that make daily life easier</a:t>
             </a:r>
           </a:p>
         </p:txBody>
@@ -18023,7 +18062,7 @@
         </p:nvSpPr>
         <p:spPr>
           <a:xfrm>
-            <a:off x="713232" y="5751576"/>
+            <a:off x="713232" y="5477256"/>
             <a:ext cx="146304" cy="146304"/>
           </a:xfrm>
           <a:prstGeom prst="diamond">
@@ -18067,8 +18106,8 @@
         </p:nvSpPr>
         <p:spPr>
           <a:xfrm>
-            <a:off x="1051560" y="5715000"/>
-            <a:ext cx="5303520" cy="457200"/>
+            <a:off x="1051560" y="5440680"/>
+            <a:ext cx="5577840" cy="457200"/>
           </a:xfrm>
           <a:prstGeom prst="rect">
             <a:avLst/>
@@ -18089,14 +18128,93 @@
                 </a:solidFill>
                 <a:latin typeface="Arial"/>
               </a:rPr>
-              <a:t>Beautiful Simplicity  —  calm, considered, effortless</a:t>
-            </a:r>
-          </a:p>
-        </p:txBody>
-      </p:sp>
-      <p:sp>
-        <p:nvSpPr>
-          <p:cNvPr id="11" name="Rectangle 10"/>
+              <a:t>Human-Centered Intelligence  —  technology that quietly supports</a:t>
+            </a:r>
+          </a:p>
+        </p:txBody>
+      </p:sp>
+      <p:sp>
+        <p:nvSpPr>
+          <p:cNvPr id="11" name="Diamond 10"/>
+          <p:cNvSpPr/>
+          <p:nvPr/>
+        </p:nvSpPr>
+        <p:spPr>
+          <a:xfrm>
+            <a:off x="713232" y="5934456"/>
+            <a:ext cx="146304" cy="146304"/>
+          </a:xfrm>
+          <a:prstGeom prst="diamond">
+            <a:avLst/>
+          </a:prstGeom>
+          <a:solidFill>
+            <a:srgbClr val="1B2A4A"/>
+          </a:solidFill>
+          <a:ln>
+            <a:noFill/>
+          </a:ln>
+          <a:effectLst/>
+        </p:spPr>
+        <p:style>
+          <a:lnRef idx="1">
+            <a:schemeClr val="accent1"/>
+          </a:lnRef>
+          <a:fillRef idx="3">
+            <a:schemeClr val="accent1"/>
+          </a:fillRef>
+          <a:effectRef idx="2">
+            <a:schemeClr val="accent1"/>
+          </a:effectRef>
+          <a:fontRef idx="minor">
+            <a:schemeClr val="lt1"/>
+          </a:fontRef>
+        </p:style>
+        <p:txBody>
+          <a:bodyPr rtlCol="0" anchor="ctr"/>
+          <a:lstStyle/>
+          <a:p>
+            <a:pPr algn="ctr"/>
+          </a:p>
+        </p:txBody>
+      </p:sp>
+      <p:sp>
+        <p:nvSpPr>
+          <p:cNvPr id="12" name="TextBox 11"/>
+          <p:cNvSpPr txBox="1"/>
+          <p:nvPr/>
+        </p:nvSpPr>
+        <p:spPr>
+          <a:xfrm>
+            <a:off x="1051560" y="5897880"/>
+            <a:ext cx="5577840" cy="457200"/>
+          </a:xfrm>
+          <a:prstGeom prst="rect">
+            <a:avLst/>
+          </a:prstGeom>
+          <a:noFill/>
+        </p:spPr>
+        <p:txBody>
+          <a:bodyPr wrap="square" anchor="t" lIns="0" rIns="0" tIns="0" bIns="0">
+            <a:spAutoFit/>
+          </a:bodyPr>
+          <a:lstStyle/>
+          <a:p>
+            <a:pPr algn="l"/>
+            <a:r>
+              <a:rPr sz="1300" b="0" i="0">
+                <a:solidFill>
+                  <a:srgbClr val="4A4E57"/>
+                </a:solidFill>
+                <a:latin typeface="Arial"/>
+              </a:rPr>
+              <a:t>Modern American Design  —  confident, optimistic, unmistakably Chrysler</a:t>
+            </a:r>
+          </a:p>
+        </p:txBody>
+      </p:sp>
+      <p:sp>
+        <p:nvSpPr>
+          <p:cNvPr id="13" name="Rectangle 12"/>
           <p:cNvSpPr/>
           <p:nvPr/>
         </p:nvSpPr>
@@ -18140,83 +18258,13 @@
       </p:sp>
       <p:cxnSp>
         <p:nvCxnSpPr>
-          <p:cNvPr id="12" name="Connector 11"/>
-          <p:cNvCxnSpPr/>
-          <p:nvPr/>
-        </p:nvCxnSpPr>
-        <p:spPr>
-          <a:xfrm>
-            <a:off x="6858000" y="2011680"/>
-            <a:ext cx="237744" cy="0"/>
-          </a:xfrm>
-          <a:prstGeom prst="bentConnector3">
-            <a:avLst/>
-          </a:prstGeom>
-          <a:ln w="15875">
-            <a:solidFill>
-              <a:srgbClr val="A9AEB5"/>
-            </a:solidFill>
-          </a:ln>
-        </p:spPr>
-        <p:style>
-          <a:lnRef idx="2">
-            <a:schemeClr val="accent1"/>
-          </a:lnRef>
-          <a:fillRef idx="0">
-            <a:schemeClr val="accent1"/>
-          </a:fillRef>
-          <a:effectRef idx="1">
-            <a:schemeClr val="accent1"/>
-          </a:effectRef>
-          <a:fontRef idx="minor">
-            <a:schemeClr val="tx1"/>
-          </a:fontRef>
-        </p:style>
-      </p:cxnSp>
-      <p:cxnSp>
-        <p:nvCxnSpPr>
-          <p:cNvPr id="13" name="Connector 12"/>
-          <p:cNvCxnSpPr/>
-          <p:nvPr/>
-        </p:nvCxnSpPr>
-        <p:spPr>
-          <a:xfrm>
-            <a:off x="6858000" y="2011680"/>
-            <a:ext cx="0" cy="237744"/>
-          </a:xfrm>
-          <a:prstGeom prst="bentConnector3">
-            <a:avLst/>
-          </a:prstGeom>
-          <a:ln w="15875">
-            <a:solidFill>
-              <a:srgbClr val="A9AEB5"/>
-            </a:solidFill>
-          </a:ln>
-        </p:spPr>
-        <p:style>
-          <a:lnRef idx="2">
-            <a:schemeClr val="accent1"/>
-          </a:lnRef>
-          <a:fillRef idx="0">
-            <a:schemeClr val="accent1"/>
-          </a:fillRef>
-          <a:effectRef idx="1">
-            <a:schemeClr val="accent1"/>
-          </a:effectRef>
-          <a:fontRef idx="minor">
-            <a:schemeClr val="tx1"/>
-          </a:fontRef>
-        </p:style>
-      </p:cxnSp>
-      <p:cxnSp>
-        <p:nvCxnSpPr>
           <p:cNvPr id="14" name="Connector 13"/>
           <p:cNvCxnSpPr/>
           <p:nvPr/>
         </p:nvCxnSpPr>
         <p:spPr>
-          <a:xfrm flipH="1">
-            <a:off x="11265408" y="2011680"/>
+          <a:xfrm>
+            <a:off x="6858000" y="2011680"/>
             <a:ext cx="237744" cy="0"/>
           </a:xfrm>
           <a:prstGeom prst="bentConnector3">
@@ -18251,7 +18299,7 @@
         </p:nvCxnSpPr>
         <p:spPr>
           <a:xfrm>
-            <a:off x="11503152" y="2011680"/>
+            <a:off x="6858000" y="2011680"/>
             <a:ext cx="0" cy="237744"/>
           </a:xfrm>
           <a:prstGeom prst="bentConnector3">
@@ -18285,8 +18333,8 @@
           <p:nvPr/>
         </p:nvCxnSpPr>
         <p:spPr>
-          <a:xfrm>
-            <a:off x="6858000" y="6035040"/>
+          <a:xfrm flipH="1">
+            <a:off x="11265408" y="2011680"/>
             <a:ext cx="237744" cy="0"/>
           </a:xfrm>
           <a:prstGeom prst="bentConnector3">
@@ -18320,8 +18368,8 @@
           <p:nvPr/>
         </p:nvCxnSpPr>
         <p:spPr>
-          <a:xfrm flipV="1">
-            <a:off x="6858000" y="5797296"/>
+          <a:xfrm>
+            <a:off x="11503152" y="2011680"/>
             <a:ext cx="0" cy="237744"/>
           </a:xfrm>
           <a:prstGeom prst="bentConnector3">
@@ -18355,8 +18403,8 @@
           <p:nvPr/>
         </p:nvCxnSpPr>
         <p:spPr>
-          <a:xfrm flipH="1">
-            <a:off x="11265408" y="6035040"/>
+          <a:xfrm>
+            <a:off x="6858000" y="6035040"/>
             <a:ext cx="237744" cy="0"/>
           </a:xfrm>
           <a:prstGeom prst="bentConnector3">
@@ -18391,7 +18439,7 @@
         </p:nvCxnSpPr>
         <p:spPr>
           <a:xfrm flipV="1">
-            <a:off x="11503152" y="5797296"/>
+            <a:off x="6858000" y="5797296"/>
             <a:ext cx="0" cy="237744"/>
           </a:xfrm>
           <a:prstGeom prst="bentConnector3">
@@ -18418,9 +18466,79 @@
           </a:fontRef>
         </p:style>
       </p:cxnSp>
-      <p:sp>
-        <p:nvSpPr>
-          <p:cNvPr id="20" name="Rounded Rectangle 19"/>
+      <p:cxnSp>
+        <p:nvCxnSpPr>
+          <p:cNvPr id="20" name="Connector 19"/>
+          <p:cNvCxnSpPr/>
+          <p:nvPr/>
+        </p:nvCxnSpPr>
+        <p:spPr>
+          <a:xfrm flipH="1">
+            <a:off x="11265408" y="6035040"/>
+            <a:ext cx="237744" cy="0"/>
+          </a:xfrm>
+          <a:prstGeom prst="bentConnector3">
+            <a:avLst/>
+          </a:prstGeom>
+          <a:ln w="15875">
+            <a:solidFill>
+              <a:srgbClr val="A9AEB5"/>
+            </a:solidFill>
+          </a:ln>
+        </p:spPr>
+        <p:style>
+          <a:lnRef idx="2">
+            <a:schemeClr val="accent1"/>
+          </a:lnRef>
+          <a:fillRef idx="0">
+            <a:schemeClr val="accent1"/>
+          </a:fillRef>
+          <a:effectRef idx="1">
+            <a:schemeClr val="accent1"/>
+          </a:effectRef>
+          <a:fontRef idx="minor">
+            <a:schemeClr val="tx1"/>
+          </a:fontRef>
+        </p:style>
+      </p:cxnSp>
+      <p:cxnSp>
+        <p:nvCxnSpPr>
+          <p:cNvPr id="21" name="Connector 20"/>
+          <p:cNvCxnSpPr/>
+          <p:nvPr/>
+        </p:nvCxnSpPr>
+        <p:spPr>
+          <a:xfrm flipV="1">
+            <a:off x="11503152" y="5797296"/>
+            <a:ext cx="0" cy="237744"/>
+          </a:xfrm>
+          <a:prstGeom prst="bentConnector3">
+            <a:avLst/>
+          </a:prstGeom>
+          <a:ln w="15875">
+            <a:solidFill>
+              <a:srgbClr val="A9AEB5"/>
+            </a:solidFill>
+          </a:ln>
+        </p:spPr>
+        <p:style>
+          <a:lnRef idx="2">
+            <a:schemeClr val="accent1"/>
+          </a:lnRef>
+          <a:fillRef idx="0">
+            <a:schemeClr val="accent1"/>
+          </a:fillRef>
+          <a:effectRef idx="1">
+            <a:schemeClr val="accent1"/>
+          </a:effectRef>
+          <a:fontRef idx="minor">
+            <a:schemeClr val="tx1"/>
+          </a:fontRef>
+        </p:style>
+      </p:cxnSp>
+      <p:sp>
+        <p:nvSpPr>
+          <p:cNvPr id="22" name="Rounded Rectangle 21"/>
           <p:cNvSpPr/>
           <p:nvPr/>
         </p:nvSpPr>
@@ -18464,7 +18582,7 @@
       </p:sp>
       <p:sp>
         <p:nvSpPr>
-          <p:cNvPr id="21" name="Oval 20"/>
+          <p:cNvPr id="23" name="Oval 22"/>
           <p:cNvSpPr/>
           <p:nvPr/>
         </p:nvSpPr>
@@ -18508,7 +18626,7 @@
       </p:sp>
       <p:sp>
         <p:nvSpPr>
-          <p:cNvPr id="22" name="Isosceles Triangle 21"/>
+          <p:cNvPr id="24" name="Isosceles Triangle 23"/>
           <p:cNvSpPr/>
           <p:nvPr/>
         </p:nvSpPr>
@@ -18552,7 +18670,7 @@
       </p:sp>
       <p:sp>
         <p:nvSpPr>
-          <p:cNvPr id="23" name="TextBox 22"/>
+          <p:cNvPr id="25" name="TextBox 24"/>
           <p:cNvSpPr txBox="1"/>
           <p:nvPr/>
         </p:nvSpPr>
@@ -18587,7 +18705,7 @@
       </p:sp>
       <p:sp>
         <p:nvSpPr>
-          <p:cNvPr id="24" name="TextBox 23"/>
+          <p:cNvPr id="26" name="TextBox 25"/>
           <p:cNvSpPr txBox="1"/>
           <p:nvPr/>
         </p:nvSpPr>
@@ -18622,7 +18740,7 @@
       </p:sp>
       <p:sp>
         <p:nvSpPr>
-          <p:cNvPr id="25" name="TextBox 24"/>
+          <p:cNvPr id="27" name="TextBox 26"/>
           <p:cNvSpPr txBox="1"/>
           <p:nvPr/>
         </p:nvSpPr>
@@ -18657,7 +18775,7 @@
       </p:sp>
       <p:sp>
         <p:nvSpPr>
-          <p:cNvPr id="26" name="TextBox 25"/>
+          <p:cNvPr id="28" name="TextBox 27"/>
           <p:cNvSpPr txBox="1"/>
           <p:nvPr/>
         </p:nvSpPr>
@@ -18692,7 +18810,7 @@
       </p:sp>
       <p:sp>
         <p:nvSpPr>
-          <p:cNvPr id="27" name="TextBox 26"/>
+          <p:cNvPr id="29" name="TextBox 28"/>
           <p:cNvSpPr txBox="1"/>
           <p:nvPr/>
         </p:nvSpPr>
@@ -18851,7 +18969,7 @@
                 </a:solidFill>
                 <a:latin typeface="Arial"/>
               </a:rPr>
-              <a:t>Updated Chrysler Board</a:t>
+              <a:t>How Chrysler thinks — logic and feeling, held together.</a:t>
             </a:r>
           </a:p>
         </p:txBody>
@@ -19342,7 +19460,7 @@
                 </a:solidFill>
                 <a:latin typeface="Arial"/>
               </a:rPr>
-              <a:t>LEFT BRAIN  ·  RATIONAL</a:t>
+              <a:t>LEFT BRAIN  ·  ENGINEERED FOR LIFE</a:t>
             </a:r>
           </a:p>
         </p:txBody>
@@ -19868,7 +19986,7 @@
                 </a:solidFill>
                 <a:latin typeface="Arial"/>
               </a:rPr>
-              <a:t>RIGHT BRAIN  ·  EMOTIONAL</a:t>
+              <a:t>RIGHT BRAIN  ·  DESIGNED FOR PEOPLE</a:t>
             </a:r>
           </a:p>
         </p:txBody>
@@ -20838,7 +20956,7 @@
                 </a:solidFill>
                 <a:latin typeface="Arial"/>
               </a:rPr>
-              <a:t>Design Principles</a:t>
+              <a:t>The Four Pillars</a:t>
             </a:r>
           </a:p>
           <a:p>
@@ -20854,7 +20972,7 @@
                 </a:solidFill>
                 <a:latin typeface="Arial"/>
               </a:rPr>
-              <a:t>Thoughtful · Logical · Precise · Purposeful</a:t>
+              <a:t>People First · Everyday Ingenuity · Human-Centered Intelligence · Modern American Design</a:t>
             </a:r>
           </a:p>
         </p:txBody>
@@ -21352,7 +21470,42 @@
       </p:sp>
       <p:sp>
         <p:nvSpPr>
-          <p:cNvPr id="4" name="Rectangle 3"/>
+          <p:cNvPr id="4" name="TextBox 3"/>
+          <p:cNvSpPr txBox="1"/>
+          <p:nvPr/>
+        </p:nvSpPr>
+        <p:spPr>
+          <a:xfrm>
+            <a:off x="685800" y="1572768"/>
+            <a:ext cx="10515600" cy="365760"/>
+          </a:xfrm>
+          <a:prstGeom prst="rect">
+            <a:avLst/>
+          </a:prstGeom>
+          <a:noFill/>
+        </p:spPr>
+        <p:txBody>
+          <a:bodyPr wrap="square" anchor="t" lIns="0" rIns="0" tIns="0" bIns="0">
+            <a:spAutoFit/>
+          </a:bodyPr>
+          <a:lstStyle/>
+          <a:p>
+            <a:pPr algn="l"/>
+            <a:r>
+              <a:rPr sz="1400" b="0" i="0">
+                <a:solidFill>
+                  <a:srgbClr val="4A4E57"/>
+                </a:solidFill>
+                <a:latin typeface="Arial"/>
+              </a:rPr>
+              <a:t>One philosophy, serving different lives — and unmistakably Chrysler in every one.</a:t>
+            </a:r>
+          </a:p>
+        </p:txBody>
+      </p:sp>
+      <p:sp>
+        <p:nvSpPr>
+          <p:cNvPr id="5" name="Rectangle 4"/>
           <p:cNvSpPr/>
           <p:nvPr/>
         </p:nvSpPr>
@@ -21396,7 +21549,7 @@
       </p:sp>
       <p:cxnSp>
         <p:nvCxnSpPr>
-          <p:cNvPr id="5" name="Connector 4"/>
+          <p:cNvPr id="6" name="Connector 5"/>
           <p:cNvCxnSpPr/>
           <p:nvPr/>
         </p:nvCxnSpPr>
@@ -21404,41 +21557,6 @@
           <a:xfrm>
             <a:off x="685800" y="2103120"/>
             <a:ext cx="237744" cy="0"/>
-          </a:xfrm>
-          <a:prstGeom prst="bentConnector3">
-            <a:avLst/>
-          </a:prstGeom>
-          <a:ln w="15875">
-            <a:solidFill>
-              <a:srgbClr val="A9AEB5"/>
-            </a:solidFill>
-          </a:ln>
-        </p:spPr>
-        <p:style>
-          <a:lnRef idx="2">
-            <a:schemeClr val="accent1"/>
-          </a:lnRef>
-          <a:fillRef idx="0">
-            <a:schemeClr val="accent1"/>
-          </a:fillRef>
-          <a:effectRef idx="1">
-            <a:schemeClr val="accent1"/>
-          </a:effectRef>
-          <a:fontRef idx="minor">
-            <a:schemeClr val="tx1"/>
-          </a:fontRef>
-        </p:style>
-      </p:cxnSp>
-      <p:cxnSp>
-        <p:nvCxnSpPr>
-          <p:cNvPr id="6" name="Connector 5"/>
-          <p:cNvCxnSpPr/>
-          <p:nvPr/>
-        </p:nvCxnSpPr>
-        <p:spPr>
-          <a:xfrm>
-            <a:off x="685800" y="2103120"/>
-            <a:ext cx="0" cy="237744"/>
           </a:xfrm>
           <a:prstGeom prst="bentConnector3">
             <a:avLst/>
@@ -21471,9 +21589,9 @@
           <p:nvPr/>
         </p:nvCxnSpPr>
         <p:spPr>
-          <a:xfrm flipH="1">
-            <a:off x="2392070" y="2103120"/>
-            <a:ext cx="237744" cy="0"/>
+          <a:xfrm>
+            <a:off x="685800" y="2103120"/>
+            <a:ext cx="0" cy="237744"/>
           </a:xfrm>
           <a:prstGeom prst="bentConnector3">
             <a:avLst/>
@@ -21506,9 +21624,9 @@
           <p:nvPr/>
         </p:nvCxnSpPr>
         <p:spPr>
-          <a:xfrm>
-            <a:off x="2629814" y="2103120"/>
-            <a:ext cx="0" cy="237744"/>
+          <a:xfrm flipH="1">
+            <a:off x="2392070" y="2103120"/>
+            <a:ext cx="237744" cy="0"/>
           </a:xfrm>
           <a:prstGeom prst="bentConnector3">
             <a:avLst/>
@@ -21542,8 +21660,8 @@
         </p:nvCxnSpPr>
         <p:spPr>
           <a:xfrm>
-            <a:off x="685800" y="5120640"/>
-            <a:ext cx="237744" cy="0"/>
+            <a:off x="2629814" y="2103120"/>
+            <a:ext cx="0" cy="237744"/>
           </a:xfrm>
           <a:prstGeom prst="bentConnector3">
             <a:avLst/>
@@ -21576,9 +21694,9 @@
           <p:nvPr/>
         </p:nvCxnSpPr>
         <p:spPr>
-          <a:xfrm flipV="1">
-            <a:off x="685800" y="4882896"/>
-            <a:ext cx="0" cy="237744"/>
+          <a:xfrm>
+            <a:off x="685800" y="5120640"/>
+            <a:ext cx="237744" cy="0"/>
           </a:xfrm>
           <a:prstGeom prst="bentConnector3">
             <a:avLst/>
@@ -21611,9 +21729,9 @@
           <p:nvPr/>
         </p:nvCxnSpPr>
         <p:spPr>
-          <a:xfrm flipH="1">
-            <a:off x="2392070" y="5120640"/>
-            <a:ext cx="237744" cy="0"/>
+          <a:xfrm flipV="1">
+            <a:off x="685800" y="4882896"/>
+            <a:ext cx="0" cy="237744"/>
           </a:xfrm>
           <a:prstGeom prst="bentConnector3">
             <a:avLst/>
@@ -21646,9 +21764,9 @@
           <p:nvPr/>
         </p:nvCxnSpPr>
         <p:spPr>
-          <a:xfrm flipV="1">
-            <a:off x="2629814" y="4882896"/>
-            <a:ext cx="0" cy="237744"/>
+          <a:xfrm flipH="1">
+            <a:off x="2392070" y="5120640"/>
+            <a:ext cx="237744" cy="0"/>
           </a:xfrm>
           <a:prstGeom prst="bentConnector3">
             <a:avLst/>
@@ -21674,9 +21792,44 @@
           </a:fontRef>
         </p:style>
       </p:cxnSp>
-      <p:sp>
-        <p:nvSpPr>
-          <p:cNvPr id="13" name="Rounded Rectangle 12"/>
+      <p:cxnSp>
+        <p:nvCxnSpPr>
+          <p:cNvPr id="13" name="Connector 12"/>
+          <p:cNvCxnSpPr/>
+          <p:nvPr/>
+        </p:nvCxnSpPr>
+        <p:spPr>
+          <a:xfrm flipV="1">
+            <a:off x="2629814" y="4882896"/>
+            <a:ext cx="0" cy="237744"/>
+          </a:xfrm>
+          <a:prstGeom prst="bentConnector3">
+            <a:avLst/>
+          </a:prstGeom>
+          <a:ln w="15875">
+            <a:solidFill>
+              <a:srgbClr val="A9AEB5"/>
+            </a:solidFill>
+          </a:ln>
+        </p:spPr>
+        <p:style>
+          <a:lnRef idx="2">
+            <a:schemeClr val="accent1"/>
+          </a:lnRef>
+          <a:fillRef idx="0">
+            <a:schemeClr val="accent1"/>
+          </a:fillRef>
+          <a:effectRef idx="1">
+            <a:schemeClr val="accent1"/>
+          </a:effectRef>
+          <a:fontRef idx="minor">
+            <a:schemeClr val="tx1"/>
+          </a:fontRef>
+        </p:style>
+      </p:cxnSp>
+      <p:sp>
+        <p:nvSpPr>
+          <p:cNvPr id="14" name="Rounded Rectangle 13"/>
           <p:cNvSpPr/>
           <p:nvPr/>
         </p:nvSpPr>
@@ -21720,7 +21873,7 @@
       </p:sp>
       <p:sp>
         <p:nvSpPr>
-          <p:cNvPr id="14" name="Oval 13"/>
+          <p:cNvPr id="15" name="Oval 14"/>
           <p:cNvSpPr/>
           <p:nvPr/>
         </p:nvSpPr>
@@ -21764,7 +21917,7 @@
       </p:sp>
       <p:sp>
         <p:nvSpPr>
-          <p:cNvPr id="15" name="Isosceles Triangle 14"/>
+          <p:cNvPr id="16" name="Isosceles Triangle 15"/>
           <p:cNvSpPr/>
           <p:nvPr/>
         </p:nvSpPr>
@@ -21808,7 +21961,7 @@
       </p:sp>
       <p:sp>
         <p:nvSpPr>
-          <p:cNvPr id="16" name="TextBox 15"/>
+          <p:cNvPr id="17" name="TextBox 16"/>
           <p:cNvSpPr txBox="1"/>
           <p:nvPr/>
         </p:nvSpPr>
@@ -21843,7 +21996,7 @@
       </p:sp>
       <p:sp>
         <p:nvSpPr>
-          <p:cNvPr id="17" name="TextBox 16"/>
+          <p:cNvPr id="18" name="TextBox 17"/>
           <p:cNvSpPr txBox="1"/>
           <p:nvPr/>
         </p:nvSpPr>
@@ -21878,7 +22031,7 @@
       </p:sp>
       <p:sp>
         <p:nvSpPr>
-          <p:cNvPr id="18" name="TextBox 17"/>
+          <p:cNvPr id="19" name="TextBox 18"/>
           <p:cNvSpPr txBox="1"/>
           <p:nvPr/>
         </p:nvSpPr>
@@ -21913,7 +22066,7 @@
       </p:sp>
       <p:sp>
         <p:nvSpPr>
-          <p:cNvPr id="19" name="Rectangle 18"/>
+          <p:cNvPr id="20" name="Rectangle 19"/>
           <p:cNvSpPr/>
           <p:nvPr/>
         </p:nvSpPr>
@@ -21957,7 +22110,7 @@
       </p:sp>
       <p:cxnSp>
         <p:nvCxnSpPr>
-          <p:cNvPr id="20" name="Connector 19"/>
+          <p:cNvPr id="21" name="Connector 20"/>
           <p:cNvCxnSpPr/>
           <p:nvPr/>
         </p:nvCxnSpPr>
@@ -21965,41 +22118,6 @@
           <a:xfrm>
             <a:off x="2904134" y="2103120"/>
             <a:ext cx="237744" cy="0"/>
-          </a:xfrm>
-          <a:prstGeom prst="bentConnector3">
-            <a:avLst/>
-          </a:prstGeom>
-          <a:ln w="15875">
-            <a:solidFill>
-              <a:srgbClr val="A9AEB5"/>
-            </a:solidFill>
-          </a:ln>
-        </p:spPr>
-        <p:style>
-          <a:lnRef idx="2">
-            <a:schemeClr val="accent1"/>
-          </a:lnRef>
-          <a:fillRef idx="0">
-            <a:schemeClr val="accent1"/>
-          </a:fillRef>
-          <a:effectRef idx="1">
-            <a:schemeClr val="accent1"/>
-          </a:effectRef>
-          <a:fontRef idx="minor">
-            <a:schemeClr val="tx1"/>
-          </a:fontRef>
-        </p:style>
-      </p:cxnSp>
-      <p:cxnSp>
-        <p:nvCxnSpPr>
-          <p:cNvPr id="21" name="Connector 20"/>
-          <p:cNvCxnSpPr/>
-          <p:nvPr/>
-        </p:nvCxnSpPr>
-        <p:spPr>
-          <a:xfrm>
-            <a:off x="2904134" y="2103120"/>
-            <a:ext cx="0" cy="237744"/>
           </a:xfrm>
           <a:prstGeom prst="bentConnector3">
             <a:avLst/>
@@ -22032,9 +22150,9 @@
           <p:nvPr/>
         </p:nvCxnSpPr>
         <p:spPr>
-          <a:xfrm flipH="1">
-            <a:off x="4610404" y="2103120"/>
-            <a:ext cx="237744" cy="0"/>
+          <a:xfrm>
+            <a:off x="2904134" y="2103120"/>
+            <a:ext cx="0" cy="237744"/>
           </a:xfrm>
           <a:prstGeom prst="bentConnector3">
             <a:avLst/>
@@ -22067,9 +22185,9 @@
           <p:nvPr/>
         </p:nvCxnSpPr>
         <p:spPr>
-          <a:xfrm>
-            <a:off x="4848148" y="2103120"/>
-            <a:ext cx="0" cy="237744"/>
+          <a:xfrm flipH="1">
+            <a:off x="4610404" y="2103120"/>
+            <a:ext cx="237744" cy="0"/>
           </a:xfrm>
           <a:prstGeom prst="bentConnector3">
             <a:avLst/>
@@ -22103,8 +22221,8 @@
         </p:nvCxnSpPr>
         <p:spPr>
           <a:xfrm>
-            <a:off x="2904134" y="5120640"/>
-            <a:ext cx="237744" cy="0"/>
+            <a:off x="4848148" y="2103120"/>
+            <a:ext cx="0" cy="237744"/>
           </a:xfrm>
           <a:prstGeom prst="bentConnector3">
             <a:avLst/>
@@ -22137,9 +22255,9 @@
           <p:nvPr/>
         </p:nvCxnSpPr>
         <p:spPr>
-          <a:xfrm flipV="1">
-            <a:off x="2904134" y="4882896"/>
-            <a:ext cx="0" cy="237744"/>
+          <a:xfrm>
+            <a:off x="2904134" y="5120640"/>
+            <a:ext cx="237744" cy="0"/>
           </a:xfrm>
           <a:prstGeom prst="bentConnector3">
             <a:avLst/>
@@ -22172,9 +22290,9 @@
           <p:nvPr/>
         </p:nvCxnSpPr>
         <p:spPr>
-          <a:xfrm flipH="1">
-            <a:off x="4610404" y="5120640"/>
-            <a:ext cx="237744" cy="0"/>
+          <a:xfrm flipV="1">
+            <a:off x="2904134" y="4882896"/>
+            <a:ext cx="0" cy="237744"/>
           </a:xfrm>
           <a:prstGeom prst="bentConnector3">
             <a:avLst/>
@@ -22207,9 +22325,9 @@
           <p:nvPr/>
         </p:nvCxnSpPr>
         <p:spPr>
-          <a:xfrm flipV="1">
-            <a:off x="4848148" y="4882896"/>
-            <a:ext cx="0" cy="237744"/>
+          <a:xfrm flipH="1">
+            <a:off x="4610404" y="5120640"/>
+            <a:ext cx="237744" cy="0"/>
           </a:xfrm>
           <a:prstGeom prst="bentConnector3">
             <a:avLst/>
@@ -22235,9 +22353,44 @@
           </a:fontRef>
         </p:style>
       </p:cxnSp>
-      <p:sp>
-        <p:nvSpPr>
-          <p:cNvPr id="28" name="Rounded Rectangle 27"/>
+      <p:cxnSp>
+        <p:nvCxnSpPr>
+          <p:cNvPr id="28" name="Connector 27"/>
+          <p:cNvCxnSpPr/>
+          <p:nvPr/>
+        </p:nvCxnSpPr>
+        <p:spPr>
+          <a:xfrm flipV="1">
+            <a:off x="4848148" y="4882896"/>
+            <a:ext cx="0" cy="237744"/>
+          </a:xfrm>
+          <a:prstGeom prst="bentConnector3">
+            <a:avLst/>
+          </a:prstGeom>
+          <a:ln w="15875">
+            <a:solidFill>
+              <a:srgbClr val="A9AEB5"/>
+            </a:solidFill>
+          </a:ln>
+        </p:spPr>
+        <p:style>
+          <a:lnRef idx="2">
+            <a:schemeClr val="accent1"/>
+          </a:lnRef>
+          <a:fillRef idx="0">
+            <a:schemeClr val="accent1"/>
+          </a:fillRef>
+          <a:effectRef idx="1">
+            <a:schemeClr val="accent1"/>
+          </a:effectRef>
+          <a:fontRef idx="minor">
+            <a:schemeClr val="tx1"/>
+          </a:fontRef>
+        </p:style>
+      </p:cxnSp>
+      <p:sp>
+        <p:nvSpPr>
+          <p:cNvPr id="29" name="Rounded Rectangle 28"/>
           <p:cNvSpPr/>
           <p:nvPr/>
         </p:nvSpPr>
@@ -22281,7 +22434,7 @@
       </p:sp>
       <p:sp>
         <p:nvSpPr>
-          <p:cNvPr id="29" name="Oval 28"/>
+          <p:cNvPr id="30" name="Oval 29"/>
           <p:cNvSpPr/>
           <p:nvPr/>
         </p:nvSpPr>
@@ -22325,7 +22478,7 @@
       </p:sp>
       <p:sp>
         <p:nvSpPr>
-          <p:cNvPr id="30" name="Isosceles Triangle 29"/>
+          <p:cNvPr id="31" name="Isosceles Triangle 30"/>
           <p:cNvSpPr/>
           <p:nvPr/>
         </p:nvSpPr>
@@ -22369,7 +22522,7 @@
       </p:sp>
       <p:sp>
         <p:nvSpPr>
-          <p:cNvPr id="31" name="TextBox 30"/>
+          <p:cNvPr id="32" name="TextBox 31"/>
           <p:cNvSpPr txBox="1"/>
           <p:nvPr/>
         </p:nvSpPr>
@@ -22404,7 +22557,7 @@
       </p:sp>
       <p:sp>
         <p:nvSpPr>
-          <p:cNvPr id="32" name="TextBox 31"/>
+          <p:cNvPr id="33" name="TextBox 32"/>
           <p:cNvSpPr txBox="1"/>
           <p:nvPr/>
         </p:nvSpPr>
@@ -22439,7 +22592,7 @@
       </p:sp>
       <p:sp>
         <p:nvSpPr>
-          <p:cNvPr id="33" name="TextBox 32"/>
+          <p:cNvPr id="34" name="TextBox 33"/>
           <p:cNvSpPr txBox="1"/>
           <p:nvPr/>
         </p:nvSpPr>
@@ -22474,7 +22627,7 @@
       </p:sp>
       <p:sp>
         <p:nvSpPr>
-          <p:cNvPr id="34" name="Rectangle 33"/>
+          <p:cNvPr id="35" name="Rectangle 34"/>
           <p:cNvSpPr/>
           <p:nvPr/>
         </p:nvSpPr>
@@ -22518,7 +22671,7 @@
       </p:sp>
       <p:cxnSp>
         <p:nvCxnSpPr>
-          <p:cNvPr id="35" name="Connector 34"/>
+          <p:cNvPr id="36" name="Connector 35"/>
           <p:cNvCxnSpPr/>
           <p:nvPr/>
         </p:nvCxnSpPr>
@@ -22526,41 +22679,6 @@
           <a:xfrm>
             <a:off x="5122468" y="2103120"/>
             <a:ext cx="237744" cy="0"/>
-          </a:xfrm>
-          <a:prstGeom prst="bentConnector3">
-            <a:avLst/>
-          </a:prstGeom>
-          <a:ln w="15875">
-            <a:solidFill>
-              <a:srgbClr val="A9AEB5"/>
-            </a:solidFill>
-          </a:ln>
-        </p:spPr>
-        <p:style>
-          <a:lnRef idx="2">
-            <a:schemeClr val="accent1"/>
-          </a:lnRef>
-          <a:fillRef idx="0">
-            <a:schemeClr val="accent1"/>
-          </a:fillRef>
-          <a:effectRef idx="1">
-            <a:schemeClr val="accent1"/>
-          </a:effectRef>
-          <a:fontRef idx="minor">
-            <a:schemeClr val="tx1"/>
-          </a:fontRef>
-        </p:style>
-      </p:cxnSp>
-      <p:cxnSp>
-        <p:nvCxnSpPr>
-          <p:cNvPr id="36" name="Connector 35"/>
-          <p:cNvCxnSpPr/>
-          <p:nvPr/>
-        </p:nvCxnSpPr>
-        <p:spPr>
-          <a:xfrm>
-            <a:off x="5122468" y="2103120"/>
-            <a:ext cx="0" cy="237744"/>
           </a:xfrm>
           <a:prstGeom prst="bentConnector3">
             <a:avLst/>
@@ -22593,9 +22711,9 @@
           <p:nvPr/>
         </p:nvCxnSpPr>
         <p:spPr>
-          <a:xfrm flipH="1">
-            <a:off x="6828738" y="2103120"/>
-            <a:ext cx="237744" cy="0"/>
+          <a:xfrm>
+            <a:off x="5122468" y="2103120"/>
+            <a:ext cx="0" cy="237744"/>
           </a:xfrm>
           <a:prstGeom prst="bentConnector3">
             <a:avLst/>
@@ -22628,9 +22746,9 @@
           <p:nvPr/>
         </p:nvCxnSpPr>
         <p:spPr>
-          <a:xfrm>
-            <a:off x="7066482" y="2103120"/>
-            <a:ext cx="0" cy="237744"/>
+          <a:xfrm flipH="1">
+            <a:off x="6828738" y="2103120"/>
+            <a:ext cx="237744" cy="0"/>
           </a:xfrm>
           <a:prstGeom prst="bentConnector3">
             <a:avLst/>
@@ -22664,8 +22782,8 @@
         </p:nvCxnSpPr>
         <p:spPr>
           <a:xfrm>
-            <a:off x="5122468" y="5120640"/>
-            <a:ext cx="237744" cy="0"/>
+            <a:off x="7066482" y="2103120"/>
+            <a:ext cx="0" cy="237744"/>
           </a:xfrm>
           <a:prstGeom prst="bentConnector3">
             <a:avLst/>
@@ -22698,9 +22816,9 @@
           <p:nvPr/>
         </p:nvCxnSpPr>
         <p:spPr>
-          <a:xfrm flipV="1">
-            <a:off x="5122468" y="4882896"/>
-            <a:ext cx="0" cy="237744"/>
+          <a:xfrm>
+            <a:off x="5122468" y="5120640"/>
+            <a:ext cx="237744" cy="0"/>
           </a:xfrm>
           <a:prstGeom prst="bentConnector3">
             <a:avLst/>
@@ -22733,9 +22851,9 @@
           <p:nvPr/>
         </p:nvCxnSpPr>
         <p:spPr>
-          <a:xfrm flipH="1">
-            <a:off x="6828738" y="5120640"/>
-            <a:ext cx="237744" cy="0"/>
+          <a:xfrm flipV="1">
+            <a:off x="5122468" y="4882896"/>
+            <a:ext cx="0" cy="237744"/>
           </a:xfrm>
           <a:prstGeom prst="bentConnector3">
             <a:avLst/>
@@ -22768,9 +22886,9 @@
           <p:nvPr/>
         </p:nvCxnSpPr>
         <p:spPr>
-          <a:xfrm flipV="1">
-            <a:off x="7066482" y="4882896"/>
-            <a:ext cx="0" cy="237744"/>
+          <a:xfrm flipH="1">
+            <a:off x="6828738" y="5120640"/>
+            <a:ext cx="237744" cy="0"/>
           </a:xfrm>
           <a:prstGeom prst="bentConnector3">
             <a:avLst/>
@@ -22796,9 +22914,44 @@
           </a:fontRef>
         </p:style>
       </p:cxnSp>
-      <p:sp>
-        <p:nvSpPr>
-          <p:cNvPr id="43" name="Rounded Rectangle 42"/>
+      <p:cxnSp>
+        <p:nvCxnSpPr>
+          <p:cNvPr id="43" name="Connector 42"/>
+          <p:cNvCxnSpPr/>
+          <p:nvPr/>
+        </p:nvCxnSpPr>
+        <p:spPr>
+          <a:xfrm flipV="1">
+            <a:off x="7066482" y="4882896"/>
+            <a:ext cx="0" cy="237744"/>
+          </a:xfrm>
+          <a:prstGeom prst="bentConnector3">
+            <a:avLst/>
+          </a:prstGeom>
+          <a:ln w="15875">
+            <a:solidFill>
+              <a:srgbClr val="A9AEB5"/>
+            </a:solidFill>
+          </a:ln>
+        </p:spPr>
+        <p:style>
+          <a:lnRef idx="2">
+            <a:schemeClr val="accent1"/>
+          </a:lnRef>
+          <a:fillRef idx="0">
+            <a:schemeClr val="accent1"/>
+          </a:fillRef>
+          <a:effectRef idx="1">
+            <a:schemeClr val="accent1"/>
+          </a:effectRef>
+          <a:fontRef idx="minor">
+            <a:schemeClr val="tx1"/>
+          </a:fontRef>
+        </p:style>
+      </p:cxnSp>
+      <p:sp>
+        <p:nvSpPr>
+          <p:cNvPr id="44" name="Rounded Rectangle 43"/>
           <p:cNvSpPr/>
           <p:nvPr/>
         </p:nvSpPr>
@@ -22842,7 +22995,7 @@
       </p:sp>
       <p:sp>
         <p:nvSpPr>
-          <p:cNvPr id="44" name="Oval 43"/>
+          <p:cNvPr id="45" name="Oval 44"/>
           <p:cNvSpPr/>
           <p:nvPr/>
         </p:nvSpPr>
@@ -22886,7 +23039,7 @@
       </p:sp>
       <p:sp>
         <p:nvSpPr>
-          <p:cNvPr id="45" name="Isosceles Triangle 44"/>
+          <p:cNvPr id="46" name="Isosceles Triangle 45"/>
           <p:cNvSpPr/>
           <p:nvPr/>
         </p:nvSpPr>
@@ -22930,7 +23083,7 @@
       </p:sp>
       <p:sp>
         <p:nvSpPr>
-          <p:cNvPr id="46" name="TextBox 45"/>
+          <p:cNvPr id="47" name="TextBox 46"/>
           <p:cNvSpPr txBox="1"/>
           <p:nvPr/>
         </p:nvSpPr>
@@ -22965,7 +23118,7 @@
       </p:sp>
       <p:sp>
         <p:nvSpPr>
-          <p:cNvPr id="47" name="TextBox 46"/>
+          <p:cNvPr id="48" name="TextBox 47"/>
           <p:cNvSpPr txBox="1"/>
           <p:nvPr/>
         </p:nvSpPr>
@@ -23000,7 +23153,7 @@
       </p:sp>
       <p:sp>
         <p:nvSpPr>
-          <p:cNvPr id="48" name="TextBox 47"/>
+          <p:cNvPr id="49" name="TextBox 48"/>
           <p:cNvSpPr txBox="1"/>
           <p:nvPr/>
         </p:nvSpPr>
@@ -23035,7 +23188,7 @@
       </p:sp>
       <p:sp>
         <p:nvSpPr>
-          <p:cNvPr id="49" name="Rectangle 48"/>
+          <p:cNvPr id="50" name="Rectangle 49"/>
           <p:cNvSpPr/>
           <p:nvPr/>
         </p:nvSpPr>
@@ -23079,7 +23232,7 @@
       </p:sp>
       <p:cxnSp>
         <p:nvCxnSpPr>
-          <p:cNvPr id="50" name="Connector 49"/>
+          <p:cNvPr id="51" name="Connector 50"/>
           <p:cNvCxnSpPr/>
           <p:nvPr/>
         </p:nvCxnSpPr>
@@ -23087,41 +23240,6 @@
           <a:xfrm>
             <a:off x="7340802" y="2103120"/>
             <a:ext cx="237744" cy="0"/>
-          </a:xfrm>
-          <a:prstGeom prst="bentConnector3">
-            <a:avLst/>
-          </a:prstGeom>
-          <a:ln w="15875">
-            <a:solidFill>
-              <a:srgbClr val="A9AEB5"/>
-            </a:solidFill>
-          </a:ln>
-        </p:spPr>
-        <p:style>
-          <a:lnRef idx="2">
-            <a:schemeClr val="accent1"/>
-          </a:lnRef>
-          <a:fillRef idx="0">
-            <a:schemeClr val="accent1"/>
-          </a:fillRef>
-          <a:effectRef idx="1">
-            <a:schemeClr val="accent1"/>
-          </a:effectRef>
-          <a:fontRef idx="minor">
-            <a:schemeClr val="tx1"/>
-          </a:fontRef>
-        </p:style>
-      </p:cxnSp>
-      <p:cxnSp>
-        <p:nvCxnSpPr>
-          <p:cNvPr id="51" name="Connector 50"/>
-          <p:cNvCxnSpPr/>
-          <p:nvPr/>
-        </p:nvCxnSpPr>
-        <p:spPr>
-          <a:xfrm>
-            <a:off x="7340802" y="2103120"/>
-            <a:ext cx="0" cy="237744"/>
           </a:xfrm>
           <a:prstGeom prst="bentConnector3">
             <a:avLst/>
@@ -23154,9 +23272,9 @@
           <p:nvPr/>
         </p:nvCxnSpPr>
         <p:spPr>
-          <a:xfrm flipH="1">
-            <a:off x="9047072" y="2103120"/>
-            <a:ext cx="237744" cy="0"/>
+          <a:xfrm>
+            <a:off x="7340802" y="2103120"/>
+            <a:ext cx="0" cy="237744"/>
           </a:xfrm>
           <a:prstGeom prst="bentConnector3">
             <a:avLst/>
@@ -23189,9 +23307,9 @@
           <p:nvPr/>
         </p:nvCxnSpPr>
         <p:spPr>
-          <a:xfrm>
-            <a:off x="9284816" y="2103120"/>
-            <a:ext cx="0" cy="237744"/>
+          <a:xfrm flipH="1">
+            <a:off x="9047072" y="2103120"/>
+            <a:ext cx="237744" cy="0"/>
           </a:xfrm>
           <a:prstGeom prst="bentConnector3">
             <a:avLst/>
@@ -23225,8 +23343,8 @@
         </p:nvCxnSpPr>
         <p:spPr>
           <a:xfrm>
-            <a:off x="7340802" y="5120640"/>
-            <a:ext cx="237744" cy="0"/>
+            <a:off x="9284816" y="2103120"/>
+            <a:ext cx="0" cy="237744"/>
           </a:xfrm>
           <a:prstGeom prst="bentConnector3">
             <a:avLst/>
@@ -23259,9 +23377,9 @@
           <p:nvPr/>
         </p:nvCxnSpPr>
         <p:spPr>
-          <a:xfrm flipV="1">
-            <a:off x="7340802" y="4882896"/>
-            <a:ext cx="0" cy="237744"/>
+          <a:xfrm>
+            <a:off x="7340802" y="5120640"/>
+            <a:ext cx="237744" cy="0"/>
           </a:xfrm>
           <a:prstGeom prst="bentConnector3">
             <a:avLst/>
@@ -23294,9 +23412,9 @@
           <p:nvPr/>
         </p:nvCxnSpPr>
         <p:spPr>
-          <a:xfrm flipH="1">
-            <a:off x="9047072" y="5120640"/>
-            <a:ext cx="237744" cy="0"/>
+          <a:xfrm flipV="1">
+            <a:off x="7340802" y="4882896"/>
+            <a:ext cx="0" cy="237744"/>
           </a:xfrm>
           <a:prstGeom prst="bentConnector3">
             <a:avLst/>
@@ -23329,9 +23447,9 @@
           <p:nvPr/>
         </p:nvCxnSpPr>
         <p:spPr>
-          <a:xfrm flipV="1">
-            <a:off x="9284816" y="4882896"/>
-            <a:ext cx="0" cy="237744"/>
+          <a:xfrm flipH="1">
+            <a:off x="9047072" y="5120640"/>
+            <a:ext cx="237744" cy="0"/>
           </a:xfrm>
           <a:prstGeom prst="bentConnector3">
             <a:avLst/>
@@ -23357,9 +23475,44 @@
           </a:fontRef>
         </p:style>
       </p:cxnSp>
-      <p:sp>
-        <p:nvSpPr>
-          <p:cNvPr id="58" name="Rounded Rectangle 57"/>
+      <p:cxnSp>
+        <p:nvCxnSpPr>
+          <p:cNvPr id="58" name="Connector 57"/>
+          <p:cNvCxnSpPr/>
+          <p:nvPr/>
+        </p:nvCxnSpPr>
+        <p:spPr>
+          <a:xfrm flipV="1">
+            <a:off x="9284816" y="4882896"/>
+            <a:ext cx="0" cy="237744"/>
+          </a:xfrm>
+          <a:prstGeom prst="bentConnector3">
+            <a:avLst/>
+          </a:prstGeom>
+          <a:ln w="15875">
+            <a:solidFill>
+              <a:srgbClr val="A9AEB5"/>
+            </a:solidFill>
+          </a:ln>
+        </p:spPr>
+        <p:style>
+          <a:lnRef idx="2">
+            <a:schemeClr val="accent1"/>
+          </a:lnRef>
+          <a:fillRef idx="0">
+            <a:schemeClr val="accent1"/>
+          </a:fillRef>
+          <a:effectRef idx="1">
+            <a:schemeClr val="accent1"/>
+          </a:effectRef>
+          <a:fontRef idx="minor">
+            <a:schemeClr val="tx1"/>
+          </a:fontRef>
+        </p:style>
+      </p:cxnSp>
+      <p:sp>
+        <p:nvSpPr>
+          <p:cNvPr id="59" name="Rounded Rectangle 58"/>
           <p:cNvSpPr/>
           <p:nvPr/>
         </p:nvSpPr>
@@ -23403,7 +23556,7 @@
       </p:sp>
       <p:sp>
         <p:nvSpPr>
-          <p:cNvPr id="59" name="Oval 58"/>
+          <p:cNvPr id="60" name="Oval 59"/>
           <p:cNvSpPr/>
           <p:nvPr/>
         </p:nvSpPr>
@@ -23447,7 +23600,7 @@
       </p:sp>
       <p:sp>
         <p:nvSpPr>
-          <p:cNvPr id="60" name="Isosceles Triangle 59"/>
+          <p:cNvPr id="61" name="Isosceles Triangle 60"/>
           <p:cNvSpPr/>
           <p:nvPr/>
         </p:nvSpPr>
@@ -23491,7 +23644,7 @@
       </p:sp>
       <p:sp>
         <p:nvSpPr>
-          <p:cNvPr id="61" name="TextBox 60"/>
+          <p:cNvPr id="62" name="TextBox 61"/>
           <p:cNvSpPr txBox="1"/>
           <p:nvPr/>
         </p:nvSpPr>
@@ -23526,7 +23679,7 @@
       </p:sp>
       <p:sp>
         <p:nvSpPr>
-          <p:cNvPr id="62" name="TextBox 61"/>
+          <p:cNvPr id="63" name="TextBox 62"/>
           <p:cNvSpPr txBox="1"/>
           <p:nvPr/>
         </p:nvSpPr>
@@ -23561,7 +23714,7 @@
       </p:sp>
       <p:sp>
         <p:nvSpPr>
-          <p:cNvPr id="63" name="TextBox 62"/>
+          <p:cNvPr id="64" name="TextBox 63"/>
           <p:cNvSpPr txBox="1"/>
           <p:nvPr/>
         </p:nvSpPr>
@@ -23596,7 +23749,7 @@
       </p:sp>
       <p:sp>
         <p:nvSpPr>
-          <p:cNvPr id="64" name="Rectangle 63"/>
+          <p:cNvPr id="65" name="Rectangle 64"/>
           <p:cNvSpPr/>
           <p:nvPr/>
         </p:nvSpPr>
@@ -23640,7 +23793,7 @@
       </p:sp>
       <p:cxnSp>
         <p:nvCxnSpPr>
-          <p:cNvPr id="65" name="Connector 64"/>
+          <p:cNvPr id="66" name="Connector 65"/>
           <p:cNvCxnSpPr/>
           <p:nvPr/>
         </p:nvCxnSpPr>
@@ -23648,41 +23801,6 @@
           <a:xfrm>
             <a:off x="9559136" y="2103120"/>
             <a:ext cx="237744" cy="0"/>
-          </a:xfrm>
-          <a:prstGeom prst="bentConnector3">
-            <a:avLst/>
-          </a:prstGeom>
-          <a:ln w="15875">
-            <a:solidFill>
-              <a:srgbClr val="A9AEB5"/>
-            </a:solidFill>
-          </a:ln>
-        </p:spPr>
-        <p:style>
-          <a:lnRef idx="2">
-            <a:schemeClr val="accent1"/>
-          </a:lnRef>
-          <a:fillRef idx="0">
-            <a:schemeClr val="accent1"/>
-          </a:fillRef>
-          <a:effectRef idx="1">
-            <a:schemeClr val="accent1"/>
-          </a:effectRef>
-          <a:fontRef idx="minor">
-            <a:schemeClr val="tx1"/>
-          </a:fontRef>
-        </p:style>
-      </p:cxnSp>
-      <p:cxnSp>
-        <p:nvCxnSpPr>
-          <p:cNvPr id="66" name="Connector 65"/>
-          <p:cNvCxnSpPr/>
-          <p:nvPr/>
-        </p:nvCxnSpPr>
-        <p:spPr>
-          <a:xfrm>
-            <a:off x="9559136" y="2103120"/>
-            <a:ext cx="0" cy="237744"/>
           </a:xfrm>
           <a:prstGeom prst="bentConnector3">
             <a:avLst/>
@@ -23715,9 +23833,9 @@
           <p:nvPr/>
         </p:nvCxnSpPr>
         <p:spPr>
-          <a:xfrm flipH="1">
-            <a:off x="11265406" y="2103120"/>
-            <a:ext cx="237744" cy="0"/>
+          <a:xfrm>
+            <a:off x="9559136" y="2103120"/>
+            <a:ext cx="0" cy="237744"/>
           </a:xfrm>
           <a:prstGeom prst="bentConnector3">
             <a:avLst/>
@@ -23750,9 +23868,9 @@
           <p:nvPr/>
         </p:nvCxnSpPr>
         <p:spPr>
-          <a:xfrm>
-            <a:off x="11503150" y="2103120"/>
-            <a:ext cx="0" cy="237744"/>
+          <a:xfrm flipH="1">
+            <a:off x="11265406" y="2103120"/>
+            <a:ext cx="237744" cy="0"/>
           </a:xfrm>
           <a:prstGeom prst="bentConnector3">
             <a:avLst/>
@@ -23786,8 +23904,8 @@
         </p:nvCxnSpPr>
         <p:spPr>
           <a:xfrm>
-            <a:off x="9559136" y="5120640"/>
-            <a:ext cx="237744" cy="0"/>
+            <a:off x="11503150" y="2103120"/>
+            <a:ext cx="0" cy="237744"/>
           </a:xfrm>
           <a:prstGeom prst="bentConnector3">
             <a:avLst/>
@@ -23820,9 +23938,9 @@
           <p:nvPr/>
         </p:nvCxnSpPr>
         <p:spPr>
-          <a:xfrm flipV="1">
-            <a:off x="9559136" y="4882896"/>
-            <a:ext cx="0" cy="237744"/>
+          <a:xfrm>
+            <a:off x="9559136" y="5120640"/>
+            <a:ext cx="237744" cy="0"/>
           </a:xfrm>
           <a:prstGeom prst="bentConnector3">
             <a:avLst/>
@@ -23855,9 +23973,9 @@
           <p:nvPr/>
         </p:nvCxnSpPr>
         <p:spPr>
-          <a:xfrm flipH="1">
-            <a:off x="11265406" y="5120640"/>
-            <a:ext cx="237744" cy="0"/>
+          <a:xfrm flipV="1">
+            <a:off x="9559136" y="4882896"/>
+            <a:ext cx="0" cy="237744"/>
           </a:xfrm>
           <a:prstGeom prst="bentConnector3">
             <a:avLst/>
@@ -23890,9 +24008,9 @@
           <p:nvPr/>
         </p:nvCxnSpPr>
         <p:spPr>
-          <a:xfrm flipV="1">
-            <a:off x="11503150" y="4882896"/>
-            <a:ext cx="0" cy="237744"/>
+          <a:xfrm flipH="1">
+            <a:off x="11265406" y="5120640"/>
+            <a:ext cx="237744" cy="0"/>
           </a:xfrm>
           <a:prstGeom prst="bentConnector3">
             <a:avLst/>
@@ -23918,9 +24036,44 @@
           </a:fontRef>
         </p:style>
       </p:cxnSp>
-      <p:sp>
-        <p:nvSpPr>
-          <p:cNvPr id="73" name="Rounded Rectangle 72"/>
+      <p:cxnSp>
+        <p:nvCxnSpPr>
+          <p:cNvPr id="73" name="Connector 72"/>
+          <p:cNvCxnSpPr/>
+          <p:nvPr/>
+        </p:nvCxnSpPr>
+        <p:spPr>
+          <a:xfrm flipV="1">
+            <a:off x="11503150" y="4882896"/>
+            <a:ext cx="0" cy="237744"/>
+          </a:xfrm>
+          <a:prstGeom prst="bentConnector3">
+            <a:avLst/>
+          </a:prstGeom>
+          <a:ln w="15875">
+            <a:solidFill>
+              <a:srgbClr val="A9AEB5"/>
+            </a:solidFill>
+          </a:ln>
+        </p:spPr>
+        <p:style>
+          <a:lnRef idx="2">
+            <a:schemeClr val="accent1"/>
+          </a:lnRef>
+          <a:fillRef idx="0">
+            <a:schemeClr val="accent1"/>
+          </a:fillRef>
+          <a:effectRef idx="1">
+            <a:schemeClr val="accent1"/>
+          </a:effectRef>
+          <a:fontRef idx="minor">
+            <a:schemeClr val="tx1"/>
+          </a:fontRef>
+        </p:style>
+      </p:cxnSp>
+      <p:sp>
+        <p:nvSpPr>
+          <p:cNvPr id="74" name="Rounded Rectangle 73"/>
           <p:cNvSpPr/>
           <p:nvPr/>
         </p:nvSpPr>
@@ -23964,7 +24117,7 @@
       </p:sp>
       <p:sp>
         <p:nvSpPr>
-          <p:cNvPr id="74" name="Oval 73"/>
+          <p:cNvPr id="75" name="Oval 74"/>
           <p:cNvSpPr/>
           <p:nvPr/>
         </p:nvSpPr>
@@ -24008,7 +24161,7 @@
       </p:sp>
       <p:sp>
         <p:nvSpPr>
-          <p:cNvPr id="75" name="Isosceles Triangle 74"/>
+          <p:cNvPr id="76" name="Isosceles Triangle 75"/>
           <p:cNvSpPr/>
           <p:nvPr/>
         </p:nvSpPr>
@@ -24052,7 +24205,7 @@
       </p:sp>
       <p:sp>
         <p:nvSpPr>
-          <p:cNvPr id="76" name="TextBox 75"/>
+          <p:cNvPr id="77" name="TextBox 76"/>
           <p:cNvSpPr txBox="1"/>
           <p:nvPr/>
         </p:nvSpPr>
@@ -24087,7 +24240,7 @@
       </p:sp>
       <p:sp>
         <p:nvSpPr>
-          <p:cNvPr id="77" name="TextBox 76"/>
+          <p:cNvPr id="78" name="TextBox 77"/>
           <p:cNvSpPr txBox="1"/>
           <p:nvPr/>
         </p:nvSpPr>
@@ -24122,7 +24275,7 @@
       </p:sp>
       <p:sp>
         <p:nvSpPr>
-          <p:cNvPr id="78" name="TextBox 77"/>
+          <p:cNvPr id="79" name="TextBox 78"/>
           <p:cNvSpPr txBox="1"/>
           <p:nvPr/>
         </p:nvSpPr>
@@ -24157,7 +24310,7 @@
       </p:sp>
       <p:sp>
         <p:nvSpPr>
-          <p:cNvPr id="79" name="TextBox 78"/>
+          <p:cNvPr id="80" name="TextBox 79"/>
           <p:cNvSpPr txBox="1"/>
           <p:nvPr/>
         </p:nvSpPr>
@@ -24192,7 +24345,7 @@
       </p:sp>
       <p:sp>
         <p:nvSpPr>
-          <p:cNvPr id="80" name="TextBox 79"/>
+          <p:cNvPr id="81" name="TextBox 80"/>
           <p:cNvSpPr txBox="1"/>
           <p:nvPr/>
         </p:nvSpPr>
@@ -24227,7 +24380,7 @@
       </p:sp>
       <p:sp>
         <p:nvSpPr>
-          <p:cNvPr id="81" name="TextBox 80"/>
+          <p:cNvPr id="82" name="TextBox 81"/>
           <p:cNvSpPr txBox="1"/>
           <p:nvPr/>
         </p:nvSpPr>
@@ -24316,7 +24469,7 @@
                 </a:solidFill>
                 <a:latin typeface="Arial"/>
               </a:rPr>
-              <a:t>THE MODERN FAMILY VEHICLE</a:t>
+              <a:t>PEOPLE FIRST</a:t>
             </a:r>
           </a:p>
         </p:txBody>
@@ -24390,7 +24543,7 @@
                 </a:solidFill>
                 <a:latin typeface="Arial"/>
               </a:rPr>
-              <a:t>The evolution of the modern family vehicle — flexible, sophisticated, and designed around people.</a:t>
+              <a:t>Pacifica is the proof that Chrysler has always designed around people.</a:t>
             </a:r>
           </a:p>
         </p:txBody>
@@ -25043,7 +25196,150 @@
                 </a:solidFill>
                 <a:latin typeface="Arial"/>
               </a:rPr>
-              <a:t>Flexible by Design</a:t>
+              <a:t>Family Mobility</a:t>
+            </a:r>
+          </a:p>
+          <a:p>
+            <a:pPr algn="l">
+              <a:lnSpc>
+                <a:spcPct val="110000"/>
+              </a:lnSpc>
+            </a:pPr>
+            <a:r>
+              <a:rPr sz="1000" b="0" i="0">
+                <a:solidFill>
+                  <a:srgbClr val="868B94"/>
+                </a:solidFill>
+                <a:latin typeface="Arial"/>
+              </a:rPr>
+              <a:t>Built around the people who live in it.</a:t>
+            </a:r>
+          </a:p>
+        </p:txBody>
+      </p:sp>
+      <p:sp>
+        <p:nvSpPr>
+          <p:cNvPr id="22" name="Oval 21"/>
+          <p:cNvSpPr/>
+          <p:nvPr/>
+        </p:nvSpPr>
+        <p:spPr>
+          <a:xfrm>
+            <a:off x="4413504" y="5532120"/>
+            <a:ext cx="384048" cy="384048"/>
+          </a:xfrm>
+          <a:prstGeom prst="ellipse">
+            <a:avLst/>
+          </a:prstGeom>
+          <a:noFill/>
+          <a:ln w="15875">
+            <a:solidFill>
+              <a:srgbClr val="1B2A4A"/>
+            </a:solidFill>
+          </a:ln>
+          <a:effectLst/>
+        </p:spPr>
+        <p:style>
+          <a:lnRef idx="1">
+            <a:schemeClr val="accent1"/>
+          </a:lnRef>
+          <a:fillRef idx="3">
+            <a:schemeClr val="accent1"/>
+          </a:fillRef>
+          <a:effectRef idx="2">
+            <a:schemeClr val="accent1"/>
+          </a:effectRef>
+          <a:fontRef idx="minor">
+            <a:schemeClr val="lt1"/>
+          </a:fontRef>
+        </p:style>
+        <p:txBody>
+          <a:bodyPr rtlCol="0" anchor="ctr"/>
+          <a:lstStyle/>
+          <a:p>
+            <a:pPr algn="ctr"/>
+          </a:p>
+        </p:txBody>
+      </p:sp>
+      <p:sp>
+        <p:nvSpPr>
+          <p:cNvPr id="23" name="Oval 22"/>
+          <p:cNvSpPr/>
+          <p:nvPr/>
+        </p:nvSpPr>
+        <p:spPr>
+          <a:xfrm>
+            <a:off x="4523232" y="5641848"/>
+            <a:ext cx="164592" cy="164592"/>
+          </a:xfrm>
+          <a:prstGeom prst="ellipse">
+            <a:avLst/>
+          </a:prstGeom>
+          <a:solidFill>
+            <a:srgbClr val="1B2A4A"/>
+          </a:solidFill>
+          <a:ln>
+            <a:noFill/>
+          </a:ln>
+          <a:effectLst/>
+        </p:spPr>
+        <p:style>
+          <a:lnRef idx="1">
+            <a:schemeClr val="accent1"/>
+          </a:lnRef>
+          <a:fillRef idx="3">
+            <a:schemeClr val="accent1"/>
+          </a:fillRef>
+          <a:effectRef idx="2">
+            <a:schemeClr val="accent1"/>
+          </a:effectRef>
+          <a:fontRef idx="minor">
+            <a:schemeClr val="lt1"/>
+          </a:fontRef>
+        </p:style>
+        <p:txBody>
+          <a:bodyPr rtlCol="0" anchor="ctr"/>
+          <a:lstStyle/>
+          <a:p>
+            <a:pPr algn="ctr"/>
+          </a:p>
+        </p:txBody>
+      </p:sp>
+      <p:sp>
+        <p:nvSpPr>
+          <p:cNvPr id="24" name="TextBox 23"/>
+          <p:cNvSpPr txBox="1"/>
+          <p:nvPr/>
+        </p:nvSpPr>
+        <p:spPr>
+          <a:xfrm>
+            <a:off x="4962144" y="5486400"/>
+            <a:ext cx="2813304" cy="777240"/>
+          </a:xfrm>
+          <a:prstGeom prst="rect">
+            <a:avLst/>
+          </a:prstGeom>
+          <a:noFill/>
+        </p:spPr>
+        <p:txBody>
+          <a:bodyPr wrap="square" anchor="t" lIns="0" rIns="0" tIns="0" bIns="0">
+            <a:spAutoFit/>
+          </a:bodyPr>
+          <a:lstStyle/>
+          <a:p>
+            <a:pPr algn="l">
+              <a:spcAft>
+                <a:spcPts val="100"/>
+              </a:spcAft>
+            </a:pPr>
+            <a:r>
+              <a:rPr sz="1250" b="1" i="0">
+                <a:solidFill>
+                  <a:srgbClr val="1A1A1C"/>
+                </a:solidFill>
+                <a:latin typeface="Arial"/>
+              </a:rPr>
+              <a:t>Flexible Living</a:t>
             </a:r>
           </a:p>
           <a:p>
@@ -25066,13 +25362,13 @@
       </p:sp>
       <p:sp>
         <p:nvSpPr>
-          <p:cNvPr id="22" name="Oval 21"/>
+          <p:cNvPr id="25" name="Oval 24"/>
           <p:cNvSpPr/>
           <p:nvPr/>
         </p:nvSpPr>
         <p:spPr>
           <a:xfrm>
-            <a:off x="4413504" y="5532120"/>
+            <a:off x="8141208" y="5532120"/>
             <a:ext cx="384048" cy="384048"/>
           </a:xfrm>
           <a:prstGeom prst="ellipse">
@@ -25110,13 +25406,13 @@
       </p:sp>
       <p:sp>
         <p:nvSpPr>
-          <p:cNvPr id="23" name="Oval 22"/>
+          <p:cNvPr id="26" name="Oval 25"/>
           <p:cNvSpPr/>
           <p:nvPr/>
         </p:nvSpPr>
         <p:spPr>
           <a:xfrm>
-            <a:off x="4523232" y="5641848"/>
+            <a:off x="8250936" y="5641848"/>
             <a:ext cx="164592" cy="164592"/>
           </a:xfrm>
           <a:prstGeom prst="ellipse">
@@ -25154,13 +25450,13 @@
       </p:sp>
       <p:sp>
         <p:nvSpPr>
-          <p:cNvPr id="24" name="TextBox 23"/>
+          <p:cNvPr id="27" name="TextBox 26"/>
           <p:cNvSpPr txBox="1"/>
           <p:nvPr/>
         </p:nvSpPr>
         <p:spPr>
           <a:xfrm>
-            <a:off x="4962144" y="5486400"/>
+            <a:off x="8689848" y="5486400"/>
             <a:ext cx="2813304" cy="777240"/>
           </a:xfrm>
           <a:prstGeom prst="rect">
@@ -25186,7 +25482,7 @@
                 </a:solidFill>
                 <a:latin typeface="Arial"/>
               </a:rPr>
-              <a:t>Sophisticated Comfort</a:t>
+              <a:t>Thoughtful Innovation</a:t>
             </a:r>
           </a:p>
           <a:p>
@@ -25202,150 +25498,7 @@
                 </a:solidFill>
                 <a:latin typeface="Arial"/>
               </a:rPr>
-              <a:t>Refined, calm, effortlessly livable.</a:t>
-            </a:r>
-          </a:p>
-        </p:txBody>
-      </p:sp>
-      <p:sp>
-        <p:nvSpPr>
-          <p:cNvPr id="25" name="Oval 24"/>
-          <p:cNvSpPr/>
-          <p:nvPr/>
-        </p:nvSpPr>
-        <p:spPr>
-          <a:xfrm>
-            <a:off x="8141208" y="5532120"/>
-            <a:ext cx="384048" cy="384048"/>
-          </a:xfrm>
-          <a:prstGeom prst="ellipse">
-            <a:avLst/>
-          </a:prstGeom>
-          <a:noFill/>
-          <a:ln w="15875">
-            <a:solidFill>
-              <a:srgbClr val="1B2A4A"/>
-            </a:solidFill>
-          </a:ln>
-          <a:effectLst/>
-        </p:spPr>
-        <p:style>
-          <a:lnRef idx="1">
-            <a:schemeClr val="accent1"/>
-          </a:lnRef>
-          <a:fillRef idx="3">
-            <a:schemeClr val="accent1"/>
-          </a:fillRef>
-          <a:effectRef idx="2">
-            <a:schemeClr val="accent1"/>
-          </a:effectRef>
-          <a:fontRef idx="minor">
-            <a:schemeClr val="lt1"/>
-          </a:fontRef>
-        </p:style>
-        <p:txBody>
-          <a:bodyPr rtlCol="0" anchor="ctr"/>
-          <a:lstStyle/>
-          <a:p>
-            <a:pPr algn="ctr"/>
-          </a:p>
-        </p:txBody>
-      </p:sp>
-      <p:sp>
-        <p:nvSpPr>
-          <p:cNvPr id="26" name="Oval 25"/>
-          <p:cNvSpPr/>
-          <p:nvPr/>
-        </p:nvSpPr>
-        <p:spPr>
-          <a:xfrm>
-            <a:off x="8250936" y="5641848"/>
-            <a:ext cx="164592" cy="164592"/>
-          </a:xfrm>
-          <a:prstGeom prst="ellipse">
-            <a:avLst/>
-          </a:prstGeom>
-          <a:solidFill>
-            <a:srgbClr val="1B2A4A"/>
-          </a:solidFill>
-          <a:ln>
-            <a:noFill/>
-          </a:ln>
-          <a:effectLst/>
-        </p:spPr>
-        <p:style>
-          <a:lnRef idx="1">
-            <a:schemeClr val="accent1"/>
-          </a:lnRef>
-          <a:fillRef idx="3">
-            <a:schemeClr val="accent1"/>
-          </a:fillRef>
-          <a:effectRef idx="2">
-            <a:schemeClr val="accent1"/>
-          </a:effectRef>
-          <a:fontRef idx="minor">
-            <a:schemeClr val="lt1"/>
-          </a:fontRef>
-        </p:style>
-        <p:txBody>
-          <a:bodyPr rtlCol="0" anchor="ctr"/>
-          <a:lstStyle/>
-          <a:p>
-            <a:pPr algn="ctr"/>
-          </a:p>
-        </p:txBody>
-      </p:sp>
-      <p:sp>
-        <p:nvSpPr>
-          <p:cNvPr id="27" name="TextBox 26"/>
-          <p:cNvSpPr txBox="1"/>
-          <p:nvPr/>
-        </p:nvSpPr>
-        <p:spPr>
-          <a:xfrm>
-            <a:off x="8689848" y="5486400"/>
-            <a:ext cx="2813304" cy="777240"/>
-          </a:xfrm>
-          <a:prstGeom prst="rect">
-            <a:avLst/>
-          </a:prstGeom>
-          <a:noFill/>
-        </p:spPr>
-        <p:txBody>
-          <a:bodyPr wrap="square" anchor="t" lIns="0" rIns="0" tIns="0" bIns="0">
-            <a:spAutoFit/>
-          </a:bodyPr>
-          <a:lstStyle/>
-          <a:p>
-            <a:pPr algn="l">
-              <a:spcAft>
-                <a:spcPts val="100"/>
-              </a:spcAft>
-            </a:pPr>
-            <a:r>
-              <a:rPr sz="1250" b="1" i="0">
-                <a:solidFill>
-                  <a:srgbClr val="1A1A1C"/>
-                </a:solidFill>
-                <a:latin typeface="Arial"/>
-              </a:rPr>
-              <a:t>Technology Around People</a:t>
-            </a:r>
-          </a:p>
-          <a:p>
-            <a:pPr algn="l">
-              <a:lnSpc>
-                <a:spcPct val="110000"/>
-              </a:lnSpc>
-            </a:pPr>
-            <a:r>
-              <a:rPr sz="1000" b="0" i="0">
-                <a:solidFill>
-                  <a:srgbClr val="868B94"/>
-                </a:solidFill>
-                <a:latin typeface="Arial"/>
-              </a:rPr>
-              <a:t>Intelligence that serves the family.</a:t>
+              <a:t>Technology designed around people.</a:t>
             </a:r>
           </a:p>
         </p:txBody>
@@ -25511,7 +25664,7 @@
                 </a:solidFill>
                 <a:latin typeface="Arial"/>
               </a:rPr>
-              <a:t>PACIFICA</a:t>
+              <a:t>PEOPLE FIRST</a:t>
             </a:r>
           </a:p>
         </p:txBody>
@@ -26107,7 +26260,7 @@
                 </a:solidFill>
                 <a:latin typeface="Arial"/>
               </a:rPr>
-              <a:t>A family sanctuary — flexible, comfortable, designed around people.</a:t>
+              <a:t>A family sanctuary — comfort, space, and calm, designed around people.</a:t>
             </a:r>
           </a:p>
         </p:txBody>
@@ -26273,7 +26426,7 @@
                 </a:solidFill>
                 <a:latin typeface="Arial"/>
               </a:rPr>
-              <a:t>THE EMOTIONAL HALO</a:t>
+              <a:t>MODERN AMERICAN DESIGN</a:t>
             </a:r>
           </a:p>
         </p:txBody>
@@ -26347,7 +26500,7 @@
                 </a:solidFill>
                 <a:latin typeface="Arial"/>
               </a:rPr>
-              <a:t>The flagship expression of Chrysler design — composed, commanding, never excessive.</a:t>
+              <a:t>The flagship expression of Chrysler design — presence through confidence and craftsmanship, never excess.</a:t>
             </a:r>
           </a:p>
         </p:txBody>
@@ -27016,7 +27169,7 @@
                 </a:solidFill>
                 <a:latin typeface="Arial"/>
               </a:rPr>
-              <a:t>Architectural proportion, balanced and tailored.</a:t>
+              <a:t>Architectural proportion, calm and assured.</a:t>
             </a:r>
           </a:p>
         </p:txBody>
@@ -27143,7 +27296,7 @@
                 </a:solidFill>
                 <a:latin typeface="Arial"/>
               </a:rPr>
-              <a:t>Quiet Power</a:t>
+              <a:t>Crafted Composure</a:t>
             </a:r>
           </a:p>
           <a:p>
@@ -27286,7 +27439,7 @@
                 </a:solidFill>
                 <a:latin typeface="Arial"/>
               </a:rPr>
-              <a:t>Timeless Craftsmanship</a:t>
+              <a:t>Authentically American</a:t>
             </a:r>
           </a:p>
           <a:p>
@@ -27302,7 +27455,7 @@
                 </a:solidFill>
                 <a:latin typeface="Arial"/>
               </a:rPr>
-              <a:t>Authentic American design, refined.</a:t>
+              <a:t>Timeless design, unmistakably Chrysler.</a:t>
             </a:r>
           </a:p>
         </p:txBody>

--- a/Chrysler_Brand_Design_Vision.pptx
+++ b/Chrysler_Brand_Design_Vision.pptx
@@ -1081,7 +1081,7 @@
           <a:lstStyle/>
           <a:p>
             <a:r>
-              <a:t>SPEAKER NOTES (placeholder) — Why this philosophy creates a unique position: within Stellantis, only Chrysler owns human-centered, friction-free design. Differentiation, not overlap. Replace BRAND A–D with the relevant siblings. Transition: 'Together, these vehicles are more than a portfolio — they define Chrysler's future.'</a:t>
+              <a:t>SPEAKER NOTES (placeholder) — Why this philosophy creates a unique position. On the perception map, Dodge, Jeep, and Ram all sit on the emotional side — performance, adventure, capability. Chrysler stands apart in the practical, forward-thinking quadrant, alongside the imports buyers cross-shop. That human-centered space is open, and only Chrysler owns it. Transition: 'Together, these vehicles are more than a portfolio — they define Chrysler's future.'</a:t>
             </a:r>
           </a:p>
         </p:txBody>
@@ -12356,7 +12356,7 @@
         </p:nvSpPr>
         <p:spPr>
           <a:xfrm>
-            <a:off x="685800" y="1600200"/>
+            <a:off x="685800" y="1572768"/>
             <a:ext cx="10515600" cy="365760"/>
           </a:xfrm>
           <a:prstGeom prst="rect">
@@ -12378,23 +12378,233 @@
                 </a:solidFill>
                 <a:latin typeface="Arial"/>
               </a:rPr>
-              <a:t>Differentiation, not overlap — the human-centered space only Chrysler occupies.</a:t>
-            </a:r>
-          </a:p>
-        </p:txBody>
-      </p:sp>
-      <p:sp>
-        <p:nvSpPr>
-          <p:cNvPr id="5" name="Rectangle 4"/>
+              <a:t>Differentiation, not overlap — Chrysler owns the practical, forward-thinking space its siblings leave open.</a:t>
+            </a:r>
+          </a:p>
+        </p:txBody>
+      </p:sp>
+      <p:cxnSp>
+        <p:nvCxnSpPr>
+          <p:cNvPr id="5" name="Connector 4"/>
+          <p:cNvCxnSpPr/>
+          <p:nvPr/>
+        </p:nvCxnSpPr>
+        <p:spPr>
+          <a:xfrm>
+            <a:off x="868680" y="4091940"/>
+            <a:ext cx="5577840" cy="0"/>
+          </a:xfrm>
+          <a:prstGeom prst="bentConnector3">
+            <a:avLst/>
+          </a:prstGeom>
+          <a:ln w="12700">
+            <a:solidFill>
+              <a:srgbClr val="C8CCD2"/>
+            </a:solidFill>
+          </a:ln>
+        </p:spPr>
+        <p:style>
+          <a:lnRef idx="2">
+            <a:schemeClr val="accent1"/>
+          </a:lnRef>
+          <a:fillRef idx="0">
+            <a:schemeClr val="accent1"/>
+          </a:fillRef>
+          <a:effectRef idx="1">
+            <a:schemeClr val="accent1"/>
+          </a:effectRef>
+          <a:fontRef idx="minor">
+            <a:schemeClr val="tx1"/>
+          </a:fontRef>
+        </p:style>
+      </p:cxnSp>
+      <p:cxnSp>
+        <p:nvCxnSpPr>
+          <p:cNvPr id="6" name="Connector 5"/>
+          <p:cNvCxnSpPr/>
+          <p:nvPr/>
+        </p:nvCxnSpPr>
+        <p:spPr>
+          <a:xfrm>
+            <a:off x="3657600" y="2331720"/>
+            <a:ext cx="0" cy="3520440"/>
+          </a:xfrm>
+          <a:prstGeom prst="bentConnector3">
+            <a:avLst/>
+          </a:prstGeom>
+          <a:ln w="12700">
+            <a:solidFill>
+              <a:srgbClr val="C8CCD2"/>
+            </a:solidFill>
+          </a:ln>
+        </p:spPr>
+        <p:style>
+          <a:lnRef idx="2">
+            <a:schemeClr val="accent1"/>
+          </a:lnRef>
+          <a:fillRef idx="0">
+            <a:schemeClr val="accent1"/>
+          </a:fillRef>
+          <a:effectRef idx="1">
+            <a:schemeClr val="accent1"/>
+          </a:effectRef>
+          <a:fontRef idx="minor">
+            <a:schemeClr val="tx1"/>
+          </a:fontRef>
+        </p:style>
+      </p:cxnSp>
+      <p:sp>
+        <p:nvSpPr>
+          <p:cNvPr id="7" name="TextBox 6"/>
+          <p:cNvSpPr txBox="1"/>
+          <p:nvPr/>
+        </p:nvSpPr>
+        <p:spPr>
+          <a:xfrm>
+            <a:off x="868680" y="3799332"/>
+            <a:ext cx="1280160" cy="274320"/>
+          </a:xfrm>
+          <a:prstGeom prst="rect">
+            <a:avLst/>
+          </a:prstGeom>
+          <a:noFill/>
+        </p:spPr>
+        <p:txBody>
+          <a:bodyPr wrap="square" anchor="t" lIns="0" rIns="0" tIns="0" bIns="0">
+            <a:spAutoFit/>
+          </a:bodyPr>
+          <a:lstStyle/>
+          <a:p>
+            <a:pPr algn="l"/>
+            <a:r>
+              <a:rPr sz="900" b="1" i="0" spc="150">
+                <a:solidFill>
+                  <a:srgbClr val="868B94"/>
+                </a:solidFill>
+                <a:latin typeface="Arial"/>
+              </a:rPr>
+              <a:t>PRACTICAL</a:t>
+            </a:r>
+          </a:p>
+        </p:txBody>
+      </p:sp>
+      <p:sp>
+        <p:nvSpPr>
+          <p:cNvPr id="8" name="TextBox 7"/>
+          <p:cNvSpPr txBox="1"/>
+          <p:nvPr/>
+        </p:nvSpPr>
+        <p:spPr>
+          <a:xfrm>
+            <a:off x="5166360" y="3799332"/>
+            <a:ext cx="1280160" cy="274320"/>
+          </a:xfrm>
+          <a:prstGeom prst="rect">
+            <a:avLst/>
+          </a:prstGeom>
+          <a:noFill/>
+        </p:spPr>
+        <p:txBody>
+          <a:bodyPr wrap="square" anchor="t" lIns="0" rIns="0" tIns="0" bIns="0">
+            <a:spAutoFit/>
+          </a:bodyPr>
+          <a:lstStyle/>
+          <a:p>
+            <a:pPr algn="r"/>
+            <a:r>
+              <a:rPr sz="900" b="1" i="0" spc="150">
+                <a:solidFill>
+                  <a:srgbClr val="868B94"/>
+                </a:solidFill>
+                <a:latin typeface="Arial"/>
+              </a:rPr>
+              <a:t>EMOTIONAL</a:t>
+            </a:r>
+          </a:p>
+        </p:txBody>
+      </p:sp>
+      <p:sp>
+        <p:nvSpPr>
+          <p:cNvPr id="9" name="TextBox 8"/>
+          <p:cNvSpPr txBox="1"/>
+          <p:nvPr/>
+        </p:nvSpPr>
+        <p:spPr>
+          <a:xfrm>
+            <a:off x="2468880" y="2057400"/>
+            <a:ext cx="2377440" cy="274320"/>
+          </a:xfrm>
+          <a:prstGeom prst="rect">
+            <a:avLst/>
+          </a:prstGeom>
+          <a:noFill/>
+        </p:spPr>
+        <p:txBody>
+          <a:bodyPr wrap="square" anchor="t" lIns="0" rIns="0" tIns="0" bIns="0">
+            <a:spAutoFit/>
+          </a:bodyPr>
+          <a:lstStyle/>
+          <a:p>
+            <a:pPr algn="ctr"/>
+            <a:r>
+              <a:rPr sz="900" b="1" i="0" spc="150">
+                <a:solidFill>
+                  <a:srgbClr val="868B94"/>
+                </a:solidFill>
+                <a:latin typeface="Arial"/>
+              </a:rPr>
+              <a:t>FORWARD-THINKING</a:t>
+            </a:r>
+          </a:p>
+        </p:txBody>
+      </p:sp>
+      <p:sp>
+        <p:nvSpPr>
+          <p:cNvPr id="10" name="TextBox 9"/>
+          <p:cNvSpPr txBox="1"/>
+          <p:nvPr/>
+        </p:nvSpPr>
+        <p:spPr>
+          <a:xfrm>
+            <a:off x="2468880" y="5888736"/>
+            <a:ext cx="2377440" cy="274320"/>
+          </a:xfrm>
+          <a:prstGeom prst="rect">
+            <a:avLst/>
+          </a:prstGeom>
+          <a:noFill/>
+        </p:spPr>
+        <p:txBody>
+          <a:bodyPr wrap="square" anchor="t" lIns="0" rIns="0" tIns="0" bIns="0">
+            <a:spAutoFit/>
+          </a:bodyPr>
+          <a:lstStyle/>
+          <a:p>
+            <a:pPr algn="ctr"/>
+            <a:r>
+              <a:rPr sz="900" b="1" i="0" spc="150">
+                <a:solidFill>
+                  <a:srgbClr val="868B94"/>
+                </a:solidFill>
+                <a:latin typeface="Arial"/>
+              </a:rPr>
+              <a:t>CONVENTIONAL</a:t>
+            </a:r>
+          </a:p>
+        </p:txBody>
+      </p:sp>
+      <p:sp>
+        <p:nvSpPr>
+          <p:cNvPr id="11" name="Oval 10"/>
           <p:cNvSpPr/>
           <p:nvPr/>
         </p:nvSpPr>
         <p:spPr>
           <a:xfrm>
-            <a:off x="4480560" y="2286000"/>
-            <a:ext cx="3200400" cy="1463040"/>
-          </a:xfrm>
-          <a:prstGeom prst="rect">
+            <a:off x="1681581" y="2721254"/>
+            <a:ext cx="1051560" cy="1051560"/>
+          </a:xfrm>
+          <a:prstGeom prst="ellipse">
             <a:avLst/>
           </a:prstGeom>
           <a:solidFill>
@@ -12429,14 +12639,14 @@
       </p:sp>
       <p:sp>
         <p:nvSpPr>
-          <p:cNvPr id="6" name="TextBox 5"/>
+          <p:cNvPr id="12" name="TextBox 11"/>
           <p:cNvSpPr txBox="1"/>
           <p:nvPr/>
         </p:nvSpPr>
         <p:spPr>
           <a:xfrm>
-            <a:off x="4480560" y="2286000"/>
-            <a:ext cx="3200400" cy="1463040"/>
+            <a:off x="1681581" y="2721254"/>
+            <a:ext cx="1051560" cy="1051560"/>
           </a:xfrm>
           <a:prstGeom prst="rect">
             <a:avLst/>
@@ -12449,13 +12659,9 @@
           </a:bodyPr>
           <a:lstStyle/>
           <a:p>
-            <a:pPr algn="ctr">
-              <a:spcAft>
-                <a:spcPts val="400"/>
-              </a:spcAft>
-            </a:pPr>
-            <a:r>
-              <a:rPr sz="1800" b="1" i="0" spc="200">
+            <a:pPr algn="ctr"/>
+            <a:r>
+              <a:rPr sz="1050" b="1" i="0" spc="100">
                 <a:solidFill>
                   <a:srgbClr val="FFFFFF"/>
                 </a:solidFill>
@@ -12464,35 +12670,290 @@
               <a:t>CHRYSLER</a:t>
             </a:r>
           </a:p>
-          <a:p>
-            <a:pPr algn="ctr">
-              <a:lnSpc>
-                <a:spcPct val="110000"/>
-              </a:lnSpc>
-            </a:pPr>
-            <a:r>
-              <a:rPr sz="1100" b="0" i="0">
-                <a:solidFill>
-                  <a:srgbClr val="C8CCD2"/>
+        </p:txBody>
+      </p:sp>
+      <p:sp>
+        <p:nvSpPr>
+          <p:cNvPr id="13" name="Oval 12"/>
+          <p:cNvSpPr/>
+          <p:nvPr/>
+        </p:nvSpPr>
+        <p:spPr>
+          <a:xfrm>
+            <a:off x="4473244" y="3117189"/>
+            <a:ext cx="822960" cy="822960"/>
+          </a:xfrm>
+          <a:prstGeom prst="ellipse">
+            <a:avLst/>
+          </a:prstGeom>
+          <a:solidFill>
+            <a:srgbClr val="C41230"/>
+          </a:solidFill>
+          <a:ln>
+            <a:noFill/>
+          </a:ln>
+          <a:effectLst/>
+        </p:spPr>
+        <p:style>
+          <a:lnRef idx="1">
+            <a:schemeClr val="accent1"/>
+          </a:lnRef>
+          <a:fillRef idx="3">
+            <a:schemeClr val="accent1"/>
+          </a:fillRef>
+          <a:effectRef idx="2">
+            <a:schemeClr val="accent1"/>
+          </a:effectRef>
+          <a:fontRef idx="minor">
+            <a:schemeClr val="lt1"/>
+          </a:fontRef>
+        </p:style>
+        <p:txBody>
+          <a:bodyPr rtlCol="0" anchor="ctr"/>
+          <a:lstStyle/>
+          <a:p>
+            <a:pPr algn="ctr"/>
+          </a:p>
+        </p:txBody>
+      </p:sp>
+      <p:sp>
+        <p:nvSpPr>
+          <p:cNvPr id="14" name="TextBox 13"/>
+          <p:cNvSpPr txBox="1"/>
+          <p:nvPr/>
+        </p:nvSpPr>
+        <p:spPr>
+          <a:xfrm>
+            <a:off x="4473244" y="3117189"/>
+            <a:ext cx="822960" cy="822960"/>
+          </a:xfrm>
+          <a:prstGeom prst="rect">
+            <a:avLst/>
+          </a:prstGeom>
+          <a:noFill/>
+        </p:spPr>
+        <p:txBody>
+          <a:bodyPr wrap="square" anchor="ctr" lIns="0" rIns="0" tIns="0" bIns="0">
+            <a:spAutoFit/>
+          </a:bodyPr>
+          <a:lstStyle/>
+          <a:p>
+            <a:pPr algn="ctr"/>
+            <a:r>
+              <a:rPr sz="950" b="1" i="0" spc="100">
+                <a:solidFill>
+                  <a:srgbClr val="FFFFFF"/>
                 </a:solidFill>
                 <a:latin typeface="Arial"/>
               </a:rPr>
-              <a:t>Designed around people.
-Friction removed.</a:t>
-            </a:r>
-          </a:p>
-        </p:txBody>
-      </p:sp>
-      <p:sp>
-        <p:nvSpPr>
-          <p:cNvPr id="7" name="Rectangle 6"/>
+              <a:t>DODGE</a:t>
+            </a:r>
+          </a:p>
+        </p:txBody>
+      </p:sp>
+      <p:sp>
+        <p:nvSpPr>
+          <p:cNvPr id="15" name="Oval 14"/>
           <p:cNvSpPr/>
           <p:nvPr/>
         </p:nvSpPr>
         <p:spPr>
           <a:xfrm>
-            <a:off x="685800" y="4297680"/>
-            <a:ext cx="2430018" cy="1371600"/>
+            <a:off x="5086807" y="3856482"/>
+            <a:ext cx="822960" cy="822960"/>
+          </a:xfrm>
+          <a:prstGeom prst="ellipse">
+            <a:avLst/>
+          </a:prstGeom>
+          <a:solidFill>
+            <a:srgbClr val="3E4A33"/>
+          </a:solidFill>
+          <a:ln>
+            <a:noFill/>
+          </a:ln>
+          <a:effectLst/>
+        </p:spPr>
+        <p:style>
+          <a:lnRef idx="1">
+            <a:schemeClr val="accent1"/>
+          </a:lnRef>
+          <a:fillRef idx="3">
+            <a:schemeClr val="accent1"/>
+          </a:fillRef>
+          <a:effectRef idx="2">
+            <a:schemeClr val="accent1"/>
+          </a:effectRef>
+          <a:fontRef idx="minor">
+            <a:schemeClr val="lt1"/>
+          </a:fontRef>
+        </p:style>
+        <p:txBody>
+          <a:bodyPr rtlCol="0" anchor="ctr"/>
+          <a:lstStyle/>
+          <a:p>
+            <a:pPr algn="ctr"/>
+          </a:p>
+        </p:txBody>
+      </p:sp>
+      <p:sp>
+        <p:nvSpPr>
+          <p:cNvPr id="16" name="TextBox 15"/>
+          <p:cNvSpPr txBox="1"/>
+          <p:nvPr/>
+        </p:nvSpPr>
+        <p:spPr>
+          <a:xfrm>
+            <a:off x="5086807" y="3856482"/>
+            <a:ext cx="822960" cy="822960"/>
+          </a:xfrm>
+          <a:prstGeom prst="rect">
+            <a:avLst/>
+          </a:prstGeom>
+          <a:noFill/>
+        </p:spPr>
+        <p:txBody>
+          <a:bodyPr wrap="square" anchor="ctr" lIns="0" rIns="0" tIns="0" bIns="0">
+            <a:spAutoFit/>
+          </a:bodyPr>
+          <a:lstStyle/>
+          <a:p>
+            <a:pPr algn="ctr"/>
+            <a:r>
+              <a:rPr sz="950" b="1" i="0" spc="100">
+                <a:solidFill>
+                  <a:srgbClr val="FFFFFF"/>
+                </a:solidFill>
+                <a:latin typeface="Arial"/>
+              </a:rPr>
+              <a:t>JEEP</a:t>
+            </a:r>
+          </a:p>
+        </p:txBody>
+      </p:sp>
+      <p:sp>
+        <p:nvSpPr>
+          <p:cNvPr id="17" name="Oval 16"/>
+          <p:cNvSpPr/>
+          <p:nvPr/>
+        </p:nvSpPr>
+        <p:spPr>
+          <a:xfrm>
+            <a:off x="4361688" y="4701387"/>
+            <a:ext cx="822960" cy="822960"/>
+          </a:xfrm>
+          <a:prstGeom prst="ellipse">
+            <a:avLst/>
+          </a:prstGeom>
+          <a:solidFill>
+            <a:srgbClr val="6E747C"/>
+          </a:solidFill>
+          <a:ln>
+            <a:noFill/>
+          </a:ln>
+          <a:effectLst/>
+        </p:spPr>
+        <p:style>
+          <a:lnRef idx="1">
+            <a:schemeClr val="accent1"/>
+          </a:lnRef>
+          <a:fillRef idx="3">
+            <a:schemeClr val="accent1"/>
+          </a:fillRef>
+          <a:effectRef idx="2">
+            <a:schemeClr val="accent1"/>
+          </a:effectRef>
+          <a:fontRef idx="minor">
+            <a:schemeClr val="lt1"/>
+          </a:fontRef>
+        </p:style>
+        <p:txBody>
+          <a:bodyPr rtlCol="0" anchor="ctr"/>
+          <a:lstStyle/>
+          <a:p>
+            <a:pPr algn="ctr"/>
+          </a:p>
+        </p:txBody>
+      </p:sp>
+      <p:sp>
+        <p:nvSpPr>
+          <p:cNvPr id="18" name="TextBox 17"/>
+          <p:cNvSpPr txBox="1"/>
+          <p:nvPr/>
+        </p:nvSpPr>
+        <p:spPr>
+          <a:xfrm>
+            <a:off x="4361688" y="4701387"/>
+            <a:ext cx="822960" cy="822960"/>
+          </a:xfrm>
+          <a:prstGeom prst="rect">
+            <a:avLst/>
+          </a:prstGeom>
+          <a:noFill/>
+        </p:spPr>
+        <p:txBody>
+          <a:bodyPr wrap="square" anchor="ctr" lIns="0" rIns="0" tIns="0" bIns="0">
+            <a:spAutoFit/>
+          </a:bodyPr>
+          <a:lstStyle/>
+          <a:p>
+            <a:pPr algn="ctr"/>
+            <a:r>
+              <a:rPr sz="950" b="1" i="0" spc="100">
+                <a:solidFill>
+                  <a:srgbClr val="FFFFFF"/>
+                </a:solidFill>
+                <a:latin typeface="Arial"/>
+              </a:rPr>
+              <a:t>RAM</a:t>
+            </a:r>
+          </a:p>
+        </p:txBody>
+      </p:sp>
+      <p:sp>
+        <p:nvSpPr>
+          <p:cNvPr id="19" name="TextBox 18"/>
+          <p:cNvSpPr txBox="1"/>
+          <p:nvPr/>
+        </p:nvSpPr>
+        <p:spPr>
+          <a:xfrm>
+            <a:off x="868680" y="6163056"/>
+            <a:ext cx="5577840" cy="274320"/>
+          </a:xfrm>
+          <a:prstGeom prst="rect">
+            <a:avLst/>
+          </a:prstGeom>
+          <a:noFill/>
+        </p:spPr>
+        <p:txBody>
+          <a:bodyPr wrap="square" anchor="t" lIns="0" rIns="0" tIns="0" bIns="0">
+            <a:spAutoFit/>
+          </a:bodyPr>
+          <a:lstStyle/>
+          <a:p>
+            <a:pPr algn="ctr"/>
+            <a:r>
+              <a:rPr sz="950" b="0" i="0">
+                <a:solidFill>
+                  <a:srgbClr val="868B94"/>
+                </a:solidFill>
+                <a:latin typeface="Arial"/>
+              </a:rPr>
+              <a:t>Stellantis buyers split 56% practical · 44% emotional</a:t>
+            </a:r>
+          </a:p>
+        </p:txBody>
+      </p:sp>
+      <p:sp>
+        <p:nvSpPr>
+          <p:cNvPr id="20" name="Rectangle 19"/>
+          <p:cNvSpPr/>
+          <p:nvPr/>
+        </p:nvSpPr>
+        <p:spPr>
+          <a:xfrm>
+            <a:off x="6903720" y="2331720"/>
+            <a:ext cx="4617720" cy="841248"/>
           </a:xfrm>
           <a:prstGeom prst="rect">
             <a:avLst/>
@@ -12531,14 +12992,58 @@
       </p:sp>
       <p:sp>
         <p:nvSpPr>
-          <p:cNvPr id="8" name="TextBox 7"/>
+          <p:cNvPr id="21" name="Rectangle 20"/>
+          <p:cNvSpPr/>
+          <p:nvPr/>
+        </p:nvSpPr>
+        <p:spPr>
+          <a:xfrm>
+            <a:off x="6903720" y="2331720"/>
+            <a:ext cx="73152" cy="841248"/>
+          </a:xfrm>
+          <a:prstGeom prst="rect">
+            <a:avLst/>
+          </a:prstGeom>
+          <a:solidFill>
+            <a:srgbClr val="1B2A4A"/>
+          </a:solidFill>
+          <a:ln>
+            <a:noFill/>
+          </a:ln>
+          <a:effectLst/>
+        </p:spPr>
+        <p:style>
+          <a:lnRef idx="1">
+            <a:schemeClr val="accent1"/>
+          </a:lnRef>
+          <a:fillRef idx="3">
+            <a:schemeClr val="accent1"/>
+          </a:fillRef>
+          <a:effectRef idx="2">
+            <a:schemeClr val="accent1"/>
+          </a:effectRef>
+          <a:fontRef idx="minor">
+            <a:schemeClr val="lt1"/>
+          </a:fontRef>
+        </p:style>
+        <p:txBody>
+          <a:bodyPr rtlCol="0" anchor="ctr"/>
+          <a:lstStyle/>
+          <a:p>
+            <a:pPr algn="ctr"/>
+          </a:p>
+        </p:txBody>
+      </p:sp>
+      <p:sp>
+        <p:nvSpPr>
+          <p:cNvPr id="22" name="TextBox 21"/>
           <p:cNvSpPr txBox="1"/>
           <p:nvPr/>
         </p:nvSpPr>
         <p:spPr>
           <a:xfrm>
-            <a:off x="685800" y="4297680"/>
-            <a:ext cx="2430018" cy="1371600"/>
+            <a:off x="7178040" y="2459736"/>
+            <a:ext cx="4160520" cy="658368"/>
           </a:xfrm>
           <a:prstGeom prst="rect">
             <a:avLst/>
@@ -12546,54 +13051,66 @@
           <a:noFill/>
         </p:spPr>
         <p:txBody>
-          <a:bodyPr wrap="square" anchor="ctr" lIns="0" rIns="0" tIns="0" bIns="0">
+          <a:bodyPr wrap="square" anchor="t" lIns="0" rIns="0" tIns="0" bIns="0">
             <a:spAutoFit/>
           </a:bodyPr>
           <a:lstStyle/>
           <a:p>
-            <a:pPr algn="ctr">
+            <a:pPr algn="l">
               <a:spcAft>
-                <a:spcPts val="400"/>
+                <a:spcPts val="200"/>
               </a:spcAft>
             </a:pPr>
             <a:r>
               <a:rPr sz="1200" b="1" i="0" spc="150">
                 <a:solidFill>
-                  <a:srgbClr val="868B94"/>
+                  <a:srgbClr val="1B2A4A"/>
                 </a:solidFill>
                 <a:latin typeface="Arial"/>
               </a:rPr>
-              <a:t>BRAND A</a:t>
-            </a:r>
-          </a:p>
-          <a:p>
-            <a:pPr algn="ctr">
-              <a:lnSpc>
-                <a:spcPct val="110000"/>
-              </a:lnSpc>
+              <a:t>CHRYSLER</a:t>
+            </a:r>
+          </a:p>
+          <a:p>
+            <a:pPr algn="l">
+              <a:spcAft>
+                <a:spcPts val="200"/>
+              </a:spcAft>
             </a:pPr>
             <a:r>
-              <a:rPr sz="950" b="0" i="0">
-                <a:solidFill>
-                  <a:srgbClr val="C8CCD2"/>
+              <a:rPr sz="1250" b="1" i="0">
+                <a:solidFill>
+                  <a:srgbClr val="1A1A1C"/>
                 </a:solidFill>
                 <a:latin typeface="Arial"/>
               </a:rPr>
-              <a:t>Distinct role</a:t>
-            </a:r>
-          </a:p>
-        </p:txBody>
-      </p:sp>
-      <p:sp>
-        <p:nvSpPr>
-          <p:cNvPr id="9" name="Rectangle 8"/>
+              <a:t>People-first design</a:t>
+            </a:r>
+          </a:p>
+          <a:p>
+            <a:pPr algn="l"/>
+            <a:r>
+              <a:rPr sz="950" b="0" i="0">
+                <a:solidFill>
+                  <a:srgbClr val="868B94"/>
+                </a:solidFill>
+                <a:latin typeface="Arial"/>
+              </a:rPr>
+              <a:t>Practical · Forward-thinking · Human-centered</a:t>
+            </a:r>
+          </a:p>
+        </p:txBody>
+      </p:sp>
+      <p:sp>
+        <p:nvSpPr>
+          <p:cNvPr id="23" name="Rectangle 22"/>
           <p:cNvSpPr/>
           <p:nvPr/>
         </p:nvSpPr>
         <p:spPr>
           <a:xfrm>
-            <a:off x="3481578" y="4297680"/>
-            <a:ext cx="2430018" cy="1371600"/>
+            <a:off x="6903720" y="3282696"/>
+            <a:ext cx="4617720" cy="841248"/>
           </a:xfrm>
           <a:prstGeom prst="rect">
             <a:avLst/>
@@ -12632,14 +13149,58 @@
       </p:sp>
       <p:sp>
         <p:nvSpPr>
-          <p:cNvPr id="10" name="TextBox 9"/>
+          <p:cNvPr id="24" name="Rectangle 23"/>
+          <p:cNvSpPr/>
+          <p:nvPr/>
+        </p:nvSpPr>
+        <p:spPr>
+          <a:xfrm>
+            <a:off x="6903720" y="3282696"/>
+            <a:ext cx="73152" cy="841248"/>
+          </a:xfrm>
+          <a:prstGeom prst="rect">
+            <a:avLst/>
+          </a:prstGeom>
+          <a:solidFill>
+            <a:srgbClr val="C41230"/>
+          </a:solidFill>
+          <a:ln>
+            <a:noFill/>
+          </a:ln>
+          <a:effectLst/>
+        </p:spPr>
+        <p:style>
+          <a:lnRef idx="1">
+            <a:schemeClr val="accent1"/>
+          </a:lnRef>
+          <a:fillRef idx="3">
+            <a:schemeClr val="accent1"/>
+          </a:fillRef>
+          <a:effectRef idx="2">
+            <a:schemeClr val="accent1"/>
+          </a:effectRef>
+          <a:fontRef idx="minor">
+            <a:schemeClr val="lt1"/>
+          </a:fontRef>
+        </p:style>
+        <p:txBody>
+          <a:bodyPr rtlCol="0" anchor="ctr"/>
+          <a:lstStyle/>
+          <a:p>
+            <a:pPr algn="ctr"/>
+          </a:p>
+        </p:txBody>
+      </p:sp>
+      <p:sp>
+        <p:nvSpPr>
+          <p:cNvPr id="25" name="TextBox 24"/>
           <p:cNvSpPr txBox="1"/>
           <p:nvPr/>
         </p:nvSpPr>
         <p:spPr>
           <a:xfrm>
-            <a:off x="3481578" y="4297680"/>
-            <a:ext cx="2430018" cy="1371600"/>
+            <a:off x="7178040" y="3410712"/>
+            <a:ext cx="4160520" cy="658368"/>
           </a:xfrm>
           <a:prstGeom prst="rect">
             <a:avLst/>
@@ -12647,54 +13208,66 @@
           <a:noFill/>
         </p:spPr>
         <p:txBody>
-          <a:bodyPr wrap="square" anchor="ctr" lIns="0" rIns="0" tIns="0" bIns="0">
+          <a:bodyPr wrap="square" anchor="t" lIns="0" rIns="0" tIns="0" bIns="0">
             <a:spAutoFit/>
           </a:bodyPr>
           <a:lstStyle/>
           <a:p>
-            <a:pPr algn="ctr">
+            <a:pPr algn="l">
               <a:spcAft>
-                <a:spcPts val="400"/>
+                <a:spcPts val="200"/>
               </a:spcAft>
             </a:pPr>
             <a:r>
               <a:rPr sz="1200" b="1" i="0" spc="150">
                 <a:solidFill>
-                  <a:srgbClr val="868B94"/>
+                  <a:srgbClr val="C41230"/>
                 </a:solidFill>
                 <a:latin typeface="Arial"/>
               </a:rPr>
-              <a:t>BRAND B</a:t>
-            </a:r>
-          </a:p>
-          <a:p>
-            <a:pPr algn="ctr">
-              <a:lnSpc>
-                <a:spcPct val="110000"/>
-              </a:lnSpc>
+              <a:t>DODGE</a:t>
+            </a:r>
+          </a:p>
+          <a:p>
+            <a:pPr algn="l">
+              <a:spcAft>
+                <a:spcPts val="200"/>
+              </a:spcAft>
             </a:pPr>
             <a:r>
-              <a:rPr sz="950" b="0" i="0">
-                <a:solidFill>
-                  <a:srgbClr val="C8CCD2"/>
+              <a:rPr sz="1250" b="1" i="0">
+                <a:solidFill>
+                  <a:srgbClr val="1A1A1C"/>
                 </a:solidFill>
                 <a:latin typeface="Arial"/>
               </a:rPr>
-              <a:t>Distinct role</a:t>
-            </a:r>
-          </a:p>
-        </p:txBody>
-      </p:sp>
-      <p:sp>
-        <p:nvSpPr>
-          <p:cNvPr id="11" name="Rectangle 10"/>
+              <a:t>Performance &amp; emotion</a:t>
+            </a:r>
+          </a:p>
+          <a:p>
+            <a:pPr algn="l"/>
+            <a:r>
+              <a:rPr sz="950" b="0" i="0">
+                <a:solidFill>
+                  <a:srgbClr val="868B94"/>
+                </a:solidFill>
+                <a:latin typeface="Arial"/>
+              </a:rPr>
+              <a:t>Adrenaline · Bold · Free-spirited</a:t>
+            </a:r>
+          </a:p>
+        </p:txBody>
+      </p:sp>
+      <p:sp>
+        <p:nvSpPr>
+          <p:cNvPr id="26" name="Rectangle 25"/>
           <p:cNvSpPr/>
           <p:nvPr/>
         </p:nvSpPr>
         <p:spPr>
           <a:xfrm>
-            <a:off x="6277356" y="4297680"/>
-            <a:ext cx="2430018" cy="1371600"/>
+            <a:off x="6903720" y="4233672"/>
+            <a:ext cx="4617720" cy="841248"/>
           </a:xfrm>
           <a:prstGeom prst="rect">
             <a:avLst/>
@@ -12733,14 +13306,58 @@
       </p:sp>
       <p:sp>
         <p:nvSpPr>
-          <p:cNvPr id="12" name="TextBox 11"/>
+          <p:cNvPr id="27" name="Rectangle 26"/>
+          <p:cNvSpPr/>
+          <p:nvPr/>
+        </p:nvSpPr>
+        <p:spPr>
+          <a:xfrm>
+            <a:off x="6903720" y="4233672"/>
+            <a:ext cx="73152" cy="841248"/>
+          </a:xfrm>
+          <a:prstGeom prst="rect">
+            <a:avLst/>
+          </a:prstGeom>
+          <a:solidFill>
+            <a:srgbClr val="3E4A33"/>
+          </a:solidFill>
+          <a:ln>
+            <a:noFill/>
+          </a:ln>
+          <a:effectLst/>
+        </p:spPr>
+        <p:style>
+          <a:lnRef idx="1">
+            <a:schemeClr val="accent1"/>
+          </a:lnRef>
+          <a:fillRef idx="3">
+            <a:schemeClr val="accent1"/>
+          </a:fillRef>
+          <a:effectRef idx="2">
+            <a:schemeClr val="accent1"/>
+          </a:effectRef>
+          <a:fontRef idx="minor">
+            <a:schemeClr val="lt1"/>
+          </a:fontRef>
+        </p:style>
+        <p:txBody>
+          <a:bodyPr rtlCol="0" anchor="ctr"/>
+          <a:lstStyle/>
+          <a:p>
+            <a:pPr algn="ctr"/>
+          </a:p>
+        </p:txBody>
+      </p:sp>
+      <p:sp>
+        <p:nvSpPr>
+          <p:cNvPr id="28" name="TextBox 27"/>
           <p:cNvSpPr txBox="1"/>
           <p:nvPr/>
         </p:nvSpPr>
         <p:spPr>
           <a:xfrm>
-            <a:off x="6277356" y="4297680"/>
-            <a:ext cx="2430018" cy="1371600"/>
+            <a:off x="7178040" y="4361688"/>
+            <a:ext cx="4160520" cy="658368"/>
           </a:xfrm>
           <a:prstGeom prst="rect">
             <a:avLst/>
@@ -12748,54 +13365,66 @@
           <a:noFill/>
         </p:spPr>
         <p:txBody>
-          <a:bodyPr wrap="square" anchor="ctr" lIns="0" rIns="0" tIns="0" bIns="0">
+          <a:bodyPr wrap="square" anchor="t" lIns="0" rIns="0" tIns="0" bIns="0">
             <a:spAutoFit/>
           </a:bodyPr>
           <a:lstStyle/>
           <a:p>
-            <a:pPr algn="ctr">
+            <a:pPr algn="l">
               <a:spcAft>
-                <a:spcPts val="400"/>
+                <a:spcPts val="200"/>
               </a:spcAft>
             </a:pPr>
             <a:r>
               <a:rPr sz="1200" b="1" i="0" spc="150">
                 <a:solidFill>
-                  <a:srgbClr val="868B94"/>
+                  <a:srgbClr val="3E4A33"/>
                 </a:solidFill>
                 <a:latin typeface="Arial"/>
               </a:rPr>
-              <a:t>BRAND C</a:t>
-            </a:r>
-          </a:p>
-          <a:p>
-            <a:pPr algn="ctr">
-              <a:lnSpc>
-                <a:spcPct val="110000"/>
-              </a:lnSpc>
+              <a:t>JEEP</a:t>
+            </a:r>
+          </a:p>
+          <a:p>
+            <a:pPr algn="l">
+              <a:spcAft>
+                <a:spcPts val="200"/>
+              </a:spcAft>
             </a:pPr>
             <a:r>
-              <a:rPr sz="950" b="0" i="0">
-                <a:solidFill>
-                  <a:srgbClr val="C8CCD2"/>
+              <a:rPr sz="1250" b="1" i="0">
+                <a:solidFill>
+                  <a:srgbClr val="1A1A1C"/>
                 </a:solidFill>
                 <a:latin typeface="Arial"/>
               </a:rPr>
-              <a:t>Distinct role</a:t>
-            </a:r>
-          </a:p>
-        </p:txBody>
-      </p:sp>
-      <p:sp>
-        <p:nvSpPr>
-          <p:cNvPr id="13" name="Rectangle 12"/>
+              <a:t>Authentic adventure</a:t>
+            </a:r>
+          </a:p>
+          <a:p>
+            <a:pPr algn="l"/>
+            <a:r>
+              <a:rPr sz="950" b="0" i="0">
+                <a:solidFill>
+                  <a:srgbClr val="868B94"/>
+                </a:solidFill>
+                <a:latin typeface="Arial"/>
+              </a:rPr>
+              <a:t>Rugged · Capable · All-terrain</a:t>
+            </a:r>
+          </a:p>
+        </p:txBody>
+      </p:sp>
+      <p:sp>
+        <p:nvSpPr>
+          <p:cNvPr id="29" name="Rectangle 28"/>
           <p:cNvSpPr/>
           <p:nvPr/>
         </p:nvSpPr>
         <p:spPr>
           <a:xfrm>
-            <a:off x="9073134" y="4297680"/>
-            <a:ext cx="2430018" cy="1371600"/>
+            <a:off x="6903720" y="5184648"/>
+            <a:ext cx="4617720" cy="841248"/>
           </a:xfrm>
           <a:prstGeom prst="rect">
             <a:avLst/>
@@ -12834,69 +13463,58 @@
       </p:sp>
       <p:sp>
         <p:nvSpPr>
-          <p:cNvPr id="14" name="TextBox 13"/>
+          <p:cNvPr id="30" name="Rectangle 29"/>
+          <p:cNvSpPr/>
+          <p:nvPr/>
+        </p:nvSpPr>
+        <p:spPr>
+          <a:xfrm>
+            <a:off x="6903720" y="5184648"/>
+            <a:ext cx="73152" cy="841248"/>
+          </a:xfrm>
+          <a:prstGeom prst="rect">
+            <a:avLst/>
+          </a:prstGeom>
+          <a:solidFill>
+            <a:srgbClr val="6E747C"/>
+          </a:solidFill>
+          <a:ln>
+            <a:noFill/>
+          </a:ln>
+          <a:effectLst/>
+        </p:spPr>
+        <p:style>
+          <a:lnRef idx="1">
+            <a:schemeClr val="accent1"/>
+          </a:lnRef>
+          <a:fillRef idx="3">
+            <a:schemeClr val="accent1"/>
+          </a:fillRef>
+          <a:effectRef idx="2">
+            <a:schemeClr val="accent1"/>
+          </a:effectRef>
+          <a:fontRef idx="minor">
+            <a:schemeClr val="lt1"/>
+          </a:fontRef>
+        </p:style>
+        <p:txBody>
+          <a:bodyPr rtlCol="0" anchor="ctr"/>
+          <a:lstStyle/>
+          <a:p>
+            <a:pPr algn="ctr"/>
+          </a:p>
+        </p:txBody>
+      </p:sp>
+      <p:sp>
+        <p:nvSpPr>
+          <p:cNvPr id="31" name="TextBox 30"/>
           <p:cNvSpPr txBox="1"/>
           <p:nvPr/>
         </p:nvSpPr>
         <p:spPr>
           <a:xfrm>
-            <a:off x="9073134" y="4297680"/>
-            <a:ext cx="2430018" cy="1371600"/>
-          </a:xfrm>
-          <a:prstGeom prst="rect">
-            <a:avLst/>
-          </a:prstGeom>
-          <a:noFill/>
-        </p:spPr>
-        <p:txBody>
-          <a:bodyPr wrap="square" anchor="ctr" lIns="0" rIns="0" tIns="0" bIns="0">
-            <a:spAutoFit/>
-          </a:bodyPr>
-          <a:lstStyle/>
-          <a:p>
-            <a:pPr algn="ctr">
-              <a:spcAft>
-                <a:spcPts val="400"/>
-              </a:spcAft>
-            </a:pPr>
-            <a:r>
-              <a:rPr sz="1200" b="1" i="0" spc="150">
-                <a:solidFill>
-                  <a:srgbClr val="868B94"/>
-                </a:solidFill>
-                <a:latin typeface="Arial"/>
-              </a:rPr>
-              <a:t>BRAND D</a:t>
-            </a:r>
-          </a:p>
-          <a:p>
-            <a:pPr algn="ctr">
-              <a:lnSpc>
-                <a:spcPct val="110000"/>
-              </a:lnSpc>
-            </a:pPr>
-            <a:r>
-              <a:rPr sz="950" b="0" i="0">
-                <a:solidFill>
-                  <a:srgbClr val="C8CCD2"/>
-                </a:solidFill>
-                <a:latin typeface="Arial"/>
-              </a:rPr>
-              <a:t>Distinct role</a:t>
-            </a:r>
-          </a:p>
-        </p:txBody>
-      </p:sp>
-      <p:sp>
-        <p:nvSpPr>
-          <p:cNvPr id="15" name="TextBox 14"/>
-          <p:cNvSpPr txBox="1"/>
-          <p:nvPr/>
-        </p:nvSpPr>
-        <p:spPr>
-          <a:xfrm>
-            <a:off x="640080" y="6437376"/>
-            <a:ext cx="7315200" cy="274320"/>
+            <a:off x="7178040" y="5312664"/>
+            <a:ext cx="4160520" cy="658368"/>
           </a:xfrm>
           <a:prstGeom prst="rect">
             <a:avLst/>
@@ -12909,6 +13527,108 @@
           </a:bodyPr>
           <a:lstStyle/>
           <a:p>
+            <a:pPr algn="l">
+              <a:spcAft>
+                <a:spcPts val="200"/>
+              </a:spcAft>
+            </a:pPr>
+            <a:r>
+              <a:rPr sz="1200" b="1" i="0" spc="150">
+                <a:solidFill>
+                  <a:srgbClr val="6E747C"/>
+                </a:solidFill>
+                <a:latin typeface="Arial"/>
+              </a:rPr>
+              <a:t>RAM</a:t>
+            </a:r>
+          </a:p>
+          <a:p>
+            <a:pPr algn="l">
+              <a:spcAft>
+                <a:spcPts val="200"/>
+              </a:spcAft>
+            </a:pPr>
+            <a:r>
+              <a:rPr sz="1250" b="1" i="0">
+                <a:solidFill>
+                  <a:srgbClr val="1A1A1C"/>
+                </a:solidFill>
+                <a:latin typeface="Arial"/>
+              </a:rPr>
+              <a:t>Hard-working capability</a:t>
+            </a:r>
+          </a:p>
+          <a:p>
+            <a:pPr algn="l"/>
+            <a:r>
+              <a:rPr sz="950" b="0" i="0">
+                <a:solidFill>
+                  <a:srgbClr val="868B94"/>
+                </a:solidFill>
+                <a:latin typeface="Arial"/>
+              </a:rPr>
+              <a:t>Confident · Capable · Committed</a:t>
+            </a:r>
+          </a:p>
+        </p:txBody>
+      </p:sp>
+      <p:sp>
+        <p:nvSpPr>
+          <p:cNvPr id="32" name="TextBox 31"/>
+          <p:cNvSpPr txBox="1"/>
+          <p:nvPr/>
+        </p:nvSpPr>
+        <p:spPr>
+          <a:xfrm>
+            <a:off x="685800" y="6400800"/>
+            <a:ext cx="7315200" cy="274320"/>
+          </a:xfrm>
+          <a:prstGeom prst="rect">
+            <a:avLst/>
+          </a:prstGeom>
+          <a:noFill/>
+        </p:spPr>
+        <p:txBody>
+          <a:bodyPr wrap="square" anchor="t" lIns="0" rIns="0" tIns="0" bIns="0">
+            <a:spAutoFit/>
+          </a:bodyPr>
+          <a:lstStyle/>
+          <a:p>
+            <a:pPr algn="l"/>
+            <a:r>
+              <a:rPr sz="750" b="0" i="0" spc="50">
+                <a:solidFill>
+                  <a:srgbClr val="C8CCD2"/>
+                </a:solidFill>
+                <a:latin typeface="Arial"/>
+              </a:rPr>
+              <a:t>Source: Stellantis Segmentation Survey 2024</a:t>
+            </a:r>
+          </a:p>
+        </p:txBody>
+      </p:sp>
+      <p:sp>
+        <p:nvSpPr>
+          <p:cNvPr id="33" name="TextBox 32"/>
+          <p:cNvSpPr txBox="1"/>
+          <p:nvPr/>
+        </p:nvSpPr>
+        <p:spPr>
+          <a:xfrm>
+            <a:off x="640080" y="6437376"/>
+            <a:ext cx="7315200" cy="274320"/>
+          </a:xfrm>
+          <a:prstGeom prst="rect">
+            <a:avLst/>
+          </a:prstGeom>
+          <a:noFill/>
+        </p:spPr>
+        <p:txBody>
+          <a:bodyPr wrap="square" anchor="t" lIns="0" rIns="0" tIns="0" bIns="0">
+            <a:spAutoFit/>
+          </a:bodyPr>
+          <a:lstStyle/>
+          <a:p>
             <a:pPr algn="l"/>
             <a:r>
               <a:rPr sz="800" b="0" i="0" spc="150">
@@ -12924,7 +13644,7 @@
       </p:sp>
       <p:sp>
         <p:nvSpPr>
-          <p:cNvPr id="16" name="TextBox 15"/>
+          <p:cNvPr id="34" name="TextBox 33"/>
           <p:cNvSpPr txBox="1"/>
           <p:nvPr/>
         </p:nvSpPr>
@@ -12959,7 +13679,7 @@
       </p:sp>
       <p:sp>
         <p:nvSpPr>
-          <p:cNvPr id="17" name="TextBox 16"/>
+          <p:cNvPr id="35" name="TextBox 34"/>
           <p:cNvSpPr txBox="1"/>
           <p:nvPr/>
         </p:nvSpPr>

--- a/Chrysler_Brand_Design_Vision.pptx
+++ b/Chrysler_Brand_Design_Vision.pptx
@@ -1081,7 +1081,7 @@
           <a:lstStyle/>
           <a:p>
             <a:r>
-              <a:t>SPEAKER NOTES (placeholder) — Why this philosophy creates a unique position. On the perception map, Dodge, Jeep, and Ram all sit on the emotional side — performance, adventure, capability. Chrysler stands apart in the practical, forward-thinking quadrant, alongside the imports buyers cross-shop. That human-centered space is open, and only Chrysler owns it. Transition: 'Together, these vehicles are more than a portfolio — they define Chrysler's future.'</a:t>
+              <a:t>SPEAKER NOTES (placeholder) — The segmentation evidence: Chrysler buyers sit in the practical, forward-thinking quadrant beside Honda, Hyundai, Kia and Toyota — the imports they cross-shop. Stellantis siblings sit on the emotional side: Ford/Jeep, Chevrolet/Dodge, and Ram. The market splits 56% practical / 44% emotional, and Hyundai and Kia index 72% practical. Chrysler owns this human-centered space; its siblings own emotion, adventure, and capability. Transition: 'Together, these vehicles define Chrysler's future.'</a:t>
             </a:r>
           </a:p>
         </p:txBody>
@@ -12286,7 +12286,7 @@
         </p:nvSpPr>
         <p:spPr>
           <a:xfrm>
-            <a:off x="685800" y="640080"/>
+            <a:off x="685800" y="502920"/>
             <a:ext cx="7315200" cy="274320"/>
           </a:xfrm>
           <a:prstGeom prst="rect">
@@ -12321,8 +12321,8 @@
         </p:nvSpPr>
         <p:spPr>
           <a:xfrm>
-            <a:off x="658368" y="960120"/>
-            <a:ext cx="10515600" cy="822960"/>
+            <a:off x="658368" y="822960"/>
+            <a:ext cx="10515600" cy="548640"/>
           </a:xfrm>
           <a:prstGeom prst="rect">
             <a:avLst/>
@@ -12337,27 +12337,71 @@
           <a:p>
             <a:pPr algn="l"/>
             <a:r>
-              <a:rPr sz="2600" b="1" i="0">
+              <a:rPr sz="2300" b="1" i="0">
                 <a:solidFill>
                   <a:srgbClr val="1A1A1C"/>
                 </a:solidFill>
                 <a:latin typeface="Arial"/>
               </a:rPr>
-              <a:t>How Chrysler Fits Within Stellantis</a:t>
-            </a:r>
-          </a:p>
-        </p:txBody>
-      </p:sp>
-      <p:sp>
-        <p:nvSpPr>
-          <p:cNvPr id="4" name="TextBox 3"/>
+              <a:t>Customer Segmentation and Brand Placement</a:t>
+            </a:r>
+          </a:p>
+        </p:txBody>
+      </p:sp>
+      <p:sp>
+        <p:nvSpPr>
+          <p:cNvPr id="4" name="Rectangle 3"/>
+          <p:cNvSpPr/>
+          <p:nvPr/>
+        </p:nvSpPr>
+        <p:spPr>
+          <a:xfrm>
+            <a:off x="685800" y="1417320"/>
+            <a:ext cx="10817352" cy="457200"/>
+          </a:xfrm>
+          <a:prstGeom prst="rect">
+            <a:avLst/>
+          </a:prstGeom>
+          <a:solidFill>
+            <a:srgbClr val="F7F8F9"/>
+          </a:solidFill>
+          <a:ln>
+            <a:noFill/>
+          </a:ln>
+          <a:effectLst/>
+        </p:spPr>
+        <p:style>
+          <a:lnRef idx="1">
+            <a:schemeClr val="accent1"/>
+          </a:lnRef>
+          <a:fillRef idx="3">
+            <a:schemeClr val="accent1"/>
+          </a:fillRef>
+          <a:effectRef idx="2">
+            <a:schemeClr val="accent1"/>
+          </a:effectRef>
+          <a:fontRef idx="minor">
+            <a:schemeClr val="lt1"/>
+          </a:fontRef>
+        </p:style>
+        <p:txBody>
+          <a:bodyPr rtlCol="0" anchor="ctr"/>
+          <a:lstStyle/>
+          <a:p>
+            <a:pPr algn="ctr"/>
+          </a:p>
+        </p:txBody>
+      </p:sp>
+      <p:sp>
+        <p:nvSpPr>
+          <p:cNvPr id="5" name="TextBox 4"/>
           <p:cNvSpPr txBox="1"/>
           <p:nvPr/>
         </p:nvSpPr>
         <p:spPr>
           <a:xfrm>
-            <a:off x="685800" y="1572768"/>
-            <a:ext cx="10515600" cy="365760"/>
+            <a:off x="868680" y="1417320"/>
+            <a:ext cx="10424160" cy="457200"/>
           </a:xfrm>
           <a:prstGeom prst="rect">
             <a:avLst/>
@@ -12365,59 +12409,24 @@
           <a:noFill/>
         </p:spPr>
         <p:txBody>
-          <a:bodyPr wrap="square" anchor="t" lIns="0" rIns="0" tIns="0" bIns="0">
+          <a:bodyPr wrap="square" anchor="ctr" lIns="0" rIns="0" tIns="0" bIns="0">
             <a:spAutoFit/>
           </a:bodyPr>
           <a:lstStyle/>
           <a:p>
-            <a:pPr algn="l"/>
-            <a:r>
-              <a:rPr sz="1300" b="0" i="0">
-                <a:solidFill>
-                  <a:srgbClr val="4A4E57"/>
+            <a:pPr algn="ctr"/>
+            <a:r>
+              <a:rPr sz="1400" b="0" i="0">
+                <a:solidFill>
+                  <a:srgbClr val="1B2A4A"/>
                 </a:solidFill>
                 <a:latin typeface="Arial"/>
               </a:rPr>
-              <a:t>Differentiation, not overlap — Chrysler owns the practical, forward-thinking space its siblings leave open.</a:t>
-            </a:r>
-          </a:p>
-        </p:txBody>
-      </p:sp>
-      <p:cxnSp>
-        <p:nvCxnSpPr>
-          <p:cNvPr id="5" name="Connector 4"/>
-          <p:cNvCxnSpPr/>
-          <p:nvPr/>
-        </p:nvCxnSpPr>
-        <p:spPr>
-          <a:xfrm>
-            <a:off x="868680" y="4091940"/>
-            <a:ext cx="5577840" cy="0"/>
-          </a:xfrm>
-          <a:prstGeom prst="bentConnector3">
-            <a:avLst/>
-          </a:prstGeom>
-          <a:ln w="12700">
-            <a:solidFill>
-              <a:srgbClr val="C8CCD2"/>
-            </a:solidFill>
-          </a:ln>
-        </p:spPr>
-        <p:style>
-          <a:lnRef idx="2">
-            <a:schemeClr val="accent1"/>
-          </a:lnRef>
-          <a:fillRef idx="0">
-            <a:schemeClr val="accent1"/>
-          </a:fillRef>
-          <a:effectRef idx="1">
-            <a:schemeClr val="accent1"/>
-          </a:effectRef>
-          <a:fontRef idx="minor">
-            <a:schemeClr val="tx1"/>
-          </a:fontRef>
-        </p:style>
-      </p:cxnSp>
+              <a:t>Chrysler customers align with Hyundai, Kia, and imports on the perception map.</a:t>
+            </a:r>
+          </a:p>
+        </p:txBody>
+      </p:sp>
       <p:cxnSp>
         <p:nvCxnSpPr>
           <p:cNvPr id="6" name="Connector 5"/>
@@ -12426,15 +12435,15 @@
         </p:nvCxnSpPr>
         <p:spPr>
           <a:xfrm>
-            <a:off x="3657600" y="2331720"/>
-            <a:ext cx="0" cy="3520440"/>
+            <a:off x="1691640" y="3634740"/>
+            <a:ext cx="8686800" cy="0"/>
           </a:xfrm>
           <a:prstGeom prst="bentConnector3">
             <a:avLst/>
           </a:prstGeom>
           <a:ln w="12700">
             <a:solidFill>
-              <a:srgbClr val="C8CCD2"/>
+              <a:srgbClr val="868B94"/>
             </a:solidFill>
           </a:ln>
         </p:spPr>
@@ -12453,16 +12462,51 @@
           </a:fontRef>
         </p:style>
       </p:cxnSp>
-      <p:sp>
-        <p:nvSpPr>
-          <p:cNvPr id="7" name="TextBox 6"/>
+      <p:cxnSp>
+        <p:nvCxnSpPr>
+          <p:cNvPr id="7" name="Connector 6"/>
+          <p:cNvCxnSpPr/>
+          <p:nvPr/>
+        </p:nvCxnSpPr>
+        <p:spPr>
+          <a:xfrm>
+            <a:off x="6035040" y="2148840"/>
+            <a:ext cx="0" cy="2971800"/>
+          </a:xfrm>
+          <a:prstGeom prst="bentConnector3">
+            <a:avLst/>
+          </a:prstGeom>
+          <a:ln w="12700">
+            <a:solidFill>
+              <a:srgbClr val="868B94"/>
+            </a:solidFill>
+          </a:ln>
+        </p:spPr>
+        <p:style>
+          <a:lnRef idx="2">
+            <a:schemeClr val="accent1"/>
+          </a:lnRef>
+          <a:fillRef idx="0">
+            <a:schemeClr val="accent1"/>
+          </a:fillRef>
+          <a:effectRef idx="1">
+            <a:schemeClr val="accent1"/>
+          </a:effectRef>
+          <a:fontRef idx="minor">
+            <a:schemeClr val="tx1"/>
+          </a:fontRef>
+        </p:style>
+      </p:cxnSp>
+      <p:sp>
+        <p:nvSpPr>
+          <p:cNvPr id="8" name="TextBox 7"/>
           <p:cNvSpPr txBox="1"/>
           <p:nvPr/>
         </p:nvSpPr>
         <p:spPr>
           <a:xfrm>
-            <a:off x="868680" y="3799332"/>
-            <a:ext cx="1280160" cy="274320"/>
+            <a:off x="4846320" y="1874520"/>
+            <a:ext cx="2377440" cy="274320"/>
           </a:xfrm>
           <a:prstGeom prst="rect">
             <a:avLst/>
@@ -12475,29 +12519,29 @@
           </a:bodyPr>
           <a:lstStyle/>
           <a:p>
-            <a:pPr algn="l"/>
-            <a:r>
-              <a:rPr sz="900" b="1" i="0" spc="150">
-                <a:solidFill>
-                  <a:srgbClr val="868B94"/>
+            <a:pPr algn="ctr"/>
+            <a:r>
+              <a:rPr sz="1100" b="0" i="0">
+                <a:solidFill>
+                  <a:srgbClr val="4A4E57"/>
                 </a:solidFill>
                 <a:latin typeface="Arial"/>
               </a:rPr>
-              <a:t>PRACTICAL</a:t>
-            </a:r>
-          </a:p>
-        </p:txBody>
-      </p:sp>
-      <p:sp>
-        <p:nvSpPr>
-          <p:cNvPr id="8" name="TextBox 7"/>
+              <a:t>Forward-Thinking</a:t>
+            </a:r>
+          </a:p>
+        </p:txBody>
+      </p:sp>
+      <p:sp>
+        <p:nvSpPr>
+          <p:cNvPr id="9" name="TextBox 8"/>
           <p:cNvSpPr txBox="1"/>
           <p:nvPr/>
         </p:nvSpPr>
         <p:spPr>
           <a:xfrm>
-            <a:off x="5166360" y="3799332"/>
-            <a:ext cx="1280160" cy="274320"/>
+            <a:off x="4846320" y="5138928"/>
+            <a:ext cx="2377440" cy="274320"/>
           </a:xfrm>
           <a:prstGeom prst="rect">
             <a:avLst/>
@@ -12510,29 +12554,29 @@
           </a:bodyPr>
           <a:lstStyle/>
           <a:p>
-            <a:pPr algn="r"/>
-            <a:r>
-              <a:rPr sz="900" b="1" i="0" spc="150">
-                <a:solidFill>
-                  <a:srgbClr val="868B94"/>
+            <a:pPr algn="ctr"/>
+            <a:r>
+              <a:rPr sz="1100" b="0" i="0">
+                <a:solidFill>
+                  <a:srgbClr val="4A4E57"/>
                 </a:solidFill>
                 <a:latin typeface="Arial"/>
               </a:rPr>
-              <a:t>EMOTIONAL</a:t>
-            </a:r>
-          </a:p>
-        </p:txBody>
-      </p:sp>
-      <p:sp>
-        <p:nvSpPr>
-          <p:cNvPr id="9" name="TextBox 8"/>
+              <a:t>Conventional</a:t>
+            </a:r>
+          </a:p>
+        </p:txBody>
+      </p:sp>
+      <p:sp>
+        <p:nvSpPr>
+          <p:cNvPr id="10" name="TextBox 9"/>
           <p:cNvSpPr txBox="1"/>
           <p:nvPr/>
         </p:nvSpPr>
         <p:spPr>
           <a:xfrm>
-            <a:off x="2468880" y="2057400"/>
-            <a:ext cx="2377440" cy="274320"/>
+            <a:off x="4206240" y="3323844"/>
+            <a:ext cx="1371600" cy="274320"/>
           </a:xfrm>
           <a:prstGeom prst="rect">
             <a:avLst/>
@@ -12545,29 +12589,29 @@
           </a:bodyPr>
           <a:lstStyle/>
           <a:p>
-            <a:pPr algn="ctr"/>
-            <a:r>
-              <a:rPr sz="900" b="1" i="0" spc="150">
-                <a:solidFill>
-                  <a:srgbClr val="868B94"/>
+            <a:pPr algn="r"/>
+            <a:r>
+              <a:rPr sz="1100" b="0" i="0">
+                <a:solidFill>
+                  <a:srgbClr val="4A4E57"/>
                 </a:solidFill>
                 <a:latin typeface="Arial"/>
               </a:rPr>
-              <a:t>FORWARD-THINKING</a:t>
-            </a:r>
-          </a:p>
-        </p:txBody>
-      </p:sp>
-      <p:sp>
-        <p:nvSpPr>
-          <p:cNvPr id="10" name="TextBox 9"/>
+              <a:t>Practical</a:t>
+            </a:r>
+          </a:p>
+        </p:txBody>
+      </p:sp>
+      <p:sp>
+        <p:nvSpPr>
+          <p:cNvPr id="11" name="TextBox 10"/>
           <p:cNvSpPr txBox="1"/>
           <p:nvPr/>
         </p:nvSpPr>
         <p:spPr>
           <a:xfrm>
-            <a:off x="2468880" y="5888736"/>
-            <a:ext cx="2377440" cy="274320"/>
+            <a:off x="6492240" y="3323844"/>
+            <a:ext cx="1371600" cy="274320"/>
           </a:xfrm>
           <a:prstGeom prst="rect">
             <a:avLst/>
@@ -12580,31 +12624,2173 @@
           </a:bodyPr>
           <a:lstStyle/>
           <a:p>
-            <a:pPr algn="ctr"/>
-            <a:r>
-              <a:rPr sz="900" b="1" i="0" spc="150">
-                <a:solidFill>
-                  <a:srgbClr val="868B94"/>
+            <a:pPr algn="l"/>
+            <a:r>
+              <a:rPr sz="1100" b="0" i="0">
+                <a:solidFill>
+                  <a:srgbClr val="4A4E57"/>
                 </a:solidFill>
                 <a:latin typeface="Arial"/>
               </a:rPr>
-              <a:t>CONVENTIONAL</a:t>
-            </a:r>
-          </a:p>
-        </p:txBody>
-      </p:sp>
-      <p:sp>
-        <p:nvSpPr>
-          <p:cNvPr id="11" name="Oval 10"/>
+              <a:t>Emotional</a:t>
+            </a:r>
+          </a:p>
+        </p:txBody>
+      </p:sp>
+      <p:sp>
+        <p:nvSpPr>
+          <p:cNvPr id="12" name="TextBox 11"/>
+          <p:cNvSpPr txBox="1"/>
+          <p:nvPr/>
+        </p:nvSpPr>
+        <p:spPr>
+          <a:xfrm>
+            <a:off x="137160" y="3223260"/>
+            <a:ext cx="1417320" cy="822960"/>
+          </a:xfrm>
+          <a:prstGeom prst="rect">
+            <a:avLst/>
+          </a:prstGeom>
+          <a:noFill/>
+        </p:spPr>
+        <p:txBody>
+          <a:bodyPr wrap="square" anchor="ctr" lIns="0" rIns="0" tIns="0" bIns="0">
+            <a:spAutoFit/>
+          </a:bodyPr>
+          <a:lstStyle/>
+          <a:p>
+            <a:pPr algn="ctr"/>
+            <a:r>
+              <a:rPr sz="3400" b="1" i="0">
+                <a:solidFill>
+                  <a:srgbClr val="1A1A1C"/>
+                </a:solidFill>
+                <a:latin typeface="Arial"/>
+              </a:rPr>
+              <a:t>56%</a:t>
+            </a:r>
+          </a:p>
+        </p:txBody>
+      </p:sp>
+      <p:sp>
+        <p:nvSpPr>
+          <p:cNvPr id="13" name="TextBox 12"/>
+          <p:cNvSpPr txBox="1"/>
+          <p:nvPr/>
+        </p:nvSpPr>
+        <p:spPr>
+          <a:xfrm>
+            <a:off x="10607040" y="3223260"/>
+            <a:ext cx="1463040" cy="822960"/>
+          </a:xfrm>
+          <a:prstGeom prst="rect">
+            <a:avLst/>
+          </a:prstGeom>
+          <a:noFill/>
+        </p:spPr>
+        <p:txBody>
+          <a:bodyPr wrap="square" anchor="ctr" lIns="0" rIns="0" tIns="0" bIns="0">
+            <a:spAutoFit/>
+          </a:bodyPr>
+          <a:lstStyle/>
+          <a:p>
+            <a:pPr algn="ctr"/>
+            <a:r>
+              <a:rPr sz="3400" b="1" i="0">
+                <a:solidFill>
+                  <a:srgbClr val="1A1A1C"/>
+                </a:solidFill>
+                <a:latin typeface="Arial"/>
+              </a:rPr>
+              <a:t>44%</a:t>
+            </a:r>
+          </a:p>
+        </p:txBody>
+      </p:sp>
+      <p:sp>
+        <p:nvSpPr>
+          <p:cNvPr id="14" name="Oval 13"/>
           <p:cNvSpPr/>
           <p:nvPr/>
         </p:nvSpPr>
         <p:spPr>
           <a:xfrm>
-            <a:off x="1681581" y="2721254"/>
-            <a:ext cx="1051560" cy="1051560"/>
+            <a:off x="2907792" y="2624328"/>
+            <a:ext cx="3127248" cy="1188720"/>
           </a:xfrm>
           <a:prstGeom prst="ellipse">
+            <a:avLst/>
+          </a:prstGeom>
+          <a:noFill/>
+          <a:ln w="19050">
+            <a:solidFill>
+              <a:srgbClr val="1B2A4A"/>
+            </a:solidFill>
+            <a:prstDash val="dash"/>
+          </a:ln>
+          <a:effectLst/>
+        </p:spPr>
+        <p:style>
+          <a:lnRef idx="1">
+            <a:schemeClr val="accent1"/>
+          </a:lnRef>
+          <a:fillRef idx="3">
+            <a:schemeClr val="accent1"/>
+          </a:fillRef>
+          <a:effectRef idx="2">
+            <a:schemeClr val="accent1"/>
+          </a:effectRef>
+          <a:fontRef idx="minor">
+            <a:schemeClr val="lt1"/>
+          </a:fontRef>
+        </p:style>
+        <p:txBody>
+          <a:bodyPr rtlCol="0" anchor="ctr"/>
+          <a:lstStyle/>
+          <a:p>
+            <a:pPr algn="ctr"/>
+          </a:p>
+        </p:txBody>
+      </p:sp>
+      <p:sp>
+        <p:nvSpPr>
+          <p:cNvPr id="15" name="Oval 14"/>
+          <p:cNvSpPr/>
+          <p:nvPr/>
+        </p:nvSpPr>
+        <p:spPr>
+          <a:xfrm>
+            <a:off x="6903720" y="3040380"/>
+            <a:ext cx="1911096" cy="475488"/>
+          </a:xfrm>
+          <a:prstGeom prst="ellipse">
+            <a:avLst/>
+          </a:prstGeom>
+          <a:noFill/>
+          <a:ln w="15875">
+            <a:solidFill>
+              <a:srgbClr val="1A1A1C"/>
+            </a:solidFill>
+          </a:ln>
+          <a:effectLst/>
+        </p:spPr>
+        <p:style>
+          <a:lnRef idx="1">
+            <a:schemeClr val="accent1"/>
+          </a:lnRef>
+          <a:fillRef idx="3">
+            <a:schemeClr val="accent1"/>
+          </a:fillRef>
+          <a:effectRef idx="2">
+            <a:schemeClr val="accent1"/>
+          </a:effectRef>
+          <a:fontRef idx="minor">
+            <a:schemeClr val="lt1"/>
+          </a:fontRef>
+        </p:style>
+        <p:txBody>
+          <a:bodyPr rtlCol="0" anchor="ctr"/>
+          <a:lstStyle/>
+          <a:p>
+            <a:pPr algn="ctr"/>
+          </a:p>
+        </p:txBody>
+      </p:sp>
+      <p:sp>
+        <p:nvSpPr>
+          <p:cNvPr id="16" name="Oval 15"/>
+          <p:cNvSpPr/>
+          <p:nvPr/>
+        </p:nvSpPr>
+        <p:spPr>
+          <a:xfrm>
+            <a:off x="7424928" y="3456432"/>
+            <a:ext cx="1737360" cy="475488"/>
+          </a:xfrm>
+          <a:prstGeom prst="ellipse">
+            <a:avLst/>
+          </a:prstGeom>
+          <a:noFill/>
+          <a:ln w="15875">
+            <a:solidFill>
+              <a:srgbClr val="1A1A1C"/>
+            </a:solidFill>
+          </a:ln>
+          <a:effectLst/>
+        </p:spPr>
+        <p:style>
+          <a:lnRef idx="1">
+            <a:schemeClr val="accent1"/>
+          </a:lnRef>
+          <a:fillRef idx="3">
+            <a:schemeClr val="accent1"/>
+          </a:fillRef>
+          <a:effectRef idx="2">
+            <a:schemeClr val="accent1"/>
+          </a:effectRef>
+          <a:fontRef idx="minor">
+            <a:schemeClr val="lt1"/>
+          </a:fontRef>
+        </p:style>
+        <p:txBody>
+          <a:bodyPr rtlCol="0" anchor="ctr"/>
+          <a:lstStyle/>
+          <a:p>
+            <a:pPr algn="ctr"/>
+          </a:p>
+        </p:txBody>
+      </p:sp>
+      <p:sp>
+        <p:nvSpPr>
+          <p:cNvPr id="17" name="Oval 16"/>
+          <p:cNvSpPr/>
+          <p:nvPr/>
+        </p:nvSpPr>
+        <p:spPr>
+          <a:xfrm>
+            <a:off x="6208776" y="3991356"/>
+            <a:ext cx="1389888" cy="534924"/>
+          </a:xfrm>
+          <a:prstGeom prst="ellipse">
+            <a:avLst/>
+          </a:prstGeom>
+          <a:noFill/>
+          <a:ln w="15875">
+            <a:solidFill>
+              <a:srgbClr val="1A1A1C"/>
+            </a:solidFill>
+          </a:ln>
+          <a:effectLst/>
+        </p:spPr>
+        <p:style>
+          <a:lnRef idx="1">
+            <a:schemeClr val="accent1"/>
+          </a:lnRef>
+          <a:fillRef idx="3">
+            <a:schemeClr val="accent1"/>
+          </a:fillRef>
+          <a:effectRef idx="2">
+            <a:schemeClr val="accent1"/>
+          </a:effectRef>
+          <a:fontRef idx="minor">
+            <a:schemeClr val="lt1"/>
+          </a:fontRef>
+        </p:style>
+        <p:txBody>
+          <a:bodyPr rtlCol="0" anchor="ctr"/>
+          <a:lstStyle/>
+          <a:p>
+            <a:pPr algn="ctr"/>
+          </a:p>
+        </p:txBody>
+      </p:sp>
+      <p:sp>
+        <p:nvSpPr>
+          <p:cNvPr id="18" name="Oval 17"/>
+          <p:cNvSpPr/>
+          <p:nvPr/>
+        </p:nvSpPr>
+        <p:spPr>
+          <a:xfrm>
+            <a:off x="2927909" y="2623871"/>
+            <a:ext cx="654710" cy="654710"/>
+          </a:xfrm>
+          <a:prstGeom prst="ellipse">
+            <a:avLst/>
+          </a:prstGeom>
+          <a:solidFill>
+            <a:srgbClr val="6E4A9E"/>
+          </a:solidFill>
+          <a:ln>
+            <a:noFill/>
+          </a:ln>
+          <a:effectLst/>
+        </p:spPr>
+        <p:style>
+          <a:lnRef idx="1">
+            <a:schemeClr val="accent1"/>
+          </a:lnRef>
+          <a:fillRef idx="3">
+            <a:schemeClr val="accent1"/>
+          </a:fillRef>
+          <a:effectRef idx="2">
+            <a:schemeClr val="accent1"/>
+          </a:effectRef>
+          <a:fontRef idx="minor">
+            <a:schemeClr val="lt1"/>
+          </a:fontRef>
+        </p:style>
+        <p:txBody>
+          <a:bodyPr rtlCol="0" anchor="ctr"/>
+          <a:lstStyle/>
+          <a:p>
+            <a:pPr algn="ctr"/>
+          </a:p>
+        </p:txBody>
+      </p:sp>
+      <p:sp>
+        <p:nvSpPr>
+          <p:cNvPr id="19" name="TextBox 18"/>
+          <p:cNvSpPr txBox="1"/>
+          <p:nvPr/>
+        </p:nvSpPr>
+        <p:spPr>
+          <a:xfrm>
+            <a:off x="2927909" y="2660447"/>
+            <a:ext cx="654710" cy="581558"/>
+          </a:xfrm>
+          <a:prstGeom prst="rect">
+            <a:avLst/>
+          </a:prstGeom>
+          <a:noFill/>
+        </p:spPr>
+        <p:txBody>
+          <a:bodyPr wrap="square" anchor="ctr" lIns="0" rIns="0" tIns="0" bIns="0">
+            <a:spAutoFit/>
+          </a:bodyPr>
+          <a:lstStyle/>
+          <a:p>
+            <a:pPr algn="ctr">
+              <a:lnSpc>
+                <a:spcPct val="95000"/>
+              </a:lnSpc>
+              <a:spcAft>
+                <a:spcPts val="100"/>
+              </a:spcAft>
+            </a:pPr>
+            <a:r>
+              <a:rPr sz="650" b="1" i="0">
+                <a:solidFill>
+                  <a:srgbClr val="FFFFFF"/>
+                </a:solidFill>
+                <a:latin typeface="Arial"/>
+              </a:rPr>
+              <a:t>Eco-Conscious Utilitarians</a:t>
+            </a:r>
+          </a:p>
+          <a:p>
+            <a:pPr algn="ctr"/>
+            <a:r>
+              <a:rPr sz="800" b="1" i="0">
+                <a:solidFill>
+                  <a:srgbClr val="FFFFFF"/>
+                </a:solidFill>
+                <a:latin typeface="Arial"/>
+              </a:rPr>
+              <a:t>7%</a:t>
+            </a:r>
+          </a:p>
+        </p:txBody>
+      </p:sp>
+      <p:sp>
+        <p:nvSpPr>
+          <p:cNvPr id="20" name="Oval 19"/>
+          <p:cNvSpPr/>
+          <p:nvPr/>
+        </p:nvSpPr>
+        <p:spPr>
+          <a:xfrm>
+            <a:off x="4935931" y="2398471"/>
+            <a:ext cx="808329" cy="808329"/>
+          </a:xfrm>
+          <a:prstGeom prst="ellipse">
+            <a:avLst/>
+          </a:prstGeom>
+          <a:solidFill>
+            <a:srgbClr val="C0393C"/>
+          </a:solidFill>
+          <a:ln>
+            <a:noFill/>
+          </a:ln>
+          <a:effectLst/>
+        </p:spPr>
+        <p:style>
+          <a:lnRef idx="1">
+            <a:schemeClr val="accent1"/>
+          </a:lnRef>
+          <a:fillRef idx="3">
+            <a:schemeClr val="accent1"/>
+          </a:fillRef>
+          <a:effectRef idx="2">
+            <a:schemeClr val="accent1"/>
+          </a:effectRef>
+          <a:fontRef idx="minor">
+            <a:schemeClr val="lt1"/>
+          </a:fontRef>
+        </p:style>
+        <p:txBody>
+          <a:bodyPr rtlCol="0" anchor="ctr"/>
+          <a:lstStyle/>
+          <a:p>
+            <a:pPr algn="ctr"/>
+          </a:p>
+        </p:txBody>
+      </p:sp>
+      <p:sp>
+        <p:nvSpPr>
+          <p:cNvPr id="21" name="TextBox 20"/>
+          <p:cNvSpPr txBox="1"/>
+          <p:nvPr/>
+        </p:nvSpPr>
+        <p:spPr>
+          <a:xfrm>
+            <a:off x="4935931" y="2435047"/>
+            <a:ext cx="808329" cy="735177"/>
+          </a:xfrm>
+          <a:prstGeom prst="rect">
+            <a:avLst/>
+          </a:prstGeom>
+          <a:noFill/>
+        </p:spPr>
+        <p:txBody>
+          <a:bodyPr wrap="square" anchor="ctr" lIns="0" rIns="0" tIns="0" bIns="0">
+            <a:spAutoFit/>
+          </a:bodyPr>
+          <a:lstStyle/>
+          <a:p>
+            <a:pPr algn="ctr">
+              <a:lnSpc>
+                <a:spcPct val="95000"/>
+              </a:lnSpc>
+              <a:spcAft>
+                <a:spcPts val="100"/>
+              </a:spcAft>
+            </a:pPr>
+            <a:r>
+              <a:rPr sz="650" b="1" i="0">
+                <a:solidFill>
+                  <a:srgbClr val="FFFFFF"/>
+                </a:solidFill>
+                <a:latin typeface="Arial"/>
+              </a:rPr>
+              <a:t>Sensible Progressives</a:t>
+            </a:r>
+          </a:p>
+          <a:p>
+            <a:pPr algn="ctr"/>
+            <a:r>
+              <a:rPr sz="800" b="1" i="0">
+                <a:solidFill>
+                  <a:srgbClr val="FFFFFF"/>
+                </a:solidFill>
+                <a:latin typeface="Arial"/>
+              </a:rPr>
+              <a:t>13%</a:t>
+            </a:r>
+          </a:p>
+        </p:txBody>
+      </p:sp>
+      <p:sp>
+        <p:nvSpPr>
+          <p:cNvPr id="22" name="Oval 21"/>
+          <p:cNvSpPr/>
+          <p:nvPr/>
+        </p:nvSpPr>
+        <p:spPr>
+          <a:xfrm>
+            <a:off x="7097573" y="2237537"/>
+            <a:ext cx="654710" cy="654710"/>
+          </a:xfrm>
+          <a:prstGeom prst="ellipse">
+            <a:avLst/>
+          </a:prstGeom>
+          <a:solidFill>
+            <a:srgbClr val="4FA3D1"/>
+          </a:solidFill>
+          <a:ln>
+            <a:noFill/>
+          </a:ln>
+          <a:effectLst/>
+        </p:spPr>
+        <p:style>
+          <a:lnRef idx="1">
+            <a:schemeClr val="accent1"/>
+          </a:lnRef>
+          <a:fillRef idx="3">
+            <a:schemeClr val="accent1"/>
+          </a:fillRef>
+          <a:effectRef idx="2">
+            <a:schemeClr val="accent1"/>
+          </a:effectRef>
+          <a:fontRef idx="minor">
+            <a:schemeClr val="lt1"/>
+          </a:fontRef>
+        </p:style>
+        <p:txBody>
+          <a:bodyPr rtlCol="0" anchor="ctr"/>
+          <a:lstStyle/>
+          <a:p>
+            <a:pPr algn="ctr"/>
+          </a:p>
+        </p:txBody>
+      </p:sp>
+      <p:sp>
+        <p:nvSpPr>
+          <p:cNvPr id="23" name="TextBox 22"/>
+          <p:cNvSpPr txBox="1"/>
+          <p:nvPr/>
+        </p:nvSpPr>
+        <p:spPr>
+          <a:xfrm>
+            <a:off x="7097573" y="2274113"/>
+            <a:ext cx="654710" cy="581558"/>
+          </a:xfrm>
+          <a:prstGeom prst="rect">
+            <a:avLst/>
+          </a:prstGeom>
+          <a:noFill/>
+        </p:spPr>
+        <p:txBody>
+          <a:bodyPr wrap="square" anchor="ctr" lIns="0" rIns="0" tIns="0" bIns="0">
+            <a:spAutoFit/>
+          </a:bodyPr>
+          <a:lstStyle/>
+          <a:p>
+            <a:pPr algn="ctr">
+              <a:lnSpc>
+                <a:spcPct val="95000"/>
+              </a:lnSpc>
+              <a:spcAft>
+                <a:spcPts val="100"/>
+              </a:spcAft>
+            </a:pPr>
+            <a:r>
+              <a:rPr sz="650" b="1" i="0">
+                <a:solidFill>
+                  <a:srgbClr val="FFFFFF"/>
+                </a:solidFill>
+                <a:latin typeface="Arial"/>
+              </a:rPr>
+              <a:t>Successful Stewards</a:t>
+            </a:r>
+          </a:p>
+          <a:p>
+            <a:pPr algn="ctr"/>
+            <a:r>
+              <a:rPr sz="800" b="1" i="0">
+                <a:solidFill>
+                  <a:srgbClr val="FFFFFF"/>
+                </a:solidFill>
+                <a:latin typeface="Arial"/>
+              </a:rPr>
+              <a:t>7%</a:t>
+            </a:r>
+          </a:p>
+        </p:txBody>
+      </p:sp>
+      <p:sp>
+        <p:nvSpPr>
+          <p:cNvPr id="24" name="Oval 23"/>
+          <p:cNvSpPr/>
+          <p:nvPr/>
+        </p:nvSpPr>
+        <p:spPr>
+          <a:xfrm>
+            <a:off x="7133234" y="2572664"/>
+            <a:ext cx="757123" cy="757123"/>
+          </a:xfrm>
+          <a:prstGeom prst="ellipse">
+            <a:avLst/>
+          </a:prstGeom>
+          <a:solidFill>
+            <a:srgbClr val="E27D2E"/>
+          </a:solidFill>
+          <a:ln>
+            <a:noFill/>
+          </a:ln>
+          <a:effectLst/>
+        </p:spPr>
+        <p:style>
+          <a:lnRef idx="1">
+            <a:schemeClr val="accent1"/>
+          </a:lnRef>
+          <a:fillRef idx="3">
+            <a:schemeClr val="accent1"/>
+          </a:fillRef>
+          <a:effectRef idx="2">
+            <a:schemeClr val="accent1"/>
+          </a:effectRef>
+          <a:fontRef idx="minor">
+            <a:schemeClr val="lt1"/>
+          </a:fontRef>
+        </p:style>
+        <p:txBody>
+          <a:bodyPr rtlCol="0" anchor="ctr"/>
+          <a:lstStyle/>
+          <a:p>
+            <a:pPr algn="ctr"/>
+          </a:p>
+        </p:txBody>
+      </p:sp>
+      <p:sp>
+        <p:nvSpPr>
+          <p:cNvPr id="25" name="TextBox 24"/>
+          <p:cNvSpPr txBox="1"/>
+          <p:nvPr/>
+        </p:nvSpPr>
+        <p:spPr>
+          <a:xfrm>
+            <a:off x="7133234" y="2609240"/>
+            <a:ext cx="757123" cy="683971"/>
+          </a:xfrm>
+          <a:prstGeom prst="rect">
+            <a:avLst/>
+          </a:prstGeom>
+          <a:noFill/>
+        </p:spPr>
+        <p:txBody>
+          <a:bodyPr wrap="square" anchor="ctr" lIns="0" rIns="0" tIns="0" bIns="0">
+            <a:spAutoFit/>
+          </a:bodyPr>
+          <a:lstStyle/>
+          <a:p>
+            <a:pPr algn="ctr">
+              <a:lnSpc>
+                <a:spcPct val="95000"/>
+              </a:lnSpc>
+              <a:spcAft>
+                <a:spcPts val="100"/>
+              </a:spcAft>
+            </a:pPr>
+            <a:r>
+              <a:rPr sz="650" b="1" i="0">
+                <a:solidFill>
+                  <a:srgbClr val="FFFFFF"/>
+                </a:solidFill>
+                <a:latin typeface="Arial"/>
+              </a:rPr>
+              <a:t>Affluent Achievers</a:t>
+            </a:r>
+          </a:p>
+          <a:p>
+            <a:pPr algn="ctr"/>
+            <a:r>
+              <a:rPr sz="800" b="1" i="0">
+                <a:solidFill>
+                  <a:srgbClr val="FFFFFF"/>
+                </a:solidFill>
+                <a:latin typeface="Arial"/>
+              </a:rPr>
+              <a:t>11%</a:t>
+            </a:r>
+          </a:p>
+        </p:txBody>
+      </p:sp>
+      <p:sp>
+        <p:nvSpPr>
+          <p:cNvPr id="26" name="Oval 25"/>
+          <p:cNvSpPr/>
+          <p:nvPr/>
+        </p:nvSpPr>
+        <p:spPr>
+          <a:xfrm>
+            <a:off x="6216091" y="2819095"/>
+            <a:ext cx="680313" cy="680313"/>
+          </a:xfrm>
+          <a:prstGeom prst="ellipse">
+            <a:avLst/>
+          </a:prstGeom>
+          <a:solidFill>
+            <a:srgbClr val="8E4B5E"/>
+          </a:solidFill>
+          <a:ln>
+            <a:noFill/>
+          </a:ln>
+          <a:effectLst/>
+        </p:spPr>
+        <p:style>
+          <a:lnRef idx="1">
+            <a:schemeClr val="accent1"/>
+          </a:lnRef>
+          <a:fillRef idx="3">
+            <a:schemeClr val="accent1"/>
+          </a:fillRef>
+          <a:effectRef idx="2">
+            <a:schemeClr val="accent1"/>
+          </a:effectRef>
+          <a:fontRef idx="minor">
+            <a:schemeClr val="lt1"/>
+          </a:fontRef>
+        </p:style>
+        <p:txBody>
+          <a:bodyPr rtlCol="0" anchor="ctr"/>
+          <a:lstStyle/>
+          <a:p>
+            <a:pPr algn="ctr"/>
+          </a:p>
+        </p:txBody>
+      </p:sp>
+      <p:sp>
+        <p:nvSpPr>
+          <p:cNvPr id="27" name="TextBox 26"/>
+          <p:cNvSpPr txBox="1"/>
+          <p:nvPr/>
+        </p:nvSpPr>
+        <p:spPr>
+          <a:xfrm>
+            <a:off x="6216091" y="2855671"/>
+            <a:ext cx="680313" cy="607161"/>
+          </a:xfrm>
+          <a:prstGeom prst="rect">
+            <a:avLst/>
+          </a:prstGeom>
+          <a:noFill/>
+        </p:spPr>
+        <p:txBody>
+          <a:bodyPr wrap="square" anchor="ctr" lIns="0" rIns="0" tIns="0" bIns="0">
+            <a:spAutoFit/>
+          </a:bodyPr>
+          <a:lstStyle/>
+          <a:p>
+            <a:pPr algn="ctr">
+              <a:lnSpc>
+                <a:spcPct val="95000"/>
+              </a:lnSpc>
+              <a:spcAft>
+                <a:spcPts val="100"/>
+              </a:spcAft>
+            </a:pPr>
+            <a:r>
+              <a:rPr sz="650" b="1" i="0">
+                <a:solidFill>
+                  <a:srgbClr val="FFFFFF"/>
+                </a:solidFill>
+                <a:latin typeface="Arial"/>
+              </a:rPr>
+              <a:t>Functional Doers</a:t>
+            </a:r>
+          </a:p>
+          <a:p>
+            <a:pPr algn="ctr"/>
+            <a:r>
+              <a:rPr sz="800" b="1" i="0">
+                <a:solidFill>
+                  <a:srgbClr val="FFFFFF"/>
+                </a:solidFill>
+                <a:latin typeface="Arial"/>
+              </a:rPr>
+              <a:t>8%</a:t>
+            </a:r>
+          </a:p>
+        </p:txBody>
+      </p:sp>
+      <p:sp>
+        <p:nvSpPr>
+          <p:cNvPr id="28" name="Oval 27"/>
+          <p:cNvSpPr/>
+          <p:nvPr/>
+        </p:nvSpPr>
+        <p:spPr>
+          <a:xfrm>
+            <a:off x="5347411" y="3145993"/>
+            <a:ext cx="680313" cy="680313"/>
+          </a:xfrm>
+          <a:prstGeom prst="ellipse">
+            <a:avLst/>
+          </a:prstGeom>
+          <a:solidFill>
+            <a:srgbClr val="E7C84A"/>
+          </a:solidFill>
+          <a:ln>
+            <a:noFill/>
+          </a:ln>
+          <a:effectLst/>
+        </p:spPr>
+        <p:style>
+          <a:lnRef idx="1">
+            <a:schemeClr val="accent1"/>
+          </a:lnRef>
+          <a:fillRef idx="3">
+            <a:schemeClr val="accent1"/>
+          </a:fillRef>
+          <a:effectRef idx="2">
+            <a:schemeClr val="accent1"/>
+          </a:effectRef>
+          <a:fontRef idx="minor">
+            <a:schemeClr val="lt1"/>
+          </a:fontRef>
+        </p:style>
+        <p:txBody>
+          <a:bodyPr rtlCol="0" anchor="ctr"/>
+          <a:lstStyle/>
+          <a:p>
+            <a:pPr algn="ctr"/>
+          </a:p>
+        </p:txBody>
+      </p:sp>
+      <p:sp>
+        <p:nvSpPr>
+          <p:cNvPr id="29" name="TextBox 28"/>
+          <p:cNvSpPr txBox="1"/>
+          <p:nvPr/>
+        </p:nvSpPr>
+        <p:spPr>
+          <a:xfrm>
+            <a:off x="5347411" y="3182569"/>
+            <a:ext cx="680313" cy="607161"/>
+          </a:xfrm>
+          <a:prstGeom prst="rect">
+            <a:avLst/>
+          </a:prstGeom>
+          <a:noFill/>
+        </p:spPr>
+        <p:txBody>
+          <a:bodyPr wrap="square" anchor="ctr" lIns="0" rIns="0" tIns="0" bIns="0">
+            <a:spAutoFit/>
+          </a:bodyPr>
+          <a:lstStyle/>
+          <a:p>
+            <a:pPr algn="ctr">
+              <a:lnSpc>
+                <a:spcPct val="95000"/>
+              </a:lnSpc>
+              <a:spcAft>
+                <a:spcPts val="100"/>
+              </a:spcAft>
+            </a:pPr>
+            <a:r>
+              <a:rPr sz="650" b="1" i="0">
+                <a:solidFill>
+                  <a:srgbClr val="1A1A1C"/>
+                </a:solidFill>
+                <a:latin typeface="Arial"/>
+              </a:rPr>
+              <a:t>Cautious Commuters</a:t>
+            </a:r>
+          </a:p>
+          <a:p>
+            <a:pPr algn="ctr"/>
+            <a:r>
+              <a:rPr sz="800" b="1" i="0">
+                <a:solidFill>
+                  <a:srgbClr val="1A1A1C"/>
+                </a:solidFill>
+                <a:latin typeface="Arial"/>
+              </a:rPr>
+              <a:t>8%</a:t>
+            </a:r>
+          </a:p>
+        </p:txBody>
+      </p:sp>
+      <p:sp>
+        <p:nvSpPr>
+          <p:cNvPr id="30" name="Oval 29"/>
+          <p:cNvSpPr/>
+          <p:nvPr/>
+        </p:nvSpPr>
+        <p:spPr>
+          <a:xfrm>
+            <a:off x="3781044" y="3591306"/>
+            <a:ext cx="859536" cy="859536"/>
+          </a:xfrm>
+          <a:prstGeom prst="ellipse">
+            <a:avLst/>
+          </a:prstGeom>
+          <a:solidFill>
+            <a:srgbClr val="4CB18E"/>
+          </a:solidFill>
+          <a:ln>
+            <a:noFill/>
+          </a:ln>
+          <a:effectLst/>
+        </p:spPr>
+        <p:style>
+          <a:lnRef idx="1">
+            <a:schemeClr val="accent1"/>
+          </a:lnRef>
+          <a:fillRef idx="3">
+            <a:schemeClr val="accent1"/>
+          </a:fillRef>
+          <a:effectRef idx="2">
+            <a:schemeClr val="accent1"/>
+          </a:effectRef>
+          <a:fontRef idx="minor">
+            <a:schemeClr val="lt1"/>
+          </a:fontRef>
+        </p:style>
+        <p:txBody>
+          <a:bodyPr rtlCol="0" anchor="ctr"/>
+          <a:lstStyle/>
+          <a:p>
+            <a:pPr algn="ctr"/>
+          </a:p>
+        </p:txBody>
+      </p:sp>
+      <p:sp>
+        <p:nvSpPr>
+          <p:cNvPr id="31" name="TextBox 30"/>
+          <p:cNvSpPr txBox="1"/>
+          <p:nvPr/>
+        </p:nvSpPr>
+        <p:spPr>
+          <a:xfrm>
+            <a:off x="3781044" y="3627882"/>
+            <a:ext cx="859536" cy="786384"/>
+          </a:xfrm>
+          <a:prstGeom prst="rect">
+            <a:avLst/>
+          </a:prstGeom>
+          <a:noFill/>
+        </p:spPr>
+        <p:txBody>
+          <a:bodyPr wrap="square" anchor="ctr" lIns="0" rIns="0" tIns="0" bIns="0">
+            <a:spAutoFit/>
+          </a:bodyPr>
+          <a:lstStyle/>
+          <a:p>
+            <a:pPr algn="ctr">
+              <a:lnSpc>
+                <a:spcPct val="95000"/>
+              </a:lnSpc>
+              <a:spcAft>
+                <a:spcPts val="100"/>
+              </a:spcAft>
+            </a:pPr>
+            <a:r>
+              <a:rPr sz="650" b="1" i="0">
+                <a:solidFill>
+                  <a:srgbClr val="FFFFFF"/>
+                </a:solidFill>
+                <a:latin typeface="Arial"/>
+              </a:rPr>
+              <a:t>Basic Drivers</a:t>
+            </a:r>
+          </a:p>
+          <a:p>
+            <a:pPr algn="ctr"/>
+            <a:r>
+              <a:rPr sz="800" b="1" i="0">
+                <a:solidFill>
+                  <a:srgbClr val="FFFFFF"/>
+                </a:solidFill>
+                <a:latin typeface="Arial"/>
+              </a:rPr>
+              <a:t>15%</a:t>
+            </a:r>
+          </a:p>
+        </p:txBody>
+      </p:sp>
+      <p:sp>
+        <p:nvSpPr>
+          <p:cNvPr id="32" name="Oval 31"/>
+          <p:cNvSpPr/>
+          <p:nvPr/>
+        </p:nvSpPr>
+        <p:spPr>
+          <a:xfrm>
+            <a:off x="5183734" y="3841852"/>
+            <a:ext cx="833932" cy="833932"/>
+          </a:xfrm>
+          <a:prstGeom prst="ellipse">
+            <a:avLst/>
+          </a:prstGeom>
+          <a:solidFill>
+            <a:srgbClr val="9EC13B"/>
+          </a:solidFill>
+          <a:ln>
+            <a:noFill/>
+          </a:ln>
+          <a:effectLst/>
+        </p:spPr>
+        <p:style>
+          <a:lnRef idx="1">
+            <a:schemeClr val="accent1"/>
+          </a:lnRef>
+          <a:fillRef idx="3">
+            <a:schemeClr val="accent1"/>
+          </a:fillRef>
+          <a:effectRef idx="2">
+            <a:schemeClr val="accent1"/>
+          </a:effectRef>
+          <a:fontRef idx="minor">
+            <a:schemeClr val="lt1"/>
+          </a:fontRef>
+        </p:style>
+        <p:txBody>
+          <a:bodyPr rtlCol="0" anchor="ctr"/>
+          <a:lstStyle/>
+          <a:p>
+            <a:pPr algn="ctr"/>
+          </a:p>
+        </p:txBody>
+      </p:sp>
+      <p:sp>
+        <p:nvSpPr>
+          <p:cNvPr id="33" name="TextBox 32"/>
+          <p:cNvSpPr txBox="1"/>
+          <p:nvPr/>
+        </p:nvSpPr>
+        <p:spPr>
+          <a:xfrm>
+            <a:off x="5183734" y="3878428"/>
+            <a:ext cx="833932" cy="760780"/>
+          </a:xfrm>
+          <a:prstGeom prst="rect">
+            <a:avLst/>
+          </a:prstGeom>
+          <a:noFill/>
+        </p:spPr>
+        <p:txBody>
+          <a:bodyPr wrap="square" anchor="ctr" lIns="0" rIns="0" tIns="0" bIns="0">
+            <a:spAutoFit/>
+          </a:bodyPr>
+          <a:lstStyle/>
+          <a:p>
+            <a:pPr algn="ctr">
+              <a:lnSpc>
+                <a:spcPct val="95000"/>
+              </a:lnSpc>
+              <a:spcAft>
+                <a:spcPts val="100"/>
+              </a:spcAft>
+            </a:pPr>
+            <a:r>
+              <a:rPr sz="650" b="1" i="0">
+                <a:solidFill>
+                  <a:srgbClr val="1A1A1C"/>
+                </a:solidFill>
+                <a:latin typeface="Arial"/>
+              </a:rPr>
+              <a:t>Proud Workhorses</a:t>
+            </a:r>
+          </a:p>
+          <a:p>
+            <a:pPr algn="ctr"/>
+            <a:r>
+              <a:rPr sz="800" b="1" i="0">
+                <a:solidFill>
+                  <a:srgbClr val="1A1A1C"/>
+                </a:solidFill>
+                <a:latin typeface="Arial"/>
+              </a:rPr>
+              <a:t>14%</a:t>
+            </a:r>
+          </a:p>
+        </p:txBody>
+      </p:sp>
+      <p:sp>
+        <p:nvSpPr>
+          <p:cNvPr id="34" name="Oval 33"/>
+          <p:cNvSpPr/>
+          <p:nvPr/>
+        </p:nvSpPr>
+        <p:spPr>
+          <a:xfrm>
+            <a:off x="6637630" y="3489808"/>
+            <a:ext cx="705916" cy="705916"/>
+          </a:xfrm>
+          <a:prstGeom prst="ellipse">
+            <a:avLst/>
+          </a:prstGeom>
+          <a:solidFill>
+            <a:srgbClr val="C96E8E"/>
+          </a:solidFill>
+          <a:ln>
+            <a:noFill/>
+          </a:ln>
+          <a:effectLst/>
+        </p:spPr>
+        <p:style>
+          <a:lnRef idx="1">
+            <a:schemeClr val="accent1"/>
+          </a:lnRef>
+          <a:fillRef idx="3">
+            <a:schemeClr val="accent1"/>
+          </a:fillRef>
+          <a:effectRef idx="2">
+            <a:schemeClr val="accent1"/>
+          </a:effectRef>
+          <a:fontRef idx="minor">
+            <a:schemeClr val="lt1"/>
+          </a:fontRef>
+        </p:style>
+        <p:txBody>
+          <a:bodyPr rtlCol="0" anchor="ctr"/>
+          <a:lstStyle/>
+          <a:p>
+            <a:pPr algn="ctr"/>
+          </a:p>
+        </p:txBody>
+      </p:sp>
+      <p:sp>
+        <p:nvSpPr>
+          <p:cNvPr id="35" name="TextBox 34"/>
+          <p:cNvSpPr txBox="1"/>
+          <p:nvPr/>
+        </p:nvSpPr>
+        <p:spPr>
+          <a:xfrm>
+            <a:off x="6637630" y="3526384"/>
+            <a:ext cx="705916" cy="632764"/>
+          </a:xfrm>
+          <a:prstGeom prst="rect">
+            <a:avLst/>
+          </a:prstGeom>
+          <a:noFill/>
+        </p:spPr>
+        <p:txBody>
+          <a:bodyPr wrap="square" anchor="ctr" lIns="0" rIns="0" tIns="0" bIns="0">
+            <a:spAutoFit/>
+          </a:bodyPr>
+          <a:lstStyle/>
+          <a:p>
+            <a:pPr algn="ctr">
+              <a:lnSpc>
+                <a:spcPct val="95000"/>
+              </a:lnSpc>
+              <a:spcAft>
+                <a:spcPts val="100"/>
+              </a:spcAft>
+            </a:pPr>
+            <a:r>
+              <a:rPr sz="650" b="1" i="0">
+                <a:solidFill>
+                  <a:srgbClr val="FFFFFF"/>
+                </a:solidFill>
+                <a:latin typeface="Arial"/>
+              </a:rPr>
+              <a:t>Upscale Traditionalists</a:t>
+            </a:r>
+          </a:p>
+          <a:p>
+            <a:pPr algn="ctr"/>
+            <a:r>
+              <a:rPr sz="800" b="1" i="0">
+                <a:solidFill>
+                  <a:srgbClr val="FFFFFF"/>
+                </a:solidFill>
+                <a:latin typeface="Arial"/>
+              </a:rPr>
+              <a:t>9%</a:t>
+            </a:r>
+          </a:p>
+        </p:txBody>
+      </p:sp>
+      <p:sp>
+        <p:nvSpPr>
+          <p:cNvPr id="36" name="Oval 35"/>
+          <p:cNvSpPr/>
+          <p:nvPr/>
+        </p:nvSpPr>
+        <p:spPr>
+          <a:xfrm>
+            <a:off x="7680046" y="3638398"/>
+            <a:ext cx="705916" cy="705916"/>
+          </a:xfrm>
+          <a:prstGeom prst="ellipse">
+            <a:avLst/>
+          </a:prstGeom>
+          <a:solidFill>
+            <a:srgbClr val="2E52A0"/>
+          </a:solidFill>
+          <a:ln>
+            <a:noFill/>
+          </a:ln>
+          <a:effectLst/>
+        </p:spPr>
+        <p:style>
+          <a:lnRef idx="1">
+            <a:schemeClr val="accent1"/>
+          </a:lnRef>
+          <a:fillRef idx="3">
+            <a:schemeClr val="accent1"/>
+          </a:fillRef>
+          <a:effectRef idx="2">
+            <a:schemeClr val="accent1"/>
+          </a:effectRef>
+          <a:fontRef idx="minor">
+            <a:schemeClr val="lt1"/>
+          </a:fontRef>
+        </p:style>
+        <p:txBody>
+          <a:bodyPr rtlCol="0" anchor="ctr"/>
+          <a:lstStyle/>
+          <a:p>
+            <a:pPr algn="ctr"/>
+          </a:p>
+        </p:txBody>
+      </p:sp>
+      <p:sp>
+        <p:nvSpPr>
+          <p:cNvPr id="37" name="TextBox 36"/>
+          <p:cNvSpPr txBox="1"/>
+          <p:nvPr/>
+        </p:nvSpPr>
+        <p:spPr>
+          <a:xfrm>
+            <a:off x="7680046" y="3674974"/>
+            <a:ext cx="705916" cy="632764"/>
+          </a:xfrm>
+          <a:prstGeom prst="rect">
+            <a:avLst/>
+          </a:prstGeom>
+          <a:noFill/>
+        </p:spPr>
+        <p:txBody>
+          <a:bodyPr wrap="square" anchor="ctr" lIns="0" rIns="0" tIns="0" bIns="0">
+            <a:spAutoFit/>
+          </a:bodyPr>
+          <a:lstStyle/>
+          <a:p>
+            <a:pPr algn="ctr">
+              <a:lnSpc>
+                <a:spcPct val="95000"/>
+              </a:lnSpc>
+              <a:spcAft>
+                <a:spcPts val="100"/>
+              </a:spcAft>
+            </a:pPr>
+            <a:r>
+              <a:rPr sz="650" b="1" i="0">
+                <a:solidFill>
+                  <a:srgbClr val="FFFFFF"/>
+                </a:solidFill>
+                <a:latin typeface="Arial"/>
+              </a:rPr>
+              <a:t>Empowered Enthusiasts</a:t>
+            </a:r>
+          </a:p>
+          <a:p>
+            <a:pPr algn="ctr"/>
+            <a:r>
+              <a:rPr sz="800" b="1" i="0">
+                <a:solidFill>
+                  <a:srgbClr val="FFFFFF"/>
+                </a:solidFill>
+                <a:latin typeface="Arial"/>
+              </a:rPr>
+              <a:t>9%</a:t>
+            </a:r>
+          </a:p>
+        </p:txBody>
+      </p:sp>
+      <p:sp>
+        <p:nvSpPr>
+          <p:cNvPr id="38" name="Rounded Rectangle 37"/>
+          <p:cNvSpPr/>
+          <p:nvPr/>
+        </p:nvSpPr>
+        <p:spPr>
+          <a:xfrm>
+            <a:off x="4809744" y="2347722"/>
+            <a:ext cx="713232" cy="256032"/>
+          </a:xfrm>
+          <a:prstGeom prst="roundRect">
+            <a:avLst/>
+          </a:prstGeom>
+          <a:solidFill>
+            <a:srgbClr val="FFFFFF"/>
+          </a:solidFill>
+          <a:ln w="6350">
+            <a:solidFill>
+              <a:srgbClr val="868B94"/>
+            </a:solidFill>
+          </a:ln>
+          <a:effectLst/>
+        </p:spPr>
+        <p:style>
+          <a:lnRef idx="1">
+            <a:schemeClr val="accent1"/>
+          </a:lnRef>
+          <a:fillRef idx="3">
+            <a:schemeClr val="accent1"/>
+          </a:fillRef>
+          <a:effectRef idx="2">
+            <a:schemeClr val="accent1"/>
+          </a:effectRef>
+          <a:fontRef idx="minor">
+            <a:schemeClr val="lt1"/>
+          </a:fontRef>
+        </p:style>
+        <p:txBody>
+          <a:bodyPr rtlCol="0" anchor="ctr"/>
+          <a:lstStyle/>
+          <a:p>
+            <a:pPr algn="ctr"/>
+          </a:p>
+        </p:txBody>
+      </p:sp>
+      <p:sp>
+        <p:nvSpPr>
+          <p:cNvPr id="39" name="TextBox 38"/>
+          <p:cNvSpPr txBox="1"/>
+          <p:nvPr/>
+        </p:nvSpPr>
+        <p:spPr>
+          <a:xfrm>
+            <a:off x="4809744" y="2347722"/>
+            <a:ext cx="713232" cy="256032"/>
+          </a:xfrm>
+          <a:prstGeom prst="rect">
+            <a:avLst/>
+          </a:prstGeom>
+          <a:noFill/>
+        </p:spPr>
+        <p:txBody>
+          <a:bodyPr wrap="square" anchor="ctr" lIns="0" rIns="0" tIns="0" bIns="0">
+            <a:spAutoFit/>
+          </a:bodyPr>
+          <a:lstStyle/>
+          <a:p>
+            <a:pPr algn="ctr"/>
+            <a:r>
+              <a:rPr sz="850" b="1" i="0" spc="50">
+                <a:solidFill>
+                  <a:srgbClr val="1A1A1C"/>
+                </a:solidFill>
+                <a:latin typeface="Arial"/>
+              </a:rPr>
+              <a:t>Honda</a:t>
+            </a:r>
+          </a:p>
+        </p:txBody>
+      </p:sp>
+      <p:sp>
+        <p:nvSpPr>
+          <p:cNvPr id="40" name="Rounded Rectangle 39"/>
+          <p:cNvSpPr/>
+          <p:nvPr/>
+        </p:nvSpPr>
+        <p:spPr>
+          <a:xfrm>
+            <a:off x="3680460" y="2942082"/>
+            <a:ext cx="713232" cy="256032"/>
+          </a:xfrm>
+          <a:prstGeom prst="roundRect">
+            <a:avLst/>
+          </a:prstGeom>
+          <a:solidFill>
+            <a:srgbClr val="FFFFFF"/>
+          </a:solidFill>
+          <a:ln w="6350">
+            <a:solidFill>
+              <a:srgbClr val="868B94"/>
+            </a:solidFill>
+          </a:ln>
+          <a:effectLst/>
+        </p:spPr>
+        <p:style>
+          <a:lnRef idx="1">
+            <a:schemeClr val="accent1"/>
+          </a:lnRef>
+          <a:fillRef idx="3">
+            <a:schemeClr val="accent1"/>
+          </a:fillRef>
+          <a:effectRef idx="2">
+            <a:schemeClr val="accent1"/>
+          </a:effectRef>
+          <a:fontRef idx="minor">
+            <a:schemeClr val="lt1"/>
+          </a:fontRef>
+        </p:style>
+        <p:txBody>
+          <a:bodyPr rtlCol="0" anchor="ctr"/>
+          <a:lstStyle/>
+          <a:p>
+            <a:pPr algn="ctr"/>
+          </a:p>
+        </p:txBody>
+      </p:sp>
+      <p:sp>
+        <p:nvSpPr>
+          <p:cNvPr id="41" name="TextBox 40"/>
+          <p:cNvSpPr txBox="1"/>
+          <p:nvPr/>
+        </p:nvSpPr>
+        <p:spPr>
+          <a:xfrm>
+            <a:off x="3680460" y="2942082"/>
+            <a:ext cx="713232" cy="256032"/>
+          </a:xfrm>
+          <a:prstGeom prst="rect">
+            <a:avLst/>
+          </a:prstGeom>
+          <a:noFill/>
+        </p:spPr>
+        <p:txBody>
+          <a:bodyPr wrap="square" anchor="ctr" lIns="0" rIns="0" tIns="0" bIns="0">
+            <a:spAutoFit/>
+          </a:bodyPr>
+          <a:lstStyle/>
+          <a:p>
+            <a:pPr algn="ctr"/>
+            <a:r>
+              <a:rPr sz="850" b="1" i="0" spc="50">
+                <a:solidFill>
+                  <a:srgbClr val="1A1A1C"/>
+                </a:solidFill>
+                <a:latin typeface="Arial"/>
+              </a:rPr>
+              <a:t>Hyundai</a:t>
+            </a:r>
+          </a:p>
+        </p:txBody>
+      </p:sp>
+      <p:sp>
+        <p:nvSpPr>
+          <p:cNvPr id="42" name="Rounded Rectangle 41"/>
+          <p:cNvSpPr/>
+          <p:nvPr/>
+        </p:nvSpPr>
+        <p:spPr>
+          <a:xfrm>
+            <a:off x="5120640" y="2878074"/>
+            <a:ext cx="960120" cy="384048"/>
+          </a:xfrm>
+          <a:prstGeom prst="roundRect">
+            <a:avLst/>
+          </a:prstGeom>
+          <a:solidFill>
+            <a:srgbClr val="FBF2C4"/>
+          </a:solidFill>
+          <a:ln w="15875">
+            <a:solidFill>
+              <a:srgbClr val="1B2A4A"/>
+            </a:solidFill>
+          </a:ln>
+          <a:effectLst/>
+        </p:spPr>
+        <p:style>
+          <a:lnRef idx="1">
+            <a:schemeClr val="accent1"/>
+          </a:lnRef>
+          <a:fillRef idx="3">
+            <a:schemeClr val="accent1"/>
+          </a:fillRef>
+          <a:effectRef idx="2">
+            <a:schemeClr val="accent1"/>
+          </a:effectRef>
+          <a:fontRef idx="minor">
+            <a:schemeClr val="lt1"/>
+          </a:fontRef>
+        </p:style>
+        <p:txBody>
+          <a:bodyPr rtlCol="0" anchor="ctr"/>
+          <a:lstStyle/>
+          <a:p>
+            <a:pPr algn="ctr"/>
+          </a:p>
+        </p:txBody>
+      </p:sp>
+      <p:sp>
+        <p:nvSpPr>
+          <p:cNvPr id="43" name="TextBox 42"/>
+          <p:cNvSpPr txBox="1"/>
+          <p:nvPr/>
+        </p:nvSpPr>
+        <p:spPr>
+          <a:xfrm>
+            <a:off x="5120640" y="2878074"/>
+            <a:ext cx="960120" cy="384048"/>
+          </a:xfrm>
+          <a:prstGeom prst="rect">
+            <a:avLst/>
+          </a:prstGeom>
+          <a:noFill/>
+        </p:spPr>
+        <p:txBody>
+          <a:bodyPr wrap="square" anchor="ctr" lIns="0" rIns="0" tIns="0" bIns="0">
+            <a:spAutoFit/>
+          </a:bodyPr>
+          <a:lstStyle/>
+          <a:p>
+            <a:pPr algn="ctr"/>
+            <a:r>
+              <a:rPr sz="1100" b="1" i="0" spc="150">
+                <a:solidFill>
+                  <a:srgbClr val="1B2A4A"/>
+                </a:solidFill>
+                <a:latin typeface="Arial"/>
+              </a:rPr>
+              <a:t>CHRYSLER</a:t>
+            </a:r>
+          </a:p>
+        </p:txBody>
+      </p:sp>
+      <p:sp>
+        <p:nvSpPr>
+          <p:cNvPr id="44" name="Rounded Rectangle 43"/>
+          <p:cNvSpPr/>
+          <p:nvPr/>
+        </p:nvSpPr>
+        <p:spPr>
+          <a:xfrm>
+            <a:off x="4201668" y="3328416"/>
+            <a:ext cx="713232" cy="256032"/>
+          </a:xfrm>
+          <a:prstGeom prst="roundRect">
+            <a:avLst/>
+          </a:prstGeom>
+          <a:solidFill>
+            <a:srgbClr val="FFFFFF"/>
+          </a:solidFill>
+          <a:ln w="6350">
+            <a:solidFill>
+              <a:srgbClr val="868B94"/>
+            </a:solidFill>
+          </a:ln>
+          <a:effectLst/>
+        </p:spPr>
+        <p:style>
+          <a:lnRef idx="1">
+            <a:schemeClr val="accent1"/>
+          </a:lnRef>
+          <a:fillRef idx="3">
+            <a:schemeClr val="accent1"/>
+          </a:fillRef>
+          <a:effectRef idx="2">
+            <a:schemeClr val="accent1"/>
+          </a:effectRef>
+          <a:fontRef idx="minor">
+            <a:schemeClr val="lt1"/>
+          </a:fontRef>
+        </p:style>
+        <p:txBody>
+          <a:bodyPr rtlCol="0" anchor="ctr"/>
+          <a:lstStyle/>
+          <a:p>
+            <a:pPr algn="ctr"/>
+          </a:p>
+        </p:txBody>
+      </p:sp>
+      <p:sp>
+        <p:nvSpPr>
+          <p:cNvPr id="45" name="TextBox 44"/>
+          <p:cNvSpPr txBox="1"/>
+          <p:nvPr/>
+        </p:nvSpPr>
+        <p:spPr>
+          <a:xfrm>
+            <a:off x="4201668" y="3328416"/>
+            <a:ext cx="713232" cy="256032"/>
+          </a:xfrm>
+          <a:prstGeom prst="rect">
+            <a:avLst/>
+          </a:prstGeom>
+          <a:noFill/>
+        </p:spPr>
+        <p:txBody>
+          <a:bodyPr wrap="square" anchor="ctr" lIns="0" rIns="0" tIns="0" bIns="0">
+            <a:spAutoFit/>
+          </a:bodyPr>
+          <a:lstStyle/>
+          <a:p>
+            <a:pPr algn="ctr"/>
+            <a:r>
+              <a:rPr sz="850" b="1" i="0" spc="50">
+                <a:solidFill>
+                  <a:srgbClr val="1A1A1C"/>
+                </a:solidFill>
+                <a:latin typeface="Arial"/>
+              </a:rPr>
+              <a:t>Kia</a:t>
+            </a:r>
+          </a:p>
+        </p:txBody>
+      </p:sp>
+      <p:sp>
+        <p:nvSpPr>
+          <p:cNvPr id="46" name="Rounded Rectangle 45"/>
+          <p:cNvSpPr/>
+          <p:nvPr/>
+        </p:nvSpPr>
+        <p:spPr>
+          <a:xfrm>
+            <a:off x="2638044" y="3655314"/>
+            <a:ext cx="713232" cy="256032"/>
+          </a:xfrm>
+          <a:prstGeom prst="roundRect">
+            <a:avLst/>
+          </a:prstGeom>
+          <a:solidFill>
+            <a:srgbClr val="FFFFFF"/>
+          </a:solidFill>
+          <a:ln w="6350">
+            <a:solidFill>
+              <a:srgbClr val="868B94"/>
+            </a:solidFill>
+          </a:ln>
+          <a:effectLst/>
+        </p:spPr>
+        <p:style>
+          <a:lnRef idx="1">
+            <a:schemeClr val="accent1"/>
+          </a:lnRef>
+          <a:fillRef idx="3">
+            <a:schemeClr val="accent1"/>
+          </a:fillRef>
+          <a:effectRef idx="2">
+            <a:schemeClr val="accent1"/>
+          </a:effectRef>
+          <a:fontRef idx="minor">
+            <a:schemeClr val="lt1"/>
+          </a:fontRef>
+        </p:style>
+        <p:txBody>
+          <a:bodyPr rtlCol="0" anchor="ctr"/>
+          <a:lstStyle/>
+          <a:p>
+            <a:pPr algn="ctr"/>
+          </a:p>
+        </p:txBody>
+      </p:sp>
+      <p:sp>
+        <p:nvSpPr>
+          <p:cNvPr id="47" name="TextBox 46"/>
+          <p:cNvSpPr txBox="1"/>
+          <p:nvPr/>
+        </p:nvSpPr>
+        <p:spPr>
+          <a:xfrm>
+            <a:off x="2638044" y="3655314"/>
+            <a:ext cx="713232" cy="256032"/>
+          </a:xfrm>
+          <a:prstGeom prst="rect">
+            <a:avLst/>
+          </a:prstGeom>
+          <a:noFill/>
+        </p:spPr>
+        <p:txBody>
+          <a:bodyPr wrap="square" anchor="ctr" lIns="0" rIns="0" tIns="0" bIns="0">
+            <a:spAutoFit/>
+          </a:bodyPr>
+          <a:lstStyle/>
+          <a:p>
+            <a:pPr algn="ctr"/>
+            <a:r>
+              <a:rPr sz="850" b="1" i="0" spc="50">
+                <a:solidFill>
+                  <a:srgbClr val="1A1A1C"/>
+                </a:solidFill>
+                <a:latin typeface="Arial"/>
+              </a:rPr>
+              <a:t>Toyota</a:t>
+            </a:r>
+          </a:p>
+        </p:txBody>
+      </p:sp>
+      <p:sp>
+        <p:nvSpPr>
+          <p:cNvPr id="48" name="Rounded Rectangle 47"/>
+          <p:cNvSpPr/>
+          <p:nvPr/>
+        </p:nvSpPr>
+        <p:spPr>
+          <a:xfrm>
+            <a:off x="6720840" y="3150108"/>
+            <a:ext cx="713232" cy="256032"/>
+          </a:xfrm>
+          <a:prstGeom prst="roundRect">
+            <a:avLst/>
+          </a:prstGeom>
+          <a:solidFill>
+            <a:srgbClr val="FFFFFF"/>
+          </a:solidFill>
+          <a:ln w="6350">
+            <a:solidFill>
+              <a:srgbClr val="868B94"/>
+            </a:solidFill>
+          </a:ln>
+          <a:effectLst/>
+        </p:spPr>
+        <p:style>
+          <a:lnRef idx="1">
+            <a:schemeClr val="accent1"/>
+          </a:lnRef>
+          <a:fillRef idx="3">
+            <a:schemeClr val="accent1"/>
+          </a:fillRef>
+          <a:effectRef idx="2">
+            <a:schemeClr val="accent1"/>
+          </a:effectRef>
+          <a:fontRef idx="minor">
+            <a:schemeClr val="lt1"/>
+          </a:fontRef>
+        </p:style>
+        <p:txBody>
+          <a:bodyPr rtlCol="0" anchor="ctr"/>
+          <a:lstStyle/>
+          <a:p>
+            <a:pPr algn="ctr"/>
+          </a:p>
+        </p:txBody>
+      </p:sp>
+      <p:sp>
+        <p:nvSpPr>
+          <p:cNvPr id="49" name="TextBox 48"/>
+          <p:cNvSpPr txBox="1"/>
+          <p:nvPr/>
+        </p:nvSpPr>
+        <p:spPr>
+          <a:xfrm>
+            <a:off x="6720840" y="3150108"/>
+            <a:ext cx="713232" cy="256032"/>
+          </a:xfrm>
+          <a:prstGeom prst="rect">
+            <a:avLst/>
+          </a:prstGeom>
+          <a:noFill/>
+        </p:spPr>
+        <p:txBody>
+          <a:bodyPr wrap="square" anchor="ctr" lIns="0" rIns="0" tIns="0" bIns="0">
+            <a:spAutoFit/>
+          </a:bodyPr>
+          <a:lstStyle/>
+          <a:p>
+            <a:pPr algn="ctr"/>
+            <a:r>
+              <a:rPr sz="850" b="1" i="0" spc="50">
+                <a:solidFill>
+                  <a:srgbClr val="1A1A1C"/>
+                </a:solidFill>
+                <a:latin typeface="Arial"/>
+              </a:rPr>
+              <a:t>Ford</a:t>
+            </a:r>
+          </a:p>
+        </p:txBody>
+      </p:sp>
+      <p:sp>
+        <p:nvSpPr>
+          <p:cNvPr id="50" name="Rounded Rectangle 49"/>
+          <p:cNvSpPr/>
+          <p:nvPr/>
+        </p:nvSpPr>
+        <p:spPr>
+          <a:xfrm>
+            <a:off x="7763256" y="3150108"/>
+            <a:ext cx="713232" cy="256032"/>
+          </a:xfrm>
+          <a:prstGeom prst="roundRect">
+            <a:avLst/>
+          </a:prstGeom>
+          <a:solidFill>
+            <a:srgbClr val="FFFFFF"/>
+          </a:solidFill>
+          <a:ln w="6350">
+            <a:solidFill>
+              <a:srgbClr val="868B94"/>
+            </a:solidFill>
+          </a:ln>
+          <a:effectLst/>
+        </p:spPr>
+        <p:style>
+          <a:lnRef idx="1">
+            <a:schemeClr val="accent1"/>
+          </a:lnRef>
+          <a:fillRef idx="3">
+            <a:schemeClr val="accent1"/>
+          </a:fillRef>
+          <a:effectRef idx="2">
+            <a:schemeClr val="accent1"/>
+          </a:effectRef>
+          <a:fontRef idx="minor">
+            <a:schemeClr val="lt1"/>
+          </a:fontRef>
+        </p:style>
+        <p:txBody>
+          <a:bodyPr rtlCol="0" anchor="ctr"/>
+          <a:lstStyle/>
+          <a:p>
+            <a:pPr algn="ctr"/>
+          </a:p>
+        </p:txBody>
+      </p:sp>
+      <p:sp>
+        <p:nvSpPr>
+          <p:cNvPr id="51" name="TextBox 50"/>
+          <p:cNvSpPr txBox="1"/>
+          <p:nvPr/>
+        </p:nvSpPr>
+        <p:spPr>
+          <a:xfrm>
+            <a:off x="7763256" y="3150108"/>
+            <a:ext cx="713232" cy="256032"/>
+          </a:xfrm>
+          <a:prstGeom prst="rect">
+            <a:avLst/>
+          </a:prstGeom>
+          <a:noFill/>
+        </p:spPr>
+        <p:txBody>
+          <a:bodyPr wrap="square" anchor="ctr" lIns="0" rIns="0" tIns="0" bIns="0">
+            <a:spAutoFit/>
+          </a:bodyPr>
+          <a:lstStyle/>
+          <a:p>
+            <a:pPr algn="ctr"/>
+            <a:r>
+              <a:rPr sz="850" b="1" i="0" spc="50">
+                <a:solidFill>
+                  <a:srgbClr val="1A1A1C"/>
+                </a:solidFill>
+                <a:latin typeface="Arial"/>
+              </a:rPr>
+              <a:t>Jeep</a:t>
+            </a:r>
+          </a:p>
+        </p:txBody>
+      </p:sp>
+      <p:sp>
+        <p:nvSpPr>
+          <p:cNvPr id="52" name="Rounded Rectangle 51"/>
+          <p:cNvSpPr/>
+          <p:nvPr/>
+        </p:nvSpPr>
+        <p:spPr>
+          <a:xfrm>
+            <a:off x="7328916" y="3566160"/>
+            <a:ext cx="713232" cy="256032"/>
+          </a:xfrm>
+          <a:prstGeom prst="roundRect">
+            <a:avLst/>
+          </a:prstGeom>
+          <a:solidFill>
+            <a:srgbClr val="FFFFFF"/>
+          </a:solidFill>
+          <a:ln w="6350">
+            <a:solidFill>
+              <a:srgbClr val="868B94"/>
+            </a:solidFill>
+          </a:ln>
+          <a:effectLst/>
+        </p:spPr>
+        <p:style>
+          <a:lnRef idx="1">
+            <a:schemeClr val="accent1"/>
+          </a:lnRef>
+          <a:fillRef idx="3">
+            <a:schemeClr val="accent1"/>
+          </a:fillRef>
+          <a:effectRef idx="2">
+            <a:schemeClr val="accent1"/>
+          </a:effectRef>
+          <a:fontRef idx="minor">
+            <a:schemeClr val="lt1"/>
+          </a:fontRef>
+        </p:style>
+        <p:txBody>
+          <a:bodyPr rtlCol="0" anchor="ctr"/>
+          <a:lstStyle/>
+          <a:p>
+            <a:pPr algn="ctr"/>
+          </a:p>
+        </p:txBody>
+      </p:sp>
+      <p:sp>
+        <p:nvSpPr>
+          <p:cNvPr id="53" name="TextBox 52"/>
+          <p:cNvSpPr txBox="1"/>
+          <p:nvPr/>
+        </p:nvSpPr>
+        <p:spPr>
+          <a:xfrm>
+            <a:off x="7328916" y="3566160"/>
+            <a:ext cx="713232" cy="256032"/>
+          </a:xfrm>
+          <a:prstGeom prst="rect">
+            <a:avLst/>
+          </a:prstGeom>
+          <a:noFill/>
+        </p:spPr>
+        <p:txBody>
+          <a:bodyPr wrap="square" anchor="ctr" lIns="0" rIns="0" tIns="0" bIns="0">
+            <a:spAutoFit/>
+          </a:bodyPr>
+          <a:lstStyle/>
+          <a:p>
+            <a:pPr algn="ctr"/>
+            <a:r>
+              <a:rPr sz="850" b="1" i="0" spc="50">
+                <a:solidFill>
+                  <a:srgbClr val="1A1A1C"/>
+                </a:solidFill>
+                <a:latin typeface="Arial"/>
+              </a:rPr>
+              <a:t>Chevrolet</a:t>
+            </a:r>
+          </a:p>
+        </p:txBody>
+      </p:sp>
+      <p:sp>
+        <p:nvSpPr>
+          <p:cNvPr id="54" name="Rounded Rectangle 53"/>
+          <p:cNvSpPr/>
+          <p:nvPr/>
+        </p:nvSpPr>
+        <p:spPr>
+          <a:xfrm>
+            <a:off x="8284464" y="3566160"/>
+            <a:ext cx="713232" cy="256032"/>
+          </a:xfrm>
+          <a:prstGeom prst="roundRect">
+            <a:avLst/>
+          </a:prstGeom>
+          <a:solidFill>
+            <a:srgbClr val="FFFFFF"/>
+          </a:solidFill>
+          <a:ln w="6350">
+            <a:solidFill>
+              <a:srgbClr val="868B94"/>
+            </a:solidFill>
+          </a:ln>
+          <a:effectLst/>
+        </p:spPr>
+        <p:style>
+          <a:lnRef idx="1">
+            <a:schemeClr val="accent1"/>
+          </a:lnRef>
+          <a:fillRef idx="3">
+            <a:schemeClr val="accent1"/>
+          </a:fillRef>
+          <a:effectRef idx="2">
+            <a:schemeClr val="accent1"/>
+          </a:effectRef>
+          <a:fontRef idx="minor">
+            <a:schemeClr val="lt1"/>
+          </a:fontRef>
+        </p:style>
+        <p:txBody>
+          <a:bodyPr rtlCol="0" anchor="ctr"/>
+          <a:lstStyle/>
+          <a:p>
+            <a:pPr algn="ctr"/>
+          </a:p>
+        </p:txBody>
+      </p:sp>
+      <p:sp>
+        <p:nvSpPr>
+          <p:cNvPr id="55" name="TextBox 54"/>
+          <p:cNvSpPr txBox="1"/>
+          <p:nvPr/>
+        </p:nvSpPr>
+        <p:spPr>
+          <a:xfrm>
+            <a:off x="8284464" y="3566160"/>
+            <a:ext cx="713232" cy="256032"/>
+          </a:xfrm>
+          <a:prstGeom prst="rect">
+            <a:avLst/>
+          </a:prstGeom>
+          <a:noFill/>
+        </p:spPr>
+        <p:txBody>
+          <a:bodyPr wrap="square" anchor="ctr" lIns="0" rIns="0" tIns="0" bIns="0">
+            <a:spAutoFit/>
+          </a:bodyPr>
+          <a:lstStyle/>
+          <a:p>
+            <a:pPr algn="ctr"/>
+            <a:r>
+              <a:rPr sz="850" b="1" i="0" spc="50">
+                <a:solidFill>
+                  <a:srgbClr val="1A1A1C"/>
+                </a:solidFill>
+                <a:latin typeface="Arial"/>
+              </a:rPr>
+              <a:t>Dodge</a:t>
+            </a:r>
+          </a:p>
+        </p:txBody>
+      </p:sp>
+      <p:sp>
+        <p:nvSpPr>
+          <p:cNvPr id="56" name="Rounded Rectangle 55"/>
+          <p:cNvSpPr/>
+          <p:nvPr/>
+        </p:nvSpPr>
+        <p:spPr>
+          <a:xfrm>
+            <a:off x="6373368" y="4101084"/>
+            <a:ext cx="713232" cy="256032"/>
+          </a:xfrm>
+          <a:prstGeom prst="roundRect">
+            <a:avLst/>
+          </a:prstGeom>
+          <a:solidFill>
+            <a:srgbClr val="FFFFFF"/>
+          </a:solidFill>
+          <a:ln w="6350">
+            <a:solidFill>
+              <a:srgbClr val="868B94"/>
+            </a:solidFill>
+          </a:ln>
+          <a:effectLst/>
+        </p:spPr>
+        <p:style>
+          <a:lnRef idx="1">
+            <a:schemeClr val="accent1"/>
+          </a:lnRef>
+          <a:fillRef idx="3">
+            <a:schemeClr val="accent1"/>
+          </a:fillRef>
+          <a:effectRef idx="2">
+            <a:schemeClr val="accent1"/>
+          </a:effectRef>
+          <a:fontRef idx="minor">
+            <a:schemeClr val="lt1"/>
+          </a:fontRef>
+        </p:style>
+        <p:txBody>
+          <a:bodyPr rtlCol="0" anchor="ctr"/>
+          <a:lstStyle/>
+          <a:p>
+            <a:pPr algn="ctr"/>
+          </a:p>
+        </p:txBody>
+      </p:sp>
+      <p:sp>
+        <p:nvSpPr>
+          <p:cNvPr id="57" name="TextBox 56"/>
+          <p:cNvSpPr txBox="1"/>
+          <p:nvPr/>
+        </p:nvSpPr>
+        <p:spPr>
+          <a:xfrm>
+            <a:off x="6373368" y="4101084"/>
+            <a:ext cx="713232" cy="256032"/>
+          </a:xfrm>
+          <a:prstGeom prst="rect">
+            <a:avLst/>
+          </a:prstGeom>
+          <a:noFill/>
+        </p:spPr>
+        <p:txBody>
+          <a:bodyPr wrap="square" anchor="ctr" lIns="0" rIns="0" tIns="0" bIns="0">
+            <a:spAutoFit/>
+          </a:bodyPr>
+          <a:lstStyle/>
+          <a:p>
+            <a:pPr algn="ctr"/>
+            <a:r>
+              <a:rPr sz="850" b="1" i="0" spc="50">
+                <a:solidFill>
+                  <a:srgbClr val="1A1A1C"/>
+                </a:solidFill>
+                <a:latin typeface="Arial"/>
+              </a:rPr>
+              <a:t>Ram</a:t>
+            </a:r>
+          </a:p>
+        </p:txBody>
+      </p:sp>
+      <p:sp>
+        <p:nvSpPr>
+          <p:cNvPr id="58" name="TextBox 57"/>
+          <p:cNvSpPr txBox="1"/>
+          <p:nvPr/>
+        </p:nvSpPr>
+        <p:spPr>
+          <a:xfrm>
+            <a:off x="2331720" y="5413248"/>
+            <a:ext cx="3423513" cy="228600"/>
+          </a:xfrm>
+          <a:prstGeom prst="rect">
+            <a:avLst/>
+          </a:prstGeom>
+          <a:noFill/>
+        </p:spPr>
+        <p:txBody>
+          <a:bodyPr wrap="square" anchor="t" lIns="0" rIns="0" tIns="0" bIns="0">
+            <a:spAutoFit/>
+          </a:bodyPr>
+          <a:lstStyle/>
+          <a:p>
+            <a:pPr algn="ctr"/>
+            <a:r>
+              <a:rPr sz="900" b="0" i="0">
+                <a:solidFill>
+                  <a:srgbClr val="868B94"/>
+                </a:solidFill>
+                <a:latin typeface="Arial"/>
+              </a:rPr>
+              <a:t>Practical</a:t>
+            </a:r>
+          </a:p>
+        </p:txBody>
+      </p:sp>
+      <p:sp>
+        <p:nvSpPr>
+          <p:cNvPr id="59" name="TextBox 58"/>
+          <p:cNvSpPr txBox="1"/>
+          <p:nvPr/>
+        </p:nvSpPr>
+        <p:spPr>
+          <a:xfrm>
+            <a:off x="5755233" y="5413248"/>
+            <a:ext cx="1331366" cy="228600"/>
+          </a:xfrm>
+          <a:prstGeom prst="rect">
+            <a:avLst/>
+          </a:prstGeom>
+          <a:noFill/>
+        </p:spPr>
+        <p:txBody>
+          <a:bodyPr wrap="square" anchor="t" lIns="0" rIns="0" tIns="0" bIns="0">
+            <a:spAutoFit/>
+          </a:bodyPr>
+          <a:lstStyle/>
+          <a:p>
+            <a:pPr algn="ctr"/>
+            <a:r>
+              <a:rPr sz="900" b="0" i="0">
+                <a:solidFill>
+                  <a:srgbClr val="868B94"/>
+                </a:solidFill>
+                <a:latin typeface="Arial"/>
+              </a:rPr>
+              <a:t>Emotional</a:t>
+            </a:r>
+          </a:p>
+        </p:txBody>
+      </p:sp>
+      <p:sp>
+        <p:nvSpPr>
+          <p:cNvPr id="60" name="TextBox 59"/>
+          <p:cNvSpPr txBox="1"/>
+          <p:nvPr/>
+        </p:nvSpPr>
+        <p:spPr>
+          <a:xfrm>
+            <a:off x="1097280" y="5669280"/>
+            <a:ext cx="1143000" cy="256032"/>
+          </a:xfrm>
+          <a:prstGeom prst="rect">
+            <a:avLst/>
+          </a:prstGeom>
+          <a:noFill/>
+        </p:spPr>
+        <p:txBody>
+          <a:bodyPr wrap="square" anchor="t" lIns="0" rIns="0" tIns="0" bIns="0">
+            <a:spAutoFit/>
+          </a:bodyPr>
+          <a:lstStyle/>
+          <a:p>
+            <a:pPr algn="r"/>
+            <a:r>
+              <a:rPr sz="1000" b="0" i="0">
+                <a:solidFill>
+                  <a:srgbClr val="1A1A1C"/>
+                </a:solidFill>
+                <a:latin typeface="Arial"/>
+              </a:rPr>
+              <a:t>Hyundai</a:t>
+            </a:r>
+          </a:p>
+        </p:txBody>
+      </p:sp>
+      <p:sp>
+        <p:nvSpPr>
+          <p:cNvPr id="61" name="Rectangle 60"/>
+          <p:cNvSpPr/>
+          <p:nvPr/>
+        </p:nvSpPr>
+        <p:spPr>
+          <a:xfrm>
+            <a:off x="2331720" y="5687568"/>
+            <a:ext cx="3423513" cy="219456"/>
+          </a:xfrm>
+          <a:prstGeom prst="rect">
             <a:avLst/>
           </a:prstGeom>
           <a:solidFill>
@@ -12639,14 +14825,58 @@
       </p:sp>
       <p:sp>
         <p:nvSpPr>
-          <p:cNvPr id="12" name="TextBox 11"/>
+          <p:cNvPr id="62" name="Rectangle 61"/>
+          <p:cNvSpPr/>
+          <p:nvPr/>
+        </p:nvSpPr>
+        <p:spPr>
+          <a:xfrm>
+            <a:off x="5755233" y="5687568"/>
+            <a:ext cx="1331366" cy="219456"/>
+          </a:xfrm>
+          <a:prstGeom prst="rect">
+            <a:avLst/>
+          </a:prstGeom>
+          <a:noFill/>
+          <a:ln w="9525">
+            <a:solidFill>
+              <a:srgbClr val="C8CCD2"/>
+            </a:solidFill>
+          </a:ln>
+          <a:effectLst/>
+        </p:spPr>
+        <p:style>
+          <a:lnRef idx="1">
+            <a:schemeClr val="accent1"/>
+          </a:lnRef>
+          <a:fillRef idx="3">
+            <a:schemeClr val="accent1"/>
+          </a:fillRef>
+          <a:effectRef idx="2">
+            <a:schemeClr val="accent1"/>
+          </a:effectRef>
+          <a:fontRef idx="minor">
+            <a:schemeClr val="lt1"/>
+          </a:fontRef>
+        </p:style>
+        <p:txBody>
+          <a:bodyPr rtlCol="0" anchor="ctr"/>
+          <a:lstStyle/>
+          <a:p>
+            <a:pPr algn="ctr"/>
+          </a:p>
+        </p:txBody>
+      </p:sp>
+      <p:sp>
+        <p:nvSpPr>
+          <p:cNvPr id="63" name="TextBox 62"/>
           <p:cNvSpPr txBox="1"/>
           <p:nvPr/>
         </p:nvSpPr>
         <p:spPr>
           <a:xfrm>
-            <a:off x="1681581" y="2721254"/>
-            <a:ext cx="1051560" cy="1051560"/>
+            <a:off x="2331720" y="5687568"/>
+            <a:ext cx="3313785" cy="219456"/>
           </a:xfrm>
           <a:prstGeom prst="rect">
             <a:avLst/>
@@ -12659,73 +14889,29 @@
           </a:bodyPr>
           <a:lstStyle/>
           <a:p>
-            <a:pPr algn="ctr"/>
-            <a:r>
-              <a:rPr sz="1050" b="1" i="0" spc="100">
+            <a:pPr algn="r"/>
+            <a:r>
+              <a:rPr sz="900" b="1" i="0">
                 <a:solidFill>
                   <a:srgbClr val="FFFFFF"/>
                 </a:solidFill>
                 <a:latin typeface="Arial"/>
               </a:rPr>
-              <a:t>CHRYSLER</a:t>
-            </a:r>
-          </a:p>
-        </p:txBody>
-      </p:sp>
-      <p:sp>
-        <p:nvSpPr>
-          <p:cNvPr id="13" name="Oval 12"/>
-          <p:cNvSpPr/>
-          <p:nvPr/>
-        </p:nvSpPr>
-        <p:spPr>
-          <a:xfrm>
-            <a:off x="4473244" y="3117189"/>
-            <a:ext cx="822960" cy="822960"/>
-          </a:xfrm>
-          <a:prstGeom prst="ellipse">
-            <a:avLst/>
-          </a:prstGeom>
-          <a:solidFill>
-            <a:srgbClr val="C41230"/>
-          </a:solidFill>
-          <a:ln>
-            <a:noFill/>
-          </a:ln>
-          <a:effectLst/>
-        </p:spPr>
-        <p:style>
-          <a:lnRef idx="1">
-            <a:schemeClr val="accent1"/>
-          </a:lnRef>
-          <a:fillRef idx="3">
-            <a:schemeClr val="accent1"/>
-          </a:fillRef>
-          <a:effectRef idx="2">
-            <a:schemeClr val="accent1"/>
-          </a:effectRef>
-          <a:fontRef idx="minor">
-            <a:schemeClr val="lt1"/>
-          </a:fontRef>
-        </p:style>
-        <p:txBody>
-          <a:bodyPr rtlCol="0" anchor="ctr"/>
-          <a:lstStyle/>
-          <a:p>
-            <a:pPr algn="ctr"/>
-          </a:p>
-        </p:txBody>
-      </p:sp>
-      <p:sp>
-        <p:nvSpPr>
-          <p:cNvPr id="14" name="TextBox 13"/>
+              <a:t>72%</a:t>
+            </a:r>
+          </a:p>
+        </p:txBody>
+      </p:sp>
+      <p:sp>
+        <p:nvSpPr>
+          <p:cNvPr id="64" name="TextBox 63"/>
           <p:cNvSpPr txBox="1"/>
           <p:nvPr/>
         </p:nvSpPr>
         <p:spPr>
           <a:xfrm>
-            <a:off x="4473244" y="3117189"/>
-            <a:ext cx="822960" cy="822960"/>
+            <a:off x="5846673" y="5687568"/>
+            <a:ext cx="1331366" cy="219456"/>
           </a:xfrm>
           <a:prstGeom prst="rect">
             <a:avLst/>
@@ -12738,187 +14924,29 @@
           </a:bodyPr>
           <a:lstStyle/>
           <a:p>
-            <a:pPr algn="ctr"/>
-            <a:r>
-              <a:rPr sz="950" b="1" i="0" spc="100">
-                <a:solidFill>
-                  <a:srgbClr val="FFFFFF"/>
+            <a:pPr algn="l"/>
+            <a:r>
+              <a:rPr sz="900" b="0" i="0">
+                <a:solidFill>
+                  <a:srgbClr val="868B94"/>
                 </a:solidFill>
                 <a:latin typeface="Arial"/>
               </a:rPr>
-              <a:t>DODGE</a:t>
-            </a:r>
-          </a:p>
-        </p:txBody>
-      </p:sp>
-      <p:sp>
-        <p:nvSpPr>
-          <p:cNvPr id="15" name="Oval 14"/>
-          <p:cNvSpPr/>
-          <p:nvPr/>
-        </p:nvSpPr>
-        <p:spPr>
-          <a:xfrm>
-            <a:off x="5086807" y="3856482"/>
-            <a:ext cx="822960" cy="822960"/>
-          </a:xfrm>
-          <a:prstGeom prst="ellipse">
-            <a:avLst/>
-          </a:prstGeom>
-          <a:solidFill>
-            <a:srgbClr val="3E4A33"/>
-          </a:solidFill>
-          <a:ln>
-            <a:noFill/>
-          </a:ln>
-          <a:effectLst/>
-        </p:spPr>
-        <p:style>
-          <a:lnRef idx="1">
-            <a:schemeClr val="accent1"/>
-          </a:lnRef>
-          <a:fillRef idx="3">
-            <a:schemeClr val="accent1"/>
-          </a:fillRef>
-          <a:effectRef idx="2">
-            <a:schemeClr val="accent1"/>
-          </a:effectRef>
-          <a:fontRef idx="minor">
-            <a:schemeClr val="lt1"/>
-          </a:fontRef>
-        </p:style>
-        <p:txBody>
-          <a:bodyPr rtlCol="0" anchor="ctr"/>
-          <a:lstStyle/>
-          <a:p>
-            <a:pPr algn="ctr"/>
-          </a:p>
-        </p:txBody>
-      </p:sp>
-      <p:sp>
-        <p:nvSpPr>
-          <p:cNvPr id="16" name="TextBox 15"/>
+              <a:t>28%</a:t>
+            </a:r>
+          </a:p>
+        </p:txBody>
+      </p:sp>
+      <p:sp>
+        <p:nvSpPr>
+          <p:cNvPr id="65" name="TextBox 64"/>
           <p:cNvSpPr txBox="1"/>
           <p:nvPr/>
         </p:nvSpPr>
         <p:spPr>
           <a:xfrm>
-            <a:off x="5086807" y="3856482"/>
-            <a:ext cx="822960" cy="822960"/>
-          </a:xfrm>
-          <a:prstGeom prst="rect">
-            <a:avLst/>
-          </a:prstGeom>
-          <a:noFill/>
-        </p:spPr>
-        <p:txBody>
-          <a:bodyPr wrap="square" anchor="ctr" lIns="0" rIns="0" tIns="0" bIns="0">
-            <a:spAutoFit/>
-          </a:bodyPr>
-          <a:lstStyle/>
-          <a:p>
-            <a:pPr algn="ctr"/>
-            <a:r>
-              <a:rPr sz="950" b="1" i="0" spc="100">
-                <a:solidFill>
-                  <a:srgbClr val="FFFFFF"/>
-                </a:solidFill>
-                <a:latin typeface="Arial"/>
-              </a:rPr>
-              <a:t>JEEP</a:t>
-            </a:r>
-          </a:p>
-        </p:txBody>
-      </p:sp>
-      <p:sp>
-        <p:nvSpPr>
-          <p:cNvPr id="17" name="Oval 16"/>
-          <p:cNvSpPr/>
-          <p:nvPr/>
-        </p:nvSpPr>
-        <p:spPr>
-          <a:xfrm>
-            <a:off x="4361688" y="4701387"/>
-            <a:ext cx="822960" cy="822960"/>
-          </a:xfrm>
-          <a:prstGeom prst="ellipse">
-            <a:avLst/>
-          </a:prstGeom>
-          <a:solidFill>
-            <a:srgbClr val="6E747C"/>
-          </a:solidFill>
-          <a:ln>
-            <a:noFill/>
-          </a:ln>
-          <a:effectLst/>
-        </p:spPr>
-        <p:style>
-          <a:lnRef idx="1">
-            <a:schemeClr val="accent1"/>
-          </a:lnRef>
-          <a:fillRef idx="3">
-            <a:schemeClr val="accent1"/>
-          </a:fillRef>
-          <a:effectRef idx="2">
-            <a:schemeClr val="accent1"/>
-          </a:effectRef>
-          <a:fontRef idx="minor">
-            <a:schemeClr val="lt1"/>
-          </a:fontRef>
-        </p:style>
-        <p:txBody>
-          <a:bodyPr rtlCol="0" anchor="ctr"/>
-          <a:lstStyle/>
-          <a:p>
-            <a:pPr algn="ctr"/>
-          </a:p>
-        </p:txBody>
-      </p:sp>
-      <p:sp>
-        <p:nvSpPr>
-          <p:cNvPr id="18" name="TextBox 17"/>
-          <p:cNvSpPr txBox="1"/>
-          <p:nvPr/>
-        </p:nvSpPr>
-        <p:spPr>
-          <a:xfrm>
-            <a:off x="4361688" y="4701387"/>
-            <a:ext cx="822960" cy="822960"/>
-          </a:xfrm>
-          <a:prstGeom prst="rect">
-            <a:avLst/>
-          </a:prstGeom>
-          <a:noFill/>
-        </p:spPr>
-        <p:txBody>
-          <a:bodyPr wrap="square" anchor="ctr" lIns="0" rIns="0" tIns="0" bIns="0">
-            <a:spAutoFit/>
-          </a:bodyPr>
-          <a:lstStyle/>
-          <a:p>
-            <a:pPr algn="ctr"/>
-            <a:r>
-              <a:rPr sz="950" b="1" i="0" spc="100">
-                <a:solidFill>
-                  <a:srgbClr val="FFFFFF"/>
-                </a:solidFill>
-                <a:latin typeface="Arial"/>
-              </a:rPr>
-              <a:t>RAM</a:t>
-            </a:r>
-          </a:p>
-        </p:txBody>
-      </p:sp>
-      <p:sp>
-        <p:nvSpPr>
-          <p:cNvPr id="19" name="TextBox 18"/>
-          <p:cNvSpPr txBox="1"/>
-          <p:nvPr/>
-        </p:nvSpPr>
-        <p:spPr>
-          <a:xfrm>
-            <a:off x="868680" y="6163056"/>
-            <a:ext cx="5577840" cy="274320"/>
+            <a:off x="1097280" y="5980176"/>
+            <a:ext cx="1143000" cy="256032"/>
           </a:xfrm>
           <a:prstGeom prst="rect">
             <a:avLst/>
@@ -12931,75 +14959,29 @@
           </a:bodyPr>
           <a:lstStyle/>
           <a:p>
-            <a:pPr algn="ctr"/>
-            <a:r>
-              <a:rPr sz="950" b="0" i="0">
-                <a:solidFill>
-                  <a:srgbClr val="868B94"/>
+            <a:pPr algn="r"/>
+            <a:r>
+              <a:rPr sz="1000" b="0" i="0">
+                <a:solidFill>
+                  <a:srgbClr val="1A1A1C"/>
                 </a:solidFill>
                 <a:latin typeface="Arial"/>
               </a:rPr>
-              <a:t>Stellantis buyers split 56% practical · 44% emotional</a:t>
-            </a:r>
-          </a:p>
-        </p:txBody>
-      </p:sp>
-      <p:sp>
-        <p:nvSpPr>
-          <p:cNvPr id="20" name="Rectangle 19"/>
+              <a:t>Kia</a:t>
+            </a:r>
+          </a:p>
+        </p:txBody>
+      </p:sp>
+      <p:sp>
+        <p:nvSpPr>
+          <p:cNvPr id="66" name="Rectangle 65"/>
           <p:cNvSpPr/>
           <p:nvPr/>
         </p:nvSpPr>
         <p:spPr>
           <a:xfrm>
-            <a:off x="6903720" y="2331720"/>
-            <a:ext cx="4617720" cy="841248"/>
-          </a:xfrm>
-          <a:prstGeom prst="rect">
-            <a:avLst/>
-          </a:prstGeom>
-          <a:solidFill>
-            <a:srgbClr val="F7F8F9"/>
-          </a:solidFill>
-          <a:ln w="6350">
-            <a:solidFill>
-              <a:srgbClr val="C8CCD2"/>
-            </a:solidFill>
-          </a:ln>
-          <a:effectLst/>
-        </p:spPr>
-        <p:style>
-          <a:lnRef idx="1">
-            <a:schemeClr val="accent1"/>
-          </a:lnRef>
-          <a:fillRef idx="3">
-            <a:schemeClr val="accent1"/>
-          </a:fillRef>
-          <a:effectRef idx="2">
-            <a:schemeClr val="accent1"/>
-          </a:effectRef>
-          <a:fontRef idx="minor">
-            <a:schemeClr val="lt1"/>
-          </a:fontRef>
-        </p:style>
-        <p:txBody>
-          <a:bodyPr rtlCol="0" anchor="ctr"/>
-          <a:lstStyle/>
-          <a:p>
-            <a:pPr algn="ctr"/>
-          </a:p>
-        </p:txBody>
-      </p:sp>
-      <p:sp>
-        <p:nvSpPr>
-          <p:cNvPr id="21" name="Rectangle 20"/>
-          <p:cNvSpPr/>
-          <p:nvPr/>
-        </p:nvSpPr>
-        <p:spPr>
-          <a:xfrm>
-            <a:off x="6903720" y="2331720"/>
-            <a:ext cx="73152" cy="841248"/>
+            <a:off x="2331720" y="5998464"/>
+            <a:ext cx="3423513" cy="219456"/>
           </a:xfrm>
           <a:prstGeom prst="rect">
             <a:avLst/>
@@ -13036,14 +15018,128 @@
       </p:sp>
       <p:sp>
         <p:nvSpPr>
-          <p:cNvPr id="22" name="TextBox 21"/>
+          <p:cNvPr id="67" name="Rectangle 66"/>
+          <p:cNvSpPr/>
+          <p:nvPr/>
+        </p:nvSpPr>
+        <p:spPr>
+          <a:xfrm>
+            <a:off x="5755233" y="5998464"/>
+            <a:ext cx="1331366" cy="219456"/>
+          </a:xfrm>
+          <a:prstGeom prst="rect">
+            <a:avLst/>
+          </a:prstGeom>
+          <a:noFill/>
+          <a:ln w="9525">
+            <a:solidFill>
+              <a:srgbClr val="C8CCD2"/>
+            </a:solidFill>
+          </a:ln>
+          <a:effectLst/>
+        </p:spPr>
+        <p:style>
+          <a:lnRef idx="1">
+            <a:schemeClr val="accent1"/>
+          </a:lnRef>
+          <a:fillRef idx="3">
+            <a:schemeClr val="accent1"/>
+          </a:fillRef>
+          <a:effectRef idx="2">
+            <a:schemeClr val="accent1"/>
+          </a:effectRef>
+          <a:fontRef idx="minor">
+            <a:schemeClr val="lt1"/>
+          </a:fontRef>
+        </p:style>
+        <p:txBody>
+          <a:bodyPr rtlCol="0" anchor="ctr"/>
+          <a:lstStyle/>
+          <a:p>
+            <a:pPr algn="ctr"/>
+          </a:p>
+        </p:txBody>
+      </p:sp>
+      <p:sp>
+        <p:nvSpPr>
+          <p:cNvPr id="68" name="TextBox 67"/>
           <p:cNvSpPr txBox="1"/>
           <p:nvPr/>
         </p:nvSpPr>
         <p:spPr>
           <a:xfrm>
-            <a:off x="7178040" y="2459736"/>
-            <a:ext cx="4160520" cy="658368"/>
+            <a:off x="2331720" y="5998464"/>
+            <a:ext cx="3313785" cy="219456"/>
+          </a:xfrm>
+          <a:prstGeom prst="rect">
+            <a:avLst/>
+          </a:prstGeom>
+          <a:noFill/>
+        </p:spPr>
+        <p:txBody>
+          <a:bodyPr wrap="square" anchor="ctr" lIns="0" rIns="0" tIns="0" bIns="0">
+            <a:spAutoFit/>
+          </a:bodyPr>
+          <a:lstStyle/>
+          <a:p>
+            <a:pPr algn="r"/>
+            <a:r>
+              <a:rPr sz="900" b="1" i="0">
+                <a:solidFill>
+                  <a:srgbClr val="FFFFFF"/>
+                </a:solidFill>
+                <a:latin typeface="Arial"/>
+              </a:rPr>
+              <a:t>72%</a:t>
+            </a:r>
+          </a:p>
+        </p:txBody>
+      </p:sp>
+      <p:sp>
+        <p:nvSpPr>
+          <p:cNvPr id="69" name="TextBox 68"/>
+          <p:cNvSpPr txBox="1"/>
+          <p:nvPr/>
+        </p:nvSpPr>
+        <p:spPr>
+          <a:xfrm>
+            <a:off x="5846673" y="5998464"/>
+            <a:ext cx="1331366" cy="219456"/>
+          </a:xfrm>
+          <a:prstGeom prst="rect">
+            <a:avLst/>
+          </a:prstGeom>
+          <a:noFill/>
+        </p:spPr>
+        <p:txBody>
+          <a:bodyPr wrap="square" anchor="ctr" lIns="0" rIns="0" tIns="0" bIns="0">
+            <a:spAutoFit/>
+          </a:bodyPr>
+          <a:lstStyle/>
+          <a:p>
+            <a:pPr algn="l"/>
+            <a:r>
+              <a:rPr sz="900" b="0" i="0">
+                <a:solidFill>
+                  <a:srgbClr val="868B94"/>
+                </a:solidFill>
+                <a:latin typeface="Arial"/>
+              </a:rPr>
+              <a:t>28%</a:t>
+            </a:r>
+          </a:p>
+        </p:txBody>
+      </p:sp>
+      <p:sp>
+        <p:nvSpPr>
+          <p:cNvPr id="70" name="TextBox 69"/>
+          <p:cNvSpPr txBox="1"/>
+          <p:nvPr/>
+        </p:nvSpPr>
+        <p:spPr>
+          <a:xfrm>
+            <a:off x="685800" y="6419088"/>
+            <a:ext cx="8229600" cy="274320"/>
           </a:xfrm>
           <a:prstGeom prst="rect">
             <a:avLst/>
@@ -13056,151 +15152,29 @@
           </a:bodyPr>
           <a:lstStyle/>
           <a:p>
-            <a:pPr algn="l">
-              <a:spcAft>
-                <a:spcPts val="200"/>
-              </a:spcAft>
-            </a:pPr>
-            <a:r>
-              <a:rPr sz="1200" b="1" i="0" spc="150">
-                <a:solidFill>
-                  <a:srgbClr val="1B2A4A"/>
+            <a:pPr algn="l"/>
+            <a:r>
+              <a:rPr sz="750" b="0" i="0" spc="30">
+                <a:solidFill>
+                  <a:srgbClr val="C8CCD2"/>
                 </a:solidFill>
                 <a:latin typeface="Arial"/>
               </a:rPr>
-              <a:t>CHRYSLER</a:t>
-            </a:r>
-          </a:p>
-          <a:p>
-            <a:pPr algn="l">
-              <a:spcAft>
-                <a:spcPts val="200"/>
-              </a:spcAft>
-            </a:pPr>
-            <a:r>
-              <a:rPr sz="1250" b="1" i="0">
-                <a:solidFill>
-                  <a:srgbClr val="1A1A1C"/>
-                </a:solidFill>
-                <a:latin typeface="Arial"/>
-              </a:rPr>
-              <a:t>People-first design</a:t>
-            </a:r>
-          </a:p>
-          <a:p>
-            <a:pPr algn="l"/>
-            <a:r>
-              <a:rPr sz="950" b="0" i="0">
-                <a:solidFill>
-                  <a:srgbClr val="868B94"/>
-                </a:solidFill>
-                <a:latin typeface="Arial"/>
-              </a:rPr>
-              <a:t>Practical · Forward-thinking · Human-centered</a:t>
-            </a:r>
-          </a:p>
-        </p:txBody>
-      </p:sp>
-      <p:sp>
-        <p:nvSpPr>
-          <p:cNvPr id="23" name="Rectangle 22"/>
-          <p:cNvSpPr/>
-          <p:nvPr/>
-        </p:nvSpPr>
-        <p:spPr>
-          <a:xfrm>
-            <a:off x="6903720" y="3282696"/>
-            <a:ext cx="4617720" cy="841248"/>
-          </a:xfrm>
-          <a:prstGeom prst="rect">
-            <a:avLst/>
-          </a:prstGeom>
-          <a:solidFill>
-            <a:srgbClr val="F7F8F9"/>
-          </a:solidFill>
-          <a:ln w="6350">
-            <a:solidFill>
-              <a:srgbClr val="C8CCD2"/>
-            </a:solidFill>
-          </a:ln>
-          <a:effectLst/>
-        </p:spPr>
-        <p:style>
-          <a:lnRef idx="1">
-            <a:schemeClr val="accent1"/>
-          </a:lnRef>
-          <a:fillRef idx="3">
-            <a:schemeClr val="accent1"/>
-          </a:fillRef>
-          <a:effectRef idx="2">
-            <a:schemeClr val="accent1"/>
-          </a:effectRef>
-          <a:fontRef idx="minor">
-            <a:schemeClr val="lt1"/>
-          </a:fontRef>
-        </p:style>
-        <p:txBody>
-          <a:bodyPr rtlCol="0" anchor="ctr"/>
-          <a:lstStyle/>
-          <a:p>
-            <a:pPr algn="ctr"/>
-          </a:p>
-        </p:txBody>
-      </p:sp>
-      <p:sp>
-        <p:nvSpPr>
-          <p:cNvPr id="24" name="Rectangle 23"/>
-          <p:cNvSpPr/>
-          <p:nvPr/>
-        </p:nvSpPr>
-        <p:spPr>
-          <a:xfrm>
-            <a:off x="6903720" y="3282696"/>
-            <a:ext cx="73152" cy="841248"/>
-          </a:xfrm>
-          <a:prstGeom prst="rect">
-            <a:avLst/>
-          </a:prstGeom>
-          <a:solidFill>
-            <a:srgbClr val="C41230"/>
-          </a:solidFill>
-          <a:ln>
-            <a:noFill/>
-          </a:ln>
-          <a:effectLst/>
-        </p:spPr>
-        <p:style>
-          <a:lnRef idx="1">
-            <a:schemeClr val="accent1"/>
-          </a:lnRef>
-          <a:fillRef idx="3">
-            <a:schemeClr val="accent1"/>
-          </a:fillRef>
-          <a:effectRef idx="2">
-            <a:schemeClr val="accent1"/>
-          </a:effectRef>
-          <a:fontRef idx="minor">
-            <a:schemeClr val="lt1"/>
-          </a:fontRef>
-        </p:style>
-        <p:txBody>
-          <a:bodyPr rtlCol="0" anchor="ctr"/>
-          <a:lstStyle/>
-          <a:p>
-            <a:pPr algn="ctr"/>
-          </a:p>
-        </p:txBody>
-      </p:sp>
-      <p:sp>
-        <p:nvSpPr>
-          <p:cNvPr id="25" name="TextBox 24"/>
+              <a:t>Sources: Segmentation Survey 2024; Hyundai/Kia: NVCS Oct ’23–Mar ’25</a:t>
+            </a:r>
+          </a:p>
+        </p:txBody>
+      </p:sp>
+      <p:sp>
+        <p:nvSpPr>
+          <p:cNvPr id="71" name="TextBox 70"/>
           <p:cNvSpPr txBox="1"/>
           <p:nvPr/>
         </p:nvSpPr>
         <p:spPr>
           <a:xfrm>
-            <a:off x="7178040" y="3410712"/>
-            <a:ext cx="4160520" cy="658368"/>
+            <a:off x="640080" y="6437376"/>
+            <a:ext cx="7315200" cy="274320"/>
           </a:xfrm>
           <a:prstGeom prst="rect">
             <a:avLst/>
@@ -13213,151 +15187,29 @@
           </a:bodyPr>
           <a:lstStyle/>
           <a:p>
-            <a:pPr algn="l">
-              <a:spcAft>
-                <a:spcPts val="200"/>
-              </a:spcAft>
-            </a:pPr>
-            <a:r>
-              <a:rPr sz="1200" b="1" i="0" spc="150">
-                <a:solidFill>
-                  <a:srgbClr val="C41230"/>
+            <a:pPr algn="l"/>
+            <a:r>
+              <a:rPr sz="800" b="0" i="0" spc="150">
+                <a:solidFill>
+                  <a:srgbClr val="868B94"/>
                 </a:solidFill>
                 <a:latin typeface="Arial"/>
               </a:rPr>
-              <a:t>DODGE</a:t>
-            </a:r>
-          </a:p>
-          <a:p>
-            <a:pPr algn="l">
-              <a:spcAft>
-                <a:spcPts val="200"/>
-              </a:spcAft>
-            </a:pPr>
-            <a:r>
-              <a:rPr sz="1250" b="1" i="0">
-                <a:solidFill>
-                  <a:srgbClr val="1A1A1C"/>
-                </a:solidFill>
-                <a:latin typeface="Arial"/>
-              </a:rPr>
-              <a:t>Performance &amp; emotion</a:t>
-            </a:r>
-          </a:p>
-          <a:p>
-            <a:pPr algn="l"/>
-            <a:r>
-              <a:rPr sz="950" b="0" i="0">
-                <a:solidFill>
-                  <a:srgbClr val="868B94"/>
-                </a:solidFill>
-                <a:latin typeface="Arial"/>
-              </a:rPr>
-              <a:t>Adrenaline · Bold · Free-spirited</a:t>
-            </a:r>
-          </a:p>
-        </p:txBody>
-      </p:sp>
-      <p:sp>
-        <p:nvSpPr>
-          <p:cNvPr id="26" name="Rectangle 25"/>
-          <p:cNvSpPr/>
-          <p:nvPr/>
-        </p:nvSpPr>
-        <p:spPr>
-          <a:xfrm>
-            <a:off x="6903720" y="4233672"/>
-            <a:ext cx="4617720" cy="841248"/>
-          </a:xfrm>
-          <a:prstGeom prst="rect">
-            <a:avLst/>
-          </a:prstGeom>
-          <a:solidFill>
-            <a:srgbClr val="F7F8F9"/>
-          </a:solidFill>
-          <a:ln w="6350">
-            <a:solidFill>
-              <a:srgbClr val="C8CCD2"/>
-            </a:solidFill>
-          </a:ln>
-          <a:effectLst/>
-        </p:spPr>
-        <p:style>
-          <a:lnRef idx="1">
-            <a:schemeClr val="accent1"/>
-          </a:lnRef>
-          <a:fillRef idx="3">
-            <a:schemeClr val="accent1"/>
-          </a:fillRef>
-          <a:effectRef idx="2">
-            <a:schemeClr val="accent1"/>
-          </a:effectRef>
-          <a:fontRef idx="minor">
-            <a:schemeClr val="lt1"/>
-          </a:fontRef>
-        </p:style>
-        <p:txBody>
-          <a:bodyPr rtlCol="0" anchor="ctr"/>
-          <a:lstStyle/>
-          <a:p>
-            <a:pPr algn="ctr"/>
-          </a:p>
-        </p:txBody>
-      </p:sp>
-      <p:sp>
-        <p:nvSpPr>
-          <p:cNvPr id="27" name="Rectangle 26"/>
-          <p:cNvSpPr/>
-          <p:nvPr/>
-        </p:nvSpPr>
-        <p:spPr>
-          <a:xfrm>
-            <a:off x="6903720" y="4233672"/>
-            <a:ext cx="73152" cy="841248"/>
-          </a:xfrm>
-          <a:prstGeom prst="rect">
-            <a:avLst/>
-          </a:prstGeom>
-          <a:solidFill>
-            <a:srgbClr val="3E4A33"/>
-          </a:solidFill>
-          <a:ln>
-            <a:noFill/>
-          </a:ln>
-          <a:effectLst/>
-        </p:spPr>
-        <p:style>
-          <a:lnRef idx="1">
-            <a:schemeClr val="accent1"/>
-          </a:lnRef>
-          <a:fillRef idx="3">
-            <a:schemeClr val="accent1"/>
-          </a:fillRef>
-          <a:effectRef idx="2">
-            <a:schemeClr val="accent1"/>
-          </a:effectRef>
-          <a:fontRef idx="minor">
-            <a:schemeClr val="lt1"/>
-          </a:fontRef>
-        </p:style>
-        <p:txBody>
-          <a:bodyPr rtlCol="0" anchor="ctr"/>
-          <a:lstStyle/>
-          <a:p>
-            <a:pPr algn="ctr"/>
-          </a:p>
-        </p:txBody>
-      </p:sp>
-      <p:sp>
-        <p:nvSpPr>
-          <p:cNvPr id="28" name="TextBox 27"/>
+              <a:t>CHRYSLER  ·  BRAND DESIGN VISION</a:t>
+            </a:r>
+          </a:p>
+        </p:txBody>
+      </p:sp>
+      <p:sp>
+        <p:nvSpPr>
+          <p:cNvPr id="72" name="TextBox 71"/>
           <p:cNvSpPr txBox="1"/>
           <p:nvPr/>
         </p:nvSpPr>
         <p:spPr>
           <a:xfrm>
-            <a:off x="7178040" y="4361688"/>
-            <a:ext cx="4160520" cy="658368"/>
+            <a:off x="10607040" y="6437376"/>
+            <a:ext cx="914400" cy="274320"/>
           </a:xfrm>
           <a:prstGeom prst="rect">
             <a:avLst/>
@@ -13370,300 +15222,6 @@
           </a:bodyPr>
           <a:lstStyle/>
           <a:p>
-            <a:pPr algn="l">
-              <a:spcAft>
-                <a:spcPts val="200"/>
-              </a:spcAft>
-            </a:pPr>
-            <a:r>
-              <a:rPr sz="1200" b="1" i="0" spc="150">
-                <a:solidFill>
-                  <a:srgbClr val="3E4A33"/>
-                </a:solidFill>
-                <a:latin typeface="Arial"/>
-              </a:rPr>
-              <a:t>JEEP</a:t>
-            </a:r>
-          </a:p>
-          <a:p>
-            <a:pPr algn="l">
-              <a:spcAft>
-                <a:spcPts val="200"/>
-              </a:spcAft>
-            </a:pPr>
-            <a:r>
-              <a:rPr sz="1250" b="1" i="0">
-                <a:solidFill>
-                  <a:srgbClr val="1A1A1C"/>
-                </a:solidFill>
-                <a:latin typeface="Arial"/>
-              </a:rPr>
-              <a:t>Authentic adventure</a:t>
-            </a:r>
-          </a:p>
-          <a:p>
-            <a:pPr algn="l"/>
-            <a:r>
-              <a:rPr sz="950" b="0" i="0">
-                <a:solidFill>
-                  <a:srgbClr val="868B94"/>
-                </a:solidFill>
-                <a:latin typeface="Arial"/>
-              </a:rPr>
-              <a:t>Rugged · Capable · All-terrain</a:t>
-            </a:r>
-          </a:p>
-        </p:txBody>
-      </p:sp>
-      <p:sp>
-        <p:nvSpPr>
-          <p:cNvPr id="29" name="Rectangle 28"/>
-          <p:cNvSpPr/>
-          <p:nvPr/>
-        </p:nvSpPr>
-        <p:spPr>
-          <a:xfrm>
-            <a:off x="6903720" y="5184648"/>
-            <a:ext cx="4617720" cy="841248"/>
-          </a:xfrm>
-          <a:prstGeom prst="rect">
-            <a:avLst/>
-          </a:prstGeom>
-          <a:solidFill>
-            <a:srgbClr val="F7F8F9"/>
-          </a:solidFill>
-          <a:ln w="6350">
-            <a:solidFill>
-              <a:srgbClr val="C8CCD2"/>
-            </a:solidFill>
-          </a:ln>
-          <a:effectLst/>
-        </p:spPr>
-        <p:style>
-          <a:lnRef idx="1">
-            <a:schemeClr val="accent1"/>
-          </a:lnRef>
-          <a:fillRef idx="3">
-            <a:schemeClr val="accent1"/>
-          </a:fillRef>
-          <a:effectRef idx="2">
-            <a:schemeClr val="accent1"/>
-          </a:effectRef>
-          <a:fontRef idx="minor">
-            <a:schemeClr val="lt1"/>
-          </a:fontRef>
-        </p:style>
-        <p:txBody>
-          <a:bodyPr rtlCol="0" anchor="ctr"/>
-          <a:lstStyle/>
-          <a:p>
-            <a:pPr algn="ctr"/>
-          </a:p>
-        </p:txBody>
-      </p:sp>
-      <p:sp>
-        <p:nvSpPr>
-          <p:cNvPr id="30" name="Rectangle 29"/>
-          <p:cNvSpPr/>
-          <p:nvPr/>
-        </p:nvSpPr>
-        <p:spPr>
-          <a:xfrm>
-            <a:off x="6903720" y="5184648"/>
-            <a:ext cx="73152" cy="841248"/>
-          </a:xfrm>
-          <a:prstGeom prst="rect">
-            <a:avLst/>
-          </a:prstGeom>
-          <a:solidFill>
-            <a:srgbClr val="6E747C"/>
-          </a:solidFill>
-          <a:ln>
-            <a:noFill/>
-          </a:ln>
-          <a:effectLst/>
-        </p:spPr>
-        <p:style>
-          <a:lnRef idx="1">
-            <a:schemeClr val="accent1"/>
-          </a:lnRef>
-          <a:fillRef idx="3">
-            <a:schemeClr val="accent1"/>
-          </a:fillRef>
-          <a:effectRef idx="2">
-            <a:schemeClr val="accent1"/>
-          </a:effectRef>
-          <a:fontRef idx="minor">
-            <a:schemeClr val="lt1"/>
-          </a:fontRef>
-        </p:style>
-        <p:txBody>
-          <a:bodyPr rtlCol="0" anchor="ctr"/>
-          <a:lstStyle/>
-          <a:p>
-            <a:pPr algn="ctr"/>
-          </a:p>
-        </p:txBody>
-      </p:sp>
-      <p:sp>
-        <p:nvSpPr>
-          <p:cNvPr id="31" name="TextBox 30"/>
-          <p:cNvSpPr txBox="1"/>
-          <p:nvPr/>
-        </p:nvSpPr>
-        <p:spPr>
-          <a:xfrm>
-            <a:off x="7178040" y="5312664"/>
-            <a:ext cx="4160520" cy="658368"/>
-          </a:xfrm>
-          <a:prstGeom prst="rect">
-            <a:avLst/>
-          </a:prstGeom>
-          <a:noFill/>
-        </p:spPr>
-        <p:txBody>
-          <a:bodyPr wrap="square" anchor="t" lIns="0" rIns="0" tIns="0" bIns="0">
-            <a:spAutoFit/>
-          </a:bodyPr>
-          <a:lstStyle/>
-          <a:p>
-            <a:pPr algn="l">
-              <a:spcAft>
-                <a:spcPts val="200"/>
-              </a:spcAft>
-            </a:pPr>
-            <a:r>
-              <a:rPr sz="1200" b="1" i="0" spc="150">
-                <a:solidFill>
-                  <a:srgbClr val="6E747C"/>
-                </a:solidFill>
-                <a:latin typeface="Arial"/>
-              </a:rPr>
-              <a:t>RAM</a:t>
-            </a:r>
-          </a:p>
-          <a:p>
-            <a:pPr algn="l">
-              <a:spcAft>
-                <a:spcPts val="200"/>
-              </a:spcAft>
-            </a:pPr>
-            <a:r>
-              <a:rPr sz="1250" b="1" i="0">
-                <a:solidFill>
-                  <a:srgbClr val="1A1A1C"/>
-                </a:solidFill>
-                <a:latin typeface="Arial"/>
-              </a:rPr>
-              <a:t>Hard-working capability</a:t>
-            </a:r>
-          </a:p>
-          <a:p>
-            <a:pPr algn="l"/>
-            <a:r>
-              <a:rPr sz="950" b="0" i="0">
-                <a:solidFill>
-                  <a:srgbClr val="868B94"/>
-                </a:solidFill>
-                <a:latin typeface="Arial"/>
-              </a:rPr>
-              <a:t>Confident · Capable · Committed</a:t>
-            </a:r>
-          </a:p>
-        </p:txBody>
-      </p:sp>
-      <p:sp>
-        <p:nvSpPr>
-          <p:cNvPr id="32" name="TextBox 31"/>
-          <p:cNvSpPr txBox="1"/>
-          <p:nvPr/>
-        </p:nvSpPr>
-        <p:spPr>
-          <a:xfrm>
-            <a:off x="685800" y="6400800"/>
-            <a:ext cx="7315200" cy="274320"/>
-          </a:xfrm>
-          <a:prstGeom prst="rect">
-            <a:avLst/>
-          </a:prstGeom>
-          <a:noFill/>
-        </p:spPr>
-        <p:txBody>
-          <a:bodyPr wrap="square" anchor="t" lIns="0" rIns="0" tIns="0" bIns="0">
-            <a:spAutoFit/>
-          </a:bodyPr>
-          <a:lstStyle/>
-          <a:p>
-            <a:pPr algn="l"/>
-            <a:r>
-              <a:rPr sz="750" b="0" i="0" spc="50">
-                <a:solidFill>
-                  <a:srgbClr val="C8CCD2"/>
-                </a:solidFill>
-                <a:latin typeface="Arial"/>
-              </a:rPr>
-              <a:t>Source: Stellantis Segmentation Survey 2024</a:t>
-            </a:r>
-          </a:p>
-        </p:txBody>
-      </p:sp>
-      <p:sp>
-        <p:nvSpPr>
-          <p:cNvPr id="33" name="TextBox 32"/>
-          <p:cNvSpPr txBox="1"/>
-          <p:nvPr/>
-        </p:nvSpPr>
-        <p:spPr>
-          <a:xfrm>
-            <a:off x="640080" y="6437376"/>
-            <a:ext cx="7315200" cy="274320"/>
-          </a:xfrm>
-          <a:prstGeom prst="rect">
-            <a:avLst/>
-          </a:prstGeom>
-          <a:noFill/>
-        </p:spPr>
-        <p:txBody>
-          <a:bodyPr wrap="square" anchor="t" lIns="0" rIns="0" tIns="0" bIns="0">
-            <a:spAutoFit/>
-          </a:bodyPr>
-          <a:lstStyle/>
-          <a:p>
-            <a:pPr algn="l"/>
-            <a:r>
-              <a:rPr sz="800" b="0" i="0" spc="150">
-                <a:solidFill>
-                  <a:srgbClr val="868B94"/>
-                </a:solidFill>
-                <a:latin typeface="Arial"/>
-              </a:rPr>
-              <a:t>CHRYSLER  ·  BRAND DESIGN VISION</a:t>
-            </a:r>
-          </a:p>
-        </p:txBody>
-      </p:sp>
-      <p:sp>
-        <p:nvSpPr>
-          <p:cNvPr id="34" name="TextBox 33"/>
-          <p:cNvSpPr txBox="1"/>
-          <p:nvPr/>
-        </p:nvSpPr>
-        <p:spPr>
-          <a:xfrm>
-            <a:off x="10607040" y="6437376"/>
-            <a:ext cx="914400" cy="274320"/>
-          </a:xfrm>
-          <a:prstGeom prst="rect">
-            <a:avLst/>
-          </a:prstGeom>
-          <a:noFill/>
-        </p:spPr>
-        <p:txBody>
-          <a:bodyPr wrap="square" anchor="t" lIns="0" rIns="0" tIns="0" bIns="0">
-            <a:spAutoFit/>
-          </a:bodyPr>
-          <a:lstStyle/>
-          <a:p>
             <a:pPr algn="r"/>
             <a:r>
               <a:rPr sz="800" b="0" i="0" spc="150">
@@ -13679,7 +15237,7 @@
       </p:sp>
       <p:sp>
         <p:nvSpPr>
-          <p:cNvPr id="35" name="TextBox 34"/>
+          <p:cNvPr id="73" name="TextBox 72"/>
           <p:cNvSpPr txBox="1"/>
           <p:nvPr/>
         </p:nvSpPr>
